--- a/ai101/slides/week-04.pptx
+++ b/ai101/slides/week-04.pptx
@@ -12,6 +12,10 @@
     <p:sldId id="260" r:id="rId11"/>
     <p:sldId id="261" r:id="rId12"/>
     <p:sldId id="262" r:id="rId13"/>
+    <p:sldId id="263" r:id="rId14"/>
+    <p:sldId id="264" r:id="rId15"/>
+    <p:sldId id="265" r:id="rId16"/>
+    <p:sldId id="266" r:id="rId17"/>
   </p:sldIdLst>
   <p:sldSz cx="12191695" cy="6858000" type="screen4x3"/>
   <p:notesSz cx="6858000" cy="9144000"/>
@@ -3166,6 +3170,450 @@
 </p:sld>
 </file>
 
+<file path=ppt/slides/slide10.xml><?xml version="1.0" encoding="utf-8"?>
+<p:sld xmlns:a="http://schemas.openxmlformats.org/drawingml/2006/main" xmlns:p="http://schemas.openxmlformats.org/presentationml/2006/main" xmlns:r="http://schemas.openxmlformats.org/officeDocument/2006/relationships">
+  <p:cSld>
+    <p:bg>
+      <p:bgPr>
+        <a:solidFill>
+          <a:srgbClr val="102127"/>
+        </a:solidFill>
+        <a:effectLst/>
+      </p:bgPr>
+    </p:bg>
+    <p:spTree>
+      <p:nvGrpSpPr>
+        <p:cNvPr id="1" name=""/>
+        <p:cNvGrpSpPr/>
+        <p:nvPr/>
+      </p:nvGrpSpPr>
+      <p:grpSpPr/>
+      <p:sp>
+        <p:nvSpPr>
+          <p:cNvPr id="2" name="TextBox 1"/>
+          <p:cNvSpPr txBox="1"/>
+          <p:nvPr/>
+        </p:nvSpPr>
+        <p:spPr>
+          <a:xfrm>
+            <a:off x="502920" y="274320"/>
+            <a:ext cx="11155680" cy="731520"/>
+          </a:xfrm>
+          <a:prstGeom prst="rect">
+            <a:avLst/>
+          </a:prstGeom>
+          <a:noFill/>
+        </p:spPr>
+        <p:txBody>
+          <a:bodyPr wrap="none">
+            <a:spAutoFit/>
+          </a:bodyPr>
+          <a:lstStyle/>
+          <a:p>
+            <a:r>
+              <a:rPr sz="2600" b="1">
+                <a:solidFill>
+                  <a:srgbClr val="01AEFD"/>
+                </a:solidFill>
+              </a:rPr>
+              <a:t>Type this into script.js  (2 of 2)</a:t>
+            </a:r>
+          </a:p>
+        </p:txBody>
+      </p:sp>
+      <p:sp>
+        <p:nvSpPr>
+          <p:cNvPr id="3" name="TextBox 2"/>
+          <p:cNvSpPr txBox="1"/>
+          <p:nvPr/>
+        </p:nvSpPr>
+        <p:spPr>
+          <a:xfrm>
+            <a:off x="502920" y="1051560"/>
+            <a:ext cx="11155680" cy="5394960"/>
+          </a:xfrm>
+          <a:prstGeom prst="rect">
+            <a:avLst/>
+          </a:prstGeom>
+          <a:noFill/>
+        </p:spPr>
+        <p:txBody>
+          <a:bodyPr wrap="none">
+            <a:spAutoFit/>
+          </a:bodyPr>
+          <a:lstStyle/>
+          <a:p>
+            <a:pPr>
+              <a:spcAft>
+                <a:spcPts val="0"/>
+              </a:spcAft>
+            </a:pPr>
+            <a:r>
+              <a:rPr sz="1700">
+                <a:solidFill>
+                  <a:srgbClr val="6D8C97"/>
+                </a:solidFill>
+                <a:latin typeface="Consolas"/>
+              </a:rPr>
+              <a:t>  21  </a:t>
+            </a:r>
+            <a:r>
+              <a:rPr sz="1700">
+                <a:solidFill>
+                  <a:srgbClr val="DCECEF"/>
+                </a:solidFill>
+                <a:latin typeface="Consolas"/>
+              </a:rPr>
+              <a:t> </a:t>
+            </a:r>
+          </a:p>
+          <a:p>
+            <a:pPr>
+              <a:spcAft>
+                <a:spcPts val="0"/>
+              </a:spcAft>
+            </a:pPr>
+            <a:r>
+              <a:rPr sz="1700">
+                <a:solidFill>
+                  <a:srgbClr val="6D8C97"/>
+                </a:solidFill>
+                <a:latin typeface="Consolas"/>
+              </a:rPr>
+              <a:t>  22  </a:t>
+            </a:r>
+            <a:r>
+              <a:rPr sz="1700">
+                <a:solidFill>
+                  <a:srgbClr val="DCECEF"/>
+                </a:solidFill>
+                <a:latin typeface="Consolas"/>
+              </a:rPr>
+              <a:t>// The smallest useful request: what models does this server have?</a:t>
+            </a:r>
+          </a:p>
+          <a:p>
+            <a:pPr>
+              <a:spcAft>
+                <a:spcPts val="0"/>
+              </a:spcAft>
+            </a:pPr>
+            <a:r>
+              <a:rPr sz="1700">
+                <a:solidFill>
+                  <a:srgbClr val="6D8C97"/>
+                </a:solidFill>
+                <a:latin typeface="Consolas"/>
+              </a:rPr>
+              <a:t>  23  </a:t>
+            </a:r>
+            <a:r>
+              <a:rPr sz="1700">
+                <a:solidFill>
+                  <a:srgbClr val="DCECEF"/>
+                </a:solidFill>
+                <a:latin typeface="Consolas"/>
+              </a:rPr>
+              <a:t>// 'async' means this function does something slow and can be waited for.</a:t>
+            </a:r>
+          </a:p>
+          <a:p>
+            <a:pPr>
+              <a:spcAft>
+                <a:spcPts val="0"/>
+              </a:spcAft>
+            </a:pPr>
+            <a:r>
+              <a:rPr sz="1700">
+                <a:solidFill>
+                  <a:srgbClr val="6D8C97"/>
+                </a:solidFill>
+                <a:latin typeface="Consolas"/>
+              </a:rPr>
+              <a:t>  24  </a:t>
+            </a:r>
+            <a:r>
+              <a:rPr sz="1700">
+                <a:solidFill>
+                  <a:srgbClr val="DCECEF"/>
+                </a:solidFill>
+                <a:latin typeface="Consolas"/>
+              </a:rPr>
+              <a:t>async function listModels() {</a:t>
+            </a:r>
+          </a:p>
+          <a:p>
+            <a:pPr>
+              <a:spcAft>
+                <a:spcPts val="0"/>
+              </a:spcAft>
+            </a:pPr>
+            <a:r>
+              <a:rPr sz="1700">
+                <a:solidFill>
+                  <a:srgbClr val="6D8C97"/>
+                </a:solidFill>
+                <a:latin typeface="Consolas"/>
+              </a:rPr>
+              <a:t>  25  </a:t>
+            </a:r>
+            <a:r>
+              <a:rPr sz="1700">
+                <a:solidFill>
+                  <a:srgbClr val="DCECEF"/>
+                </a:solidFill>
+                <a:latin typeface="Consolas"/>
+              </a:rPr>
+              <a:t>  const res = await fetch(AI_BASE + '/v1/models', {</a:t>
+            </a:r>
+          </a:p>
+          <a:p>
+            <a:pPr>
+              <a:spcAft>
+                <a:spcPts val="0"/>
+              </a:spcAft>
+            </a:pPr>
+            <a:r>
+              <a:rPr sz="1700">
+                <a:solidFill>
+                  <a:srgbClr val="6D8C97"/>
+                </a:solidFill>
+                <a:latin typeface="Consolas"/>
+              </a:rPr>
+              <a:t>  26  </a:t>
+            </a:r>
+            <a:r>
+              <a:rPr sz="1700">
+                <a:solidFill>
+                  <a:srgbClr val="DCECEF"/>
+                </a:solidFill>
+                <a:latin typeface="Consolas"/>
+              </a:rPr>
+              <a:t>    headers: { 'Authorization': 'Bearer ' + API_KEY }</a:t>
+            </a:r>
+          </a:p>
+          <a:p>
+            <a:pPr>
+              <a:spcAft>
+                <a:spcPts val="0"/>
+              </a:spcAft>
+            </a:pPr>
+            <a:r>
+              <a:rPr sz="1700">
+                <a:solidFill>
+                  <a:srgbClr val="6D8C97"/>
+                </a:solidFill>
+                <a:latin typeface="Consolas"/>
+              </a:rPr>
+              <a:t>  27  </a:t>
+            </a:r>
+            <a:r>
+              <a:rPr sz="1700">
+                <a:solidFill>
+                  <a:srgbClr val="DCECEF"/>
+                </a:solidFill>
+                <a:latin typeface="Consolas"/>
+              </a:rPr>
+              <a:t>  });</a:t>
+            </a:r>
+          </a:p>
+          <a:p>
+            <a:pPr>
+              <a:spcAft>
+                <a:spcPts val="0"/>
+              </a:spcAft>
+            </a:pPr>
+            <a:r>
+              <a:rPr sz="1700">
+                <a:solidFill>
+                  <a:srgbClr val="6D8C97"/>
+                </a:solidFill>
+                <a:latin typeface="Consolas"/>
+              </a:rPr>
+              <a:t>  28  </a:t>
+            </a:r>
+            <a:r>
+              <a:rPr sz="1700">
+                <a:solidFill>
+                  <a:srgbClr val="DCECEF"/>
+                </a:solidFill>
+                <a:latin typeface="Consolas"/>
+              </a:rPr>
+              <a:t>  const data = await res.json();   // the answer arrives as text; this reads it</a:t>
+            </a:r>
+          </a:p>
+          <a:p>
+            <a:pPr>
+              <a:spcAft>
+                <a:spcPts val="0"/>
+              </a:spcAft>
+            </a:pPr>
+            <a:r>
+              <a:rPr sz="1700">
+                <a:solidFill>
+                  <a:srgbClr val="6D8C97"/>
+                </a:solidFill>
+                <a:latin typeface="Consolas"/>
+              </a:rPr>
+              <a:t>  29  </a:t>
+            </a:r>
+            <a:r>
+              <a:rPr sz="1700">
+                <a:solidFill>
+                  <a:srgbClr val="DCECEF"/>
+                </a:solidFill>
+                <a:latin typeface="Consolas"/>
+              </a:rPr>
+              <a:t>  console.log('The server offers:', data.data);</a:t>
+            </a:r>
+          </a:p>
+          <a:p>
+            <a:pPr>
+              <a:spcAft>
+                <a:spcPts val="0"/>
+              </a:spcAft>
+            </a:pPr>
+            <a:r>
+              <a:rPr sz="1700">
+                <a:solidFill>
+                  <a:srgbClr val="6D8C97"/>
+                </a:solidFill>
+                <a:latin typeface="Consolas"/>
+              </a:rPr>
+              <a:t>  30  </a:t>
+            </a:r>
+            <a:r>
+              <a:rPr sz="1700">
+                <a:solidFill>
+                  <a:srgbClr val="DCECEF"/>
+                </a:solidFill>
+                <a:latin typeface="Consolas"/>
+              </a:rPr>
+              <a:t>}</a:t>
+            </a:r>
+          </a:p>
+        </p:txBody>
+      </p:sp>
+    </p:spTree>
+  </p:cSld>
+  <p:clrMapOvr>
+    <a:masterClrMapping/>
+  </p:clrMapOvr>
+</p:sld>
+</file>
+
+<file path=ppt/slides/slide11.xml><?xml version="1.0" encoding="utf-8"?>
+<p:sld xmlns:a="http://schemas.openxmlformats.org/drawingml/2006/main" xmlns:p="http://schemas.openxmlformats.org/presentationml/2006/main" xmlns:r="http://schemas.openxmlformats.org/officeDocument/2006/relationships">
+  <p:cSld>
+    <p:spTree>
+      <p:nvGrpSpPr>
+        <p:cNvPr id="1" name=""/>
+        <p:cNvGrpSpPr/>
+        <p:nvPr/>
+      </p:nvGrpSpPr>
+      <p:grpSpPr/>
+      <p:sp>
+        <p:nvSpPr>
+          <p:cNvPr id="2" name="Title 1"/>
+          <p:cNvSpPr>
+            <a:spLocks noGrp="1"/>
+          </p:cNvSpPr>
+          <p:nvPr>
+            <p:ph type="title"/>
+          </p:nvPr>
+        </p:nvSpPr>
+        <p:spPr/>
+        <p:txBody>
+          <a:bodyPr/>
+          <a:lstStyle/>
+          <a:p>
+            <a:r>
+              <a:rPr sz="3800" b="1">
+                <a:solidFill>
+                  <a:srgbClr val="1F2A37"/>
+                </a:solidFill>
+              </a:rPr>
+              <a:t>Your turn</a:t>
+            </a:r>
+          </a:p>
+        </p:txBody>
+      </p:sp>
+      <p:sp>
+        <p:nvSpPr>
+          <p:cNvPr id="3" name="TextBox 2"/>
+          <p:cNvSpPr txBox="1"/>
+          <p:nvPr/>
+        </p:nvSpPr>
+        <p:spPr>
+          <a:xfrm>
+            <a:off x="822960" y="1828800"/>
+            <a:ext cx="10515600" cy="4206240"/>
+          </a:xfrm>
+          <a:prstGeom prst="rect">
+            <a:avLst/>
+          </a:prstGeom>
+          <a:noFill/>
+        </p:spPr>
+        <p:txBody>
+          <a:bodyPr wrap="square">
+            <a:spAutoFit/>
+          </a:bodyPr>
+          <a:lstStyle/>
+          <a:p>
+            <a:pPr>
+              <a:spcAft>
+                <a:spcPts val="1400"/>
+              </a:spcAft>
+            </a:pPr>
+            <a:r>
+              <a:rPr sz="2800">
+                <a:solidFill>
+                  <a:srgbClr val="01AEFD"/>
+                </a:solidFill>
+              </a:rPr>
+              <a:t>Make it answer you</a:t>
+            </a:r>
+          </a:p>
+          <a:p>
+            <a:pPr>
+              <a:spcAft>
+                <a:spcPts val="1400"/>
+              </a:spcAft>
+            </a:pPr>
+            <a:r>
+              <a:rPr sz="2400">
+                <a:solidFill>
+                  <a:srgbClr val="1F2A37"/>
+                </a:solidFill>
+              </a:rPr>
+              <a:t>• Ask it something only you would ask</a:t>
+            </a:r>
+          </a:p>
+          <a:p>
+            <a:pPr>
+              <a:spcAft>
+                <a:spcPts val="1400"/>
+              </a:spcAft>
+            </a:pPr>
+            <a:r>
+              <a:rPr sz="2400">
+                <a:solidFill>
+                  <a:srgbClr val="1F2A37"/>
+                </a:solidFill>
+              </a:rPr>
+              <a:t>• Check whether the answer is actually true</a:t>
+            </a:r>
+          </a:p>
+        </p:txBody>
+      </p:sp>
+    </p:spTree>
+  </p:cSld>
+  <p:clrMapOvr>
+    <a:masterClrMapping/>
+  </p:clrMapOvr>
+</p:sld>
+</file>
+
 <file path=ppt/slides/slide2.xml><?xml version="1.0" encoding="utf-8"?>
 <p:sld xmlns:a="http://schemas.openxmlformats.org/drawingml/2006/main" xmlns:p="http://schemas.openxmlformats.org/presentationml/2006/main" xmlns:r="http://schemas.openxmlformats.org/officeDocument/2006/relationships">
   <p:cSld>
@@ -3505,6 +3953,14 @@
 <file path=ppt/slides/slide5.xml><?xml version="1.0" encoding="utf-8"?>
 <p:sld xmlns:a="http://schemas.openxmlformats.org/drawingml/2006/main" xmlns:p="http://schemas.openxmlformats.org/presentationml/2006/main" xmlns:r="http://schemas.openxmlformats.org/officeDocument/2006/relationships">
   <p:cSld>
+    <p:bg>
+      <p:bgPr>
+        <a:solidFill>
+          <a:srgbClr val="102127"/>
+        </a:solidFill>
+        <a:effectLst/>
+      </p:bgPr>
+    </p:bg>
     <p:spTree>
       <p:nvGrpSpPr>
         <p:cNvPr id="1" name=""/>
@@ -3514,40 +3970,14 @@
       <p:grpSpPr/>
       <p:sp>
         <p:nvSpPr>
-          <p:cNvPr id="2" name="Title 1"/>
-          <p:cNvSpPr>
-            <a:spLocks noGrp="1"/>
-          </p:cNvSpPr>
-          <p:nvPr>
-            <p:ph type="title"/>
-          </p:nvPr>
-        </p:nvSpPr>
-        <p:spPr/>
-        <p:txBody>
-          <a:bodyPr/>
-          <a:lstStyle/>
-          <a:p>
-            <a:r>
-              <a:rPr sz="3800" b="1">
-                <a:solidFill>
-                  <a:srgbClr val="1F2A37"/>
-                </a:solidFill>
-              </a:rPr>
-              <a:t>Where the answer hides</a:t>
-            </a:r>
-          </a:p>
-        </p:txBody>
-      </p:sp>
-      <p:sp>
-        <p:nvSpPr>
-          <p:cNvPr id="3" name="TextBox 2"/>
+          <p:cNvPr id="2" name="TextBox 1"/>
           <p:cNvSpPr txBox="1"/>
           <p:nvPr/>
         </p:nvSpPr>
         <p:spPr>
           <a:xfrm>
-            <a:off x="822960" y="1828800"/>
-            <a:ext cx="10515600" cy="4206240"/>
+            <a:off x="502920" y="274320"/>
+            <a:ext cx="11155680" cy="731520"/>
           </a:xfrm>
           <a:prstGeom prst="rect">
             <a:avLst/>
@@ -3555,68 +3985,416 @@
           <a:noFill/>
         </p:spPr>
         <p:txBody>
-          <a:bodyPr wrap="square">
+          <a:bodyPr wrap="none">
             <a:spAutoFit/>
           </a:bodyPr>
           <a:lstStyle/>
           <a:p>
-            <a:pPr>
-              <a:spcAft>
-                <a:spcPts val="1400"/>
-              </a:spcAft>
-            </a:pPr>
-            <a:r>
-              <a:rPr sz="2800">
+            <a:r>
+              <a:rPr sz="2600" b="1">
                 <a:solidFill>
                   <a:srgbClr val="01AEFD"/>
                 </a:solidFill>
               </a:rPr>
-              <a:t>data.choices[0].message.content</a:t>
-            </a:r>
-          </a:p>
-          <a:p>
-            <a:pPr>
-              <a:spcAft>
-                <a:spcPts val="1400"/>
-              </a:spcAft>
-            </a:pPr>
-            <a:r>
-              <a:rPr sz="2400">
-                <a:solidFill>
-                  <a:srgbClr val="1F2A37"/>
-                </a:solidFill>
-              </a:rPr>
-              <a:t>• choices - a list of answers (you get one)</a:t>
-            </a:r>
-          </a:p>
-          <a:p>
-            <a:pPr>
-              <a:spcAft>
-                <a:spcPts val="1400"/>
-              </a:spcAft>
-            </a:pPr>
-            <a:r>
-              <a:rPr sz="2400">
-                <a:solidFill>
-                  <a:srgbClr val="1F2A37"/>
-                </a:solidFill>
-              </a:rPr>
-              <a:t>• [0] - the first one</a:t>
-            </a:r>
-          </a:p>
-          <a:p>
-            <a:pPr>
-              <a:spcAft>
-                <a:spcPts val="1400"/>
-              </a:spcAft>
-            </a:pPr>
-            <a:r>
-              <a:rPr sz="2400">
-                <a:solidFill>
-                  <a:srgbClr val="1F2A37"/>
-                </a:solidFill>
-              </a:rPr>
-              <a:t>• message.content - the actual words</a:t>
+              <a:t>Type this into script.js  (1 of 2)</a:t>
+            </a:r>
+          </a:p>
+        </p:txBody>
+      </p:sp>
+      <p:sp>
+        <p:nvSpPr>
+          <p:cNvPr id="3" name="TextBox 2"/>
+          <p:cNvSpPr txBox="1"/>
+          <p:nvPr/>
+        </p:nvSpPr>
+        <p:spPr>
+          <a:xfrm>
+            <a:off x="502920" y="1051560"/>
+            <a:ext cx="11155680" cy="5394960"/>
+          </a:xfrm>
+          <a:prstGeom prst="rect">
+            <a:avLst/>
+          </a:prstGeom>
+          <a:noFill/>
+        </p:spPr>
+        <p:txBody>
+          <a:bodyPr wrap="none">
+            <a:spAutoFit/>
+          </a:bodyPr>
+          <a:lstStyle/>
+          <a:p>
+            <a:pPr>
+              <a:spcAft>
+                <a:spcPts val="0"/>
+              </a:spcAft>
+            </a:pPr>
+            <a:r>
+              <a:rPr sz="1400">
+                <a:solidFill>
+                  <a:srgbClr val="6D8C97"/>
+                </a:solidFill>
+                <a:latin typeface="Consolas"/>
+              </a:rPr>
+              <a:t>  31  </a:t>
+            </a:r>
+            <a:r>
+              <a:rPr sz="1400">
+                <a:solidFill>
+                  <a:srgbClr val="DCECEF"/>
+                </a:solidFill>
+                <a:latin typeface="Consolas"/>
+              </a:rPr>
+              <a:t> </a:t>
+            </a:r>
+          </a:p>
+          <a:p>
+            <a:pPr>
+              <a:spcAft>
+                <a:spcPts val="0"/>
+              </a:spcAft>
+            </a:pPr>
+            <a:r>
+              <a:rPr sz="1400">
+                <a:solidFill>
+                  <a:srgbClr val="6D8C97"/>
+                </a:solidFill>
+                <a:latin typeface="Consolas"/>
+              </a:rPr>
+              <a:t>  32  </a:t>
+            </a:r>
+            <a:r>
+              <a:rPr sz="1400">
+                <a:solidFill>
+                  <a:srgbClr val="7FE0A0"/>
+                </a:solidFill>
+                <a:latin typeface="Consolas"/>
+              </a:rPr>
+              <a:t>// Week 4: ask the AI a real question.</a:t>
+            </a:r>
+          </a:p>
+          <a:p>
+            <a:pPr>
+              <a:spcAft>
+                <a:spcPts val="0"/>
+              </a:spcAft>
+            </a:pPr>
+            <a:r>
+              <a:rPr sz="1400">
+                <a:solidFill>
+                  <a:srgbClr val="6D8C97"/>
+                </a:solidFill>
+                <a:latin typeface="Consolas"/>
+              </a:rPr>
+              <a:t>  33  </a:t>
+            </a:r>
+            <a:r>
+              <a:rPr sz="1400">
+                <a:solidFill>
+                  <a:srgbClr val="7FE0A0"/>
+                </a:solidFill>
+                <a:latin typeface="Consolas"/>
+              </a:rPr>
+              <a:t>// A chat request is a LIST of messages. Each one says who said it.</a:t>
+            </a:r>
+          </a:p>
+          <a:p>
+            <a:pPr>
+              <a:spcAft>
+                <a:spcPts val="0"/>
+              </a:spcAft>
+            </a:pPr>
+            <a:r>
+              <a:rPr sz="1400">
+                <a:solidFill>
+                  <a:srgbClr val="6D8C97"/>
+                </a:solidFill>
+                <a:latin typeface="Consolas"/>
+              </a:rPr>
+              <a:t>  34  </a:t>
+            </a:r>
+            <a:r>
+              <a:rPr sz="1400">
+                <a:solidFill>
+                  <a:srgbClr val="7FE0A0"/>
+                </a:solidFill>
+                <a:latin typeface="Consolas"/>
+              </a:rPr>
+              <a:t>async function askAI(question) {</a:t>
+            </a:r>
+          </a:p>
+          <a:p>
+            <a:pPr>
+              <a:spcAft>
+                <a:spcPts val="0"/>
+              </a:spcAft>
+            </a:pPr>
+            <a:r>
+              <a:rPr sz="1400">
+                <a:solidFill>
+                  <a:srgbClr val="6D8C97"/>
+                </a:solidFill>
+                <a:latin typeface="Consolas"/>
+              </a:rPr>
+              <a:t>  35  </a:t>
+            </a:r>
+            <a:r>
+              <a:rPr sz="1400">
+                <a:solidFill>
+                  <a:srgbClr val="7FE0A0"/>
+                </a:solidFill>
+                <a:latin typeface="Consolas"/>
+              </a:rPr>
+              <a:t>  const res = await fetch(AI_BASE + '/v1/chat/completions', {</a:t>
+            </a:r>
+          </a:p>
+          <a:p>
+            <a:pPr>
+              <a:spcAft>
+                <a:spcPts val="0"/>
+              </a:spcAft>
+            </a:pPr>
+            <a:r>
+              <a:rPr sz="1400">
+                <a:solidFill>
+                  <a:srgbClr val="6D8C97"/>
+                </a:solidFill>
+                <a:latin typeface="Consolas"/>
+              </a:rPr>
+              <a:t>  36  </a:t>
+            </a:r>
+            <a:r>
+              <a:rPr sz="1400">
+                <a:solidFill>
+                  <a:srgbClr val="7FE0A0"/>
+                </a:solidFill>
+                <a:latin typeface="Consolas"/>
+              </a:rPr>
+              <a:t>    method: 'POST',                       // POST = I am sending you something</a:t>
+            </a:r>
+          </a:p>
+          <a:p>
+            <a:pPr>
+              <a:spcAft>
+                <a:spcPts val="0"/>
+              </a:spcAft>
+            </a:pPr>
+            <a:r>
+              <a:rPr sz="1400">
+                <a:solidFill>
+                  <a:srgbClr val="6D8C97"/>
+                </a:solidFill>
+                <a:latin typeface="Consolas"/>
+              </a:rPr>
+              <a:t>  37  </a:t>
+            </a:r>
+            <a:r>
+              <a:rPr sz="1400">
+                <a:solidFill>
+                  <a:srgbClr val="7FE0A0"/>
+                </a:solidFill>
+                <a:latin typeface="Consolas"/>
+              </a:rPr>
+              <a:t>    headers: {</a:t>
+            </a:r>
+          </a:p>
+          <a:p>
+            <a:pPr>
+              <a:spcAft>
+                <a:spcPts val="0"/>
+              </a:spcAft>
+            </a:pPr>
+            <a:r>
+              <a:rPr sz="1400">
+                <a:solidFill>
+                  <a:srgbClr val="6D8C97"/>
+                </a:solidFill>
+                <a:latin typeface="Consolas"/>
+              </a:rPr>
+              <a:t>  38  </a:t>
+            </a:r>
+            <a:r>
+              <a:rPr sz="1400">
+                <a:solidFill>
+                  <a:srgbClr val="7FE0A0"/>
+                </a:solidFill>
+                <a:latin typeface="Consolas"/>
+              </a:rPr>
+              <a:t>      'Content-Type': 'application/json', // what I am sending is JSON</a:t>
+            </a:r>
+          </a:p>
+          <a:p>
+            <a:pPr>
+              <a:spcAft>
+                <a:spcPts val="0"/>
+              </a:spcAft>
+            </a:pPr>
+            <a:r>
+              <a:rPr sz="1400">
+                <a:solidFill>
+                  <a:srgbClr val="6D8C97"/>
+                </a:solidFill>
+                <a:latin typeface="Consolas"/>
+              </a:rPr>
+              <a:t>  39  </a:t>
+            </a:r>
+            <a:r>
+              <a:rPr sz="1400">
+                <a:solidFill>
+                  <a:srgbClr val="7FE0A0"/>
+                </a:solidFill>
+                <a:latin typeface="Consolas"/>
+              </a:rPr>
+              <a:t>      'Authorization': 'Bearer ' + API_KEY</a:t>
+            </a:r>
+          </a:p>
+          <a:p>
+            <a:pPr>
+              <a:spcAft>
+                <a:spcPts val="0"/>
+              </a:spcAft>
+            </a:pPr>
+            <a:r>
+              <a:rPr sz="1400">
+                <a:solidFill>
+                  <a:srgbClr val="6D8C97"/>
+                </a:solidFill>
+                <a:latin typeface="Consolas"/>
+              </a:rPr>
+              <a:t>  40  </a:t>
+            </a:r>
+            <a:r>
+              <a:rPr sz="1400">
+                <a:solidFill>
+                  <a:srgbClr val="7FE0A0"/>
+                </a:solidFill>
+                <a:latin typeface="Consolas"/>
+              </a:rPr>
+              <a:t>    },</a:t>
+            </a:r>
+          </a:p>
+          <a:p>
+            <a:pPr>
+              <a:spcAft>
+                <a:spcPts val="0"/>
+              </a:spcAft>
+            </a:pPr>
+            <a:r>
+              <a:rPr sz="1400">
+                <a:solidFill>
+                  <a:srgbClr val="6D8C97"/>
+                </a:solidFill>
+                <a:latin typeface="Consolas"/>
+              </a:rPr>
+              <a:t>  41  </a:t>
+            </a:r>
+            <a:r>
+              <a:rPr sz="1400">
+                <a:solidFill>
+                  <a:srgbClr val="7FE0A0"/>
+                </a:solidFill>
+                <a:latin typeface="Consolas"/>
+              </a:rPr>
+              <a:t>    body: JSON.stringify({</a:t>
+            </a:r>
+          </a:p>
+          <a:p>
+            <a:pPr>
+              <a:spcAft>
+                <a:spcPts val="0"/>
+              </a:spcAft>
+            </a:pPr>
+            <a:r>
+              <a:rPr sz="1400">
+                <a:solidFill>
+                  <a:srgbClr val="6D8C97"/>
+                </a:solidFill>
+                <a:latin typeface="Consolas"/>
+              </a:rPr>
+              <a:t>  42  </a:t>
+            </a:r>
+            <a:r>
+              <a:rPr sz="1400">
+                <a:solidFill>
+                  <a:srgbClr val="7FE0A0"/>
+                </a:solidFill>
+                <a:latin typeface="Consolas"/>
+              </a:rPr>
+              <a:t>      model: 'fast',</a:t>
+            </a:r>
+          </a:p>
+          <a:p>
+            <a:pPr>
+              <a:spcAft>
+                <a:spcPts val="0"/>
+              </a:spcAft>
+            </a:pPr>
+            <a:r>
+              <a:rPr sz="1400">
+                <a:solidFill>
+                  <a:srgbClr val="6D8C97"/>
+                </a:solidFill>
+                <a:latin typeface="Consolas"/>
+              </a:rPr>
+              <a:t>  43  </a:t>
+            </a:r>
+            <a:r>
+              <a:rPr sz="1400">
+                <a:solidFill>
+                  <a:srgbClr val="7FE0A0"/>
+                </a:solidFill>
+                <a:latin typeface="Consolas"/>
+              </a:rPr>
+              <a:t>      messages: [</a:t>
+            </a:r>
+          </a:p>
+          <a:p>
+            <a:pPr>
+              <a:spcAft>
+                <a:spcPts val="0"/>
+              </a:spcAft>
+            </a:pPr>
+            <a:r>
+              <a:rPr sz="1400">
+                <a:solidFill>
+                  <a:srgbClr val="6D8C97"/>
+                </a:solidFill>
+                <a:latin typeface="Consolas"/>
+              </a:rPr>
+              <a:t>  44  </a:t>
+            </a:r>
+            <a:r>
+              <a:rPr sz="1400">
+                <a:solidFill>
+                  <a:srgbClr val="7FE0A0"/>
+                </a:solidFill>
+                <a:latin typeface="Consolas"/>
+              </a:rPr>
+              <a:t>        { role: 'user', content: question }</a:t>
+            </a:r>
+          </a:p>
+          <a:p>
+            <a:pPr>
+              <a:spcAft>
+                <a:spcPts val="0"/>
+              </a:spcAft>
+            </a:pPr>
+            <a:r>
+              <a:rPr sz="1400">
+                <a:solidFill>
+                  <a:srgbClr val="6D8C97"/>
+                </a:solidFill>
+                <a:latin typeface="Consolas"/>
+              </a:rPr>
+              <a:t>  45  </a:t>
+            </a:r>
+            <a:r>
+              <a:rPr sz="1400">
+                <a:solidFill>
+                  <a:srgbClr val="7FE0A0"/>
+                </a:solidFill>
+                <a:latin typeface="Consolas"/>
+              </a:rPr>
+              <a:t>      ]</a:t>
             </a:r>
           </a:p>
         </p:txBody>
@@ -3632,6 +4410,14 @@
 <file path=ppt/slides/slide6.xml><?xml version="1.0" encoding="utf-8"?>
 <p:sld xmlns:a="http://schemas.openxmlformats.org/drawingml/2006/main" xmlns:p="http://schemas.openxmlformats.org/presentationml/2006/main" xmlns:r="http://schemas.openxmlformats.org/officeDocument/2006/relationships">
   <p:cSld>
+    <p:bg>
+      <p:bgPr>
+        <a:solidFill>
+          <a:srgbClr val="102127"/>
+        </a:solidFill>
+        <a:effectLst/>
+      </p:bgPr>
+    </p:bg>
     <p:spTree>
       <p:nvGrpSpPr>
         <p:cNvPr id="1" name=""/>
@@ -3641,40 +4427,14 @@
       <p:grpSpPr/>
       <p:sp>
         <p:nvSpPr>
-          <p:cNvPr id="2" name="Title 1"/>
-          <p:cNvSpPr>
-            <a:spLocks noGrp="1"/>
-          </p:cNvSpPr>
-          <p:nvPr>
-            <p:ph type="title"/>
-          </p:nvPr>
-        </p:nvSpPr>
-        <p:spPr/>
-        <p:txBody>
-          <a:bodyPr/>
-          <a:lstStyle/>
-          <a:p>
-            <a:r>
-              <a:rPr sz="3800" b="1">
-                <a:solidFill>
-                  <a:srgbClr val="1F2A37"/>
-                </a:solidFill>
-              </a:rPr>
-              <a:t>Slow things need await</a:t>
-            </a:r>
-          </a:p>
-        </p:txBody>
-      </p:sp>
-      <p:sp>
-        <p:nvSpPr>
-          <p:cNvPr id="3" name="TextBox 2"/>
+          <p:cNvPr id="2" name="TextBox 1"/>
           <p:cNvSpPr txBox="1"/>
           <p:nvPr/>
         </p:nvSpPr>
         <p:spPr>
           <a:xfrm>
-            <a:off x="822960" y="1828800"/>
-            <a:ext cx="10515600" cy="4206240"/>
+            <a:off x="502920" y="274320"/>
+            <a:ext cx="11155680" cy="731520"/>
           </a:xfrm>
           <a:prstGeom prst="rect">
             <a:avLst/>
@@ -3682,53 +4442,166 @@
           <a:noFill/>
         </p:spPr>
         <p:txBody>
-          <a:bodyPr wrap="square">
+          <a:bodyPr wrap="none">
             <a:spAutoFit/>
           </a:bodyPr>
           <a:lstStyle/>
           <a:p>
-            <a:pPr>
-              <a:spcAft>
-                <a:spcPts val="1400"/>
-              </a:spcAft>
-            </a:pPr>
-            <a:r>
-              <a:rPr sz="2400">
-                <a:solidFill>
-                  <a:srgbClr val="1F2A37"/>
-                </a:solidFill>
-              </a:rPr>
-              <a:t>• const reply = await askAI(text)</a:t>
-            </a:r>
-          </a:p>
-          <a:p>
-            <a:pPr>
-              <a:spcAft>
-                <a:spcPts val="1400"/>
-              </a:spcAft>
-            </a:pPr>
-            <a:r>
-              <a:rPr sz="2400">
-                <a:solidFill>
-                  <a:srgbClr val="1F2A37"/>
-                </a:solidFill>
-              </a:rPr>
-              <a:t>• The listener has to be async too</a:t>
-            </a:r>
-          </a:p>
-          <a:p>
-            <a:pPr>
-              <a:spcAft>
-                <a:spcPts val="1400"/>
-              </a:spcAft>
-            </a:pPr>
-            <a:r>
-              <a:rPr sz="2400">
-                <a:solidFill>
-                  <a:srgbClr val="1F2A37"/>
-                </a:solidFill>
-              </a:rPr>
-              <a:t>• Forget it and you get [object Promise]</a:t>
+            <a:r>
+              <a:rPr sz="2600" b="1">
+                <a:solidFill>
+                  <a:srgbClr val="01AEFD"/>
+                </a:solidFill>
+              </a:rPr>
+              <a:t>Type this into script.js  (2 of 2)</a:t>
+            </a:r>
+          </a:p>
+        </p:txBody>
+      </p:sp>
+      <p:sp>
+        <p:nvSpPr>
+          <p:cNvPr id="3" name="TextBox 2"/>
+          <p:cNvSpPr txBox="1"/>
+          <p:nvPr/>
+        </p:nvSpPr>
+        <p:spPr>
+          <a:xfrm>
+            <a:off x="502920" y="1051560"/>
+            <a:ext cx="11155680" cy="5394960"/>
+          </a:xfrm>
+          <a:prstGeom prst="rect">
+            <a:avLst/>
+          </a:prstGeom>
+          <a:noFill/>
+        </p:spPr>
+        <p:txBody>
+          <a:bodyPr wrap="none">
+            <a:spAutoFit/>
+          </a:bodyPr>
+          <a:lstStyle/>
+          <a:p>
+            <a:pPr>
+              <a:spcAft>
+                <a:spcPts val="0"/>
+              </a:spcAft>
+            </a:pPr>
+            <a:r>
+              <a:rPr sz="1700">
+                <a:solidFill>
+                  <a:srgbClr val="6D8C97"/>
+                </a:solidFill>
+                <a:latin typeface="Consolas"/>
+              </a:rPr>
+              <a:t>  46  </a:t>
+            </a:r>
+            <a:r>
+              <a:rPr sz="1700">
+                <a:solidFill>
+                  <a:srgbClr val="7FE0A0"/>
+                </a:solidFill>
+                <a:latin typeface="Consolas"/>
+              </a:rPr>
+              <a:t>    })</a:t>
+            </a:r>
+          </a:p>
+          <a:p>
+            <a:pPr>
+              <a:spcAft>
+                <a:spcPts val="0"/>
+              </a:spcAft>
+            </a:pPr>
+            <a:r>
+              <a:rPr sz="1700">
+                <a:solidFill>
+                  <a:srgbClr val="6D8C97"/>
+                </a:solidFill>
+                <a:latin typeface="Consolas"/>
+              </a:rPr>
+              <a:t>  47  </a:t>
+            </a:r>
+            <a:r>
+              <a:rPr sz="1700">
+                <a:solidFill>
+                  <a:srgbClr val="7FE0A0"/>
+                </a:solidFill>
+                <a:latin typeface="Consolas"/>
+              </a:rPr>
+              <a:t>  });</a:t>
+            </a:r>
+          </a:p>
+          <a:p>
+            <a:pPr>
+              <a:spcAft>
+                <a:spcPts val="0"/>
+              </a:spcAft>
+            </a:pPr>
+            <a:r>
+              <a:rPr sz="1700">
+                <a:solidFill>
+                  <a:srgbClr val="6D8C97"/>
+                </a:solidFill>
+                <a:latin typeface="Consolas"/>
+              </a:rPr>
+              <a:t>  48  </a:t>
+            </a:r>
+            <a:r>
+              <a:rPr sz="1700">
+                <a:solidFill>
+                  <a:srgbClr val="7FE0A0"/>
+                </a:solidFill>
+                <a:latin typeface="Consolas"/>
+              </a:rPr>
+              <a:t>  const data = await res.json();</a:t>
+            </a:r>
+          </a:p>
+          <a:p>
+            <a:pPr>
+              <a:spcAft>
+                <a:spcPts val="0"/>
+              </a:spcAft>
+            </a:pPr>
+            <a:r>
+              <a:rPr sz="1700">
+                <a:solidFill>
+                  <a:srgbClr val="6D8C97"/>
+                </a:solidFill>
+                <a:latin typeface="Consolas"/>
+              </a:rPr>
+              <a:t>  49  </a:t>
+            </a:r>
+            <a:r>
+              <a:rPr sz="1700">
+                <a:solidFill>
+                  <a:srgbClr val="7FE0A0"/>
+                </a:solidFill>
+                <a:latin typeface="Consolas"/>
+              </a:rPr>
+              <a:t>  return data.choices[0].message.content;</a:t>
+            </a:r>
+          </a:p>
+          <a:p>
+            <a:pPr>
+              <a:spcAft>
+                <a:spcPts val="0"/>
+              </a:spcAft>
+            </a:pPr>
+            <a:r>
+              <a:rPr sz="1700">
+                <a:solidFill>
+                  <a:srgbClr val="6D8C97"/>
+                </a:solidFill>
+                <a:latin typeface="Consolas"/>
+              </a:rPr>
+              <a:t>  50  </a:t>
+            </a:r>
+            <a:r>
+              <a:rPr sz="1700">
+                <a:solidFill>
+                  <a:srgbClr val="7FE0A0"/>
+                </a:solidFill>
+                <a:latin typeface="Consolas"/>
+              </a:rPr>
+              <a:t>}</a:t>
             </a:r>
           </a:p>
         </p:txBody>
@@ -3772,7 +4645,7 @@
                   <a:srgbClr val="1F2A37"/>
                 </a:solidFill>
               </a:rPr>
-              <a:t>Your turn</a:t>
+              <a:t>Where the answer hides</a:t>
             </a:r>
           </a:p>
         </p:txBody>
@@ -3810,7 +4683,7 @@
                   <a:srgbClr val="01AEFD"/>
                 </a:solidFill>
               </a:rPr>
-              <a:t>Make it answer you</a:t>
+              <a:t>data.choices[0].message.content</a:t>
             </a:r>
           </a:p>
           <a:p>
@@ -3825,7 +4698,7 @@
                   <a:srgbClr val="1F2A37"/>
                 </a:solidFill>
               </a:rPr>
-              <a:t>• Ask it something only you would ask</a:t>
+              <a:t>• choices - a list of answers (you get one)</a:t>
             </a:r>
           </a:p>
           <a:p>
@@ -3840,7 +4713,556 @@
                   <a:srgbClr val="1F2A37"/>
                 </a:solidFill>
               </a:rPr>
-              <a:t>• Check whether the answer is actually true</a:t>
+              <a:t>• [0] - the first one</a:t>
+            </a:r>
+          </a:p>
+          <a:p>
+            <a:pPr>
+              <a:spcAft>
+                <a:spcPts val="1400"/>
+              </a:spcAft>
+            </a:pPr>
+            <a:r>
+              <a:rPr sz="2400">
+                <a:solidFill>
+                  <a:srgbClr val="1F2A37"/>
+                </a:solidFill>
+              </a:rPr>
+              <a:t>• message.content - the actual words</a:t>
+            </a:r>
+          </a:p>
+        </p:txBody>
+      </p:sp>
+    </p:spTree>
+  </p:cSld>
+  <p:clrMapOvr>
+    <a:masterClrMapping/>
+  </p:clrMapOvr>
+</p:sld>
+</file>
+
+<file path=ppt/slides/slide8.xml><?xml version="1.0" encoding="utf-8"?>
+<p:sld xmlns:a="http://schemas.openxmlformats.org/drawingml/2006/main" xmlns:p="http://schemas.openxmlformats.org/presentationml/2006/main" xmlns:r="http://schemas.openxmlformats.org/officeDocument/2006/relationships">
+  <p:cSld>
+    <p:spTree>
+      <p:nvGrpSpPr>
+        <p:cNvPr id="1" name=""/>
+        <p:cNvGrpSpPr/>
+        <p:nvPr/>
+      </p:nvGrpSpPr>
+      <p:grpSpPr/>
+      <p:sp>
+        <p:nvSpPr>
+          <p:cNvPr id="2" name="Title 1"/>
+          <p:cNvSpPr>
+            <a:spLocks noGrp="1"/>
+          </p:cNvSpPr>
+          <p:nvPr>
+            <p:ph type="title"/>
+          </p:nvPr>
+        </p:nvSpPr>
+        <p:spPr/>
+        <p:txBody>
+          <a:bodyPr/>
+          <a:lstStyle/>
+          <a:p>
+            <a:r>
+              <a:rPr sz="3800" b="1">
+                <a:solidFill>
+                  <a:srgbClr val="1F2A37"/>
+                </a:solidFill>
+              </a:rPr>
+              <a:t>Slow things need await</a:t>
+            </a:r>
+          </a:p>
+        </p:txBody>
+      </p:sp>
+      <p:sp>
+        <p:nvSpPr>
+          <p:cNvPr id="3" name="TextBox 2"/>
+          <p:cNvSpPr txBox="1"/>
+          <p:nvPr/>
+        </p:nvSpPr>
+        <p:spPr>
+          <a:xfrm>
+            <a:off x="822960" y="1828800"/>
+            <a:ext cx="10515600" cy="4206240"/>
+          </a:xfrm>
+          <a:prstGeom prst="rect">
+            <a:avLst/>
+          </a:prstGeom>
+          <a:noFill/>
+        </p:spPr>
+        <p:txBody>
+          <a:bodyPr wrap="square">
+            <a:spAutoFit/>
+          </a:bodyPr>
+          <a:lstStyle/>
+          <a:p>
+            <a:pPr>
+              <a:spcAft>
+                <a:spcPts val="1400"/>
+              </a:spcAft>
+            </a:pPr>
+            <a:r>
+              <a:rPr sz="2400">
+                <a:solidFill>
+                  <a:srgbClr val="1F2A37"/>
+                </a:solidFill>
+              </a:rPr>
+              <a:t>• const reply = await askAI(text)</a:t>
+            </a:r>
+          </a:p>
+          <a:p>
+            <a:pPr>
+              <a:spcAft>
+                <a:spcPts val="1400"/>
+              </a:spcAft>
+            </a:pPr>
+            <a:r>
+              <a:rPr sz="2400">
+                <a:solidFill>
+                  <a:srgbClr val="1F2A37"/>
+                </a:solidFill>
+              </a:rPr>
+              <a:t>• The listener has to be async too</a:t>
+            </a:r>
+          </a:p>
+          <a:p>
+            <a:pPr>
+              <a:spcAft>
+                <a:spcPts val="1400"/>
+              </a:spcAft>
+            </a:pPr>
+            <a:r>
+              <a:rPr sz="2400">
+                <a:solidFill>
+                  <a:srgbClr val="1F2A37"/>
+                </a:solidFill>
+              </a:rPr>
+              <a:t>• Forget it and you get [object Promise]</a:t>
+            </a:r>
+          </a:p>
+          <a:p>
+            <a:pPr>
+              <a:spcAft>
+                <a:spcPts val="1400"/>
+              </a:spcAft>
+            </a:pPr>
+            <a:r>
+              <a:rPr sz="2400">
+                <a:solidFill>
+                  <a:srgbClr val="1F2A37"/>
+                </a:solidFill>
+              </a:rPr>
+              <a:t>• Delete the listModels() call - it has done its job</a:t>
+            </a:r>
+          </a:p>
+        </p:txBody>
+      </p:sp>
+    </p:spTree>
+  </p:cSld>
+  <p:clrMapOvr>
+    <a:masterClrMapping/>
+  </p:clrMapOvr>
+</p:sld>
+</file>
+
+<file path=ppt/slides/slide9.xml><?xml version="1.0" encoding="utf-8"?>
+<p:sld xmlns:a="http://schemas.openxmlformats.org/drawingml/2006/main" xmlns:p="http://schemas.openxmlformats.org/presentationml/2006/main" xmlns:r="http://schemas.openxmlformats.org/officeDocument/2006/relationships">
+  <p:cSld>
+    <p:bg>
+      <p:bgPr>
+        <a:solidFill>
+          <a:srgbClr val="102127"/>
+        </a:solidFill>
+        <a:effectLst/>
+      </p:bgPr>
+    </p:bg>
+    <p:spTree>
+      <p:nvGrpSpPr>
+        <p:cNvPr id="1" name=""/>
+        <p:cNvGrpSpPr/>
+        <p:nvPr/>
+      </p:nvGrpSpPr>
+      <p:grpSpPr/>
+      <p:sp>
+        <p:nvSpPr>
+          <p:cNvPr id="2" name="TextBox 1"/>
+          <p:cNvSpPr txBox="1"/>
+          <p:nvPr/>
+        </p:nvSpPr>
+        <p:spPr>
+          <a:xfrm>
+            <a:off x="502920" y="274320"/>
+            <a:ext cx="11155680" cy="731520"/>
+          </a:xfrm>
+          <a:prstGeom prst="rect">
+            <a:avLst/>
+          </a:prstGeom>
+          <a:noFill/>
+        </p:spPr>
+        <p:txBody>
+          <a:bodyPr wrap="none">
+            <a:spAutoFit/>
+          </a:bodyPr>
+          <a:lstStyle/>
+          <a:p>
+            <a:r>
+              <a:rPr sz="2600" b="1">
+                <a:solidFill>
+                  <a:srgbClr val="01AEFD"/>
+                </a:solidFill>
+              </a:rPr>
+              <a:t>Type this into script.js  (1 of 2)</a:t>
+            </a:r>
+          </a:p>
+        </p:txBody>
+      </p:sp>
+      <p:sp>
+        <p:nvSpPr>
+          <p:cNvPr id="3" name="TextBox 2"/>
+          <p:cNvSpPr txBox="1"/>
+          <p:nvPr/>
+        </p:nvSpPr>
+        <p:spPr>
+          <a:xfrm>
+            <a:off x="502920" y="1051560"/>
+            <a:ext cx="11155680" cy="5394960"/>
+          </a:xfrm>
+          <a:prstGeom prst="rect">
+            <a:avLst/>
+          </a:prstGeom>
+          <a:noFill/>
+        </p:spPr>
+        <p:txBody>
+          <a:bodyPr wrap="none">
+            <a:spAutoFit/>
+          </a:bodyPr>
+          <a:lstStyle/>
+          <a:p>
+            <a:pPr>
+              <a:spcAft>
+                <a:spcPts val="0"/>
+              </a:spcAft>
+            </a:pPr>
+            <a:r>
+              <a:rPr sz="1400">
+                <a:solidFill>
+                  <a:srgbClr val="6D8C97"/>
+                </a:solidFill>
+                <a:latin typeface="Consolas"/>
+              </a:rPr>
+              <a:t>  51  </a:t>
+            </a:r>
+            <a:r>
+              <a:rPr sz="1400">
+                <a:solidFill>
+                  <a:srgbClr val="DCECEF"/>
+                </a:solidFill>
+                <a:latin typeface="Consolas"/>
+              </a:rPr>
+              <a:t> </a:t>
+            </a:r>
+          </a:p>
+          <a:p>
+            <a:pPr>
+              <a:spcAft>
+                <a:spcPts val="0"/>
+              </a:spcAft>
+            </a:pPr>
+            <a:r>
+              <a:rPr sz="1400">
+                <a:solidFill>
+                  <a:srgbClr val="6D8C97"/>
+                </a:solidFill>
+                <a:latin typeface="Consolas"/>
+              </a:rPr>
+              <a:t>  52  </a:t>
+            </a:r>
+            <a:r>
+              <a:rPr sz="1400">
+                <a:solidFill>
+                  <a:srgbClr val="7FE0A0"/>
+                </a:solidFill>
+                <a:latin typeface="Consolas"/>
+              </a:rPr>
+              <a:t>// The browser calls this when the form is submitted.</a:t>
+            </a:r>
+          </a:p>
+          <a:p>
+            <a:pPr>
+              <a:spcAft>
+                <a:spcPts val="0"/>
+              </a:spcAft>
+            </a:pPr>
+            <a:r>
+              <a:rPr sz="1400">
+                <a:solidFill>
+                  <a:srgbClr val="6D8C97"/>
+                </a:solidFill>
+                <a:latin typeface="Consolas"/>
+              </a:rPr>
+              <a:t>  53  </a:t>
+            </a:r>
+            <a:r>
+              <a:rPr sz="1400">
+                <a:solidFill>
+                  <a:srgbClr val="7FE0A0"/>
+                </a:solidFill>
+                <a:latin typeface="Consolas"/>
+              </a:rPr>
+              <a:t>composer.addEventListener('submit', async function (event) {</a:t>
+            </a:r>
+          </a:p>
+          <a:p>
+            <a:pPr>
+              <a:spcAft>
+                <a:spcPts val="0"/>
+              </a:spcAft>
+            </a:pPr>
+            <a:r>
+              <a:rPr sz="1400">
+                <a:solidFill>
+                  <a:srgbClr val="6D8C97"/>
+                </a:solidFill>
+                <a:latin typeface="Consolas"/>
+              </a:rPr>
+              <a:t>  54  </a:t>
+            </a:r>
+            <a:r>
+              <a:rPr sz="1400">
+                <a:solidFill>
+                  <a:srgbClr val="7FE0A0"/>
+                </a:solidFill>
+                <a:latin typeface="Consolas"/>
+              </a:rPr>
+              <a:t>  event.preventDefault();</a:t>
+            </a:r>
+          </a:p>
+          <a:p>
+            <a:pPr>
+              <a:spcAft>
+                <a:spcPts val="0"/>
+              </a:spcAft>
+            </a:pPr>
+            <a:r>
+              <a:rPr sz="1400">
+                <a:solidFill>
+                  <a:srgbClr val="6D8C97"/>
+                </a:solidFill>
+                <a:latin typeface="Consolas"/>
+              </a:rPr>
+              <a:t>  55  </a:t>
+            </a:r>
+            <a:r>
+              <a:rPr sz="1400">
+                <a:solidFill>
+                  <a:srgbClr val="DCECEF"/>
+                </a:solidFill>
+                <a:latin typeface="Consolas"/>
+              </a:rPr>
+              <a:t>  const text = promptBox.value.trim();</a:t>
+            </a:r>
+          </a:p>
+          <a:p>
+            <a:pPr>
+              <a:spcAft>
+                <a:spcPts val="0"/>
+              </a:spcAft>
+            </a:pPr>
+            <a:r>
+              <a:rPr sz="1400">
+                <a:solidFill>
+                  <a:srgbClr val="6D8C97"/>
+                </a:solidFill>
+                <a:latin typeface="Consolas"/>
+              </a:rPr>
+              <a:t>  56  </a:t>
+            </a:r>
+            <a:r>
+              <a:rPr sz="1400">
+                <a:solidFill>
+                  <a:srgbClr val="7FE0A0"/>
+                </a:solidFill>
+                <a:latin typeface="Consolas"/>
+              </a:rPr>
+              <a:t>  if (text === '') { return; }</a:t>
+            </a:r>
+          </a:p>
+          <a:p>
+            <a:pPr>
+              <a:spcAft>
+                <a:spcPts val="0"/>
+              </a:spcAft>
+            </a:pPr>
+            <a:r>
+              <a:rPr sz="1400">
+                <a:solidFill>
+                  <a:srgbClr val="6D8C97"/>
+                </a:solidFill>
+                <a:latin typeface="Consolas"/>
+              </a:rPr>
+              <a:t>  57  </a:t>
+            </a:r>
+            <a:r>
+              <a:rPr sz="1400">
+                <a:solidFill>
+                  <a:srgbClr val="7FE0A0"/>
+                </a:solidFill>
+                <a:latin typeface="Consolas"/>
+              </a:rPr>
+              <a:t>  promptBox.value = '';</a:t>
+            </a:r>
+          </a:p>
+          <a:p>
+            <a:pPr>
+              <a:spcAft>
+                <a:spcPts val="0"/>
+              </a:spcAft>
+            </a:pPr>
+            <a:r>
+              <a:rPr sz="1400">
+                <a:solidFill>
+                  <a:srgbClr val="6D8C97"/>
+                </a:solidFill>
+                <a:latin typeface="Consolas"/>
+              </a:rPr>
+              <a:t>  58  </a:t>
+            </a:r>
+            <a:r>
+              <a:rPr sz="1400">
+                <a:solidFill>
+                  <a:srgbClr val="DCECEF"/>
+                </a:solidFill>
+                <a:latin typeface="Consolas"/>
+              </a:rPr>
+              <a:t>  addLine('You', text);</a:t>
+            </a:r>
+          </a:p>
+          <a:p>
+            <a:pPr>
+              <a:spcAft>
+                <a:spcPts val="0"/>
+              </a:spcAft>
+            </a:pPr>
+            <a:r>
+              <a:rPr sz="1400">
+                <a:solidFill>
+                  <a:srgbClr val="6D8C97"/>
+                </a:solidFill>
+                <a:latin typeface="Consolas"/>
+              </a:rPr>
+              <a:t>  59  </a:t>
+            </a:r>
+            <a:r>
+              <a:rPr sz="1400">
+                <a:solidFill>
+                  <a:srgbClr val="7FE0A0"/>
+                </a:solidFill>
+                <a:latin typeface="Consolas"/>
+              </a:rPr>
+              <a:t>  addLine('Companion', 'thinking...');</a:t>
+            </a:r>
+          </a:p>
+          <a:p>
+            <a:pPr>
+              <a:spcAft>
+                <a:spcPts val="0"/>
+              </a:spcAft>
+            </a:pPr>
+            <a:r>
+              <a:rPr sz="1400">
+                <a:solidFill>
+                  <a:srgbClr val="6D8C97"/>
+                </a:solidFill>
+                <a:latin typeface="Consolas"/>
+              </a:rPr>
+              <a:t>  60  </a:t>
+            </a:r>
+            <a:r>
+              <a:rPr sz="1400">
+                <a:solidFill>
+                  <a:srgbClr val="7FE0A0"/>
+                </a:solidFill>
+                <a:latin typeface="Consolas"/>
+              </a:rPr>
+              <a:t>  const reply = await askAI(text);       // this is the slow bit</a:t>
+            </a:r>
+          </a:p>
+          <a:p>
+            <a:pPr>
+              <a:spcAft>
+                <a:spcPts val="0"/>
+              </a:spcAft>
+            </a:pPr>
+            <a:r>
+              <a:rPr sz="1400">
+                <a:solidFill>
+                  <a:srgbClr val="6D8C97"/>
+                </a:solidFill>
+                <a:latin typeface="Consolas"/>
+              </a:rPr>
+              <a:t>  61  </a:t>
+            </a:r>
+            <a:r>
+              <a:rPr sz="1400">
+                <a:solidFill>
+                  <a:srgbClr val="7FE0A0"/>
+                </a:solidFill>
+                <a:latin typeface="Consolas"/>
+              </a:rPr>
+              <a:t>  chat.lastChild.remove();               // take the 'thinking' line away</a:t>
+            </a:r>
+          </a:p>
+          <a:p>
+            <a:pPr>
+              <a:spcAft>
+                <a:spcPts val="0"/>
+              </a:spcAft>
+            </a:pPr>
+            <a:r>
+              <a:rPr sz="1400">
+                <a:solidFill>
+                  <a:srgbClr val="6D8C97"/>
+                </a:solidFill>
+                <a:latin typeface="Consolas"/>
+              </a:rPr>
+              <a:t>  62  </a:t>
+            </a:r>
+            <a:r>
+              <a:rPr sz="1400">
+                <a:solidFill>
+                  <a:srgbClr val="7FE0A0"/>
+                </a:solidFill>
+                <a:latin typeface="Consolas"/>
+              </a:rPr>
+              <a:t>  addLine('Companion', reply);</a:t>
+            </a:r>
+          </a:p>
+          <a:p>
+            <a:pPr>
+              <a:spcAft>
+                <a:spcPts val="0"/>
+              </a:spcAft>
+            </a:pPr>
+            <a:r>
+              <a:rPr sz="1400">
+                <a:solidFill>
+                  <a:srgbClr val="6D8C97"/>
+                </a:solidFill>
+                <a:latin typeface="Consolas"/>
+              </a:rPr>
+              <a:t>  63  </a:t>
+            </a:r>
+            <a:r>
+              <a:rPr sz="1400">
+                <a:solidFill>
+                  <a:srgbClr val="DCECEF"/>
+                </a:solidFill>
+                <a:latin typeface="Consolas"/>
+              </a:rPr>
+              <a:t>});</a:t>
             </a:r>
           </a:p>
         </p:txBody>

--- a/ai101/slides/week-04.pptx
+++ b/ai101/slides/week-04.pptx
@@ -3255,7 +3255,7 @@
                 </a:solidFill>
                 <a:latin typeface="Consolas"/>
               </a:rPr>
-              <a:t>  21  </a:t>
+              <a:t>  24  </a:t>
             </a:r>
             <a:r>
               <a:rPr sz="1700">
@@ -3280,7 +3280,7 @@
                 </a:solidFill>
                 <a:latin typeface="Consolas"/>
               </a:rPr>
-              <a:t>  22  </a:t>
+              <a:t>  25  </a:t>
             </a:r>
             <a:r>
               <a:rPr sz="1700">
@@ -3305,7 +3305,7 @@
                 </a:solidFill>
                 <a:latin typeface="Consolas"/>
               </a:rPr>
-              <a:t>  23  </a:t>
+              <a:t>  26  </a:t>
             </a:r>
             <a:r>
               <a:rPr sz="1700">
@@ -3330,7 +3330,7 @@
                 </a:solidFill>
                 <a:latin typeface="Consolas"/>
               </a:rPr>
-              <a:t>  24  </a:t>
+              <a:t>  27  </a:t>
             </a:r>
             <a:r>
               <a:rPr sz="1700">
@@ -3355,7 +3355,7 @@
                 </a:solidFill>
                 <a:latin typeface="Consolas"/>
               </a:rPr>
-              <a:t>  25  </a:t>
+              <a:t>  28  </a:t>
             </a:r>
             <a:r>
               <a:rPr sz="1700">
@@ -3380,7 +3380,7 @@
                 </a:solidFill>
                 <a:latin typeface="Consolas"/>
               </a:rPr>
-              <a:t>  26  </a:t>
+              <a:t>  29  </a:t>
             </a:r>
             <a:r>
               <a:rPr sz="1700">
@@ -3405,7 +3405,7 @@
                 </a:solidFill>
                 <a:latin typeface="Consolas"/>
               </a:rPr>
-              <a:t>  27  </a:t>
+              <a:t>  30  </a:t>
             </a:r>
             <a:r>
               <a:rPr sz="1700">
@@ -3430,7 +3430,7 @@
                 </a:solidFill>
                 <a:latin typeface="Consolas"/>
               </a:rPr>
-              <a:t>  28  </a:t>
+              <a:t>  31  </a:t>
             </a:r>
             <a:r>
               <a:rPr sz="1700">
@@ -3455,7 +3455,7 @@
                 </a:solidFill>
                 <a:latin typeface="Consolas"/>
               </a:rPr>
-              <a:t>  29  </a:t>
+              <a:t>  32  </a:t>
             </a:r>
             <a:r>
               <a:rPr sz="1700">
@@ -3480,7 +3480,7 @@
                 </a:solidFill>
                 <a:latin typeface="Consolas"/>
               </a:rPr>
-              <a:t>  30  </a:t>
+              <a:t>  33  </a:t>
             </a:r>
             <a:r>
               <a:rPr sz="1700">
@@ -4035,7 +4035,7 @@
                 </a:solidFill>
                 <a:latin typeface="Consolas"/>
               </a:rPr>
-              <a:t>  31  </a:t>
+              <a:t>  34  </a:t>
             </a:r>
             <a:r>
               <a:rPr sz="1400">
@@ -4060,7 +4060,7 @@
                 </a:solidFill>
                 <a:latin typeface="Consolas"/>
               </a:rPr>
-              <a:t>  32  </a:t>
+              <a:t>  35  </a:t>
             </a:r>
             <a:r>
               <a:rPr sz="1400">
@@ -4085,7 +4085,7 @@
                 </a:solidFill>
                 <a:latin typeface="Consolas"/>
               </a:rPr>
-              <a:t>  33  </a:t>
+              <a:t>  36  </a:t>
             </a:r>
             <a:r>
               <a:rPr sz="1400">
@@ -4110,7 +4110,7 @@
                 </a:solidFill>
                 <a:latin typeface="Consolas"/>
               </a:rPr>
-              <a:t>  34  </a:t>
+              <a:t>  37  </a:t>
             </a:r>
             <a:r>
               <a:rPr sz="1400">
@@ -4135,7 +4135,7 @@
                 </a:solidFill>
                 <a:latin typeface="Consolas"/>
               </a:rPr>
-              <a:t>  35  </a:t>
+              <a:t>  38  </a:t>
             </a:r>
             <a:r>
               <a:rPr sz="1400">
@@ -4160,7 +4160,7 @@
                 </a:solidFill>
                 <a:latin typeface="Consolas"/>
               </a:rPr>
-              <a:t>  36  </a:t>
+              <a:t>  39  </a:t>
             </a:r>
             <a:r>
               <a:rPr sz="1400">
@@ -4185,7 +4185,7 @@
                 </a:solidFill>
                 <a:latin typeface="Consolas"/>
               </a:rPr>
-              <a:t>  37  </a:t>
+              <a:t>  40  </a:t>
             </a:r>
             <a:r>
               <a:rPr sz="1400">
@@ -4210,7 +4210,7 @@
                 </a:solidFill>
                 <a:latin typeface="Consolas"/>
               </a:rPr>
-              <a:t>  38  </a:t>
+              <a:t>  41  </a:t>
             </a:r>
             <a:r>
               <a:rPr sz="1400">
@@ -4235,7 +4235,7 @@
                 </a:solidFill>
                 <a:latin typeface="Consolas"/>
               </a:rPr>
-              <a:t>  39  </a:t>
+              <a:t>  42  </a:t>
             </a:r>
             <a:r>
               <a:rPr sz="1400">
@@ -4260,7 +4260,7 @@
                 </a:solidFill>
                 <a:latin typeface="Consolas"/>
               </a:rPr>
-              <a:t>  40  </a:t>
+              <a:t>  43  </a:t>
             </a:r>
             <a:r>
               <a:rPr sz="1400">
@@ -4285,7 +4285,7 @@
                 </a:solidFill>
                 <a:latin typeface="Consolas"/>
               </a:rPr>
-              <a:t>  41  </a:t>
+              <a:t>  44  </a:t>
             </a:r>
             <a:r>
               <a:rPr sz="1400">
@@ -4310,7 +4310,7 @@
                 </a:solidFill>
                 <a:latin typeface="Consolas"/>
               </a:rPr>
-              <a:t>  42  </a:t>
+              <a:t>  45  </a:t>
             </a:r>
             <a:r>
               <a:rPr sz="1400">
@@ -4335,7 +4335,7 @@
                 </a:solidFill>
                 <a:latin typeface="Consolas"/>
               </a:rPr>
-              <a:t>  43  </a:t>
+              <a:t>  46  </a:t>
             </a:r>
             <a:r>
               <a:rPr sz="1400">
@@ -4360,7 +4360,7 @@
                 </a:solidFill>
                 <a:latin typeface="Consolas"/>
               </a:rPr>
-              <a:t>  44  </a:t>
+              <a:t>  47  </a:t>
             </a:r>
             <a:r>
               <a:rPr sz="1400">
@@ -4385,7 +4385,7 @@
                 </a:solidFill>
                 <a:latin typeface="Consolas"/>
               </a:rPr>
-              <a:t>  45  </a:t>
+              <a:t>  48  </a:t>
             </a:r>
             <a:r>
               <a:rPr sz="1400">
@@ -4492,7 +4492,7 @@
                 </a:solidFill>
                 <a:latin typeface="Consolas"/>
               </a:rPr>
-              <a:t>  46  </a:t>
+              <a:t>  49  </a:t>
             </a:r>
             <a:r>
               <a:rPr sz="1700">
@@ -4517,7 +4517,7 @@
                 </a:solidFill>
                 <a:latin typeface="Consolas"/>
               </a:rPr>
-              <a:t>  47  </a:t>
+              <a:t>  50  </a:t>
             </a:r>
             <a:r>
               <a:rPr sz="1700">
@@ -4542,7 +4542,7 @@
                 </a:solidFill>
                 <a:latin typeface="Consolas"/>
               </a:rPr>
-              <a:t>  48  </a:t>
+              <a:t>  51  </a:t>
             </a:r>
             <a:r>
               <a:rPr sz="1700">
@@ -4567,7 +4567,7 @@
                 </a:solidFill>
                 <a:latin typeface="Consolas"/>
               </a:rPr>
-              <a:t>  49  </a:t>
+              <a:t>  52  </a:t>
             </a:r>
             <a:r>
               <a:rPr sz="1700">
@@ -4592,7 +4592,7 @@
                 </a:solidFill>
                 <a:latin typeface="Consolas"/>
               </a:rPr>
-              <a:t>  50  </a:t>
+              <a:t>  53  </a:t>
             </a:r>
             <a:r>
               <a:rPr sz="1700">
@@ -4953,7 +4953,7 @@
                 </a:solidFill>
                 <a:latin typeface="Consolas"/>
               </a:rPr>
-              <a:t>  51  </a:t>
+              <a:t>  54  </a:t>
             </a:r>
             <a:r>
               <a:rPr sz="1400">
@@ -4978,7 +4978,7 @@
                 </a:solidFill>
                 <a:latin typeface="Consolas"/>
               </a:rPr>
-              <a:t>  52  </a:t>
+              <a:t>  55  </a:t>
             </a:r>
             <a:r>
               <a:rPr sz="1400">
@@ -5003,7 +5003,7 @@
                 </a:solidFill>
                 <a:latin typeface="Consolas"/>
               </a:rPr>
-              <a:t>  53  </a:t>
+              <a:t>  56  </a:t>
             </a:r>
             <a:r>
               <a:rPr sz="1400">
@@ -5028,7 +5028,7 @@
                 </a:solidFill>
                 <a:latin typeface="Consolas"/>
               </a:rPr>
-              <a:t>  54  </a:t>
+              <a:t>  57  </a:t>
             </a:r>
             <a:r>
               <a:rPr sz="1400">
@@ -5053,7 +5053,7 @@
                 </a:solidFill>
                 <a:latin typeface="Consolas"/>
               </a:rPr>
-              <a:t>  55  </a:t>
+              <a:t>  58  </a:t>
             </a:r>
             <a:r>
               <a:rPr sz="1400">
@@ -5078,7 +5078,7 @@
                 </a:solidFill>
                 <a:latin typeface="Consolas"/>
               </a:rPr>
-              <a:t>  56  </a:t>
+              <a:t>  59  </a:t>
             </a:r>
             <a:r>
               <a:rPr sz="1400">
@@ -5103,7 +5103,7 @@
                 </a:solidFill>
                 <a:latin typeface="Consolas"/>
               </a:rPr>
-              <a:t>  57  </a:t>
+              <a:t>  60  </a:t>
             </a:r>
             <a:r>
               <a:rPr sz="1400">
@@ -5128,7 +5128,7 @@
                 </a:solidFill>
                 <a:latin typeface="Consolas"/>
               </a:rPr>
-              <a:t>  58  </a:t>
+              <a:t>  61  </a:t>
             </a:r>
             <a:r>
               <a:rPr sz="1400">
@@ -5153,7 +5153,7 @@
                 </a:solidFill>
                 <a:latin typeface="Consolas"/>
               </a:rPr>
-              <a:t>  59  </a:t>
+              <a:t>  62  </a:t>
             </a:r>
             <a:r>
               <a:rPr sz="1400">
@@ -5178,7 +5178,7 @@
                 </a:solidFill>
                 <a:latin typeface="Consolas"/>
               </a:rPr>
-              <a:t>  60  </a:t>
+              <a:t>  63  </a:t>
             </a:r>
             <a:r>
               <a:rPr sz="1400">
@@ -5203,7 +5203,7 @@
                 </a:solidFill>
                 <a:latin typeface="Consolas"/>
               </a:rPr>
-              <a:t>  61  </a:t>
+              <a:t>  64  </a:t>
             </a:r>
             <a:r>
               <a:rPr sz="1400">
@@ -5228,7 +5228,7 @@
                 </a:solidFill>
                 <a:latin typeface="Consolas"/>
               </a:rPr>
-              <a:t>  62  </a:t>
+              <a:t>  65  </a:t>
             </a:r>
             <a:r>
               <a:rPr sz="1400">
@@ -5253,7 +5253,7 @@
                 </a:solidFill>
                 <a:latin typeface="Consolas"/>
               </a:rPr>
-              <a:t>  63  </a:t>
+              <a:t>  66  </a:t>
             </a:r>
             <a:r>
               <a:rPr sz="1400">

--- a/ai101/slides/week-04.pptx
+++ b/ai101/slides/week-04.pptx
@@ -3255,7 +3255,7 @@
                 </a:solidFill>
                 <a:latin typeface="Consolas"/>
               </a:rPr>
-              <a:t>  24  </a:t>
+              <a:t>  29  </a:t>
             </a:r>
             <a:r>
               <a:rPr sz="1700">
@@ -3280,7 +3280,7 @@
                 </a:solidFill>
                 <a:latin typeface="Consolas"/>
               </a:rPr>
-              <a:t>  25  </a:t>
+              <a:t>  30  </a:t>
             </a:r>
             <a:r>
               <a:rPr sz="1700">
@@ -3305,7 +3305,7 @@
                 </a:solidFill>
                 <a:latin typeface="Consolas"/>
               </a:rPr>
-              <a:t>  26  </a:t>
+              <a:t>  31  </a:t>
             </a:r>
             <a:r>
               <a:rPr sz="1700">
@@ -3330,7 +3330,7 @@
                 </a:solidFill>
                 <a:latin typeface="Consolas"/>
               </a:rPr>
-              <a:t>  27  </a:t>
+              <a:t>  32  </a:t>
             </a:r>
             <a:r>
               <a:rPr sz="1700">
@@ -3355,7 +3355,7 @@
                 </a:solidFill>
                 <a:latin typeface="Consolas"/>
               </a:rPr>
-              <a:t>  28  </a:t>
+              <a:t>  33  </a:t>
             </a:r>
             <a:r>
               <a:rPr sz="1700">
@@ -3380,7 +3380,7 @@
                 </a:solidFill>
                 <a:latin typeface="Consolas"/>
               </a:rPr>
-              <a:t>  29  </a:t>
+              <a:t>  34  </a:t>
             </a:r>
             <a:r>
               <a:rPr sz="1700">
@@ -3405,7 +3405,7 @@
                 </a:solidFill>
                 <a:latin typeface="Consolas"/>
               </a:rPr>
-              <a:t>  30  </a:t>
+              <a:t>  35  </a:t>
             </a:r>
             <a:r>
               <a:rPr sz="1700">
@@ -3430,7 +3430,7 @@
                 </a:solidFill>
                 <a:latin typeface="Consolas"/>
               </a:rPr>
-              <a:t>  31  </a:t>
+              <a:t>  36  </a:t>
             </a:r>
             <a:r>
               <a:rPr sz="1700">
@@ -3455,7 +3455,7 @@
                 </a:solidFill>
                 <a:latin typeface="Consolas"/>
               </a:rPr>
-              <a:t>  32  </a:t>
+              <a:t>  37  </a:t>
             </a:r>
             <a:r>
               <a:rPr sz="1700">
@@ -3480,7 +3480,7 @@
                 </a:solidFill>
                 <a:latin typeface="Consolas"/>
               </a:rPr>
-              <a:t>  33  </a:t>
+              <a:t>  38  </a:t>
             </a:r>
             <a:r>
               <a:rPr sz="1700">
@@ -4035,7 +4035,7 @@
                 </a:solidFill>
                 <a:latin typeface="Consolas"/>
               </a:rPr>
-              <a:t>  34  </a:t>
+              <a:t>  39  </a:t>
             </a:r>
             <a:r>
               <a:rPr sz="1400">
@@ -4060,7 +4060,7 @@
                 </a:solidFill>
                 <a:latin typeface="Consolas"/>
               </a:rPr>
-              <a:t>  35  </a:t>
+              <a:t>  40  </a:t>
             </a:r>
             <a:r>
               <a:rPr sz="1400">
@@ -4085,7 +4085,7 @@
                 </a:solidFill>
                 <a:latin typeface="Consolas"/>
               </a:rPr>
-              <a:t>  36  </a:t>
+              <a:t>  41  </a:t>
             </a:r>
             <a:r>
               <a:rPr sz="1400">
@@ -4110,7 +4110,7 @@
                 </a:solidFill>
                 <a:latin typeface="Consolas"/>
               </a:rPr>
-              <a:t>  37  </a:t>
+              <a:t>  42  </a:t>
             </a:r>
             <a:r>
               <a:rPr sz="1400">
@@ -4135,7 +4135,7 @@
                 </a:solidFill>
                 <a:latin typeface="Consolas"/>
               </a:rPr>
-              <a:t>  38  </a:t>
+              <a:t>  43  </a:t>
             </a:r>
             <a:r>
               <a:rPr sz="1400">
@@ -4160,7 +4160,7 @@
                 </a:solidFill>
                 <a:latin typeface="Consolas"/>
               </a:rPr>
-              <a:t>  39  </a:t>
+              <a:t>  44  </a:t>
             </a:r>
             <a:r>
               <a:rPr sz="1400">
@@ -4185,7 +4185,7 @@
                 </a:solidFill>
                 <a:latin typeface="Consolas"/>
               </a:rPr>
-              <a:t>  40  </a:t>
+              <a:t>  45  </a:t>
             </a:r>
             <a:r>
               <a:rPr sz="1400">
@@ -4210,7 +4210,7 @@
                 </a:solidFill>
                 <a:latin typeface="Consolas"/>
               </a:rPr>
-              <a:t>  41  </a:t>
+              <a:t>  46  </a:t>
             </a:r>
             <a:r>
               <a:rPr sz="1400">
@@ -4235,7 +4235,7 @@
                 </a:solidFill>
                 <a:latin typeface="Consolas"/>
               </a:rPr>
-              <a:t>  42  </a:t>
+              <a:t>  47  </a:t>
             </a:r>
             <a:r>
               <a:rPr sz="1400">
@@ -4260,7 +4260,7 @@
                 </a:solidFill>
                 <a:latin typeface="Consolas"/>
               </a:rPr>
-              <a:t>  43  </a:t>
+              <a:t>  48  </a:t>
             </a:r>
             <a:r>
               <a:rPr sz="1400">
@@ -4285,7 +4285,7 @@
                 </a:solidFill>
                 <a:latin typeface="Consolas"/>
               </a:rPr>
-              <a:t>  44  </a:t>
+              <a:t>  49  </a:t>
             </a:r>
             <a:r>
               <a:rPr sz="1400">
@@ -4310,7 +4310,7 @@
                 </a:solidFill>
                 <a:latin typeface="Consolas"/>
               </a:rPr>
-              <a:t>  45  </a:t>
+              <a:t>  50  </a:t>
             </a:r>
             <a:r>
               <a:rPr sz="1400">
@@ -4335,7 +4335,7 @@
                 </a:solidFill>
                 <a:latin typeface="Consolas"/>
               </a:rPr>
-              <a:t>  46  </a:t>
+              <a:t>  51  </a:t>
             </a:r>
             <a:r>
               <a:rPr sz="1400">
@@ -4360,7 +4360,7 @@
                 </a:solidFill>
                 <a:latin typeface="Consolas"/>
               </a:rPr>
-              <a:t>  47  </a:t>
+              <a:t>  52  </a:t>
             </a:r>
             <a:r>
               <a:rPr sz="1400">
@@ -4385,7 +4385,7 @@
                 </a:solidFill>
                 <a:latin typeface="Consolas"/>
               </a:rPr>
-              <a:t>  48  </a:t>
+              <a:t>  53  </a:t>
             </a:r>
             <a:r>
               <a:rPr sz="1400">
@@ -4492,7 +4492,7 @@
                 </a:solidFill>
                 <a:latin typeface="Consolas"/>
               </a:rPr>
-              <a:t>  49  </a:t>
+              <a:t>  54  </a:t>
             </a:r>
             <a:r>
               <a:rPr sz="1700">
@@ -4517,7 +4517,7 @@
                 </a:solidFill>
                 <a:latin typeface="Consolas"/>
               </a:rPr>
-              <a:t>  50  </a:t>
+              <a:t>  55  </a:t>
             </a:r>
             <a:r>
               <a:rPr sz="1700">
@@ -4542,7 +4542,7 @@
                 </a:solidFill>
                 <a:latin typeface="Consolas"/>
               </a:rPr>
-              <a:t>  51  </a:t>
+              <a:t>  56  </a:t>
             </a:r>
             <a:r>
               <a:rPr sz="1700">
@@ -4567,7 +4567,7 @@
                 </a:solidFill>
                 <a:latin typeface="Consolas"/>
               </a:rPr>
-              <a:t>  52  </a:t>
+              <a:t>  57  </a:t>
             </a:r>
             <a:r>
               <a:rPr sz="1700">
@@ -4592,7 +4592,7 @@
                 </a:solidFill>
                 <a:latin typeface="Consolas"/>
               </a:rPr>
-              <a:t>  53  </a:t>
+              <a:t>  58  </a:t>
             </a:r>
             <a:r>
               <a:rPr sz="1700">
@@ -4953,7 +4953,7 @@
                 </a:solidFill>
                 <a:latin typeface="Consolas"/>
               </a:rPr>
-              <a:t>  54  </a:t>
+              <a:t>  59  </a:t>
             </a:r>
             <a:r>
               <a:rPr sz="1400">
@@ -4978,7 +4978,7 @@
                 </a:solidFill>
                 <a:latin typeface="Consolas"/>
               </a:rPr>
-              <a:t>  55  </a:t>
+              <a:t>  60  </a:t>
             </a:r>
             <a:r>
               <a:rPr sz="1400">
@@ -5003,7 +5003,7 @@
                 </a:solidFill>
                 <a:latin typeface="Consolas"/>
               </a:rPr>
-              <a:t>  56  </a:t>
+              <a:t>  61  </a:t>
             </a:r>
             <a:r>
               <a:rPr sz="1400">
@@ -5028,7 +5028,7 @@
                 </a:solidFill>
                 <a:latin typeface="Consolas"/>
               </a:rPr>
-              <a:t>  57  </a:t>
+              <a:t>  62  </a:t>
             </a:r>
             <a:r>
               <a:rPr sz="1400">
@@ -5053,7 +5053,7 @@
                 </a:solidFill>
                 <a:latin typeface="Consolas"/>
               </a:rPr>
-              <a:t>  58  </a:t>
+              <a:t>  63  </a:t>
             </a:r>
             <a:r>
               <a:rPr sz="1400">
@@ -5078,7 +5078,7 @@
                 </a:solidFill>
                 <a:latin typeface="Consolas"/>
               </a:rPr>
-              <a:t>  59  </a:t>
+              <a:t>  64  </a:t>
             </a:r>
             <a:r>
               <a:rPr sz="1400">
@@ -5103,7 +5103,7 @@
                 </a:solidFill>
                 <a:latin typeface="Consolas"/>
               </a:rPr>
-              <a:t>  60  </a:t>
+              <a:t>  65  </a:t>
             </a:r>
             <a:r>
               <a:rPr sz="1400">
@@ -5128,7 +5128,7 @@
                 </a:solidFill>
                 <a:latin typeface="Consolas"/>
               </a:rPr>
-              <a:t>  61  </a:t>
+              <a:t>  66  </a:t>
             </a:r>
             <a:r>
               <a:rPr sz="1400">
@@ -5153,7 +5153,7 @@
                 </a:solidFill>
                 <a:latin typeface="Consolas"/>
               </a:rPr>
-              <a:t>  62  </a:t>
+              <a:t>  67  </a:t>
             </a:r>
             <a:r>
               <a:rPr sz="1400">
@@ -5178,7 +5178,7 @@
                 </a:solidFill>
                 <a:latin typeface="Consolas"/>
               </a:rPr>
-              <a:t>  63  </a:t>
+              <a:t>  68  </a:t>
             </a:r>
             <a:r>
               <a:rPr sz="1400">
@@ -5203,7 +5203,7 @@
                 </a:solidFill>
                 <a:latin typeface="Consolas"/>
               </a:rPr>
-              <a:t>  64  </a:t>
+              <a:t>  69  </a:t>
             </a:r>
             <a:r>
               <a:rPr sz="1400">
@@ -5228,7 +5228,7 @@
                 </a:solidFill>
                 <a:latin typeface="Consolas"/>
               </a:rPr>
-              <a:t>  65  </a:t>
+              <a:t>  70  </a:t>
             </a:r>
             <a:r>
               <a:rPr sz="1400">
@@ -5253,7 +5253,7 @@
                 </a:solidFill>
                 <a:latin typeface="Consolas"/>
               </a:rPr>
-              <a:t>  66  </a:t>
+              <a:t>  71  </a:t>
             </a:r>
             <a:r>
               <a:rPr sz="1400">

--- a/ai101/slides/week-04.pptx
+++ b/ai101/slides/week-04.pptx
@@ -3490,6 +3490,31 @@
                 <a:latin typeface="Consolas"/>
               </a:rPr>
               <a:t>}</a:t>
+            </a:r>
+          </a:p>
+          <a:p>
+            <a:pPr>
+              <a:spcAft>
+                <a:spcPts val="0"/>
+              </a:spcAft>
+            </a:pPr>
+            <a:r>
+              <a:rPr sz="1700">
+                <a:solidFill>
+                  <a:srgbClr val="6D8C97"/>
+                </a:solidFill>
+                <a:latin typeface="Consolas"/>
+              </a:rPr>
+              <a:t>   -  </a:t>
+            </a:r>
+            <a:r>
+              <a:rPr sz="1700" strike="sngStrike">
+                <a:solidFill>
+                  <a:srgbClr val="F3928B"/>
+                </a:solidFill>
+                <a:latin typeface="Consolas"/>
+              </a:rPr>
+              <a:t>listModels();</a:t>
             </a:r>
           </a:p>
         </p:txBody>

--- a/ai101/slides/week-04.pptx
+++ b/ai101/slides/week-04.pptx
@@ -41,6 +41,8 @@
     <p:sldId id="289" r:id="rId40"/>
     <p:sldId id="290" r:id="rId41"/>
     <p:sldId id="291" r:id="rId42"/>
+    <p:sldId id="292" r:id="rId43"/>
+    <p:sldId id="293" r:id="rId44"/>
   </p:sldIdLst>
   <p:sldSz cx="12191695" cy="6858000" type="screen4x3"/>
   <p:notesSz cx="6858000" cy="9144000"/>
@@ -5443,14 +5445,6 @@
 <file path=ppt/slides/slide17.xml><?xml version="1.0" encoding="utf-8"?>
 <p:sld xmlns:a="http://schemas.openxmlformats.org/drawingml/2006/main" xmlns:p="http://schemas.openxmlformats.org/presentationml/2006/main" xmlns:r="http://schemas.openxmlformats.org/officeDocument/2006/relationships">
   <p:cSld>
-    <p:bg>
-      <p:bgPr>
-        <a:solidFill>
-          <a:srgbClr val="102127"/>
-        </a:solidFill>
-        <a:effectLst/>
-      </p:bgPr>
-    </p:bg>
     <p:spTree>
       <p:nvGrpSpPr>
         <p:cNvPr id="1" name=""/>
@@ -5460,14 +5454,40 @@
       <p:grpSpPr/>
       <p:sp>
         <p:nvSpPr>
-          <p:cNvPr id="2" name="TextBox 1"/>
+          <p:cNvPr id="2" name="Title 1"/>
+          <p:cNvSpPr>
+            <a:spLocks noGrp="1"/>
+          </p:cNvSpPr>
+          <p:nvPr>
+            <p:ph type="title"/>
+          </p:nvPr>
+        </p:nvSpPr>
+        <p:spPr/>
+        <p:txBody>
+          <a:bodyPr/>
+          <a:lstStyle/>
+          <a:p>
+            <a:r>
+              <a:rPr sz="3800" b="1">
+                <a:solidFill>
+                  <a:srgbClr val="1F2A37"/>
+                </a:solidFill>
+              </a:rPr>
+              <a:t>Lists: [ ]</a:t>
+            </a:r>
+          </a:p>
+        </p:txBody>
+      </p:sp>
+      <p:sp>
+        <p:nvSpPr>
+          <p:cNvPr id="3" name="TextBox 2"/>
           <p:cNvSpPr txBox="1"/>
           <p:nvPr/>
         </p:nvSpPr>
         <p:spPr>
           <a:xfrm>
-            <a:off x="502920" y="274320"/>
-            <a:ext cx="11155680" cy="548640"/>
+            <a:off x="868680" y="502920"/>
+            <a:ext cx="5486400" cy="457200"/>
           </a:xfrm>
           <a:prstGeom prst="rect">
             <a:avLst/>
@@ -5481,26 +5501,26 @@
           <a:lstStyle/>
           <a:p>
             <a:r>
-              <a:rPr sz="2200" b="1">
+              <a:rPr sz="1500" b="1">
                 <a:solidFill>
                   <a:srgbClr val="01AEFD"/>
                 </a:solidFill>
               </a:rPr>
-              <a:t>Type this into script.js   -   line 51</a:t>
-            </a:r>
-          </a:p>
-        </p:txBody>
-      </p:sp>
-      <p:sp>
-        <p:nvSpPr>
-          <p:cNvPr id="3" name="TextBox 2"/>
+              <a:t>JAVASCRIPT</a:t>
+            </a:r>
+          </a:p>
+        </p:txBody>
+      </p:sp>
+      <p:sp>
+        <p:nvSpPr>
+          <p:cNvPr id="4" name="TextBox 3"/>
           <p:cNvSpPr txBox="1"/>
           <p:nvPr/>
         </p:nvSpPr>
         <p:spPr>
           <a:xfrm>
-            <a:off x="502920" y="960120"/>
-            <a:ext cx="11155680" cy="4297680"/>
+            <a:off x="822960" y="1828800"/>
+            <a:ext cx="10515600" cy="4206240"/>
           </a:xfrm>
           <a:prstGeom prst="rect">
             <a:avLst/>
@@ -5508,366 +5528,38 @@
           <a:noFill/>
         </p:spPr>
         <p:txBody>
-          <a:bodyPr wrap="none">
-            <a:spAutoFit/>
-          </a:bodyPr>
-          <a:lstStyle/>
-          <a:p>
-            <a:pPr>
-              <a:spcAft>
-                <a:spcPts val="0"/>
-              </a:spcAft>
-            </a:pPr>
-            <a:r>
-              <a:rPr sz="1300">
-                <a:solidFill>
-                  <a:srgbClr val="6D8C97"/>
-                </a:solidFill>
-                <a:latin typeface="Consolas"/>
-              </a:rPr>
-              <a:t>  39  </a:t>
-            </a:r>
-            <a:r>
-              <a:rPr sz="1300">
-                <a:solidFill>
-                  <a:srgbClr val="6D8C97"/>
-                </a:solidFill>
-                <a:latin typeface="Consolas"/>
-              </a:rPr>
-              <a:t> </a:t>
-            </a:r>
-          </a:p>
-          <a:p>
-            <a:pPr>
-              <a:spcAft>
-                <a:spcPts val="0"/>
-              </a:spcAft>
-            </a:pPr>
-            <a:r>
-              <a:rPr sz="1300">
-                <a:solidFill>
-                  <a:srgbClr val="6D8C97"/>
-                </a:solidFill>
-                <a:latin typeface="Consolas"/>
-              </a:rPr>
-              <a:t>  40  </a:t>
-            </a:r>
-            <a:r>
-              <a:rPr sz="1300">
-                <a:solidFill>
-                  <a:srgbClr val="6D8C97"/>
-                </a:solidFill>
-                <a:latin typeface="Consolas"/>
-              </a:rPr>
-              <a:t>// Week 4: ask the AI a real question.</a:t>
-            </a:r>
-          </a:p>
-          <a:p>
-            <a:pPr>
-              <a:spcAft>
-                <a:spcPts val="0"/>
-              </a:spcAft>
-            </a:pPr>
-            <a:r>
-              <a:rPr sz="1300">
-                <a:solidFill>
-                  <a:srgbClr val="6D8C97"/>
-                </a:solidFill>
-                <a:latin typeface="Consolas"/>
-              </a:rPr>
-              <a:t>  41  </a:t>
-            </a:r>
-            <a:r>
-              <a:rPr sz="1300">
-                <a:solidFill>
-                  <a:srgbClr val="6D8C97"/>
-                </a:solidFill>
-                <a:latin typeface="Consolas"/>
-              </a:rPr>
-              <a:t>// A chat request is a LIST of messages. Each one says who said it.</a:t>
-            </a:r>
-          </a:p>
-          <a:p>
-            <a:pPr>
-              <a:spcAft>
-                <a:spcPts val="0"/>
-              </a:spcAft>
-            </a:pPr>
-            <a:r>
-              <a:rPr sz="1300">
-                <a:solidFill>
-                  <a:srgbClr val="6D8C97"/>
-                </a:solidFill>
-                <a:latin typeface="Consolas"/>
-              </a:rPr>
-              <a:t>  42  </a:t>
-            </a:r>
-            <a:r>
-              <a:rPr sz="1300">
-                <a:solidFill>
-                  <a:srgbClr val="6D8C97"/>
-                </a:solidFill>
-                <a:latin typeface="Consolas"/>
-              </a:rPr>
-              <a:t>async function askAI(question) {</a:t>
-            </a:r>
-          </a:p>
-          <a:p>
-            <a:pPr>
-              <a:spcAft>
-                <a:spcPts val="0"/>
-              </a:spcAft>
-            </a:pPr>
-            <a:r>
-              <a:rPr sz="1300">
-                <a:solidFill>
-                  <a:srgbClr val="6D8C97"/>
-                </a:solidFill>
-                <a:latin typeface="Consolas"/>
-              </a:rPr>
-              <a:t>  43  </a:t>
-            </a:r>
-            <a:r>
-              <a:rPr sz="1300">
-                <a:solidFill>
-                  <a:srgbClr val="6D8C97"/>
-                </a:solidFill>
-                <a:latin typeface="Consolas"/>
-              </a:rPr>
-              <a:t>  const res = await fetch(AI_BASE + '/v1/chat/completions', {</a:t>
-            </a:r>
-          </a:p>
-          <a:p>
-            <a:pPr>
-              <a:spcAft>
-                <a:spcPts val="0"/>
-              </a:spcAft>
-            </a:pPr>
-            <a:r>
-              <a:rPr sz="1300">
-                <a:solidFill>
-                  <a:srgbClr val="6D8C97"/>
-                </a:solidFill>
-                <a:latin typeface="Consolas"/>
-              </a:rPr>
-              <a:t>  44  </a:t>
-            </a:r>
-            <a:r>
-              <a:rPr sz="1300">
-                <a:solidFill>
-                  <a:srgbClr val="6D8C97"/>
-                </a:solidFill>
-                <a:latin typeface="Consolas"/>
-              </a:rPr>
-              <a:t>    method: 'POST',                       // POST = I am sending you something</a:t>
-            </a:r>
-          </a:p>
-          <a:p>
-            <a:pPr>
-              <a:spcAft>
-                <a:spcPts val="0"/>
-              </a:spcAft>
-            </a:pPr>
-            <a:r>
-              <a:rPr sz="1300">
-                <a:solidFill>
-                  <a:srgbClr val="6D8C97"/>
-                </a:solidFill>
-                <a:latin typeface="Consolas"/>
-              </a:rPr>
-              <a:t>  45  </a:t>
-            </a:r>
-            <a:r>
-              <a:rPr sz="1300">
-                <a:solidFill>
-                  <a:srgbClr val="6D8C97"/>
-                </a:solidFill>
-                <a:latin typeface="Consolas"/>
-              </a:rPr>
-              <a:t>    headers: {</a:t>
-            </a:r>
-          </a:p>
-          <a:p>
-            <a:pPr>
-              <a:spcAft>
-                <a:spcPts val="0"/>
-              </a:spcAft>
-            </a:pPr>
-            <a:r>
-              <a:rPr sz="1300">
-                <a:solidFill>
-                  <a:srgbClr val="6D8C97"/>
-                </a:solidFill>
-                <a:latin typeface="Consolas"/>
-              </a:rPr>
-              <a:t>  46  </a:t>
-            </a:r>
-            <a:r>
-              <a:rPr sz="1300">
-                <a:solidFill>
-                  <a:srgbClr val="6D8C97"/>
-                </a:solidFill>
-                <a:latin typeface="Consolas"/>
-              </a:rPr>
-              <a:t>      'Content-Type': 'application/json', // what I am sending is JSON</a:t>
-            </a:r>
-          </a:p>
-          <a:p>
-            <a:pPr>
-              <a:spcAft>
-                <a:spcPts val="0"/>
-              </a:spcAft>
-            </a:pPr>
-            <a:r>
-              <a:rPr sz="1300">
-                <a:solidFill>
-                  <a:srgbClr val="6D8C97"/>
-                </a:solidFill>
-                <a:latin typeface="Consolas"/>
-              </a:rPr>
-              <a:t>  47  </a:t>
-            </a:r>
-            <a:r>
-              <a:rPr sz="1300">
-                <a:solidFill>
-                  <a:srgbClr val="6D8C97"/>
-                </a:solidFill>
-                <a:latin typeface="Consolas"/>
-              </a:rPr>
-              <a:t>      'Authorization': 'Bearer ' + API_KEY</a:t>
-            </a:r>
-          </a:p>
-          <a:p>
-            <a:pPr>
-              <a:spcAft>
-                <a:spcPts val="0"/>
-              </a:spcAft>
-            </a:pPr>
-            <a:r>
-              <a:rPr sz="1300">
-                <a:solidFill>
-                  <a:srgbClr val="6D8C97"/>
-                </a:solidFill>
-                <a:latin typeface="Consolas"/>
-              </a:rPr>
-              <a:t>  48  </a:t>
-            </a:r>
-            <a:r>
-              <a:rPr sz="1300">
-                <a:solidFill>
-                  <a:srgbClr val="6D8C97"/>
-                </a:solidFill>
-                <a:latin typeface="Consolas"/>
-              </a:rPr>
-              <a:t>    },</a:t>
-            </a:r>
-          </a:p>
-          <a:p>
-            <a:pPr>
-              <a:spcAft>
-                <a:spcPts val="0"/>
-              </a:spcAft>
-            </a:pPr>
-            <a:r>
-              <a:rPr sz="1300">
-                <a:solidFill>
-                  <a:srgbClr val="6D8C97"/>
-                </a:solidFill>
-                <a:latin typeface="Consolas"/>
-              </a:rPr>
-              <a:t>  49  </a:t>
-            </a:r>
-            <a:r>
-              <a:rPr sz="1300">
-                <a:solidFill>
-                  <a:srgbClr val="6D8C97"/>
-                </a:solidFill>
-                <a:latin typeface="Consolas"/>
-              </a:rPr>
-              <a:t>    body: JSON.stringify({</a:t>
-            </a:r>
-          </a:p>
-          <a:p>
-            <a:pPr>
-              <a:spcAft>
-                <a:spcPts val="0"/>
-              </a:spcAft>
-            </a:pPr>
-            <a:r>
-              <a:rPr sz="1300">
-                <a:solidFill>
-                  <a:srgbClr val="6D8C97"/>
-                </a:solidFill>
-                <a:latin typeface="Consolas"/>
-              </a:rPr>
-              <a:t>  50  </a:t>
-            </a:r>
-            <a:r>
-              <a:rPr sz="1300">
-                <a:solidFill>
-                  <a:srgbClr val="6D8C97"/>
-                </a:solidFill>
-                <a:latin typeface="Consolas"/>
-              </a:rPr>
-              <a:t>      model: 'fast',</a:t>
-            </a:r>
-          </a:p>
-          <a:p>
-            <a:pPr>
-              <a:spcAft>
-                <a:spcPts val="0"/>
-              </a:spcAft>
-            </a:pPr>
-            <a:r>
-              <a:rPr sz="1300">
-                <a:solidFill>
-                  <a:srgbClr val="6D8C97"/>
-                </a:solidFill>
-                <a:latin typeface="Consolas"/>
-              </a:rPr>
-              <a:t>  51  </a:t>
-            </a:r>
-            <a:r>
-              <a:rPr sz="1300">
-                <a:solidFill>
-                  <a:srgbClr val="7FE0A0"/>
-                </a:solidFill>
-                <a:latin typeface="Consolas"/>
-              </a:rPr>
-              <a:t>      messages: [</a:t>
-            </a:r>
-          </a:p>
-        </p:txBody>
-      </p:sp>
-      <p:sp>
-        <p:nvSpPr>
-          <p:cNvPr id="4" name="TextBox 3"/>
-          <p:cNvSpPr txBox="1"/>
-          <p:nvPr/>
-        </p:nvSpPr>
-        <p:spPr>
-          <a:xfrm>
-            <a:off x="548640" y="5623560"/>
-            <a:ext cx="11064240" cy="1051560"/>
-          </a:xfrm>
-          <a:prstGeom prst="rect">
-            <a:avLst/>
-          </a:prstGeom>
-          <a:noFill/>
-        </p:spPr>
-        <p:txBody>
           <a:bodyPr wrap="square">
             <a:spAutoFit/>
           </a:bodyPr>
           <a:lstStyle/>
           <a:p>
-            <a:r>
-              <a:rPr sz="2000">
-                <a:solidFill>
-                  <a:srgbClr val="DCECEF"/>
-                </a:solidFill>
-              </a:rPr>
-              <a:t>messages: the conversation so far, as a list.</a:t>
+            <a:pPr>
+              <a:spcAft>
+                <a:spcPts val="1400"/>
+              </a:spcAft>
+            </a:pPr>
+            <a:r>
+              <a:rPr sz="2400">
+                <a:solidFill>
+                  <a:srgbClr val="1F2A37"/>
+                </a:solidFill>
+              </a:rPr>
+              <a:t>• An ordered list of things, in square brackets.</a:t>
+            </a:r>
+          </a:p>
+          <a:p>
+            <a:pPr>
+              <a:spcAft>
+                <a:spcPts val="1400"/>
+              </a:spcAft>
+            </a:pPr>
+            <a:r>
+              <a:rPr sz="2400">
+                <a:solidFill>
+                  <a:srgbClr val="1F2A37"/>
+                </a:solidFill>
+              </a:rPr>
+              <a:t>• messages: [ ... ] holds every message in order.</a:t>
             </a:r>
           </a:p>
         </p:txBody>
@@ -5926,7 +5618,7 @@
                   <a:srgbClr val="01AEFD"/>
                 </a:solidFill>
               </a:rPr>
-              <a:t>Type this into script.js   -   line 52</a:t>
+              <a:t>Type this into script.js   -   line 51</a:t>
             </a:r>
           </a:p>
         </p:txBody>
@@ -6270,36 +5962,11 @@
             <a:r>
               <a:rPr sz="1300">
                 <a:solidFill>
-                  <a:srgbClr val="6D8C97"/>
+                  <a:srgbClr val="7FE0A0"/>
                 </a:solidFill>
                 <a:latin typeface="Consolas"/>
               </a:rPr>
               <a:t>      messages: [</a:t>
-            </a:r>
-          </a:p>
-          <a:p>
-            <a:pPr>
-              <a:spcAft>
-                <a:spcPts val="0"/>
-              </a:spcAft>
-            </a:pPr>
-            <a:r>
-              <a:rPr sz="1300">
-                <a:solidFill>
-                  <a:srgbClr val="6D8C97"/>
-                </a:solidFill>
-                <a:latin typeface="Consolas"/>
-              </a:rPr>
-              <a:t>  52  </a:t>
-            </a:r>
-            <a:r>
-              <a:rPr sz="1300">
-                <a:solidFill>
-                  <a:srgbClr val="7FE0A0"/>
-                </a:solidFill>
-                <a:latin typeface="Consolas"/>
-              </a:rPr>
-              <a:t>        { role: 'user', content: question }</a:t>
             </a:r>
           </a:p>
         </p:txBody>
@@ -6332,7 +5999,7 @@
                   <a:srgbClr val="DCECEF"/>
                 </a:solidFill>
               </a:rPr>
-              <a:t>One message: role 'user' means YOU said it; content is the question.</a:t>
+              <a:t>messages: the conversation so far, as a list.</a:t>
             </a:r>
           </a:p>
         </p:txBody>
@@ -6391,7 +6058,7 @@
                   <a:srgbClr val="01AEFD"/>
                 </a:solidFill>
               </a:rPr>
-              <a:t>Type this into script.js   -   line 53</a:t>
+              <a:t>Type this into script.js   -   line 52</a:t>
             </a:r>
           </a:p>
         </p:txBody>
@@ -6760,36 +6427,11 @@
             <a:r>
               <a:rPr sz="1300">
                 <a:solidFill>
-                  <a:srgbClr val="6D8C97"/>
+                  <a:srgbClr val="7FE0A0"/>
                 </a:solidFill>
                 <a:latin typeface="Consolas"/>
               </a:rPr>
               <a:t>        { role: 'user', content: question }</a:t>
-            </a:r>
-          </a:p>
-          <a:p>
-            <a:pPr>
-              <a:spcAft>
-                <a:spcPts val="0"/>
-              </a:spcAft>
-            </a:pPr>
-            <a:r>
-              <a:rPr sz="1300">
-                <a:solidFill>
-                  <a:srgbClr val="6D8C97"/>
-                </a:solidFill>
-                <a:latin typeface="Consolas"/>
-              </a:rPr>
-              <a:t>  53  </a:t>
-            </a:r>
-            <a:r>
-              <a:rPr sz="1300">
-                <a:solidFill>
-                  <a:srgbClr val="7FE0A0"/>
-                </a:solidFill>
-                <a:latin typeface="Consolas"/>
-              </a:rPr>
-              <a:t>      ]</a:t>
             </a:r>
           </a:p>
         </p:txBody>
@@ -6822,7 +6464,7 @@
                   <a:srgbClr val="DCECEF"/>
                 </a:solidFill>
               </a:rPr>
-              <a:t>Closes the messages list.</a:t>
+              <a:t>One message: role 'user' means YOU said it; content is the question.</a:t>
             </a:r>
           </a:p>
         </p:txBody>
@@ -6993,7 +6635,7 @@
                   <a:srgbClr val="01AEFD"/>
                 </a:solidFill>
               </a:rPr>
-              <a:t>Type this into script.js   -   line 54</a:t>
+              <a:t>Type this into script.js   -   line 53</a:t>
             </a:r>
           </a:p>
         </p:txBody>
@@ -7387,36 +7029,11 @@
             <a:r>
               <a:rPr sz="1300">
                 <a:solidFill>
-                  <a:srgbClr val="6D8C97"/>
+                  <a:srgbClr val="7FE0A0"/>
                 </a:solidFill>
                 <a:latin typeface="Consolas"/>
               </a:rPr>
               <a:t>      ]</a:t>
-            </a:r>
-          </a:p>
-          <a:p>
-            <a:pPr>
-              <a:spcAft>
-                <a:spcPts val="0"/>
-              </a:spcAft>
-            </a:pPr>
-            <a:r>
-              <a:rPr sz="1300">
-                <a:solidFill>
-                  <a:srgbClr val="6D8C97"/>
-                </a:solidFill>
-                <a:latin typeface="Consolas"/>
-              </a:rPr>
-              <a:t>  54  </a:t>
-            </a:r>
-            <a:r>
-              <a:rPr sz="1300">
-                <a:solidFill>
-                  <a:srgbClr val="7FE0A0"/>
-                </a:solidFill>
-                <a:latin typeface="Consolas"/>
-              </a:rPr>
-              <a:t>    })</a:t>
             </a:r>
           </a:p>
         </p:txBody>
@@ -7449,7 +7066,7 @@
                   <a:srgbClr val="DCECEF"/>
                 </a:solidFill>
               </a:rPr>
-              <a:t>Closes the object we are sending.</a:t>
+              <a:t>Closes the messages list.</a:t>
             </a:r>
           </a:p>
         </p:txBody>
@@ -7508,7 +7125,7 @@
                   <a:srgbClr val="01AEFD"/>
                 </a:solidFill>
               </a:rPr>
-              <a:t>Type this into script.js   -   line 55</a:t>
+              <a:t>Type this into script.js   -   line 54</a:t>
             </a:r>
           </a:p>
         </p:txBody>
@@ -7927,36 +7544,11 @@
             <a:r>
               <a:rPr sz="1300">
                 <a:solidFill>
-                  <a:srgbClr val="6D8C97"/>
+                  <a:srgbClr val="7FE0A0"/>
                 </a:solidFill>
                 <a:latin typeface="Consolas"/>
               </a:rPr>
               <a:t>    })</a:t>
-            </a:r>
-          </a:p>
-          <a:p>
-            <a:pPr>
-              <a:spcAft>
-                <a:spcPts val="0"/>
-              </a:spcAft>
-            </a:pPr>
-            <a:r>
-              <a:rPr sz="1300">
-                <a:solidFill>
-                  <a:srgbClr val="6D8C97"/>
-                </a:solidFill>
-                <a:latin typeface="Consolas"/>
-              </a:rPr>
-              <a:t>  55  </a:t>
-            </a:r>
-            <a:r>
-              <a:rPr sz="1300">
-                <a:solidFill>
-                  <a:srgbClr val="7FE0A0"/>
-                </a:solidFill>
-                <a:latin typeface="Consolas"/>
-              </a:rPr>
-              <a:t>  });</a:t>
             </a:r>
           </a:p>
         </p:txBody>
@@ -7989,7 +7581,7 @@
                   <a:srgbClr val="DCECEF"/>
                 </a:solidFill>
               </a:rPr>
-              <a:t>Closes the fetch call.</a:t>
+              <a:t>Closes the object we are sending.</a:t>
             </a:r>
           </a:p>
         </p:txBody>
@@ -8048,7 +7640,7 @@
                   <a:srgbClr val="01AEFD"/>
                 </a:solidFill>
               </a:rPr>
-              <a:t>Type this into script.js   -   line 56</a:t>
+              <a:t>Type this into script.js   -   line 55</a:t>
             </a:r>
           </a:p>
         </p:txBody>
@@ -8492,36 +8084,11 @@
             <a:r>
               <a:rPr sz="1300">
                 <a:solidFill>
-                  <a:srgbClr val="6D8C97"/>
+                  <a:srgbClr val="7FE0A0"/>
                 </a:solidFill>
                 <a:latin typeface="Consolas"/>
               </a:rPr>
               <a:t>  });</a:t>
-            </a:r>
-          </a:p>
-          <a:p>
-            <a:pPr>
-              <a:spcAft>
-                <a:spcPts val="0"/>
-              </a:spcAft>
-            </a:pPr>
-            <a:r>
-              <a:rPr sz="1300">
-                <a:solidFill>
-                  <a:srgbClr val="6D8C97"/>
-                </a:solidFill>
-                <a:latin typeface="Consolas"/>
-              </a:rPr>
-              <a:t>  56  </a:t>
-            </a:r>
-            <a:r>
-              <a:rPr sz="1300">
-                <a:solidFill>
-                  <a:srgbClr val="7FE0A0"/>
-                </a:solidFill>
-                <a:latin typeface="Consolas"/>
-              </a:rPr>
-              <a:t>  const data = await res.json();</a:t>
             </a:r>
           </a:p>
         </p:txBody>
@@ -8554,7 +8121,7 @@
                   <a:srgbClr val="DCECEF"/>
                 </a:solidFill>
               </a:rPr>
-              <a:t>await res.json() reads the reply into data you can use.</a:t>
+              <a:t>Closes the fetch call.</a:t>
             </a:r>
           </a:p>
         </p:txBody>
@@ -8613,7 +8180,7 @@
                   <a:srgbClr val="01AEFD"/>
                 </a:solidFill>
               </a:rPr>
-              <a:t>Type this into script.js   -   line 57</a:t>
+              <a:t>Type this into script.js   -   line 56</a:t>
             </a:r>
           </a:p>
         </p:txBody>
@@ -9082,36 +8649,11 @@
             <a:r>
               <a:rPr sz="1300">
                 <a:solidFill>
-                  <a:srgbClr val="6D8C97"/>
+                  <a:srgbClr val="7FE0A0"/>
                 </a:solidFill>
                 <a:latin typeface="Consolas"/>
               </a:rPr>
               <a:t>  const data = await res.json();</a:t>
-            </a:r>
-          </a:p>
-          <a:p>
-            <a:pPr>
-              <a:spcAft>
-                <a:spcPts val="0"/>
-              </a:spcAft>
-            </a:pPr>
-            <a:r>
-              <a:rPr sz="1300">
-                <a:solidFill>
-                  <a:srgbClr val="6D8C97"/>
-                </a:solidFill>
-                <a:latin typeface="Consolas"/>
-              </a:rPr>
-              <a:t>  57  </a:t>
-            </a:r>
-            <a:r>
-              <a:rPr sz="1300">
-                <a:solidFill>
-                  <a:srgbClr val="7FE0A0"/>
-                </a:solidFill>
-                <a:latin typeface="Consolas"/>
-              </a:rPr>
-              <a:t>  return data.choices[0].message.content;</a:t>
             </a:r>
           </a:p>
         </p:txBody>
@@ -9144,7 +8686,7 @@
                   <a:srgbClr val="DCECEF"/>
                 </a:solidFill>
               </a:rPr>
-              <a:t>The answer hides at data.choices[0].message.content - return it to whoever asked.</a:t>
+              <a:t>await res.json() reads the reply into data you can use.</a:t>
             </a:r>
           </a:p>
         </p:txBody>
@@ -9160,14 +8702,6 @@
 <file path=ppt/slides/slide24.xml><?xml version="1.0" encoding="utf-8"?>
 <p:sld xmlns:a="http://schemas.openxmlformats.org/drawingml/2006/main" xmlns:p="http://schemas.openxmlformats.org/presentationml/2006/main" xmlns:r="http://schemas.openxmlformats.org/officeDocument/2006/relationships">
   <p:cSld>
-    <p:bg>
-      <p:bgPr>
-        <a:solidFill>
-          <a:srgbClr val="102127"/>
-        </a:solidFill>
-        <a:effectLst/>
-      </p:bgPr>
-    </p:bg>
     <p:spTree>
       <p:nvGrpSpPr>
         <p:cNvPr id="1" name=""/>
@@ -9177,14 +8711,40 @@
       <p:grpSpPr/>
       <p:sp>
         <p:nvSpPr>
-          <p:cNvPr id="2" name="TextBox 1"/>
+          <p:cNvPr id="2" name="Title 1"/>
+          <p:cNvSpPr>
+            <a:spLocks noGrp="1"/>
+          </p:cNvSpPr>
+          <p:nvPr>
+            <p:ph type="title"/>
+          </p:nvPr>
+        </p:nvSpPr>
+        <p:spPr/>
+        <p:txBody>
+          <a:bodyPr/>
+          <a:lstStyle/>
+          <a:p>
+            <a:r>
+              <a:rPr sz="3800" b="1">
+                <a:solidFill>
+                  <a:srgbClr val="1F2A37"/>
+                </a:solidFill>
+              </a:rPr>
+              <a:t>Picking from a list: [0]</a:t>
+            </a:r>
+          </a:p>
+        </p:txBody>
+      </p:sp>
+      <p:sp>
+        <p:nvSpPr>
+          <p:cNvPr id="3" name="TextBox 2"/>
           <p:cNvSpPr txBox="1"/>
           <p:nvPr/>
         </p:nvSpPr>
         <p:spPr>
           <a:xfrm>
-            <a:off x="502920" y="274320"/>
-            <a:ext cx="11155680" cy="548640"/>
+            <a:off x="868680" y="502920"/>
+            <a:ext cx="5486400" cy="457200"/>
           </a:xfrm>
           <a:prstGeom prst="rect">
             <a:avLst/>
@@ -9198,26 +8758,26 @@
           <a:lstStyle/>
           <a:p>
             <a:r>
-              <a:rPr sz="2200" b="1">
+              <a:rPr sz="1500" b="1">
                 <a:solidFill>
                   <a:srgbClr val="01AEFD"/>
                 </a:solidFill>
               </a:rPr>
-              <a:t>Type this into script.js   -   line 58</a:t>
-            </a:r>
-          </a:p>
-        </p:txBody>
-      </p:sp>
-      <p:sp>
-        <p:nvSpPr>
-          <p:cNvPr id="3" name="TextBox 2"/>
+              <a:t>JAVASCRIPT</a:t>
+            </a:r>
+          </a:p>
+        </p:txBody>
+      </p:sp>
+      <p:sp>
+        <p:nvSpPr>
+          <p:cNvPr id="4" name="TextBox 3"/>
           <p:cNvSpPr txBox="1"/>
           <p:nvPr/>
         </p:nvSpPr>
         <p:spPr>
           <a:xfrm>
-            <a:off x="502920" y="960120"/>
-            <a:ext cx="11155680" cy="4297680"/>
+            <a:off x="822960" y="1828800"/>
+            <a:ext cx="10515600" cy="4206240"/>
           </a:xfrm>
           <a:prstGeom prst="rect">
             <a:avLst/>
@@ -9225,541 +8785,38 @@
           <a:noFill/>
         </p:spPr>
         <p:txBody>
-          <a:bodyPr wrap="none">
-            <a:spAutoFit/>
-          </a:bodyPr>
-          <a:lstStyle/>
-          <a:p>
-            <a:pPr>
-              <a:spcAft>
-                <a:spcPts val="0"/>
-              </a:spcAft>
-            </a:pPr>
-            <a:r>
-              <a:rPr sz="1300">
-                <a:solidFill>
-                  <a:srgbClr val="6D8C97"/>
-                </a:solidFill>
-                <a:latin typeface="Consolas"/>
-              </a:rPr>
-              <a:t>  39  </a:t>
-            </a:r>
-            <a:r>
-              <a:rPr sz="1300">
-                <a:solidFill>
-                  <a:srgbClr val="6D8C97"/>
-                </a:solidFill>
-                <a:latin typeface="Consolas"/>
-              </a:rPr>
-              <a:t> </a:t>
-            </a:r>
-          </a:p>
-          <a:p>
-            <a:pPr>
-              <a:spcAft>
-                <a:spcPts val="0"/>
-              </a:spcAft>
-            </a:pPr>
-            <a:r>
-              <a:rPr sz="1300">
-                <a:solidFill>
-                  <a:srgbClr val="6D8C97"/>
-                </a:solidFill>
-                <a:latin typeface="Consolas"/>
-              </a:rPr>
-              <a:t>  40  </a:t>
-            </a:r>
-            <a:r>
-              <a:rPr sz="1300">
-                <a:solidFill>
-                  <a:srgbClr val="6D8C97"/>
-                </a:solidFill>
-                <a:latin typeface="Consolas"/>
-              </a:rPr>
-              <a:t>// Week 4: ask the AI a real question.</a:t>
-            </a:r>
-          </a:p>
-          <a:p>
-            <a:pPr>
-              <a:spcAft>
-                <a:spcPts val="0"/>
-              </a:spcAft>
-            </a:pPr>
-            <a:r>
-              <a:rPr sz="1300">
-                <a:solidFill>
-                  <a:srgbClr val="6D8C97"/>
-                </a:solidFill>
-                <a:latin typeface="Consolas"/>
-              </a:rPr>
-              <a:t>  41  </a:t>
-            </a:r>
-            <a:r>
-              <a:rPr sz="1300">
-                <a:solidFill>
-                  <a:srgbClr val="6D8C97"/>
-                </a:solidFill>
-                <a:latin typeface="Consolas"/>
-              </a:rPr>
-              <a:t>// A chat request is a LIST of messages. Each one says who said it.</a:t>
-            </a:r>
-          </a:p>
-          <a:p>
-            <a:pPr>
-              <a:spcAft>
-                <a:spcPts val="0"/>
-              </a:spcAft>
-            </a:pPr>
-            <a:r>
-              <a:rPr sz="1300">
-                <a:solidFill>
-                  <a:srgbClr val="6D8C97"/>
-                </a:solidFill>
-                <a:latin typeface="Consolas"/>
-              </a:rPr>
-              <a:t>  42  </a:t>
-            </a:r>
-            <a:r>
-              <a:rPr sz="1300">
-                <a:solidFill>
-                  <a:srgbClr val="6D8C97"/>
-                </a:solidFill>
-                <a:latin typeface="Consolas"/>
-              </a:rPr>
-              <a:t>async function askAI(question) {</a:t>
-            </a:r>
-          </a:p>
-          <a:p>
-            <a:pPr>
-              <a:spcAft>
-                <a:spcPts val="0"/>
-              </a:spcAft>
-            </a:pPr>
-            <a:r>
-              <a:rPr sz="1300">
-                <a:solidFill>
-                  <a:srgbClr val="6D8C97"/>
-                </a:solidFill>
-                <a:latin typeface="Consolas"/>
-              </a:rPr>
-              <a:t>  43  </a:t>
-            </a:r>
-            <a:r>
-              <a:rPr sz="1300">
-                <a:solidFill>
-                  <a:srgbClr val="6D8C97"/>
-                </a:solidFill>
-                <a:latin typeface="Consolas"/>
-              </a:rPr>
-              <a:t>  const res = await fetch(AI_BASE + '/v1/chat/completions', {</a:t>
-            </a:r>
-          </a:p>
-          <a:p>
-            <a:pPr>
-              <a:spcAft>
-                <a:spcPts val="0"/>
-              </a:spcAft>
-            </a:pPr>
-            <a:r>
-              <a:rPr sz="1300">
-                <a:solidFill>
-                  <a:srgbClr val="6D8C97"/>
-                </a:solidFill>
-                <a:latin typeface="Consolas"/>
-              </a:rPr>
-              <a:t>  44  </a:t>
-            </a:r>
-            <a:r>
-              <a:rPr sz="1300">
-                <a:solidFill>
-                  <a:srgbClr val="6D8C97"/>
-                </a:solidFill>
-                <a:latin typeface="Consolas"/>
-              </a:rPr>
-              <a:t>    method: 'POST',                       // POST = I am sending you something</a:t>
-            </a:r>
-          </a:p>
-          <a:p>
-            <a:pPr>
-              <a:spcAft>
-                <a:spcPts val="0"/>
-              </a:spcAft>
-            </a:pPr>
-            <a:r>
-              <a:rPr sz="1300">
-                <a:solidFill>
-                  <a:srgbClr val="6D8C97"/>
-                </a:solidFill>
-                <a:latin typeface="Consolas"/>
-              </a:rPr>
-              <a:t>  45  </a:t>
-            </a:r>
-            <a:r>
-              <a:rPr sz="1300">
-                <a:solidFill>
-                  <a:srgbClr val="6D8C97"/>
-                </a:solidFill>
-                <a:latin typeface="Consolas"/>
-              </a:rPr>
-              <a:t>    headers: {</a:t>
-            </a:r>
-          </a:p>
-          <a:p>
-            <a:pPr>
-              <a:spcAft>
-                <a:spcPts val="0"/>
-              </a:spcAft>
-            </a:pPr>
-            <a:r>
-              <a:rPr sz="1300">
-                <a:solidFill>
-                  <a:srgbClr val="6D8C97"/>
-                </a:solidFill>
-                <a:latin typeface="Consolas"/>
-              </a:rPr>
-              <a:t>  46  </a:t>
-            </a:r>
-            <a:r>
-              <a:rPr sz="1300">
-                <a:solidFill>
-                  <a:srgbClr val="6D8C97"/>
-                </a:solidFill>
-                <a:latin typeface="Consolas"/>
-              </a:rPr>
-              <a:t>      'Content-Type': 'application/json', // what I am sending is JSON</a:t>
-            </a:r>
-          </a:p>
-          <a:p>
-            <a:pPr>
-              <a:spcAft>
-                <a:spcPts val="0"/>
-              </a:spcAft>
-            </a:pPr>
-            <a:r>
-              <a:rPr sz="1300">
-                <a:solidFill>
-                  <a:srgbClr val="6D8C97"/>
-                </a:solidFill>
-                <a:latin typeface="Consolas"/>
-              </a:rPr>
-              <a:t>  47  </a:t>
-            </a:r>
-            <a:r>
-              <a:rPr sz="1300">
-                <a:solidFill>
-                  <a:srgbClr val="6D8C97"/>
-                </a:solidFill>
-                <a:latin typeface="Consolas"/>
-              </a:rPr>
-              <a:t>      'Authorization': 'Bearer ' + API_KEY</a:t>
-            </a:r>
-          </a:p>
-          <a:p>
-            <a:pPr>
-              <a:spcAft>
-                <a:spcPts val="0"/>
-              </a:spcAft>
-            </a:pPr>
-            <a:r>
-              <a:rPr sz="1300">
-                <a:solidFill>
-                  <a:srgbClr val="6D8C97"/>
-                </a:solidFill>
-                <a:latin typeface="Consolas"/>
-              </a:rPr>
-              <a:t>  48  </a:t>
-            </a:r>
-            <a:r>
-              <a:rPr sz="1300">
-                <a:solidFill>
-                  <a:srgbClr val="6D8C97"/>
-                </a:solidFill>
-                <a:latin typeface="Consolas"/>
-              </a:rPr>
-              <a:t>    },</a:t>
-            </a:r>
-          </a:p>
-          <a:p>
-            <a:pPr>
-              <a:spcAft>
-                <a:spcPts val="0"/>
-              </a:spcAft>
-            </a:pPr>
-            <a:r>
-              <a:rPr sz="1300">
-                <a:solidFill>
-                  <a:srgbClr val="6D8C97"/>
-                </a:solidFill>
-                <a:latin typeface="Consolas"/>
-              </a:rPr>
-              <a:t>  49  </a:t>
-            </a:r>
-            <a:r>
-              <a:rPr sz="1300">
-                <a:solidFill>
-                  <a:srgbClr val="6D8C97"/>
-                </a:solidFill>
-                <a:latin typeface="Consolas"/>
-              </a:rPr>
-              <a:t>    body: JSON.stringify({</a:t>
-            </a:r>
-          </a:p>
-          <a:p>
-            <a:pPr>
-              <a:spcAft>
-                <a:spcPts val="0"/>
-              </a:spcAft>
-            </a:pPr>
-            <a:r>
-              <a:rPr sz="1300">
-                <a:solidFill>
-                  <a:srgbClr val="6D8C97"/>
-                </a:solidFill>
-                <a:latin typeface="Consolas"/>
-              </a:rPr>
-              <a:t>  50  </a:t>
-            </a:r>
-            <a:r>
-              <a:rPr sz="1300">
-                <a:solidFill>
-                  <a:srgbClr val="6D8C97"/>
-                </a:solidFill>
-                <a:latin typeface="Consolas"/>
-              </a:rPr>
-              <a:t>      model: 'fast',</a:t>
-            </a:r>
-          </a:p>
-          <a:p>
-            <a:pPr>
-              <a:spcAft>
-                <a:spcPts val="0"/>
-              </a:spcAft>
-            </a:pPr>
-            <a:r>
-              <a:rPr sz="1300">
-                <a:solidFill>
-                  <a:srgbClr val="6D8C97"/>
-                </a:solidFill>
-                <a:latin typeface="Consolas"/>
-              </a:rPr>
-              <a:t>  51  </a:t>
-            </a:r>
-            <a:r>
-              <a:rPr sz="1300">
-                <a:solidFill>
-                  <a:srgbClr val="6D8C97"/>
-                </a:solidFill>
-                <a:latin typeface="Consolas"/>
-              </a:rPr>
-              <a:t>      messages: [</a:t>
-            </a:r>
-          </a:p>
-          <a:p>
-            <a:pPr>
-              <a:spcAft>
-                <a:spcPts val="0"/>
-              </a:spcAft>
-            </a:pPr>
-            <a:r>
-              <a:rPr sz="1300">
-                <a:solidFill>
-                  <a:srgbClr val="6D8C97"/>
-                </a:solidFill>
-                <a:latin typeface="Consolas"/>
-              </a:rPr>
-              <a:t>  52  </a:t>
-            </a:r>
-            <a:r>
-              <a:rPr sz="1300">
-                <a:solidFill>
-                  <a:srgbClr val="6D8C97"/>
-                </a:solidFill>
-                <a:latin typeface="Consolas"/>
-              </a:rPr>
-              <a:t>        { role: 'user', content: question }</a:t>
-            </a:r>
-          </a:p>
-          <a:p>
-            <a:pPr>
-              <a:spcAft>
-                <a:spcPts val="0"/>
-              </a:spcAft>
-            </a:pPr>
-            <a:r>
-              <a:rPr sz="1300">
-                <a:solidFill>
-                  <a:srgbClr val="6D8C97"/>
-                </a:solidFill>
-                <a:latin typeface="Consolas"/>
-              </a:rPr>
-              <a:t>  53  </a:t>
-            </a:r>
-            <a:r>
-              <a:rPr sz="1300">
-                <a:solidFill>
-                  <a:srgbClr val="6D8C97"/>
-                </a:solidFill>
-                <a:latin typeface="Consolas"/>
-              </a:rPr>
-              <a:t>      ]</a:t>
-            </a:r>
-          </a:p>
-          <a:p>
-            <a:pPr>
-              <a:spcAft>
-                <a:spcPts val="0"/>
-              </a:spcAft>
-            </a:pPr>
-            <a:r>
-              <a:rPr sz="1300">
-                <a:solidFill>
-                  <a:srgbClr val="6D8C97"/>
-                </a:solidFill>
-                <a:latin typeface="Consolas"/>
-              </a:rPr>
-              <a:t>  54  </a:t>
-            </a:r>
-            <a:r>
-              <a:rPr sz="1300">
-                <a:solidFill>
-                  <a:srgbClr val="6D8C97"/>
-                </a:solidFill>
-                <a:latin typeface="Consolas"/>
-              </a:rPr>
-              <a:t>    })</a:t>
-            </a:r>
-          </a:p>
-          <a:p>
-            <a:pPr>
-              <a:spcAft>
-                <a:spcPts val="0"/>
-              </a:spcAft>
-            </a:pPr>
-            <a:r>
-              <a:rPr sz="1300">
-                <a:solidFill>
-                  <a:srgbClr val="6D8C97"/>
-                </a:solidFill>
-                <a:latin typeface="Consolas"/>
-              </a:rPr>
-              <a:t>  55  </a:t>
-            </a:r>
-            <a:r>
-              <a:rPr sz="1300">
-                <a:solidFill>
-                  <a:srgbClr val="6D8C97"/>
-                </a:solidFill>
-                <a:latin typeface="Consolas"/>
-              </a:rPr>
-              <a:t>  });</a:t>
-            </a:r>
-          </a:p>
-          <a:p>
-            <a:pPr>
-              <a:spcAft>
-                <a:spcPts val="0"/>
-              </a:spcAft>
-            </a:pPr>
-            <a:r>
-              <a:rPr sz="1300">
-                <a:solidFill>
-                  <a:srgbClr val="6D8C97"/>
-                </a:solidFill>
-                <a:latin typeface="Consolas"/>
-              </a:rPr>
-              <a:t>  56  </a:t>
-            </a:r>
-            <a:r>
-              <a:rPr sz="1300">
-                <a:solidFill>
-                  <a:srgbClr val="6D8C97"/>
-                </a:solidFill>
-                <a:latin typeface="Consolas"/>
-              </a:rPr>
-              <a:t>  const data = await res.json();</a:t>
-            </a:r>
-          </a:p>
-          <a:p>
-            <a:pPr>
-              <a:spcAft>
-                <a:spcPts val="0"/>
-              </a:spcAft>
-            </a:pPr>
-            <a:r>
-              <a:rPr sz="1300">
-                <a:solidFill>
-                  <a:srgbClr val="6D8C97"/>
-                </a:solidFill>
-                <a:latin typeface="Consolas"/>
-              </a:rPr>
-              <a:t>  57  </a:t>
-            </a:r>
-            <a:r>
-              <a:rPr sz="1300">
-                <a:solidFill>
-                  <a:srgbClr val="6D8C97"/>
-                </a:solidFill>
-                <a:latin typeface="Consolas"/>
-              </a:rPr>
-              <a:t>  return data.choices[0].message.content;</a:t>
-            </a:r>
-          </a:p>
-          <a:p>
-            <a:pPr>
-              <a:spcAft>
-                <a:spcPts val="0"/>
-              </a:spcAft>
-            </a:pPr>
-            <a:r>
-              <a:rPr sz="1300">
-                <a:solidFill>
-                  <a:srgbClr val="6D8C97"/>
-                </a:solidFill>
-                <a:latin typeface="Consolas"/>
-              </a:rPr>
-              <a:t>  58  </a:t>
-            </a:r>
-            <a:r>
-              <a:rPr sz="1300">
-                <a:solidFill>
-                  <a:srgbClr val="7FE0A0"/>
-                </a:solidFill>
-                <a:latin typeface="Consolas"/>
-              </a:rPr>
-              <a:t>}</a:t>
-            </a:r>
-          </a:p>
-        </p:txBody>
-      </p:sp>
-      <p:sp>
-        <p:nvSpPr>
-          <p:cNvPr id="4" name="TextBox 3"/>
-          <p:cNvSpPr txBox="1"/>
-          <p:nvPr/>
-        </p:nvSpPr>
-        <p:spPr>
-          <a:xfrm>
-            <a:off x="548640" y="5623560"/>
-            <a:ext cx="11064240" cy="1051560"/>
-          </a:xfrm>
-          <a:prstGeom prst="rect">
-            <a:avLst/>
-          </a:prstGeom>
-          <a:noFill/>
-        </p:spPr>
-        <p:txBody>
           <a:bodyPr wrap="square">
             <a:spAutoFit/>
           </a:bodyPr>
           <a:lstStyle/>
           <a:p>
-            <a:r>
-              <a:rPr sz="2000">
-                <a:solidFill>
-                  <a:srgbClr val="DCECEF"/>
-                </a:solidFill>
-              </a:rPr>
-              <a:t>Closes the function.</a:t>
+            <a:pPr>
+              <a:spcAft>
+                <a:spcPts val="1400"/>
+              </a:spcAft>
+            </a:pPr>
+            <a:r>
+              <a:rPr sz="2400">
+                <a:solidFill>
+                  <a:srgbClr val="1F2A37"/>
+                </a:solidFill>
+              </a:rPr>
+              <a:t>• [0] takes the FIRST item - counting starts at 0, not 1.</a:t>
+            </a:r>
+          </a:p>
+          <a:p>
+            <a:pPr>
+              <a:spcAft>
+                <a:spcPts val="1400"/>
+              </a:spcAft>
+            </a:pPr>
+            <a:r>
+              <a:rPr sz="2400">
+                <a:solidFill>
+                  <a:srgbClr val="1F2A37"/>
+                </a:solidFill>
+              </a:rPr>
+              <a:t>• choices[0] is the first choice.</a:t>
             </a:r>
           </a:p>
         </p:txBody>
@@ -9818,7 +8875,7 @@
                   <a:srgbClr val="01AEFD"/>
                 </a:solidFill>
               </a:rPr>
-              <a:t>All together in script.js</a:t>
+              <a:t>Type this into script.js   -   line 57</a:t>
             </a:r>
           </a:p>
         </p:txBody>
@@ -9862,486 +8919,461 @@
             <a:r>
               <a:rPr sz="1300">
                 <a:solidFill>
+                  <a:srgbClr val="6D8C97"/>
+                </a:solidFill>
+                <a:latin typeface="Consolas"/>
+              </a:rPr>
+              <a:t> </a:t>
+            </a:r>
+          </a:p>
+          <a:p>
+            <a:pPr>
+              <a:spcAft>
+                <a:spcPts val="0"/>
+              </a:spcAft>
+            </a:pPr>
+            <a:r>
+              <a:rPr sz="1300">
+                <a:solidFill>
+                  <a:srgbClr val="6D8C97"/>
+                </a:solidFill>
+                <a:latin typeface="Consolas"/>
+              </a:rPr>
+              <a:t>  40  </a:t>
+            </a:r>
+            <a:r>
+              <a:rPr sz="1300">
+                <a:solidFill>
+                  <a:srgbClr val="6D8C97"/>
+                </a:solidFill>
+                <a:latin typeface="Consolas"/>
+              </a:rPr>
+              <a:t>// Week 4: ask the AI a real question.</a:t>
+            </a:r>
+          </a:p>
+          <a:p>
+            <a:pPr>
+              <a:spcAft>
+                <a:spcPts val="0"/>
+              </a:spcAft>
+            </a:pPr>
+            <a:r>
+              <a:rPr sz="1300">
+                <a:solidFill>
+                  <a:srgbClr val="6D8C97"/>
+                </a:solidFill>
+                <a:latin typeface="Consolas"/>
+              </a:rPr>
+              <a:t>  41  </a:t>
+            </a:r>
+            <a:r>
+              <a:rPr sz="1300">
+                <a:solidFill>
+                  <a:srgbClr val="6D8C97"/>
+                </a:solidFill>
+                <a:latin typeface="Consolas"/>
+              </a:rPr>
+              <a:t>// A chat request is a LIST of messages. Each one says who said it.</a:t>
+            </a:r>
+          </a:p>
+          <a:p>
+            <a:pPr>
+              <a:spcAft>
+                <a:spcPts val="0"/>
+              </a:spcAft>
+            </a:pPr>
+            <a:r>
+              <a:rPr sz="1300">
+                <a:solidFill>
+                  <a:srgbClr val="6D8C97"/>
+                </a:solidFill>
+                <a:latin typeface="Consolas"/>
+              </a:rPr>
+              <a:t>  42  </a:t>
+            </a:r>
+            <a:r>
+              <a:rPr sz="1300">
+                <a:solidFill>
+                  <a:srgbClr val="6D8C97"/>
+                </a:solidFill>
+                <a:latin typeface="Consolas"/>
+              </a:rPr>
+              <a:t>async function askAI(question) {</a:t>
+            </a:r>
+          </a:p>
+          <a:p>
+            <a:pPr>
+              <a:spcAft>
+                <a:spcPts val="0"/>
+              </a:spcAft>
+            </a:pPr>
+            <a:r>
+              <a:rPr sz="1300">
+                <a:solidFill>
+                  <a:srgbClr val="6D8C97"/>
+                </a:solidFill>
+                <a:latin typeface="Consolas"/>
+              </a:rPr>
+              <a:t>  43  </a:t>
+            </a:r>
+            <a:r>
+              <a:rPr sz="1300">
+                <a:solidFill>
+                  <a:srgbClr val="6D8C97"/>
+                </a:solidFill>
+                <a:latin typeface="Consolas"/>
+              </a:rPr>
+              <a:t>  const res = await fetch(AI_BASE + '/v1/chat/completions', {</a:t>
+            </a:r>
+          </a:p>
+          <a:p>
+            <a:pPr>
+              <a:spcAft>
+                <a:spcPts val="0"/>
+              </a:spcAft>
+            </a:pPr>
+            <a:r>
+              <a:rPr sz="1300">
+                <a:solidFill>
+                  <a:srgbClr val="6D8C97"/>
+                </a:solidFill>
+                <a:latin typeface="Consolas"/>
+              </a:rPr>
+              <a:t>  44  </a:t>
+            </a:r>
+            <a:r>
+              <a:rPr sz="1300">
+                <a:solidFill>
+                  <a:srgbClr val="6D8C97"/>
+                </a:solidFill>
+                <a:latin typeface="Consolas"/>
+              </a:rPr>
+              <a:t>    method: 'POST',                       // POST = I am sending you something</a:t>
+            </a:r>
+          </a:p>
+          <a:p>
+            <a:pPr>
+              <a:spcAft>
+                <a:spcPts val="0"/>
+              </a:spcAft>
+            </a:pPr>
+            <a:r>
+              <a:rPr sz="1300">
+                <a:solidFill>
+                  <a:srgbClr val="6D8C97"/>
+                </a:solidFill>
+                <a:latin typeface="Consolas"/>
+              </a:rPr>
+              <a:t>  45  </a:t>
+            </a:r>
+            <a:r>
+              <a:rPr sz="1300">
+                <a:solidFill>
+                  <a:srgbClr val="6D8C97"/>
+                </a:solidFill>
+                <a:latin typeface="Consolas"/>
+              </a:rPr>
+              <a:t>    headers: {</a:t>
+            </a:r>
+          </a:p>
+          <a:p>
+            <a:pPr>
+              <a:spcAft>
+                <a:spcPts val="0"/>
+              </a:spcAft>
+            </a:pPr>
+            <a:r>
+              <a:rPr sz="1300">
+                <a:solidFill>
+                  <a:srgbClr val="6D8C97"/>
+                </a:solidFill>
+                <a:latin typeface="Consolas"/>
+              </a:rPr>
+              <a:t>  46  </a:t>
+            </a:r>
+            <a:r>
+              <a:rPr sz="1300">
+                <a:solidFill>
+                  <a:srgbClr val="6D8C97"/>
+                </a:solidFill>
+                <a:latin typeface="Consolas"/>
+              </a:rPr>
+              <a:t>      'Content-Type': 'application/json', // what I am sending is JSON</a:t>
+            </a:r>
+          </a:p>
+          <a:p>
+            <a:pPr>
+              <a:spcAft>
+                <a:spcPts val="0"/>
+              </a:spcAft>
+            </a:pPr>
+            <a:r>
+              <a:rPr sz="1300">
+                <a:solidFill>
+                  <a:srgbClr val="6D8C97"/>
+                </a:solidFill>
+                <a:latin typeface="Consolas"/>
+              </a:rPr>
+              <a:t>  47  </a:t>
+            </a:r>
+            <a:r>
+              <a:rPr sz="1300">
+                <a:solidFill>
+                  <a:srgbClr val="6D8C97"/>
+                </a:solidFill>
+                <a:latin typeface="Consolas"/>
+              </a:rPr>
+              <a:t>      'Authorization': 'Bearer ' + API_KEY</a:t>
+            </a:r>
+          </a:p>
+          <a:p>
+            <a:pPr>
+              <a:spcAft>
+                <a:spcPts val="0"/>
+              </a:spcAft>
+            </a:pPr>
+            <a:r>
+              <a:rPr sz="1300">
+                <a:solidFill>
+                  <a:srgbClr val="6D8C97"/>
+                </a:solidFill>
+                <a:latin typeface="Consolas"/>
+              </a:rPr>
+              <a:t>  48  </a:t>
+            </a:r>
+            <a:r>
+              <a:rPr sz="1300">
+                <a:solidFill>
+                  <a:srgbClr val="6D8C97"/>
+                </a:solidFill>
+                <a:latin typeface="Consolas"/>
+              </a:rPr>
+              <a:t>    },</a:t>
+            </a:r>
+          </a:p>
+          <a:p>
+            <a:pPr>
+              <a:spcAft>
+                <a:spcPts val="0"/>
+              </a:spcAft>
+            </a:pPr>
+            <a:r>
+              <a:rPr sz="1300">
+                <a:solidFill>
+                  <a:srgbClr val="6D8C97"/>
+                </a:solidFill>
+                <a:latin typeface="Consolas"/>
+              </a:rPr>
+              <a:t>  49  </a:t>
+            </a:r>
+            <a:r>
+              <a:rPr sz="1300">
+                <a:solidFill>
+                  <a:srgbClr val="6D8C97"/>
+                </a:solidFill>
+                <a:latin typeface="Consolas"/>
+              </a:rPr>
+              <a:t>    body: JSON.stringify({</a:t>
+            </a:r>
+          </a:p>
+          <a:p>
+            <a:pPr>
+              <a:spcAft>
+                <a:spcPts val="0"/>
+              </a:spcAft>
+            </a:pPr>
+            <a:r>
+              <a:rPr sz="1300">
+                <a:solidFill>
+                  <a:srgbClr val="6D8C97"/>
+                </a:solidFill>
+                <a:latin typeface="Consolas"/>
+              </a:rPr>
+              <a:t>  50  </a:t>
+            </a:r>
+            <a:r>
+              <a:rPr sz="1300">
+                <a:solidFill>
+                  <a:srgbClr val="6D8C97"/>
+                </a:solidFill>
+                <a:latin typeface="Consolas"/>
+              </a:rPr>
+              <a:t>      model: 'fast',</a:t>
+            </a:r>
+          </a:p>
+          <a:p>
+            <a:pPr>
+              <a:spcAft>
+                <a:spcPts val="0"/>
+              </a:spcAft>
+            </a:pPr>
+            <a:r>
+              <a:rPr sz="1300">
+                <a:solidFill>
+                  <a:srgbClr val="6D8C97"/>
+                </a:solidFill>
+                <a:latin typeface="Consolas"/>
+              </a:rPr>
+              <a:t>  51  </a:t>
+            </a:r>
+            <a:r>
+              <a:rPr sz="1300">
+                <a:solidFill>
+                  <a:srgbClr val="6D8C97"/>
+                </a:solidFill>
+                <a:latin typeface="Consolas"/>
+              </a:rPr>
+              <a:t>      messages: [</a:t>
+            </a:r>
+          </a:p>
+          <a:p>
+            <a:pPr>
+              <a:spcAft>
+                <a:spcPts val="0"/>
+              </a:spcAft>
+            </a:pPr>
+            <a:r>
+              <a:rPr sz="1300">
+                <a:solidFill>
+                  <a:srgbClr val="6D8C97"/>
+                </a:solidFill>
+                <a:latin typeface="Consolas"/>
+              </a:rPr>
+              <a:t>  52  </a:t>
+            </a:r>
+            <a:r>
+              <a:rPr sz="1300">
+                <a:solidFill>
+                  <a:srgbClr val="6D8C97"/>
+                </a:solidFill>
+                <a:latin typeface="Consolas"/>
+              </a:rPr>
+              <a:t>        { role: 'user', content: question }</a:t>
+            </a:r>
+          </a:p>
+          <a:p>
+            <a:pPr>
+              <a:spcAft>
+                <a:spcPts val="0"/>
+              </a:spcAft>
+            </a:pPr>
+            <a:r>
+              <a:rPr sz="1300">
+                <a:solidFill>
+                  <a:srgbClr val="6D8C97"/>
+                </a:solidFill>
+                <a:latin typeface="Consolas"/>
+              </a:rPr>
+              <a:t>  53  </a:t>
+            </a:r>
+            <a:r>
+              <a:rPr sz="1300">
+                <a:solidFill>
+                  <a:srgbClr val="6D8C97"/>
+                </a:solidFill>
+                <a:latin typeface="Consolas"/>
+              </a:rPr>
+              <a:t>      ]</a:t>
+            </a:r>
+          </a:p>
+          <a:p>
+            <a:pPr>
+              <a:spcAft>
+                <a:spcPts val="0"/>
+              </a:spcAft>
+            </a:pPr>
+            <a:r>
+              <a:rPr sz="1300">
+                <a:solidFill>
+                  <a:srgbClr val="6D8C97"/>
+                </a:solidFill>
+                <a:latin typeface="Consolas"/>
+              </a:rPr>
+              <a:t>  54  </a:t>
+            </a:r>
+            <a:r>
+              <a:rPr sz="1300">
+                <a:solidFill>
+                  <a:srgbClr val="6D8C97"/>
+                </a:solidFill>
+                <a:latin typeface="Consolas"/>
+              </a:rPr>
+              <a:t>    })</a:t>
+            </a:r>
+          </a:p>
+          <a:p>
+            <a:pPr>
+              <a:spcAft>
+                <a:spcPts val="0"/>
+              </a:spcAft>
+            </a:pPr>
+            <a:r>
+              <a:rPr sz="1300">
+                <a:solidFill>
+                  <a:srgbClr val="6D8C97"/>
+                </a:solidFill>
+                <a:latin typeface="Consolas"/>
+              </a:rPr>
+              <a:t>  55  </a:t>
+            </a:r>
+            <a:r>
+              <a:rPr sz="1300">
+                <a:solidFill>
+                  <a:srgbClr val="6D8C97"/>
+                </a:solidFill>
+                <a:latin typeface="Consolas"/>
+              </a:rPr>
+              <a:t>  });</a:t>
+            </a:r>
+          </a:p>
+          <a:p>
+            <a:pPr>
+              <a:spcAft>
+                <a:spcPts val="0"/>
+              </a:spcAft>
+            </a:pPr>
+            <a:r>
+              <a:rPr sz="1300">
+                <a:solidFill>
+                  <a:srgbClr val="6D8C97"/>
+                </a:solidFill>
+                <a:latin typeface="Consolas"/>
+              </a:rPr>
+              <a:t>  56  </a:t>
+            </a:r>
+            <a:r>
+              <a:rPr sz="1300">
+                <a:solidFill>
+                  <a:srgbClr val="6D8C97"/>
+                </a:solidFill>
+                <a:latin typeface="Consolas"/>
+              </a:rPr>
+              <a:t>  const data = await res.json();</a:t>
+            </a:r>
+          </a:p>
+          <a:p>
+            <a:pPr>
+              <a:spcAft>
+                <a:spcPts val="0"/>
+              </a:spcAft>
+            </a:pPr>
+            <a:r>
+              <a:rPr sz="1300">
+                <a:solidFill>
+                  <a:srgbClr val="6D8C97"/>
+                </a:solidFill>
+                <a:latin typeface="Consolas"/>
+              </a:rPr>
+              <a:t>  57  </a:t>
+            </a:r>
+            <a:r>
+              <a:rPr sz="1300">
+                <a:solidFill>
                   <a:srgbClr val="7FE0A0"/>
                 </a:solidFill>
                 <a:latin typeface="Consolas"/>
               </a:rPr>
-              <a:t> </a:t>
-            </a:r>
-          </a:p>
-          <a:p>
-            <a:pPr>
-              <a:spcAft>
-                <a:spcPts val="0"/>
-              </a:spcAft>
-            </a:pPr>
-            <a:r>
-              <a:rPr sz="1300">
-                <a:solidFill>
-                  <a:srgbClr val="6D8C97"/>
-                </a:solidFill>
-                <a:latin typeface="Consolas"/>
-              </a:rPr>
-              <a:t>  40  </a:t>
-            </a:r>
-            <a:r>
-              <a:rPr sz="1300">
-                <a:solidFill>
-                  <a:srgbClr val="7FE0A0"/>
-                </a:solidFill>
-                <a:latin typeface="Consolas"/>
-              </a:rPr>
-              <a:t>// Week 4: ask the AI a real question.</a:t>
-            </a:r>
-          </a:p>
-          <a:p>
-            <a:pPr>
-              <a:spcAft>
-                <a:spcPts val="0"/>
-              </a:spcAft>
-            </a:pPr>
-            <a:r>
-              <a:rPr sz="1300">
-                <a:solidFill>
-                  <a:srgbClr val="6D8C97"/>
-                </a:solidFill>
-                <a:latin typeface="Consolas"/>
-              </a:rPr>
-              <a:t>  41  </a:t>
-            </a:r>
-            <a:r>
-              <a:rPr sz="1300">
-                <a:solidFill>
-                  <a:srgbClr val="7FE0A0"/>
-                </a:solidFill>
-                <a:latin typeface="Consolas"/>
-              </a:rPr>
-              <a:t>// A chat request is a LIST of messages. Each one says who said it.</a:t>
-            </a:r>
-          </a:p>
-          <a:p>
-            <a:pPr>
-              <a:spcAft>
-                <a:spcPts val="0"/>
-              </a:spcAft>
-            </a:pPr>
-            <a:r>
-              <a:rPr sz="1300">
-                <a:solidFill>
-                  <a:srgbClr val="6D8C97"/>
-                </a:solidFill>
-                <a:latin typeface="Consolas"/>
-              </a:rPr>
-              <a:t>  42  </a:t>
-            </a:r>
-            <a:r>
-              <a:rPr sz="1300">
-                <a:solidFill>
-                  <a:srgbClr val="7FE0A0"/>
-                </a:solidFill>
-                <a:latin typeface="Consolas"/>
-              </a:rPr>
-              <a:t>async function askAI(question) {</a:t>
-            </a:r>
-          </a:p>
-          <a:p>
-            <a:pPr>
-              <a:spcAft>
-                <a:spcPts val="0"/>
-              </a:spcAft>
-            </a:pPr>
-            <a:r>
-              <a:rPr sz="1300">
-                <a:solidFill>
-                  <a:srgbClr val="6D8C97"/>
-                </a:solidFill>
-                <a:latin typeface="Consolas"/>
-              </a:rPr>
-              <a:t>  43  </a:t>
-            </a:r>
-            <a:r>
-              <a:rPr sz="1300">
-                <a:solidFill>
-                  <a:srgbClr val="7FE0A0"/>
-                </a:solidFill>
-                <a:latin typeface="Consolas"/>
-              </a:rPr>
-              <a:t>  const res = await fetch(AI_BASE + '/v1/chat/completions', {</a:t>
-            </a:r>
-          </a:p>
-          <a:p>
-            <a:pPr>
-              <a:spcAft>
-                <a:spcPts val="0"/>
-              </a:spcAft>
-            </a:pPr>
-            <a:r>
-              <a:rPr sz="1300">
-                <a:solidFill>
-                  <a:srgbClr val="6D8C97"/>
-                </a:solidFill>
-                <a:latin typeface="Consolas"/>
-              </a:rPr>
-              <a:t>  44  </a:t>
-            </a:r>
-            <a:r>
-              <a:rPr sz="1300">
-                <a:solidFill>
-                  <a:srgbClr val="7FE0A0"/>
-                </a:solidFill>
-                <a:latin typeface="Consolas"/>
-              </a:rPr>
-              <a:t>    method: 'POST',                       // POST = I am sending you something</a:t>
-            </a:r>
-          </a:p>
-          <a:p>
-            <a:pPr>
-              <a:spcAft>
-                <a:spcPts val="0"/>
-              </a:spcAft>
-            </a:pPr>
-            <a:r>
-              <a:rPr sz="1300">
-                <a:solidFill>
-                  <a:srgbClr val="6D8C97"/>
-                </a:solidFill>
-                <a:latin typeface="Consolas"/>
-              </a:rPr>
-              <a:t>  45  </a:t>
-            </a:r>
-            <a:r>
-              <a:rPr sz="1300">
-                <a:solidFill>
-                  <a:srgbClr val="7FE0A0"/>
-                </a:solidFill>
-                <a:latin typeface="Consolas"/>
-              </a:rPr>
-              <a:t>    headers: {</a:t>
-            </a:r>
-          </a:p>
-          <a:p>
-            <a:pPr>
-              <a:spcAft>
-                <a:spcPts val="0"/>
-              </a:spcAft>
-            </a:pPr>
-            <a:r>
-              <a:rPr sz="1300">
-                <a:solidFill>
-                  <a:srgbClr val="6D8C97"/>
-                </a:solidFill>
-                <a:latin typeface="Consolas"/>
-              </a:rPr>
-              <a:t>  46  </a:t>
-            </a:r>
-            <a:r>
-              <a:rPr sz="1300">
-                <a:solidFill>
-                  <a:srgbClr val="7FE0A0"/>
-                </a:solidFill>
-                <a:latin typeface="Consolas"/>
-              </a:rPr>
-              <a:t>      'Content-Type': 'application/json', // what I am sending is JSON</a:t>
-            </a:r>
-          </a:p>
-          <a:p>
-            <a:pPr>
-              <a:spcAft>
-                <a:spcPts val="0"/>
-              </a:spcAft>
-            </a:pPr>
-            <a:r>
-              <a:rPr sz="1300">
-                <a:solidFill>
-                  <a:srgbClr val="6D8C97"/>
-                </a:solidFill>
-                <a:latin typeface="Consolas"/>
-              </a:rPr>
-              <a:t>  47  </a:t>
-            </a:r>
-            <a:r>
-              <a:rPr sz="1300">
-                <a:solidFill>
-                  <a:srgbClr val="7FE0A0"/>
-                </a:solidFill>
-                <a:latin typeface="Consolas"/>
-              </a:rPr>
-              <a:t>      'Authorization': 'Bearer ' + API_KEY</a:t>
-            </a:r>
-          </a:p>
-          <a:p>
-            <a:pPr>
-              <a:spcAft>
-                <a:spcPts val="0"/>
-              </a:spcAft>
-            </a:pPr>
-            <a:r>
-              <a:rPr sz="1300">
-                <a:solidFill>
-                  <a:srgbClr val="6D8C97"/>
-                </a:solidFill>
-                <a:latin typeface="Consolas"/>
-              </a:rPr>
-              <a:t>  48  </a:t>
-            </a:r>
-            <a:r>
-              <a:rPr sz="1300">
-                <a:solidFill>
-                  <a:srgbClr val="7FE0A0"/>
-                </a:solidFill>
-                <a:latin typeface="Consolas"/>
-              </a:rPr>
-              <a:t>    },</a:t>
-            </a:r>
-          </a:p>
-          <a:p>
-            <a:pPr>
-              <a:spcAft>
-                <a:spcPts val="0"/>
-              </a:spcAft>
-            </a:pPr>
-            <a:r>
-              <a:rPr sz="1300">
-                <a:solidFill>
-                  <a:srgbClr val="6D8C97"/>
-                </a:solidFill>
-                <a:latin typeface="Consolas"/>
-              </a:rPr>
-              <a:t>  49  </a:t>
-            </a:r>
-            <a:r>
-              <a:rPr sz="1300">
-                <a:solidFill>
-                  <a:srgbClr val="7FE0A0"/>
-                </a:solidFill>
-                <a:latin typeface="Consolas"/>
-              </a:rPr>
-              <a:t>    body: JSON.stringify({</a:t>
-            </a:r>
-          </a:p>
-          <a:p>
-            <a:pPr>
-              <a:spcAft>
-                <a:spcPts val="0"/>
-              </a:spcAft>
-            </a:pPr>
-            <a:r>
-              <a:rPr sz="1300">
-                <a:solidFill>
-                  <a:srgbClr val="6D8C97"/>
-                </a:solidFill>
-                <a:latin typeface="Consolas"/>
-              </a:rPr>
-              <a:t>  50  </a:t>
-            </a:r>
-            <a:r>
-              <a:rPr sz="1300">
-                <a:solidFill>
-                  <a:srgbClr val="7FE0A0"/>
-                </a:solidFill>
-                <a:latin typeface="Consolas"/>
-              </a:rPr>
-              <a:t>      model: 'fast',</a:t>
-            </a:r>
-          </a:p>
-          <a:p>
-            <a:pPr>
-              <a:spcAft>
-                <a:spcPts val="0"/>
-              </a:spcAft>
-            </a:pPr>
-            <a:r>
-              <a:rPr sz="1300">
-                <a:solidFill>
-                  <a:srgbClr val="6D8C97"/>
-                </a:solidFill>
-                <a:latin typeface="Consolas"/>
-              </a:rPr>
-              <a:t>  51  </a:t>
-            </a:r>
-            <a:r>
-              <a:rPr sz="1300">
-                <a:solidFill>
-                  <a:srgbClr val="7FE0A0"/>
-                </a:solidFill>
-                <a:latin typeface="Consolas"/>
-              </a:rPr>
-              <a:t>      messages: [</a:t>
-            </a:r>
-          </a:p>
-          <a:p>
-            <a:pPr>
-              <a:spcAft>
-                <a:spcPts val="0"/>
-              </a:spcAft>
-            </a:pPr>
-            <a:r>
-              <a:rPr sz="1300">
-                <a:solidFill>
-                  <a:srgbClr val="6D8C97"/>
-                </a:solidFill>
-                <a:latin typeface="Consolas"/>
-              </a:rPr>
-              <a:t>  52  </a:t>
-            </a:r>
-            <a:r>
-              <a:rPr sz="1300">
-                <a:solidFill>
-                  <a:srgbClr val="7FE0A0"/>
-                </a:solidFill>
-                <a:latin typeface="Consolas"/>
-              </a:rPr>
-              <a:t>        { role: 'user', content: question }</a:t>
-            </a:r>
-          </a:p>
-          <a:p>
-            <a:pPr>
-              <a:spcAft>
-                <a:spcPts val="0"/>
-              </a:spcAft>
-            </a:pPr>
-            <a:r>
-              <a:rPr sz="1300">
-                <a:solidFill>
-                  <a:srgbClr val="6D8C97"/>
-                </a:solidFill>
-                <a:latin typeface="Consolas"/>
-              </a:rPr>
-              <a:t>  53  </a:t>
-            </a:r>
-            <a:r>
-              <a:rPr sz="1300">
-                <a:solidFill>
-                  <a:srgbClr val="7FE0A0"/>
-                </a:solidFill>
-                <a:latin typeface="Consolas"/>
-              </a:rPr>
-              <a:t>      ]</a:t>
-            </a:r>
-          </a:p>
-          <a:p>
-            <a:pPr>
-              <a:spcAft>
-                <a:spcPts val="0"/>
-              </a:spcAft>
-            </a:pPr>
-            <a:r>
-              <a:rPr sz="1300">
-                <a:solidFill>
-                  <a:srgbClr val="6D8C97"/>
-                </a:solidFill>
-                <a:latin typeface="Consolas"/>
-              </a:rPr>
-              <a:t>  54  </a:t>
-            </a:r>
-            <a:r>
-              <a:rPr sz="1300">
-                <a:solidFill>
-                  <a:srgbClr val="7FE0A0"/>
-                </a:solidFill>
-                <a:latin typeface="Consolas"/>
-              </a:rPr>
-              <a:t>    })</a:t>
-            </a:r>
-          </a:p>
-          <a:p>
-            <a:pPr>
-              <a:spcAft>
-                <a:spcPts val="0"/>
-              </a:spcAft>
-            </a:pPr>
-            <a:r>
-              <a:rPr sz="1300">
-                <a:solidFill>
-                  <a:srgbClr val="6D8C97"/>
-                </a:solidFill>
-                <a:latin typeface="Consolas"/>
-              </a:rPr>
-              <a:t>  55  </a:t>
-            </a:r>
-            <a:r>
-              <a:rPr sz="1300">
-                <a:solidFill>
-                  <a:srgbClr val="7FE0A0"/>
-                </a:solidFill>
-                <a:latin typeface="Consolas"/>
-              </a:rPr>
-              <a:t>  });</a:t>
-            </a:r>
-          </a:p>
-          <a:p>
-            <a:pPr>
-              <a:spcAft>
-                <a:spcPts val="0"/>
-              </a:spcAft>
-            </a:pPr>
-            <a:r>
-              <a:rPr sz="1300">
-                <a:solidFill>
-                  <a:srgbClr val="6D8C97"/>
-                </a:solidFill>
-                <a:latin typeface="Consolas"/>
-              </a:rPr>
-              <a:t>  56  </a:t>
-            </a:r>
-            <a:r>
-              <a:rPr sz="1300">
-                <a:solidFill>
-                  <a:srgbClr val="7FE0A0"/>
-                </a:solidFill>
-                <a:latin typeface="Consolas"/>
-              </a:rPr>
-              <a:t>  const data = await res.json();</a:t>
-            </a:r>
-          </a:p>
-          <a:p>
-            <a:pPr>
-              <a:spcAft>
-                <a:spcPts val="0"/>
-              </a:spcAft>
-            </a:pPr>
-            <a:r>
-              <a:rPr sz="1300">
-                <a:solidFill>
-                  <a:srgbClr val="6D8C97"/>
-                </a:solidFill>
-                <a:latin typeface="Consolas"/>
-              </a:rPr>
-              <a:t>  57  </a:t>
-            </a:r>
-            <a:r>
-              <a:rPr sz="1300">
-                <a:solidFill>
-                  <a:srgbClr val="7FE0A0"/>
-                </a:solidFill>
-                <a:latin typeface="Consolas"/>
-              </a:rPr>
               <a:t>  return data.choices[0].message.content;</a:t>
-            </a:r>
-          </a:p>
-          <a:p>
-            <a:pPr>
-              <a:spcAft>
-                <a:spcPts val="0"/>
-              </a:spcAft>
-            </a:pPr>
-            <a:r>
-              <a:rPr sz="1300">
-                <a:solidFill>
-                  <a:srgbClr val="6D8C97"/>
-                </a:solidFill>
-                <a:latin typeface="Consolas"/>
-              </a:rPr>
-              <a:t>  58  </a:t>
-            </a:r>
-            <a:r>
-              <a:rPr sz="1300">
-                <a:solidFill>
-                  <a:srgbClr val="7FE0A0"/>
-                </a:solidFill>
-                <a:latin typeface="Consolas"/>
-              </a:rPr>
-              <a:t>}</a:t>
             </a:r>
           </a:p>
         </p:txBody>
@@ -10374,7 +9406,7 @@
                   <a:srgbClr val="DCECEF"/>
                 </a:solidFill>
               </a:rPr>
-              <a:t>That is the whole piece. Check yours looks the same before moving on.</a:t>
+              <a:t>The answer hides at data.choices[0].message.content - return it to whoever asked.</a:t>
             </a:r>
           </a:p>
         </p:txBody>
@@ -10388,260 +9420,6 @@
 </file>
 
 <file path=ppt/slides/slide26.xml><?xml version="1.0" encoding="utf-8"?>
-<p:sld xmlns:a="http://schemas.openxmlformats.org/drawingml/2006/main" xmlns:p="http://schemas.openxmlformats.org/presentationml/2006/main" xmlns:r="http://schemas.openxmlformats.org/officeDocument/2006/relationships">
-  <p:cSld>
-    <p:spTree>
-      <p:nvGrpSpPr>
-        <p:cNvPr id="1" name=""/>
-        <p:cNvGrpSpPr/>
-        <p:nvPr/>
-      </p:nvGrpSpPr>
-      <p:grpSpPr/>
-      <p:sp>
-        <p:nvSpPr>
-          <p:cNvPr id="2" name="Title 1"/>
-          <p:cNvSpPr>
-            <a:spLocks noGrp="1"/>
-          </p:cNvSpPr>
-          <p:nvPr>
-            <p:ph type="title"/>
-          </p:nvPr>
-        </p:nvSpPr>
-        <p:spPr/>
-        <p:txBody>
-          <a:bodyPr/>
-          <a:lstStyle/>
-          <a:p>
-            <a:r>
-              <a:rPr sz="3800" b="1">
-                <a:solidFill>
-                  <a:srgbClr val="1F2A37"/>
-                </a:solidFill>
-              </a:rPr>
-              <a:t>Where the answer hides</a:t>
-            </a:r>
-          </a:p>
-        </p:txBody>
-      </p:sp>
-      <p:sp>
-        <p:nvSpPr>
-          <p:cNvPr id="3" name="TextBox 2"/>
-          <p:cNvSpPr txBox="1"/>
-          <p:nvPr/>
-        </p:nvSpPr>
-        <p:spPr>
-          <a:xfrm>
-            <a:off x="822960" y="1828800"/>
-            <a:ext cx="10515600" cy="4206240"/>
-          </a:xfrm>
-          <a:prstGeom prst="rect">
-            <a:avLst/>
-          </a:prstGeom>
-          <a:noFill/>
-        </p:spPr>
-        <p:txBody>
-          <a:bodyPr wrap="square">
-            <a:spAutoFit/>
-          </a:bodyPr>
-          <a:lstStyle/>
-          <a:p>
-            <a:pPr>
-              <a:spcAft>
-                <a:spcPts val="1400"/>
-              </a:spcAft>
-            </a:pPr>
-            <a:r>
-              <a:rPr sz="2800">
-                <a:solidFill>
-                  <a:srgbClr val="01AEFD"/>
-                </a:solidFill>
-              </a:rPr>
-              <a:t>data.choices[0].message.content</a:t>
-            </a:r>
-          </a:p>
-          <a:p>
-            <a:pPr>
-              <a:spcAft>
-                <a:spcPts val="1400"/>
-              </a:spcAft>
-            </a:pPr>
-            <a:r>
-              <a:rPr sz="2400">
-                <a:solidFill>
-                  <a:srgbClr val="1F2A37"/>
-                </a:solidFill>
-              </a:rPr>
-              <a:t>• choices - a list of answers (you get one)</a:t>
-            </a:r>
-          </a:p>
-          <a:p>
-            <a:pPr>
-              <a:spcAft>
-                <a:spcPts val="1400"/>
-              </a:spcAft>
-            </a:pPr>
-            <a:r>
-              <a:rPr sz="2400">
-                <a:solidFill>
-                  <a:srgbClr val="1F2A37"/>
-                </a:solidFill>
-              </a:rPr>
-              <a:t>• [0] - the first one</a:t>
-            </a:r>
-          </a:p>
-          <a:p>
-            <a:pPr>
-              <a:spcAft>
-                <a:spcPts val="1400"/>
-              </a:spcAft>
-            </a:pPr>
-            <a:r>
-              <a:rPr sz="2400">
-                <a:solidFill>
-                  <a:srgbClr val="1F2A37"/>
-                </a:solidFill>
-              </a:rPr>
-              <a:t>• message.content - the actual words</a:t>
-            </a:r>
-          </a:p>
-        </p:txBody>
-      </p:sp>
-    </p:spTree>
-  </p:cSld>
-  <p:clrMapOvr>
-    <a:masterClrMapping/>
-  </p:clrMapOvr>
-</p:sld>
-</file>
-
-<file path=ppt/slides/slide27.xml><?xml version="1.0" encoding="utf-8"?>
-<p:sld xmlns:a="http://schemas.openxmlformats.org/drawingml/2006/main" xmlns:p="http://schemas.openxmlformats.org/presentationml/2006/main" xmlns:r="http://schemas.openxmlformats.org/officeDocument/2006/relationships">
-  <p:cSld>
-    <p:spTree>
-      <p:nvGrpSpPr>
-        <p:cNvPr id="1" name=""/>
-        <p:cNvGrpSpPr/>
-        <p:nvPr/>
-      </p:nvGrpSpPr>
-      <p:grpSpPr/>
-      <p:sp>
-        <p:nvSpPr>
-          <p:cNvPr id="2" name="Title 1"/>
-          <p:cNvSpPr>
-            <a:spLocks noGrp="1"/>
-          </p:cNvSpPr>
-          <p:nvPr>
-            <p:ph type="title"/>
-          </p:nvPr>
-        </p:nvSpPr>
-        <p:spPr/>
-        <p:txBody>
-          <a:bodyPr/>
-          <a:lstStyle/>
-          <a:p>
-            <a:r>
-              <a:rPr sz="3800" b="1">
-                <a:solidFill>
-                  <a:srgbClr val="1F2A37"/>
-                </a:solidFill>
-              </a:rPr>
-              <a:t>Slow things need await</a:t>
-            </a:r>
-          </a:p>
-        </p:txBody>
-      </p:sp>
-      <p:sp>
-        <p:nvSpPr>
-          <p:cNvPr id="3" name="TextBox 2"/>
-          <p:cNvSpPr txBox="1"/>
-          <p:nvPr/>
-        </p:nvSpPr>
-        <p:spPr>
-          <a:xfrm>
-            <a:off x="822960" y="1828800"/>
-            <a:ext cx="10515600" cy="4206240"/>
-          </a:xfrm>
-          <a:prstGeom prst="rect">
-            <a:avLst/>
-          </a:prstGeom>
-          <a:noFill/>
-        </p:spPr>
-        <p:txBody>
-          <a:bodyPr wrap="square">
-            <a:spAutoFit/>
-          </a:bodyPr>
-          <a:lstStyle/>
-          <a:p>
-            <a:pPr>
-              <a:spcAft>
-                <a:spcPts val="1400"/>
-              </a:spcAft>
-            </a:pPr>
-            <a:r>
-              <a:rPr sz="2400">
-                <a:solidFill>
-                  <a:srgbClr val="1F2A37"/>
-                </a:solidFill>
-              </a:rPr>
-              <a:t>• const reply = await askAI(text)</a:t>
-            </a:r>
-          </a:p>
-          <a:p>
-            <a:pPr>
-              <a:spcAft>
-                <a:spcPts val="1400"/>
-              </a:spcAft>
-            </a:pPr>
-            <a:r>
-              <a:rPr sz="2400">
-                <a:solidFill>
-                  <a:srgbClr val="1F2A37"/>
-                </a:solidFill>
-              </a:rPr>
-              <a:t>• The listener has to be async too</a:t>
-            </a:r>
-          </a:p>
-          <a:p>
-            <a:pPr>
-              <a:spcAft>
-                <a:spcPts val="1400"/>
-              </a:spcAft>
-            </a:pPr>
-            <a:r>
-              <a:rPr sz="2400">
-                <a:solidFill>
-                  <a:srgbClr val="1F2A37"/>
-                </a:solidFill>
-              </a:rPr>
-              <a:t>• Forget it and you get [object Promise]</a:t>
-            </a:r>
-          </a:p>
-          <a:p>
-            <a:pPr>
-              <a:spcAft>
-                <a:spcPts val="1400"/>
-              </a:spcAft>
-            </a:pPr>
-            <a:r>
-              <a:rPr sz="2400">
-                <a:solidFill>
-                  <a:srgbClr val="1F2A37"/>
-                </a:solidFill>
-              </a:rPr>
-              <a:t>• Delete the listModels() call - it has done its job</a:t>
-            </a:r>
-          </a:p>
-        </p:txBody>
-      </p:sp>
-    </p:spTree>
-  </p:cSld>
-  <p:clrMapOvr>
-    <a:masterClrMapping/>
-  </p:clrMapOvr>
-</p:sld>
-</file>
-
-<file path=ppt/slides/slide28.xml><?xml version="1.0" encoding="utf-8"?>
 <p:sld xmlns:a="http://schemas.openxmlformats.org/drawingml/2006/main" xmlns:p="http://schemas.openxmlformats.org/presentationml/2006/main" xmlns:r="http://schemas.openxmlformats.org/officeDocument/2006/relationships">
   <p:cSld>
     <p:bg>
@@ -10687,7 +9465,7 @@
                   <a:srgbClr val="01AEFD"/>
                 </a:solidFill>
               </a:rPr>
-              <a:t>Type this into script.js   -   line 60</a:t>
+              <a:t>Type this into script.js   -   line 58</a:t>
             </a:r>
           </a:p>
         </p:txBody>
@@ -10720,16 +9498,16 @@
               </a:spcAft>
             </a:pPr>
             <a:r>
-              <a:rPr sz="1800">
-                <a:solidFill>
-                  <a:srgbClr val="6D8C97"/>
-                </a:solidFill>
-                <a:latin typeface="Consolas"/>
-              </a:rPr>
-              <a:t>  59  </a:t>
-            </a:r>
-            <a:r>
-              <a:rPr sz="1800">
+              <a:rPr sz="1300">
+                <a:solidFill>
+                  <a:srgbClr val="6D8C97"/>
+                </a:solidFill>
+                <a:latin typeface="Consolas"/>
+              </a:rPr>
+              <a:t>  39  </a:t>
+            </a:r>
+            <a:r>
+              <a:rPr sz="1300">
                 <a:solidFill>
                   <a:srgbClr val="6D8C97"/>
                 </a:solidFill>
@@ -10745,22 +9523,472 @@
               </a:spcAft>
             </a:pPr>
             <a:r>
-              <a:rPr sz="1800">
-                <a:solidFill>
-                  <a:srgbClr val="6D8C97"/>
-                </a:solidFill>
-                <a:latin typeface="Consolas"/>
-              </a:rPr>
-              <a:t>  60  </a:t>
-            </a:r>
-            <a:r>
-              <a:rPr sz="1800">
+              <a:rPr sz="1300">
+                <a:solidFill>
+                  <a:srgbClr val="6D8C97"/>
+                </a:solidFill>
+                <a:latin typeface="Consolas"/>
+              </a:rPr>
+              <a:t>  40  </a:t>
+            </a:r>
+            <a:r>
+              <a:rPr sz="1300">
+                <a:solidFill>
+                  <a:srgbClr val="6D8C97"/>
+                </a:solidFill>
+                <a:latin typeface="Consolas"/>
+              </a:rPr>
+              <a:t>// Week 4: ask the AI a real question.</a:t>
+            </a:r>
+          </a:p>
+          <a:p>
+            <a:pPr>
+              <a:spcAft>
+                <a:spcPts val="0"/>
+              </a:spcAft>
+            </a:pPr>
+            <a:r>
+              <a:rPr sz="1300">
+                <a:solidFill>
+                  <a:srgbClr val="6D8C97"/>
+                </a:solidFill>
+                <a:latin typeface="Consolas"/>
+              </a:rPr>
+              <a:t>  41  </a:t>
+            </a:r>
+            <a:r>
+              <a:rPr sz="1300">
+                <a:solidFill>
+                  <a:srgbClr val="6D8C97"/>
+                </a:solidFill>
+                <a:latin typeface="Consolas"/>
+              </a:rPr>
+              <a:t>// A chat request is a LIST of messages. Each one says who said it.</a:t>
+            </a:r>
+          </a:p>
+          <a:p>
+            <a:pPr>
+              <a:spcAft>
+                <a:spcPts val="0"/>
+              </a:spcAft>
+            </a:pPr>
+            <a:r>
+              <a:rPr sz="1300">
+                <a:solidFill>
+                  <a:srgbClr val="6D8C97"/>
+                </a:solidFill>
+                <a:latin typeface="Consolas"/>
+              </a:rPr>
+              <a:t>  42  </a:t>
+            </a:r>
+            <a:r>
+              <a:rPr sz="1300">
+                <a:solidFill>
+                  <a:srgbClr val="6D8C97"/>
+                </a:solidFill>
+                <a:latin typeface="Consolas"/>
+              </a:rPr>
+              <a:t>async function askAI(question) {</a:t>
+            </a:r>
+          </a:p>
+          <a:p>
+            <a:pPr>
+              <a:spcAft>
+                <a:spcPts val="0"/>
+              </a:spcAft>
+            </a:pPr>
+            <a:r>
+              <a:rPr sz="1300">
+                <a:solidFill>
+                  <a:srgbClr val="6D8C97"/>
+                </a:solidFill>
+                <a:latin typeface="Consolas"/>
+              </a:rPr>
+              <a:t>  43  </a:t>
+            </a:r>
+            <a:r>
+              <a:rPr sz="1300">
+                <a:solidFill>
+                  <a:srgbClr val="6D8C97"/>
+                </a:solidFill>
+                <a:latin typeface="Consolas"/>
+              </a:rPr>
+              <a:t>  const res = await fetch(AI_BASE + '/v1/chat/completions', {</a:t>
+            </a:r>
+          </a:p>
+          <a:p>
+            <a:pPr>
+              <a:spcAft>
+                <a:spcPts val="0"/>
+              </a:spcAft>
+            </a:pPr>
+            <a:r>
+              <a:rPr sz="1300">
+                <a:solidFill>
+                  <a:srgbClr val="6D8C97"/>
+                </a:solidFill>
+                <a:latin typeface="Consolas"/>
+              </a:rPr>
+              <a:t>  44  </a:t>
+            </a:r>
+            <a:r>
+              <a:rPr sz="1300">
+                <a:solidFill>
+                  <a:srgbClr val="6D8C97"/>
+                </a:solidFill>
+                <a:latin typeface="Consolas"/>
+              </a:rPr>
+              <a:t>    method: 'POST',                       // POST = I am sending you something</a:t>
+            </a:r>
+          </a:p>
+          <a:p>
+            <a:pPr>
+              <a:spcAft>
+                <a:spcPts val="0"/>
+              </a:spcAft>
+            </a:pPr>
+            <a:r>
+              <a:rPr sz="1300">
+                <a:solidFill>
+                  <a:srgbClr val="6D8C97"/>
+                </a:solidFill>
+                <a:latin typeface="Consolas"/>
+              </a:rPr>
+              <a:t>  45  </a:t>
+            </a:r>
+            <a:r>
+              <a:rPr sz="1300">
+                <a:solidFill>
+                  <a:srgbClr val="6D8C97"/>
+                </a:solidFill>
+                <a:latin typeface="Consolas"/>
+              </a:rPr>
+              <a:t>    headers: {</a:t>
+            </a:r>
+          </a:p>
+          <a:p>
+            <a:pPr>
+              <a:spcAft>
+                <a:spcPts val="0"/>
+              </a:spcAft>
+            </a:pPr>
+            <a:r>
+              <a:rPr sz="1300">
+                <a:solidFill>
+                  <a:srgbClr val="6D8C97"/>
+                </a:solidFill>
+                <a:latin typeface="Consolas"/>
+              </a:rPr>
+              <a:t>  46  </a:t>
+            </a:r>
+            <a:r>
+              <a:rPr sz="1300">
+                <a:solidFill>
+                  <a:srgbClr val="6D8C97"/>
+                </a:solidFill>
+                <a:latin typeface="Consolas"/>
+              </a:rPr>
+              <a:t>      'Content-Type': 'application/json', // what I am sending is JSON</a:t>
+            </a:r>
+          </a:p>
+          <a:p>
+            <a:pPr>
+              <a:spcAft>
+                <a:spcPts val="0"/>
+              </a:spcAft>
+            </a:pPr>
+            <a:r>
+              <a:rPr sz="1300">
+                <a:solidFill>
+                  <a:srgbClr val="6D8C97"/>
+                </a:solidFill>
+                <a:latin typeface="Consolas"/>
+              </a:rPr>
+              <a:t>  47  </a:t>
+            </a:r>
+            <a:r>
+              <a:rPr sz="1300">
+                <a:solidFill>
+                  <a:srgbClr val="6D8C97"/>
+                </a:solidFill>
+                <a:latin typeface="Consolas"/>
+              </a:rPr>
+              <a:t>      'Authorization': 'Bearer ' + API_KEY</a:t>
+            </a:r>
+          </a:p>
+          <a:p>
+            <a:pPr>
+              <a:spcAft>
+                <a:spcPts val="0"/>
+              </a:spcAft>
+            </a:pPr>
+            <a:r>
+              <a:rPr sz="1300">
+                <a:solidFill>
+                  <a:srgbClr val="6D8C97"/>
+                </a:solidFill>
+                <a:latin typeface="Consolas"/>
+              </a:rPr>
+              <a:t>  48  </a:t>
+            </a:r>
+            <a:r>
+              <a:rPr sz="1300">
+                <a:solidFill>
+                  <a:srgbClr val="6D8C97"/>
+                </a:solidFill>
+                <a:latin typeface="Consolas"/>
+              </a:rPr>
+              <a:t>    },</a:t>
+            </a:r>
+          </a:p>
+          <a:p>
+            <a:pPr>
+              <a:spcAft>
+                <a:spcPts val="0"/>
+              </a:spcAft>
+            </a:pPr>
+            <a:r>
+              <a:rPr sz="1300">
+                <a:solidFill>
+                  <a:srgbClr val="6D8C97"/>
+                </a:solidFill>
+                <a:latin typeface="Consolas"/>
+              </a:rPr>
+              <a:t>  49  </a:t>
+            </a:r>
+            <a:r>
+              <a:rPr sz="1300">
+                <a:solidFill>
+                  <a:srgbClr val="6D8C97"/>
+                </a:solidFill>
+                <a:latin typeface="Consolas"/>
+              </a:rPr>
+              <a:t>    body: JSON.stringify({</a:t>
+            </a:r>
+          </a:p>
+          <a:p>
+            <a:pPr>
+              <a:spcAft>
+                <a:spcPts val="0"/>
+              </a:spcAft>
+            </a:pPr>
+            <a:r>
+              <a:rPr sz="1300">
+                <a:solidFill>
+                  <a:srgbClr val="6D8C97"/>
+                </a:solidFill>
+                <a:latin typeface="Consolas"/>
+              </a:rPr>
+              <a:t>  50  </a:t>
+            </a:r>
+            <a:r>
+              <a:rPr sz="1300">
+                <a:solidFill>
+                  <a:srgbClr val="6D8C97"/>
+                </a:solidFill>
+                <a:latin typeface="Consolas"/>
+              </a:rPr>
+              <a:t>      model: 'fast',</a:t>
+            </a:r>
+          </a:p>
+          <a:p>
+            <a:pPr>
+              <a:spcAft>
+                <a:spcPts val="0"/>
+              </a:spcAft>
+            </a:pPr>
+            <a:r>
+              <a:rPr sz="1300">
+                <a:solidFill>
+                  <a:srgbClr val="6D8C97"/>
+                </a:solidFill>
+                <a:latin typeface="Consolas"/>
+              </a:rPr>
+              <a:t>  51  </a:t>
+            </a:r>
+            <a:r>
+              <a:rPr sz="1300">
+                <a:solidFill>
+                  <a:srgbClr val="6D8C97"/>
+                </a:solidFill>
+                <a:latin typeface="Consolas"/>
+              </a:rPr>
+              <a:t>      messages: [</a:t>
+            </a:r>
+          </a:p>
+          <a:p>
+            <a:pPr>
+              <a:spcAft>
+                <a:spcPts val="0"/>
+              </a:spcAft>
+            </a:pPr>
+            <a:r>
+              <a:rPr sz="1300">
+                <a:solidFill>
+                  <a:srgbClr val="6D8C97"/>
+                </a:solidFill>
+                <a:latin typeface="Consolas"/>
+              </a:rPr>
+              <a:t>  52  </a:t>
+            </a:r>
+            <a:r>
+              <a:rPr sz="1300">
+                <a:solidFill>
+                  <a:srgbClr val="6D8C97"/>
+                </a:solidFill>
+                <a:latin typeface="Consolas"/>
+              </a:rPr>
+              <a:t>        { role: 'user', content: question }</a:t>
+            </a:r>
+          </a:p>
+          <a:p>
+            <a:pPr>
+              <a:spcAft>
+                <a:spcPts val="0"/>
+              </a:spcAft>
+            </a:pPr>
+            <a:r>
+              <a:rPr sz="1300">
+                <a:solidFill>
+                  <a:srgbClr val="6D8C97"/>
+                </a:solidFill>
+                <a:latin typeface="Consolas"/>
+              </a:rPr>
+              <a:t>  53  </a:t>
+            </a:r>
+            <a:r>
+              <a:rPr sz="1300">
+                <a:solidFill>
+                  <a:srgbClr val="6D8C97"/>
+                </a:solidFill>
+                <a:latin typeface="Consolas"/>
+              </a:rPr>
+              <a:t>      ]</a:t>
+            </a:r>
+          </a:p>
+          <a:p>
+            <a:pPr>
+              <a:spcAft>
+                <a:spcPts val="0"/>
+              </a:spcAft>
+            </a:pPr>
+            <a:r>
+              <a:rPr sz="1300">
+                <a:solidFill>
+                  <a:srgbClr val="6D8C97"/>
+                </a:solidFill>
+                <a:latin typeface="Consolas"/>
+              </a:rPr>
+              <a:t>  54  </a:t>
+            </a:r>
+            <a:r>
+              <a:rPr sz="1300">
+                <a:solidFill>
+                  <a:srgbClr val="6D8C97"/>
+                </a:solidFill>
+                <a:latin typeface="Consolas"/>
+              </a:rPr>
+              <a:t>    })</a:t>
+            </a:r>
+          </a:p>
+          <a:p>
+            <a:pPr>
+              <a:spcAft>
+                <a:spcPts val="0"/>
+              </a:spcAft>
+            </a:pPr>
+            <a:r>
+              <a:rPr sz="1300">
+                <a:solidFill>
+                  <a:srgbClr val="6D8C97"/>
+                </a:solidFill>
+                <a:latin typeface="Consolas"/>
+              </a:rPr>
+              <a:t>  55  </a:t>
+            </a:r>
+            <a:r>
+              <a:rPr sz="1300">
+                <a:solidFill>
+                  <a:srgbClr val="6D8C97"/>
+                </a:solidFill>
+                <a:latin typeface="Consolas"/>
+              </a:rPr>
+              <a:t>  });</a:t>
+            </a:r>
+          </a:p>
+          <a:p>
+            <a:pPr>
+              <a:spcAft>
+                <a:spcPts val="0"/>
+              </a:spcAft>
+            </a:pPr>
+            <a:r>
+              <a:rPr sz="1300">
+                <a:solidFill>
+                  <a:srgbClr val="6D8C97"/>
+                </a:solidFill>
+                <a:latin typeface="Consolas"/>
+              </a:rPr>
+              <a:t>  56  </a:t>
+            </a:r>
+            <a:r>
+              <a:rPr sz="1300">
+                <a:solidFill>
+                  <a:srgbClr val="6D8C97"/>
+                </a:solidFill>
+                <a:latin typeface="Consolas"/>
+              </a:rPr>
+              <a:t>  const data = await res.json();</a:t>
+            </a:r>
+          </a:p>
+          <a:p>
+            <a:pPr>
+              <a:spcAft>
+                <a:spcPts val="0"/>
+              </a:spcAft>
+            </a:pPr>
+            <a:r>
+              <a:rPr sz="1300">
+                <a:solidFill>
+                  <a:srgbClr val="6D8C97"/>
+                </a:solidFill>
+                <a:latin typeface="Consolas"/>
+              </a:rPr>
+              <a:t>  57  </a:t>
+            </a:r>
+            <a:r>
+              <a:rPr sz="1300">
+                <a:solidFill>
+                  <a:srgbClr val="6D8C97"/>
+                </a:solidFill>
+                <a:latin typeface="Consolas"/>
+              </a:rPr>
+              <a:t>  return data.choices[0].message.content;</a:t>
+            </a:r>
+          </a:p>
+          <a:p>
+            <a:pPr>
+              <a:spcAft>
+                <a:spcPts val="0"/>
+              </a:spcAft>
+            </a:pPr>
+            <a:r>
+              <a:rPr sz="1300">
+                <a:solidFill>
+                  <a:srgbClr val="6D8C97"/>
+                </a:solidFill>
+                <a:latin typeface="Consolas"/>
+              </a:rPr>
+              <a:t>  58  </a:t>
+            </a:r>
+            <a:r>
+              <a:rPr sz="1300">
                 <a:solidFill>
                   <a:srgbClr val="7FE0A0"/>
                 </a:solidFill>
                 <a:latin typeface="Consolas"/>
               </a:rPr>
-              <a:t>// The browser calls this when the form is submitted.</a:t>
+              <a:t>}</a:t>
             </a:r>
           </a:p>
         </p:txBody>
@@ -10793,7 +10021,7 @@
                   <a:srgbClr val="DCECEF"/>
                 </a:solidFill>
               </a:rPr>
-              <a:t>A comment: the browser calls this when the form is submitted.</a:t>
+              <a:t>Closes the function.</a:t>
             </a:r>
           </a:p>
         </p:txBody>
@@ -10806,7 +10034,7 @@
 </p:sld>
 </file>
 
-<file path=ppt/slides/slide29.xml><?xml version="1.0" encoding="utf-8"?>
+<file path=ppt/slides/slide27.xml><?xml version="1.0" encoding="utf-8"?>
 <p:sld xmlns:a="http://schemas.openxmlformats.org/drawingml/2006/main" xmlns:p="http://schemas.openxmlformats.org/presentationml/2006/main" xmlns:r="http://schemas.openxmlformats.org/officeDocument/2006/relationships">
   <p:cSld>
     <p:bg>
@@ -10852,7 +10080,7 @@
                   <a:srgbClr val="01AEFD"/>
                 </a:solidFill>
               </a:rPr>
-              <a:t>Type this into script.js   -   line 61</a:t>
+              <a:t>All together in script.js</a:t>
             </a:r>
           </a:p>
         </p:txBody>
@@ -10885,18 +10113,18 @@
               </a:spcAft>
             </a:pPr>
             <a:r>
-              <a:rPr sz="1800">
-                <a:solidFill>
-                  <a:srgbClr val="6D8C97"/>
-                </a:solidFill>
-                <a:latin typeface="Consolas"/>
-              </a:rPr>
-              <a:t>  59  </a:t>
-            </a:r>
-            <a:r>
-              <a:rPr sz="1800">
-                <a:solidFill>
-                  <a:srgbClr val="6D8C97"/>
+              <a:rPr sz="1300">
+                <a:solidFill>
+                  <a:srgbClr val="6D8C97"/>
+                </a:solidFill>
+                <a:latin typeface="Consolas"/>
+              </a:rPr>
+              <a:t>  39  </a:t>
+            </a:r>
+            <a:r>
+              <a:rPr sz="1300">
+                <a:solidFill>
+                  <a:srgbClr val="7FE0A0"/>
                 </a:solidFill>
                 <a:latin typeface="Consolas"/>
               </a:rPr>
@@ -10910,47 +10138,472 @@
               </a:spcAft>
             </a:pPr>
             <a:r>
-              <a:rPr sz="1800">
-                <a:solidFill>
-                  <a:srgbClr val="6D8C97"/>
-                </a:solidFill>
-                <a:latin typeface="Consolas"/>
-              </a:rPr>
-              <a:t>  60  </a:t>
-            </a:r>
-            <a:r>
-              <a:rPr sz="1800">
-                <a:solidFill>
-                  <a:srgbClr val="6D8C97"/>
-                </a:solidFill>
-                <a:latin typeface="Consolas"/>
-              </a:rPr>
-              <a:t>// The browser calls this when the form is submitted.</a:t>
-            </a:r>
-          </a:p>
-          <a:p>
-            <a:pPr>
-              <a:spcAft>
-                <a:spcPts val="0"/>
-              </a:spcAft>
-            </a:pPr>
-            <a:r>
-              <a:rPr sz="1800">
-                <a:solidFill>
-                  <a:srgbClr val="6D8C97"/>
-                </a:solidFill>
-                <a:latin typeface="Consolas"/>
-              </a:rPr>
-              <a:t>  61  </a:t>
-            </a:r>
-            <a:r>
-              <a:rPr sz="1800">
+              <a:rPr sz="1300">
+                <a:solidFill>
+                  <a:srgbClr val="6D8C97"/>
+                </a:solidFill>
+                <a:latin typeface="Consolas"/>
+              </a:rPr>
+              <a:t>  40  </a:t>
+            </a:r>
+            <a:r>
+              <a:rPr sz="1300">
                 <a:solidFill>
                   <a:srgbClr val="7FE0A0"/>
                 </a:solidFill>
                 <a:latin typeface="Consolas"/>
               </a:rPr>
-              <a:t>composer.addEventListener('submit', async function (event) {</a:t>
+              <a:t>// Week 4: ask the AI a real question.</a:t>
+            </a:r>
+          </a:p>
+          <a:p>
+            <a:pPr>
+              <a:spcAft>
+                <a:spcPts val="0"/>
+              </a:spcAft>
+            </a:pPr>
+            <a:r>
+              <a:rPr sz="1300">
+                <a:solidFill>
+                  <a:srgbClr val="6D8C97"/>
+                </a:solidFill>
+                <a:latin typeface="Consolas"/>
+              </a:rPr>
+              <a:t>  41  </a:t>
+            </a:r>
+            <a:r>
+              <a:rPr sz="1300">
+                <a:solidFill>
+                  <a:srgbClr val="7FE0A0"/>
+                </a:solidFill>
+                <a:latin typeface="Consolas"/>
+              </a:rPr>
+              <a:t>// A chat request is a LIST of messages. Each one says who said it.</a:t>
+            </a:r>
+          </a:p>
+          <a:p>
+            <a:pPr>
+              <a:spcAft>
+                <a:spcPts val="0"/>
+              </a:spcAft>
+            </a:pPr>
+            <a:r>
+              <a:rPr sz="1300">
+                <a:solidFill>
+                  <a:srgbClr val="6D8C97"/>
+                </a:solidFill>
+                <a:latin typeface="Consolas"/>
+              </a:rPr>
+              <a:t>  42  </a:t>
+            </a:r>
+            <a:r>
+              <a:rPr sz="1300">
+                <a:solidFill>
+                  <a:srgbClr val="7FE0A0"/>
+                </a:solidFill>
+                <a:latin typeface="Consolas"/>
+              </a:rPr>
+              <a:t>async function askAI(question) {</a:t>
+            </a:r>
+          </a:p>
+          <a:p>
+            <a:pPr>
+              <a:spcAft>
+                <a:spcPts val="0"/>
+              </a:spcAft>
+            </a:pPr>
+            <a:r>
+              <a:rPr sz="1300">
+                <a:solidFill>
+                  <a:srgbClr val="6D8C97"/>
+                </a:solidFill>
+                <a:latin typeface="Consolas"/>
+              </a:rPr>
+              <a:t>  43  </a:t>
+            </a:r>
+            <a:r>
+              <a:rPr sz="1300">
+                <a:solidFill>
+                  <a:srgbClr val="7FE0A0"/>
+                </a:solidFill>
+                <a:latin typeface="Consolas"/>
+              </a:rPr>
+              <a:t>  const res = await fetch(AI_BASE + '/v1/chat/completions', {</a:t>
+            </a:r>
+          </a:p>
+          <a:p>
+            <a:pPr>
+              <a:spcAft>
+                <a:spcPts val="0"/>
+              </a:spcAft>
+            </a:pPr>
+            <a:r>
+              <a:rPr sz="1300">
+                <a:solidFill>
+                  <a:srgbClr val="6D8C97"/>
+                </a:solidFill>
+                <a:latin typeface="Consolas"/>
+              </a:rPr>
+              <a:t>  44  </a:t>
+            </a:r>
+            <a:r>
+              <a:rPr sz="1300">
+                <a:solidFill>
+                  <a:srgbClr val="7FE0A0"/>
+                </a:solidFill>
+                <a:latin typeface="Consolas"/>
+              </a:rPr>
+              <a:t>    method: 'POST',                       // POST = I am sending you something</a:t>
+            </a:r>
+          </a:p>
+          <a:p>
+            <a:pPr>
+              <a:spcAft>
+                <a:spcPts val="0"/>
+              </a:spcAft>
+            </a:pPr>
+            <a:r>
+              <a:rPr sz="1300">
+                <a:solidFill>
+                  <a:srgbClr val="6D8C97"/>
+                </a:solidFill>
+                <a:latin typeface="Consolas"/>
+              </a:rPr>
+              <a:t>  45  </a:t>
+            </a:r>
+            <a:r>
+              <a:rPr sz="1300">
+                <a:solidFill>
+                  <a:srgbClr val="7FE0A0"/>
+                </a:solidFill>
+                <a:latin typeface="Consolas"/>
+              </a:rPr>
+              <a:t>    headers: {</a:t>
+            </a:r>
+          </a:p>
+          <a:p>
+            <a:pPr>
+              <a:spcAft>
+                <a:spcPts val="0"/>
+              </a:spcAft>
+            </a:pPr>
+            <a:r>
+              <a:rPr sz="1300">
+                <a:solidFill>
+                  <a:srgbClr val="6D8C97"/>
+                </a:solidFill>
+                <a:latin typeface="Consolas"/>
+              </a:rPr>
+              <a:t>  46  </a:t>
+            </a:r>
+            <a:r>
+              <a:rPr sz="1300">
+                <a:solidFill>
+                  <a:srgbClr val="7FE0A0"/>
+                </a:solidFill>
+                <a:latin typeface="Consolas"/>
+              </a:rPr>
+              <a:t>      'Content-Type': 'application/json', // what I am sending is JSON</a:t>
+            </a:r>
+          </a:p>
+          <a:p>
+            <a:pPr>
+              <a:spcAft>
+                <a:spcPts val="0"/>
+              </a:spcAft>
+            </a:pPr>
+            <a:r>
+              <a:rPr sz="1300">
+                <a:solidFill>
+                  <a:srgbClr val="6D8C97"/>
+                </a:solidFill>
+                <a:latin typeface="Consolas"/>
+              </a:rPr>
+              <a:t>  47  </a:t>
+            </a:r>
+            <a:r>
+              <a:rPr sz="1300">
+                <a:solidFill>
+                  <a:srgbClr val="7FE0A0"/>
+                </a:solidFill>
+                <a:latin typeface="Consolas"/>
+              </a:rPr>
+              <a:t>      'Authorization': 'Bearer ' + API_KEY</a:t>
+            </a:r>
+          </a:p>
+          <a:p>
+            <a:pPr>
+              <a:spcAft>
+                <a:spcPts val="0"/>
+              </a:spcAft>
+            </a:pPr>
+            <a:r>
+              <a:rPr sz="1300">
+                <a:solidFill>
+                  <a:srgbClr val="6D8C97"/>
+                </a:solidFill>
+                <a:latin typeface="Consolas"/>
+              </a:rPr>
+              <a:t>  48  </a:t>
+            </a:r>
+            <a:r>
+              <a:rPr sz="1300">
+                <a:solidFill>
+                  <a:srgbClr val="7FE0A0"/>
+                </a:solidFill>
+                <a:latin typeface="Consolas"/>
+              </a:rPr>
+              <a:t>    },</a:t>
+            </a:r>
+          </a:p>
+          <a:p>
+            <a:pPr>
+              <a:spcAft>
+                <a:spcPts val="0"/>
+              </a:spcAft>
+            </a:pPr>
+            <a:r>
+              <a:rPr sz="1300">
+                <a:solidFill>
+                  <a:srgbClr val="6D8C97"/>
+                </a:solidFill>
+                <a:latin typeface="Consolas"/>
+              </a:rPr>
+              <a:t>  49  </a:t>
+            </a:r>
+            <a:r>
+              <a:rPr sz="1300">
+                <a:solidFill>
+                  <a:srgbClr val="7FE0A0"/>
+                </a:solidFill>
+                <a:latin typeface="Consolas"/>
+              </a:rPr>
+              <a:t>    body: JSON.stringify({</a:t>
+            </a:r>
+          </a:p>
+          <a:p>
+            <a:pPr>
+              <a:spcAft>
+                <a:spcPts val="0"/>
+              </a:spcAft>
+            </a:pPr>
+            <a:r>
+              <a:rPr sz="1300">
+                <a:solidFill>
+                  <a:srgbClr val="6D8C97"/>
+                </a:solidFill>
+                <a:latin typeface="Consolas"/>
+              </a:rPr>
+              <a:t>  50  </a:t>
+            </a:r>
+            <a:r>
+              <a:rPr sz="1300">
+                <a:solidFill>
+                  <a:srgbClr val="7FE0A0"/>
+                </a:solidFill>
+                <a:latin typeface="Consolas"/>
+              </a:rPr>
+              <a:t>      model: 'fast',</a:t>
+            </a:r>
+          </a:p>
+          <a:p>
+            <a:pPr>
+              <a:spcAft>
+                <a:spcPts val="0"/>
+              </a:spcAft>
+            </a:pPr>
+            <a:r>
+              <a:rPr sz="1300">
+                <a:solidFill>
+                  <a:srgbClr val="6D8C97"/>
+                </a:solidFill>
+                <a:latin typeface="Consolas"/>
+              </a:rPr>
+              <a:t>  51  </a:t>
+            </a:r>
+            <a:r>
+              <a:rPr sz="1300">
+                <a:solidFill>
+                  <a:srgbClr val="7FE0A0"/>
+                </a:solidFill>
+                <a:latin typeface="Consolas"/>
+              </a:rPr>
+              <a:t>      messages: [</a:t>
+            </a:r>
+          </a:p>
+          <a:p>
+            <a:pPr>
+              <a:spcAft>
+                <a:spcPts val="0"/>
+              </a:spcAft>
+            </a:pPr>
+            <a:r>
+              <a:rPr sz="1300">
+                <a:solidFill>
+                  <a:srgbClr val="6D8C97"/>
+                </a:solidFill>
+                <a:latin typeface="Consolas"/>
+              </a:rPr>
+              <a:t>  52  </a:t>
+            </a:r>
+            <a:r>
+              <a:rPr sz="1300">
+                <a:solidFill>
+                  <a:srgbClr val="7FE0A0"/>
+                </a:solidFill>
+                <a:latin typeface="Consolas"/>
+              </a:rPr>
+              <a:t>        { role: 'user', content: question }</a:t>
+            </a:r>
+          </a:p>
+          <a:p>
+            <a:pPr>
+              <a:spcAft>
+                <a:spcPts val="0"/>
+              </a:spcAft>
+            </a:pPr>
+            <a:r>
+              <a:rPr sz="1300">
+                <a:solidFill>
+                  <a:srgbClr val="6D8C97"/>
+                </a:solidFill>
+                <a:latin typeface="Consolas"/>
+              </a:rPr>
+              <a:t>  53  </a:t>
+            </a:r>
+            <a:r>
+              <a:rPr sz="1300">
+                <a:solidFill>
+                  <a:srgbClr val="7FE0A0"/>
+                </a:solidFill>
+                <a:latin typeface="Consolas"/>
+              </a:rPr>
+              <a:t>      ]</a:t>
+            </a:r>
+          </a:p>
+          <a:p>
+            <a:pPr>
+              <a:spcAft>
+                <a:spcPts val="0"/>
+              </a:spcAft>
+            </a:pPr>
+            <a:r>
+              <a:rPr sz="1300">
+                <a:solidFill>
+                  <a:srgbClr val="6D8C97"/>
+                </a:solidFill>
+                <a:latin typeface="Consolas"/>
+              </a:rPr>
+              <a:t>  54  </a:t>
+            </a:r>
+            <a:r>
+              <a:rPr sz="1300">
+                <a:solidFill>
+                  <a:srgbClr val="7FE0A0"/>
+                </a:solidFill>
+                <a:latin typeface="Consolas"/>
+              </a:rPr>
+              <a:t>    })</a:t>
+            </a:r>
+          </a:p>
+          <a:p>
+            <a:pPr>
+              <a:spcAft>
+                <a:spcPts val="0"/>
+              </a:spcAft>
+            </a:pPr>
+            <a:r>
+              <a:rPr sz="1300">
+                <a:solidFill>
+                  <a:srgbClr val="6D8C97"/>
+                </a:solidFill>
+                <a:latin typeface="Consolas"/>
+              </a:rPr>
+              <a:t>  55  </a:t>
+            </a:r>
+            <a:r>
+              <a:rPr sz="1300">
+                <a:solidFill>
+                  <a:srgbClr val="7FE0A0"/>
+                </a:solidFill>
+                <a:latin typeface="Consolas"/>
+              </a:rPr>
+              <a:t>  });</a:t>
+            </a:r>
+          </a:p>
+          <a:p>
+            <a:pPr>
+              <a:spcAft>
+                <a:spcPts val="0"/>
+              </a:spcAft>
+            </a:pPr>
+            <a:r>
+              <a:rPr sz="1300">
+                <a:solidFill>
+                  <a:srgbClr val="6D8C97"/>
+                </a:solidFill>
+                <a:latin typeface="Consolas"/>
+              </a:rPr>
+              <a:t>  56  </a:t>
+            </a:r>
+            <a:r>
+              <a:rPr sz="1300">
+                <a:solidFill>
+                  <a:srgbClr val="7FE0A0"/>
+                </a:solidFill>
+                <a:latin typeface="Consolas"/>
+              </a:rPr>
+              <a:t>  const data = await res.json();</a:t>
+            </a:r>
+          </a:p>
+          <a:p>
+            <a:pPr>
+              <a:spcAft>
+                <a:spcPts val="0"/>
+              </a:spcAft>
+            </a:pPr>
+            <a:r>
+              <a:rPr sz="1300">
+                <a:solidFill>
+                  <a:srgbClr val="6D8C97"/>
+                </a:solidFill>
+                <a:latin typeface="Consolas"/>
+              </a:rPr>
+              <a:t>  57  </a:t>
+            </a:r>
+            <a:r>
+              <a:rPr sz="1300">
+                <a:solidFill>
+                  <a:srgbClr val="7FE0A0"/>
+                </a:solidFill>
+                <a:latin typeface="Consolas"/>
+              </a:rPr>
+              <a:t>  return data.choices[0].message.content;</a:t>
+            </a:r>
+          </a:p>
+          <a:p>
+            <a:pPr>
+              <a:spcAft>
+                <a:spcPts val="0"/>
+              </a:spcAft>
+            </a:pPr>
+            <a:r>
+              <a:rPr sz="1300">
+                <a:solidFill>
+                  <a:srgbClr val="6D8C97"/>
+                </a:solidFill>
+                <a:latin typeface="Consolas"/>
+              </a:rPr>
+              <a:t>  58  </a:t>
+            </a:r>
+            <a:r>
+              <a:rPr sz="1300">
+                <a:solidFill>
+                  <a:srgbClr val="7FE0A0"/>
+                </a:solidFill>
+                <a:latin typeface="Consolas"/>
+              </a:rPr>
+              <a:t>}</a:t>
             </a:r>
           </a:p>
         </p:txBody>
@@ -10983,7 +10636,261 @@
                   <a:srgbClr val="DCECEF"/>
                 </a:solidFill>
               </a:rPr>
-              <a:t>Add async so we are allowed to await the slow AI call inside.</a:t>
+              <a:t>That is the whole piece. Check yours looks the same before moving on.</a:t>
+            </a:r>
+          </a:p>
+        </p:txBody>
+      </p:sp>
+    </p:spTree>
+  </p:cSld>
+  <p:clrMapOvr>
+    <a:masterClrMapping/>
+  </p:clrMapOvr>
+</p:sld>
+</file>
+
+<file path=ppt/slides/slide28.xml><?xml version="1.0" encoding="utf-8"?>
+<p:sld xmlns:a="http://schemas.openxmlformats.org/drawingml/2006/main" xmlns:p="http://schemas.openxmlformats.org/presentationml/2006/main" xmlns:r="http://schemas.openxmlformats.org/officeDocument/2006/relationships">
+  <p:cSld>
+    <p:spTree>
+      <p:nvGrpSpPr>
+        <p:cNvPr id="1" name=""/>
+        <p:cNvGrpSpPr/>
+        <p:nvPr/>
+      </p:nvGrpSpPr>
+      <p:grpSpPr/>
+      <p:sp>
+        <p:nvSpPr>
+          <p:cNvPr id="2" name="Title 1"/>
+          <p:cNvSpPr>
+            <a:spLocks noGrp="1"/>
+          </p:cNvSpPr>
+          <p:nvPr>
+            <p:ph type="title"/>
+          </p:nvPr>
+        </p:nvSpPr>
+        <p:spPr/>
+        <p:txBody>
+          <a:bodyPr/>
+          <a:lstStyle/>
+          <a:p>
+            <a:r>
+              <a:rPr sz="3800" b="1">
+                <a:solidFill>
+                  <a:srgbClr val="1F2A37"/>
+                </a:solidFill>
+              </a:rPr>
+              <a:t>Where the answer hides</a:t>
+            </a:r>
+          </a:p>
+        </p:txBody>
+      </p:sp>
+      <p:sp>
+        <p:nvSpPr>
+          <p:cNvPr id="3" name="TextBox 2"/>
+          <p:cNvSpPr txBox="1"/>
+          <p:nvPr/>
+        </p:nvSpPr>
+        <p:spPr>
+          <a:xfrm>
+            <a:off x="822960" y="1828800"/>
+            <a:ext cx="10515600" cy="4206240"/>
+          </a:xfrm>
+          <a:prstGeom prst="rect">
+            <a:avLst/>
+          </a:prstGeom>
+          <a:noFill/>
+        </p:spPr>
+        <p:txBody>
+          <a:bodyPr wrap="square">
+            <a:spAutoFit/>
+          </a:bodyPr>
+          <a:lstStyle/>
+          <a:p>
+            <a:pPr>
+              <a:spcAft>
+                <a:spcPts val="1400"/>
+              </a:spcAft>
+            </a:pPr>
+            <a:r>
+              <a:rPr sz="2800">
+                <a:solidFill>
+                  <a:srgbClr val="01AEFD"/>
+                </a:solidFill>
+              </a:rPr>
+              <a:t>data.choices[0].message.content</a:t>
+            </a:r>
+          </a:p>
+          <a:p>
+            <a:pPr>
+              <a:spcAft>
+                <a:spcPts val="1400"/>
+              </a:spcAft>
+            </a:pPr>
+            <a:r>
+              <a:rPr sz="2400">
+                <a:solidFill>
+                  <a:srgbClr val="1F2A37"/>
+                </a:solidFill>
+              </a:rPr>
+              <a:t>• choices - a list of answers (you get one)</a:t>
+            </a:r>
+          </a:p>
+          <a:p>
+            <a:pPr>
+              <a:spcAft>
+                <a:spcPts val="1400"/>
+              </a:spcAft>
+            </a:pPr>
+            <a:r>
+              <a:rPr sz="2400">
+                <a:solidFill>
+                  <a:srgbClr val="1F2A37"/>
+                </a:solidFill>
+              </a:rPr>
+              <a:t>• [0] - the first one</a:t>
+            </a:r>
+          </a:p>
+          <a:p>
+            <a:pPr>
+              <a:spcAft>
+                <a:spcPts val="1400"/>
+              </a:spcAft>
+            </a:pPr>
+            <a:r>
+              <a:rPr sz="2400">
+                <a:solidFill>
+                  <a:srgbClr val="1F2A37"/>
+                </a:solidFill>
+              </a:rPr>
+              <a:t>• message.content - the actual words</a:t>
+            </a:r>
+          </a:p>
+        </p:txBody>
+      </p:sp>
+    </p:spTree>
+  </p:cSld>
+  <p:clrMapOvr>
+    <a:masterClrMapping/>
+  </p:clrMapOvr>
+</p:sld>
+</file>
+
+<file path=ppt/slides/slide29.xml><?xml version="1.0" encoding="utf-8"?>
+<p:sld xmlns:a="http://schemas.openxmlformats.org/drawingml/2006/main" xmlns:p="http://schemas.openxmlformats.org/presentationml/2006/main" xmlns:r="http://schemas.openxmlformats.org/officeDocument/2006/relationships">
+  <p:cSld>
+    <p:spTree>
+      <p:nvGrpSpPr>
+        <p:cNvPr id="1" name=""/>
+        <p:cNvGrpSpPr/>
+        <p:nvPr/>
+      </p:nvGrpSpPr>
+      <p:grpSpPr/>
+      <p:sp>
+        <p:nvSpPr>
+          <p:cNvPr id="2" name="Title 1"/>
+          <p:cNvSpPr>
+            <a:spLocks noGrp="1"/>
+          </p:cNvSpPr>
+          <p:nvPr>
+            <p:ph type="title"/>
+          </p:nvPr>
+        </p:nvSpPr>
+        <p:spPr/>
+        <p:txBody>
+          <a:bodyPr/>
+          <a:lstStyle/>
+          <a:p>
+            <a:r>
+              <a:rPr sz="3800" b="1">
+                <a:solidFill>
+                  <a:srgbClr val="1F2A37"/>
+                </a:solidFill>
+              </a:rPr>
+              <a:t>Slow things need await</a:t>
+            </a:r>
+          </a:p>
+        </p:txBody>
+      </p:sp>
+      <p:sp>
+        <p:nvSpPr>
+          <p:cNvPr id="3" name="TextBox 2"/>
+          <p:cNvSpPr txBox="1"/>
+          <p:nvPr/>
+        </p:nvSpPr>
+        <p:spPr>
+          <a:xfrm>
+            <a:off x="822960" y="1828800"/>
+            <a:ext cx="10515600" cy="4206240"/>
+          </a:xfrm>
+          <a:prstGeom prst="rect">
+            <a:avLst/>
+          </a:prstGeom>
+          <a:noFill/>
+        </p:spPr>
+        <p:txBody>
+          <a:bodyPr wrap="square">
+            <a:spAutoFit/>
+          </a:bodyPr>
+          <a:lstStyle/>
+          <a:p>
+            <a:pPr>
+              <a:spcAft>
+                <a:spcPts val="1400"/>
+              </a:spcAft>
+            </a:pPr>
+            <a:r>
+              <a:rPr sz="2400">
+                <a:solidFill>
+                  <a:srgbClr val="1F2A37"/>
+                </a:solidFill>
+              </a:rPr>
+              <a:t>• const reply = await askAI(text)</a:t>
+            </a:r>
+          </a:p>
+          <a:p>
+            <a:pPr>
+              <a:spcAft>
+                <a:spcPts val="1400"/>
+              </a:spcAft>
+            </a:pPr>
+            <a:r>
+              <a:rPr sz="2400">
+                <a:solidFill>
+                  <a:srgbClr val="1F2A37"/>
+                </a:solidFill>
+              </a:rPr>
+              <a:t>• The listener has to be async too</a:t>
+            </a:r>
+          </a:p>
+          <a:p>
+            <a:pPr>
+              <a:spcAft>
+                <a:spcPts val="1400"/>
+              </a:spcAft>
+            </a:pPr>
+            <a:r>
+              <a:rPr sz="2400">
+                <a:solidFill>
+                  <a:srgbClr val="1F2A37"/>
+                </a:solidFill>
+              </a:rPr>
+              <a:t>• Forget it and you get [object Promise]</a:t>
+            </a:r>
+          </a:p>
+          <a:p>
+            <a:pPr>
+              <a:spcAft>
+                <a:spcPts val="1400"/>
+              </a:spcAft>
+            </a:pPr>
+            <a:r>
+              <a:rPr sz="2400">
+                <a:solidFill>
+                  <a:srgbClr val="1F2A37"/>
+                </a:solidFill>
+              </a:rPr>
+              <a:t>• Delete the listModels() call - it has done its job</a:t>
             </a:r>
           </a:p>
         </p:txBody>
@@ -11139,7 +11046,7 @@
                   <a:srgbClr val="01AEFD"/>
                 </a:solidFill>
               </a:rPr>
-              <a:t>Type this into script.js   -   line 67</a:t>
+              <a:t>Type this into script.js   -   line 60</a:t>
             </a:r>
           </a:p>
         </p:txBody>
@@ -11208,186 +11115,11 @@
             <a:r>
               <a:rPr sz="1800">
                 <a:solidFill>
-                  <a:srgbClr val="6D8C97"/>
+                  <a:srgbClr val="7FE0A0"/>
                 </a:solidFill>
                 <a:latin typeface="Consolas"/>
               </a:rPr>
               <a:t>// The browser calls this when the form is submitted.</a:t>
-            </a:r>
-          </a:p>
-          <a:p>
-            <a:pPr>
-              <a:spcAft>
-                <a:spcPts val="0"/>
-              </a:spcAft>
-            </a:pPr>
-            <a:r>
-              <a:rPr sz="1800">
-                <a:solidFill>
-                  <a:srgbClr val="6D8C97"/>
-                </a:solidFill>
-                <a:latin typeface="Consolas"/>
-              </a:rPr>
-              <a:t>  61  </a:t>
-            </a:r>
-            <a:r>
-              <a:rPr sz="1800">
-                <a:solidFill>
-                  <a:srgbClr val="6D8C97"/>
-                </a:solidFill>
-                <a:latin typeface="Consolas"/>
-              </a:rPr>
-              <a:t>composer.addEventListener('submit', async function (event) {</a:t>
-            </a:r>
-          </a:p>
-          <a:p>
-            <a:pPr>
-              <a:spcAft>
-                <a:spcPts val="0"/>
-              </a:spcAft>
-            </a:pPr>
-            <a:r>
-              <a:rPr sz="1800">
-                <a:solidFill>
-                  <a:srgbClr val="6D8C97"/>
-                </a:solidFill>
-                <a:latin typeface="Consolas"/>
-              </a:rPr>
-              <a:t>  62  </a:t>
-            </a:r>
-            <a:r>
-              <a:rPr sz="1800">
-                <a:solidFill>
-                  <a:srgbClr val="6D8C97"/>
-                </a:solidFill>
-                <a:latin typeface="Consolas"/>
-              </a:rPr>
-              <a:t>  event.preventDefault();</a:t>
-            </a:r>
-          </a:p>
-          <a:p>
-            <a:pPr>
-              <a:spcAft>
-                <a:spcPts val="0"/>
-              </a:spcAft>
-            </a:pPr>
-            <a:r>
-              <a:rPr sz="1800">
-                <a:solidFill>
-                  <a:srgbClr val="6D8C97"/>
-                </a:solidFill>
-                <a:latin typeface="Consolas"/>
-              </a:rPr>
-              <a:t>  63  </a:t>
-            </a:r>
-            <a:r>
-              <a:rPr sz="1800">
-                <a:solidFill>
-                  <a:srgbClr val="6D8C97"/>
-                </a:solidFill>
-                <a:latin typeface="Consolas"/>
-              </a:rPr>
-              <a:t>  const text = promptBox.value.trim();</a:t>
-            </a:r>
-          </a:p>
-          <a:p>
-            <a:pPr>
-              <a:spcAft>
-                <a:spcPts val="0"/>
-              </a:spcAft>
-            </a:pPr>
-            <a:r>
-              <a:rPr sz="1800">
-                <a:solidFill>
-                  <a:srgbClr val="6D8C97"/>
-                </a:solidFill>
-                <a:latin typeface="Consolas"/>
-              </a:rPr>
-              <a:t>  64  </a:t>
-            </a:r>
-            <a:r>
-              <a:rPr sz="1800">
-                <a:solidFill>
-                  <a:srgbClr val="6D8C97"/>
-                </a:solidFill>
-                <a:latin typeface="Consolas"/>
-              </a:rPr>
-              <a:t>  if (text === '') { return; }</a:t>
-            </a:r>
-          </a:p>
-          <a:p>
-            <a:pPr>
-              <a:spcAft>
-                <a:spcPts val="0"/>
-              </a:spcAft>
-            </a:pPr>
-            <a:r>
-              <a:rPr sz="1800">
-                <a:solidFill>
-                  <a:srgbClr val="6D8C97"/>
-                </a:solidFill>
-                <a:latin typeface="Consolas"/>
-              </a:rPr>
-              <a:t>  65  </a:t>
-            </a:r>
-            <a:r>
-              <a:rPr sz="1800">
-                <a:solidFill>
-                  <a:srgbClr val="6D8C97"/>
-                </a:solidFill>
-                <a:latin typeface="Consolas"/>
-              </a:rPr>
-              <a:t>  promptBox.value = '';</a:t>
-            </a:r>
-          </a:p>
-          <a:p>
-            <a:pPr>
-              <a:spcAft>
-                <a:spcPts val="0"/>
-              </a:spcAft>
-            </a:pPr>
-            <a:r>
-              <a:rPr sz="1800">
-                <a:solidFill>
-                  <a:srgbClr val="6D8C97"/>
-                </a:solidFill>
-                <a:latin typeface="Consolas"/>
-              </a:rPr>
-              <a:t>  66  </a:t>
-            </a:r>
-            <a:r>
-              <a:rPr sz="1800">
-                <a:solidFill>
-                  <a:srgbClr val="6D8C97"/>
-                </a:solidFill>
-                <a:latin typeface="Consolas"/>
-              </a:rPr>
-              <a:t>  addLine('You', text);</a:t>
-            </a:r>
-          </a:p>
-          <a:p>
-            <a:pPr>
-              <a:spcAft>
-                <a:spcPts val="0"/>
-              </a:spcAft>
-            </a:pPr>
-            <a:r>
-              <a:rPr sz="1800">
-                <a:solidFill>
-                  <a:srgbClr val="6D8C97"/>
-                </a:solidFill>
-                <a:latin typeface="Consolas"/>
-              </a:rPr>
-              <a:t>  67  </a:t>
-            </a:r>
-            <a:r>
-              <a:rPr sz="1800">
-                <a:solidFill>
-                  <a:srgbClr val="7FE0A0"/>
-                </a:solidFill>
-                <a:latin typeface="Consolas"/>
-              </a:rPr>
-              <a:t>  addLine('Companion', 'thinking...');</a:t>
             </a:r>
           </a:p>
         </p:txBody>
@@ -11420,7 +11152,7 @@
                   <a:srgbClr val="DCECEF"/>
                 </a:solidFill>
               </a:rPr>
-              <a:t>Change the pretend reply to a 'thinking...' line while we wait.</a:t>
+              <a:t>A comment: the browser calls this when the form is submitted.</a:t>
             </a:r>
           </a:p>
         </p:txBody>
@@ -11479,7 +11211,7 @@
                   <a:srgbClr val="01AEFD"/>
                 </a:solidFill>
               </a:rPr>
-              <a:t>Type this into script.js   -   line 68</a:t>
+              <a:t>Type this into script.js   -   line 61</a:t>
             </a:r>
           </a:p>
         </p:txBody>
@@ -11573,186 +11305,11 @@
             <a:r>
               <a:rPr sz="1800">
                 <a:solidFill>
-                  <a:srgbClr val="6D8C97"/>
+                  <a:srgbClr val="7FE0A0"/>
                 </a:solidFill>
                 <a:latin typeface="Consolas"/>
               </a:rPr>
               <a:t>composer.addEventListener('submit', async function (event) {</a:t>
-            </a:r>
-          </a:p>
-          <a:p>
-            <a:pPr>
-              <a:spcAft>
-                <a:spcPts val="0"/>
-              </a:spcAft>
-            </a:pPr>
-            <a:r>
-              <a:rPr sz="1800">
-                <a:solidFill>
-                  <a:srgbClr val="6D8C97"/>
-                </a:solidFill>
-                <a:latin typeface="Consolas"/>
-              </a:rPr>
-              <a:t>  62  </a:t>
-            </a:r>
-            <a:r>
-              <a:rPr sz="1800">
-                <a:solidFill>
-                  <a:srgbClr val="6D8C97"/>
-                </a:solidFill>
-                <a:latin typeface="Consolas"/>
-              </a:rPr>
-              <a:t>  event.preventDefault();</a:t>
-            </a:r>
-          </a:p>
-          <a:p>
-            <a:pPr>
-              <a:spcAft>
-                <a:spcPts val="0"/>
-              </a:spcAft>
-            </a:pPr>
-            <a:r>
-              <a:rPr sz="1800">
-                <a:solidFill>
-                  <a:srgbClr val="6D8C97"/>
-                </a:solidFill>
-                <a:latin typeface="Consolas"/>
-              </a:rPr>
-              <a:t>  63  </a:t>
-            </a:r>
-            <a:r>
-              <a:rPr sz="1800">
-                <a:solidFill>
-                  <a:srgbClr val="6D8C97"/>
-                </a:solidFill>
-                <a:latin typeface="Consolas"/>
-              </a:rPr>
-              <a:t>  const text = promptBox.value.trim();</a:t>
-            </a:r>
-          </a:p>
-          <a:p>
-            <a:pPr>
-              <a:spcAft>
-                <a:spcPts val="0"/>
-              </a:spcAft>
-            </a:pPr>
-            <a:r>
-              <a:rPr sz="1800">
-                <a:solidFill>
-                  <a:srgbClr val="6D8C97"/>
-                </a:solidFill>
-                <a:latin typeface="Consolas"/>
-              </a:rPr>
-              <a:t>  64  </a:t>
-            </a:r>
-            <a:r>
-              <a:rPr sz="1800">
-                <a:solidFill>
-                  <a:srgbClr val="6D8C97"/>
-                </a:solidFill>
-                <a:latin typeface="Consolas"/>
-              </a:rPr>
-              <a:t>  if (text === '') { return; }</a:t>
-            </a:r>
-          </a:p>
-          <a:p>
-            <a:pPr>
-              <a:spcAft>
-                <a:spcPts val="0"/>
-              </a:spcAft>
-            </a:pPr>
-            <a:r>
-              <a:rPr sz="1800">
-                <a:solidFill>
-                  <a:srgbClr val="6D8C97"/>
-                </a:solidFill>
-                <a:latin typeface="Consolas"/>
-              </a:rPr>
-              <a:t>  65  </a:t>
-            </a:r>
-            <a:r>
-              <a:rPr sz="1800">
-                <a:solidFill>
-                  <a:srgbClr val="6D8C97"/>
-                </a:solidFill>
-                <a:latin typeface="Consolas"/>
-              </a:rPr>
-              <a:t>  promptBox.value = '';</a:t>
-            </a:r>
-          </a:p>
-          <a:p>
-            <a:pPr>
-              <a:spcAft>
-                <a:spcPts val="0"/>
-              </a:spcAft>
-            </a:pPr>
-            <a:r>
-              <a:rPr sz="1800">
-                <a:solidFill>
-                  <a:srgbClr val="6D8C97"/>
-                </a:solidFill>
-                <a:latin typeface="Consolas"/>
-              </a:rPr>
-              <a:t>  66  </a:t>
-            </a:r>
-            <a:r>
-              <a:rPr sz="1800">
-                <a:solidFill>
-                  <a:srgbClr val="6D8C97"/>
-                </a:solidFill>
-                <a:latin typeface="Consolas"/>
-              </a:rPr>
-              <a:t>  addLine('You', text);</a:t>
-            </a:r>
-          </a:p>
-          <a:p>
-            <a:pPr>
-              <a:spcAft>
-                <a:spcPts val="0"/>
-              </a:spcAft>
-            </a:pPr>
-            <a:r>
-              <a:rPr sz="1800">
-                <a:solidFill>
-                  <a:srgbClr val="6D8C97"/>
-                </a:solidFill>
-                <a:latin typeface="Consolas"/>
-              </a:rPr>
-              <a:t>  67  </a:t>
-            </a:r>
-            <a:r>
-              <a:rPr sz="1800">
-                <a:solidFill>
-                  <a:srgbClr val="6D8C97"/>
-                </a:solidFill>
-                <a:latin typeface="Consolas"/>
-              </a:rPr>
-              <a:t>  addLine('Companion', 'thinking...');</a:t>
-            </a:r>
-          </a:p>
-          <a:p>
-            <a:pPr>
-              <a:spcAft>
-                <a:spcPts val="0"/>
-              </a:spcAft>
-            </a:pPr>
-            <a:r>
-              <a:rPr sz="1800">
-                <a:solidFill>
-                  <a:srgbClr val="6D8C97"/>
-                </a:solidFill>
-                <a:latin typeface="Consolas"/>
-              </a:rPr>
-              <a:t>  68  </a:t>
-            </a:r>
-            <a:r>
-              <a:rPr sz="1800">
-                <a:solidFill>
-                  <a:srgbClr val="7FE0A0"/>
-                </a:solidFill>
-                <a:latin typeface="Consolas"/>
-              </a:rPr>
-              <a:t>  const reply = await askAI(text);       // this is the slow bit</a:t>
             </a:r>
           </a:p>
         </p:txBody>
@@ -11785,7 +11342,7 @@
                   <a:srgbClr val="DCECEF"/>
                 </a:solidFill>
               </a:rPr>
-              <a:t>await askAI(text): the slow bit - ask the AI and wait for the answer.</a:t>
+              <a:t>Add async so we are allowed to await the slow AI call inside.</a:t>
             </a:r>
           </a:p>
         </p:txBody>
@@ -11844,7 +11401,7 @@
                   <a:srgbClr val="01AEFD"/>
                 </a:solidFill>
               </a:rPr>
-              <a:t>Type this into script.js   -   line 69</a:t>
+              <a:t>Type this into script.js   -   line 67</a:t>
             </a:r>
           </a:p>
         </p:txBody>
@@ -11877,7 +11434,7 @@
               </a:spcAft>
             </a:pPr>
             <a:r>
-              <a:rPr sz="1300">
+              <a:rPr sz="1800">
                 <a:solidFill>
                   <a:srgbClr val="6D8C97"/>
                 </a:solidFill>
@@ -11886,7 +11443,7 @@
               <a:t>  59  </a:t>
             </a:r>
             <a:r>
-              <a:rPr sz="1300">
+              <a:rPr sz="1800">
                 <a:solidFill>
                   <a:srgbClr val="6D8C97"/>
                 </a:solidFill>
@@ -11902,7 +11459,7 @@
               </a:spcAft>
             </a:pPr>
             <a:r>
-              <a:rPr sz="1300">
+              <a:rPr sz="1800">
                 <a:solidFill>
                   <a:srgbClr val="6D8C97"/>
                 </a:solidFill>
@@ -11911,7 +11468,7 @@
               <a:t>  60  </a:t>
             </a:r>
             <a:r>
-              <a:rPr sz="1300">
+              <a:rPr sz="1800">
                 <a:solidFill>
                   <a:srgbClr val="6D8C97"/>
                 </a:solidFill>
@@ -11927,7 +11484,7 @@
               </a:spcAft>
             </a:pPr>
             <a:r>
-              <a:rPr sz="1300">
+              <a:rPr sz="1800">
                 <a:solidFill>
                   <a:srgbClr val="6D8C97"/>
                 </a:solidFill>
@@ -11936,7 +11493,7 @@
               <a:t>  61  </a:t>
             </a:r>
             <a:r>
-              <a:rPr sz="1300">
+              <a:rPr sz="1800">
                 <a:solidFill>
                   <a:srgbClr val="6D8C97"/>
                 </a:solidFill>
@@ -11952,7 +11509,7 @@
               </a:spcAft>
             </a:pPr>
             <a:r>
-              <a:rPr sz="1300">
+              <a:rPr sz="1800">
                 <a:solidFill>
                   <a:srgbClr val="6D8C97"/>
                 </a:solidFill>
@@ -11961,7 +11518,7 @@
               <a:t>  62  </a:t>
             </a:r>
             <a:r>
-              <a:rPr sz="1300">
+              <a:rPr sz="1800">
                 <a:solidFill>
                   <a:srgbClr val="6D8C97"/>
                 </a:solidFill>
@@ -11977,7 +11534,7 @@
               </a:spcAft>
             </a:pPr>
             <a:r>
-              <a:rPr sz="1300">
+              <a:rPr sz="1800">
                 <a:solidFill>
                   <a:srgbClr val="6D8C97"/>
                 </a:solidFill>
@@ -11986,7 +11543,7 @@
               <a:t>  63  </a:t>
             </a:r>
             <a:r>
-              <a:rPr sz="1300">
+              <a:rPr sz="1800">
                 <a:solidFill>
                   <a:srgbClr val="6D8C97"/>
                 </a:solidFill>
@@ -12002,7 +11559,7 @@
               </a:spcAft>
             </a:pPr>
             <a:r>
-              <a:rPr sz="1300">
+              <a:rPr sz="1800">
                 <a:solidFill>
                   <a:srgbClr val="6D8C97"/>
                 </a:solidFill>
@@ -12011,7 +11568,7 @@
               <a:t>  64  </a:t>
             </a:r>
             <a:r>
-              <a:rPr sz="1300">
+              <a:rPr sz="1800">
                 <a:solidFill>
                   <a:srgbClr val="6D8C97"/>
                 </a:solidFill>
@@ -12027,7 +11584,7 @@
               </a:spcAft>
             </a:pPr>
             <a:r>
-              <a:rPr sz="1300">
+              <a:rPr sz="1800">
                 <a:solidFill>
                   <a:srgbClr val="6D8C97"/>
                 </a:solidFill>
@@ -12036,7 +11593,7 @@
               <a:t>  65  </a:t>
             </a:r>
             <a:r>
-              <a:rPr sz="1300">
+              <a:rPr sz="1800">
                 <a:solidFill>
                   <a:srgbClr val="6D8C97"/>
                 </a:solidFill>
@@ -12052,7 +11609,7 @@
               </a:spcAft>
             </a:pPr>
             <a:r>
-              <a:rPr sz="1300">
+              <a:rPr sz="1800">
                 <a:solidFill>
                   <a:srgbClr val="6D8C97"/>
                 </a:solidFill>
@@ -12061,7 +11618,7 @@
               <a:t>  66  </a:t>
             </a:r>
             <a:r>
-              <a:rPr sz="1300">
+              <a:rPr sz="1800">
                 <a:solidFill>
                   <a:srgbClr val="6D8C97"/>
                 </a:solidFill>
@@ -12077,7 +11634,7 @@
               </a:spcAft>
             </a:pPr>
             <a:r>
-              <a:rPr sz="1300">
+              <a:rPr sz="1800">
                 <a:solidFill>
                   <a:srgbClr val="6D8C97"/>
                 </a:solidFill>
@@ -12086,63 +11643,13 @@
               <a:t>  67  </a:t>
             </a:r>
             <a:r>
-              <a:rPr sz="1300">
-                <a:solidFill>
-                  <a:srgbClr val="6D8C97"/>
+              <a:rPr sz="1800">
+                <a:solidFill>
+                  <a:srgbClr val="7FE0A0"/>
                 </a:solidFill>
                 <a:latin typeface="Consolas"/>
               </a:rPr>
               <a:t>  addLine('Companion', 'thinking...');</a:t>
-            </a:r>
-          </a:p>
-          <a:p>
-            <a:pPr>
-              <a:spcAft>
-                <a:spcPts val="0"/>
-              </a:spcAft>
-            </a:pPr>
-            <a:r>
-              <a:rPr sz="1300">
-                <a:solidFill>
-                  <a:srgbClr val="6D8C97"/>
-                </a:solidFill>
-                <a:latin typeface="Consolas"/>
-              </a:rPr>
-              <a:t>  68  </a:t>
-            </a:r>
-            <a:r>
-              <a:rPr sz="1300">
-                <a:solidFill>
-                  <a:srgbClr val="6D8C97"/>
-                </a:solidFill>
-                <a:latin typeface="Consolas"/>
-              </a:rPr>
-              <a:t>  const reply = await askAI(text);       // this is the slow bit</a:t>
-            </a:r>
-          </a:p>
-          <a:p>
-            <a:pPr>
-              <a:spcAft>
-                <a:spcPts val="0"/>
-              </a:spcAft>
-            </a:pPr>
-            <a:r>
-              <a:rPr sz="1300">
-                <a:solidFill>
-                  <a:srgbClr val="6D8C97"/>
-                </a:solidFill>
-                <a:latin typeface="Consolas"/>
-              </a:rPr>
-              <a:t>  69  </a:t>
-            </a:r>
-            <a:r>
-              <a:rPr sz="1300">
-                <a:solidFill>
-                  <a:srgbClr val="7FE0A0"/>
-                </a:solidFill>
-                <a:latin typeface="Consolas"/>
-              </a:rPr>
-              <a:t>  chat.lastChild.remove();               // take the 'thinking' line away</a:t>
             </a:r>
           </a:p>
         </p:txBody>
@@ -12175,7 +11682,7 @@
                   <a:srgbClr val="DCECEF"/>
                 </a:solidFill>
               </a:rPr>
-              <a:t>Remove the 'thinking...' line now the real answer is here.</a:t>
+              <a:t>Change the pretend reply to a 'thinking...' line while we wait.</a:t>
             </a:r>
           </a:p>
         </p:txBody>
@@ -12234,7 +11741,7 @@
                   <a:srgbClr val="01AEFD"/>
                 </a:solidFill>
               </a:rPr>
-              <a:t>Type this into script.js   -   line 70</a:t>
+              <a:t>Type this into script.js   -   line 68</a:t>
             </a:r>
           </a:p>
         </p:txBody>
@@ -12267,7 +11774,7 @@
               </a:spcAft>
             </a:pPr>
             <a:r>
-              <a:rPr sz="1300">
+              <a:rPr sz="1800">
                 <a:solidFill>
                   <a:srgbClr val="6D8C97"/>
                 </a:solidFill>
@@ -12276,7 +11783,7 @@
               <a:t>  59  </a:t>
             </a:r>
             <a:r>
-              <a:rPr sz="1300">
+              <a:rPr sz="1800">
                 <a:solidFill>
                   <a:srgbClr val="6D8C97"/>
                 </a:solidFill>
@@ -12292,7 +11799,7 @@
               </a:spcAft>
             </a:pPr>
             <a:r>
-              <a:rPr sz="1300">
+              <a:rPr sz="1800">
                 <a:solidFill>
                   <a:srgbClr val="6D8C97"/>
                 </a:solidFill>
@@ -12301,7 +11808,7 @@
               <a:t>  60  </a:t>
             </a:r>
             <a:r>
-              <a:rPr sz="1300">
+              <a:rPr sz="1800">
                 <a:solidFill>
                   <a:srgbClr val="6D8C97"/>
                 </a:solidFill>
@@ -12317,7 +11824,7 @@
               </a:spcAft>
             </a:pPr>
             <a:r>
-              <a:rPr sz="1300">
+              <a:rPr sz="1800">
                 <a:solidFill>
                   <a:srgbClr val="6D8C97"/>
                 </a:solidFill>
@@ -12326,7 +11833,7 @@
               <a:t>  61  </a:t>
             </a:r>
             <a:r>
-              <a:rPr sz="1300">
+              <a:rPr sz="1800">
                 <a:solidFill>
                   <a:srgbClr val="6D8C97"/>
                 </a:solidFill>
@@ -12342,7 +11849,7 @@
               </a:spcAft>
             </a:pPr>
             <a:r>
-              <a:rPr sz="1300">
+              <a:rPr sz="1800">
                 <a:solidFill>
                   <a:srgbClr val="6D8C97"/>
                 </a:solidFill>
@@ -12351,7 +11858,7 @@
               <a:t>  62  </a:t>
             </a:r>
             <a:r>
-              <a:rPr sz="1300">
+              <a:rPr sz="1800">
                 <a:solidFill>
                   <a:srgbClr val="6D8C97"/>
                 </a:solidFill>
@@ -12367,7 +11874,7 @@
               </a:spcAft>
             </a:pPr>
             <a:r>
-              <a:rPr sz="1300">
+              <a:rPr sz="1800">
                 <a:solidFill>
                   <a:srgbClr val="6D8C97"/>
                 </a:solidFill>
@@ -12376,7 +11883,7 @@
               <a:t>  63  </a:t>
             </a:r>
             <a:r>
-              <a:rPr sz="1300">
+              <a:rPr sz="1800">
                 <a:solidFill>
                   <a:srgbClr val="6D8C97"/>
                 </a:solidFill>
@@ -12392,7 +11899,7 @@
               </a:spcAft>
             </a:pPr>
             <a:r>
-              <a:rPr sz="1300">
+              <a:rPr sz="1800">
                 <a:solidFill>
                   <a:srgbClr val="6D8C97"/>
                 </a:solidFill>
@@ -12401,7 +11908,7 @@
               <a:t>  64  </a:t>
             </a:r>
             <a:r>
-              <a:rPr sz="1300">
+              <a:rPr sz="1800">
                 <a:solidFill>
                   <a:srgbClr val="6D8C97"/>
                 </a:solidFill>
@@ -12417,7 +11924,7 @@
               </a:spcAft>
             </a:pPr>
             <a:r>
-              <a:rPr sz="1300">
+              <a:rPr sz="1800">
                 <a:solidFill>
                   <a:srgbClr val="6D8C97"/>
                 </a:solidFill>
@@ -12426,7 +11933,7 @@
               <a:t>  65  </a:t>
             </a:r>
             <a:r>
-              <a:rPr sz="1300">
+              <a:rPr sz="1800">
                 <a:solidFill>
                   <a:srgbClr val="6D8C97"/>
                 </a:solidFill>
@@ -12442,7 +11949,7 @@
               </a:spcAft>
             </a:pPr>
             <a:r>
-              <a:rPr sz="1300">
+              <a:rPr sz="1800">
                 <a:solidFill>
                   <a:srgbClr val="6D8C97"/>
                 </a:solidFill>
@@ -12451,7 +11958,7 @@
               <a:t>  66  </a:t>
             </a:r>
             <a:r>
-              <a:rPr sz="1300">
+              <a:rPr sz="1800">
                 <a:solidFill>
                   <a:srgbClr val="6D8C97"/>
                 </a:solidFill>
@@ -12467,7 +11974,7 @@
               </a:spcAft>
             </a:pPr>
             <a:r>
-              <a:rPr sz="1300">
+              <a:rPr sz="1800">
                 <a:solidFill>
                   <a:srgbClr val="6D8C97"/>
                 </a:solidFill>
@@ -12476,7 +11983,7 @@
               <a:t>  67  </a:t>
             </a:r>
             <a:r>
-              <a:rPr sz="1300">
+              <a:rPr sz="1800">
                 <a:solidFill>
                   <a:srgbClr val="6D8C97"/>
                 </a:solidFill>
@@ -12492,7 +11999,7 @@
               </a:spcAft>
             </a:pPr>
             <a:r>
-              <a:rPr sz="1300">
+              <a:rPr sz="1800">
                 <a:solidFill>
                   <a:srgbClr val="6D8C97"/>
                 </a:solidFill>
@@ -12501,63 +12008,13 @@
               <a:t>  68  </a:t>
             </a:r>
             <a:r>
-              <a:rPr sz="1300">
-                <a:solidFill>
-                  <a:srgbClr val="6D8C97"/>
+              <a:rPr sz="1800">
+                <a:solidFill>
+                  <a:srgbClr val="7FE0A0"/>
                 </a:solidFill>
                 <a:latin typeface="Consolas"/>
               </a:rPr>
               <a:t>  const reply = await askAI(text);       // this is the slow bit</a:t>
-            </a:r>
-          </a:p>
-          <a:p>
-            <a:pPr>
-              <a:spcAft>
-                <a:spcPts val="0"/>
-              </a:spcAft>
-            </a:pPr>
-            <a:r>
-              <a:rPr sz="1300">
-                <a:solidFill>
-                  <a:srgbClr val="6D8C97"/>
-                </a:solidFill>
-                <a:latin typeface="Consolas"/>
-              </a:rPr>
-              <a:t>  69  </a:t>
-            </a:r>
-            <a:r>
-              <a:rPr sz="1300">
-                <a:solidFill>
-                  <a:srgbClr val="6D8C97"/>
-                </a:solidFill>
-                <a:latin typeface="Consolas"/>
-              </a:rPr>
-              <a:t>  chat.lastChild.remove();               // take the 'thinking' line away</a:t>
-            </a:r>
-          </a:p>
-          <a:p>
-            <a:pPr>
-              <a:spcAft>
-                <a:spcPts val="0"/>
-              </a:spcAft>
-            </a:pPr>
-            <a:r>
-              <a:rPr sz="1300">
-                <a:solidFill>
-                  <a:srgbClr val="6D8C97"/>
-                </a:solidFill>
-                <a:latin typeface="Consolas"/>
-              </a:rPr>
-              <a:t>  70  </a:t>
-            </a:r>
-            <a:r>
-              <a:rPr sz="1300">
-                <a:solidFill>
-                  <a:srgbClr val="7FE0A0"/>
-                </a:solidFill>
-                <a:latin typeface="Consolas"/>
-              </a:rPr>
-              <a:t>  addLine('Companion', reply);</a:t>
             </a:r>
           </a:p>
         </p:txBody>
@@ -12590,7 +12047,7 @@
                   <a:srgbClr val="DCECEF"/>
                 </a:solidFill>
               </a:rPr>
-              <a:t>Show the real reply in the chat.</a:t>
+              <a:t>await askAI(text): the slow bit - ask the AI and wait for the answer.</a:t>
             </a:r>
           </a:p>
         </p:txBody>
@@ -12649,7 +12106,7 @@
                   <a:srgbClr val="01AEFD"/>
                 </a:solidFill>
               </a:rPr>
-              <a:t>All together in script.js</a:t>
+              <a:t>Type this into script.js   -   line 69</a:t>
             </a:r>
           </a:p>
         </p:txBody>
@@ -12693,311 +12150,261 @@
             <a:r>
               <a:rPr sz="1300">
                 <a:solidFill>
+                  <a:srgbClr val="6D8C97"/>
+                </a:solidFill>
+                <a:latin typeface="Consolas"/>
+              </a:rPr>
+              <a:t> </a:t>
+            </a:r>
+          </a:p>
+          <a:p>
+            <a:pPr>
+              <a:spcAft>
+                <a:spcPts val="0"/>
+              </a:spcAft>
+            </a:pPr>
+            <a:r>
+              <a:rPr sz="1300">
+                <a:solidFill>
+                  <a:srgbClr val="6D8C97"/>
+                </a:solidFill>
+                <a:latin typeface="Consolas"/>
+              </a:rPr>
+              <a:t>  60  </a:t>
+            </a:r>
+            <a:r>
+              <a:rPr sz="1300">
+                <a:solidFill>
+                  <a:srgbClr val="6D8C97"/>
+                </a:solidFill>
+                <a:latin typeface="Consolas"/>
+              </a:rPr>
+              <a:t>// The browser calls this when the form is submitted.</a:t>
+            </a:r>
+          </a:p>
+          <a:p>
+            <a:pPr>
+              <a:spcAft>
+                <a:spcPts val="0"/>
+              </a:spcAft>
+            </a:pPr>
+            <a:r>
+              <a:rPr sz="1300">
+                <a:solidFill>
+                  <a:srgbClr val="6D8C97"/>
+                </a:solidFill>
+                <a:latin typeface="Consolas"/>
+              </a:rPr>
+              <a:t>  61  </a:t>
+            </a:r>
+            <a:r>
+              <a:rPr sz="1300">
+                <a:solidFill>
+                  <a:srgbClr val="6D8C97"/>
+                </a:solidFill>
+                <a:latin typeface="Consolas"/>
+              </a:rPr>
+              <a:t>composer.addEventListener('submit', async function (event) {</a:t>
+            </a:r>
+          </a:p>
+          <a:p>
+            <a:pPr>
+              <a:spcAft>
+                <a:spcPts val="0"/>
+              </a:spcAft>
+            </a:pPr>
+            <a:r>
+              <a:rPr sz="1300">
+                <a:solidFill>
+                  <a:srgbClr val="6D8C97"/>
+                </a:solidFill>
+                <a:latin typeface="Consolas"/>
+              </a:rPr>
+              <a:t>  62  </a:t>
+            </a:r>
+            <a:r>
+              <a:rPr sz="1300">
+                <a:solidFill>
+                  <a:srgbClr val="6D8C97"/>
+                </a:solidFill>
+                <a:latin typeface="Consolas"/>
+              </a:rPr>
+              <a:t>  event.preventDefault();</a:t>
+            </a:r>
+          </a:p>
+          <a:p>
+            <a:pPr>
+              <a:spcAft>
+                <a:spcPts val="0"/>
+              </a:spcAft>
+            </a:pPr>
+            <a:r>
+              <a:rPr sz="1300">
+                <a:solidFill>
+                  <a:srgbClr val="6D8C97"/>
+                </a:solidFill>
+                <a:latin typeface="Consolas"/>
+              </a:rPr>
+              <a:t>  63  </a:t>
+            </a:r>
+            <a:r>
+              <a:rPr sz="1300">
+                <a:solidFill>
+                  <a:srgbClr val="6D8C97"/>
+                </a:solidFill>
+                <a:latin typeface="Consolas"/>
+              </a:rPr>
+              <a:t>  const text = promptBox.value.trim();</a:t>
+            </a:r>
+          </a:p>
+          <a:p>
+            <a:pPr>
+              <a:spcAft>
+                <a:spcPts val="0"/>
+              </a:spcAft>
+            </a:pPr>
+            <a:r>
+              <a:rPr sz="1300">
+                <a:solidFill>
+                  <a:srgbClr val="6D8C97"/>
+                </a:solidFill>
+                <a:latin typeface="Consolas"/>
+              </a:rPr>
+              <a:t>  64  </a:t>
+            </a:r>
+            <a:r>
+              <a:rPr sz="1300">
+                <a:solidFill>
+                  <a:srgbClr val="6D8C97"/>
+                </a:solidFill>
+                <a:latin typeface="Consolas"/>
+              </a:rPr>
+              <a:t>  if (text === '') { return; }</a:t>
+            </a:r>
+          </a:p>
+          <a:p>
+            <a:pPr>
+              <a:spcAft>
+                <a:spcPts val="0"/>
+              </a:spcAft>
+            </a:pPr>
+            <a:r>
+              <a:rPr sz="1300">
+                <a:solidFill>
+                  <a:srgbClr val="6D8C97"/>
+                </a:solidFill>
+                <a:latin typeface="Consolas"/>
+              </a:rPr>
+              <a:t>  65  </a:t>
+            </a:r>
+            <a:r>
+              <a:rPr sz="1300">
+                <a:solidFill>
+                  <a:srgbClr val="6D8C97"/>
+                </a:solidFill>
+                <a:latin typeface="Consolas"/>
+              </a:rPr>
+              <a:t>  promptBox.value = '';</a:t>
+            </a:r>
+          </a:p>
+          <a:p>
+            <a:pPr>
+              <a:spcAft>
+                <a:spcPts val="0"/>
+              </a:spcAft>
+            </a:pPr>
+            <a:r>
+              <a:rPr sz="1300">
+                <a:solidFill>
+                  <a:srgbClr val="6D8C97"/>
+                </a:solidFill>
+                <a:latin typeface="Consolas"/>
+              </a:rPr>
+              <a:t>  66  </a:t>
+            </a:r>
+            <a:r>
+              <a:rPr sz="1300">
+                <a:solidFill>
+                  <a:srgbClr val="6D8C97"/>
+                </a:solidFill>
+                <a:latin typeface="Consolas"/>
+              </a:rPr>
+              <a:t>  addLine('You', text);</a:t>
+            </a:r>
+          </a:p>
+          <a:p>
+            <a:pPr>
+              <a:spcAft>
+                <a:spcPts val="0"/>
+              </a:spcAft>
+            </a:pPr>
+            <a:r>
+              <a:rPr sz="1300">
+                <a:solidFill>
+                  <a:srgbClr val="6D8C97"/>
+                </a:solidFill>
+                <a:latin typeface="Consolas"/>
+              </a:rPr>
+              <a:t>  67  </a:t>
+            </a:r>
+            <a:r>
+              <a:rPr sz="1300">
+                <a:solidFill>
+                  <a:srgbClr val="6D8C97"/>
+                </a:solidFill>
+                <a:latin typeface="Consolas"/>
+              </a:rPr>
+              <a:t>  addLine('Companion', 'thinking...');</a:t>
+            </a:r>
+          </a:p>
+          <a:p>
+            <a:pPr>
+              <a:spcAft>
+                <a:spcPts val="0"/>
+              </a:spcAft>
+            </a:pPr>
+            <a:r>
+              <a:rPr sz="1300">
+                <a:solidFill>
+                  <a:srgbClr val="6D8C97"/>
+                </a:solidFill>
+                <a:latin typeface="Consolas"/>
+              </a:rPr>
+              <a:t>  68  </a:t>
+            </a:r>
+            <a:r>
+              <a:rPr sz="1300">
+                <a:solidFill>
+                  <a:srgbClr val="6D8C97"/>
+                </a:solidFill>
+                <a:latin typeface="Consolas"/>
+              </a:rPr>
+              <a:t>  const reply = await askAI(text);       // this is the slow bit</a:t>
+            </a:r>
+          </a:p>
+          <a:p>
+            <a:pPr>
+              <a:spcAft>
+                <a:spcPts val="0"/>
+              </a:spcAft>
+            </a:pPr>
+            <a:r>
+              <a:rPr sz="1300">
+                <a:solidFill>
+                  <a:srgbClr val="6D8C97"/>
+                </a:solidFill>
+                <a:latin typeface="Consolas"/>
+              </a:rPr>
+              <a:t>  69  </a:t>
+            </a:r>
+            <a:r>
+              <a:rPr sz="1300">
+                <a:solidFill>
                   <a:srgbClr val="7FE0A0"/>
                 </a:solidFill>
                 <a:latin typeface="Consolas"/>
               </a:rPr>
-              <a:t> </a:t>
-            </a:r>
-          </a:p>
-          <a:p>
-            <a:pPr>
-              <a:spcAft>
-                <a:spcPts val="0"/>
-              </a:spcAft>
-            </a:pPr>
-            <a:r>
-              <a:rPr sz="1300">
-                <a:solidFill>
-                  <a:srgbClr val="6D8C97"/>
-                </a:solidFill>
-                <a:latin typeface="Consolas"/>
-              </a:rPr>
-              <a:t>  60  </a:t>
-            </a:r>
-            <a:r>
-              <a:rPr sz="1300">
-                <a:solidFill>
-                  <a:srgbClr val="7FE0A0"/>
-                </a:solidFill>
-                <a:latin typeface="Consolas"/>
-              </a:rPr>
-              <a:t>// The browser calls this when the form is submitted.</a:t>
-            </a:r>
-          </a:p>
-          <a:p>
-            <a:pPr>
-              <a:spcAft>
-                <a:spcPts val="0"/>
-              </a:spcAft>
-            </a:pPr>
-            <a:r>
-              <a:rPr sz="1300">
-                <a:solidFill>
-                  <a:srgbClr val="6D8C97"/>
-                </a:solidFill>
-                <a:latin typeface="Consolas"/>
-              </a:rPr>
-              <a:t>  61  </a:t>
-            </a:r>
-            <a:r>
-              <a:rPr sz="1300">
-                <a:solidFill>
-                  <a:srgbClr val="7FE0A0"/>
-                </a:solidFill>
-                <a:latin typeface="Consolas"/>
-              </a:rPr>
-              <a:t>composer.addEventListener('submit', async function (event) {</a:t>
-            </a:r>
-          </a:p>
-          <a:p>
-            <a:pPr>
-              <a:spcAft>
-                <a:spcPts val="0"/>
-              </a:spcAft>
-            </a:pPr>
-            <a:r>
-              <a:rPr sz="1300">
-                <a:solidFill>
-                  <a:srgbClr val="6D8C97"/>
-                </a:solidFill>
-                <a:latin typeface="Consolas"/>
-              </a:rPr>
-              <a:t>  62  </a:t>
-            </a:r>
-            <a:r>
-              <a:rPr sz="1300">
-                <a:solidFill>
-                  <a:srgbClr val="7FE0A0"/>
-                </a:solidFill>
-                <a:latin typeface="Consolas"/>
-              </a:rPr>
-              <a:t>  event.preventDefault();</a:t>
-            </a:r>
-          </a:p>
-          <a:p>
-            <a:pPr>
-              <a:spcAft>
-                <a:spcPts val="0"/>
-              </a:spcAft>
-            </a:pPr>
-            <a:r>
-              <a:rPr sz="1300">
-                <a:solidFill>
-                  <a:srgbClr val="6D8C97"/>
-                </a:solidFill>
-                <a:latin typeface="Consolas"/>
-              </a:rPr>
-              <a:t>  63  </a:t>
-            </a:r>
-            <a:r>
-              <a:rPr sz="1300">
-                <a:solidFill>
-                  <a:srgbClr val="7FE0A0"/>
-                </a:solidFill>
-                <a:latin typeface="Consolas"/>
-              </a:rPr>
-              <a:t>  const text = promptBox.value.trim();</a:t>
-            </a:r>
-          </a:p>
-          <a:p>
-            <a:pPr>
-              <a:spcAft>
-                <a:spcPts val="0"/>
-              </a:spcAft>
-            </a:pPr>
-            <a:r>
-              <a:rPr sz="1300">
-                <a:solidFill>
-                  <a:srgbClr val="6D8C97"/>
-                </a:solidFill>
-                <a:latin typeface="Consolas"/>
-              </a:rPr>
-              <a:t>  64  </a:t>
-            </a:r>
-            <a:r>
-              <a:rPr sz="1300">
-                <a:solidFill>
-                  <a:srgbClr val="7FE0A0"/>
-                </a:solidFill>
-                <a:latin typeface="Consolas"/>
-              </a:rPr>
-              <a:t>  if (text === '') { return; }</a:t>
-            </a:r>
-          </a:p>
-          <a:p>
-            <a:pPr>
-              <a:spcAft>
-                <a:spcPts val="0"/>
-              </a:spcAft>
-            </a:pPr>
-            <a:r>
-              <a:rPr sz="1300">
-                <a:solidFill>
-                  <a:srgbClr val="6D8C97"/>
-                </a:solidFill>
-                <a:latin typeface="Consolas"/>
-              </a:rPr>
-              <a:t>  65  </a:t>
-            </a:r>
-            <a:r>
-              <a:rPr sz="1300">
-                <a:solidFill>
-                  <a:srgbClr val="7FE0A0"/>
-                </a:solidFill>
-                <a:latin typeface="Consolas"/>
-              </a:rPr>
-              <a:t>  promptBox.value = '';</a:t>
-            </a:r>
-          </a:p>
-          <a:p>
-            <a:pPr>
-              <a:spcAft>
-                <a:spcPts val="0"/>
-              </a:spcAft>
-            </a:pPr>
-            <a:r>
-              <a:rPr sz="1300">
-                <a:solidFill>
-                  <a:srgbClr val="6D8C97"/>
-                </a:solidFill>
-                <a:latin typeface="Consolas"/>
-              </a:rPr>
-              <a:t>  66  </a:t>
-            </a:r>
-            <a:r>
-              <a:rPr sz="1300">
-                <a:solidFill>
-                  <a:srgbClr val="7FE0A0"/>
-                </a:solidFill>
-                <a:latin typeface="Consolas"/>
-              </a:rPr>
-              <a:t>  addLine('You', text);</a:t>
-            </a:r>
-          </a:p>
-          <a:p>
-            <a:pPr>
-              <a:spcAft>
-                <a:spcPts val="0"/>
-              </a:spcAft>
-            </a:pPr>
-            <a:r>
-              <a:rPr sz="1300">
-                <a:solidFill>
-                  <a:srgbClr val="6D8C97"/>
-                </a:solidFill>
-                <a:latin typeface="Consolas"/>
-              </a:rPr>
-              <a:t>  67  </a:t>
-            </a:r>
-            <a:r>
-              <a:rPr sz="1300">
-                <a:solidFill>
-                  <a:srgbClr val="7FE0A0"/>
-                </a:solidFill>
-                <a:latin typeface="Consolas"/>
-              </a:rPr>
-              <a:t>  addLine('Companion', 'thinking...');</a:t>
-            </a:r>
-          </a:p>
-          <a:p>
-            <a:pPr>
-              <a:spcAft>
-                <a:spcPts val="0"/>
-              </a:spcAft>
-            </a:pPr>
-            <a:r>
-              <a:rPr sz="1300">
-                <a:solidFill>
-                  <a:srgbClr val="6D8C97"/>
-                </a:solidFill>
-                <a:latin typeface="Consolas"/>
-              </a:rPr>
-              <a:t>  68  </a:t>
-            </a:r>
-            <a:r>
-              <a:rPr sz="1300">
-                <a:solidFill>
-                  <a:srgbClr val="7FE0A0"/>
-                </a:solidFill>
-                <a:latin typeface="Consolas"/>
-              </a:rPr>
-              <a:t>  const reply = await askAI(text);       // this is the slow bit</a:t>
-            </a:r>
-          </a:p>
-          <a:p>
-            <a:pPr>
-              <a:spcAft>
-                <a:spcPts val="0"/>
-              </a:spcAft>
-            </a:pPr>
-            <a:r>
-              <a:rPr sz="1300">
-                <a:solidFill>
-                  <a:srgbClr val="6D8C97"/>
-                </a:solidFill>
-                <a:latin typeface="Consolas"/>
-              </a:rPr>
-              <a:t>  69  </a:t>
-            </a:r>
-            <a:r>
-              <a:rPr sz="1300">
-                <a:solidFill>
-                  <a:srgbClr val="7FE0A0"/>
-                </a:solidFill>
-                <a:latin typeface="Consolas"/>
-              </a:rPr>
               <a:t>  chat.lastChild.remove();               // take the 'thinking' line away</a:t>
-            </a:r>
-          </a:p>
-          <a:p>
-            <a:pPr>
-              <a:spcAft>
-                <a:spcPts val="0"/>
-              </a:spcAft>
-            </a:pPr>
-            <a:r>
-              <a:rPr sz="1300">
-                <a:solidFill>
-                  <a:srgbClr val="6D8C97"/>
-                </a:solidFill>
-                <a:latin typeface="Consolas"/>
-              </a:rPr>
-              <a:t>  70  </a:t>
-            </a:r>
-            <a:r>
-              <a:rPr sz="1300">
-                <a:solidFill>
-                  <a:srgbClr val="7FE0A0"/>
-                </a:solidFill>
-                <a:latin typeface="Consolas"/>
-              </a:rPr>
-              <a:t>  addLine('Companion', reply);</a:t>
-            </a:r>
-          </a:p>
-          <a:p>
-            <a:pPr>
-              <a:spcAft>
-                <a:spcPts val="0"/>
-              </a:spcAft>
-            </a:pPr>
-            <a:r>
-              <a:rPr sz="1300">
-                <a:solidFill>
-                  <a:srgbClr val="6D8C97"/>
-                </a:solidFill>
-                <a:latin typeface="Consolas"/>
-              </a:rPr>
-              <a:t>  71  </a:t>
-            </a:r>
-            <a:r>
-              <a:rPr sz="1300">
-                <a:solidFill>
-                  <a:srgbClr val="7FE0A0"/>
-                </a:solidFill>
-                <a:latin typeface="Consolas"/>
-              </a:rPr>
-              <a:t>});</a:t>
             </a:r>
           </a:p>
         </p:txBody>
@@ -13030,7 +12437,7 @@
                   <a:srgbClr val="DCECEF"/>
                 </a:solidFill>
               </a:rPr>
-              <a:t>That is the whole piece. Check yours looks the same before moving on.</a:t>
+              <a:t>Remove the 'thinking...' line now the real answer is here.</a:t>
             </a:r>
           </a:p>
         </p:txBody>
@@ -13089,7 +12496,7 @@
                   <a:srgbClr val="01AEFD"/>
                 </a:solidFill>
               </a:rPr>
-              <a:t>In script.js   -   delete a line</a:t>
+              <a:t>Type this into script.js   -   line 70</a:t>
             </a:r>
           </a:p>
         </p:txBody>
@@ -13128,7 +12535,7 @@
                 </a:solidFill>
                 <a:latin typeface="Consolas"/>
               </a:rPr>
-              <a:t>  29  </a:t>
+              <a:t>  59  </a:t>
             </a:r>
             <a:r>
               <a:rPr sz="1300">
@@ -13153,241 +12560,266 @@
                 </a:solidFill>
                 <a:latin typeface="Consolas"/>
               </a:rPr>
-              <a:t>  30  </a:t>
-            </a:r>
-            <a:r>
-              <a:rPr sz="1300">
-                <a:solidFill>
-                  <a:srgbClr val="6D8C97"/>
-                </a:solidFill>
-                <a:latin typeface="Consolas"/>
-              </a:rPr>
-              <a:t>// The smallest useful request: what models does this server have?</a:t>
-            </a:r>
-          </a:p>
-          <a:p>
-            <a:pPr>
-              <a:spcAft>
-                <a:spcPts val="0"/>
-              </a:spcAft>
-            </a:pPr>
-            <a:r>
-              <a:rPr sz="1300">
-                <a:solidFill>
-                  <a:srgbClr val="6D8C97"/>
-                </a:solidFill>
-                <a:latin typeface="Consolas"/>
-              </a:rPr>
-              <a:t>  31  </a:t>
-            </a:r>
-            <a:r>
-              <a:rPr sz="1300">
-                <a:solidFill>
-                  <a:srgbClr val="6D8C97"/>
-                </a:solidFill>
-                <a:latin typeface="Consolas"/>
-              </a:rPr>
-              <a:t>// 'async' means this function does something slow and can be waited for.</a:t>
-            </a:r>
-          </a:p>
-          <a:p>
-            <a:pPr>
-              <a:spcAft>
-                <a:spcPts val="0"/>
-              </a:spcAft>
-            </a:pPr>
-            <a:r>
-              <a:rPr sz="1300">
-                <a:solidFill>
-                  <a:srgbClr val="6D8C97"/>
-                </a:solidFill>
-                <a:latin typeface="Consolas"/>
-              </a:rPr>
-              <a:t>  32  </a:t>
-            </a:r>
-            <a:r>
-              <a:rPr sz="1300">
-                <a:solidFill>
-                  <a:srgbClr val="6D8C97"/>
-                </a:solidFill>
-                <a:latin typeface="Consolas"/>
-              </a:rPr>
-              <a:t>async function listModels() {</a:t>
-            </a:r>
-          </a:p>
-          <a:p>
-            <a:pPr>
-              <a:spcAft>
-                <a:spcPts val="0"/>
-              </a:spcAft>
-            </a:pPr>
-            <a:r>
-              <a:rPr sz="1300">
-                <a:solidFill>
-                  <a:srgbClr val="6D8C97"/>
-                </a:solidFill>
-                <a:latin typeface="Consolas"/>
-              </a:rPr>
-              <a:t>  33  </a:t>
-            </a:r>
-            <a:r>
-              <a:rPr sz="1300">
-                <a:solidFill>
-                  <a:srgbClr val="6D8C97"/>
-                </a:solidFill>
-                <a:latin typeface="Consolas"/>
-              </a:rPr>
-              <a:t>  const res = await fetch(AI_BASE + '/v1/models', {</a:t>
-            </a:r>
-          </a:p>
-          <a:p>
-            <a:pPr>
-              <a:spcAft>
-                <a:spcPts val="0"/>
-              </a:spcAft>
-            </a:pPr>
-            <a:r>
-              <a:rPr sz="1300">
-                <a:solidFill>
-                  <a:srgbClr val="6D8C97"/>
-                </a:solidFill>
-                <a:latin typeface="Consolas"/>
-              </a:rPr>
-              <a:t>  34  </a:t>
-            </a:r>
-            <a:r>
-              <a:rPr sz="1300">
-                <a:solidFill>
-                  <a:srgbClr val="6D8C97"/>
-                </a:solidFill>
-                <a:latin typeface="Consolas"/>
-              </a:rPr>
-              <a:t>    headers: { 'Authorization': 'Bearer ' + API_KEY }</a:t>
-            </a:r>
-          </a:p>
-          <a:p>
-            <a:pPr>
-              <a:spcAft>
-                <a:spcPts val="0"/>
-              </a:spcAft>
-            </a:pPr>
-            <a:r>
-              <a:rPr sz="1300">
-                <a:solidFill>
-                  <a:srgbClr val="6D8C97"/>
-                </a:solidFill>
-                <a:latin typeface="Consolas"/>
-              </a:rPr>
-              <a:t>  35  </a:t>
-            </a:r>
-            <a:r>
-              <a:rPr sz="1300">
-                <a:solidFill>
-                  <a:srgbClr val="6D8C97"/>
-                </a:solidFill>
-                <a:latin typeface="Consolas"/>
-              </a:rPr>
-              <a:t>  });</a:t>
-            </a:r>
-          </a:p>
-          <a:p>
-            <a:pPr>
-              <a:spcAft>
-                <a:spcPts val="0"/>
-              </a:spcAft>
-            </a:pPr>
-            <a:r>
-              <a:rPr sz="1300">
-                <a:solidFill>
-                  <a:srgbClr val="6D8C97"/>
-                </a:solidFill>
-                <a:latin typeface="Consolas"/>
-              </a:rPr>
-              <a:t>  36  </a:t>
-            </a:r>
-            <a:r>
-              <a:rPr sz="1300">
-                <a:solidFill>
-                  <a:srgbClr val="6D8C97"/>
-                </a:solidFill>
-                <a:latin typeface="Consolas"/>
-              </a:rPr>
-              <a:t>  const data = await res.json();   // the answer arrives as text; this reads it</a:t>
-            </a:r>
-          </a:p>
-          <a:p>
-            <a:pPr>
-              <a:spcAft>
-                <a:spcPts val="0"/>
-              </a:spcAft>
-            </a:pPr>
-            <a:r>
-              <a:rPr sz="1300">
-                <a:solidFill>
-                  <a:srgbClr val="6D8C97"/>
-                </a:solidFill>
-                <a:latin typeface="Consolas"/>
-              </a:rPr>
-              <a:t>  37  </a:t>
-            </a:r>
-            <a:r>
-              <a:rPr sz="1300">
-                <a:solidFill>
-                  <a:srgbClr val="6D8C97"/>
-                </a:solidFill>
-                <a:latin typeface="Consolas"/>
-              </a:rPr>
-              <a:t>  console.log('The server offers:', data.data);</a:t>
-            </a:r>
-          </a:p>
-          <a:p>
-            <a:pPr>
-              <a:spcAft>
-                <a:spcPts val="0"/>
-              </a:spcAft>
-            </a:pPr>
-            <a:r>
-              <a:rPr sz="1300">
-                <a:solidFill>
-                  <a:srgbClr val="6D8C97"/>
-                </a:solidFill>
-                <a:latin typeface="Consolas"/>
-              </a:rPr>
-              <a:t>  38  </a:t>
-            </a:r>
-            <a:r>
-              <a:rPr sz="1300">
-                <a:solidFill>
-                  <a:srgbClr val="6D8C97"/>
-                </a:solidFill>
-                <a:latin typeface="Consolas"/>
-              </a:rPr>
-              <a:t>}</a:t>
-            </a:r>
-          </a:p>
-          <a:p>
-            <a:pPr>
-              <a:spcAft>
-                <a:spcPts val="0"/>
-              </a:spcAft>
-            </a:pPr>
-            <a:r>
-              <a:rPr sz="1300">
-                <a:solidFill>
-                  <a:srgbClr val="6D8C97"/>
-                </a:solidFill>
-                <a:latin typeface="Consolas"/>
-              </a:rPr>
-              <a:t>   -  </a:t>
-            </a:r>
-            <a:r>
-              <a:rPr sz="1300" strike="sngStrike">
-                <a:solidFill>
-                  <a:srgbClr val="F3928B"/>
-                </a:solidFill>
-                <a:latin typeface="Consolas"/>
-              </a:rPr>
-              <a:t>listModels();</a:t>
+              <a:t>  60  </a:t>
+            </a:r>
+            <a:r>
+              <a:rPr sz="1300">
+                <a:solidFill>
+                  <a:srgbClr val="6D8C97"/>
+                </a:solidFill>
+                <a:latin typeface="Consolas"/>
+              </a:rPr>
+              <a:t>// The browser calls this when the form is submitted.</a:t>
+            </a:r>
+          </a:p>
+          <a:p>
+            <a:pPr>
+              <a:spcAft>
+                <a:spcPts val="0"/>
+              </a:spcAft>
+            </a:pPr>
+            <a:r>
+              <a:rPr sz="1300">
+                <a:solidFill>
+                  <a:srgbClr val="6D8C97"/>
+                </a:solidFill>
+                <a:latin typeface="Consolas"/>
+              </a:rPr>
+              <a:t>  61  </a:t>
+            </a:r>
+            <a:r>
+              <a:rPr sz="1300">
+                <a:solidFill>
+                  <a:srgbClr val="6D8C97"/>
+                </a:solidFill>
+                <a:latin typeface="Consolas"/>
+              </a:rPr>
+              <a:t>composer.addEventListener('submit', async function (event) {</a:t>
+            </a:r>
+          </a:p>
+          <a:p>
+            <a:pPr>
+              <a:spcAft>
+                <a:spcPts val="0"/>
+              </a:spcAft>
+            </a:pPr>
+            <a:r>
+              <a:rPr sz="1300">
+                <a:solidFill>
+                  <a:srgbClr val="6D8C97"/>
+                </a:solidFill>
+                <a:latin typeface="Consolas"/>
+              </a:rPr>
+              <a:t>  62  </a:t>
+            </a:r>
+            <a:r>
+              <a:rPr sz="1300">
+                <a:solidFill>
+                  <a:srgbClr val="6D8C97"/>
+                </a:solidFill>
+                <a:latin typeface="Consolas"/>
+              </a:rPr>
+              <a:t>  event.preventDefault();</a:t>
+            </a:r>
+          </a:p>
+          <a:p>
+            <a:pPr>
+              <a:spcAft>
+                <a:spcPts val="0"/>
+              </a:spcAft>
+            </a:pPr>
+            <a:r>
+              <a:rPr sz="1300">
+                <a:solidFill>
+                  <a:srgbClr val="6D8C97"/>
+                </a:solidFill>
+                <a:latin typeface="Consolas"/>
+              </a:rPr>
+              <a:t>  63  </a:t>
+            </a:r>
+            <a:r>
+              <a:rPr sz="1300">
+                <a:solidFill>
+                  <a:srgbClr val="6D8C97"/>
+                </a:solidFill>
+                <a:latin typeface="Consolas"/>
+              </a:rPr>
+              <a:t>  const text = promptBox.value.trim();</a:t>
+            </a:r>
+          </a:p>
+          <a:p>
+            <a:pPr>
+              <a:spcAft>
+                <a:spcPts val="0"/>
+              </a:spcAft>
+            </a:pPr>
+            <a:r>
+              <a:rPr sz="1300">
+                <a:solidFill>
+                  <a:srgbClr val="6D8C97"/>
+                </a:solidFill>
+                <a:latin typeface="Consolas"/>
+              </a:rPr>
+              <a:t>  64  </a:t>
+            </a:r>
+            <a:r>
+              <a:rPr sz="1300">
+                <a:solidFill>
+                  <a:srgbClr val="6D8C97"/>
+                </a:solidFill>
+                <a:latin typeface="Consolas"/>
+              </a:rPr>
+              <a:t>  if (text === '') { return; }</a:t>
+            </a:r>
+          </a:p>
+          <a:p>
+            <a:pPr>
+              <a:spcAft>
+                <a:spcPts val="0"/>
+              </a:spcAft>
+            </a:pPr>
+            <a:r>
+              <a:rPr sz="1300">
+                <a:solidFill>
+                  <a:srgbClr val="6D8C97"/>
+                </a:solidFill>
+                <a:latin typeface="Consolas"/>
+              </a:rPr>
+              <a:t>  65  </a:t>
+            </a:r>
+            <a:r>
+              <a:rPr sz="1300">
+                <a:solidFill>
+                  <a:srgbClr val="6D8C97"/>
+                </a:solidFill>
+                <a:latin typeface="Consolas"/>
+              </a:rPr>
+              <a:t>  promptBox.value = '';</a:t>
+            </a:r>
+          </a:p>
+          <a:p>
+            <a:pPr>
+              <a:spcAft>
+                <a:spcPts val="0"/>
+              </a:spcAft>
+            </a:pPr>
+            <a:r>
+              <a:rPr sz="1300">
+                <a:solidFill>
+                  <a:srgbClr val="6D8C97"/>
+                </a:solidFill>
+                <a:latin typeface="Consolas"/>
+              </a:rPr>
+              <a:t>  66  </a:t>
+            </a:r>
+            <a:r>
+              <a:rPr sz="1300">
+                <a:solidFill>
+                  <a:srgbClr val="6D8C97"/>
+                </a:solidFill>
+                <a:latin typeface="Consolas"/>
+              </a:rPr>
+              <a:t>  addLine('You', text);</a:t>
+            </a:r>
+          </a:p>
+          <a:p>
+            <a:pPr>
+              <a:spcAft>
+                <a:spcPts val="0"/>
+              </a:spcAft>
+            </a:pPr>
+            <a:r>
+              <a:rPr sz="1300">
+                <a:solidFill>
+                  <a:srgbClr val="6D8C97"/>
+                </a:solidFill>
+                <a:latin typeface="Consolas"/>
+              </a:rPr>
+              <a:t>  67  </a:t>
+            </a:r>
+            <a:r>
+              <a:rPr sz="1300">
+                <a:solidFill>
+                  <a:srgbClr val="6D8C97"/>
+                </a:solidFill>
+                <a:latin typeface="Consolas"/>
+              </a:rPr>
+              <a:t>  addLine('Companion', 'thinking...');</a:t>
+            </a:r>
+          </a:p>
+          <a:p>
+            <a:pPr>
+              <a:spcAft>
+                <a:spcPts val="0"/>
+              </a:spcAft>
+            </a:pPr>
+            <a:r>
+              <a:rPr sz="1300">
+                <a:solidFill>
+                  <a:srgbClr val="6D8C97"/>
+                </a:solidFill>
+                <a:latin typeface="Consolas"/>
+              </a:rPr>
+              <a:t>  68  </a:t>
+            </a:r>
+            <a:r>
+              <a:rPr sz="1300">
+                <a:solidFill>
+                  <a:srgbClr val="6D8C97"/>
+                </a:solidFill>
+                <a:latin typeface="Consolas"/>
+              </a:rPr>
+              <a:t>  const reply = await askAI(text);       // this is the slow bit</a:t>
+            </a:r>
+          </a:p>
+          <a:p>
+            <a:pPr>
+              <a:spcAft>
+                <a:spcPts val="0"/>
+              </a:spcAft>
+            </a:pPr>
+            <a:r>
+              <a:rPr sz="1300">
+                <a:solidFill>
+                  <a:srgbClr val="6D8C97"/>
+                </a:solidFill>
+                <a:latin typeface="Consolas"/>
+              </a:rPr>
+              <a:t>  69  </a:t>
+            </a:r>
+            <a:r>
+              <a:rPr sz="1300">
+                <a:solidFill>
+                  <a:srgbClr val="6D8C97"/>
+                </a:solidFill>
+                <a:latin typeface="Consolas"/>
+              </a:rPr>
+              <a:t>  chat.lastChild.remove();               // take the 'thinking' line away</a:t>
+            </a:r>
+          </a:p>
+          <a:p>
+            <a:pPr>
+              <a:spcAft>
+                <a:spcPts val="0"/>
+              </a:spcAft>
+            </a:pPr>
+            <a:r>
+              <a:rPr sz="1300">
+                <a:solidFill>
+                  <a:srgbClr val="6D8C97"/>
+                </a:solidFill>
+                <a:latin typeface="Consolas"/>
+              </a:rPr>
+              <a:t>  70  </a:t>
+            </a:r>
+            <a:r>
+              <a:rPr sz="1300">
+                <a:solidFill>
+                  <a:srgbClr val="7FE0A0"/>
+                </a:solidFill>
+                <a:latin typeface="Consolas"/>
+              </a:rPr>
+              <a:t>  addLine('Companion', reply);</a:t>
             </a:r>
           </a:p>
         </p:txBody>
@@ -13420,7 +12852,7 @@
                   <a:srgbClr val="DCECEF"/>
                 </a:solidFill>
               </a:rPr>
-              <a:t>Delete this line. askAI does the asking now, so the old test call is no longer needed - your file should have no listModels() call left.</a:t>
+              <a:t>Show the real reply in the chat.</a:t>
             </a:r>
           </a:p>
         </p:txBody>
@@ -13434,6 +12866,836 @@
 </file>
 
 <file path=ppt/slides/slide36.xml><?xml version="1.0" encoding="utf-8"?>
+<p:sld xmlns:a="http://schemas.openxmlformats.org/drawingml/2006/main" xmlns:p="http://schemas.openxmlformats.org/presentationml/2006/main" xmlns:r="http://schemas.openxmlformats.org/officeDocument/2006/relationships">
+  <p:cSld>
+    <p:bg>
+      <p:bgPr>
+        <a:solidFill>
+          <a:srgbClr val="102127"/>
+        </a:solidFill>
+        <a:effectLst/>
+      </p:bgPr>
+    </p:bg>
+    <p:spTree>
+      <p:nvGrpSpPr>
+        <p:cNvPr id="1" name=""/>
+        <p:cNvGrpSpPr/>
+        <p:nvPr/>
+      </p:nvGrpSpPr>
+      <p:grpSpPr/>
+      <p:sp>
+        <p:nvSpPr>
+          <p:cNvPr id="2" name="TextBox 1"/>
+          <p:cNvSpPr txBox="1"/>
+          <p:nvPr/>
+        </p:nvSpPr>
+        <p:spPr>
+          <a:xfrm>
+            <a:off x="502920" y="274320"/>
+            <a:ext cx="11155680" cy="548640"/>
+          </a:xfrm>
+          <a:prstGeom prst="rect">
+            <a:avLst/>
+          </a:prstGeom>
+          <a:noFill/>
+        </p:spPr>
+        <p:txBody>
+          <a:bodyPr wrap="none">
+            <a:spAutoFit/>
+          </a:bodyPr>
+          <a:lstStyle/>
+          <a:p>
+            <a:r>
+              <a:rPr sz="2200" b="1">
+                <a:solidFill>
+                  <a:srgbClr val="01AEFD"/>
+                </a:solidFill>
+              </a:rPr>
+              <a:t>All together in script.js</a:t>
+            </a:r>
+          </a:p>
+        </p:txBody>
+      </p:sp>
+      <p:sp>
+        <p:nvSpPr>
+          <p:cNvPr id="3" name="TextBox 2"/>
+          <p:cNvSpPr txBox="1"/>
+          <p:nvPr/>
+        </p:nvSpPr>
+        <p:spPr>
+          <a:xfrm>
+            <a:off x="502920" y="960120"/>
+            <a:ext cx="11155680" cy="4297680"/>
+          </a:xfrm>
+          <a:prstGeom prst="rect">
+            <a:avLst/>
+          </a:prstGeom>
+          <a:noFill/>
+        </p:spPr>
+        <p:txBody>
+          <a:bodyPr wrap="none">
+            <a:spAutoFit/>
+          </a:bodyPr>
+          <a:lstStyle/>
+          <a:p>
+            <a:pPr>
+              <a:spcAft>
+                <a:spcPts val="0"/>
+              </a:spcAft>
+            </a:pPr>
+            <a:r>
+              <a:rPr sz="1300">
+                <a:solidFill>
+                  <a:srgbClr val="6D8C97"/>
+                </a:solidFill>
+                <a:latin typeface="Consolas"/>
+              </a:rPr>
+              <a:t>  59  </a:t>
+            </a:r>
+            <a:r>
+              <a:rPr sz="1300">
+                <a:solidFill>
+                  <a:srgbClr val="7FE0A0"/>
+                </a:solidFill>
+                <a:latin typeface="Consolas"/>
+              </a:rPr>
+              <a:t> </a:t>
+            </a:r>
+          </a:p>
+          <a:p>
+            <a:pPr>
+              <a:spcAft>
+                <a:spcPts val="0"/>
+              </a:spcAft>
+            </a:pPr>
+            <a:r>
+              <a:rPr sz="1300">
+                <a:solidFill>
+                  <a:srgbClr val="6D8C97"/>
+                </a:solidFill>
+                <a:latin typeface="Consolas"/>
+              </a:rPr>
+              <a:t>  60  </a:t>
+            </a:r>
+            <a:r>
+              <a:rPr sz="1300">
+                <a:solidFill>
+                  <a:srgbClr val="7FE0A0"/>
+                </a:solidFill>
+                <a:latin typeface="Consolas"/>
+              </a:rPr>
+              <a:t>// The browser calls this when the form is submitted.</a:t>
+            </a:r>
+          </a:p>
+          <a:p>
+            <a:pPr>
+              <a:spcAft>
+                <a:spcPts val="0"/>
+              </a:spcAft>
+            </a:pPr>
+            <a:r>
+              <a:rPr sz="1300">
+                <a:solidFill>
+                  <a:srgbClr val="6D8C97"/>
+                </a:solidFill>
+                <a:latin typeface="Consolas"/>
+              </a:rPr>
+              <a:t>  61  </a:t>
+            </a:r>
+            <a:r>
+              <a:rPr sz="1300">
+                <a:solidFill>
+                  <a:srgbClr val="7FE0A0"/>
+                </a:solidFill>
+                <a:latin typeface="Consolas"/>
+              </a:rPr>
+              <a:t>composer.addEventListener('submit', async function (event) {</a:t>
+            </a:r>
+          </a:p>
+          <a:p>
+            <a:pPr>
+              <a:spcAft>
+                <a:spcPts val="0"/>
+              </a:spcAft>
+            </a:pPr>
+            <a:r>
+              <a:rPr sz="1300">
+                <a:solidFill>
+                  <a:srgbClr val="6D8C97"/>
+                </a:solidFill>
+                <a:latin typeface="Consolas"/>
+              </a:rPr>
+              <a:t>  62  </a:t>
+            </a:r>
+            <a:r>
+              <a:rPr sz="1300">
+                <a:solidFill>
+                  <a:srgbClr val="7FE0A0"/>
+                </a:solidFill>
+                <a:latin typeface="Consolas"/>
+              </a:rPr>
+              <a:t>  event.preventDefault();</a:t>
+            </a:r>
+          </a:p>
+          <a:p>
+            <a:pPr>
+              <a:spcAft>
+                <a:spcPts val="0"/>
+              </a:spcAft>
+            </a:pPr>
+            <a:r>
+              <a:rPr sz="1300">
+                <a:solidFill>
+                  <a:srgbClr val="6D8C97"/>
+                </a:solidFill>
+                <a:latin typeface="Consolas"/>
+              </a:rPr>
+              <a:t>  63  </a:t>
+            </a:r>
+            <a:r>
+              <a:rPr sz="1300">
+                <a:solidFill>
+                  <a:srgbClr val="7FE0A0"/>
+                </a:solidFill>
+                <a:latin typeface="Consolas"/>
+              </a:rPr>
+              <a:t>  const text = promptBox.value.trim();</a:t>
+            </a:r>
+          </a:p>
+          <a:p>
+            <a:pPr>
+              <a:spcAft>
+                <a:spcPts val="0"/>
+              </a:spcAft>
+            </a:pPr>
+            <a:r>
+              <a:rPr sz="1300">
+                <a:solidFill>
+                  <a:srgbClr val="6D8C97"/>
+                </a:solidFill>
+                <a:latin typeface="Consolas"/>
+              </a:rPr>
+              <a:t>  64  </a:t>
+            </a:r>
+            <a:r>
+              <a:rPr sz="1300">
+                <a:solidFill>
+                  <a:srgbClr val="7FE0A0"/>
+                </a:solidFill>
+                <a:latin typeface="Consolas"/>
+              </a:rPr>
+              <a:t>  if (text === '') { return; }</a:t>
+            </a:r>
+          </a:p>
+          <a:p>
+            <a:pPr>
+              <a:spcAft>
+                <a:spcPts val="0"/>
+              </a:spcAft>
+            </a:pPr>
+            <a:r>
+              <a:rPr sz="1300">
+                <a:solidFill>
+                  <a:srgbClr val="6D8C97"/>
+                </a:solidFill>
+                <a:latin typeface="Consolas"/>
+              </a:rPr>
+              <a:t>  65  </a:t>
+            </a:r>
+            <a:r>
+              <a:rPr sz="1300">
+                <a:solidFill>
+                  <a:srgbClr val="7FE0A0"/>
+                </a:solidFill>
+                <a:latin typeface="Consolas"/>
+              </a:rPr>
+              <a:t>  promptBox.value = '';</a:t>
+            </a:r>
+          </a:p>
+          <a:p>
+            <a:pPr>
+              <a:spcAft>
+                <a:spcPts val="0"/>
+              </a:spcAft>
+            </a:pPr>
+            <a:r>
+              <a:rPr sz="1300">
+                <a:solidFill>
+                  <a:srgbClr val="6D8C97"/>
+                </a:solidFill>
+                <a:latin typeface="Consolas"/>
+              </a:rPr>
+              <a:t>  66  </a:t>
+            </a:r>
+            <a:r>
+              <a:rPr sz="1300">
+                <a:solidFill>
+                  <a:srgbClr val="7FE0A0"/>
+                </a:solidFill>
+                <a:latin typeface="Consolas"/>
+              </a:rPr>
+              <a:t>  addLine('You', text);</a:t>
+            </a:r>
+          </a:p>
+          <a:p>
+            <a:pPr>
+              <a:spcAft>
+                <a:spcPts val="0"/>
+              </a:spcAft>
+            </a:pPr>
+            <a:r>
+              <a:rPr sz="1300">
+                <a:solidFill>
+                  <a:srgbClr val="6D8C97"/>
+                </a:solidFill>
+                <a:latin typeface="Consolas"/>
+              </a:rPr>
+              <a:t>  67  </a:t>
+            </a:r>
+            <a:r>
+              <a:rPr sz="1300">
+                <a:solidFill>
+                  <a:srgbClr val="7FE0A0"/>
+                </a:solidFill>
+                <a:latin typeface="Consolas"/>
+              </a:rPr>
+              <a:t>  addLine('Companion', 'thinking...');</a:t>
+            </a:r>
+          </a:p>
+          <a:p>
+            <a:pPr>
+              <a:spcAft>
+                <a:spcPts val="0"/>
+              </a:spcAft>
+            </a:pPr>
+            <a:r>
+              <a:rPr sz="1300">
+                <a:solidFill>
+                  <a:srgbClr val="6D8C97"/>
+                </a:solidFill>
+                <a:latin typeface="Consolas"/>
+              </a:rPr>
+              <a:t>  68  </a:t>
+            </a:r>
+            <a:r>
+              <a:rPr sz="1300">
+                <a:solidFill>
+                  <a:srgbClr val="7FE0A0"/>
+                </a:solidFill>
+                <a:latin typeface="Consolas"/>
+              </a:rPr>
+              <a:t>  const reply = await askAI(text);       // this is the slow bit</a:t>
+            </a:r>
+          </a:p>
+          <a:p>
+            <a:pPr>
+              <a:spcAft>
+                <a:spcPts val="0"/>
+              </a:spcAft>
+            </a:pPr>
+            <a:r>
+              <a:rPr sz="1300">
+                <a:solidFill>
+                  <a:srgbClr val="6D8C97"/>
+                </a:solidFill>
+                <a:latin typeface="Consolas"/>
+              </a:rPr>
+              <a:t>  69  </a:t>
+            </a:r>
+            <a:r>
+              <a:rPr sz="1300">
+                <a:solidFill>
+                  <a:srgbClr val="7FE0A0"/>
+                </a:solidFill>
+                <a:latin typeface="Consolas"/>
+              </a:rPr>
+              <a:t>  chat.lastChild.remove();               // take the 'thinking' line away</a:t>
+            </a:r>
+          </a:p>
+          <a:p>
+            <a:pPr>
+              <a:spcAft>
+                <a:spcPts val="0"/>
+              </a:spcAft>
+            </a:pPr>
+            <a:r>
+              <a:rPr sz="1300">
+                <a:solidFill>
+                  <a:srgbClr val="6D8C97"/>
+                </a:solidFill>
+                <a:latin typeface="Consolas"/>
+              </a:rPr>
+              <a:t>  70  </a:t>
+            </a:r>
+            <a:r>
+              <a:rPr sz="1300">
+                <a:solidFill>
+                  <a:srgbClr val="7FE0A0"/>
+                </a:solidFill>
+                <a:latin typeface="Consolas"/>
+              </a:rPr>
+              <a:t>  addLine('Companion', reply);</a:t>
+            </a:r>
+          </a:p>
+          <a:p>
+            <a:pPr>
+              <a:spcAft>
+                <a:spcPts val="0"/>
+              </a:spcAft>
+            </a:pPr>
+            <a:r>
+              <a:rPr sz="1300">
+                <a:solidFill>
+                  <a:srgbClr val="6D8C97"/>
+                </a:solidFill>
+                <a:latin typeface="Consolas"/>
+              </a:rPr>
+              <a:t>  71  </a:t>
+            </a:r>
+            <a:r>
+              <a:rPr sz="1300">
+                <a:solidFill>
+                  <a:srgbClr val="7FE0A0"/>
+                </a:solidFill>
+                <a:latin typeface="Consolas"/>
+              </a:rPr>
+              <a:t>});</a:t>
+            </a:r>
+          </a:p>
+        </p:txBody>
+      </p:sp>
+      <p:sp>
+        <p:nvSpPr>
+          <p:cNvPr id="4" name="TextBox 3"/>
+          <p:cNvSpPr txBox="1"/>
+          <p:nvPr/>
+        </p:nvSpPr>
+        <p:spPr>
+          <a:xfrm>
+            <a:off x="548640" y="5623560"/>
+            <a:ext cx="11064240" cy="1051560"/>
+          </a:xfrm>
+          <a:prstGeom prst="rect">
+            <a:avLst/>
+          </a:prstGeom>
+          <a:noFill/>
+        </p:spPr>
+        <p:txBody>
+          <a:bodyPr wrap="square">
+            <a:spAutoFit/>
+          </a:bodyPr>
+          <a:lstStyle/>
+          <a:p>
+            <a:r>
+              <a:rPr sz="2000">
+                <a:solidFill>
+                  <a:srgbClr val="DCECEF"/>
+                </a:solidFill>
+              </a:rPr>
+              <a:t>That is the whole piece. Check yours looks the same before moving on.</a:t>
+            </a:r>
+          </a:p>
+        </p:txBody>
+      </p:sp>
+    </p:spTree>
+  </p:cSld>
+  <p:clrMapOvr>
+    <a:masterClrMapping/>
+  </p:clrMapOvr>
+</p:sld>
+</file>
+
+<file path=ppt/slides/slide37.xml><?xml version="1.0" encoding="utf-8"?>
+<p:sld xmlns:a="http://schemas.openxmlformats.org/drawingml/2006/main" xmlns:p="http://schemas.openxmlformats.org/presentationml/2006/main" xmlns:r="http://schemas.openxmlformats.org/officeDocument/2006/relationships">
+  <p:cSld>
+    <p:bg>
+      <p:bgPr>
+        <a:solidFill>
+          <a:srgbClr val="102127"/>
+        </a:solidFill>
+        <a:effectLst/>
+      </p:bgPr>
+    </p:bg>
+    <p:spTree>
+      <p:nvGrpSpPr>
+        <p:cNvPr id="1" name=""/>
+        <p:cNvGrpSpPr/>
+        <p:nvPr/>
+      </p:nvGrpSpPr>
+      <p:grpSpPr/>
+      <p:sp>
+        <p:nvSpPr>
+          <p:cNvPr id="2" name="TextBox 1"/>
+          <p:cNvSpPr txBox="1"/>
+          <p:nvPr/>
+        </p:nvSpPr>
+        <p:spPr>
+          <a:xfrm>
+            <a:off x="502920" y="274320"/>
+            <a:ext cx="11155680" cy="548640"/>
+          </a:xfrm>
+          <a:prstGeom prst="rect">
+            <a:avLst/>
+          </a:prstGeom>
+          <a:noFill/>
+        </p:spPr>
+        <p:txBody>
+          <a:bodyPr wrap="none">
+            <a:spAutoFit/>
+          </a:bodyPr>
+          <a:lstStyle/>
+          <a:p>
+            <a:r>
+              <a:rPr sz="2200" b="1">
+                <a:solidFill>
+                  <a:srgbClr val="01AEFD"/>
+                </a:solidFill>
+              </a:rPr>
+              <a:t>In script.js   -   delete a line</a:t>
+            </a:r>
+          </a:p>
+        </p:txBody>
+      </p:sp>
+      <p:sp>
+        <p:nvSpPr>
+          <p:cNvPr id="3" name="TextBox 2"/>
+          <p:cNvSpPr txBox="1"/>
+          <p:nvPr/>
+        </p:nvSpPr>
+        <p:spPr>
+          <a:xfrm>
+            <a:off x="502920" y="960120"/>
+            <a:ext cx="11155680" cy="4297680"/>
+          </a:xfrm>
+          <a:prstGeom prst="rect">
+            <a:avLst/>
+          </a:prstGeom>
+          <a:noFill/>
+        </p:spPr>
+        <p:txBody>
+          <a:bodyPr wrap="none">
+            <a:spAutoFit/>
+          </a:bodyPr>
+          <a:lstStyle/>
+          <a:p>
+            <a:pPr>
+              <a:spcAft>
+                <a:spcPts val="0"/>
+              </a:spcAft>
+            </a:pPr>
+            <a:r>
+              <a:rPr sz="1300">
+                <a:solidFill>
+                  <a:srgbClr val="6D8C97"/>
+                </a:solidFill>
+                <a:latin typeface="Consolas"/>
+              </a:rPr>
+              <a:t>  29  </a:t>
+            </a:r>
+            <a:r>
+              <a:rPr sz="1300">
+                <a:solidFill>
+                  <a:srgbClr val="6D8C97"/>
+                </a:solidFill>
+                <a:latin typeface="Consolas"/>
+              </a:rPr>
+              <a:t> </a:t>
+            </a:r>
+          </a:p>
+          <a:p>
+            <a:pPr>
+              <a:spcAft>
+                <a:spcPts val="0"/>
+              </a:spcAft>
+            </a:pPr>
+            <a:r>
+              <a:rPr sz="1300">
+                <a:solidFill>
+                  <a:srgbClr val="6D8C97"/>
+                </a:solidFill>
+                <a:latin typeface="Consolas"/>
+              </a:rPr>
+              <a:t>  30  </a:t>
+            </a:r>
+            <a:r>
+              <a:rPr sz="1300">
+                <a:solidFill>
+                  <a:srgbClr val="6D8C97"/>
+                </a:solidFill>
+                <a:latin typeface="Consolas"/>
+              </a:rPr>
+              <a:t>// The smallest useful request: what models does this server have?</a:t>
+            </a:r>
+          </a:p>
+          <a:p>
+            <a:pPr>
+              <a:spcAft>
+                <a:spcPts val="0"/>
+              </a:spcAft>
+            </a:pPr>
+            <a:r>
+              <a:rPr sz="1300">
+                <a:solidFill>
+                  <a:srgbClr val="6D8C97"/>
+                </a:solidFill>
+                <a:latin typeface="Consolas"/>
+              </a:rPr>
+              <a:t>  31  </a:t>
+            </a:r>
+            <a:r>
+              <a:rPr sz="1300">
+                <a:solidFill>
+                  <a:srgbClr val="6D8C97"/>
+                </a:solidFill>
+                <a:latin typeface="Consolas"/>
+              </a:rPr>
+              <a:t>// 'async' means this function does something slow and can be waited for.</a:t>
+            </a:r>
+          </a:p>
+          <a:p>
+            <a:pPr>
+              <a:spcAft>
+                <a:spcPts val="0"/>
+              </a:spcAft>
+            </a:pPr>
+            <a:r>
+              <a:rPr sz="1300">
+                <a:solidFill>
+                  <a:srgbClr val="6D8C97"/>
+                </a:solidFill>
+                <a:latin typeface="Consolas"/>
+              </a:rPr>
+              <a:t>  32  </a:t>
+            </a:r>
+            <a:r>
+              <a:rPr sz="1300">
+                <a:solidFill>
+                  <a:srgbClr val="6D8C97"/>
+                </a:solidFill>
+                <a:latin typeface="Consolas"/>
+              </a:rPr>
+              <a:t>async function listModels() {</a:t>
+            </a:r>
+          </a:p>
+          <a:p>
+            <a:pPr>
+              <a:spcAft>
+                <a:spcPts val="0"/>
+              </a:spcAft>
+            </a:pPr>
+            <a:r>
+              <a:rPr sz="1300">
+                <a:solidFill>
+                  <a:srgbClr val="6D8C97"/>
+                </a:solidFill>
+                <a:latin typeface="Consolas"/>
+              </a:rPr>
+              <a:t>  33  </a:t>
+            </a:r>
+            <a:r>
+              <a:rPr sz="1300">
+                <a:solidFill>
+                  <a:srgbClr val="6D8C97"/>
+                </a:solidFill>
+                <a:latin typeface="Consolas"/>
+              </a:rPr>
+              <a:t>  const res = await fetch(AI_BASE + '/v1/models', {</a:t>
+            </a:r>
+          </a:p>
+          <a:p>
+            <a:pPr>
+              <a:spcAft>
+                <a:spcPts val="0"/>
+              </a:spcAft>
+            </a:pPr>
+            <a:r>
+              <a:rPr sz="1300">
+                <a:solidFill>
+                  <a:srgbClr val="6D8C97"/>
+                </a:solidFill>
+                <a:latin typeface="Consolas"/>
+              </a:rPr>
+              <a:t>  34  </a:t>
+            </a:r>
+            <a:r>
+              <a:rPr sz="1300">
+                <a:solidFill>
+                  <a:srgbClr val="6D8C97"/>
+                </a:solidFill>
+                <a:latin typeface="Consolas"/>
+              </a:rPr>
+              <a:t>    headers: { 'Authorization': 'Bearer ' + API_KEY }</a:t>
+            </a:r>
+          </a:p>
+          <a:p>
+            <a:pPr>
+              <a:spcAft>
+                <a:spcPts val="0"/>
+              </a:spcAft>
+            </a:pPr>
+            <a:r>
+              <a:rPr sz="1300">
+                <a:solidFill>
+                  <a:srgbClr val="6D8C97"/>
+                </a:solidFill>
+                <a:latin typeface="Consolas"/>
+              </a:rPr>
+              <a:t>  35  </a:t>
+            </a:r>
+            <a:r>
+              <a:rPr sz="1300">
+                <a:solidFill>
+                  <a:srgbClr val="6D8C97"/>
+                </a:solidFill>
+                <a:latin typeface="Consolas"/>
+              </a:rPr>
+              <a:t>  });</a:t>
+            </a:r>
+          </a:p>
+          <a:p>
+            <a:pPr>
+              <a:spcAft>
+                <a:spcPts val="0"/>
+              </a:spcAft>
+            </a:pPr>
+            <a:r>
+              <a:rPr sz="1300">
+                <a:solidFill>
+                  <a:srgbClr val="6D8C97"/>
+                </a:solidFill>
+                <a:latin typeface="Consolas"/>
+              </a:rPr>
+              <a:t>  36  </a:t>
+            </a:r>
+            <a:r>
+              <a:rPr sz="1300">
+                <a:solidFill>
+                  <a:srgbClr val="6D8C97"/>
+                </a:solidFill>
+                <a:latin typeface="Consolas"/>
+              </a:rPr>
+              <a:t>  const data = await res.json();   // the answer arrives as text; this reads it</a:t>
+            </a:r>
+          </a:p>
+          <a:p>
+            <a:pPr>
+              <a:spcAft>
+                <a:spcPts val="0"/>
+              </a:spcAft>
+            </a:pPr>
+            <a:r>
+              <a:rPr sz="1300">
+                <a:solidFill>
+                  <a:srgbClr val="6D8C97"/>
+                </a:solidFill>
+                <a:latin typeface="Consolas"/>
+              </a:rPr>
+              <a:t>  37  </a:t>
+            </a:r>
+            <a:r>
+              <a:rPr sz="1300">
+                <a:solidFill>
+                  <a:srgbClr val="6D8C97"/>
+                </a:solidFill>
+                <a:latin typeface="Consolas"/>
+              </a:rPr>
+              <a:t>  console.log('The server offers:', data.data);</a:t>
+            </a:r>
+          </a:p>
+          <a:p>
+            <a:pPr>
+              <a:spcAft>
+                <a:spcPts val="0"/>
+              </a:spcAft>
+            </a:pPr>
+            <a:r>
+              <a:rPr sz="1300">
+                <a:solidFill>
+                  <a:srgbClr val="6D8C97"/>
+                </a:solidFill>
+                <a:latin typeface="Consolas"/>
+              </a:rPr>
+              <a:t>  38  </a:t>
+            </a:r>
+            <a:r>
+              <a:rPr sz="1300">
+                <a:solidFill>
+                  <a:srgbClr val="6D8C97"/>
+                </a:solidFill>
+                <a:latin typeface="Consolas"/>
+              </a:rPr>
+              <a:t>}</a:t>
+            </a:r>
+          </a:p>
+          <a:p>
+            <a:pPr>
+              <a:spcAft>
+                <a:spcPts val="0"/>
+              </a:spcAft>
+            </a:pPr>
+            <a:r>
+              <a:rPr sz="1300">
+                <a:solidFill>
+                  <a:srgbClr val="6D8C97"/>
+                </a:solidFill>
+                <a:latin typeface="Consolas"/>
+              </a:rPr>
+              <a:t>   -  </a:t>
+            </a:r>
+            <a:r>
+              <a:rPr sz="1300" strike="sngStrike">
+                <a:solidFill>
+                  <a:srgbClr val="F3928B"/>
+                </a:solidFill>
+                <a:latin typeface="Consolas"/>
+              </a:rPr>
+              <a:t>listModels();</a:t>
+            </a:r>
+          </a:p>
+        </p:txBody>
+      </p:sp>
+      <p:sp>
+        <p:nvSpPr>
+          <p:cNvPr id="4" name="TextBox 3"/>
+          <p:cNvSpPr txBox="1"/>
+          <p:nvPr/>
+        </p:nvSpPr>
+        <p:spPr>
+          <a:xfrm>
+            <a:off x="548640" y="5623560"/>
+            <a:ext cx="11064240" cy="1051560"/>
+          </a:xfrm>
+          <a:prstGeom prst="rect">
+            <a:avLst/>
+          </a:prstGeom>
+          <a:noFill/>
+        </p:spPr>
+        <p:txBody>
+          <a:bodyPr wrap="square">
+            <a:spAutoFit/>
+          </a:bodyPr>
+          <a:lstStyle/>
+          <a:p>
+            <a:r>
+              <a:rPr sz="2000">
+                <a:solidFill>
+                  <a:srgbClr val="DCECEF"/>
+                </a:solidFill>
+              </a:rPr>
+              <a:t>Delete this line. askAI does the asking now, so the old test call is no longer needed - your file should have no listModels() call left.</a:t>
+            </a:r>
+          </a:p>
+        </p:txBody>
+      </p:sp>
+    </p:spTree>
+  </p:cSld>
+  <p:clrMapOvr>
+    <a:masterClrMapping/>
+  </p:clrMapOvr>
+</p:sld>
+</file>
+
+<file path=ppt/slides/slide38.xml><?xml version="1.0" encoding="utf-8"?>
 <p:sld xmlns:a="http://schemas.openxmlformats.org/drawingml/2006/main" xmlns:p="http://schemas.openxmlformats.org/presentationml/2006/main" xmlns:r="http://schemas.openxmlformats.org/officeDocument/2006/relationships">
   <p:cSld>
     <p:spTree>

--- a/ai101/slides/week-04.pptx
+++ b/ai101/slides/week-04.pptx
@@ -43,6 +43,7 @@
     <p:sldId id="291" r:id="rId42"/>
     <p:sldId id="292" r:id="rId43"/>
     <p:sldId id="293" r:id="rId44"/>
+    <p:sldId id="294" r:id="rId45"/>
   </p:sldIdLst>
   <p:sldSz cx="12191695" cy="6858000" type="screen4x3"/>
   <p:notesSz cx="6858000" cy="9144000"/>
@@ -13696,6 +13697,151 @@
 </file>
 
 <file path=ppt/slides/slide38.xml><?xml version="1.0" encoding="utf-8"?>
+<p:sld xmlns:a="http://schemas.openxmlformats.org/drawingml/2006/main" xmlns:p="http://schemas.openxmlformats.org/presentationml/2006/main" xmlns:r="http://schemas.openxmlformats.org/officeDocument/2006/relationships">
+  <p:cSld>
+    <p:spTree>
+      <p:nvGrpSpPr>
+        <p:cNvPr id="1" name=""/>
+        <p:cNvGrpSpPr/>
+        <p:nvPr/>
+      </p:nvGrpSpPr>
+      <p:grpSpPr/>
+      <p:sp>
+        <p:nvSpPr>
+          <p:cNvPr id="2" name="Title 1"/>
+          <p:cNvSpPr>
+            <a:spLocks noGrp="1"/>
+          </p:cNvSpPr>
+          <p:nvPr>
+            <p:ph type="title"/>
+          </p:nvPr>
+        </p:nvSpPr>
+        <p:spPr/>
+        <p:txBody>
+          <a:bodyPr/>
+          <a:lstStyle/>
+          <a:p>
+            <a:r>
+              <a:rPr sz="3800" b="1">
+                <a:solidFill>
+                  <a:srgbClr val="1F2A37"/>
+                </a:solidFill>
+              </a:rPr>
+              <a:t>Checkpoint: a real answer</a:t>
+            </a:r>
+          </a:p>
+        </p:txBody>
+      </p:sp>
+      <p:sp>
+        <p:nvSpPr>
+          <p:cNvPr id="3" name="TextBox 2"/>
+          <p:cNvSpPr txBox="1"/>
+          <p:nvPr/>
+        </p:nvSpPr>
+        <p:spPr>
+          <a:xfrm>
+            <a:off x="868680" y="502920"/>
+            <a:ext cx="5486400" cy="457200"/>
+          </a:xfrm>
+          <a:prstGeom prst="rect">
+            <a:avLst/>
+          </a:prstGeom>
+          <a:noFill/>
+        </p:spPr>
+        <p:txBody>
+          <a:bodyPr wrap="none">
+            <a:spAutoFit/>
+          </a:bodyPr>
+          <a:lstStyle/>
+          <a:p>
+            <a:r>
+              <a:rPr sz="1500" b="1">
+                <a:solidFill>
+                  <a:srgbClr val="01AEFD"/>
+                </a:solidFill>
+              </a:rPr>
+              <a:t>CHECKPOINT - RUN IT</a:t>
+            </a:r>
+          </a:p>
+        </p:txBody>
+      </p:sp>
+      <p:sp>
+        <p:nvSpPr>
+          <p:cNvPr id="4" name="TextBox 3"/>
+          <p:cNvSpPr txBox="1"/>
+          <p:nvPr/>
+        </p:nvSpPr>
+        <p:spPr>
+          <a:xfrm>
+            <a:off x="822960" y="1828800"/>
+            <a:ext cx="10515600" cy="4206240"/>
+          </a:xfrm>
+          <a:prstGeom prst="rect">
+            <a:avLst/>
+          </a:prstGeom>
+          <a:noFill/>
+        </p:spPr>
+        <p:txBody>
+          <a:bodyPr wrap="square">
+            <a:spAutoFit/>
+          </a:bodyPr>
+          <a:lstStyle/>
+          <a:p>
+            <a:pPr>
+              <a:spcAft>
+                <a:spcPts val="1400"/>
+              </a:spcAft>
+            </a:pPr>
+            <a:r>
+              <a:rPr sz="2800">
+                <a:solidFill>
+                  <a:srgbClr val="01AEFD"/>
+                </a:solidFill>
+              </a:rPr>
+              <a:t>Press Run, ask a question and press Send. After a moment the companion replies for real. This needs your own key and the school network; the preview here shows the interface.</a:t>
+            </a:r>
+          </a:p>
+          <a:p>
+            <a:pPr>
+              <a:spcAft>
+                <a:spcPts val="1400"/>
+              </a:spcAft>
+            </a:pPr>
+            <a:r>
+              <a:rPr sz="2400">
+                <a:solidFill>
+                  <a:srgbClr val="1F2A37"/>
+                </a:solidFill>
+              </a:rPr>
+              <a:t>• Run it in the classroom, or press Show the output in the web deck.</a:t>
+            </a:r>
+          </a:p>
+          <a:p>
+            <a:pPr>
+              <a:spcAft>
+                <a:spcPts val="1400"/>
+              </a:spcAft>
+            </a:pPr>
+            <a:r>
+              <a:rPr sz="2400">
+                <a:solidFill>
+                  <a:srgbClr val="1F2A37"/>
+                </a:solidFill>
+              </a:rPr>
+              <a:t>• Everyone's screen should match this.</a:t>
+            </a:r>
+          </a:p>
+        </p:txBody>
+      </p:sp>
+    </p:spTree>
+  </p:cSld>
+  <p:clrMapOvr>
+    <a:masterClrMapping/>
+  </p:clrMapOvr>
+</p:sld>
+</file>
+
+<file path=ppt/slides/slide39.xml><?xml version="1.0" encoding="utf-8"?>
 <p:sld xmlns:a="http://schemas.openxmlformats.org/drawingml/2006/main" xmlns:p="http://schemas.openxmlformats.org/presentationml/2006/main" xmlns:r="http://schemas.openxmlformats.org/officeDocument/2006/relationships">
   <p:cSld>
     <p:spTree>

--- a/ai101/slides/week-04.pptx
+++ b/ai101/slides/week-04.pptx
@@ -44,6 +44,8 @@
     <p:sldId id="292" r:id="rId43"/>
     <p:sldId id="293" r:id="rId44"/>
     <p:sldId id="294" r:id="rId45"/>
+    <p:sldId id="295" r:id="rId46"/>
+    <p:sldId id="296" r:id="rId47"/>
   </p:sldIdLst>
   <p:sldSz cx="12191695" cy="6858000" type="screen4x3"/>
   <p:notesSz cx="6858000" cy="9144000"/>
@@ -12064,14 +12066,6 @@
 <file path=ppt/slides/slide34.xml><?xml version="1.0" encoding="utf-8"?>
 <p:sld xmlns:a="http://schemas.openxmlformats.org/drawingml/2006/main" xmlns:p="http://schemas.openxmlformats.org/presentationml/2006/main" xmlns:r="http://schemas.openxmlformats.org/officeDocument/2006/relationships">
   <p:cSld>
-    <p:bg>
-      <p:bgPr>
-        <a:solidFill>
-          <a:srgbClr val="102127"/>
-        </a:solidFill>
-        <a:effectLst/>
-      </p:bgPr>
-    </p:bg>
     <p:spTree>
       <p:nvGrpSpPr>
         <p:cNvPr id="1" name=""/>
@@ -12081,14 +12075,40 @@
       <p:grpSpPr/>
       <p:sp>
         <p:nvSpPr>
-          <p:cNvPr id="2" name="TextBox 1"/>
+          <p:cNvPr id="2" name="Title 1"/>
+          <p:cNvSpPr>
+            <a:spLocks noGrp="1"/>
+          </p:cNvSpPr>
+          <p:nvPr>
+            <p:ph type="title"/>
+          </p:nvPr>
+        </p:nvSpPr>
+        <p:spPr/>
+        <p:txBody>
+          <a:bodyPr/>
+          <a:lstStyle/>
+          <a:p>
+            <a:r>
+              <a:rPr sz="3800" b="1">
+                <a:solidFill>
+                  <a:srgbClr val="1F2A37"/>
+                </a:solidFill>
+              </a:rPr>
+              <a:t>.lastChild</a:t>
+            </a:r>
+          </a:p>
+        </p:txBody>
+      </p:sp>
+      <p:sp>
+        <p:nvSpPr>
+          <p:cNvPr id="3" name="TextBox 2"/>
           <p:cNvSpPr txBox="1"/>
           <p:nvPr/>
         </p:nvSpPr>
         <p:spPr>
           <a:xfrm>
-            <a:off x="502920" y="274320"/>
-            <a:ext cx="11155680" cy="548640"/>
+            <a:off x="868680" y="502920"/>
+            <a:ext cx="5486400" cy="457200"/>
           </a:xfrm>
           <a:prstGeom prst="rect">
             <a:avLst/>
@@ -12102,26 +12122,26 @@
           <a:lstStyle/>
           <a:p>
             <a:r>
-              <a:rPr sz="2200" b="1">
+              <a:rPr sz="1500" b="1">
                 <a:solidFill>
                   <a:srgbClr val="01AEFD"/>
                 </a:solidFill>
               </a:rPr>
-              <a:t>Type this into script.js   -   line 69</a:t>
-            </a:r>
-          </a:p>
-        </p:txBody>
-      </p:sp>
-      <p:sp>
-        <p:nvSpPr>
-          <p:cNvPr id="3" name="TextBox 2"/>
+              <a:t>JAVASCRIPT</a:t>
+            </a:r>
+          </a:p>
+        </p:txBody>
+      </p:sp>
+      <p:sp>
+        <p:nvSpPr>
+          <p:cNvPr id="4" name="TextBox 3"/>
           <p:cNvSpPr txBox="1"/>
           <p:nvPr/>
         </p:nvSpPr>
         <p:spPr>
           <a:xfrm>
-            <a:off x="502920" y="960120"/>
-            <a:ext cx="11155680" cy="4297680"/>
+            <a:off x="822960" y="1828800"/>
+            <a:ext cx="10515600" cy="4206240"/>
           </a:xfrm>
           <a:prstGeom prst="rect">
             <a:avLst/>
@@ -12129,316 +12149,38 @@
           <a:noFill/>
         </p:spPr>
         <p:txBody>
-          <a:bodyPr wrap="none">
-            <a:spAutoFit/>
-          </a:bodyPr>
-          <a:lstStyle/>
-          <a:p>
-            <a:pPr>
-              <a:spcAft>
-                <a:spcPts val="0"/>
-              </a:spcAft>
-            </a:pPr>
-            <a:r>
-              <a:rPr sz="1300">
-                <a:solidFill>
-                  <a:srgbClr val="6D8C97"/>
-                </a:solidFill>
-                <a:latin typeface="Consolas"/>
-              </a:rPr>
-              <a:t>  59  </a:t>
-            </a:r>
-            <a:r>
-              <a:rPr sz="1300">
-                <a:solidFill>
-                  <a:srgbClr val="6D8C97"/>
-                </a:solidFill>
-                <a:latin typeface="Consolas"/>
-              </a:rPr>
-              <a:t> </a:t>
-            </a:r>
-          </a:p>
-          <a:p>
-            <a:pPr>
-              <a:spcAft>
-                <a:spcPts val="0"/>
-              </a:spcAft>
-            </a:pPr>
-            <a:r>
-              <a:rPr sz="1300">
-                <a:solidFill>
-                  <a:srgbClr val="6D8C97"/>
-                </a:solidFill>
-                <a:latin typeface="Consolas"/>
-              </a:rPr>
-              <a:t>  60  </a:t>
-            </a:r>
-            <a:r>
-              <a:rPr sz="1300">
-                <a:solidFill>
-                  <a:srgbClr val="6D8C97"/>
-                </a:solidFill>
-                <a:latin typeface="Consolas"/>
-              </a:rPr>
-              <a:t>// The browser calls this when the form is submitted.</a:t>
-            </a:r>
-          </a:p>
-          <a:p>
-            <a:pPr>
-              <a:spcAft>
-                <a:spcPts val="0"/>
-              </a:spcAft>
-            </a:pPr>
-            <a:r>
-              <a:rPr sz="1300">
-                <a:solidFill>
-                  <a:srgbClr val="6D8C97"/>
-                </a:solidFill>
-                <a:latin typeface="Consolas"/>
-              </a:rPr>
-              <a:t>  61  </a:t>
-            </a:r>
-            <a:r>
-              <a:rPr sz="1300">
-                <a:solidFill>
-                  <a:srgbClr val="6D8C97"/>
-                </a:solidFill>
-                <a:latin typeface="Consolas"/>
-              </a:rPr>
-              <a:t>composer.addEventListener('submit', async function (event) {</a:t>
-            </a:r>
-          </a:p>
-          <a:p>
-            <a:pPr>
-              <a:spcAft>
-                <a:spcPts val="0"/>
-              </a:spcAft>
-            </a:pPr>
-            <a:r>
-              <a:rPr sz="1300">
-                <a:solidFill>
-                  <a:srgbClr val="6D8C97"/>
-                </a:solidFill>
-                <a:latin typeface="Consolas"/>
-              </a:rPr>
-              <a:t>  62  </a:t>
-            </a:r>
-            <a:r>
-              <a:rPr sz="1300">
-                <a:solidFill>
-                  <a:srgbClr val="6D8C97"/>
-                </a:solidFill>
-                <a:latin typeface="Consolas"/>
-              </a:rPr>
-              <a:t>  event.preventDefault();</a:t>
-            </a:r>
-          </a:p>
-          <a:p>
-            <a:pPr>
-              <a:spcAft>
-                <a:spcPts val="0"/>
-              </a:spcAft>
-            </a:pPr>
-            <a:r>
-              <a:rPr sz="1300">
-                <a:solidFill>
-                  <a:srgbClr val="6D8C97"/>
-                </a:solidFill>
-                <a:latin typeface="Consolas"/>
-              </a:rPr>
-              <a:t>  63  </a:t>
-            </a:r>
-            <a:r>
-              <a:rPr sz="1300">
-                <a:solidFill>
-                  <a:srgbClr val="6D8C97"/>
-                </a:solidFill>
-                <a:latin typeface="Consolas"/>
-              </a:rPr>
-              <a:t>  const text = promptBox.value.trim();</a:t>
-            </a:r>
-          </a:p>
-          <a:p>
-            <a:pPr>
-              <a:spcAft>
-                <a:spcPts val="0"/>
-              </a:spcAft>
-            </a:pPr>
-            <a:r>
-              <a:rPr sz="1300">
-                <a:solidFill>
-                  <a:srgbClr val="6D8C97"/>
-                </a:solidFill>
-                <a:latin typeface="Consolas"/>
-              </a:rPr>
-              <a:t>  64  </a:t>
-            </a:r>
-            <a:r>
-              <a:rPr sz="1300">
-                <a:solidFill>
-                  <a:srgbClr val="6D8C97"/>
-                </a:solidFill>
-                <a:latin typeface="Consolas"/>
-              </a:rPr>
-              <a:t>  if (text === '') { return; }</a:t>
-            </a:r>
-          </a:p>
-          <a:p>
-            <a:pPr>
-              <a:spcAft>
-                <a:spcPts val="0"/>
-              </a:spcAft>
-            </a:pPr>
-            <a:r>
-              <a:rPr sz="1300">
-                <a:solidFill>
-                  <a:srgbClr val="6D8C97"/>
-                </a:solidFill>
-                <a:latin typeface="Consolas"/>
-              </a:rPr>
-              <a:t>  65  </a:t>
-            </a:r>
-            <a:r>
-              <a:rPr sz="1300">
-                <a:solidFill>
-                  <a:srgbClr val="6D8C97"/>
-                </a:solidFill>
-                <a:latin typeface="Consolas"/>
-              </a:rPr>
-              <a:t>  promptBox.value = '';</a:t>
-            </a:r>
-          </a:p>
-          <a:p>
-            <a:pPr>
-              <a:spcAft>
-                <a:spcPts val="0"/>
-              </a:spcAft>
-            </a:pPr>
-            <a:r>
-              <a:rPr sz="1300">
-                <a:solidFill>
-                  <a:srgbClr val="6D8C97"/>
-                </a:solidFill>
-                <a:latin typeface="Consolas"/>
-              </a:rPr>
-              <a:t>  66  </a:t>
-            </a:r>
-            <a:r>
-              <a:rPr sz="1300">
-                <a:solidFill>
-                  <a:srgbClr val="6D8C97"/>
-                </a:solidFill>
-                <a:latin typeface="Consolas"/>
-              </a:rPr>
-              <a:t>  addLine('You', text);</a:t>
-            </a:r>
-          </a:p>
-          <a:p>
-            <a:pPr>
-              <a:spcAft>
-                <a:spcPts val="0"/>
-              </a:spcAft>
-            </a:pPr>
-            <a:r>
-              <a:rPr sz="1300">
-                <a:solidFill>
-                  <a:srgbClr val="6D8C97"/>
-                </a:solidFill>
-                <a:latin typeface="Consolas"/>
-              </a:rPr>
-              <a:t>  67  </a:t>
-            </a:r>
-            <a:r>
-              <a:rPr sz="1300">
-                <a:solidFill>
-                  <a:srgbClr val="6D8C97"/>
-                </a:solidFill>
-                <a:latin typeface="Consolas"/>
-              </a:rPr>
-              <a:t>  addLine('Companion', 'thinking...');</a:t>
-            </a:r>
-          </a:p>
-          <a:p>
-            <a:pPr>
-              <a:spcAft>
-                <a:spcPts val="0"/>
-              </a:spcAft>
-            </a:pPr>
-            <a:r>
-              <a:rPr sz="1300">
-                <a:solidFill>
-                  <a:srgbClr val="6D8C97"/>
-                </a:solidFill>
-                <a:latin typeface="Consolas"/>
-              </a:rPr>
-              <a:t>  68  </a:t>
-            </a:r>
-            <a:r>
-              <a:rPr sz="1300">
-                <a:solidFill>
-                  <a:srgbClr val="6D8C97"/>
-                </a:solidFill>
-                <a:latin typeface="Consolas"/>
-              </a:rPr>
-              <a:t>  const reply = await askAI(text);       // this is the slow bit</a:t>
-            </a:r>
-          </a:p>
-          <a:p>
-            <a:pPr>
-              <a:spcAft>
-                <a:spcPts val="0"/>
-              </a:spcAft>
-            </a:pPr>
-            <a:r>
-              <a:rPr sz="1300">
-                <a:solidFill>
-                  <a:srgbClr val="6D8C97"/>
-                </a:solidFill>
-                <a:latin typeface="Consolas"/>
-              </a:rPr>
-              <a:t>  69  </a:t>
-            </a:r>
-            <a:r>
-              <a:rPr sz="1300">
-                <a:solidFill>
-                  <a:srgbClr val="7FE0A0"/>
-                </a:solidFill>
-                <a:latin typeface="Consolas"/>
-              </a:rPr>
-              <a:t>  chat.lastChild.remove();               // take the 'thinking' line away</a:t>
-            </a:r>
-          </a:p>
-        </p:txBody>
-      </p:sp>
-      <p:sp>
-        <p:nvSpPr>
-          <p:cNvPr id="4" name="TextBox 3"/>
-          <p:cNvSpPr txBox="1"/>
-          <p:nvPr/>
-        </p:nvSpPr>
-        <p:spPr>
-          <a:xfrm>
-            <a:off x="548640" y="5623560"/>
-            <a:ext cx="11064240" cy="1051560"/>
-          </a:xfrm>
-          <a:prstGeom prst="rect">
-            <a:avLst/>
-          </a:prstGeom>
-          <a:noFill/>
-        </p:spPr>
-        <p:txBody>
           <a:bodyPr wrap="square">
             <a:spAutoFit/>
           </a:bodyPr>
           <a:lstStyle/>
           <a:p>
-            <a:r>
-              <a:rPr sz="2000">
-                <a:solidFill>
-                  <a:srgbClr val="DCECEF"/>
-                </a:solidFill>
-              </a:rPr>
-              <a:t>Remove the 'thinking...' line now the real answer is here.</a:t>
+            <a:pPr>
+              <a:spcAft>
+                <a:spcPts val="1400"/>
+              </a:spcAft>
+            </a:pPr>
+            <a:r>
+              <a:rPr sz="2400">
+                <a:solidFill>
+                  <a:srgbClr val="1F2A37"/>
+                </a:solidFill>
+              </a:rPr>
+              <a:t>• A box's LAST child - the newest thing added inside it.</a:t>
+            </a:r>
+          </a:p>
+          <a:p>
+            <a:pPr>
+              <a:spcAft>
+                <a:spcPts val="1400"/>
+              </a:spcAft>
+            </a:pPr>
+            <a:r>
+              <a:rPr sz="2400">
+                <a:solidFill>
+                  <a:srgbClr val="1F2A37"/>
+                </a:solidFill>
+              </a:rPr>
+              <a:t>• chat.lastChild is the message you just put in.</a:t>
             </a:r>
           </a:p>
         </p:txBody>
@@ -12454,14 +12196,6 @@
 <file path=ppt/slides/slide35.xml><?xml version="1.0" encoding="utf-8"?>
 <p:sld xmlns:a="http://schemas.openxmlformats.org/drawingml/2006/main" xmlns:p="http://schemas.openxmlformats.org/presentationml/2006/main" xmlns:r="http://schemas.openxmlformats.org/officeDocument/2006/relationships">
   <p:cSld>
-    <p:bg>
-      <p:bgPr>
-        <a:solidFill>
-          <a:srgbClr val="102127"/>
-        </a:solidFill>
-        <a:effectLst/>
-      </p:bgPr>
-    </p:bg>
     <p:spTree>
       <p:nvGrpSpPr>
         <p:cNvPr id="1" name=""/>
@@ -12471,14 +12205,40 @@
       <p:grpSpPr/>
       <p:sp>
         <p:nvSpPr>
-          <p:cNvPr id="2" name="TextBox 1"/>
+          <p:cNvPr id="2" name="Title 1"/>
+          <p:cNvSpPr>
+            <a:spLocks noGrp="1"/>
+          </p:cNvSpPr>
+          <p:nvPr>
+            <p:ph type="title"/>
+          </p:nvPr>
+        </p:nvSpPr>
+        <p:spPr/>
+        <p:txBody>
+          <a:bodyPr/>
+          <a:lstStyle/>
+          <a:p>
+            <a:r>
+              <a:rPr sz="3800" b="1">
+                <a:solidFill>
+                  <a:srgbClr val="1F2A37"/>
+                </a:solidFill>
+              </a:rPr>
+              <a:t>.remove()</a:t>
+            </a:r>
+          </a:p>
+        </p:txBody>
+      </p:sp>
+      <p:sp>
+        <p:nvSpPr>
+          <p:cNvPr id="3" name="TextBox 2"/>
           <p:cNvSpPr txBox="1"/>
           <p:nvPr/>
         </p:nvSpPr>
         <p:spPr>
           <a:xfrm>
-            <a:off x="502920" y="274320"/>
-            <a:ext cx="11155680" cy="548640"/>
+            <a:off x="868680" y="502920"/>
+            <a:ext cx="5486400" cy="457200"/>
           </a:xfrm>
           <a:prstGeom prst="rect">
             <a:avLst/>
@@ -12492,26 +12252,26 @@
           <a:lstStyle/>
           <a:p>
             <a:r>
-              <a:rPr sz="2200" b="1">
+              <a:rPr sz="1500" b="1">
                 <a:solidFill>
                   <a:srgbClr val="01AEFD"/>
                 </a:solidFill>
               </a:rPr>
-              <a:t>Type this into script.js   -   line 70</a:t>
-            </a:r>
-          </a:p>
-        </p:txBody>
-      </p:sp>
-      <p:sp>
-        <p:nvSpPr>
-          <p:cNvPr id="3" name="TextBox 2"/>
+              <a:t>JAVASCRIPT</a:t>
+            </a:r>
+          </a:p>
+        </p:txBody>
+      </p:sp>
+      <p:sp>
+        <p:nvSpPr>
+          <p:cNvPr id="4" name="TextBox 3"/>
           <p:cNvSpPr txBox="1"/>
           <p:nvPr/>
         </p:nvSpPr>
         <p:spPr>
           <a:xfrm>
-            <a:off x="502920" y="960120"/>
-            <a:ext cx="11155680" cy="4297680"/>
+            <a:off x="822960" y="1828800"/>
+            <a:ext cx="10515600" cy="4206240"/>
           </a:xfrm>
           <a:prstGeom prst="rect">
             <a:avLst/>
@@ -12519,341 +12279,38 @@
           <a:noFill/>
         </p:spPr>
         <p:txBody>
-          <a:bodyPr wrap="none">
-            <a:spAutoFit/>
-          </a:bodyPr>
-          <a:lstStyle/>
-          <a:p>
-            <a:pPr>
-              <a:spcAft>
-                <a:spcPts val="0"/>
-              </a:spcAft>
-            </a:pPr>
-            <a:r>
-              <a:rPr sz="1300">
-                <a:solidFill>
-                  <a:srgbClr val="6D8C97"/>
-                </a:solidFill>
-                <a:latin typeface="Consolas"/>
-              </a:rPr>
-              <a:t>  59  </a:t>
-            </a:r>
-            <a:r>
-              <a:rPr sz="1300">
-                <a:solidFill>
-                  <a:srgbClr val="6D8C97"/>
-                </a:solidFill>
-                <a:latin typeface="Consolas"/>
-              </a:rPr>
-              <a:t> </a:t>
-            </a:r>
-          </a:p>
-          <a:p>
-            <a:pPr>
-              <a:spcAft>
-                <a:spcPts val="0"/>
-              </a:spcAft>
-            </a:pPr>
-            <a:r>
-              <a:rPr sz="1300">
-                <a:solidFill>
-                  <a:srgbClr val="6D8C97"/>
-                </a:solidFill>
-                <a:latin typeface="Consolas"/>
-              </a:rPr>
-              <a:t>  60  </a:t>
-            </a:r>
-            <a:r>
-              <a:rPr sz="1300">
-                <a:solidFill>
-                  <a:srgbClr val="6D8C97"/>
-                </a:solidFill>
-                <a:latin typeface="Consolas"/>
-              </a:rPr>
-              <a:t>// The browser calls this when the form is submitted.</a:t>
-            </a:r>
-          </a:p>
-          <a:p>
-            <a:pPr>
-              <a:spcAft>
-                <a:spcPts val="0"/>
-              </a:spcAft>
-            </a:pPr>
-            <a:r>
-              <a:rPr sz="1300">
-                <a:solidFill>
-                  <a:srgbClr val="6D8C97"/>
-                </a:solidFill>
-                <a:latin typeface="Consolas"/>
-              </a:rPr>
-              <a:t>  61  </a:t>
-            </a:r>
-            <a:r>
-              <a:rPr sz="1300">
-                <a:solidFill>
-                  <a:srgbClr val="6D8C97"/>
-                </a:solidFill>
-                <a:latin typeface="Consolas"/>
-              </a:rPr>
-              <a:t>composer.addEventListener('submit', async function (event) {</a:t>
-            </a:r>
-          </a:p>
-          <a:p>
-            <a:pPr>
-              <a:spcAft>
-                <a:spcPts val="0"/>
-              </a:spcAft>
-            </a:pPr>
-            <a:r>
-              <a:rPr sz="1300">
-                <a:solidFill>
-                  <a:srgbClr val="6D8C97"/>
-                </a:solidFill>
-                <a:latin typeface="Consolas"/>
-              </a:rPr>
-              <a:t>  62  </a:t>
-            </a:r>
-            <a:r>
-              <a:rPr sz="1300">
-                <a:solidFill>
-                  <a:srgbClr val="6D8C97"/>
-                </a:solidFill>
-                <a:latin typeface="Consolas"/>
-              </a:rPr>
-              <a:t>  event.preventDefault();</a:t>
-            </a:r>
-          </a:p>
-          <a:p>
-            <a:pPr>
-              <a:spcAft>
-                <a:spcPts val="0"/>
-              </a:spcAft>
-            </a:pPr>
-            <a:r>
-              <a:rPr sz="1300">
-                <a:solidFill>
-                  <a:srgbClr val="6D8C97"/>
-                </a:solidFill>
-                <a:latin typeface="Consolas"/>
-              </a:rPr>
-              <a:t>  63  </a:t>
-            </a:r>
-            <a:r>
-              <a:rPr sz="1300">
-                <a:solidFill>
-                  <a:srgbClr val="6D8C97"/>
-                </a:solidFill>
-                <a:latin typeface="Consolas"/>
-              </a:rPr>
-              <a:t>  const text = promptBox.value.trim();</a:t>
-            </a:r>
-          </a:p>
-          <a:p>
-            <a:pPr>
-              <a:spcAft>
-                <a:spcPts val="0"/>
-              </a:spcAft>
-            </a:pPr>
-            <a:r>
-              <a:rPr sz="1300">
-                <a:solidFill>
-                  <a:srgbClr val="6D8C97"/>
-                </a:solidFill>
-                <a:latin typeface="Consolas"/>
-              </a:rPr>
-              <a:t>  64  </a:t>
-            </a:r>
-            <a:r>
-              <a:rPr sz="1300">
-                <a:solidFill>
-                  <a:srgbClr val="6D8C97"/>
-                </a:solidFill>
-                <a:latin typeface="Consolas"/>
-              </a:rPr>
-              <a:t>  if (text === '') { return; }</a:t>
-            </a:r>
-          </a:p>
-          <a:p>
-            <a:pPr>
-              <a:spcAft>
-                <a:spcPts val="0"/>
-              </a:spcAft>
-            </a:pPr>
-            <a:r>
-              <a:rPr sz="1300">
-                <a:solidFill>
-                  <a:srgbClr val="6D8C97"/>
-                </a:solidFill>
-                <a:latin typeface="Consolas"/>
-              </a:rPr>
-              <a:t>  65  </a:t>
-            </a:r>
-            <a:r>
-              <a:rPr sz="1300">
-                <a:solidFill>
-                  <a:srgbClr val="6D8C97"/>
-                </a:solidFill>
-                <a:latin typeface="Consolas"/>
-              </a:rPr>
-              <a:t>  promptBox.value = '';</a:t>
-            </a:r>
-          </a:p>
-          <a:p>
-            <a:pPr>
-              <a:spcAft>
-                <a:spcPts val="0"/>
-              </a:spcAft>
-            </a:pPr>
-            <a:r>
-              <a:rPr sz="1300">
-                <a:solidFill>
-                  <a:srgbClr val="6D8C97"/>
-                </a:solidFill>
-                <a:latin typeface="Consolas"/>
-              </a:rPr>
-              <a:t>  66  </a:t>
-            </a:r>
-            <a:r>
-              <a:rPr sz="1300">
-                <a:solidFill>
-                  <a:srgbClr val="6D8C97"/>
-                </a:solidFill>
-                <a:latin typeface="Consolas"/>
-              </a:rPr>
-              <a:t>  addLine('You', text);</a:t>
-            </a:r>
-          </a:p>
-          <a:p>
-            <a:pPr>
-              <a:spcAft>
-                <a:spcPts val="0"/>
-              </a:spcAft>
-            </a:pPr>
-            <a:r>
-              <a:rPr sz="1300">
-                <a:solidFill>
-                  <a:srgbClr val="6D8C97"/>
-                </a:solidFill>
-                <a:latin typeface="Consolas"/>
-              </a:rPr>
-              <a:t>  67  </a:t>
-            </a:r>
-            <a:r>
-              <a:rPr sz="1300">
-                <a:solidFill>
-                  <a:srgbClr val="6D8C97"/>
-                </a:solidFill>
-                <a:latin typeface="Consolas"/>
-              </a:rPr>
-              <a:t>  addLine('Companion', 'thinking...');</a:t>
-            </a:r>
-          </a:p>
-          <a:p>
-            <a:pPr>
-              <a:spcAft>
-                <a:spcPts val="0"/>
-              </a:spcAft>
-            </a:pPr>
-            <a:r>
-              <a:rPr sz="1300">
-                <a:solidFill>
-                  <a:srgbClr val="6D8C97"/>
-                </a:solidFill>
-                <a:latin typeface="Consolas"/>
-              </a:rPr>
-              <a:t>  68  </a:t>
-            </a:r>
-            <a:r>
-              <a:rPr sz="1300">
-                <a:solidFill>
-                  <a:srgbClr val="6D8C97"/>
-                </a:solidFill>
-                <a:latin typeface="Consolas"/>
-              </a:rPr>
-              <a:t>  const reply = await askAI(text);       // this is the slow bit</a:t>
-            </a:r>
-          </a:p>
-          <a:p>
-            <a:pPr>
-              <a:spcAft>
-                <a:spcPts val="0"/>
-              </a:spcAft>
-            </a:pPr>
-            <a:r>
-              <a:rPr sz="1300">
-                <a:solidFill>
-                  <a:srgbClr val="6D8C97"/>
-                </a:solidFill>
-                <a:latin typeface="Consolas"/>
-              </a:rPr>
-              <a:t>  69  </a:t>
-            </a:r>
-            <a:r>
-              <a:rPr sz="1300">
-                <a:solidFill>
-                  <a:srgbClr val="6D8C97"/>
-                </a:solidFill>
-                <a:latin typeface="Consolas"/>
-              </a:rPr>
-              <a:t>  chat.lastChild.remove();               // take the 'thinking' line away</a:t>
-            </a:r>
-          </a:p>
-          <a:p>
-            <a:pPr>
-              <a:spcAft>
-                <a:spcPts val="0"/>
-              </a:spcAft>
-            </a:pPr>
-            <a:r>
-              <a:rPr sz="1300">
-                <a:solidFill>
-                  <a:srgbClr val="6D8C97"/>
-                </a:solidFill>
-                <a:latin typeface="Consolas"/>
-              </a:rPr>
-              <a:t>  70  </a:t>
-            </a:r>
-            <a:r>
-              <a:rPr sz="1300">
-                <a:solidFill>
-                  <a:srgbClr val="7FE0A0"/>
-                </a:solidFill>
-                <a:latin typeface="Consolas"/>
-              </a:rPr>
-              <a:t>  addLine('Companion', reply);</a:t>
-            </a:r>
-          </a:p>
-        </p:txBody>
-      </p:sp>
-      <p:sp>
-        <p:nvSpPr>
-          <p:cNvPr id="4" name="TextBox 3"/>
-          <p:cNvSpPr txBox="1"/>
-          <p:nvPr/>
-        </p:nvSpPr>
-        <p:spPr>
-          <a:xfrm>
-            <a:off x="548640" y="5623560"/>
-            <a:ext cx="11064240" cy="1051560"/>
-          </a:xfrm>
-          <a:prstGeom prst="rect">
-            <a:avLst/>
-          </a:prstGeom>
-          <a:noFill/>
-        </p:spPr>
-        <p:txBody>
           <a:bodyPr wrap="square">
             <a:spAutoFit/>
           </a:bodyPr>
           <a:lstStyle/>
           <a:p>
-            <a:r>
-              <a:rPr sz="2000">
-                <a:solidFill>
-                  <a:srgbClr val="DCECEF"/>
-                </a:solidFill>
-              </a:rPr>
-              <a:t>Show the real reply in the chat.</a:t>
+            <a:pPr>
+              <a:spcAft>
+                <a:spcPts val="1400"/>
+              </a:spcAft>
+            </a:pPr>
+            <a:r>
+              <a:rPr sz="2400">
+                <a:solidFill>
+                  <a:srgbClr val="1F2A37"/>
+                </a:solidFill>
+              </a:rPr>
+              <a:t>• Deletes an element from the page.</a:t>
+            </a:r>
+          </a:p>
+          <a:p>
+            <a:pPr>
+              <a:spcAft>
+                <a:spcPts val="1400"/>
+              </a:spcAft>
+            </a:pPr>
+            <a:r>
+              <a:rPr sz="2400">
+                <a:solidFill>
+                  <a:srgbClr val="1F2A37"/>
+                </a:solidFill>
+              </a:rPr>
+              <a:t>• chat.lastChild.remove() takes the last message back off.</a:t>
             </a:r>
           </a:p>
         </p:txBody>
@@ -12912,7 +12369,7 @@
                   <a:srgbClr val="01AEFD"/>
                 </a:solidFill>
               </a:rPr>
-              <a:t>All together in script.js</a:t>
+              <a:t>Type this into script.js   -   line 69</a:t>
             </a:r>
           </a:p>
         </p:txBody>
@@ -12956,311 +12413,261 @@
             <a:r>
               <a:rPr sz="1300">
                 <a:solidFill>
+                  <a:srgbClr val="6D8C97"/>
+                </a:solidFill>
+                <a:latin typeface="Consolas"/>
+              </a:rPr>
+              <a:t> </a:t>
+            </a:r>
+          </a:p>
+          <a:p>
+            <a:pPr>
+              <a:spcAft>
+                <a:spcPts val="0"/>
+              </a:spcAft>
+            </a:pPr>
+            <a:r>
+              <a:rPr sz="1300">
+                <a:solidFill>
+                  <a:srgbClr val="6D8C97"/>
+                </a:solidFill>
+                <a:latin typeface="Consolas"/>
+              </a:rPr>
+              <a:t>  60  </a:t>
+            </a:r>
+            <a:r>
+              <a:rPr sz="1300">
+                <a:solidFill>
+                  <a:srgbClr val="6D8C97"/>
+                </a:solidFill>
+                <a:latin typeface="Consolas"/>
+              </a:rPr>
+              <a:t>// The browser calls this when the form is submitted.</a:t>
+            </a:r>
+          </a:p>
+          <a:p>
+            <a:pPr>
+              <a:spcAft>
+                <a:spcPts val="0"/>
+              </a:spcAft>
+            </a:pPr>
+            <a:r>
+              <a:rPr sz="1300">
+                <a:solidFill>
+                  <a:srgbClr val="6D8C97"/>
+                </a:solidFill>
+                <a:latin typeface="Consolas"/>
+              </a:rPr>
+              <a:t>  61  </a:t>
+            </a:r>
+            <a:r>
+              <a:rPr sz="1300">
+                <a:solidFill>
+                  <a:srgbClr val="6D8C97"/>
+                </a:solidFill>
+                <a:latin typeface="Consolas"/>
+              </a:rPr>
+              <a:t>composer.addEventListener('submit', async function (event) {</a:t>
+            </a:r>
+          </a:p>
+          <a:p>
+            <a:pPr>
+              <a:spcAft>
+                <a:spcPts val="0"/>
+              </a:spcAft>
+            </a:pPr>
+            <a:r>
+              <a:rPr sz="1300">
+                <a:solidFill>
+                  <a:srgbClr val="6D8C97"/>
+                </a:solidFill>
+                <a:latin typeface="Consolas"/>
+              </a:rPr>
+              <a:t>  62  </a:t>
+            </a:r>
+            <a:r>
+              <a:rPr sz="1300">
+                <a:solidFill>
+                  <a:srgbClr val="6D8C97"/>
+                </a:solidFill>
+                <a:latin typeface="Consolas"/>
+              </a:rPr>
+              <a:t>  event.preventDefault();</a:t>
+            </a:r>
+          </a:p>
+          <a:p>
+            <a:pPr>
+              <a:spcAft>
+                <a:spcPts val="0"/>
+              </a:spcAft>
+            </a:pPr>
+            <a:r>
+              <a:rPr sz="1300">
+                <a:solidFill>
+                  <a:srgbClr val="6D8C97"/>
+                </a:solidFill>
+                <a:latin typeface="Consolas"/>
+              </a:rPr>
+              <a:t>  63  </a:t>
+            </a:r>
+            <a:r>
+              <a:rPr sz="1300">
+                <a:solidFill>
+                  <a:srgbClr val="6D8C97"/>
+                </a:solidFill>
+                <a:latin typeface="Consolas"/>
+              </a:rPr>
+              <a:t>  const text = promptBox.value.trim();</a:t>
+            </a:r>
+          </a:p>
+          <a:p>
+            <a:pPr>
+              <a:spcAft>
+                <a:spcPts val="0"/>
+              </a:spcAft>
+            </a:pPr>
+            <a:r>
+              <a:rPr sz="1300">
+                <a:solidFill>
+                  <a:srgbClr val="6D8C97"/>
+                </a:solidFill>
+                <a:latin typeface="Consolas"/>
+              </a:rPr>
+              <a:t>  64  </a:t>
+            </a:r>
+            <a:r>
+              <a:rPr sz="1300">
+                <a:solidFill>
+                  <a:srgbClr val="6D8C97"/>
+                </a:solidFill>
+                <a:latin typeface="Consolas"/>
+              </a:rPr>
+              <a:t>  if (text === '') { return; }</a:t>
+            </a:r>
+          </a:p>
+          <a:p>
+            <a:pPr>
+              <a:spcAft>
+                <a:spcPts val="0"/>
+              </a:spcAft>
+            </a:pPr>
+            <a:r>
+              <a:rPr sz="1300">
+                <a:solidFill>
+                  <a:srgbClr val="6D8C97"/>
+                </a:solidFill>
+                <a:latin typeface="Consolas"/>
+              </a:rPr>
+              <a:t>  65  </a:t>
+            </a:r>
+            <a:r>
+              <a:rPr sz="1300">
+                <a:solidFill>
+                  <a:srgbClr val="6D8C97"/>
+                </a:solidFill>
+                <a:latin typeface="Consolas"/>
+              </a:rPr>
+              <a:t>  promptBox.value = '';</a:t>
+            </a:r>
+          </a:p>
+          <a:p>
+            <a:pPr>
+              <a:spcAft>
+                <a:spcPts val="0"/>
+              </a:spcAft>
+            </a:pPr>
+            <a:r>
+              <a:rPr sz="1300">
+                <a:solidFill>
+                  <a:srgbClr val="6D8C97"/>
+                </a:solidFill>
+                <a:latin typeface="Consolas"/>
+              </a:rPr>
+              <a:t>  66  </a:t>
+            </a:r>
+            <a:r>
+              <a:rPr sz="1300">
+                <a:solidFill>
+                  <a:srgbClr val="6D8C97"/>
+                </a:solidFill>
+                <a:latin typeface="Consolas"/>
+              </a:rPr>
+              <a:t>  addLine('You', text);</a:t>
+            </a:r>
+          </a:p>
+          <a:p>
+            <a:pPr>
+              <a:spcAft>
+                <a:spcPts val="0"/>
+              </a:spcAft>
+            </a:pPr>
+            <a:r>
+              <a:rPr sz="1300">
+                <a:solidFill>
+                  <a:srgbClr val="6D8C97"/>
+                </a:solidFill>
+                <a:latin typeface="Consolas"/>
+              </a:rPr>
+              <a:t>  67  </a:t>
+            </a:r>
+            <a:r>
+              <a:rPr sz="1300">
+                <a:solidFill>
+                  <a:srgbClr val="6D8C97"/>
+                </a:solidFill>
+                <a:latin typeface="Consolas"/>
+              </a:rPr>
+              <a:t>  addLine('Companion', 'thinking...');</a:t>
+            </a:r>
+          </a:p>
+          <a:p>
+            <a:pPr>
+              <a:spcAft>
+                <a:spcPts val="0"/>
+              </a:spcAft>
+            </a:pPr>
+            <a:r>
+              <a:rPr sz="1300">
+                <a:solidFill>
+                  <a:srgbClr val="6D8C97"/>
+                </a:solidFill>
+                <a:latin typeface="Consolas"/>
+              </a:rPr>
+              <a:t>  68  </a:t>
+            </a:r>
+            <a:r>
+              <a:rPr sz="1300">
+                <a:solidFill>
+                  <a:srgbClr val="6D8C97"/>
+                </a:solidFill>
+                <a:latin typeface="Consolas"/>
+              </a:rPr>
+              <a:t>  const reply = await askAI(text);       // this is the slow bit</a:t>
+            </a:r>
+          </a:p>
+          <a:p>
+            <a:pPr>
+              <a:spcAft>
+                <a:spcPts val="0"/>
+              </a:spcAft>
+            </a:pPr>
+            <a:r>
+              <a:rPr sz="1300">
+                <a:solidFill>
+                  <a:srgbClr val="6D8C97"/>
+                </a:solidFill>
+                <a:latin typeface="Consolas"/>
+              </a:rPr>
+              <a:t>  69  </a:t>
+            </a:r>
+            <a:r>
+              <a:rPr sz="1300">
+                <a:solidFill>
                   <a:srgbClr val="7FE0A0"/>
                 </a:solidFill>
                 <a:latin typeface="Consolas"/>
               </a:rPr>
-              <a:t> </a:t>
-            </a:r>
-          </a:p>
-          <a:p>
-            <a:pPr>
-              <a:spcAft>
-                <a:spcPts val="0"/>
-              </a:spcAft>
-            </a:pPr>
-            <a:r>
-              <a:rPr sz="1300">
-                <a:solidFill>
-                  <a:srgbClr val="6D8C97"/>
-                </a:solidFill>
-                <a:latin typeface="Consolas"/>
-              </a:rPr>
-              <a:t>  60  </a:t>
-            </a:r>
-            <a:r>
-              <a:rPr sz="1300">
-                <a:solidFill>
-                  <a:srgbClr val="7FE0A0"/>
-                </a:solidFill>
-                <a:latin typeface="Consolas"/>
-              </a:rPr>
-              <a:t>// The browser calls this when the form is submitted.</a:t>
-            </a:r>
-          </a:p>
-          <a:p>
-            <a:pPr>
-              <a:spcAft>
-                <a:spcPts val="0"/>
-              </a:spcAft>
-            </a:pPr>
-            <a:r>
-              <a:rPr sz="1300">
-                <a:solidFill>
-                  <a:srgbClr val="6D8C97"/>
-                </a:solidFill>
-                <a:latin typeface="Consolas"/>
-              </a:rPr>
-              <a:t>  61  </a:t>
-            </a:r>
-            <a:r>
-              <a:rPr sz="1300">
-                <a:solidFill>
-                  <a:srgbClr val="7FE0A0"/>
-                </a:solidFill>
-                <a:latin typeface="Consolas"/>
-              </a:rPr>
-              <a:t>composer.addEventListener('submit', async function (event) {</a:t>
-            </a:r>
-          </a:p>
-          <a:p>
-            <a:pPr>
-              <a:spcAft>
-                <a:spcPts val="0"/>
-              </a:spcAft>
-            </a:pPr>
-            <a:r>
-              <a:rPr sz="1300">
-                <a:solidFill>
-                  <a:srgbClr val="6D8C97"/>
-                </a:solidFill>
-                <a:latin typeface="Consolas"/>
-              </a:rPr>
-              <a:t>  62  </a:t>
-            </a:r>
-            <a:r>
-              <a:rPr sz="1300">
-                <a:solidFill>
-                  <a:srgbClr val="7FE0A0"/>
-                </a:solidFill>
-                <a:latin typeface="Consolas"/>
-              </a:rPr>
-              <a:t>  event.preventDefault();</a:t>
-            </a:r>
-          </a:p>
-          <a:p>
-            <a:pPr>
-              <a:spcAft>
-                <a:spcPts val="0"/>
-              </a:spcAft>
-            </a:pPr>
-            <a:r>
-              <a:rPr sz="1300">
-                <a:solidFill>
-                  <a:srgbClr val="6D8C97"/>
-                </a:solidFill>
-                <a:latin typeface="Consolas"/>
-              </a:rPr>
-              <a:t>  63  </a:t>
-            </a:r>
-            <a:r>
-              <a:rPr sz="1300">
-                <a:solidFill>
-                  <a:srgbClr val="7FE0A0"/>
-                </a:solidFill>
-                <a:latin typeface="Consolas"/>
-              </a:rPr>
-              <a:t>  const text = promptBox.value.trim();</a:t>
-            </a:r>
-          </a:p>
-          <a:p>
-            <a:pPr>
-              <a:spcAft>
-                <a:spcPts val="0"/>
-              </a:spcAft>
-            </a:pPr>
-            <a:r>
-              <a:rPr sz="1300">
-                <a:solidFill>
-                  <a:srgbClr val="6D8C97"/>
-                </a:solidFill>
-                <a:latin typeface="Consolas"/>
-              </a:rPr>
-              <a:t>  64  </a:t>
-            </a:r>
-            <a:r>
-              <a:rPr sz="1300">
-                <a:solidFill>
-                  <a:srgbClr val="7FE0A0"/>
-                </a:solidFill>
-                <a:latin typeface="Consolas"/>
-              </a:rPr>
-              <a:t>  if (text === '') { return; }</a:t>
-            </a:r>
-          </a:p>
-          <a:p>
-            <a:pPr>
-              <a:spcAft>
-                <a:spcPts val="0"/>
-              </a:spcAft>
-            </a:pPr>
-            <a:r>
-              <a:rPr sz="1300">
-                <a:solidFill>
-                  <a:srgbClr val="6D8C97"/>
-                </a:solidFill>
-                <a:latin typeface="Consolas"/>
-              </a:rPr>
-              <a:t>  65  </a:t>
-            </a:r>
-            <a:r>
-              <a:rPr sz="1300">
-                <a:solidFill>
-                  <a:srgbClr val="7FE0A0"/>
-                </a:solidFill>
-                <a:latin typeface="Consolas"/>
-              </a:rPr>
-              <a:t>  promptBox.value = '';</a:t>
-            </a:r>
-          </a:p>
-          <a:p>
-            <a:pPr>
-              <a:spcAft>
-                <a:spcPts val="0"/>
-              </a:spcAft>
-            </a:pPr>
-            <a:r>
-              <a:rPr sz="1300">
-                <a:solidFill>
-                  <a:srgbClr val="6D8C97"/>
-                </a:solidFill>
-                <a:latin typeface="Consolas"/>
-              </a:rPr>
-              <a:t>  66  </a:t>
-            </a:r>
-            <a:r>
-              <a:rPr sz="1300">
-                <a:solidFill>
-                  <a:srgbClr val="7FE0A0"/>
-                </a:solidFill>
-                <a:latin typeface="Consolas"/>
-              </a:rPr>
-              <a:t>  addLine('You', text);</a:t>
-            </a:r>
-          </a:p>
-          <a:p>
-            <a:pPr>
-              <a:spcAft>
-                <a:spcPts val="0"/>
-              </a:spcAft>
-            </a:pPr>
-            <a:r>
-              <a:rPr sz="1300">
-                <a:solidFill>
-                  <a:srgbClr val="6D8C97"/>
-                </a:solidFill>
-                <a:latin typeface="Consolas"/>
-              </a:rPr>
-              <a:t>  67  </a:t>
-            </a:r>
-            <a:r>
-              <a:rPr sz="1300">
-                <a:solidFill>
-                  <a:srgbClr val="7FE0A0"/>
-                </a:solidFill>
-                <a:latin typeface="Consolas"/>
-              </a:rPr>
-              <a:t>  addLine('Companion', 'thinking...');</a:t>
-            </a:r>
-          </a:p>
-          <a:p>
-            <a:pPr>
-              <a:spcAft>
-                <a:spcPts val="0"/>
-              </a:spcAft>
-            </a:pPr>
-            <a:r>
-              <a:rPr sz="1300">
-                <a:solidFill>
-                  <a:srgbClr val="6D8C97"/>
-                </a:solidFill>
-                <a:latin typeface="Consolas"/>
-              </a:rPr>
-              <a:t>  68  </a:t>
-            </a:r>
-            <a:r>
-              <a:rPr sz="1300">
-                <a:solidFill>
-                  <a:srgbClr val="7FE0A0"/>
-                </a:solidFill>
-                <a:latin typeface="Consolas"/>
-              </a:rPr>
-              <a:t>  const reply = await askAI(text);       // this is the slow bit</a:t>
-            </a:r>
-          </a:p>
-          <a:p>
-            <a:pPr>
-              <a:spcAft>
-                <a:spcPts val="0"/>
-              </a:spcAft>
-            </a:pPr>
-            <a:r>
-              <a:rPr sz="1300">
-                <a:solidFill>
-                  <a:srgbClr val="6D8C97"/>
-                </a:solidFill>
-                <a:latin typeface="Consolas"/>
-              </a:rPr>
-              <a:t>  69  </a:t>
-            </a:r>
-            <a:r>
-              <a:rPr sz="1300">
-                <a:solidFill>
-                  <a:srgbClr val="7FE0A0"/>
-                </a:solidFill>
-                <a:latin typeface="Consolas"/>
-              </a:rPr>
               <a:t>  chat.lastChild.remove();               // take the 'thinking' line away</a:t>
-            </a:r>
-          </a:p>
-          <a:p>
-            <a:pPr>
-              <a:spcAft>
-                <a:spcPts val="0"/>
-              </a:spcAft>
-            </a:pPr>
-            <a:r>
-              <a:rPr sz="1300">
-                <a:solidFill>
-                  <a:srgbClr val="6D8C97"/>
-                </a:solidFill>
-                <a:latin typeface="Consolas"/>
-              </a:rPr>
-              <a:t>  70  </a:t>
-            </a:r>
-            <a:r>
-              <a:rPr sz="1300">
-                <a:solidFill>
-                  <a:srgbClr val="7FE0A0"/>
-                </a:solidFill>
-                <a:latin typeface="Consolas"/>
-              </a:rPr>
-              <a:t>  addLine('Companion', reply);</a:t>
-            </a:r>
-          </a:p>
-          <a:p>
-            <a:pPr>
-              <a:spcAft>
-                <a:spcPts val="0"/>
-              </a:spcAft>
-            </a:pPr>
-            <a:r>
-              <a:rPr sz="1300">
-                <a:solidFill>
-                  <a:srgbClr val="6D8C97"/>
-                </a:solidFill>
-                <a:latin typeface="Consolas"/>
-              </a:rPr>
-              <a:t>  71  </a:t>
-            </a:r>
-            <a:r>
-              <a:rPr sz="1300">
-                <a:solidFill>
-                  <a:srgbClr val="7FE0A0"/>
-                </a:solidFill>
-                <a:latin typeface="Consolas"/>
-              </a:rPr>
-              <a:t>});</a:t>
             </a:r>
           </a:p>
         </p:txBody>
@@ -13293,7 +12700,7 @@
                   <a:srgbClr val="DCECEF"/>
                 </a:solidFill>
               </a:rPr>
-              <a:t>That is the whole piece. Check yours looks the same before moving on.</a:t>
+              <a:t>Remove the 'thinking...' line now the real answer is here.</a:t>
             </a:r>
           </a:p>
         </p:txBody>
@@ -13352,7 +12759,7 @@
                   <a:srgbClr val="01AEFD"/>
                 </a:solidFill>
               </a:rPr>
-              <a:t>In script.js   -   delete a line</a:t>
+              <a:t>Type this into script.js   -   line 70</a:t>
             </a:r>
           </a:p>
         </p:txBody>
@@ -13391,7 +12798,7 @@
                 </a:solidFill>
                 <a:latin typeface="Consolas"/>
               </a:rPr>
-              <a:t>  29  </a:t>
+              <a:t>  59  </a:t>
             </a:r>
             <a:r>
               <a:rPr sz="1300">
@@ -13416,241 +12823,266 @@
                 </a:solidFill>
                 <a:latin typeface="Consolas"/>
               </a:rPr>
-              <a:t>  30  </a:t>
-            </a:r>
-            <a:r>
-              <a:rPr sz="1300">
-                <a:solidFill>
-                  <a:srgbClr val="6D8C97"/>
-                </a:solidFill>
-                <a:latin typeface="Consolas"/>
-              </a:rPr>
-              <a:t>// The smallest useful request: what models does this server have?</a:t>
-            </a:r>
-          </a:p>
-          <a:p>
-            <a:pPr>
-              <a:spcAft>
-                <a:spcPts val="0"/>
-              </a:spcAft>
-            </a:pPr>
-            <a:r>
-              <a:rPr sz="1300">
-                <a:solidFill>
-                  <a:srgbClr val="6D8C97"/>
-                </a:solidFill>
-                <a:latin typeface="Consolas"/>
-              </a:rPr>
-              <a:t>  31  </a:t>
-            </a:r>
-            <a:r>
-              <a:rPr sz="1300">
-                <a:solidFill>
-                  <a:srgbClr val="6D8C97"/>
-                </a:solidFill>
-                <a:latin typeface="Consolas"/>
-              </a:rPr>
-              <a:t>// 'async' means this function does something slow and can be waited for.</a:t>
-            </a:r>
-          </a:p>
-          <a:p>
-            <a:pPr>
-              <a:spcAft>
-                <a:spcPts val="0"/>
-              </a:spcAft>
-            </a:pPr>
-            <a:r>
-              <a:rPr sz="1300">
-                <a:solidFill>
-                  <a:srgbClr val="6D8C97"/>
-                </a:solidFill>
-                <a:latin typeface="Consolas"/>
-              </a:rPr>
-              <a:t>  32  </a:t>
-            </a:r>
-            <a:r>
-              <a:rPr sz="1300">
-                <a:solidFill>
-                  <a:srgbClr val="6D8C97"/>
-                </a:solidFill>
-                <a:latin typeface="Consolas"/>
-              </a:rPr>
-              <a:t>async function listModels() {</a:t>
-            </a:r>
-          </a:p>
-          <a:p>
-            <a:pPr>
-              <a:spcAft>
-                <a:spcPts val="0"/>
-              </a:spcAft>
-            </a:pPr>
-            <a:r>
-              <a:rPr sz="1300">
-                <a:solidFill>
-                  <a:srgbClr val="6D8C97"/>
-                </a:solidFill>
-                <a:latin typeface="Consolas"/>
-              </a:rPr>
-              <a:t>  33  </a:t>
-            </a:r>
-            <a:r>
-              <a:rPr sz="1300">
-                <a:solidFill>
-                  <a:srgbClr val="6D8C97"/>
-                </a:solidFill>
-                <a:latin typeface="Consolas"/>
-              </a:rPr>
-              <a:t>  const res = await fetch(AI_BASE + '/v1/models', {</a:t>
-            </a:r>
-          </a:p>
-          <a:p>
-            <a:pPr>
-              <a:spcAft>
-                <a:spcPts val="0"/>
-              </a:spcAft>
-            </a:pPr>
-            <a:r>
-              <a:rPr sz="1300">
-                <a:solidFill>
-                  <a:srgbClr val="6D8C97"/>
-                </a:solidFill>
-                <a:latin typeface="Consolas"/>
-              </a:rPr>
-              <a:t>  34  </a:t>
-            </a:r>
-            <a:r>
-              <a:rPr sz="1300">
-                <a:solidFill>
-                  <a:srgbClr val="6D8C97"/>
-                </a:solidFill>
-                <a:latin typeface="Consolas"/>
-              </a:rPr>
-              <a:t>    headers: { 'Authorization': 'Bearer ' + API_KEY }</a:t>
-            </a:r>
-          </a:p>
-          <a:p>
-            <a:pPr>
-              <a:spcAft>
-                <a:spcPts val="0"/>
-              </a:spcAft>
-            </a:pPr>
-            <a:r>
-              <a:rPr sz="1300">
-                <a:solidFill>
-                  <a:srgbClr val="6D8C97"/>
-                </a:solidFill>
-                <a:latin typeface="Consolas"/>
-              </a:rPr>
-              <a:t>  35  </a:t>
-            </a:r>
-            <a:r>
-              <a:rPr sz="1300">
-                <a:solidFill>
-                  <a:srgbClr val="6D8C97"/>
-                </a:solidFill>
-                <a:latin typeface="Consolas"/>
-              </a:rPr>
-              <a:t>  });</a:t>
-            </a:r>
-          </a:p>
-          <a:p>
-            <a:pPr>
-              <a:spcAft>
-                <a:spcPts val="0"/>
-              </a:spcAft>
-            </a:pPr>
-            <a:r>
-              <a:rPr sz="1300">
-                <a:solidFill>
-                  <a:srgbClr val="6D8C97"/>
-                </a:solidFill>
-                <a:latin typeface="Consolas"/>
-              </a:rPr>
-              <a:t>  36  </a:t>
-            </a:r>
-            <a:r>
-              <a:rPr sz="1300">
-                <a:solidFill>
-                  <a:srgbClr val="6D8C97"/>
-                </a:solidFill>
-                <a:latin typeface="Consolas"/>
-              </a:rPr>
-              <a:t>  const data = await res.json();   // the answer arrives as text; this reads it</a:t>
-            </a:r>
-          </a:p>
-          <a:p>
-            <a:pPr>
-              <a:spcAft>
-                <a:spcPts val="0"/>
-              </a:spcAft>
-            </a:pPr>
-            <a:r>
-              <a:rPr sz="1300">
-                <a:solidFill>
-                  <a:srgbClr val="6D8C97"/>
-                </a:solidFill>
-                <a:latin typeface="Consolas"/>
-              </a:rPr>
-              <a:t>  37  </a:t>
-            </a:r>
-            <a:r>
-              <a:rPr sz="1300">
-                <a:solidFill>
-                  <a:srgbClr val="6D8C97"/>
-                </a:solidFill>
-                <a:latin typeface="Consolas"/>
-              </a:rPr>
-              <a:t>  console.log('The server offers:', data.data);</a:t>
-            </a:r>
-          </a:p>
-          <a:p>
-            <a:pPr>
-              <a:spcAft>
-                <a:spcPts val="0"/>
-              </a:spcAft>
-            </a:pPr>
-            <a:r>
-              <a:rPr sz="1300">
-                <a:solidFill>
-                  <a:srgbClr val="6D8C97"/>
-                </a:solidFill>
-                <a:latin typeface="Consolas"/>
-              </a:rPr>
-              <a:t>  38  </a:t>
-            </a:r>
-            <a:r>
-              <a:rPr sz="1300">
-                <a:solidFill>
-                  <a:srgbClr val="6D8C97"/>
-                </a:solidFill>
-                <a:latin typeface="Consolas"/>
-              </a:rPr>
-              <a:t>}</a:t>
-            </a:r>
-          </a:p>
-          <a:p>
-            <a:pPr>
-              <a:spcAft>
-                <a:spcPts val="0"/>
-              </a:spcAft>
-            </a:pPr>
-            <a:r>
-              <a:rPr sz="1300">
-                <a:solidFill>
-                  <a:srgbClr val="6D8C97"/>
-                </a:solidFill>
-                <a:latin typeface="Consolas"/>
-              </a:rPr>
-              <a:t>   -  </a:t>
-            </a:r>
-            <a:r>
-              <a:rPr sz="1300" strike="sngStrike">
-                <a:solidFill>
-                  <a:srgbClr val="F3928B"/>
-                </a:solidFill>
-                <a:latin typeface="Consolas"/>
-              </a:rPr>
-              <a:t>listModels();</a:t>
+              <a:t>  60  </a:t>
+            </a:r>
+            <a:r>
+              <a:rPr sz="1300">
+                <a:solidFill>
+                  <a:srgbClr val="6D8C97"/>
+                </a:solidFill>
+                <a:latin typeface="Consolas"/>
+              </a:rPr>
+              <a:t>// The browser calls this when the form is submitted.</a:t>
+            </a:r>
+          </a:p>
+          <a:p>
+            <a:pPr>
+              <a:spcAft>
+                <a:spcPts val="0"/>
+              </a:spcAft>
+            </a:pPr>
+            <a:r>
+              <a:rPr sz="1300">
+                <a:solidFill>
+                  <a:srgbClr val="6D8C97"/>
+                </a:solidFill>
+                <a:latin typeface="Consolas"/>
+              </a:rPr>
+              <a:t>  61  </a:t>
+            </a:r>
+            <a:r>
+              <a:rPr sz="1300">
+                <a:solidFill>
+                  <a:srgbClr val="6D8C97"/>
+                </a:solidFill>
+                <a:latin typeface="Consolas"/>
+              </a:rPr>
+              <a:t>composer.addEventListener('submit', async function (event) {</a:t>
+            </a:r>
+          </a:p>
+          <a:p>
+            <a:pPr>
+              <a:spcAft>
+                <a:spcPts val="0"/>
+              </a:spcAft>
+            </a:pPr>
+            <a:r>
+              <a:rPr sz="1300">
+                <a:solidFill>
+                  <a:srgbClr val="6D8C97"/>
+                </a:solidFill>
+                <a:latin typeface="Consolas"/>
+              </a:rPr>
+              <a:t>  62  </a:t>
+            </a:r>
+            <a:r>
+              <a:rPr sz="1300">
+                <a:solidFill>
+                  <a:srgbClr val="6D8C97"/>
+                </a:solidFill>
+                <a:latin typeface="Consolas"/>
+              </a:rPr>
+              <a:t>  event.preventDefault();</a:t>
+            </a:r>
+          </a:p>
+          <a:p>
+            <a:pPr>
+              <a:spcAft>
+                <a:spcPts val="0"/>
+              </a:spcAft>
+            </a:pPr>
+            <a:r>
+              <a:rPr sz="1300">
+                <a:solidFill>
+                  <a:srgbClr val="6D8C97"/>
+                </a:solidFill>
+                <a:latin typeface="Consolas"/>
+              </a:rPr>
+              <a:t>  63  </a:t>
+            </a:r>
+            <a:r>
+              <a:rPr sz="1300">
+                <a:solidFill>
+                  <a:srgbClr val="6D8C97"/>
+                </a:solidFill>
+                <a:latin typeface="Consolas"/>
+              </a:rPr>
+              <a:t>  const text = promptBox.value.trim();</a:t>
+            </a:r>
+          </a:p>
+          <a:p>
+            <a:pPr>
+              <a:spcAft>
+                <a:spcPts val="0"/>
+              </a:spcAft>
+            </a:pPr>
+            <a:r>
+              <a:rPr sz="1300">
+                <a:solidFill>
+                  <a:srgbClr val="6D8C97"/>
+                </a:solidFill>
+                <a:latin typeface="Consolas"/>
+              </a:rPr>
+              <a:t>  64  </a:t>
+            </a:r>
+            <a:r>
+              <a:rPr sz="1300">
+                <a:solidFill>
+                  <a:srgbClr val="6D8C97"/>
+                </a:solidFill>
+                <a:latin typeface="Consolas"/>
+              </a:rPr>
+              <a:t>  if (text === '') { return; }</a:t>
+            </a:r>
+          </a:p>
+          <a:p>
+            <a:pPr>
+              <a:spcAft>
+                <a:spcPts val="0"/>
+              </a:spcAft>
+            </a:pPr>
+            <a:r>
+              <a:rPr sz="1300">
+                <a:solidFill>
+                  <a:srgbClr val="6D8C97"/>
+                </a:solidFill>
+                <a:latin typeface="Consolas"/>
+              </a:rPr>
+              <a:t>  65  </a:t>
+            </a:r>
+            <a:r>
+              <a:rPr sz="1300">
+                <a:solidFill>
+                  <a:srgbClr val="6D8C97"/>
+                </a:solidFill>
+                <a:latin typeface="Consolas"/>
+              </a:rPr>
+              <a:t>  promptBox.value = '';</a:t>
+            </a:r>
+          </a:p>
+          <a:p>
+            <a:pPr>
+              <a:spcAft>
+                <a:spcPts val="0"/>
+              </a:spcAft>
+            </a:pPr>
+            <a:r>
+              <a:rPr sz="1300">
+                <a:solidFill>
+                  <a:srgbClr val="6D8C97"/>
+                </a:solidFill>
+                <a:latin typeface="Consolas"/>
+              </a:rPr>
+              <a:t>  66  </a:t>
+            </a:r>
+            <a:r>
+              <a:rPr sz="1300">
+                <a:solidFill>
+                  <a:srgbClr val="6D8C97"/>
+                </a:solidFill>
+                <a:latin typeface="Consolas"/>
+              </a:rPr>
+              <a:t>  addLine('You', text);</a:t>
+            </a:r>
+          </a:p>
+          <a:p>
+            <a:pPr>
+              <a:spcAft>
+                <a:spcPts val="0"/>
+              </a:spcAft>
+            </a:pPr>
+            <a:r>
+              <a:rPr sz="1300">
+                <a:solidFill>
+                  <a:srgbClr val="6D8C97"/>
+                </a:solidFill>
+                <a:latin typeface="Consolas"/>
+              </a:rPr>
+              <a:t>  67  </a:t>
+            </a:r>
+            <a:r>
+              <a:rPr sz="1300">
+                <a:solidFill>
+                  <a:srgbClr val="6D8C97"/>
+                </a:solidFill>
+                <a:latin typeface="Consolas"/>
+              </a:rPr>
+              <a:t>  addLine('Companion', 'thinking...');</a:t>
+            </a:r>
+          </a:p>
+          <a:p>
+            <a:pPr>
+              <a:spcAft>
+                <a:spcPts val="0"/>
+              </a:spcAft>
+            </a:pPr>
+            <a:r>
+              <a:rPr sz="1300">
+                <a:solidFill>
+                  <a:srgbClr val="6D8C97"/>
+                </a:solidFill>
+                <a:latin typeface="Consolas"/>
+              </a:rPr>
+              <a:t>  68  </a:t>
+            </a:r>
+            <a:r>
+              <a:rPr sz="1300">
+                <a:solidFill>
+                  <a:srgbClr val="6D8C97"/>
+                </a:solidFill>
+                <a:latin typeface="Consolas"/>
+              </a:rPr>
+              <a:t>  const reply = await askAI(text);       // this is the slow bit</a:t>
+            </a:r>
+          </a:p>
+          <a:p>
+            <a:pPr>
+              <a:spcAft>
+                <a:spcPts val="0"/>
+              </a:spcAft>
+            </a:pPr>
+            <a:r>
+              <a:rPr sz="1300">
+                <a:solidFill>
+                  <a:srgbClr val="6D8C97"/>
+                </a:solidFill>
+                <a:latin typeface="Consolas"/>
+              </a:rPr>
+              <a:t>  69  </a:t>
+            </a:r>
+            <a:r>
+              <a:rPr sz="1300">
+                <a:solidFill>
+                  <a:srgbClr val="6D8C97"/>
+                </a:solidFill>
+                <a:latin typeface="Consolas"/>
+              </a:rPr>
+              <a:t>  chat.lastChild.remove();               // take the 'thinking' line away</a:t>
+            </a:r>
+          </a:p>
+          <a:p>
+            <a:pPr>
+              <a:spcAft>
+                <a:spcPts val="0"/>
+              </a:spcAft>
+            </a:pPr>
+            <a:r>
+              <a:rPr sz="1300">
+                <a:solidFill>
+                  <a:srgbClr val="6D8C97"/>
+                </a:solidFill>
+                <a:latin typeface="Consolas"/>
+              </a:rPr>
+              <a:t>  70  </a:t>
+            </a:r>
+            <a:r>
+              <a:rPr sz="1300">
+                <a:solidFill>
+                  <a:srgbClr val="7FE0A0"/>
+                </a:solidFill>
+                <a:latin typeface="Consolas"/>
+              </a:rPr>
+              <a:t>  addLine('Companion', reply);</a:t>
             </a:r>
           </a:p>
         </p:txBody>
@@ -13683,7 +13115,7 @@
                   <a:srgbClr val="DCECEF"/>
                 </a:solidFill>
               </a:rPr>
-              <a:t>Delete this line. askAI does the asking now, so the old test call is no longer needed - your file should have no listModels() call left.</a:t>
+              <a:t>Show the real reply in the chat.</a:t>
             </a:r>
           </a:p>
         </p:txBody>
@@ -13699,6 +13131,14 @@
 <file path=ppt/slides/slide38.xml><?xml version="1.0" encoding="utf-8"?>
 <p:sld xmlns:a="http://schemas.openxmlformats.org/drawingml/2006/main" xmlns:p="http://schemas.openxmlformats.org/presentationml/2006/main" xmlns:r="http://schemas.openxmlformats.org/officeDocument/2006/relationships">
   <p:cSld>
+    <p:bg>
+      <p:bgPr>
+        <a:solidFill>
+          <a:srgbClr val="102127"/>
+        </a:solidFill>
+        <a:effectLst/>
+      </p:bgPr>
+    </p:bg>
     <p:spTree>
       <p:nvGrpSpPr>
         <p:cNvPr id="1" name=""/>
@@ -13708,40 +13148,14 @@
       <p:grpSpPr/>
       <p:sp>
         <p:nvSpPr>
-          <p:cNvPr id="2" name="Title 1"/>
-          <p:cNvSpPr>
-            <a:spLocks noGrp="1"/>
-          </p:cNvSpPr>
-          <p:nvPr>
-            <p:ph type="title"/>
-          </p:nvPr>
-        </p:nvSpPr>
-        <p:spPr/>
-        <p:txBody>
-          <a:bodyPr/>
-          <a:lstStyle/>
-          <a:p>
-            <a:r>
-              <a:rPr sz="3800" b="1">
-                <a:solidFill>
-                  <a:srgbClr val="1F2A37"/>
-                </a:solidFill>
-              </a:rPr>
-              <a:t>Checkpoint: a real answer</a:t>
-            </a:r>
-          </a:p>
-        </p:txBody>
-      </p:sp>
-      <p:sp>
-        <p:nvSpPr>
-          <p:cNvPr id="3" name="TextBox 2"/>
+          <p:cNvPr id="2" name="TextBox 1"/>
           <p:cNvSpPr txBox="1"/>
           <p:nvPr/>
         </p:nvSpPr>
         <p:spPr>
           <a:xfrm>
-            <a:off x="868680" y="502920"/>
-            <a:ext cx="5486400" cy="457200"/>
+            <a:off x="502920" y="274320"/>
+            <a:ext cx="11155680" cy="548640"/>
           </a:xfrm>
           <a:prstGeom prst="rect">
             <a:avLst/>
@@ -13755,26 +13169,26 @@
           <a:lstStyle/>
           <a:p>
             <a:r>
-              <a:rPr sz="1500" b="1">
+              <a:rPr sz="2200" b="1">
                 <a:solidFill>
                   <a:srgbClr val="01AEFD"/>
                 </a:solidFill>
               </a:rPr>
-              <a:t>CHECKPOINT - RUN IT</a:t>
-            </a:r>
-          </a:p>
-        </p:txBody>
-      </p:sp>
-      <p:sp>
-        <p:nvSpPr>
-          <p:cNvPr id="4" name="TextBox 3"/>
+              <a:t>All together in script.js</a:t>
+            </a:r>
+          </a:p>
+        </p:txBody>
+      </p:sp>
+      <p:sp>
+        <p:nvSpPr>
+          <p:cNvPr id="3" name="TextBox 2"/>
           <p:cNvSpPr txBox="1"/>
           <p:nvPr/>
         </p:nvSpPr>
         <p:spPr>
           <a:xfrm>
-            <a:off x="822960" y="1828800"/>
-            <a:ext cx="10515600" cy="4206240"/>
+            <a:off x="502920" y="960120"/>
+            <a:ext cx="11155680" cy="4297680"/>
           </a:xfrm>
           <a:prstGeom prst="rect">
             <a:avLst/>
@@ -13782,53 +13196,366 @@
           <a:noFill/>
         </p:spPr>
         <p:txBody>
+          <a:bodyPr wrap="none">
+            <a:spAutoFit/>
+          </a:bodyPr>
+          <a:lstStyle/>
+          <a:p>
+            <a:pPr>
+              <a:spcAft>
+                <a:spcPts val="0"/>
+              </a:spcAft>
+            </a:pPr>
+            <a:r>
+              <a:rPr sz="1300">
+                <a:solidFill>
+                  <a:srgbClr val="6D8C97"/>
+                </a:solidFill>
+                <a:latin typeface="Consolas"/>
+              </a:rPr>
+              <a:t>  59  </a:t>
+            </a:r>
+            <a:r>
+              <a:rPr sz="1300">
+                <a:solidFill>
+                  <a:srgbClr val="7FE0A0"/>
+                </a:solidFill>
+                <a:latin typeface="Consolas"/>
+              </a:rPr>
+              <a:t> </a:t>
+            </a:r>
+          </a:p>
+          <a:p>
+            <a:pPr>
+              <a:spcAft>
+                <a:spcPts val="0"/>
+              </a:spcAft>
+            </a:pPr>
+            <a:r>
+              <a:rPr sz="1300">
+                <a:solidFill>
+                  <a:srgbClr val="6D8C97"/>
+                </a:solidFill>
+                <a:latin typeface="Consolas"/>
+              </a:rPr>
+              <a:t>  60  </a:t>
+            </a:r>
+            <a:r>
+              <a:rPr sz="1300">
+                <a:solidFill>
+                  <a:srgbClr val="7FE0A0"/>
+                </a:solidFill>
+                <a:latin typeface="Consolas"/>
+              </a:rPr>
+              <a:t>// The browser calls this when the form is submitted.</a:t>
+            </a:r>
+          </a:p>
+          <a:p>
+            <a:pPr>
+              <a:spcAft>
+                <a:spcPts val="0"/>
+              </a:spcAft>
+            </a:pPr>
+            <a:r>
+              <a:rPr sz="1300">
+                <a:solidFill>
+                  <a:srgbClr val="6D8C97"/>
+                </a:solidFill>
+                <a:latin typeface="Consolas"/>
+              </a:rPr>
+              <a:t>  61  </a:t>
+            </a:r>
+            <a:r>
+              <a:rPr sz="1300">
+                <a:solidFill>
+                  <a:srgbClr val="7FE0A0"/>
+                </a:solidFill>
+                <a:latin typeface="Consolas"/>
+              </a:rPr>
+              <a:t>composer.addEventListener('submit', async function (event) {</a:t>
+            </a:r>
+          </a:p>
+          <a:p>
+            <a:pPr>
+              <a:spcAft>
+                <a:spcPts val="0"/>
+              </a:spcAft>
+            </a:pPr>
+            <a:r>
+              <a:rPr sz="1300">
+                <a:solidFill>
+                  <a:srgbClr val="6D8C97"/>
+                </a:solidFill>
+                <a:latin typeface="Consolas"/>
+              </a:rPr>
+              <a:t>  62  </a:t>
+            </a:r>
+            <a:r>
+              <a:rPr sz="1300">
+                <a:solidFill>
+                  <a:srgbClr val="7FE0A0"/>
+                </a:solidFill>
+                <a:latin typeface="Consolas"/>
+              </a:rPr>
+              <a:t>  event.preventDefault();</a:t>
+            </a:r>
+          </a:p>
+          <a:p>
+            <a:pPr>
+              <a:spcAft>
+                <a:spcPts val="0"/>
+              </a:spcAft>
+            </a:pPr>
+            <a:r>
+              <a:rPr sz="1300">
+                <a:solidFill>
+                  <a:srgbClr val="6D8C97"/>
+                </a:solidFill>
+                <a:latin typeface="Consolas"/>
+              </a:rPr>
+              <a:t>  63  </a:t>
+            </a:r>
+            <a:r>
+              <a:rPr sz="1300">
+                <a:solidFill>
+                  <a:srgbClr val="7FE0A0"/>
+                </a:solidFill>
+                <a:latin typeface="Consolas"/>
+              </a:rPr>
+              <a:t>  const text = promptBox.value.trim();</a:t>
+            </a:r>
+          </a:p>
+          <a:p>
+            <a:pPr>
+              <a:spcAft>
+                <a:spcPts val="0"/>
+              </a:spcAft>
+            </a:pPr>
+            <a:r>
+              <a:rPr sz="1300">
+                <a:solidFill>
+                  <a:srgbClr val="6D8C97"/>
+                </a:solidFill>
+                <a:latin typeface="Consolas"/>
+              </a:rPr>
+              <a:t>  64  </a:t>
+            </a:r>
+            <a:r>
+              <a:rPr sz="1300">
+                <a:solidFill>
+                  <a:srgbClr val="7FE0A0"/>
+                </a:solidFill>
+                <a:latin typeface="Consolas"/>
+              </a:rPr>
+              <a:t>  if (text === '') { return; }</a:t>
+            </a:r>
+          </a:p>
+          <a:p>
+            <a:pPr>
+              <a:spcAft>
+                <a:spcPts val="0"/>
+              </a:spcAft>
+            </a:pPr>
+            <a:r>
+              <a:rPr sz="1300">
+                <a:solidFill>
+                  <a:srgbClr val="6D8C97"/>
+                </a:solidFill>
+                <a:latin typeface="Consolas"/>
+              </a:rPr>
+              <a:t>  65  </a:t>
+            </a:r>
+            <a:r>
+              <a:rPr sz="1300">
+                <a:solidFill>
+                  <a:srgbClr val="7FE0A0"/>
+                </a:solidFill>
+                <a:latin typeface="Consolas"/>
+              </a:rPr>
+              <a:t>  promptBox.value = '';</a:t>
+            </a:r>
+          </a:p>
+          <a:p>
+            <a:pPr>
+              <a:spcAft>
+                <a:spcPts val="0"/>
+              </a:spcAft>
+            </a:pPr>
+            <a:r>
+              <a:rPr sz="1300">
+                <a:solidFill>
+                  <a:srgbClr val="6D8C97"/>
+                </a:solidFill>
+                <a:latin typeface="Consolas"/>
+              </a:rPr>
+              <a:t>  66  </a:t>
+            </a:r>
+            <a:r>
+              <a:rPr sz="1300">
+                <a:solidFill>
+                  <a:srgbClr val="7FE0A0"/>
+                </a:solidFill>
+                <a:latin typeface="Consolas"/>
+              </a:rPr>
+              <a:t>  addLine('You', text);</a:t>
+            </a:r>
+          </a:p>
+          <a:p>
+            <a:pPr>
+              <a:spcAft>
+                <a:spcPts val="0"/>
+              </a:spcAft>
+            </a:pPr>
+            <a:r>
+              <a:rPr sz="1300">
+                <a:solidFill>
+                  <a:srgbClr val="6D8C97"/>
+                </a:solidFill>
+                <a:latin typeface="Consolas"/>
+              </a:rPr>
+              <a:t>  67  </a:t>
+            </a:r>
+            <a:r>
+              <a:rPr sz="1300">
+                <a:solidFill>
+                  <a:srgbClr val="7FE0A0"/>
+                </a:solidFill>
+                <a:latin typeface="Consolas"/>
+              </a:rPr>
+              <a:t>  addLine('Companion', 'thinking...');</a:t>
+            </a:r>
+          </a:p>
+          <a:p>
+            <a:pPr>
+              <a:spcAft>
+                <a:spcPts val="0"/>
+              </a:spcAft>
+            </a:pPr>
+            <a:r>
+              <a:rPr sz="1300">
+                <a:solidFill>
+                  <a:srgbClr val="6D8C97"/>
+                </a:solidFill>
+                <a:latin typeface="Consolas"/>
+              </a:rPr>
+              <a:t>  68  </a:t>
+            </a:r>
+            <a:r>
+              <a:rPr sz="1300">
+                <a:solidFill>
+                  <a:srgbClr val="7FE0A0"/>
+                </a:solidFill>
+                <a:latin typeface="Consolas"/>
+              </a:rPr>
+              <a:t>  const reply = await askAI(text);       // this is the slow bit</a:t>
+            </a:r>
+          </a:p>
+          <a:p>
+            <a:pPr>
+              <a:spcAft>
+                <a:spcPts val="0"/>
+              </a:spcAft>
+            </a:pPr>
+            <a:r>
+              <a:rPr sz="1300">
+                <a:solidFill>
+                  <a:srgbClr val="6D8C97"/>
+                </a:solidFill>
+                <a:latin typeface="Consolas"/>
+              </a:rPr>
+              <a:t>  69  </a:t>
+            </a:r>
+            <a:r>
+              <a:rPr sz="1300">
+                <a:solidFill>
+                  <a:srgbClr val="7FE0A0"/>
+                </a:solidFill>
+                <a:latin typeface="Consolas"/>
+              </a:rPr>
+              <a:t>  chat.lastChild.remove();               // take the 'thinking' line away</a:t>
+            </a:r>
+          </a:p>
+          <a:p>
+            <a:pPr>
+              <a:spcAft>
+                <a:spcPts val="0"/>
+              </a:spcAft>
+            </a:pPr>
+            <a:r>
+              <a:rPr sz="1300">
+                <a:solidFill>
+                  <a:srgbClr val="6D8C97"/>
+                </a:solidFill>
+                <a:latin typeface="Consolas"/>
+              </a:rPr>
+              <a:t>  70  </a:t>
+            </a:r>
+            <a:r>
+              <a:rPr sz="1300">
+                <a:solidFill>
+                  <a:srgbClr val="7FE0A0"/>
+                </a:solidFill>
+                <a:latin typeface="Consolas"/>
+              </a:rPr>
+              <a:t>  addLine('Companion', reply);</a:t>
+            </a:r>
+          </a:p>
+          <a:p>
+            <a:pPr>
+              <a:spcAft>
+                <a:spcPts val="0"/>
+              </a:spcAft>
+            </a:pPr>
+            <a:r>
+              <a:rPr sz="1300">
+                <a:solidFill>
+                  <a:srgbClr val="6D8C97"/>
+                </a:solidFill>
+                <a:latin typeface="Consolas"/>
+              </a:rPr>
+              <a:t>  71  </a:t>
+            </a:r>
+            <a:r>
+              <a:rPr sz="1300">
+                <a:solidFill>
+                  <a:srgbClr val="7FE0A0"/>
+                </a:solidFill>
+                <a:latin typeface="Consolas"/>
+              </a:rPr>
+              <a:t>});</a:t>
+            </a:r>
+          </a:p>
+        </p:txBody>
+      </p:sp>
+      <p:sp>
+        <p:nvSpPr>
+          <p:cNvPr id="4" name="TextBox 3"/>
+          <p:cNvSpPr txBox="1"/>
+          <p:nvPr/>
+        </p:nvSpPr>
+        <p:spPr>
+          <a:xfrm>
+            <a:off x="548640" y="5623560"/>
+            <a:ext cx="11064240" cy="1051560"/>
+          </a:xfrm>
+          <a:prstGeom prst="rect">
+            <a:avLst/>
+          </a:prstGeom>
+          <a:noFill/>
+        </p:spPr>
+        <p:txBody>
           <a:bodyPr wrap="square">
             <a:spAutoFit/>
           </a:bodyPr>
           <a:lstStyle/>
           <a:p>
-            <a:pPr>
-              <a:spcAft>
-                <a:spcPts val="1400"/>
-              </a:spcAft>
-            </a:pPr>
-            <a:r>
-              <a:rPr sz="2800">
-                <a:solidFill>
-                  <a:srgbClr val="01AEFD"/>
-                </a:solidFill>
-              </a:rPr>
-              <a:t>Press Run, ask a question and press Send. After a moment the companion replies for real. This needs your own key and the school network; the preview here shows the interface.</a:t>
-            </a:r>
-          </a:p>
-          <a:p>
-            <a:pPr>
-              <a:spcAft>
-                <a:spcPts val="1400"/>
-              </a:spcAft>
-            </a:pPr>
-            <a:r>
-              <a:rPr sz="2400">
-                <a:solidFill>
-                  <a:srgbClr val="1F2A37"/>
-                </a:solidFill>
-              </a:rPr>
-              <a:t>• Run it in the classroom, or press Show the output in the web deck.</a:t>
-            </a:r>
-          </a:p>
-          <a:p>
-            <a:pPr>
-              <a:spcAft>
-                <a:spcPts val="1400"/>
-              </a:spcAft>
-            </a:pPr>
-            <a:r>
-              <a:rPr sz="2400">
-                <a:solidFill>
-                  <a:srgbClr val="1F2A37"/>
-                </a:solidFill>
-              </a:rPr>
-              <a:t>• Everyone's screen should match this.</a:t>
+            <a:r>
+              <a:rPr sz="2000">
+                <a:solidFill>
+                  <a:srgbClr val="DCECEF"/>
+                </a:solidFill>
+              </a:rPr>
+              <a:t>That is the whole piece. Check yours looks the same before moving on.</a:t>
             </a:r>
           </a:p>
         </p:txBody>
@@ -13844,6 +13571,14 @@
 <file path=ppt/slides/slide39.xml><?xml version="1.0" encoding="utf-8"?>
 <p:sld xmlns:a="http://schemas.openxmlformats.org/drawingml/2006/main" xmlns:p="http://schemas.openxmlformats.org/presentationml/2006/main" xmlns:r="http://schemas.openxmlformats.org/officeDocument/2006/relationships">
   <p:cSld>
+    <p:bg>
+      <p:bgPr>
+        <a:solidFill>
+          <a:srgbClr val="102127"/>
+        </a:solidFill>
+        <a:effectLst/>
+      </p:bgPr>
+    </p:bg>
     <p:spTree>
       <p:nvGrpSpPr>
         <p:cNvPr id="1" name=""/>
@@ -13853,40 +13588,14 @@
       <p:grpSpPr/>
       <p:sp>
         <p:nvSpPr>
-          <p:cNvPr id="2" name="Title 1"/>
-          <p:cNvSpPr>
-            <a:spLocks noGrp="1"/>
-          </p:cNvSpPr>
-          <p:nvPr>
-            <p:ph type="title"/>
-          </p:nvPr>
-        </p:nvSpPr>
-        <p:spPr/>
-        <p:txBody>
-          <a:bodyPr/>
-          <a:lstStyle/>
-          <a:p>
-            <a:r>
-              <a:rPr sz="3800" b="1">
-                <a:solidFill>
-                  <a:srgbClr val="1F2A37"/>
-                </a:solidFill>
-              </a:rPr>
-              <a:t>Your turn</a:t>
-            </a:r>
-          </a:p>
-        </p:txBody>
-      </p:sp>
-      <p:sp>
-        <p:nvSpPr>
-          <p:cNvPr id="3" name="TextBox 2"/>
+          <p:cNvPr id="2" name="TextBox 1"/>
           <p:cNvSpPr txBox="1"/>
           <p:nvPr/>
         </p:nvSpPr>
         <p:spPr>
           <a:xfrm>
-            <a:off x="822960" y="1828800"/>
-            <a:ext cx="10515600" cy="4206240"/>
+            <a:off x="502920" y="274320"/>
+            <a:ext cx="11155680" cy="548640"/>
           </a:xfrm>
           <a:prstGeom prst="rect">
             <a:avLst/>
@@ -13894,53 +13603,349 @@
           <a:noFill/>
         </p:spPr>
         <p:txBody>
+          <a:bodyPr wrap="none">
+            <a:spAutoFit/>
+          </a:bodyPr>
+          <a:lstStyle/>
+          <a:p>
+            <a:r>
+              <a:rPr sz="2200" b="1">
+                <a:solidFill>
+                  <a:srgbClr val="01AEFD"/>
+                </a:solidFill>
+              </a:rPr>
+              <a:t>In script.js   -   delete a line</a:t>
+            </a:r>
+          </a:p>
+        </p:txBody>
+      </p:sp>
+      <p:sp>
+        <p:nvSpPr>
+          <p:cNvPr id="3" name="TextBox 2"/>
+          <p:cNvSpPr txBox="1"/>
+          <p:nvPr/>
+        </p:nvSpPr>
+        <p:spPr>
+          <a:xfrm>
+            <a:off x="502920" y="960120"/>
+            <a:ext cx="11155680" cy="4297680"/>
+          </a:xfrm>
+          <a:prstGeom prst="rect">
+            <a:avLst/>
+          </a:prstGeom>
+          <a:noFill/>
+        </p:spPr>
+        <p:txBody>
+          <a:bodyPr wrap="none">
+            <a:spAutoFit/>
+          </a:bodyPr>
+          <a:lstStyle/>
+          <a:p>
+            <a:pPr>
+              <a:spcAft>
+                <a:spcPts val="0"/>
+              </a:spcAft>
+            </a:pPr>
+            <a:r>
+              <a:rPr sz="1300">
+                <a:solidFill>
+                  <a:srgbClr val="6D8C97"/>
+                </a:solidFill>
+                <a:latin typeface="Consolas"/>
+              </a:rPr>
+              <a:t>  29  </a:t>
+            </a:r>
+            <a:r>
+              <a:rPr sz="1300">
+                <a:solidFill>
+                  <a:srgbClr val="6D8C97"/>
+                </a:solidFill>
+                <a:latin typeface="Consolas"/>
+              </a:rPr>
+              <a:t> </a:t>
+            </a:r>
+          </a:p>
+          <a:p>
+            <a:pPr>
+              <a:spcAft>
+                <a:spcPts val="0"/>
+              </a:spcAft>
+            </a:pPr>
+            <a:r>
+              <a:rPr sz="1300">
+                <a:solidFill>
+                  <a:srgbClr val="6D8C97"/>
+                </a:solidFill>
+                <a:latin typeface="Consolas"/>
+              </a:rPr>
+              <a:t>  30  </a:t>
+            </a:r>
+            <a:r>
+              <a:rPr sz="1300">
+                <a:solidFill>
+                  <a:srgbClr val="6D8C97"/>
+                </a:solidFill>
+                <a:latin typeface="Consolas"/>
+              </a:rPr>
+              <a:t>// The smallest useful request: what models does this server have?</a:t>
+            </a:r>
+          </a:p>
+          <a:p>
+            <a:pPr>
+              <a:spcAft>
+                <a:spcPts val="0"/>
+              </a:spcAft>
+            </a:pPr>
+            <a:r>
+              <a:rPr sz="1300">
+                <a:solidFill>
+                  <a:srgbClr val="6D8C97"/>
+                </a:solidFill>
+                <a:latin typeface="Consolas"/>
+              </a:rPr>
+              <a:t>  31  </a:t>
+            </a:r>
+            <a:r>
+              <a:rPr sz="1300">
+                <a:solidFill>
+                  <a:srgbClr val="6D8C97"/>
+                </a:solidFill>
+                <a:latin typeface="Consolas"/>
+              </a:rPr>
+              <a:t>// 'async' means this function does something slow and can be waited for.</a:t>
+            </a:r>
+          </a:p>
+          <a:p>
+            <a:pPr>
+              <a:spcAft>
+                <a:spcPts val="0"/>
+              </a:spcAft>
+            </a:pPr>
+            <a:r>
+              <a:rPr sz="1300">
+                <a:solidFill>
+                  <a:srgbClr val="6D8C97"/>
+                </a:solidFill>
+                <a:latin typeface="Consolas"/>
+              </a:rPr>
+              <a:t>  32  </a:t>
+            </a:r>
+            <a:r>
+              <a:rPr sz="1300">
+                <a:solidFill>
+                  <a:srgbClr val="6D8C97"/>
+                </a:solidFill>
+                <a:latin typeface="Consolas"/>
+              </a:rPr>
+              <a:t>async function listModels() {</a:t>
+            </a:r>
+          </a:p>
+          <a:p>
+            <a:pPr>
+              <a:spcAft>
+                <a:spcPts val="0"/>
+              </a:spcAft>
+            </a:pPr>
+            <a:r>
+              <a:rPr sz="1300">
+                <a:solidFill>
+                  <a:srgbClr val="6D8C97"/>
+                </a:solidFill>
+                <a:latin typeface="Consolas"/>
+              </a:rPr>
+              <a:t>  33  </a:t>
+            </a:r>
+            <a:r>
+              <a:rPr sz="1300">
+                <a:solidFill>
+                  <a:srgbClr val="6D8C97"/>
+                </a:solidFill>
+                <a:latin typeface="Consolas"/>
+              </a:rPr>
+              <a:t>  const res = await fetch(AI_BASE + '/v1/models', {</a:t>
+            </a:r>
+          </a:p>
+          <a:p>
+            <a:pPr>
+              <a:spcAft>
+                <a:spcPts val="0"/>
+              </a:spcAft>
+            </a:pPr>
+            <a:r>
+              <a:rPr sz="1300">
+                <a:solidFill>
+                  <a:srgbClr val="6D8C97"/>
+                </a:solidFill>
+                <a:latin typeface="Consolas"/>
+              </a:rPr>
+              <a:t>  34  </a:t>
+            </a:r>
+            <a:r>
+              <a:rPr sz="1300">
+                <a:solidFill>
+                  <a:srgbClr val="6D8C97"/>
+                </a:solidFill>
+                <a:latin typeface="Consolas"/>
+              </a:rPr>
+              <a:t>    headers: { 'Authorization': 'Bearer ' + API_KEY }</a:t>
+            </a:r>
+          </a:p>
+          <a:p>
+            <a:pPr>
+              <a:spcAft>
+                <a:spcPts val="0"/>
+              </a:spcAft>
+            </a:pPr>
+            <a:r>
+              <a:rPr sz="1300">
+                <a:solidFill>
+                  <a:srgbClr val="6D8C97"/>
+                </a:solidFill>
+                <a:latin typeface="Consolas"/>
+              </a:rPr>
+              <a:t>  35  </a:t>
+            </a:r>
+            <a:r>
+              <a:rPr sz="1300">
+                <a:solidFill>
+                  <a:srgbClr val="6D8C97"/>
+                </a:solidFill>
+                <a:latin typeface="Consolas"/>
+              </a:rPr>
+              <a:t>  });</a:t>
+            </a:r>
+          </a:p>
+          <a:p>
+            <a:pPr>
+              <a:spcAft>
+                <a:spcPts val="0"/>
+              </a:spcAft>
+            </a:pPr>
+            <a:r>
+              <a:rPr sz="1300">
+                <a:solidFill>
+                  <a:srgbClr val="6D8C97"/>
+                </a:solidFill>
+                <a:latin typeface="Consolas"/>
+              </a:rPr>
+              <a:t>  36  </a:t>
+            </a:r>
+            <a:r>
+              <a:rPr sz="1300">
+                <a:solidFill>
+                  <a:srgbClr val="6D8C97"/>
+                </a:solidFill>
+                <a:latin typeface="Consolas"/>
+              </a:rPr>
+              <a:t>  const data = await res.json();   // the answer arrives as text; this reads it</a:t>
+            </a:r>
+          </a:p>
+          <a:p>
+            <a:pPr>
+              <a:spcAft>
+                <a:spcPts val="0"/>
+              </a:spcAft>
+            </a:pPr>
+            <a:r>
+              <a:rPr sz="1300">
+                <a:solidFill>
+                  <a:srgbClr val="6D8C97"/>
+                </a:solidFill>
+                <a:latin typeface="Consolas"/>
+              </a:rPr>
+              <a:t>  37  </a:t>
+            </a:r>
+            <a:r>
+              <a:rPr sz="1300">
+                <a:solidFill>
+                  <a:srgbClr val="6D8C97"/>
+                </a:solidFill>
+                <a:latin typeface="Consolas"/>
+              </a:rPr>
+              <a:t>  console.log('The server offers:', data.data);</a:t>
+            </a:r>
+          </a:p>
+          <a:p>
+            <a:pPr>
+              <a:spcAft>
+                <a:spcPts val="0"/>
+              </a:spcAft>
+            </a:pPr>
+            <a:r>
+              <a:rPr sz="1300">
+                <a:solidFill>
+                  <a:srgbClr val="6D8C97"/>
+                </a:solidFill>
+                <a:latin typeface="Consolas"/>
+              </a:rPr>
+              <a:t>  38  </a:t>
+            </a:r>
+            <a:r>
+              <a:rPr sz="1300">
+                <a:solidFill>
+                  <a:srgbClr val="6D8C97"/>
+                </a:solidFill>
+                <a:latin typeface="Consolas"/>
+              </a:rPr>
+              <a:t>}</a:t>
+            </a:r>
+          </a:p>
+          <a:p>
+            <a:pPr>
+              <a:spcAft>
+                <a:spcPts val="0"/>
+              </a:spcAft>
+            </a:pPr>
+            <a:r>
+              <a:rPr sz="1300">
+                <a:solidFill>
+                  <a:srgbClr val="6D8C97"/>
+                </a:solidFill>
+                <a:latin typeface="Consolas"/>
+              </a:rPr>
+              <a:t>   -  </a:t>
+            </a:r>
+            <a:r>
+              <a:rPr sz="1300" strike="sngStrike">
+                <a:solidFill>
+                  <a:srgbClr val="F3928B"/>
+                </a:solidFill>
+                <a:latin typeface="Consolas"/>
+              </a:rPr>
+              <a:t>listModels();</a:t>
+            </a:r>
+          </a:p>
+        </p:txBody>
+      </p:sp>
+      <p:sp>
+        <p:nvSpPr>
+          <p:cNvPr id="4" name="TextBox 3"/>
+          <p:cNvSpPr txBox="1"/>
+          <p:nvPr/>
+        </p:nvSpPr>
+        <p:spPr>
+          <a:xfrm>
+            <a:off x="548640" y="5623560"/>
+            <a:ext cx="11064240" cy="1051560"/>
+          </a:xfrm>
+          <a:prstGeom prst="rect">
+            <a:avLst/>
+          </a:prstGeom>
+          <a:noFill/>
+        </p:spPr>
+        <p:txBody>
           <a:bodyPr wrap="square">
             <a:spAutoFit/>
           </a:bodyPr>
           <a:lstStyle/>
           <a:p>
-            <a:pPr>
-              <a:spcAft>
-                <a:spcPts val="1400"/>
-              </a:spcAft>
-            </a:pPr>
-            <a:r>
-              <a:rPr sz="2800">
-                <a:solidFill>
-                  <a:srgbClr val="01AEFD"/>
-                </a:solidFill>
-              </a:rPr>
-              <a:t>Make it answer you</a:t>
-            </a:r>
-          </a:p>
-          <a:p>
-            <a:pPr>
-              <a:spcAft>
-                <a:spcPts val="1400"/>
-              </a:spcAft>
-            </a:pPr>
-            <a:r>
-              <a:rPr sz="2400">
-                <a:solidFill>
-                  <a:srgbClr val="1F2A37"/>
-                </a:solidFill>
-              </a:rPr>
-              <a:t>• Ask it something only you would ask</a:t>
-            </a:r>
-          </a:p>
-          <a:p>
-            <a:pPr>
-              <a:spcAft>
-                <a:spcPts val="1400"/>
-              </a:spcAft>
-            </a:pPr>
-            <a:r>
-              <a:rPr sz="2400">
-                <a:solidFill>
-                  <a:srgbClr val="1F2A37"/>
-                </a:solidFill>
-              </a:rPr>
-              <a:t>• Check whether the answer is actually true</a:t>
+            <a:r>
+              <a:rPr sz="2000">
+                <a:solidFill>
+                  <a:srgbClr val="DCECEF"/>
+                </a:solidFill>
+              </a:rPr>
+              <a:t>Delete this line. askAI does the asking now, so the old test call is no longer needed - your file should have no listModels() call left.</a:t>
             </a:r>
           </a:p>
         </p:txBody>
@@ -14068,6 +14073,263 @@
                 </a:solidFill>
               </a:rPr>
               <a:t>• Content-Type says what is inside</a:t>
+            </a:r>
+          </a:p>
+        </p:txBody>
+      </p:sp>
+    </p:spTree>
+  </p:cSld>
+  <p:clrMapOvr>
+    <a:masterClrMapping/>
+  </p:clrMapOvr>
+</p:sld>
+</file>
+
+<file path=ppt/slides/slide40.xml><?xml version="1.0" encoding="utf-8"?>
+<p:sld xmlns:a="http://schemas.openxmlformats.org/drawingml/2006/main" xmlns:p="http://schemas.openxmlformats.org/presentationml/2006/main" xmlns:r="http://schemas.openxmlformats.org/officeDocument/2006/relationships">
+  <p:cSld>
+    <p:spTree>
+      <p:nvGrpSpPr>
+        <p:cNvPr id="1" name=""/>
+        <p:cNvGrpSpPr/>
+        <p:nvPr/>
+      </p:nvGrpSpPr>
+      <p:grpSpPr/>
+      <p:sp>
+        <p:nvSpPr>
+          <p:cNvPr id="2" name="Title 1"/>
+          <p:cNvSpPr>
+            <a:spLocks noGrp="1"/>
+          </p:cNvSpPr>
+          <p:nvPr>
+            <p:ph type="title"/>
+          </p:nvPr>
+        </p:nvSpPr>
+        <p:spPr/>
+        <p:txBody>
+          <a:bodyPr/>
+          <a:lstStyle/>
+          <a:p>
+            <a:r>
+              <a:rPr sz="3800" b="1">
+                <a:solidFill>
+                  <a:srgbClr val="1F2A37"/>
+                </a:solidFill>
+              </a:rPr>
+              <a:t>Checkpoint: a real answer</a:t>
+            </a:r>
+          </a:p>
+        </p:txBody>
+      </p:sp>
+      <p:sp>
+        <p:nvSpPr>
+          <p:cNvPr id="3" name="TextBox 2"/>
+          <p:cNvSpPr txBox="1"/>
+          <p:nvPr/>
+        </p:nvSpPr>
+        <p:spPr>
+          <a:xfrm>
+            <a:off x="868680" y="502920"/>
+            <a:ext cx="5486400" cy="457200"/>
+          </a:xfrm>
+          <a:prstGeom prst="rect">
+            <a:avLst/>
+          </a:prstGeom>
+          <a:noFill/>
+        </p:spPr>
+        <p:txBody>
+          <a:bodyPr wrap="none">
+            <a:spAutoFit/>
+          </a:bodyPr>
+          <a:lstStyle/>
+          <a:p>
+            <a:r>
+              <a:rPr sz="1500" b="1">
+                <a:solidFill>
+                  <a:srgbClr val="01AEFD"/>
+                </a:solidFill>
+              </a:rPr>
+              <a:t>CHECKPOINT - RUN IT</a:t>
+            </a:r>
+          </a:p>
+        </p:txBody>
+      </p:sp>
+      <p:sp>
+        <p:nvSpPr>
+          <p:cNvPr id="4" name="TextBox 3"/>
+          <p:cNvSpPr txBox="1"/>
+          <p:nvPr/>
+        </p:nvSpPr>
+        <p:spPr>
+          <a:xfrm>
+            <a:off x="822960" y="1828800"/>
+            <a:ext cx="10515600" cy="4206240"/>
+          </a:xfrm>
+          <a:prstGeom prst="rect">
+            <a:avLst/>
+          </a:prstGeom>
+          <a:noFill/>
+        </p:spPr>
+        <p:txBody>
+          <a:bodyPr wrap="square">
+            <a:spAutoFit/>
+          </a:bodyPr>
+          <a:lstStyle/>
+          <a:p>
+            <a:pPr>
+              <a:spcAft>
+                <a:spcPts val="1400"/>
+              </a:spcAft>
+            </a:pPr>
+            <a:r>
+              <a:rPr sz="2800">
+                <a:solidFill>
+                  <a:srgbClr val="01AEFD"/>
+                </a:solidFill>
+              </a:rPr>
+              <a:t>Press Run, ask a question and press Send. After a moment the companion replies for real. This needs your own key and the school network; the preview here shows the interface.</a:t>
+            </a:r>
+          </a:p>
+          <a:p>
+            <a:pPr>
+              <a:spcAft>
+                <a:spcPts val="1400"/>
+              </a:spcAft>
+            </a:pPr>
+            <a:r>
+              <a:rPr sz="2400">
+                <a:solidFill>
+                  <a:srgbClr val="1F2A37"/>
+                </a:solidFill>
+              </a:rPr>
+              <a:t>• Run it in the classroom, or press Show the output in the web deck.</a:t>
+            </a:r>
+          </a:p>
+          <a:p>
+            <a:pPr>
+              <a:spcAft>
+                <a:spcPts val="1400"/>
+              </a:spcAft>
+            </a:pPr>
+            <a:r>
+              <a:rPr sz="2400">
+                <a:solidFill>
+                  <a:srgbClr val="1F2A37"/>
+                </a:solidFill>
+              </a:rPr>
+              <a:t>• Everyone's screen should match this.</a:t>
+            </a:r>
+          </a:p>
+        </p:txBody>
+      </p:sp>
+    </p:spTree>
+  </p:cSld>
+  <p:clrMapOvr>
+    <a:masterClrMapping/>
+  </p:clrMapOvr>
+</p:sld>
+</file>
+
+<file path=ppt/slides/slide41.xml><?xml version="1.0" encoding="utf-8"?>
+<p:sld xmlns:a="http://schemas.openxmlformats.org/drawingml/2006/main" xmlns:p="http://schemas.openxmlformats.org/presentationml/2006/main" xmlns:r="http://schemas.openxmlformats.org/officeDocument/2006/relationships">
+  <p:cSld>
+    <p:spTree>
+      <p:nvGrpSpPr>
+        <p:cNvPr id="1" name=""/>
+        <p:cNvGrpSpPr/>
+        <p:nvPr/>
+      </p:nvGrpSpPr>
+      <p:grpSpPr/>
+      <p:sp>
+        <p:nvSpPr>
+          <p:cNvPr id="2" name="Title 1"/>
+          <p:cNvSpPr>
+            <a:spLocks noGrp="1"/>
+          </p:cNvSpPr>
+          <p:nvPr>
+            <p:ph type="title"/>
+          </p:nvPr>
+        </p:nvSpPr>
+        <p:spPr/>
+        <p:txBody>
+          <a:bodyPr/>
+          <a:lstStyle/>
+          <a:p>
+            <a:r>
+              <a:rPr sz="3800" b="1">
+                <a:solidFill>
+                  <a:srgbClr val="1F2A37"/>
+                </a:solidFill>
+              </a:rPr>
+              <a:t>Your turn</a:t>
+            </a:r>
+          </a:p>
+        </p:txBody>
+      </p:sp>
+      <p:sp>
+        <p:nvSpPr>
+          <p:cNvPr id="3" name="TextBox 2"/>
+          <p:cNvSpPr txBox="1"/>
+          <p:nvPr/>
+        </p:nvSpPr>
+        <p:spPr>
+          <a:xfrm>
+            <a:off x="822960" y="1828800"/>
+            <a:ext cx="10515600" cy="4206240"/>
+          </a:xfrm>
+          <a:prstGeom prst="rect">
+            <a:avLst/>
+          </a:prstGeom>
+          <a:noFill/>
+        </p:spPr>
+        <p:txBody>
+          <a:bodyPr wrap="square">
+            <a:spAutoFit/>
+          </a:bodyPr>
+          <a:lstStyle/>
+          <a:p>
+            <a:pPr>
+              <a:spcAft>
+                <a:spcPts val="1400"/>
+              </a:spcAft>
+            </a:pPr>
+            <a:r>
+              <a:rPr sz="2800">
+                <a:solidFill>
+                  <a:srgbClr val="01AEFD"/>
+                </a:solidFill>
+              </a:rPr>
+              <a:t>Make it answer you</a:t>
+            </a:r>
+          </a:p>
+          <a:p>
+            <a:pPr>
+              <a:spcAft>
+                <a:spcPts val="1400"/>
+              </a:spcAft>
+            </a:pPr>
+            <a:r>
+              <a:rPr sz="2400">
+                <a:solidFill>
+                  <a:srgbClr val="1F2A37"/>
+                </a:solidFill>
+              </a:rPr>
+              <a:t>• Ask it something only you would ask</a:t>
+            </a:r>
+          </a:p>
+          <a:p>
+            <a:pPr>
+              <a:spcAft>
+                <a:spcPts val="1400"/>
+              </a:spcAft>
+            </a:pPr>
+            <a:r>
+              <a:rPr sz="2400">
+                <a:solidFill>
+                  <a:srgbClr val="1F2A37"/>
+                </a:solidFill>
+              </a:rPr>
+              <a:t>• Check whether the answer is actually true</a:t>
             </a:r>
           </a:p>
         </p:txBody>

--- a/ai101/slides/week-04.pptx
+++ b/ai101/slides/week-04.pptx
@@ -46,6 +46,10 @@
     <p:sldId id="294" r:id="rId45"/>
     <p:sldId id="295" r:id="rId46"/>
     <p:sldId id="296" r:id="rId47"/>
+    <p:sldId id="297" r:id="rId48"/>
+    <p:sldId id="298" r:id="rId49"/>
+    <p:sldId id="299" r:id="rId50"/>
+    <p:sldId id="300" r:id="rId51"/>
   </p:sldIdLst>
   <p:sldSz cx="12191695" cy="6858000" type="screen4x3"/>
   <p:notesSz cx="6858000" cy="9144000"/>
@@ -11049,7 +11053,7 @@
                   <a:srgbClr val="01AEFD"/>
                 </a:solidFill>
               </a:rPr>
-              <a:t>Type this into script.js   -   line 60</a:t>
+              <a:t>In script.js   -   replace a line</a:t>
             </a:r>
           </a:p>
         </p:txBody>
@@ -11113,16 +11117,16 @@
                 </a:solidFill>
                 <a:latin typeface="Consolas"/>
               </a:rPr>
-              <a:t>  60  </a:t>
-            </a:r>
-            <a:r>
-              <a:rPr sz="1800">
-                <a:solidFill>
-                  <a:srgbClr val="7FE0A0"/>
-                </a:solidFill>
-                <a:latin typeface="Consolas"/>
-              </a:rPr>
-              <a:t>// The browser calls this when the form is submitted.</a:t>
+              <a:t>   -  </a:t>
+            </a:r>
+            <a:r>
+              <a:rPr sz="1800" strike="sngStrike">
+                <a:solidFill>
+                  <a:srgbClr val="F3928B"/>
+                </a:solidFill>
+                <a:latin typeface="Consolas"/>
+              </a:rPr>
+              <a:t>// In PixelPad your loop() checked 'was a key pressed?' every frame. Here you</a:t>
             </a:r>
           </a:p>
         </p:txBody>
@@ -11155,7 +11159,7 @@
                   <a:srgbClr val="DCECEF"/>
                 </a:solidFill>
               </a:rPr>
-              <a:t>A comment: the browser calls this when the form is submitted.</a:t>
+              <a:t>This line changes - take the old one out; the new version is next.</a:t>
             </a:r>
           </a:p>
         </p:txBody>
@@ -11214,7 +11218,7 @@
                   <a:srgbClr val="01AEFD"/>
                 </a:solidFill>
               </a:rPr>
-              <a:t>Type this into script.js   -   line 61</a:t>
+              <a:t>In script.js   -   replace a line</a:t>
             </a:r>
           </a:p>
         </p:txBody>
@@ -11278,41 +11282,16 @@
                 </a:solidFill>
                 <a:latin typeface="Consolas"/>
               </a:rPr>
-              <a:t>  60  </a:t>
-            </a:r>
-            <a:r>
-              <a:rPr sz="1800">
-                <a:solidFill>
-                  <a:srgbClr val="6D8C97"/>
-                </a:solidFill>
-                <a:latin typeface="Consolas"/>
-              </a:rPr>
-              <a:t>// The browser calls this when the form is submitted.</a:t>
-            </a:r>
-          </a:p>
-          <a:p>
-            <a:pPr>
-              <a:spcAft>
-                <a:spcPts val="0"/>
-              </a:spcAft>
-            </a:pPr>
-            <a:r>
-              <a:rPr sz="1800">
-                <a:solidFill>
-                  <a:srgbClr val="6D8C97"/>
-                </a:solidFill>
-                <a:latin typeface="Consolas"/>
-              </a:rPr>
-              <a:t>  61  </a:t>
-            </a:r>
-            <a:r>
-              <a:rPr sz="1800">
-                <a:solidFill>
-                  <a:srgbClr val="7FE0A0"/>
-                </a:solidFill>
-                <a:latin typeface="Consolas"/>
-              </a:rPr>
-              <a:t>composer.addEventListener('submit', async function (event) {</a:t>
+              <a:t>   -  </a:t>
+            </a:r>
+            <a:r>
+              <a:rPr sz="1800" strike="sngStrike">
+                <a:solidFill>
+                  <a:srgbClr val="F3928B"/>
+                </a:solidFill>
+                <a:latin typeface="Consolas"/>
+              </a:rPr>
+              <a:t>// leave a note: when this form is submitted, run this. The browser waits.</a:t>
             </a:r>
           </a:p>
         </p:txBody>
@@ -11345,7 +11324,7 @@
                   <a:srgbClr val="DCECEF"/>
                 </a:solidFill>
               </a:rPr>
-              <a:t>Add async so we are allowed to await the slow AI call inside.</a:t>
+              <a:t>This line changes - take the old one out; the new version is next.</a:t>
             </a:r>
           </a:p>
         </p:txBody>
@@ -11404,7 +11383,7 @@
                   <a:srgbClr val="01AEFD"/>
                 </a:solidFill>
               </a:rPr>
-              <a:t>Type this into script.js   -   line 67</a:t>
+              <a:t>In script.js   -   replace a line</a:t>
             </a:r>
           </a:p>
         </p:txBody>
@@ -11468,191 +11447,16 @@
                 </a:solidFill>
                 <a:latin typeface="Consolas"/>
               </a:rPr>
-              <a:t>  60  </a:t>
-            </a:r>
-            <a:r>
-              <a:rPr sz="1800">
-                <a:solidFill>
-                  <a:srgbClr val="6D8C97"/>
-                </a:solidFill>
-                <a:latin typeface="Consolas"/>
-              </a:rPr>
-              <a:t>// The browser calls this when the form is submitted.</a:t>
-            </a:r>
-          </a:p>
-          <a:p>
-            <a:pPr>
-              <a:spcAft>
-                <a:spcPts val="0"/>
-              </a:spcAft>
-            </a:pPr>
-            <a:r>
-              <a:rPr sz="1800">
-                <a:solidFill>
-                  <a:srgbClr val="6D8C97"/>
-                </a:solidFill>
-                <a:latin typeface="Consolas"/>
-              </a:rPr>
-              <a:t>  61  </a:t>
-            </a:r>
-            <a:r>
-              <a:rPr sz="1800">
-                <a:solidFill>
-                  <a:srgbClr val="6D8C97"/>
-                </a:solidFill>
-                <a:latin typeface="Consolas"/>
-              </a:rPr>
-              <a:t>composer.addEventListener('submit', async function (event) {</a:t>
-            </a:r>
-          </a:p>
-          <a:p>
-            <a:pPr>
-              <a:spcAft>
-                <a:spcPts val="0"/>
-              </a:spcAft>
-            </a:pPr>
-            <a:r>
-              <a:rPr sz="1800">
-                <a:solidFill>
-                  <a:srgbClr val="6D8C97"/>
-                </a:solidFill>
-                <a:latin typeface="Consolas"/>
-              </a:rPr>
-              <a:t>  62  </a:t>
-            </a:r>
-            <a:r>
-              <a:rPr sz="1800">
-                <a:solidFill>
-                  <a:srgbClr val="6D8C97"/>
-                </a:solidFill>
-                <a:latin typeface="Consolas"/>
-              </a:rPr>
-              <a:t>  event.preventDefault();</a:t>
-            </a:r>
-          </a:p>
-          <a:p>
-            <a:pPr>
-              <a:spcAft>
-                <a:spcPts val="0"/>
-              </a:spcAft>
-            </a:pPr>
-            <a:r>
-              <a:rPr sz="1800">
-                <a:solidFill>
-                  <a:srgbClr val="6D8C97"/>
-                </a:solidFill>
-                <a:latin typeface="Consolas"/>
-              </a:rPr>
-              <a:t>  63  </a:t>
-            </a:r>
-            <a:r>
-              <a:rPr sz="1800">
-                <a:solidFill>
-                  <a:srgbClr val="6D8C97"/>
-                </a:solidFill>
-                <a:latin typeface="Consolas"/>
-              </a:rPr>
-              <a:t>  const text = promptBox.value.trim();</a:t>
-            </a:r>
-          </a:p>
-          <a:p>
-            <a:pPr>
-              <a:spcAft>
-                <a:spcPts val="0"/>
-              </a:spcAft>
-            </a:pPr>
-            <a:r>
-              <a:rPr sz="1800">
-                <a:solidFill>
-                  <a:srgbClr val="6D8C97"/>
-                </a:solidFill>
-                <a:latin typeface="Consolas"/>
-              </a:rPr>
-              <a:t>  64  </a:t>
-            </a:r>
-            <a:r>
-              <a:rPr sz="1800">
-                <a:solidFill>
-                  <a:srgbClr val="6D8C97"/>
-                </a:solidFill>
-                <a:latin typeface="Consolas"/>
-              </a:rPr>
-              <a:t>  if (text === '') { return; }</a:t>
-            </a:r>
-          </a:p>
-          <a:p>
-            <a:pPr>
-              <a:spcAft>
-                <a:spcPts val="0"/>
-              </a:spcAft>
-            </a:pPr>
-            <a:r>
-              <a:rPr sz="1800">
-                <a:solidFill>
-                  <a:srgbClr val="6D8C97"/>
-                </a:solidFill>
-                <a:latin typeface="Consolas"/>
-              </a:rPr>
-              <a:t>  65  </a:t>
-            </a:r>
-            <a:r>
-              <a:rPr sz="1800">
-                <a:solidFill>
-                  <a:srgbClr val="6D8C97"/>
-                </a:solidFill>
-                <a:latin typeface="Consolas"/>
-              </a:rPr>
-              <a:t>  promptBox.value = '';</a:t>
-            </a:r>
-          </a:p>
-          <a:p>
-            <a:pPr>
-              <a:spcAft>
-                <a:spcPts val="0"/>
-              </a:spcAft>
-            </a:pPr>
-            <a:r>
-              <a:rPr sz="1800">
-                <a:solidFill>
-                  <a:srgbClr val="6D8C97"/>
-                </a:solidFill>
-                <a:latin typeface="Consolas"/>
-              </a:rPr>
-              <a:t>  66  </a:t>
-            </a:r>
-            <a:r>
-              <a:rPr sz="1800">
-                <a:solidFill>
-                  <a:srgbClr val="6D8C97"/>
-                </a:solidFill>
-                <a:latin typeface="Consolas"/>
-              </a:rPr>
-              <a:t>  addLine('You', text);</a:t>
-            </a:r>
-          </a:p>
-          <a:p>
-            <a:pPr>
-              <a:spcAft>
-                <a:spcPts val="0"/>
-              </a:spcAft>
-            </a:pPr>
-            <a:r>
-              <a:rPr sz="1800">
-                <a:solidFill>
-                  <a:srgbClr val="6D8C97"/>
-                </a:solidFill>
-                <a:latin typeface="Consolas"/>
-              </a:rPr>
-              <a:t>  67  </a:t>
-            </a:r>
-            <a:r>
-              <a:rPr sz="1800">
-                <a:solidFill>
-                  <a:srgbClr val="7FE0A0"/>
-                </a:solidFill>
-                <a:latin typeface="Consolas"/>
-              </a:rPr>
-              <a:t>  addLine('Companion', 'thinking...');</a:t>
+              <a:t>   -  </a:t>
+            </a:r>
+            <a:r>
+              <a:rPr sz="1800" strike="sngStrike">
+                <a:solidFill>
+                  <a:srgbClr val="F3928B"/>
+                </a:solidFill>
+                <a:latin typeface="Consolas"/>
+              </a:rPr>
+              <a:t>composer.addEventListener('submit', function (event) {</a:t>
             </a:r>
           </a:p>
         </p:txBody>
@@ -11685,7 +11489,7 @@
                   <a:srgbClr val="DCECEF"/>
                 </a:solidFill>
               </a:rPr>
-              <a:t>Change the pretend reply to a 'thinking...' line while we wait.</a:t>
+              <a:t>This line changes - take the old one out; the new version is next.</a:t>
             </a:r>
           </a:p>
         </p:txBody>
@@ -11744,7 +11548,7 @@
                   <a:srgbClr val="01AEFD"/>
                 </a:solidFill>
               </a:rPr>
-              <a:t>Type this into script.js   -   line 68</a:t>
+              <a:t>Type this into script.js   -   line 60</a:t>
             </a:r>
           </a:p>
         </p:txBody>
@@ -11813,211 +11617,11 @@
             <a:r>
               <a:rPr sz="1800">
                 <a:solidFill>
-                  <a:srgbClr val="6D8C97"/>
+                  <a:srgbClr val="7FE0A0"/>
                 </a:solidFill>
                 <a:latin typeface="Consolas"/>
               </a:rPr>
               <a:t>// The browser calls this when the form is submitted.</a:t>
-            </a:r>
-          </a:p>
-          <a:p>
-            <a:pPr>
-              <a:spcAft>
-                <a:spcPts val="0"/>
-              </a:spcAft>
-            </a:pPr>
-            <a:r>
-              <a:rPr sz="1800">
-                <a:solidFill>
-                  <a:srgbClr val="6D8C97"/>
-                </a:solidFill>
-                <a:latin typeface="Consolas"/>
-              </a:rPr>
-              <a:t>  61  </a:t>
-            </a:r>
-            <a:r>
-              <a:rPr sz="1800">
-                <a:solidFill>
-                  <a:srgbClr val="6D8C97"/>
-                </a:solidFill>
-                <a:latin typeface="Consolas"/>
-              </a:rPr>
-              <a:t>composer.addEventListener('submit', async function (event) {</a:t>
-            </a:r>
-          </a:p>
-          <a:p>
-            <a:pPr>
-              <a:spcAft>
-                <a:spcPts val="0"/>
-              </a:spcAft>
-            </a:pPr>
-            <a:r>
-              <a:rPr sz="1800">
-                <a:solidFill>
-                  <a:srgbClr val="6D8C97"/>
-                </a:solidFill>
-                <a:latin typeface="Consolas"/>
-              </a:rPr>
-              <a:t>  62  </a:t>
-            </a:r>
-            <a:r>
-              <a:rPr sz="1800">
-                <a:solidFill>
-                  <a:srgbClr val="6D8C97"/>
-                </a:solidFill>
-                <a:latin typeface="Consolas"/>
-              </a:rPr>
-              <a:t>  event.preventDefault();</a:t>
-            </a:r>
-          </a:p>
-          <a:p>
-            <a:pPr>
-              <a:spcAft>
-                <a:spcPts val="0"/>
-              </a:spcAft>
-            </a:pPr>
-            <a:r>
-              <a:rPr sz="1800">
-                <a:solidFill>
-                  <a:srgbClr val="6D8C97"/>
-                </a:solidFill>
-                <a:latin typeface="Consolas"/>
-              </a:rPr>
-              <a:t>  63  </a:t>
-            </a:r>
-            <a:r>
-              <a:rPr sz="1800">
-                <a:solidFill>
-                  <a:srgbClr val="6D8C97"/>
-                </a:solidFill>
-                <a:latin typeface="Consolas"/>
-              </a:rPr>
-              <a:t>  const text = promptBox.value.trim();</a:t>
-            </a:r>
-          </a:p>
-          <a:p>
-            <a:pPr>
-              <a:spcAft>
-                <a:spcPts val="0"/>
-              </a:spcAft>
-            </a:pPr>
-            <a:r>
-              <a:rPr sz="1800">
-                <a:solidFill>
-                  <a:srgbClr val="6D8C97"/>
-                </a:solidFill>
-                <a:latin typeface="Consolas"/>
-              </a:rPr>
-              <a:t>  64  </a:t>
-            </a:r>
-            <a:r>
-              <a:rPr sz="1800">
-                <a:solidFill>
-                  <a:srgbClr val="6D8C97"/>
-                </a:solidFill>
-                <a:latin typeface="Consolas"/>
-              </a:rPr>
-              <a:t>  if (text === '') { return; }</a:t>
-            </a:r>
-          </a:p>
-          <a:p>
-            <a:pPr>
-              <a:spcAft>
-                <a:spcPts val="0"/>
-              </a:spcAft>
-            </a:pPr>
-            <a:r>
-              <a:rPr sz="1800">
-                <a:solidFill>
-                  <a:srgbClr val="6D8C97"/>
-                </a:solidFill>
-                <a:latin typeface="Consolas"/>
-              </a:rPr>
-              <a:t>  65  </a:t>
-            </a:r>
-            <a:r>
-              <a:rPr sz="1800">
-                <a:solidFill>
-                  <a:srgbClr val="6D8C97"/>
-                </a:solidFill>
-                <a:latin typeface="Consolas"/>
-              </a:rPr>
-              <a:t>  promptBox.value = '';</a:t>
-            </a:r>
-          </a:p>
-          <a:p>
-            <a:pPr>
-              <a:spcAft>
-                <a:spcPts val="0"/>
-              </a:spcAft>
-            </a:pPr>
-            <a:r>
-              <a:rPr sz="1800">
-                <a:solidFill>
-                  <a:srgbClr val="6D8C97"/>
-                </a:solidFill>
-                <a:latin typeface="Consolas"/>
-              </a:rPr>
-              <a:t>  66  </a:t>
-            </a:r>
-            <a:r>
-              <a:rPr sz="1800">
-                <a:solidFill>
-                  <a:srgbClr val="6D8C97"/>
-                </a:solidFill>
-                <a:latin typeface="Consolas"/>
-              </a:rPr>
-              <a:t>  addLine('You', text);</a:t>
-            </a:r>
-          </a:p>
-          <a:p>
-            <a:pPr>
-              <a:spcAft>
-                <a:spcPts val="0"/>
-              </a:spcAft>
-            </a:pPr>
-            <a:r>
-              <a:rPr sz="1800">
-                <a:solidFill>
-                  <a:srgbClr val="6D8C97"/>
-                </a:solidFill>
-                <a:latin typeface="Consolas"/>
-              </a:rPr>
-              <a:t>  67  </a:t>
-            </a:r>
-            <a:r>
-              <a:rPr sz="1800">
-                <a:solidFill>
-                  <a:srgbClr val="6D8C97"/>
-                </a:solidFill>
-                <a:latin typeface="Consolas"/>
-              </a:rPr>
-              <a:t>  addLine('Companion', 'thinking...');</a:t>
-            </a:r>
-          </a:p>
-          <a:p>
-            <a:pPr>
-              <a:spcAft>
-                <a:spcPts val="0"/>
-              </a:spcAft>
-            </a:pPr>
-            <a:r>
-              <a:rPr sz="1800">
-                <a:solidFill>
-                  <a:srgbClr val="6D8C97"/>
-                </a:solidFill>
-                <a:latin typeface="Consolas"/>
-              </a:rPr>
-              <a:t>  68  </a:t>
-            </a:r>
-            <a:r>
-              <a:rPr sz="1800">
-                <a:solidFill>
-                  <a:srgbClr val="7FE0A0"/>
-                </a:solidFill>
-                <a:latin typeface="Consolas"/>
-              </a:rPr>
-              <a:t>  const reply = await askAI(text);       // this is the slow bit</a:t>
             </a:r>
           </a:p>
         </p:txBody>
@@ -12050,7 +11654,7 @@
                   <a:srgbClr val="DCECEF"/>
                 </a:solidFill>
               </a:rPr>
-              <a:t>await askAI(text): the slow bit - ask the AI and wait for the answer.</a:t>
+              <a:t>A comment: the browser calls this when the form is submitted.</a:t>
             </a:r>
           </a:p>
         </p:txBody>
@@ -12066,6 +11670,14 @@
 <file path=ppt/slides/slide34.xml><?xml version="1.0" encoding="utf-8"?>
 <p:sld xmlns:a="http://schemas.openxmlformats.org/drawingml/2006/main" xmlns:p="http://schemas.openxmlformats.org/presentationml/2006/main" xmlns:r="http://schemas.openxmlformats.org/officeDocument/2006/relationships">
   <p:cSld>
+    <p:bg>
+      <p:bgPr>
+        <a:solidFill>
+          <a:srgbClr val="102127"/>
+        </a:solidFill>
+        <a:effectLst/>
+      </p:bgPr>
+    </p:bg>
     <p:spTree>
       <p:nvGrpSpPr>
         <p:cNvPr id="1" name=""/>
@@ -12075,40 +11687,14 @@
       <p:grpSpPr/>
       <p:sp>
         <p:nvSpPr>
-          <p:cNvPr id="2" name="Title 1"/>
-          <p:cNvSpPr>
-            <a:spLocks noGrp="1"/>
-          </p:cNvSpPr>
-          <p:nvPr>
-            <p:ph type="title"/>
-          </p:nvPr>
-        </p:nvSpPr>
-        <p:spPr/>
-        <p:txBody>
-          <a:bodyPr/>
-          <a:lstStyle/>
-          <a:p>
-            <a:r>
-              <a:rPr sz="3800" b="1">
-                <a:solidFill>
-                  <a:srgbClr val="1F2A37"/>
-                </a:solidFill>
-              </a:rPr>
-              <a:t>.lastChild</a:t>
-            </a:r>
-          </a:p>
-        </p:txBody>
-      </p:sp>
-      <p:sp>
-        <p:nvSpPr>
-          <p:cNvPr id="3" name="TextBox 2"/>
+          <p:cNvPr id="2" name="TextBox 1"/>
           <p:cNvSpPr txBox="1"/>
           <p:nvPr/>
         </p:nvSpPr>
         <p:spPr>
           <a:xfrm>
-            <a:off x="868680" y="502920"/>
-            <a:ext cx="5486400" cy="457200"/>
+            <a:off x="502920" y="274320"/>
+            <a:ext cx="11155680" cy="548640"/>
           </a:xfrm>
           <a:prstGeom prst="rect">
             <a:avLst/>
@@ -12122,26 +11708,26 @@
           <a:lstStyle/>
           <a:p>
             <a:r>
-              <a:rPr sz="1500" b="1">
+              <a:rPr sz="2200" b="1">
                 <a:solidFill>
                   <a:srgbClr val="01AEFD"/>
                 </a:solidFill>
               </a:rPr>
-              <a:t>JAVASCRIPT</a:t>
-            </a:r>
-          </a:p>
-        </p:txBody>
-      </p:sp>
-      <p:sp>
-        <p:nvSpPr>
-          <p:cNvPr id="4" name="TextBox 3"/>
+              <a:t>Type this into script.js   -   line 61</a:t>
+            </a:r>
+          </a:p>
+        </p:txBody>
+      </p:sp>
+      <p:sp>
+        <p:nvSpPr>
+          <p:cNvPr id="3" name="TextBox 2"/>
           <p:cNvSpPr txBox="1"/>
           <p:nvPr/>
         </p:nvSpPr>
         <p:spPr>
           <a:xfrm>
-            <a:off x="822960" y="1828800"/>
-            <a:ext cx="10515600" cy="4206240"/>
+            <a:off x="502920" y="960120"/>
+            <a:ext cx="11155680" cy="4297680"/>
           </a:xfrm>
           <a:prstGeom prst="rect">
             <a:avLst/>
@@ -12149,38 +11735,116 @@
           <a:noFill/>
         </p:spPr>
         <p:txBody>
+          <a:bodyPr wrap="none">
+            <a:spAutoFit/>
+          </a:bodyPr>
+          <a:lstStyle/>
+          <a:p>
+            <a:pPr>
+              <a:spcAft>
+                <a:spcPts val="0"/>
+              </a:spcAft>
+            </a:pPr>
+            <a:r>
+              <a:rPr sz="1800">
+                <a:solidFill>
+                  <a:srgbClr val="6D8C97"/>
+                </a:solidFill>
+                <a:latin typeface="Consolas"/>
+              </a:rPr>
+              <a:t>  59  </a:t>
+            </a:r>
+            <a:r>
+              <a:rPr sz="1800">
+                <a:solidFill>
+                  <a:srgbClr val="6D8C97"/>
+                </a:solidFill>
+                <a:latin typeface="Consolas"/>
+              </a:rPr>
+              <a:t> </a:t>
+            </a:r>
+          </a:p>
+          <a:p>
+            <a:pPr>
+              <a:spcAft>
+                <a:spcPts val="0"/>
+              </a:spcAft>
+            </a:pPr>
+            <a:r>
+              <a:rPr sz="1800">
+                <a:solidFill>
+                  <a:srgbClr val="6D8C97"/>
+                </a:solidFill>
+                <a:latin typeface="Consolas"/>
+              </a:rPr>
+              <a:t>  60  </a:t>
+            </a:r>
+            <a:r>
+              <a:rPr sz="1800">
+                <a:solidFill>
+                  <a:srgbClr val="6D8C97"/>
+                </a:solidFill>
+                <a:latin typeface="Consolas"/>
+              </a:rPr>
+              <a:t>// The browser calls this when the form is submitted.</a:t>
+            </a:r>
+          </a:p>
+          <a:p>
+            <a:pPr>
+              <a:spcAft>
+                <a:spcPts val="0"/>
+              </a:spcAft>
+            </a:pPr>
+            <a:r>
+              <a:rPr sz="1800">
+                <a:solidFill>
+                  <a:srgbClr val="6D8C97"/>
+                </a:solidFill>
+                <a:latin typeface="Consolas"/>
+              </a:rPr>
+              <a:t>  61  </a:t>
+            </a:r>
+            <a:r>
+              <a:rPr sz="1800">
+                <a:solidFill>
+                  <a:srgbClr val="7FE0A0"/>
+                </a:solidFill>
+                <a:latin typeface="Consolas"/>
+              </a:rPr>
+              <a:t>composer.addEventListener('submit', async function (event) {</a:t>
+            </a:r>
+          </a:p>
+        </p:txBody>
+      </p:sp>
+      <p:sp>
+        <p:nvSpPr>
+          <p:cNvPr id="4" name="TextBox 3"/>
+          <p:cNvSpPr txBox="1"/>
+          <p:nvPr/>
+        </p:nvSpPr>
+        <p:spPr>
+          <a:xfrm>
+            <a:off x="548640" y="5623560"/>
+            <a:ext cx="11064240" cy="1051560"/>
+          </a:xfrm>
+          <a:prstGeom prst="rect">
+            <a:avLst/>
+          </a:prstGeom>
+          <a:noFill/>
+        </p:spPr>
+        <p:txBody>
           <a:bodyPr wrap="square">
             <a:spAutoFit/>
           </a:bodyPr>
           <a:lstStyle/>
           <a:p>
-            <a:pPr>
-              <a:spcAft>
-                <a:spcPts val="1400"/>
-              </a:spcAft>
-            </a:pPr>
-            <a:r>
-              <a:rPr sz="2400">
-                <a:solidFill>
-                  <a:srgbClr val="1F2A37"/>
-                </a:solidFill>
-              </a:rPr>
-              <a:t>• A box's LAST child - the newest thing added inside it.</a:t>
-            </a:r>
-          </a:p>
-          <a:p>
-            <a:pPr>
-              <a:spcAft>
-                <a:spcPts val="1400"/>
-              </a:spcAft>
-            </a:pPr>
-            <a:r>
-              <a:rPr sz="2400">
-                <a:solidFill>
-                  <a:srgbClr val="1F2A37"/>
-                </a:solidFill>
-              </a:rPr>
-              <a:t>• chat.lastChild is the message you just put in.</a:t>
+            <a:r>
+              <a:rPr sz="2000">
+                <a:solidFill>
+                  <a:srgbClr val="DCECEF"/>
+                </a:solidFill>
+              </a:rPr>
+              <a:t>Add async so we are allowed to await the slow AI call inside.</a:t>
             </a:r>
           </a:p>
         </p:txBody>
@@ -12196,6 +11860,14 @@
 <file path=ppt/slides/slide35.xml><?xml version="1.0" encoding="utf-8"?>
 <p:sld xmlns:a="http://schemas.openxmlformats.org/drawingml/2006/main" xmlns:p="http://schemas.openxmlformats.org/presentationml/2006/main" xmlns:r="http://schemas.openxmlformats.org/officeDocument/2006/relationships">
   <p:cSld>
+    <p:bg>
+      <p:bgPr>
+        <a:solidFill>
+          <a:srgbClr val="102127"/>
+        </a:solidFill>
+        <a:effectLst/>
+      </p:bgPr>
+    </p:bg>
     <p:spTree>
       <p:nvGrpSpPr>
         <p:cNvPr id="1" name=""/>
@@ -12205,40 +11877,14 @@
       <p:grpSpPr/>
       <p:sp>
         <p:nvSpPr>
-          <p:cNvPr id="2" name="Title 1"/>
-          <p:cNvSpPr>
-            <a:spLocks noGrp="1"/>
-          </p:cNvSpPr>
-          <p:nvPr>
-            <p:ph type="title"/>
-          </p:nvPr>
-        </p:nvSpPr>
-        <p:spPr/>
-        <p:txBody>
-          <a:bodyPr/>
-          <a:lstStyle/>
-          <a:p>
-            <a:r>
-              <a:rPr sz="3800" b="1">
-                <a:solidFill>
-                  <a:srgbClr val="1F2A37"/>
-                </a:solidFill>
-              </a:rPr>
-              <a:t>.remove()</a:t>
-            </a:r>
-          </a:p>
-        </p:txBody>
-      </p:sp>
-      <p:sp>
-        <p:nvSpPr>
-          <p:cNvPr id="3" name="TextBox 2"/>
+          <p:cNvPr id="2" name="TextBox 1"/>
           <p:cNvSpPr txBox="1"/>
           <p:nvPr/>
         </p:nvSpPr>
         <p:spPr>
           <a:xfrm>
-            <a:off x="868680" y="502920"/>
-            <a:ext cx="5486400" cy="457200"/>
+            <a:off x="502920" y="274320"/>
+            <a:ext cx="11155680" cy="548640"/>
           </a:xfrm>
           <a:prstGeom prst="rect">
             <a:avLst/>
@@ -12252,26 +11898,26 @@
           <a:lstStyle/>
           <a:p>
             <a:r>
-              <a:rPr sz="1500" b="1">
+              <a:rPr sz="2200" b="1">
                 <a:solidFill>
                   <a:srgbClr val="01AEFD"/>
                 </a:solidFill>
               </a:rPr>
-              <a:t>JAVASCRIPT</a:t>
-            </a:r>
-          </a:p>
-        </p:txBody>
-      </p:sp>
-      <p:sp>
-        <p:nvSpPr>
-          <p:cNvPr id="4" name="TextBox 3"/>
+              <a:t>In script.js   -   replace a line</a:t>
+            </a:r>
+          </a:p>
+        </p:txBody>
+      </p:sp>
+      <p:sp>
+        <p:nvSpPr>
+          <p:cNvPr id="3" name="TextBox 2"/>
           <p:cNvSpPr txBox="1"/>
           <p:nvPr/>
         </p:nvSpPr>
         <p:spPr>
           <a:xfrm>
-            <a:off x="822960" y="1828800"/>
-            <a:ext cx="10515600" cy="4206240"/>
+            <a:off x="502920" y="960120"/>
+            <a:ext cx="11155680" cy="4297680"/>
           </a:xfrm>
           <a:prstGeom prst="rect">
             <a:avLst/>
@@ -12279,38 +11925,266 @@
           <a:noFill/>
         </p:spPr>
         <p:txBody>
+          <a:bodyPr wrap="none">
+            <a:spAutoFit/>
+          </a:bodyPr>
+          <a:lstStyle/>
+          <a:p>
+            <a:pPr>
+              <a:spcAft>
+                <a:spcPts val="0"/>
+              </a:spcAft>
+            </a:pPr>
+            <a:r>
+              <a:rPr sz="1800">
+                <a:solidFill>
+                  <a:srgbClr val="6D8C97"/>
+                </a:solidFill>
+                <a:latin typeface="Consolas"/>
+              </a:rPr>
+              <a:t>  59  </a:t>
+            </a:r>
+            <a:r>
+              <a:rPr sz="1800">
+                <a:solidFill>
+                  <a:srgbClr val="6D8C97"/>
+                </a:solidFill>
+                <a:latin typeface="Consolas"/>
+              </a:rPr>
+              <a:t> </a:t>
+            </a:r>
+          </a:p>
+          <a:p>
+            <a:pPr>
+              <a:spcAft>
+                <a:spcPts val="0"/>
+              </a:spcAft>
+            </a:pPr>
+            <a:r>
+              <a:rPr sz="1800">
+                <a:solidFill>
+                  <a:srgbClr val="6D8C97"/>
+                </a:solidFill>
+                <a:latin typeface="Consolas"/>
+              </a:rPr>
+              <a:t>  60  </a:t>
+            </a:r>
+            <a:r>
+              <a:rPr sz="1800">
+                <a:solidFill>
+                  <a:srgbClr val="6D8C97"/>
+                </a:solidFill>
+                <a:latin typeface="Consolas"/>
+              </a:rPr>
+              <a:t>// The browser calls this when the form is submitted.</a:t>
+            </a:r>
+          </a:p>
+          <a:p>
+            <a:pPr>
+              <a:spcAft>
+                <a:spcPts val="0"/>
+              </a:spcAft>
+            </a:pPr>
+            <a:r>
+              <a:rPr sz="1800">
+                <a:solidFill>
+                  <a:srgbClr val="6D8C97"/>
+                </a:solidFill>
+                <a:latin typeface="Consolas"/>
+              </a:rPr>
+              <a:t>  61  </a:t>
+            </a:r>
+            <a:r>
+              <a:rPr sz="1800">
+                <a:solidFill>
+                  <a:srgbClr val="6D8C97"/>
+                </a:solidFill>
+                <a:latin typeface="Consolas"/>
+              </a:rPr>
+              <a:t>composer.addEventListener('submit', async function (event) {</a:t>
+            </a:r>
+          </a:p>
+          <a:p>
+            <a:pPr>
+              <a:spcAft>
+                <a:spcPts val="0"/>
+              </a:spcAft>
+            </a:pPr>
+            <a:r>
+              <a:rPr sz="1800">
+                <a:solidFill>
+                  <a:srgbClr val="6D8C97"/>
+                </a:solidFill>
+                <a:latin typeface="Consolas"/>
+              </a:rPr>
+              <a:t>  62  </a:t>
+            </a:r>
+            <a:r>
+              <a:rPr sz="1800">
+                <a:solidFill>
+                  <a:srgbClr val="6D8C97"/>
+                </a:solidFill>
+                <a:latin typeface="Consolas"/>
+              </a:rPr>
+              <a:t>  event.preventDefault();</a:t>
+            </a:r>
+          </a:p>
+          <a:p>
+            <a:pPr>
+              <a:spcAft>
+                <a:spcPts val="0"/>
+              </a:spcAft>
+            </a:pPr>
+            <a:r>
+              <a:rPr sz="1800">
+                <a:solidFill>
+                  <a:srgbClr val="6D8C97"/>
+                </a:solidFill>
+                <a:latin typeface="Consolas"/>
+              </a:rPr>
+              <a:t>  63  </a:t>
+            </a:r>
+            <a:r>
+              <a:rPr sz="1800">
+                <a:solidFill>
+                  <a:srgbClr val="6D8C97"/>
+                </a:solidFill>
+                <a:latin typeface="Consolas"/>
+              </a:rPr>
+              <a:t>  const text = promptBox.value.trim();</a:t>
+            </a:r>
+          </a:p>
+          <a:p>
+            <a:pPr>
+              <a:spcAft>
+                <a:spcPts val="0"/>
+              </a:spcAft>
+            </a:pPr>
+            <a:r>
+              <a:rPr sz="1800">
+                <a:solidFill>
+                  <a:srgbClr val="6D8C97"/>
+                </a:solidFill>
+                <a:latin typeface="Consolas"/>
+              </a:rPr>
+              <a:t>  64  </a:t>
+            </a:r>
+            <a:r>
+              <a:rPr sz="1800">
+                <a:solidFill>
+                  <a:srgbClr val="6D8C97"/>
+                </a:solidFill>
+                <a:latin typeface="Consolas"/>
+              </a:rPr>
+              <a:t>  if (text === '') { return; }</a:t>
+            </a:r>
+          </a:p>
+          <a:p>
+            <a:pPr>
+              <a:spcAft>
+                <a:spcPts val="0"/>
+              </a:spcAft>
+            </a:pPr>
+            <a:r>
+              <a:rPr sz="1800">
+                <a:solidFill>
+                  <a:srgbClr val="6D8C97"/>
+                </a:solidFill>
+                <a:latin typeface="Consolas"/>
+              </a:rPr>
+              <a:t>  65  </a:t>
+            </a:r>
+            <a:r>
+              <a:rPr sz="1800">
+                <a:solidFill>
+                  <a:srgbClr val="6D8C97"/>
+                </a:solidFill>
+                <a:latin typeface="Consolas"/>
+              </a:rPr>
+              <a:t>  promptBox.value = '';</a:t>
+            </a:r>
+          </a:p>
+          <a:p>
+            <a:pPr>
+              <a:spcAft>
+                <a:spcPts val="0"/>
+              </a:spcAft>
+            </a:pPr>
+            <a:r>
+              <a:rPr sz="1800">
+                <a:solidFill>
+                  <a:srgbClr val="6D8C97"/>
+                </a:solidFill>
+                <a:latin typeface="Consolas"/>
+              </a:rPr>
+              <a:t>  66  </a:t>
+            </a:r>
+            <a:r>
+              <a:rPr sz="1800">
+                <a:solidFill>
+                  <a:srgbClr val="6D8C97"/>
+                </a:solidFill>
+                <a:latin typeface="Consolas"/>
+              </a:rPr>
+              <a:t>  addLine('You', text);</a:t>
+            </a:r>
+          </a:p>
+          <a:p>
+            <a:pPr>
+              <a:spcAft>
+                <a:spcPts val="0"/>
+              </a:spcAft>
+            </a:pPr>
+            <a:r>
+              <a:rPr sz="1800">
+                <a:solidFill>
+                  <a:srgbClr val="6D8C97"/>
+                </a:solidFill>
+                <a:latin typeface="Consolas"/>
+              </a:rPr>
+              <a:t>   -  </a:t>
+            </a:r>
+            <a:r>
+              <a:rPr sz="1800" strike="sngStrike">
+                <a:solidFill>
+                  <a:srgbClr val="F3928B"/>
+                </a:solidFill>
+                <a:latin typeface="Consolas"/>
+              </a:rPr>
+              <a:t>  addLine('Companion', 'You said: ' + text);   // a pretend answer, for now</a:t>
+            </a:r>
+          </a:p>
+        </p:txBody>
+      </p:sp>
+      <p:sp>
+        <p:nvSpPr>
+          <p:cNvPr id="4" name="TextBox 3"/>
+          <p:cNvSpPr txBox="1"/>
+          <p:nvPr/>
+        </p:nvSpPr>
+        <p:spPr>
+          <a:xfrm>
+            <a:off x="548640" y="5623560"/>
+            <a:ext cx="11064240" cy="1051560"/>
+          </a:xfrm>
+          <a:prstGeom prst="rect">
+            <a:avLst/>
+          </a:prstGeom>
+          <a:noFill/>
+        </p:spPr>
+        <p:txBody>
           <a:bodyPr wrap="square">
             <a:spAutoFit/>
           </a:bodyPr>
           <a:lstStyle/>
           <a:p>
-            <a:pPr>
-              <a:spcAft>
-                <a:spcPts val="1400"/>
-              </a:spcAft>
-            </a:pPr>
-            <a:r>
-              <a:rPr sz="2400">
-                <a:solidFill>
-                  <a:srgbClr val="1F2A37"/>
-                </a:solidFill>
-              </a:rPr>
-              <a:t>• Deletes an element from the page.</a:t>
-            </a:r>
-          </a:p>
-          <a:p>
-            <a:pPr>
-              <a:spcAft>
-                <a:spcPts val="1400"/>
-              </a:spcAft>
-            </a:pPr>
-            <a:r>
-              <a:rPr sz="2400">
-                <a:solidFill>
-                  <a:srgbClr val="1F2A37"/>
-                </a:solidFill>
-              </a:rPr>
-              <a:t>• chat.lastChild.remove() takes the last message back off.</a:t>
+            <a:r>
+              <a:rPr sz="2000">
+                <a:solidFill>
+                  <a:srgbClr val="DCECEF"/>
+                </a:solidFill>
+              </a:rPr>
+              <a:t>This line changes - take the old one out; the new version is next.</a:t>
             </a:r>
           </a:p>
         </p:txBody>
@@ -12369,7 +12243,7 @@
                   <a:srgbClr val="01AEFD"/>
                 </a:solidFill>
               </a:rPr>
-              <a:t>Type this into script.js   -   line 69</a:t>
+              <a:t>Type this into script.js   -   line 67</a:t>
             </a:r>
           </a:p>
         </p:txBody>
@@ -12402,7 +12276,7 @@
               </a:spcAft>
             </a:pPr>
             <a:r>
-              <a:rPr sz="1300">
+              <a:rPr sz="1800">
                 <a:solidFill>
                   <a:srgbClr val="6D8C97"/>
                 </a:solidFill>
@@ -12411,7 +12285,7 @@
               <a:t>  59  </a:t>
             </a:r>
             <a:r>
-              <a:rPr sz="1300">
+              <a:rPr sz="1800">
                 <a:solidFill>
                   <a:srgbClr val="6D8C97"/>
                 </a:solidFill>
@@ -12427,7 +12301,7 @@
               </a:spcAft>
             </a:pPr>
             <a:r>
-              <a:rPr sz="1300">
+              <a:rPr sz="1800">
                 <a:solidFill>
                   <a:srgbClr val="6D8C97"/>
                 </a:solidFill>
@@ -12436,7 +12310,7 @@
               <a:t>  60  </a:t>
             </a:r>
             <a:r>
-              <a:rPr sz="1300">
+              <a:rPr sz="1800">
                 <a:solidFill>
                   <a:srgbClr val="6D8C97"/>
                 </a:solidFill>
@@ -12452,7 +12326,7 @@
               </a:spcAft>
             </a:pPr>
             <a:r>
-              <a:rPr sz="1300">
+              <a:rPr sz="1800">
                 <a:solidFill>
                   <a:srgbClr val="6D8C97"/>
                 </a:solidFill>
@@ -12461,7 +12335,7 @@
               <a:t>  61  </a:t>
             </a:r>
             <a:r>
-              <a:rPr sz="1300">
+              <a:rPr sz="1800">
                 <a:solidFill>
                   <a:srgbClr val="6D8C97"/>
                 </a:solidFill>
@@ -12477,7 +12351,7 @@
               </a:spcAft>
             </a:pPr>
             <a:r>
-              <a:rPr sz="1300">
+              <a:rPr sz="1800">
                 <a:solidFill>
                   <a:srgbClr val="6D8C97"/>
                 </a:solidFill>
@@ -12486,7 +12360,7 @@
               <a:t>  62  </a:t>
             </a:r>
             <a:r>
-              <a:rPr sz="1300">
+              <a:rPr sz="1800">
                 <a:solidFill>
                   <a:srgbClr val="6D8C97"/>
                 </a:solidFill>
@@ -12502,7 +12376,7 @@
               </a:spcAft>
             </a:pPr>
             <a:r>
-              <a:rPr sz="1300">
+              <a:rPr sz="1800">
                 <a:solidFill>
                   <a:srgbClr val="6D8C97"/>
                 </a:solidFill>
@@ -12511,7 +12385,7 @@
               <a:t>  63  </a:t>
             </a:r>
             <a:r>
-              <a:rPr sz="1300">
+              <a:rPr sz="1800">
                 <a:solidFill>
                   <a:srgbClr val="6D8C97"/>
                 </a:solidFill>
@@ -12527,7 +12401,7 @@
               </a:spcAft>
             </a:pPr>
             <a:r>
-              <a:rPr sz="1300">
+              <a:rPr sz="1800">
                 <a:solidFill>
                   <a:srgbClr val="6D8C97"/>
                 </a:solidFill>
@@ -12536,7 +12410,7 @@
               <a:t>  64  </a:t>
             </a:r>
             <a:r>
-              <a:rPr sz="1300">
+              <a:rPr sz="1800">
                 <a:solidFill>
                   <a:srgbClr val="6D8C97"/>
                 </a:solidFill>
@@ -12552,7 +12426,7 @@
               </a:spcAft>
             </a:pPr>
             <a:r>
-              <a:rPr sz="1300">
+              <a:rPr sz="1800">
                 <a:solidFill>
                   <a:srgbClr val="6D8C97"/>
                 </a:solidFill>
@@ -12561,7 +12435,7 @@
               <a:t>  65  </a:t>
             </a:r>
             <a:r>
-              <a:rPr sz="1300">
+              <a:rPr sz="1800">
                 <a:solidFill>
                   <a:srgbClr val="6D8C97"/>
                 </a:solidFill>
@@ -12577,7 +12451,7 @@
               </a:spcAft>
             </a:pPr>
             <a:r>
-              <a:rPr sz="1300">
+              <a:rPr sz="1800">
                 <a:solidFill>
                   <a:srgbClr val="6D8C97"/>
                 </a:solidFill>
@@ -12586,7 +12460,7 @@
               <a:t>  66  </a:t>
             </a:r>
             <a:r>
-              <a:rPr sz="1300">
+              <a:rPr sz="1800">
                 <a:solidFill>
                   <a:srgbClr val="6D8C97"/>
                 </a:solidFill>
@@ -12602,7 +12476,7 @@
               </a:spcAft>
             </a:pPr>
             <a:r>
-              <a:rPr sz="1300">
+              <a:rPr sz="1800">
                 <a:solidFill>
                   <a:srgbClr val="6D8C97"/>
                 </a:solidFill>
@@ -12611,63 +12485,13 @@
               <a:t>  67  </a:t>
             </a:r>
             <a:r>
-              <a:rPr sz="1300">
-                <a:solidFill>
-                  <a:srgbClr val="6D8C97"/>
+              <a:rPr sz="1800">
+                <a:solidFill>
+                  <a:srgbClr val="7FE0A0"/>
                 </a:solidFill>
                 <a:latin typeface="Consolas"/>
               </a:rPr>
               <a:t>  addLine('Companion', 'thinking...');</a:t>
-            </a:r>
-          </a:p>
-          <a:p>
-            <a:pPr>
-              <a:spcAft>
-                <a:spcPts val="0"/>
-              </a:spcAft>
-            </a:pPr>
-            <a:r>
-              <a:rPr sz="1300">
-                <a:solidFill>
-                  <a:srgbClr val="6D8C97"/>
-                </a:solidFill>
-                <a:latin typeface="Consolas"/>
-              </a:rPr>
-              <a:t>  68  </a:t>
-            </a:r>
-            <a:r>
-              <a:rPr sz="1300">
-                <a:solidFill>
-                  <a:srgbClr val="6D8C97"/>
-                </a:solidFill>
-                <a:latin typeface="Consolas"/>
-              </a:rPr>
-              <a:t>  const reply = await askAI(text);       // this is the slow bit</a:t>
-            </a:r>
-          </a:p>
-          <a:p>
-            <a:pPr>
-              <a:spcAft>
-                <a:spcPts val="0"/>
-              </a:spcAft>
-            </a:pPr>
-            <a:r>
-              <a:rPr sz="1300">
-                <a:solidFill>
-                  <a:srgbClr val="6D8C97"/>
-                </a:solidFill>
-                <a:latin typeface="Consolas"/>
-              </a:rPr>
-              <a:t>  69  </a:t>
-            </a:r>
-            <a:r>
-              <a:rPr sz="1300">
-                <a:solidFill>
-                  <a:srgbClr val="7FE0A0"/>
-                </a:solidFill>
-                <a:latin typeface="Consolas"/>
-              </a:rPr>
-              <a:t>  chat.lastChild.remove();               // take the 'thinking' line away</a:t>
             </a:r>
           </a:p>
         </p:txBody>
@@ -12700,7 +12524,7 @@
                   <a:srgbClr val="DCECEF"/>
                 </a:solidFill>
               </a:rPr>
-              <a:t>Remove the 'thinking...' line now the real answer is here.</a:t>
+              <a:t>Change the pretend reply to a 'thinking...' line while we wait.</a:t>
             </a:r>
           </a:p>
         </p:txBody>
@@ -12759,7 +12583,7 @@
                   <a:srgbClr val="01AEFD"/>
                 </a:solidFill>
               </a:rPr>
-              <a:t>Type this into script.js   -   line 70</a:t>
+              <a:t>Type this into script.js   -   line 68</a:t>
             </a:r>
           </a:p>
         </p:txBody>
@@ -12792,7 +12616,7 @@
               </a:spcAft>
             </a:pPr>
             <a:r>
-              <a:rPr sz="1300">
+              <a:rPr sz="1800">
                 <a:solidFill>
                   <a:srgbClr val="6D8C97"/>
                 </a:solidFill>
@@ -12801,7 +12625,7 @@
               <a:t>  59  </a:t>
             </a:r>
             <a:r>
-              <a:rPr sz="1300">
+              <a:rPr sz="1800">
                 <a:solidFill>
                   <a:srgbClr val="6D8C97"/>
                 </a:solidFill>
@@ -12817,7 +12641,7 @@
               </a:spcAft>
             </a:pPr>
             <a:r>
-              <a:rPr sz="1300">
+              <a:rPr sz="1800">
                 <a:solidFill>
                   <a:srgbClr val="6D8C97"/>
                 </a:solidFill>
@@ -12826,7 +12650,7 @@
               <a:t>  60  </a:t>
             </a:r>
             <a:r>
-              <a:rPr sz="1300">
+              <a:rPr sz="1800">
                 <a:solidFill>
                   <a:srgbClr val="6D8C97"/>
                 </a:solidFill>
@@ -12842,7 +12666,7 @@
               </a:spcAft>
             </a:pPr>
             <a:r>
-              <a:rPr sz="1300">
+              <a:rPr sz="1800">
                 <a:solidFill>
                   <a:srgbClr val="6D8C97"/>
                 </a:solidFill>
@@ -12851,7 +12675,7 @@
               <a:t>  61  </a:t>
             </a:r>
             <a:r>
-              <a:rPr sz="1300">
+              <a:rPr sz="1800">
                 <a:solidFill>
                   <a:srgbClr val="6D8C97"/>
                 </a:solidFill>
@@ -12867,7 +12691,7 @@
               </a:spcAft>
             </a:pPr>
             <a:r>
-              <a:rPr sz="1300">
+              <a:rPr sz="1800">
                 <a:solidFill>
                   <a:srgbClr val="6D8C97"/>
                 </a:solidFill>
@@ -12876,7 +12700,7 @@
               <a:t>  62  </a:t>
             </a:r>
             <a:r>
-              <a:rPr sz="1300">
+              <a:rPr sz="1800">
                 <a:solidFill>
                   <a:srgbClr val="6D8C97"/>
                 </a:solidFill>
@@ -12892,7 +12716,7 @@
               </a:spcAft>
             </a:pPr>
             <a:r>
-              <a:rPr sz="1300">
+              <a:rPr sz="1800">
                 <a:solidFill>
                   <a:srgbClr val="6D8C97"/>
                 </a:solidFill>
@@ -12901,7 +12725,7 @@
               <a:t>  63  </a:t>
             </a:r>
             <a:r>
-              <a:rPr sz="1300">
+              <a:rPr sz="1800">
                 <a:solidFill>
                   <a:srgbClr val="6D8C97"/>
                 </a:solidFill>
@@ -12917,7 +12741,7 @@
               </a:spcAft>
             </a:pPr>
             <a:r>
-              <a:rPr sz="1300">
+              <a:rPr sz="1800">
                 <a:solidFill>
                   <a:srgbClr val="6D8C97"/>
                 </a:solidFill>
@@ -12926,7 +12750,7 @@
               <a:t>  64  </a:t>
             </a:r>
             <a:r>
-              <a:rPr sz="1300">
+              <a:rPr sz="1800">
                 <a:solidFill>
                   <a:srgbClr val="6D8C97"/>
                 </a:solidFill>
@@ -12942,7 +12766,7 @@
               </a:spcAft>
             </a:pPr>
             <a:r>
-              <a:rPr sz="1300">
+              <a:rPr sz="1800">
                 <a:solidFill>
                   <a:srgbClr val="6D8C97"/>
                 </a:solidFill>
@@ -12951,7 +12775,7 @@
               <a:t>  65  </a:t>
             </a:r>
             <a:r>
-              <a:rPr sz="1300">
+              <a:rPr sz="1800">
                 <a:solidFill>
                   <a:srgbClr val="6D8C97"/>
                 </a:solidFill>
@@ -12967,7 +12791,7 @@
               </a:spcAft>
             </a:pPr>
             <a:r>
-              <a:rPr sz="1300">
+              <a:rPr sz="1800">
                 <a:solidFill>
                   <a:srgbClr val="6D8C97"/>
                 </a:solidFill>
@@ -12976,7 +12800,7 @@
               <a:t>  66  </a:t>
             </a:r>
             <a:r>
-              <a:rPr sz="1300">
+              <a:rPr sz="1800">
                 <a:solidFill>
                   <a:srgbClr val="6D8C97"/>
                 </a:solidFill>
@@ -12992,7 +12816,7 @@
               </a:spcAft>
             </a:pPr>
             <a:r>
-              <a:rPr sz="1300">
+              <a:rPr sz="1800">
                 <a:solidFill>
                   <a:srgbClr val="6D8C97"/>
                 </a:solidFill>
@@ -13001,7 +12825,7 @@
               <a:t>  67  </a:t>
             </a:r>
             <a:r>
-              <a:rPr sz="1300">
+              <a:rPr sz="1800">
                 <a:solidFill>
                   <a:srgbClr val="6D8C97"/>
                 </a:solidFill>
@@ -13017,7 +12841,7 @@
               </a:spcAft>
             </a:pPr>
             <a:r>
-              <a:rPr sz="1300">
+              <a:rPr sz="1800">
                 <a:solidFill>
                   <a:srgbClr val="6D8C97"/>
                 </a:solidFill>
@@ -13026,63 +12850,13 @@
               <a:t>  68  </a:t>
             </a:r>
             <a:r>
-              <a:rPr sz="1300">
-                <a:solidFill>
-                  <a:srgbClr val="6D8C97"/>
+              <a:rPr sz="1800">
+                <a:solidFill>
+                  <a:srgbClr val="7FE0A0"/>
                 </a:solidFill>
                 <a:latin typeface="Consolas"/>
               </a:rPr>
               <a:t>  const reply = await askAI(text);       // this is the slow bit</a:t>
-            </a:r>
-          </a:p>
-          <a:p>
-            <a:pPr>
-              <a:spcAft>
-                <a:spcPts val="0"/>
-              </a:spcAft>
-            </a:pPr>
-            <a:r>
-              <a:rPr sz="1300">
-                <a:solidFill>
-                  <a:srgbClr val="6D8C97"/>
-                </a:solidFill>
-                <a:latin typeface="Consolas"/>
-              </a:rPr>
-              <a:t>  69  </a:t>
-            </a:r>
-            <a:r>
-              <a:rPr sz="1300">
-                <a:solidFill>
-                  <a:srgbClr val="6D8C97"/>
-                </a:solidFill>
-                <a:latin typeface="Consolas"/>
-              </a:rPr>
-              <a:t>  chat.lastChild.remove();               // take the 'thinking' line away</a:t>
-            </a:r>
-          </a:p>
-          <a:p>
-            <a:pPr>
-              <a:spcAft>
-                <a:spcPts val="0"/>
-              </a:spcAft>
-            </a:pPr>
-            <a:r>
-              <a:rPr sz="1300">
-                <a:solidFill>
-                  <a:srgbClr val="6D8C97"/>
-                </a:solidFill>
-                <a:latin typeface="Consolas"/>
-              </a:rPr>
-              <a:t>  70  </a:t>
-            </a:r>
-            <a:r>
-              <a:rPr sz="1300">
-                <a:solidFill>
-                  <a:srgbClr val="7FE0A0"/>
-                </a:solidFill>
-                <a:latin typeface="Consolas"/>
-              </a:rPr>
-              <a:t>  addLine('Companion', reply);</a:t>
             </a:r>
           </a:p>
         </p:txBody>
@@ -13115,7 +12889,7 @@
                   <a:srgbClr val="DCECEF"/>
                 </a:solidFill>
               </a:rPr>
-              <a:t>Show the real reply in the chat.</a:t>
+              <a:t>await askAI(text): the slow bit - ask the AI and wait for the answer.</a:t>
             </a:r>
           </a:p>
         </p:txBody>
@@ -13131,14 +12905,6 @@
 <file path=ppt/slides/slide38.xml><?xml version="1.0" encoding="utf-8"?>
 <p:sld xmlns:a="http://schemas.openxmlformats.org/drawingml/2006/main" xmlns:p="http://schemas.openxmlformats.org/presentationml/2006/main" xmlns:r="http://schemas.openxmlformats.org/officeDocument/2006/relationships">
   <p:cSld>
-    <p:bg>
-      <p:bgPr>
-        <a:solidFill>
-          <a:srgbClr val="102127"/>
-        </a:solidFill>
-        <a:effectLst/>
-      </p:bgPr>
-    </p:bg>
     <p:spTree>
       <p:nvGrpSpPr>
         <p:cNvPr id="1" name=""/>
@@ -13148,14 +12914,40 @@
       <p:grpSpPr/>
       <p:sp>
         <p:nvSpPr>
-          <p:cNvPr id="2" name="TextBox 1"/>
+          <p:cNvPr id="2" name="Title 1"/>
+          <p:cNvSpPr>
+            <a:spLocks noGrp="1"/>
+          </p:cNvSpPr>
+          <p:nvPr>
+            <p:ph type="title"/>
+          </p:nvPr>
+        </p:nvSpPr>
+        <p:spPr/>
+        <p:txBody>
+          <a:bodyPr/>
+          <a:lstStyle/>
+          <a:p>
+            <a:r>
+              <a:rPr sz="3800" b="1">
+                <a:solidFill>
+                  <a:srgbClr val="1F2A37"/>
+                </a:solidFill>
+              </a:rPr>
+              <a:t>.lastChild</a:t>
+            </a:r>
+          </a:p>
+        </p:txBody>
+      </p:sp>
+      <p:sp>
+        <p:nvSpPr>
+          <p:cNvPr id="3" name="TextBox 2"/>
           <p:cNvSpPr txBox="1"/>
           <p:nvPr/>
         </p:nvSpPr>
         <p:spPr>
           <a:xfrm>
-            <a:off x="502920" y="274320"/>
-            <a:ext cx="11155680" cy="548640"/>
+            <a:off x="868680" y="502920"/>
+            <a:ext cx="5486400" cy="457200"/>
           </a:xfrm>
           <a:prstGeom prst="rect">
             <a:avLst/>
@@ -13169,26 +12961,26 @@
           <a:lstStyle/>
           <a:p>
             <a:r>
-              <a:rPr sz="2200" b="1">
+              <a:rPr sz="1500" b="1">
                 <a:solidFill>
                   <a:srgbClr val="01AEFD"/>
                 </a:solidFill>
               </a:rPr>
-              <a:t>All together in script.js</a:t>
-            </a:r>
-          </a:p>
-        </p:txBody>
-      </p:sp>
-      <p:sp>
-        <p:nvSpPr>
-          <p:cNvPr id="3" name="TextBox 2"/>
+              <a:t>JAVASCRIPT</a:t>
+            </a:r>
+          </a:p>
+        </p:txBody>
+      </p:sp>
+      <p:sp>
+        <p:nvSpPr>
+          <p:cNvPr id="4" name="TextBox 3"/>
           <p:cNvSpPr txBox="1"/>
           <p:nvPr/>
         </p:nvSpPr>
         <p:spPr>
           <a:xfrm>
-            <a:off x="502920" y="960120"/>
-            <a:ext cx="11155680" cy="4297680"/>
+            <a:off x="822960" y="1828800"/>
+            <a:ext cx="10515600" cy="4206240"/>
           </a:xfrm>
           <a:prstGeom prst="rect">
             <a:avLst/>
@@ -13196,366 +12988,38 @@
           <a:noFill/>
         </p:spPr>
         <p:txBody>
-          <a:bodyPr wrap="none">
-            <a:spAutoFit/>
-          </a:bodyPr>
-          <a:lstStyle/>
-          <a:p>
-            <a:pPr>
-              <a:spcAft>
-                <a:spcPts val="0"/>
-              </a:spcAft>
-            </a:pPr>
-            <a:r>
-              <a:rPr sz="1300">
-                <a:solidFill>
-                  <a:srgbClr val="6D8C97"/>
-                </a:solidFill>
-                <a:latin typeface="Consolas"/>
-              </a:rPr>
-              <a:t>  59  </a:t>
-            </a:r>
-            <a:r>
-              <a:rPr sz="1300">
-                <a:solidFill>
-                  <a:srgbClr val="7FE0A0"/>
-                </a:solidFill>
-                <a:latin typeface="Consolas"/>
-              </a:rPr>
-              <a:t> </a:t>
-            </a:r>
-          </a:p>
-          <a:p>
-            <a:pPr>
-              <a:spcAft>
-                <a:spcPts val="0"/>
-              </a:spcAft>
-            </a:pPr>
-            <a:r>
-              <a:rPr sz="1300">
-                <a:solidFill>
-                  <a:srgbClr val="6D8C97"/>
-                </a:solidFill>
-                <a:latin typeface="Consolas"/>
-              </a:rPr>
-              <a:t>  60  </a:t>
-            </a:r>
-            <a:r>
-              <a:rPr sz="1300">
-                <a:solidFill>
-                  <a:srgbClr val="7FE0A0"/>
-                </a:solidFill>
-                <a:latin typeface="Consolas"/>
-              </a:rPr>
-              <a:t>// The browser calls this when the form is submitted.</a:t>
-            </a:r>
-          </a:p>
-          <a:p>
-            <a:pPr>
-              <a:spcAft>
-                <a:spcPts val="0"/>
-              </a:spcAft>
-            </a:pPr>
-            <a:r>
-              <a:rPr sz="1300">
-                <a:solidFill>
-                  <a:srgbClr val="6D8C97"/>
-                </a:solidFill>
-                <a:latin typeface="Consolas"/>
-              </a:rPr>
-              <a:t>  61  </a:t>
-            </a:r>
-            <a:r>
-              <a:rPr sz="1300">
-                <a:solidFill>
-                  <a:srgbClr val="7FE0A0"/>
-                </a:solidFill>
-                <a:latin typeface="Consolas"/>
-              </a:rPr>
-              <a:t>composer.addEventListener('submit', async function (event) {</a:t>
-            </a:r>
-          </a:p>
-          <a:p>
-            <a:pPr>
-              <a:spcAft>
-                <a:spcPts val="0"/>
-              </a:spcAft>
-            </a:pPr>
-            <a:r>
-              <a:rPr sz="1300">
-                <a:solidFill>
-                  <a:srgbClr val="6D8C97"/>
-                </a:solidFill>
-                <a:latin typeface="Consolas"/>
-              </a:rPr>
-              <a:t>  62  </a:t>
-            </a:r>
-            <a:r>
-              <a:rPr sz="1300">
-                <a:solidFill>
-                  <a:srgbClr val="7FE0A0"/>
-                </a:solidFill>
-                <a:latin typeface="Consolas"/>
-              </a:rPr>
-              <a:t>  event.preventDefault();</a:t>
-            </a:r>
-          </a:p>
-          <a:p>
-            <a:pPr>
-              <a:spcAft>
-                <a:spcPts val="0"/>
-              </a:spcAft>
-            </a:pPr>
-            <a:r>
-              <a:rPr sz="1300">
-                <a:solidFill>
-                  <a:srgbClr val="6D8C97"/>
-                </a:solidFill>
-                <a:latin typeface="Consolas"/>
-              </a:rPr>
-              <a:t>  63  </a:t>
-            </a:r>
-            <a:r>
-              <a:rPr sz="1300">
-                <a:solidFill>
-                  <a:srgbClr val="7FE0A0"/>
-                </a:solidFill>
-                <a:latin typeface="Consolas"/>
-              </a:rPr>
-              <a:t>  const text = promptBox.value.trim();</a:t>
-            </a:r>
-          </a:p>
-          <a:p>
-            <a:pPr>
-              <a:spcAft>
-                <a:spcPts val="0"/>
-              </a:spcAft>
-            </a:pPr>
-            <a:r>
-              <a:rPr sz="1300">
-                <a:solidFill>
-                  <a:srgbClr val="6D8C97"/>
-                </a:solidFill>
-                <a:latin typeface="Consolas"/>
-              </a:rPr>
-              <a:t>  64  </a:t>
-            </a:r>
-            <a:r>
-              <a:rPr sz="1300">
-                <a:solidFill>
-                  <a:srgbClr val="7FE0A0"/>
-                </a:solidFill>
-                <a:latin typeface="Consolas"/>
-              </a:rPr>
-              <a:t>  if (text === '') { return; }</a:t>
-            </a:r>
-          </a:p>
-          <a:p>
-            <a:pPr>
-              <a:spcAft>
-                <a:spcPts val="0"/>
-              </a:spcAft>
-            </a:pPr>
-            <a:r>
-              <a:rPr sz="1300">
-                <a:solidFill>
-                  <a:srgbClr val="6D8C97"/>
-                </a:solidFill>
-                <a:latin typeface="Consolas"/>
-              </a:rPr>
-              <a:t>  65  </a:t>
-            </a:r>
-            <a:r>
-              <a:rPr sz="1300">
-                <a:solidFill>
-                  <a:srgbClr val="7FE0A0"/>
-                </a:solidFill>
-                <a:latin typeface="Consolas"/>
-              </a:rPr>
-              <a:t>  promptBox.value = '';</a:t>
-            </a:r>
-          </a:p>
-          <a:p>
-            <a:pPr>
-              <a:spcAft>
-                <a:spcPts val="0"/>
-              </a:spcAft>
-            </a:pPr>
-            <a:r>
-              <a:rPr sz="1300">
-                <a:solidFill>
-                  <a:srgbClr val="6D8C97"/>
-                </a:solidFill>
-                <a:latin typeface="Consolas"/>
-              </a:rPr>
-              <a:t>  66  </a:t>
-            </a:r>
-            <a:r>
-              <a:rPr sz="1300">
-                <a:solidFill>
-                  <a:srgbClr val="7FE0A0"/>
-                </a:solidFill>
-                <a:latin typeface="Consolas"/>
-              </a:rPr>
-              <a:t>  addLine('You', text);</a:t>
-            </a:r>
-          </a:p>
-          <a:p>
-            <a:pPr>
-              <a:spcAft>
-                <a:spcPts val="0"/>
-              </a:spcAft>
-            </a:pPr>
-            <a:r>
-              <a:rPr sz="1300">
-                <a:solidFill>
-                  <a:srgbClr val="6D8C97"/>
-                </a:solidFill>
-                <a:latin typeface="Consolas"/>
-              </a:rPr>
-              <a:t>  67  </a:t>
-            </a:r>
-            <a:r>
-              <a:rPr sz="1300">
-                <a:solidFill>
-                  <a:srgbClr val="7FE0A0"/>
-                </a:solidFill>
-                <a:latin typeface="Consolas"/>
-              </a:rPr>
-              <a:t>  addLine('Companion', 'thinking...');</a:t>
-            </a:r>
-          </a:p>
-          <a:p>
-            <a:pPr>
-              <a:spcAft>
-                <a:spcPts val="0"/>
-              </a:spcAft>
-            </a:pPr>
-            <a:r>
-              <a:rPr sz="1300">
-                <a:solidFill>
-                  <a:srgbClr val="6D8C97"/>
-                </a:solidFill>
-                <a:latin typeface="Consolas"/>
-              </a:rPr>
-              <a:t>  68  </a:t>
-            </a:r>
-            <a:r>
-              <a:rPr sz="1300">
-                <a:solidFill>
-                  <a:srgbClr val="7FE0A0"/>
-                </a:solidFill>
-                <a:latin typeface="Consolas"/>
-              </a:rPr>
-              <a:t>  const reply = await askAI(text);       // this is the slow bit</a:t>
-            </a:r>
-          </a:p>
-          <a:p>
-            <a:pPr>
-              <a:spcAft>
-                <a:spcPts val="0"/>
-              </a:spcAft>
-            </a:pPr>
-            <a:r>
-              <a:rPr sz="1300">
-                <a:solidFill>
-                  <a:srgbClr val="6D8C97"/>
-                </a:solidFill>
-                <a:latin typeface="Consolas"/>
-              </a:rPr>
-              <a:t>  69  </a:t>
-            </a:r>
-            <a:r>
-              <a:rPr sz="1300">
-                <a:solidFill>
-                  <a:srgbClr val="7FE0A0"/>
-                </a:solidFill>
-                <a:latin typeface="Consolas"/>
-              </a:rPr>
-              <a:t>  chat.lastChild.remove();               // take the 'thinking' line away</a:t>
-            </a:r>
-          </a:p>
-          <a:p>
-            <a:pPr>
-              <a:spcAft>
-                <a:spcPts val="0"/>
-              </a:spcAft>
-            </a:pPr>
-            <a:r>
-              <a:rPr sz="1300">
-                <a:solidFill>
-                  <a:srgbClr val="6D8C97"/>
-                </a:solidFill>
-                <a:latin typeface="Consolas"/>
-              </a:rPr>
-              <a:t>  70  </a:t>
-            </a:r>
-            <a:r>
-              <a:rPr sz="1300">
-                <a:solidFill>
-                  <a:srgbClr val="7FE0A0"/>
-                </a:solidFill>
-                <a:latin typeface="Consolas"/>
-              </a:rPr>
-              <a:t>  addLine('Companion', reply);</a:t>
-            </a:r>
-          </a:p>
-          <a:p>
-            <a:pPr>
-              <a:spcAft>
-                <a:spcPts val="0"/>
-              </a:spcAft>
-            </a:pPr>
-            <a:r>
-              <a:rPr sz="1300">
-                <a:solidFill>
-                  <a:srgbClr val="6D8C97"/>
-                </a:solidFill>
-                <a:latin typeface="Consolas"/>
-              </a:rPr>
-              <a:t>  71  </a:t>
-            </a:r>
-            <a:r>
-              <a:rPr sz="1300">
-                <a:solidFill>
-                  <a:srgbClr val="7FE0A0"/>
-                </a:solidFill>
-                <a:latin typeface="Consolas"/>
-              </a:rPr>
-              <a:t>});</a:t>
-            </a:r>
-          </a:p>
-        </p:txBody>
-      </p:sp>
-      <p:sp>
-        <p:nvSpPr>
-          <p:cNvPr id="4" name="TextBox 3"/>
-          <p:cNvSpPr txBox="1"/>
-          <p:nvPr/>
-        </p:nvSpPr>
-        <p:spPr>
-          <a:xfrm>
-            <a:off x="548640" y="5623560"/>
-            <a:ext cx="11064240" cy="1051560"/>
-          </a:xfrm>
-          <a:prstGeom prst="rect">
-            <a:avLst/>
-          </a:prstGeom>
-          <a:noFill/>
-        </p:spPr>
-        <p:txBody>
           <a:bodyPr wrap="square">
             <a:spAutoFit/>
           </a:bodyPr>
           <a:lstStyle/>
           <a:p>
-            <a:r>
-              <a:rPr sz="2000">
-                <a:solidFill>
-                  <a:srgbClr val="DCECEF"/>
-                </a:solidFill>
-              </a:rPr>
-              <a:t>That is the whole piece. Check yours looks the same before moving on.</a:t>
+            <a:pPr>
+              <a:spcAft>
+                <a:spcPts val="1400"/>
+              </a:spcAft>
+            </a:pPr>
+            <a:r>
+              <a:rPr sz="2400">
+                <a:solidFill>
+                  <a:srgbClr val="1F2A37"/>
+                </a:solidFill>
+              </a:rPr>
+              <a:t>• A box's LAST child - the newest thing added inside it.</a:t>
+            </a:r>
+          </a:p>
+          <a:p>
+            <a:pPr>
+              <a:spcAft>
+                <a:spcPts val="1400"/>
+              </a:spcAft>
+            </a:pPr>
+            <a:r>
+              <a:rPr sz="2400">
+                <a:solidFill>
+                  <a:srgbClr val="1F2A37"/>
+                </a:solidFill>
+              </a:rPr>
+              <a:t>• chat.lastChild is the message you just put in.</a:t>
             </a:r>
           </a:p>
         </p:txBody>
@@ -13571,14 +13035,6 @@
 <file path=ppt/slides/slide39.xml><?xml version="1.0" encoding="utf-8"?>
 <p:sld xmlns:a="http://schemas.openxmlformats.org/drawingml/2006/main" xmlns:p="http://schemas.openxmlformats.org/presentationml/2006/main" xmlns:r="http://schemas.openxmlformats.org/officeDocument/2006/relationships">
   <p:cSld>
-    <p:bg>
-      <p:bgPr>
-        <a:solidFill>
-          <a:srgbClr val="102127"/>
-        </a:solidFill>
-        <a:effectLst/>
-      </p:bgPr>
-    </p:bg>
     <p:spTree>
       <p:nvGrpSpPr>
         <p:cNvPr id="1" name=""/>
@@ -13588,14 +13044,40 @@
       <p:grpSpPr/>
       <p:sp>
         <p:nvSpPr>
-          <p:cNvPr id="2" name="TextBox 1"/>
+          <p:cNvPr id="2" name="Title 1"/>
+          <p:cNvSpPr>
+            <a:spLocks noGrp="1"/>
+          </p:cNvSpPr>
+          <p:nvPr>
+            <p:ph type="title"/>
+          </p:nvPr>
+        </p:nvSpPr>
+        <p:spPr/>
+        <p:txBody>
+          <a:bodyPr/>
+          <a:lstStyle/>
+          <a:p>
+            <a:r>
+              <a:rPr sz="3800" b="1">
+                <a:solidFill>
+                  <a:srgbClr val="1F2A37"/>
+                </a:solidFill>
+              </a:rPr>
+              <a:t>.remove()</a:t>
+            </a:r>
+          </a:p>
+        </p:txBody>
+      </p:sp>
+      <p:sp>
+        <p:nvSpPr>
+          <p:cNvPr id="3" name="TextBox 2"/>
           <p:cNvSpPr txBox="1"/>
           <p:nvPr/>
         </p:nvSpPr>
         <p:spPr>
           <a:xfrm>
-            <a:off x="502920" y="274320"/>
-            <a:ext cx="11155680" cy="548640"/>
+            <a:off x="868680" y="502920"/>
+            <a:ext cx="5486400" cy="457200"/>
           </a:xfrm>
           <a:prstGeom prst="rect">
             <a:avLst/>
@@ -13609,26 +13091,26 @@
           <a:lstStyle/>
           <a:p>
             <a:r>
-              <a:rPr sz="2200" b="1">
+              <a:rPr sz="1500" b="1">
                 <a:solidFill>
                   <a:srgbClr val="01AEFD"/>
                 </a:solidFill>
               </a:rPr>
-              <a:t>In script.js   -   delete a line</a:t>
-            </a:r>
-          </a:p>
-        </p:txBody>
-      </p:sp>
-      <p:sp>
-        <p:nvSpPr>
-          <p:cNvPr id="3" name="TextBox 2"/>
+              <a:t>JAVASCRIPT</a:t>
+            </a:r>
+          </a:p>
+        </p:txBody>
+      </p:sp>
+      <p:sp>
+        <p:nvSpPr>
+          <p:cNvPr id="4" name="TextBox 3"/>
           <p:cNvSpPr txBox="1"/>
           <p:nvPr/>
         </p:nvSpPr>
         <p:spPr>
           <a:xfrm>
-            <a:off x="502920" y="960120"/>
-            <a:ext cx="11155680" cy="4297680"/>
+            <a:off x="822960" y="1828800"/>
+            <a:ext cx="10515600" cy="4206240"/>
           </a:xfrm>
           <a:prstGeom prst="rect">
             <a:avLst/>
@@ -13636,316 +13118,38 @@
           <a:noFill/>
         </p:spPr>
         <p:txBody>
-          <a:bodyPr wrap="none">
-            <a:spAutoFit/>
-          </a:bodyPr>
-          <a:lstStyle/>
-          <a:p>
-            <a:pPr>
-              <a:spcAft>
-                <a:spcPts val="0"/>
-              </a:spcAft>
-            </a:pPr>
-            <a:r>
-              <a:rPr sz="1300">
-                <a:solidFill>
-                  <a:srgbClr val="6D8C97"/>
-                </a:solidFill>
-                <a:latin typeface="Consolas"/>
-              </a:rPr>
-              <a:t>  29  </a:t>
-            </a:r>
-            <a:r>
-              <a:rPr sz="1300">
-                <a:solidFill>
-                  <a:srgbClr val="6D8C97"/>
-                </a:solidFill>
-                <a:latin typeface="Consolas"/>
-              </a:rPr>
-              <a:t> </a:t>
-            </a:r>
-          </a:p>
-          <a:p>
-            <a:pPr>
-              <a:spcAft>
-                <a:spcPts val="0"/>
-              </a:spcAft>
-            </a:pPr>
-            <a:r>
-              <a:rPr sz="1300">
-                <a:solidFill>
-                  <a:srgbClr val="6D8C97"/>
-                </a:solidFill>
-                <a:latin typeface="Consolas"/>
-              </a:rPr>
-              <a:t>  30  </a:t>
-            </a:r>
-            <a:r>
-              <a:rPr sz="1300">
-                <a:solidFill>
-                  <a:srgbClr val="6D8C97"/>
-                </a:solidFill>
-                <a:latin typeface="Consolas"/>
-              </a:rPr>
-              <a:t>// The smallest useful request: what models does this server have?</a:t>
-            </a:r>
-          </a:p>
-          <a:p>
-            <a:pPr>
-              <a:spcAft>
-                <a:spcPts val="0"/>
-              </a:spcAft>
-            </a:pPr>
-            <a:r>
-              <a:rPr sz="1300">
-                <a:solidFill>
-                  <a:srgbClr val="6D8C97"/>
-                </a:solidFill>
-                <a:latin typeface="Consolas"/>
-              </a:rPr>
-              <a:t>  31  </a:t>
-            </a:r>
-            <a:r>
-              <a:rPr sz="1300">
-                <a:solidFill>
-                  <a:srgbClr val="6D8C97"/>
-                </a:solidFill>
-                <a:latin typeface="Consolas"/>
-              </a:rPr>
-              <a:t>// 'async' means this function does something slow and can be waited for.</a:t>
-            </a:r>
-          </a:p>
-          <a:p>
-            <a:pPr>
-              <a:spcAft>
-                <a:spcPts val="0"/>
-              </a:spcAft>
-            </a:pPr>
-            <a:r>
-              <a:rPr sz="1300">
-                <a:solidFill>
-                  <a:srgbClr val="6D8C97"/>
-                </a:solidFill>
-                <a:latin typeface="Consolas"/>
-              </a:rPr>
-              <a:t>  32  </a:t>
-            </a:r>
-            <a:r>
-              <a:rPr sz="1300">
-                <a:solidFill>
-                  <a:srgbClr val="6D8C97"/>
-                </a:solidFill>
-                <a:latin typeface="Consolas"/>
-              </a:rPr>
-              <a:t>async function listModels() {</a:t>
-            </a:r>
-          </a:p>
-          <a:p>
-            <a:pPr>
-              <a:spcAft>
-                <a:spcPts val="0"/>
-              </a:spcAft>
-            </a:pPr>
-            <a:r>
-              <a:rPr sz="1300">
-                <a:solidFill>
-                  <a:srgbClr val="6D8C97"/>
-                </a:solidFill>
-                <a:latin typeface="Consolas"/>
-              </a:rPr>
-              <a:t>  33  </a:t>
-            </a:r>
-            <a:r>
-              <a:rPr sz="1300">
-                <a:solidFill>
-                  <a:srgbClr val="6D8C97"/>
-                </a:solidFill>
-                <a:latin typeface="Consolas"/>
-              </a:rPr>
-              <a:t>  const res = await fetch(AI_BASE + '/v1/models', {</a:t>
-            </a:r>
-          </a:p>
-          <a:p>
-            <a:pPr>
-              <a:spcAft>
-                <a:spcPts val="0"/>
-              </a:spcAft>
-            </a:pPr>
-            <a:r>
-              <a:rPr sz="1300">
-                <a:solidFill>
-                  <a:srgbClr val="6D8C97"/>
-                </a:solidFill>
-                <a:latin typeface="Consolas"/>
-              </a:rPr>
-              <a:t>  34  </a:t>
-            </a:r>
-            <a:r>
-              <a:rPr sz="1300">
-                <a:solidFill>
-                  <a:srgbClr val="6D8C97"/>
-                </a:solidFill>
-                <a:latin typeface="Consolas"/>
-              </a:rPr>
-              <a:t>    headers: { 'Authorization': 'Bearer ' + API_KEY }</a:t>
-            </a:r>
-          </a:p>
-          <a:p>
-            <a:pPr>
-              <a:spcAft>
-                <a:spcPts val="0"/>
-              </a:spcAft>
-            </a:pPr>
-            <a:r>
-              <a:rPr sz="1300">
-                <a:solidFill>
-                  <a:srgbClr val="6D8C97"/>
-                </a:solidFill>
-                <a:latin typeface="Consolas"/>
-              </a:rPr>
-              <a:t>  35  </a:t>
-            </a:r>
-            <a:r>
-              <a:rPr sz="1300">
-                <a:solidFill>
-                  <a:srgbClr val="6D8C97"/>
-                </a:solidFill>
-                <a:latin typeface="Consolas"/>
-              </a:rPr>
-              <a:t>  });</a:t>
-            </a:r>
-          </a:p>
-          <a:p>
-            <a:pPr>
-              <a:spcAft>
-                <a:spcPts val="0"/>
-              </a:spcAft>
-            </a:pPr>
-            <a:r>
-              <a:rPr sz="1300">
-                <a:solidFill>
-                  <a:srgbClr val="6D8C97"/>
-                </a:solidFill>
-                <a:latin typeface="Consolas"/>
-              </a:rPr>
-              <a:t>  36  </a:t>
-            </a:r>
-            <a:r>
-              <a:rPr sz="1300">
-                <a:solidFill>
-                  <a:srgbClr val="6D8C97"/>
-                </a:solidFill>
-                <a:latin typeface="Consolas"/>
-              </a:rPr>
-              <a:t>  const data = await res.json();   // the answer arrives as text; this reads it</a:t>
-            </a:r>
-          </a:p>
-          <a:p>
-            <a:pPr>
-              <a:spcAft>
-                <a:spcPts val="0"/>
-              </a:spcAft>
-            </a:pPr>
-            <a:r>
-              <a:rPr sz="1300">
-                <a:solidFill>
-                  <a:srgbClr val="6D8C97"/>
-                </a:solidFill>
-                <a:latin typeface="Consolas"/>
-              </a:rPr>
-              <a:t>  37  </a:t>
-            </a:r>
-            <a:r>
-              <a:rPr sz="1300">
-                <a:solidFill>
-                  <a:srgbClr val="6D8C97"/>
-                </a:solidFill>
-                <a:latin typeface="Consolas"/>
-              </a:rPr>
-              <a:t>  console.log('The server offers:', data.data);</a:t>
-            </a:r>
-          </a:p>
-          <a:p>
-            <a:pPr>
-              <a:spcAft>
-                <a:spcPts val="0"/>
-              </a:spcAft>
-            </a:pPr>
-            <a:r>
-              <a:rPr sz="1300">
-                <a:solidFill>
-                  <a:srgbClr val="6D8C97"/>
-                </a:solidFill>
-                <a:latin typeface="Consolas"/>
-              </a:rPr>
-              <a:t>  38  </a:t>
-            </a:r>
-            <a:r>
-              <a:rPr sz="1300">
-                <a:solidFill>
-                  <a:srgbClr val="6D8C97"/>
-                </a:solidFill>
-                <a:latin typeface="Consolas"/>
-              </a:rPr>
-              <a:t>}</a:t>
-            </a:r>
-          </a:p>
-          <a:p>
-            <a:pPr>
-              <a:spcAft>
-                <a:spcPts val="0"/>
-              </a:spcAft>
-            </a:pPr>
-            <a:r>
-              <a:rPr sz="1300">
-                <a:solidFill>
-                  <a:srgbClr val="6D8C97"/>
-                </a:solidFill>
-                <a:latin typeface="Consolas"/>
-              </a:rPr>
-              <a:t>   -  </a:t>
-            </a:r>
-            <a:r>
-              <a:rPr sz="1300" strike="sngStrike">
-                <a:solidFill>
-                  <a:srgbClr val="F3928B"/>
-                </a:solidFill>
-                <a:latin typeface="Consolas"/>
-              </a:rPr>
-              <a:t>listModels();</a:t>
-            </a:r>
-          </a:p>
-        </p:txBody>
-      </p:sp>
-      <p:sp>
-        <p:nvSpPr>
-          <p:cNvPr id="4" name="TextBox 3"/>
-          <p:cNvSpPr txBox="1"/>
-          <p:nvPr/>
-        </p:nvSpPr>
-        <p:spPr>
-          <a:xfrm>
-            <a:off x="548640" y="5623560"/>
-            <a:ext cx="11064240" cy="1051560"/>
-          </a:xfrm>
-          <a:prstGeom prst="rect">
-            <a:avLst/>
-          </a:prstGeom>
-          <a:noFill/>
-        </p:spPr>
-        <p:txBody>
           <a:bodyPr wrap="square">
             <a:spAutoFit/>
           </a:bodyPr>
           <a:lstStyle/>
           <a:p>
-            <a:r>
-              <a:rPr sz="2000">
-                <a:solidFill>
-                  <a:srgbClr val="DCECEF"/>
-                </a:solidFill>
-              </a:rPr>
-              <a:t>Delete this line. askAI does the asking now, so the old test call is no longer needed - your file should have no listModels() call left.</a:t>
+            <a:pPr>
+              <a:spcAft>
+                <a:spcPts val="1400"/>
+              </a:spcAft>
+            </a:pPr>
+            <a:r>
+              <a:rPr sz="2400">
+                <a:solidFill>
+                  <a:srgbClr val="1F2A37"/>
+                </a:solidFill>
+              </a:rPr>
+              <a:t>• Deletes an element from the page.</a:t>
+            </a:r>
+          </a:p>
+          <a:p>
+            <a:pPr>
+              <a:spcAft>
+                <a:spcPts val="1400"/>
+              </a:spcAft>
+            </a:pPr>
+            <a:r>
+              <a:rPr sz="2400">
+                <a:solidFill>
+                  <a:srgbClr val="1F2A37"/>
+                </a:solidFill>
+              </a:rPr>
+              <a:t>• chat.lastChild.remove() takes the last message back off.</a:t>
             </a:r>
           </a:p>
         </p:txBody>
@@ -14088,6 +13292,1641 @@
 <file path=ppt/slides/slide40.xml><?xml version="1.0" encoding="utf-8"?>
 <p:sld xmlns:a="http://schemas.openxmlformats.org/drawingml/2006/main" xmlns:p="http://schemas.openxmlformats.org/presentationml/2006/main" xmlns:r="http://schemas.openxmlformats.org/officeDocument/2006/relationships">
   <p:cSld>
+    <p:bg>
+      <p:bgPr>
+        <a:solidFill>
+          <a:srgbClr val="102127"/>
+        </a:solidFill>
+        <a:effectLst/>
+      </p:bgPr>
+    </p:bg>
+    <p:spTree>
+      <p:nvGrpSpPr>
+        <p:cNvPr id="1" name=""/>
+        <p:cNvGrpSpPr/>
+        <p:nvPr/>
+      </p:nvGrpSpPr>
+      <p:grpSpPr/>
+      <p:sp>
+        <p:nvSpPr>
+          <p:cNvPr id="2" name="TextBox 1"/>
+          <p:cNvSpPr txBox="1"/>
+          <p:nvPr/>
+        </p:nvSpPr>
+        <p:spPr>
+          <a:xfrm>
+            <a:off x="502920" y="274320"/>
+            <a:ext cx="11155680" cy="548640"/>
+          </a:xfrm>
+          <a:prstGeom prst="rect">
+            <a:avLst/>
+          </a:prstGeom>
+          <a:noFill/>
+        </p:spPr>
+        <p:txBody>
+          <a:bodyPr wrap="none">
+            <a:spAutoFit/>
+          </a:bodyPr>
+          <a:lstStyle/>
+          <a:p>
+            <a:r>
+              <a:rPr sz="2200" b="1">
+                <a:solidFill>
+                  <a:srgbClr val="01AEFD"/>
+                </a:solidFill>
+              </a:rPr>
+              <a:t>Type this into script.js   -   line 69</a:t>
+            </a:r>
+          </a:p>
+        </p:txBody>
+      </p:sp>
+      <p:sp>
+        <p:nvSpPr>
+          <p:cNvPr id="3" name="TextBox 2"/>
+          <p:cNvSpPr txBox="1"/>
+          <p:nvPr/>
+        </p:nvSpPr>
+        <p:spPr>
+          <a:xfrm>
+            <a:off x="502920" y="960120"/>
+            <a:ext cx="11155680" cy="4297680"/>
+          </a:xfrm>
+          <a:prstGeom prst="rect">
+            <a:avLst/>
+          </a:prstGeom>
+          <a:noFill/>
+        </p:spPr>
+        <p:txBody>
+          <a:bodyPr wrap="none">
+            <a:spAutoFit/>
+          </a:bodyPr>
+          <a:lstStyle/>
+          <a:p>
+            <a:pPr>
+              <a:spcAft>
+                <a:spcPts val="0"/>
+              </a:spcAft>
+            </a:pPr>
+            <a:r>
+              <a:rPr sz="1300">
+                <a:solidFill>
+                  <a:srgbClr val="6D8C97"/>
+                </a:solidFill>
+                <a:latin typeface="Consolas"/>
+              </a:rPr>
+              <a:t>  59  </a:t>
+            </a:r>
+            <a:r>
+              <a:rPr sz="1300">
+                <a:solidFill>
+                  <a:srgbClr val="6D8C97"/>
+                </a:solidFill>
+                <a:latin typeface="Consolas"/>
+              </a:rPr>
+              <a:t> </a:t>
+            </a:r>
+          </a:p>
+          <a:p>
+            <a:pPr>
+              <a:spcAft>
+                <a:spcPts val="0"/>
+              </a:spcAft>
+            </a:pPr>
+            <a:r>
+              <a:rPr sz="1300">
+                <a:solidFill>
+                  <a:srgbClr val="6D8C97"/>
+                </a:solidFill>
+                <a:latin typeface="Consolas"/>
+              </a:rPr>
+              <a:t>  60  </a:t>
+            </a:r>
+            <a:r>
+              <a:rPr sz="1300">
+                <a:solidFill>
+                  <a:srgbClr val="6D8C97"/>
+                </a:solidFill>
+                <a:latin typeface="Consolas"/>
+              </a:rPr>
+              <a:t>// The browser calls this when the form is submitted.</a:t>
+            </a:r>
+          </a:p>
+          <a:p>
+            <a:pPr>
+              <a:spcAft>
+                <a:spcPts val="0"/>
+              </a:spcAft>
+            </a:pPr>
+            <a:r>
+              <a:rPr sz="1300">
+                <a:solidFill>
+                  <a:srgbClr val="6D8C97"/>
+                </a:solidFill>
+                <a:latin typeface="Consolas"/>
+              </a:rPr>
+              <a:t>  61  </a:t>
+            </a:r>
+            <a:r>
+              <a:rPr sz="1300">
+                <a:solidFill>
+                  <a:srgbClr val="6D8C97"/>
+                </a:solidFill>
+                <a:latin typeface="Consolas"/>
+              </a:rPr>
+              <a:t>composer.addEventListener('submit', async function (event) {</a:t>
+            </a:r>
+          </a:p>
+          <a:p>
+            <a:pPr>
+              <a:spcAft>
+                <a:spcPts val="0"/>
+              </a:spcAft>
+            </a:pPr>
+            <a:r>
+              <a:rPr sz="1300">
+                <a:solidFill>
+                  <a:srgbClr val="6D8C97"/>
+                </a:solidFill>
+                <a:latin typeface="Consolas"/>
+              </a:rPr>
+              <a:t>  62  </a:t>
+            </a:r>
+            <a:r>
+              <a:rPr sz="1300">
+                <a:solidFill>
+                  <a:srgbClr val="6D8C97"/>
+                </a:solidFill>
+                <a:latin typeface="Consolas"/>
+              </a:rPr>
+              <a:t>  event.preventDefault();</a:t>
+            </a:r>
+          </a:p>
+          <a:p>
+            <a:pPr>
+              <a:spcAft>
+                <a:spcPts val="0"/>
+              </a:spcAft>
+            </a:pPr>
+            <a:r>
+              <a:rPr sz="1300">
+                <a:solidFill>
+                  <a:srgbClr val="6D8C97"/>
+                </a:solidFill>
+                <a:latin typeface="Consolas"/>
+              </a:rPr>
+              <a:t>  63  </a:t>
+            </a:r>
+            <a:r>
+              <a:rPr sz="1300">
+                <a:solidFill>
+                  <a:srgbClr val="6D8C97"/>
+                </a:solidFill>
+                <a:latin typeface="Consolas"/>
+              </a:rPr>
+              <a:t>  const text = promptBox.value.trim();</a:t>
+            </a:r>
+          </a:p>
+          <a:p>
+            <a:pPr>
+              <a:spcAft>
+                <a:spcPts val="0"/>
+              </a:spcAft>
+            </a:pPr>
+            <a:r>
+              <a:rPr sz="1300">
+                <a:solidFill>
+                  <a:srgbClr val="6D8C97"/>
+                </a:solidFill>
+                <a:latin typeface="Consolas"/>
+              </a:rPr>
+              <a:t>  64  </a:t>
+            </a:r>
+            <a:r>
+              <a:rPr sz="1300">
+                <a:solidFill>
+                  <a:srgbClr val="6D8C97"/>
+                </a:solidFill>
+                <a:latin typeface="Consolas"/>
+              </a:rPr>
+              <a:t>  if (text === '') { return; }</a:t>
+            </a:r>
+          </a:p>
+          <a:p>
+            <a:pPr>
+              <a:spcAft>
+                <a:spcPts val="0"/>
+              </a:spcAft>
+            </a:pPr>
+            <a:r>
+              <a:rPr sz="1300">
+                <a:solidFill>
+                  <a:srgbClr val="6D8C97"/>
+                </a:solidFill>
+                <a:latin typeface="Consolas"/>
+              </a:rPr>
+              <a:t>  65  </a:t>
+            </a:r>
+            <a:r>
+              <a:rPr sz="1300">
+                <a:solidFill>
+                  <a:srgbClr val="6D8C97"/>
+                </a:solidFill>
+                <a:latin typeface="Consolas"/>
+              </a:rPr>
+              <a:t>  promptBox.value = '';</a:t>
+            </a:r>
+          </a:p>
+          <a:p>
+            <a:pPr>
+              <a:spcAft>
+                <a:spcPts val="0"/>
+              </a:spcAft>
+            </a:pPr>
+            <a:r>
+              <a:rPr sz="1300">
+                <a:solidFill>
+                  <a:srgbClr val="6D8C97"/>
+                </a:solidFill>
+                <a:latin typeface="Consolas"/>
+              </a:rPr>
+              <a:t>  66  </a:t>
+            </a:r>
+            <a:r>
+              <a:rPr sz="1300">
+                <a:solidFill>
+                  <a:srgbClr val="6D8C97"/>
+                </a:solidFill>
+                <a:latin typeface="Consolas"/>
+              </a:rPr>
+              <a:t>  addLine('You', text);</a:t>
+            </a:r>
+          </a:p>
+          <a:p>
+            <a:pPr>
+              <a:spcAft>
+                <a:spcPts val="0"/>
+              </a:spcAft>
+            </a:pPr>
+            <a:r>
+              <a:rPr sz="1300">
+                <a:solidFill>
+                  <a:srgbClr val="6D8C97"/>
+                </a:solidFill>
+                <a:latin typeface="Consolas"/>
+              </a:rPr>
+              <a:t>  67  </a:t>
+            </a:r>
+            <a:r>
+              <a:rPr sz="1300">
+                <a:solidFill>
+                  <a:srgbClr val="6D8C97"/>
+                </a:solidFill>
+                <a:latin typeface="Consolas"/>
+              </a:rPr>
+              <a:t>  addLine('Companion', 'thinking...');</a:t>
+            </a:r>
+          </a:p>
+          <a:p>
+            <a:pPr>
+              <a:spcAft>
+                <a:spcPts val="0"/>
+              </a:spcAft>
+            </a:pPr>
+            <a:r>
+              <a:rPr sz="1300">
+                <a:solidFill>
+                  <a:srgbClr val="6D8C97"/>
+                </a:solidFill>
+                <a:latin typeface="Consolas"/>
+              </a:rPr>
+              <a:t>  68  </a:t>
+            </a:r>
+            <a:r>
+              <a:rPr sz="1300">
+                <a:solidFill>
+                  <a:srgbClr val="6D8C97"/>
+                </a:solidFill>
+                <a:latin typeface="Consolas"/>
+              </a:rPr>
+              <a:t>  const reply = await askAI(text);       // this is the slow bit</a:t>
+            </a:r>
+          </a:p>
+          <a:p>
+            <a:pPr>
+              <a:spcAft>
+                <a:spcPts val="0"/>
+              </a:spcAft>
+            </a:pPr>
+            <a:r>
+              <a:rPr sz="1300">
+                <a:solidFill>
+                  <a:srgbClr val="6D8C97"/>
+                </a:solidFill>
+                <a:latin typeface="Consolas"/>
+              </a:rPr>
+              <a:t>  69  </a:t>
+            </a:r>
+            <a:r>
+              <a:rPr sz="1300">
+                <a:solidFill>
+                  <a:srgbClr val="7FE0A0"/>
+                </a:solidFill>
+                <a:latin typeface="Consolas"/>
+              </a:rPr>
+              <a:t>  chat.lastChild.remove();               // take the 'thinking' line away</a:t>
+            </a:r>
+          </a:p>
+        </p:txBody>
+      </p:sp>
+      <p:sp>
+        <p:nvSpPr>
+          <p:cNvPr id="4" name="TextBox 3"/>
+          <p:cNvSpPr txBox="1"/>
+          <p:nvPr/>
+        </p:nvSpPr>
+        <p:spPr>
+          <a:xfrm>
+            <a:off x="548640" y="5623560"/>
+            <a:ext cx="11064240" cy="1051560"/>
+          </a:xfrm>
+          <a:prstGeom prst="rect">
+            <a:avLst/>
+          </a:prstGeom>
+          <a:noFill/>
+        </p:spPr>
+        <p:txBody>
+          <a:bodyPr wrap="square">
+            <a:spAutoFit/>
+          </a:bodyPr>
+          <a:lstStyle/>
+          <a:p>
+            <a:r>
+              <a:rPr sz="2000">
+                <a:solidFill>
+                  <a:srgbClr val="DCECEF"/>
+                </a:solidFill>
+              </a:rPr>
+              <a:t>Remove the 'thinking...' line now the real answer is here.</a:t>
+            </a:r>
+          </a:p>
+        </p:txBody>
+      </p:sp>
+    </p:spTree>
+  </p:cSld>
+  <p:clrMapOvr>
+    <a:masterClrMapping/>
+  </p:clrMapOvr>
+</p:sld>
+</file>
+
+<file path=ppt/slides/slide41.xml><?xml version="1.0" encoding="utf-8"?>
+<p:sld xmlns:a="http://schemas.openxmlformats.org/drawingml/2006/main" xmlns:p="http://schemas.openxmlformats.org/presentationml/2006/main" xmlns:r="http://schemas.openxmlformats.org/officeDocument/2006/relationships">
+  <p:cSld>
+    <p:bg>
+      <p:bgPr>
+        <a:solidFill>
+          <a:srgbClr val="102127"/>
+        </a:solidFill>
+        <a:effectLst/>
+      </p:bgPr>
+    </p:bg>
+    <p:spTree>
+      <p:nvGrpSpPr>
+        <p:cNvPr id="1" name=""/>
+        <p:cNvGrpSpPr/>
+        <p:nvPr/>
+      </p:nvGrpSpPr>
+      <p:grpSpPr/>
+      <p:sp>
+        <p:nvSpPr>
+          <p:cNvPr id="2" name="TextBox 1"/>
+          <p:cNvSpPr txBox="1"/>
+          <p:nvPr/>
+        </p:nvSpPr>
+        <p:spPr>
+          <a:xfrm>
+            <a:off x="502920" y="274320"/>
+            <a:ext cx="11155680" cy="548640"/>
+          </a:xfrm>
+          <a:prstGeom prst="rect">
+            <a:avLst/>
+          </a:prstGeom>
+          <a:noFill/>
+        </p:spPr>
+        <p:txBody>
+          <a:bodyPr wrap="none">
+            <a:spAutoFit/>
+          </a:bodyPr>
+          <a:lstStyle/>
+          <a:p>
+            <a:r>
+              <a:rPr sz="2200" b="1">
+                <a:solidFill>
+                  <a:srgbClr val="01AEFD"/>
+                </a:solidFill>
+              </a:rPr>
+              <a:t>Type this into script.js   -   line 70</a:t>
+            </a:r>
+          </a:p>
+        </p:txBody>
+      </p:sp>
+      <p:sp>
+        <p:nvSpPr>
+          <p:cNvPr id="3" name="TextBox 2"/>
+          <p:cNvSpPr txBox="1"/>
+          <p:nvPr/>
+        </p:nvSpPr>
+        <p:spPr>
+          <a:xfrm>
+            <a:off x="502920" y="960120"/>
+            <a:ext cx="11155680" cy="4297680"/>
+          </a:xfrm>
+          <a:prstGeom prst="rect">
+            <a:avLst/>
+          </a:prstGeom>
+          <a:noFill/>
+        </p:spPr>
+        <p:txBody>
+          <a:bodyPr wrap="none">
+            <a:spAutoFit/>
+          </a:bodyPr>
+          <a:lstStyle/>
+          <a:p>
+            <a:pPr>
+              <a:spcAft>
+                <a:spcPts val="0"/>
+              </a:spcAft>
+            </a:pPr>
+            <a:r>
+              <a:rPr sz="1300">
+                <a:solidFill>
+                  <a:srgbClr val="6D8C97"/>
+                </a:solidFill>
+                <a:latin typeface="Consolas"/>
+              </a:rPr>
+              <a:t>  59  </a:t>
+            </a:r>
+            <a:r>
+              <a:rPr sz="1300">
+                <a:solidFill>
+                  <a:srgbClr val="6D8C97"/>
+                </a:solidFill>
+                <a:latin typeface="Consolas"/>
+              </a:rPr>
+              <a:t> </a:t>
+            </a:r>
+          </a:p>
+          <a:p>
+            <a:pPr>
+              <a:spcAft>
+                <a:spcPts val="0"/>
+              </a:spcAft>
+            </a:pPr>
+            <a:r>
+              <a:rPr sz="1300">
+                <a:solidFill>
+                  <a:srgbClr val="6D8C97"/>
+                </a:solidFill>
+                <a:latin typeface="Consolas"/>
+              </a:rPr>
+              <a:t>  60  </a:t>
+            </a:r>
+            <a:r>
+              <a:rPr sz="1300">
+                <a:solidFill>
+                  <a:srgbClr val="6D8C97"/>
+                </a:solidFill>
+                <a:latin typeface="Consolas"/>
+              </a:rPr>
+              <a:t>// The browser calls this when the form is submitted.</a:t>
+            </a:r>
+          </a:p>
+          <a:p>
+            <a:pPr>
+              <a:spcAft>
+                <a:spcPts val="0"/>
+              </a:spcAft>
+            </a:pPr>
+            <a:r>
+              <a:rPr sz="1300">
+                <a:solidFill>
+                  <a:srgbClr val="6D8C97"/>
+                </a:solidFill>
+                <a:latin typeface="Consolas"/>
+              </a:rPr>
+              <a:t>  61  </a:t>
+            </a:r>
+            <a:r>
+              <a:rPr sz="1300">
+                <a:solidFill>
+                  <a:srgbClr val="6D8C97"/>
+                </a:solidFill>
+                <a:latin typeface="Consolas"/>
+              </a:rPr>
+              <a:t>composer.addEventListener('submit', async function (event) {</a:t>
+            </a:r>
+          </a:p>
+          <a:p>
+            <a:pPr>
+              <a:spcAft>
+                <a:spcPts val="0"/>
+              </a:spcAft>
+            </a:pPr>
+            <a:r>
+              <a:rPr sz="1300">
+                <a:solidFill>
+                  <a:srgbClr val="6D8C97"/>
+                </a:solidFill>
+                <a:latin typeface="Consolas"/>
+              </a:rPr>
+              <a:t>  62  </a:t>
+            </a:r>
+            <a:r>
+              <a:rPr sz="1300">
+                <a:solidFill>
+                  <a:srgbClr val="6D8C97"/>
+                </a:solidFill>
+                <a:latin typeface="Consolas"/>
+              </a:rPr>
+              <a:t>  event.preventDefault();</a:t>
+            </a:r>
+          </a:p>
+          <a:p>
+            <a:pPr>
+              <a:spcAft>
+                <a:spcPts val="0"/>
+              </a:spcAft>
+            </a:pPr>
+            <a:r>
+              <a:rPr sz="1300">
+                <a:solidFill>
+                  <a:srgbClr val="6D8C97"/>
+                </a:solidFill>
+                <a:latin typeface="Consolas"/>
+              </a:rPr>
+              <a:t>  63  </a:t>
+            </a:r>
+            <a:r>
+              <a:rPr sz="1300">
+                <a:solidFill>
+                  <a:srgbClr val="6D8C97"/>
+                </a:solidFill>
+                <a:latin typeface="Consolas"/>
+              </a:rPr>
+              <a:t>  const text = promptBox.value.trim();</a:t>
+            </a:r>
+          </a:p>
+          <a:p>
+            <a:pPr>
+              <a:spcAft>
+                <a:spcPts val="0"/>
+              </a:spcAft>
+            </a:pPr>
+            <a:r>
+              <a:rPr sz="1300">
+                <a:solidFill>
+                  <a:srgbClr val="6D8C97"/>
+                </a:solidFill>
+                <a:latin typeface="Consolas"/>
+              </a:rPr>
+              <a:t>  64  </a:t>
+            </a:r>
+            <a:r>
+              <a:rPr sz="1300">
+                <a:solidFill>
+                  <a:srgbClr val="6D8C97"/>
+                </a:solidFill>
+                <a:latin typeface="Consolas"/>
+              </a:rPr>
+              <a:t>  if (text === '') { return; }</a:t>
+            </a:r>
+          </a:p>
+          <a:p>
+            <a:pPr>
+              <a:spcAft>
+                <a:spcPts val="0"/>
+              </a:spcAft>
+            </a:pPr>
+            <a:r>
+              <a:rPr sz="1300">
+                <a:solidFill>
+                  <a:srgbClr val="6D8C97"/>
+                </a:solidFill>
+                <a:latin typeface="Consolas"/>
+              </a:rPr>
+              <a:t>  65  </a:t>
+            </a:r>
+            <a:r>
+              <a:rPr sz="1300">
+                <a:solidFill>
+                  <a:srgbClr val="6D8C97"/>
+                </a:solidFill>
+                <a:latin typeface="Consolas"/>
+              </a:rPr>
+              <a:t>  promptBox.value = '';</a:t>
+            </a:r>
+          </a:p>
+          <a:p>
+            <a:pPr>
+              <a:spcAft>
+                <a:spcPts val="0"/>
+              </a:spcAft>
+            </a:pPr>
+            <a:r>
+              <a:rPr sz="1300">
+                <a:solidFill>
+                  <a:srgbClr val="6D8C97"/>
+                </a:solidFill>
+                <a:latin typeface="Consolas"/>
+              </a:rPr>
+              <a:t>  66  </a:t>
+            </a:r>
+            <a:r>
+              <a:rPr sz="1300">
+                <a:solidFill>
+                  <a:srgbClr val="6D8C97"/>
+                </a:solidFill>
+                <a:latin typeface="Consolas"/>
+              </a:rPr>
+              <a:t>  addLine('You', text);</a:t>
+            </a:r>
+          </a:p>
+          <a:p>
+            <a:pPr>
+              <a:spcAft>
+                <a:spcPts val="0"/>
+              </a:spcAft>
+            </a:pPr>
+            <a:r>
+              <a:rPr sz="1300">
+                <a:solidFill>
+                  <a:srgbClr val="6D8C97"/>
+                </a:solidFill>
+                <a:latin typeface="Consolas"/>
+              </a:rPr>
+              <a:t>  67  </a:t>
+            </a:r>
+            <a:r>
+              <a:rPr sz="1300">
+                <a:solidFill>
+                  <a:srgbClr val="6D8C97"/>
+                </a:solidFill>
+                <a:latin typeface="Consolas"/>
+              </a:rPr>
+              <a:t>  addLine('Companion', 'thinking...');</a:t>
+            </a:r>
+          </a:p>
+          <a:p>
+            <a:pPr>
+              <a:spcAft>
+                <a:spcPts val="0"/>
+              </a:spcAft>
+            </a:pPr>
+            <a:r>
+              <a:rPr sz="1300">
+                <a:solidFill>
+                  <a:srgbClr val="6D8C97"/>
+                </a:solidFill>
+                <a:latin typeface="Consolas"/>
+              </a:rPr>
+              <a:t>  68  </a:t>
+            </a:r>
+            <a:r>
+              <a:rPr sz="1300">
+                <a:solidFill>
+                  <a:srgbClr val="6D8C97"/>
+                </a:solidFill>
+                <a:latin typeface="Consolas"/>
+              </a:rPr>
+              <a:t>  const reply = await askAI(text);       // this is the slow bit</a:t>
+            </a:r>
+          </a:p>
+          <a:p>
+            <a:pPr>
+              <a:spcAft>
+                <a:spcPts val="0"/>
+              </a:spcAft>
+            </a:pPr>
+            <a:r>
+              <a:rPr sz="1300">
+                <a:solidFill>
+                  <a:srgbClr val="6D8C97"/>
+                </a:solidFill>
+                <a:latin typeface="Consolas"/>
+              </a:rPr>
+              <a:t>  69  </a:t>
+            </a:r>
+            <a:r>
+              <a:rPr sz="1300">
+                <a:solidFill>
+                  <a:srgbClr val="6D8C97"/>
+                </a:solidFill>
+                <a:latin typeface="Consolas"/>
+              </a:rPr>
+              <a:t>  chat.lastChild.remove();               // take the 'thinking' line away</a:t>
+            </a:r>
+          </a:p>
+          <a:p>
+            <a:pPr>
+              <a:spcAft>
+                <a:spcPts val="0"/>
+              </a:spcAft>
+            </a:pPr>
+            <a:r>
+              <a:rPr sz="1300">
+                <a:solidFill>
+                  <a:srgbClr val="6D8C97"/>
+                </a:solidFill>
+                <a:latin typeface="Consolas"/>
+              </a:rPr>
+              <a:t>  70  </a:t>
+            </a:r>
+            <a:r>
+              <a:rPr sz="1300">
+                <a:solidFill>
+                  <a:srgbClr val="7FE0A0"/>
+                </a:solidFill>
+                <a:latin typeface="Consolas"/>
+              </a:rPr>
+              <a:t>  addLine('Companion', reply);</a:t>
+            </a:r>
+          </a:p>
+        </p:txBody>
+      </p:sp>
+      <p:sp>
+        <p:nvSpPr>
+          <p:cNvPr id="4" name="TextBox 3"/>
+          <p:cNvSpPr txBox="1"/>
+          <p:nvPr/>
+        </p:nvSpPr>
+        <p:spPr>
+          <a:xfrm>
+            <a:off x="548640" y="5623560"/>
+            <a:ext cx="11064240" cy="1051560"/>
+          </a:xfrm>
+          <a:prstGeom prst="rect">
+            <a:avLst/>
+          </a:prstGeom>
+          <a:noFill/>
+        </p:spPr>
+        <p:txBody>
+          <a:bodyPr wrap="square">
+            <a:spAutoFit/>
+          </a:bodyPr>
+          <a:lstStyle/>
+          <a:p>
+            <a:r>
+              <a:rPr sz="2000">
+                <a:solidFill>
+                  <a:srgbClr val="DCECEF"/>
+                </a:solidFill>
+              </a:rPr>
+              <a:t>Show the real reply in the chat.</a:t>
+            </a:r>
+          </a:p>
+        </p:txBody>
+      </p:sp>
+    </p:spTree>
+  </p:cSld>
+  <p:clrMapOvr>
+    <a:masterClrMapping/>
+  </p:clrMapOvr>
+</p:sld>
+</file>
+
+<file path=ppt/slides/slide42.xml><?xml version="1.0" encoding="utf-8"?>
+<p:sld xmlns:a="http://schemas.openxmlformats.org/drawingml/2006/main" xmlns:p="http://schemas.openxmlformats.org/presentationml/2006/main" xmlns:r="http://schemas.openxmlformats.org/officeDocument/2006/relationships">
+  <p:cSld>
+    <p:bg>
+      <p:bgPr>
+        <a:solidFill>
+          <a:srgbClr val="102127"/>
+        </a:solidFill>
+        <a:effectLst/>
+      </p:bgPr>
+    </p:bg>
+    <p:spTree>
+      <p:nvGrpSpPr>
+        <p:cNvPr id="1" name=""/>
+        <p:cNvGrpSpPr/>
+        <p:nvPr/>
+      </p:nvGrpSpPr>
+      <p:grpSpPr/>
+      <p:sp>
+        <p:nvSpPr>
+          <p:cNvPr id="2" name="TextBox 1"/>
+          <p:cNvSpPr txBox="1"/>
+          <p:nvPr/>
+        </p:nvSpPr>
+        <p:spPr>
+          <a:xfrm>
+            <a:off x="502920" y="274320"/>
+            <a:ext cx="11155680" cy="548640"/>
+          </a:xfrm>
+          <a:prstGeom prst="rect">
+            <a:avLst/>
+          </a:prstGeom>
+          <a:noFill/>
+        </p:spPr>
+        <p:txBody>
+          <a:bodyPr wrap="none">
+            <a:spAutoFit/>
+          </a:bodyPr>
+          <a:lstStyle/>
+          <a:p>
+            <a:r>
+              <a:rPr sz="2200" b="1">
+                <a:solidFill>
+                  <a:srgbClr val="01AEFD"/>
+                </a:solidFill>
+              </a:rPr>
+              <a:t>All together in script.js</a:t>
+            </a:r>
+          </a:p>
+        </p:txBody>
+      </p:sp>
+      <p:sp>
+        <p:nvSpPr>
+          <p:cNvPr id="3" name="TextBox 2"/>
+          <p:cNvSpPr txBox="1"/>
+          <p:nvPr/>
+        </p:nvSpPr>
+        <p:spPr>
+          <a:xfrm>
+            <a:off x="502920" y="960120"/>
+            <a:ext cx="11155680" cy="4297680"/>
+          </a:xfrm>
+          <a:prstGeom prst="rect">
+            <a:avLst/>
+          </a:prstGeom>
+          <a:noFill/>
+        </p:spPr>
+        <p:txBody>
+          <a:bodyPr wrap="none">
+            <a:spAutoFit/>
+          </a:bodyPr>
+          <a:lstStyle/>
+          <a:p>
+            <a:pPr>
+              <a:spcAft>
+                <a:spcPts val="0"/>
+              </a:spcAft>
+            </a:pPr>
+            <a:r>
+              <a:rPr sz="1300">
+                <a:solidFill>
+                  <a:srgbClr val="6D8C97"/>
+                </a:solidFill>
+                <a:latin typeface="Consolas"/>
+              </a:rPr>
+              <a:t>  59  </a:t>
+            </a:r>
+            <a:r>
+              <a:rPr sz="1300">
+                <a:solidFill>
+                  <a:srgbClr val="7FE0A0"/>
+                </a:solidFill>
+                <a:latin typeface="Consolas"/>
+              </a:rPr>
+              <a:t> </a:t>
+            </a:r>
+          </a:p>
+          <a:p>
+            <a:pPr>
+              <a:spcAft>
+                <a:spcPts val="0"/>
+              </a:spcAft>
+            </a:pPr>
+            <a:r>
+              <a:rPr sz="1300">
+                <a:solidFill>
+                  <a:srgbClr val="6D8C97"/>
+                </a:solidFill>
+                <a:latin typeface="Consolas"/>
+              </a:rPr>
+              <a:t>  60  </a:t>
+            </a:r>
+            <a:r>
+              <a:rPr sz="1300">
+                <a:solidFill>
+                  <a:srgbClr val="7FE0A0"/>
+                </a:solidFill>
+                <a:latin typeface="Consolas"/>
+              </a:rPr>
+              <a:t>// The browser calls this when the form is submitted.</a:t>
+            </a:r>
+          </a:p>
+          <a:p>
+            <a:pPr>
+              <a:spcAft>
+                <a:spcPts val="0"/>
+              </a:spcAft>
+            </a:pPr>
+            <a:r>
+              <a:rPr sz="1300">
+                <a:solidFill>
+                  <a:srgbClr val="6D8C97"/>
+                </a:solidFill>
+                <a:latin typeface="Consolas"/>
+              </a:rPr>
+              <a:t>  61  </a:t>
+            </a:r>
+            <a:r>
+              <a:rPr sz="1300">
+                <a:solidFill>
+                  <a:srgbClr val="7FE0A0"/>
+                </a:solidFill>
+                <a:latin typeface="Consolas"/>
+              </a:rPr>
+              <a:t>composer.addEventListener('submit', async function (event) {</a:t>
+            </a:r>
+          </a:p>
+          <a:p>
+            <a:pPr>
+              <a:spcAft>
+                <a:spcPts val="0"/>
+              </a:spcAft>
+            </a:pPr>
+            <a:r>
+              <a:rPr sz="1300">
+                <a:solidFill>
+                  <a:srgbClr val="6D8C97"/>
+                </a:solidFill>
+                <a:latin typeface="Consolas"/>
+              </a:rPr>
+              <a:t>  62  </a:t>
+            </a:r>
+            <a:r>
+              <a:rPr sz="1300">
+                <a:solidFill>
+                  <a:srgbClr val="7FE0A0"/>
+                </a:solidFill>
+                <a:latin typeface="Consolas"/>
+              </a:rPr>
+              <a:t>  event.preventDefault();</a:t>
+            </a:r>
+          </a:p>
+          <a:p>
+            <a:pPr>
+              <a:spcAft>
+                <a:spcPts val="0"/>
+              </a:spcAft>
+            </a:pPr>
+            <a:r>
+              <a:rPr sz="1300">
+                <a:solidFill>
+                  <a:srgbClr val="6D8C97"/>
+                </a:solidFill>
+                <a:latin typeface="Consolas"/>
+              </a:rPr>
+              <a:t>  63  </a:t>
+            </a:r>
+            <a:r>
+              <a:rPr sz="1300">
+                <a:solidFill>
+                  <a:srgbClr val="7FE0A0"/>
+                </a:solidFill>
+                <a:latin typeface="Consolas"/>
+              </a:rPr>
+              <a:t>  const text = promptBox.value.trim();</a:t>
+            </a:r>
+          </a:p>
+          <a:p>
+            <a:pPr>
+              <a:spcAft>
+                <a:spcPts val="0"/>
+              </a:spcAft>
+            </a:pPr>
+            <a:r>
+              <a:rPr sz="1300">
+                <a:solidFill>
+                  <a:srgbClr val="6D8C97"/>
+                </a:solidFill>
+                <a:latin typeface="Consolas"/>
+              </a:rPr>
+              <a:t>  64  </a:t>
+            </a:r>
+            <a:r>
+              <a:rPr sz="1300">
+                <a:solidFill>
+                  <a:srgbClr val="7FE0A0"/>
+                </a:solidFill>
+                <a:latin typeface="Consolas"/>
+              </a:rPr>
+              <a:t>  if (text === '') { return; }</a:t>
+            </a:r>
+          </a:p>
+          <a:p>
+            <a:pPr>
+              <a:spcAft>
+                <a:spcPts val="0"/>
+              </a:spcAft>
+            </a:pPr>
+            <a:r>
+              <a:rPr sz="1300">
+                <a:solidFill>
+                  <a:srgbClr val="6D8C97"/>
+                </a:solidFill>
+                <a:latin typeface="Consolas"/>
+              </a:rPr>
+              <a:t>  65  </a:t>
+            </a:r>
+            <a:r>
+              <a:rPr sz="1300">
+                <a:solidFill>
+                  <a:srgbClr val="7FE0A0"/>
+                </a:solidFill>
+                <a:latin typeface="Consolas"/>
+              </a:rPr>
+              <a:t>  promptBox.value = '';</a:t>
+            </a:r>
+          </a:p>
+          <a:p>
+            <a:pPr>
+              <a:spcAft>
+                <a:spcPts val="0"/>
+              </a:spcAft>
+            </a:pPr>
+            <a:r>
+              <a:rPr sz="1300">
+                <a:solidFill>
+                  <a:srgbClr val="6D8C97"/>
+                </a:solidFill>
+                <a:latin typeface="Consolas"/>
+              </a:rPr>
+              <a:t>  66  </a:t>
+            </a:r>
+            <a:r>
+              <a:rPr sz="1300">
+                <a:solidFill>
+                  <a:srgbClr val="7FE0A0"/>
+                </a:solidFill>
+                <a:latin typeface="Consolas"/>
+              </a:rPr>
+              <a:t>  addLine('You', text);</a:t>
+            </a:r>
+          </a:p>
+          <a:p>
+            <a:pPr>
+              <a:spcAft>
+                <a:spcPts val="0"/>
+              </a:spcAft>
+            </a:pPr>
+            <a:r>
+              <a:rPr sz="1300">
+                <a:solidFill>
+                  <a:srgbClr val="6D8C97"/>
+                </a:solidFill>
+                <a:latin typeface="Consolas"/>
+              </a:rPr>
+              <a:t>  67  </a:t>
+            </a:r>
+            <a:r>
+              <a:rPr sz="1300">
+                <a:solidFill>
+                  <a:srgbClr val="7FE0A0"/>
+                </a:solidFill>
+                <a:latin typeface="Consolas"/>
+              </a:rPr>
+              <a:t>  addLine('Companion', 'thinking...');</a:t>
+            </a:r>
+          </a:p>
+          <a:p>
+            <a:pPr>
+              <a:spcAft>
+                <a:spcPts val="0"/>
+              </a:spcAft>
+            </a:pPr>
+            <a:r>
+              <a:rPr sz="1300">
+                <a:solidFill>
+                  <a:srgbClr val="6D8C97"/>
+                </a:solidFill>
+                <a:latin typeface="Consolas"/>
+              </a:rPr>
+              <a:t>  68  </a:t>
+            </a:r>
+            <a:r>
+              <a:rPr sz="1300">
+                <a:solidFill>
+                  <a:srgbClr val="7FE0A0"/>
+                </a:solidFill>
+                <a:latin typeface="Consolas"/>
+              </a:rPr>
+              <a:t>  const reply = await askAI(text);       // this is the slow bit</a:t>
+            </a:r>
+          </a:p>
+          <a:p>
+            <a:pPr>
+              <a:spcAft>
+                <a:spcPts val="0"/>
+              </a:spcAft>
+            </a:pPr>
+            <a:r>
+              <a:rPr sz="1300">
+                <a:solidFill>
+                  <a:srgbClr val="6D8C97"/>
+                </a:solidFill>
+                <a:latin typeface="Consolas"/>
+              </a:rPr>
+              <a:t>  69  </a:t>
+            </a:r>
+            <a:r>
+              <a:rPr sz="1300">
+                <a:solidFill>
+                  <a:srgbClr val="7FE0A0"/>
+                </a:solidFill>
+                <a:latin typeface="Consolas"/>
+              </a:rPr>
+              <a:t>  chat.lastChild.remove();               // take the 'thinking' line away</a:t>
+            </a:r>
+          </a:p>
+          <a:p>
+            <a:pPr>
+              <a:spcAft>
+                <a:spcPts val="0"/>
+              </a:spcAft>
+            </a:pPr>
+            <a:r>
+              <a:rPr sz="1300">
+                <a:solidFill>
+                  <a:srgbClr val="6D8C97"/>
+                </a:solidFill>
+                <a:latin typeface="Consolas"/>
+              </a:rPr>
+              <a:t>  70  </a:t>
+            </a:r>
+            <a:r>
+              <a:rPr sz="1300">
+                <a:solidFill>
+                  <a:srgbClr val="7FE0A0"/>
+                </a:solidFill>
+                <a:latin typeface="Consolas"/>
+              </a:rPr>
+              <a:t>  addLine('Companion', reply);</a:t>
+            </a:r>
+          </a:p>
+          <a:p>
+            <a:pPr>
+              <a:spcAft>
+                <a:spcPts val="0"/>
+              </a:spcAft>
+            </a:pPr>
+            <a:r>
+              <a:rPr sz="1300">
+                <a:solidFill>
+                  <a:srgbClr val="6D8C97"/>
+                </a:solidFill>
+                <a:latin typeface="Consolas"/>
+              </a:rPr>
+              <a:t>  71  </a:t>
+            </a:r>
+            <a:r>
+              <a:rPr sz="1300">
+                <a:solidFill>
+                  <a:srgbClr val="7FE0A0"/>
+                </a:solidFill>
+                <a:latin typeface="Consolas"/>
+              </a:rPr>
+              <a:t>});</a:t>
+            </a:r>
+          </a:p>
+        </p:txBody>
+      </p:sp>
+      <p:sp>
+        <p:nvSpPr>
+          <p:cNvPr id="4" name="TextBox 3"/>
+          <p:cNvSpPr txBox="1"/>
+          <p:nvPr/>
+        </p:nvSpPr>
+        <p:spPr>
+          <a:xfrm>
+            <a:off x="548640" y="5623560"/>
+            <a:ext cx="11064240" cy="1051560"/>
+          </a:xfrm>
+          <a:prstGeom prst="rect">
+            <a:avLst/>
+          </a:prstGeom>
+          <a:noFill/>
+        </p:spPr>
+        <p:txBody>
+          <a:bodyPr wrap="square">
+            <a:spAutoFit/>
+          </a:bodyPr>
+          <a:lstStyle/>
+          <a:p>
+            <a:r>
+              <a:rPr sz="2000">
+                <a:solidFill>
+                  <a:srgbClr val="DCECEF"/>
+                </a:solidFill>
+              </a:rPr>
+              <a:t>That is the whole piece. Check yours looks the same before moving on.</a:t>
+            </a:r>
+          </a:p>
+        </p:txBody>
+      </p:sp>
+    </p:spTree>
+  </p:cSld>
+  <p:clrMapOvr>
+    <a:masterClrMapping/>
+  </p:clrMapOvr>
+</p:sld>
+</file>
+
+<file path=ppt/slides/slide43.xml><?xml version="1.0" encoding="utf-8"?>
+<p:sld xmlns:a="http://schemas.openxmlformats.org/drawingml/2006/main" xmlns:p="http://schemas.openxmlformats.org/presentationml/2006/main" xmlns:r="http://schemas.openxmlformats.org/officeDocument/2006/relationships">
+  <p:cSld>
+    <p:bg>
+      <p:bgPr>
+        <a:solidFill>
+          <a:srgbClr val="102127"/>
+        </a:solidFill>
+        <a:effectLst/>
+      </p:bgPr>
+    </p:bg>
+    <p:spTree>
+      <p:nvGrpSpPr>
+        <p:cNvPr id="1" name=""/>
+        <p:cNvGrpSpPr/>
+        <p:nvPr/>
+      </p:nvGrpSpPr>
+      <p:grpSpPr/>
+      <p:sp>
+        <p:nvSpPr>
+          <p:cNvPr id="2" name="TextBox 1"/>
+          <p:cNvSpPr txBox="1"/>
+          <p:nvPr/>
+        </p:nvSpPr>
+        <p:spPr>
+          <a:xfrm>
+            <a:off x="502920" y="274320"/>
+            <a:ext cx="11155680" cy="548640"/>
+          </a:xfrm>
+          <a:prstGeom prst="rect">
+            <a:avLst/>
+          </a:prstGeom>
+          <a:noFill/>
+        </p:spPr>
+        <p:txBody>
+          <a:bodyPr wrap="none">
+            <a:spAutoFit/>
+          </a:bodyPr>
+          <a:lstStyle/>
+          <a:p>
+            <a:r>
+              <a:rPr sz="2200" b="1">
+                <a:solidFill>
+                  <a:srgbClr val="01AEFD"/>
+                </a:solidFill>
+              </a:rPr>
+              <a:t>In script.js   -   delete a line</a:t>
+            </a:r>
+          </a:p>
+        </p:txBody>
+      </p:sp>
+      <p:sp>
+        <p:nvSpPr>
+          <p:cNvPr id="3" name="TextBox 2"/>
+          <p:cNvSpPr txBox="1"/>
+          <p:nvPr/>
+        </p:nvSpPr>
+        <p:spPr>
+          <a:xfrm>
+            <a:off x="502920" y="960120"/>
+            <a:ext cx="11155680" cy="4297680"/>
+          </a:xfrm>
+          <a:prstGeom prst="rect">
+            <a:avLst/>
+          </a:prstGeom>
+          <a:noFill/>
+        </p:spPr>
+        <p:txBody>
+          <a:bodyPr wrap="none">
+            <a:spAutoFit/>
+          </a:bodyPr>
+          <a:lstStyle/>
+          <a:p>
+            <a:pPr>
+              <a:spcAft>
+                <a:spcPts val="0"/>
+              </a:spcAft>
+            </a:pPr>
+            <a:r>
+              <a:rPr sz="1300">
+                <a:solidFill>
+                  <a:srgbClr val="6D8C97"/>
+                </a:solidFill>
+                <a:latin typeface="Consolas"/>
+              </a:rPr>
+              <a:t>  29  </a:t>
+            </a:r>
+            <a:r>
+              <a:rPr sz="1300">
+                <a:solidFill>
+                  <a:srgbClr val="6D8C97"/>
+                </a:solidFill>
+                <a:latin typeface="Consolas"/>
+              </a:rPr>
+              <a:t> </a:t>
+            </a:r>
+          </a:p>
+          <a:p>
+            <a:pPr>
+              <a:spcAft>
+                <a:spcPts val="0"/>
+              </a:spcAft>
+            </a:pPr>
+            <a:r>
+              <a:rPr sz="1300">
+                <a:solidFill>
+                  <a:srgbClr val="6D8C97"/>
+                </a:solidFill>
+                <a:latin typeface="Consolas"/>
+              </a:rPr>
+              <a:t>  30  </a:t>
+            </a:r>
+            <a:r>
+              <a:rPr sz="1300">
+                <a:solidFill>
+                  <a:srgbClr val="6D8C97"/>
+                </a:solidFill>
+                <a:latin typeface="Consolas"/>
+              </a:rPr>
+              <a:t>// The smallest useful request: what models does this server have?</a:t>
+            </a:r>
+          </a:p>
+          <a:p>
+            <a:pPr>
+              <a:spcAft>
+                <a:spcPts val="0"/>
+              </a:spcAft>
+            </a:pPr>
+            <a:r>
+              <a:rPr sz="1300">
+                <a:solidFill>
+                  <a:srgbClr val="6D8C97"/>
+                </a:solidFill>
+                <a:latin typeface="Consolas"/>
+              </a:rPr>
+              <a:t>  31  </a:t>
+            </a:r>
+            <a:r>
+              <a:rPr sz="1300">
+                <a:solidFill>
+                  <a:srgbClr val="6D8C97"/>
+                </a:solidFill>
+                <a:latin typeface="Consolas"/>
+              </a:rPr>
+              <a:t>// 'async' means this function does something slow and can be waited for.</a:t>
+            </a:r>
+          </a:p>
+          <a:p>
+            <a:pPr>
+              <a:spcAft>
+                <a:spcPts val="0"/>
+              </a:spcAft>
+            </a:pPr>
+            <a:r>
+              <a:rPr sz="1300">
+                <a:solidFill>
+                  <a:srgbClr val="6D8C97"/>
+                </a:solidFill>
+                <a:latin typeface="Consolas"/>
+              </a:rPr>
+              <a:t>  32  </a:t>
+            </a:r>
+            <a:r>
+              <a:rPr sz="1300">
+                <a:solidFill>
+                  <a:srgbClr val="6D8C97"/>
+                </a:solidFill>
+                <a:latin typeface="Consolas"/>
+              </a:rPr>
+              <a:t>async function listModels() {</a:t>
+            </a:r>
+          </a:p>
+          <a:p>
+            <a:pPr>
+              <a:spcAft>
+                <a:spcPts val="0"/>
+              </a:spcAft>
+            </a:pPr>
+            <a:r>
+              <a:rPr sz="1300">
+                <a:solidFill>
+                  <a:srgbClr val="6D8C97"/>
+                </a:solidFill>
+                <a:latin typeface="Consolas"/>
+              </a:rPr>
+              <a:t>  33  </a:t>
+            </a:r>
+            <a:r>
+              <a:rPr sz="1300">
+                <a:solidFill>
+                  <a:srgbClr val="6D8C97"/>
+                </a:solidFill>
+                <a:latin typeface="Consolas"/>
+              </a:rPr>
+              <a:t>  const res = await fetch(AI_BASE + '/v1/models', {</a:t>
+            </a:r>
+          </a:p>
+          <a:p>
+            <a:pPr>
+              <a:spcAft>
+                <a:spcPts val="0"/>
+              </a:spcAft>
+            </a:pPr>
+            <a:r>
+              <a:rPr sz="1300">
+                <a:solidFill>
+                  <a:srgbClr val="6D8C97"/>
+                </a:solidFill>
+                <a:latin typeface="Consolas"/>
+              </a:rPr>
+              <a:t>  34  </a:t>
+            </a:r>
+            <a:r>
+              <a:rPr sz="1300">
+                <a:solidFill>
+                  <a:srgbClr val="6D8C97"/>
+                </a:solidFill>
+                <a:latin typeface="Consolas"/>
+              </a:rPr>
+              <a:t>    headers: { 'Authorization': 'Bearer ' + API_KEY }</a:t>
+            </a:r>
+          </a:p>
+          <a:p>
+            <a:pPr>
+              <a:spcAft>
+                <a:spcPts val="0"/>
+              </a:spcAft>
+            </a:pPr>
+            <a:r>
+              <a:rPr sz="1300">
+                <a:solidFill>
+                  <a:srgbClr val="6D8C97"/>
+                </a:solidFill>
+                <a:latin typeface="Consolas"/>
+              </a:rPr>
+              <a:t>  35  </a:t>
+            </a:r>
+            <a:r>
+              <a:rPr sz="1300">
+                <a:solidFill>
+                  <a:srgbClr val="6D8C97"/>
+                </a:solidFill>
+                <a:latin typeface="Consolas"/>
+              </a:rPr>
+              <a:t>  });</a:t>
+            </a:r>
+          </a:p>
+          <a:p>
+            <a:pPr>
+              <a:spcAft>
+                <a:spcPts val="0"/>
+              </a:spcAft>
+            </a:pPr>
+            <a:r>
+              <a:rPr sz="1300">
+                <a:solidFill>
+                  <a:srgbClr val="6D8C97"/>
+                </a:solidFill>
+                <a:latin typeface="Consolas"/>
+              </a:rPr>
+              <a:t>  36  </a:t>
+            </a:r>
+            <a:r>
+              <a:rPr sz="1300">
+                <a:solidFill>
+                  <a:srgbClr val="6D8C97"/>
+                </a:solidFill>
+                <a:latin typeface="Consolas"/>
+              </a:rPr>
+              <a:t>  const data = await res.json();   // the answer arrives as text; this reads it</a:t>
+            </a:r>
+          </a:p>
+          <a:p>
+            <a:pPr>
+              <a:spcAft>
+                <a:spcPts val="0"/>
+              </a:spcAft>
+            </a:pPr>
+            <a:r>
+              <a:rPr sz="1300">
+                <a:solidFill>
+                  <a:srgbClr val="6D8C97"/>
+                </a:solidFill>
+                <a:latin typeface="Consolas"/>
+              </a:rPr>
+              <a:t>  37  </a:t>
+            </a:r>
+            <a:r>
+              <a:rPr sz="1300">
+                <a:solidFill>
+                  <a:srgbClr val="6D8C97"/>
+                </a:solidFill>
+                <a:latin typeface="Consolas"/>
+              </a:rPr>
+              <a:t>  console.log('The server offers:', data.data);</a:t>
+            </a:r>
+          </a:p>
+          <a:p>
+            <a:pPr>
+              <a:spcAft>
+                <a:spcPts val="0"/>
+              </a:spcAft>
+            </a:pPr>
+            <a:r>
+              <a:rPr sz="1300">
+                <a:solidFill>
+                  <a:srgbClr val="6D8C97"/>
+                </a:solidFill>
+                <a:latin typeface="Consolas"/>
+              </a:rPr>
+              <a:t>  38  </a:t>
+            </a:r>
+            <a:r>
+              <a:rPr sz="1300">
+                <a:solidFill>
+                  <a:srgbClr val="6D8C97"/>
+                </a:solidFill>
+                <a:latin typeface="Consolas"/>
+              </a:rPr>
+              <a:t>}</a:t>
+            </a:r>
+          </a:p>
+          <a:p>
+            <a:pPr>
+              <a:spcAft>
+                <a:spcPts val="0"/>
+              </a:spcAft>
+            </a:pPr>
+            <a:r>
+              <a:rPr sz="1300">
+                <a:solidFill>
+                  <a:srgbClr val="6D8C97"/>
+                </a:solidFill>
+                <a:latin typeface="Consolas"/>
+              </a:rPr>
+              <a:t>   -  </a:t>
+            </a:r>
+            <a:r>
+              <a:rPr sz="1300" strike="sngStrike">
+                <a:solidFill>
+                  <a:srgbClr val="F3928B"/>
+                </a:solidFill>
+                <a:latin typeface="Consolas"/>
+              </a:rPr>
+              <a:t>listModels();</a:t>
+            </a:r>
+          </a:p>
+        </p:txBody>
+      </p:sp>
+      <p:sp>
+        <p:nvSpPr>
+          <p:cNvPr id="4" name="TextBox 3"/>
+          <p:cNvSpPr txBox="1"/>
+          <p:nvPr/>
+        </p:nvSpPr>
+        <p:spPr>
+          <a:xfrm>
+            <a:off x="548640" y="5623560"/>
+            <a:ext cx="11064240" cy="1051560"/>
+          </a:xfrm>
+          <a:prstGeom prst="rect">
+            <a:avLst/>
+          </a:prstGeom>
+          <a:noFill/>
+        </p:spPr>
+        <p:txBody>
+          <a:bodyPr wrap="square">
+            <a:spAutoFit/>
+          </a:bodyPr>
+          <a:lstStyle/>
+          <a:p>
+            <a:r>
+              <a:rPr sz="2000">
+                <a:solidFill>
+                  <a:srgbClr val="DCECEF"/>
+                </a:solidFill>
+              </a:rPr>
+              <a:t>Delete this line. askAI does the asking now, so the old test call is no longer needed - your file should have no listModels() call left.</a:t>
+            </a:r>
+          </a:p>
+        </p:txBody>
+      </p:sp>
+    </p:spTree>
+  </p:cSld>
+  <p:clrMapOvr>
+    <a:masterClrMapping/>
+  </p:clrMapOvr>
+</p:sld>
+</file>
+
+<file path=ppt/slides/slide44.xml><?xml version="1.0" encoding="utf-8"?>
+<p:sld xmlns:a="http://schemas.openxmlformats.org/drawingml/2006/main" xmlns:p="http://schemas.openxmlformats.org/presentationml/2006/main" xmlns:r="http://schemas.openxmlformats.org/officeDocument/2006/relationships">
+  <p:cSld>
     <p:spTree>
       <p:nvGrpSpPr>
         <p:cNvPr id="1" name=""/>
@@ -14230,7 +15069,7 @@
 </p:sld>
 </file>
 
-<file path=ppt/slides/slide41.xml><?xml version="1.0" encoding="utf-8"?>
+<file path=ppt/slides/slide45.xml><?xml version="1.0" encoding="utf-8"?>
 <p:sld xmlns:a="http://schemas.openxmlformats.org/drawingml/2006/main" xmlns:p="http://schemas.openxmlformats.org/presentationml/2006/main" xmlns:r="http://schemas.openxmlformats.org/officeDocument/2006/relationships">
   <p:cSld>
     <p:spTree>

--- a/ai101/slides/week-04.pptx
+++ b/ai101/slides/week-04.pptx
@@ -11117,7 +11117,7 @@
                 </a:solidFill>
                 <a:latin typeface="Consolas"/>
               </a:rPr>
-              <a:t>   -  </a:t>
+              <a:t>  60  </a:t>
             </a:r>
             <a:r>
               <a:rPr sz="1800" strike="sngStrike">
@@ -11282,7 +11282,7 @@
                 </a:solidFill>
                 <a:latin typeface="Consolas"/>
               </a:rPr>
-              <a:t>   -  </a:t>
+              <a:t>  60  </a:t>
             </a:r>
             <a:r>
               <a:rPr sz="1800" strike="sngStrike">
@@ -11447,7 +11447,7 @@
                 </a:solidFill>
                 <a:latin typeface="Consolas"/>
               </a:rPr>
-              <a:t>   -  </a:t>
+              <a:t>  60  </a:t>
             </a:r>
             <a:r>
               <a:rPr sz="1800" strike="sngStrike">
@@ -12142,7 +12142,7 @@
                 </a:solidFill>
                 <a:latin typeface="Consolas"/>
               </a:rPr>
-              <a:t>   -  </a:t>
+              <a:t>  67  </a:t>
             </a:r>
             <a:r>
               <a:rPr sz="1800" strike="sngStrike">
@@ -14869,7 +14869,7 @@
                 </a:solidFill>
                 <a:latin typeface="Consolas"/>
               </a:rPr>
-              <a:t>   -  </a:t>
+              <a:t>  39  </a:t>
             </a:r>
             <a:r>
               <a:rPr sz="1300" strike="sngStrike">

--- a/ai101/slides/week-04.pptx
+++ b/ai101/slides/week-04.pptx
@@ -50,6 +50,14 @@
     <p:sldId id="298" r:id="rId49"/>
     <p:sldId id="299" r:id="rId50"/>
     <p:sldId id="300" r:id="rId51"/>
+    <p:sldId id="301" r:id="rId52"/>
+    <p:sldId id="302" r:id="rId53"/>
+    <p:sldId id="303" r:id="rId54"/>
+    <p:sldId id="304" r:id="rId55"/>
+    <p:sldId id="305" r:id="rId56"/>
+    <p:sldId id="306" r:id="rId57"/>
+    <p:sldId id="307" r:id="rId58"/>
+    <p:sldId id="308" r:id="rId59"/>
   </p:sldIdLst>
   <p:sldSz cx="12191695" cy="6858000" type="screen4x3"/>
   <p:notesSz cx="6858000" cy="9144000"/>
@@ -10687,7 +10695,7 @@
                   <a:srgbClr val="1F2A37"/>
                 </a:solidFill>
               </a:rPr>
-              <a:t>Where the answer hides</a:t>
+              <a:t>JSON.stringify(obj)  turns an object into...?</a:t>
             </a:r>
           </a:p>
         </p:txBody>
@@ -10695,6 +10703,39 @@
       <p:sp>
         <p:nvSpPr>
           <p:cNvPr id="3" name="TextBox 2"/>
+          <p:cNvSpPr txBox="1"/>
+          <p:nvPr/>
+        </p:nvSpPr>
+        <p:spPr>
+          <a:xfrm>
+            <a:off x="868680" y="502920"/>
+            <a:ext cx="5486400" cy="457200"/>
+          </a:xfrm>
+          <a:prstGeom prst="rect">
+            <a:avLst/>
+          </a:prstGeom>
+          <a:noFill/>
+        </p:spPr>
+        <p:txBody>
+          <a:bodyPr wrap="none">
+            <a:spAutoFit/>
+          </a:bodyPr>
+          <a:lstStyle/>
+          <a:p>
+            <a:r>
+              <a:rPr sz="1500" b="1">
+                <a:solidFill>
+                  <a:srgbClr val="01AEFD"/>
+                </a:solidFill>
+              </a:rPr>
+              <a:t>QUICK CHECK</a:t>
+            </a:r>
+          </a:p>
+        </p:txBody>
+      </p:sp>
+      <p:sp>
+        <p:nvSpPr>
+          <p:cNvPr id="4" name="TextBox 3"/>
           <p:cNvSpPr txBox="1"/>
           <p:nvPr/>
         </p:nvSpPr>
@@ -10720,12 +10761,12 @@
               </a:spcAft>
             </a:pPr>
             <a:r>
-              <a:rPr sz="2800">
-                <a:solidFill>
-                  <a:srgbClr val="01AEFD"/>
-                </a:solidFill>
-              </a:rPr>
-              <a:t>data.choices[0].message.content</a:t>
+              <a:rPr sz="2400">
+                <a:solidFill>
+                  <a:srgbClr val="1F2A37"/>
+                </a:solidFill>
+              </a:rPr>
+              <a:t>• A. a number</a:t>
             </a:r>
           </a:p>
           <a:p>
@@ -10740,7 +10781,7 @@
                   <a:srgbClr val="1F2A37"/>
                 </a:solidFill>
               </a:rPr>
-              <a:t>• choices - a list of answers (you get one)</a:t>
+              <a:t>• B. an HTML element</a:t>
             </a:r>
           </a:p>
           <a:p>
@@ -10755,7 +10796,7 @@
                   <a:srgbClr val="1F2A37"/>
                 </a:solidFill>
               </a:rPr>
-              <a:t>• [0] - the first one</a:t>
+              <a:t>• C. a function</a:t>
             </a:r>
           </a:p>
           <a:p>
@@ -10770,7 +10811,22 @@
                   <a:srgbClr val="1F2A37"/>
                 </a:solidFill>
               </a:rPr>
-              <a:t>• message.content - the actual words</a:t>
+              <a:t>• D. text you can send</a:t>
+            </a:r>
+          </a:p>
+          <a:p>
+            <a:pPr>
+              <a:spcAft>
+                <a:spcPts val="1400"/>
+              </a:spcAft>
+            </a:pPr>
+            <a:r>
+              <a:rPr sz="2400">
+                <a:solidFill>
+                  <a:srgbClr val="1F2A37"/>
+                </a:solidFill>
+              </a:rPr>
+              <a:t>• Pick one - the answer is on the next slide.</a:t>
             </a:r>
           </a:p>
         </p:txBody>
@@ -10814,7 +10870,7 @@
                   <a:srgbClr val="1F2A37"/>
                 </a:solidFill>
               </a:rPr>
-              <a:t>Slow things need await</a:t>
+              <a:t>JSON.stringify(obj)  turns an object into...?</a:t>
             </a:r>
           </a:p>
         </p:txBody>
@@ -10822,6 +10878,39 @@
       <p:sp>
         <p:nvSpPr>
           <p:cNvPr id="3" name="TextBox 2"/>
+          <p:cNvSpPr txBox="1"/>
+          <p:nvPr/>
+        </p:nvSpPr>
+        <p:spPr>
+          <a:xfrm>
+            <a:off x="868680" y="502920"/>
+            <a:ext cx="5486400" cy="457200"/>
+          </a:xfrm>
+          <a:prstGeom prst="rect">
+            <a:avLst/>
+          </a:prstGeom>
+          <a:noFill/>
+        </p:spPr>
+        <p:txBody>
+          <a:bodyPr wrap="none">
+            <a:spAutoFit/>
+          </a:bodyPr>
+          <a:lstStyle/>
+          <a:p>
+            <a:r>
+              <a:rPr sz="1500" b="1">
+                <a:solidFill>
+                  <a:srgbClr val="01AEFD"/>
+                </a:solidFill>
+              </a:rPr>
+              <a:t>ANSWER</a:t>
+            </a:r>
+          </a:p>
+        </p:txBody>
+      </p:sp>
+      <p:sp>
+        <p:nvSpPr>
+          <p:cNvPr id="4" name="TextBox 3"/>
           <p:cNvSpPr txBox="1"/>
           <p:nvPr/>
         </p:nvSpPr>
@@ -10852,7 +10941,7 @@
                   <a:srgbClr val="1F2A37"/>
                 </a:solidFill>
               </a:rPr>
-              <a:t>• const reply = await askAI(text)</a:t>
+              <a:t>• A. a number</a:t>
             </a:r>
           </a:p>
           <a:p>
@@ -10867,7 +10956,7 @@
                   <a:srgbClr val="1F2A37"/>
                 </a:solidFill>
               </a:rPr>
-              <a:t>• The listener has to be async too</a:t>
+              <a:t>• B. an HTML element</a:t>
             </a:r>
           </a:p>
           <a:p>
@@ -10882,7 +10971,7 @@
                   <a:srgbClr val="1F2A37"/>
                 </a:solidFill>
               </a:rPr>
-              <a:t>• Forget it and you get [object Promise]</a:t>
+              <a:t>• C. a function</a:t>
             </a:r>
           </a:p>
           <a:p>
@@ -10897,7 +10986,22 @@
                   <a:srgbClr val="1F2A37"/>
                 </a:solidFill>
               </a:rPr>
-              <a:t>• Delete the listModels() call - it has done its job</a:t>
+              <a:t>• D. text you can send (correct)</a:t>
+            </a:r>
+          </a:p>
+          <a:p>
+            <a:pPr>
+              <a:spcAft>
+                <a:spcPts val="1400"/>
+              </a:spcAft>
+            </a:pPr>
+            <a:r>
+              <a:rPr sz="2400">
+                <a:solidFill>
+                  <a:srgbClr val="1F2A37"/>
+                </a:solidFill>
+              </a:rPr>
+              <a:t>• It packs an object into text so it can travel over the network.</a:t>
             </a:r>
           </a:p>
         </p:txBody>
@@ -11010,14 +11114,6 @@
 <file path=ppt/slides/slide30.xml><?xml version="1.0" encoding="utf-8"?>
 <p:sld xmlns:a="http://schemas.openxmlformats.org/drawingml/2006/main" xmlns:p="http://schemas.openxmlformats.org/presentationml/2006/main" xmlns:r="http://schemas.openxmlformats.org/officeDocument/2006/relationships">
   <p:cSld>
-    <p:bg>
-      <p:bgPr>
-        <a:solidFill>
-          <a:srgbClr val="102127"/>
-        </a:solidFill>
-        <a:effectLst/>
-      </p:bgPr>
-    </p:bg>
     <p:spTree>
       <p:nvGrpSpPr>
         <p:cNvPr id="1" name=""/>
@@ -11027,14 +11123,40 @@
       <p:grpSpPr/>
       <p:sp>
         <p:nvSpPr>
-          <p:cNvPr id="2" name="TextBox 1"/>
+          <p:cNvPr id="2" name="Title 1"/>
+          <p:cNvSpPr>
+            <a:spLocks noGrp="1"/>
+          </p:cNvSpPr>
+          <p:nvPr>
+            <p:ph type="title"/>
+          </p:nvPr>
+        </p:nvSpPr>
+        <p:spPr/>
+        <p:txBody>
+          <a:bodyPr/>
+          <a:lstStyle/>
+          <a:p>
+            <a:r>
+              <a:rPr sz="3800" b="1">
+                <a:solidFill>
+                  <a:srgbClr val="1F2A37"/>
+                </a:solidFill>
+              </a:rPr>
+              <a:t>[ ]  in JavaScript is...?</a:t>
+            </a:r>
+          </a:p>
+        </p:txBody>
+      </p:sp>
+      <p:sp>
+        <p:nvSpPr>
+          <p:cNvPr id="3" name="TextBox 2"/>
           <p:cNvSpPr txBox="1"/>
           <p:nvPr/>
         </p:nvSpPr>
         <p:spPr>
           <a:xfrm>
-            <a:off x="502920" y="274320"/>
-            <a:ext cx="11155680" cy="548640"/>
+            <a:off x="868680" y="502920"/>
+            <a:ext cx="5486400" cy="457200"/>
           </a:xfrm>
           <a:prstGeom prst="rect">
             <a:avLst/>
@@ -11048,26 +11170,26 @@
           <a:lstStyle/>
           <a:p>
             <a:r>
-              <a:rPr sz="2200" b="1">
+              <a:rPr sz="1500" b="1">
                 <a:solidFill>
                   <a:srgbClr val="01AEFD"/>
                 </a:solidFill>
               </a:rPr>
-              <a:t>In script.js   -   replace a line</a:t>
-            </a:r>
-          </a:p>
-        </p:txBody>
-      </p:sp>
-      <p:sp>
-        <p:nvSpPr>
-          <p:cNvPr id="3" name="TextBox 2"/>
+              <a:t>QUICK CHECK</a:t>
+            </a:r>
+          </a:p>
+        </p:txBody>
+      </p:sp>
+      <p:sp>
+        <p:nvSpPr>
+          <p:cNvPr id="4" name="TextBox 3"/>
           <p:cNvSpPr txBox="1"/>
           <p:nvPr/>
         </p:nvSpPr>
         <p:spPr>
           <a:xfrm>
-            <a:off x="502920" y="960120"/>
-            <a:ext cx="11155680" cy="4297680"/>
+            <a:off x="822960" y="1828800"/>
+            <a:ext cx="10515600" cy="4206240"/>
           </a:xfrm>
           <a:prstGeom prst="rect">
             <a:avLst/>
@@ -11075,91 +11197,83 @@
           <a:noFill/>
         </p:spPr>
         <p:txBody>
-          <a:bodyPr wrap="none">
-            <a:spAutoFit/>
-          </a:bodyPr>
-          <a:lstStyle/>
-          <a:p>
-            <a:pPr>
-              <a:spcAft>
-                <a:spcPts val="0"/>
-              </a:spcAft>
-            </a:pPr>
-            <a:r>
-              <a:rPr sz="1800">
-                <a:solidFill>
-                  <a:srgbClr val="6D8C97"/>
-                </a:solidFill>
-                <a:latin typeface="Consolas"/>
-              </a:rPr>
-              <a:t>  59  </a:t>
-            </a:r>
-            <a:r>
-              <a:rPr sz="1800">
-                <a:solidFill>
-                  <a:srgbClr val="6D8C97"/>
-                </a:solidFill>
-                <a:latin typeface="Consolas"/>
-              </a:rPr>
-              <a:t> </a:t>
-            </a:r>
-          </a:p>
-          <a:p>
-            <a:pPr>
-              <a:spcAft>
-                <a:spcPts val="0"/>
-              </a:spcAft>
-            </a:pPr>
-            <a:r>
-              <a:rPr sz="1800">
-                <a:solidFill>
-                  <a:srgbClr val="6D8C97"/>
-                </a:solidFill>
-                <a:latin typeface="Consolas"/>
-              </a:rPr>
-              <a:t>  60  </a:t>
-            </a:r>
-            <a:r>
-              <a:rPr sz="1800" strike="sngStrike">
-                <a:solidFill>
-                  <a:srgbClr val="F3928B"/>
-                </a:solidFill>
-                <a:latin typeface="Consolas"/>
-              </a:rPr>
-              <a:t>// In PixelPad your loop() checked 'was a key pressed?' every frame. Here you</a:t>
-            </a:r>
-          </a:p>
-        </p:txBody>
-      </p:sp>
-      <p:sp>
-        <p:nvSpPr>
-          <p:cNvPr id="4" name="TextBox 3"/>
-          <p:cNvSpPr txBox="1"/>
-          <p:nvPr/>
-        </p:nvSpPr>
-        <p:spPr>
-          <a:xfrm>
-            <a:off x="548640" y="5623560"/>
-            <a:ext cx="11064240" cy="1051560"/>
-          </a:xfrm>
-          <a:prstGeom prst="rect">
-            <a:avLst/>
-          </a:prstGeom>
-          <a:noFill/>
-        </p:spPr>
-        <p:txBody>
           <a:bodyPr wrap="square">
             <a:spAutoFit/>
           </a:bodyPr>
           <a:lstStyle/>
           <a:p>
-            <a:r>
-              <a:rPr sz="2000">
-                <a:solidFill>
-                  <a:srgbClr val="DCECEF"/>
-                </a:solidFill>
-              </a:rPr>
-              <a:t>This line changes - take the old one out; the new version is next.</a:t>
+            <a:pPr>
+              <a:spcAft>
+                <a:spcPts val="1400"/>
+              </a:spcAft>
+            </a:pPr>
+            <a:r>
+              <a:rPr sz="2400">
+                <a:solidFill>
+                  <a:srgbClr val="1F2A37"/>
+                </a:solidFill>
+              </a:rPr>
+              <a:t>• A. an object</a:t>
+            </a:r>
+          </a:p>
+          <a:p>
+            <a:pPr>
+              <a:spcAft>
+                <a:spcPts val="1400"/>
+              </a:spcAft>
+            </a:pPr>
+            <a:r>
+              <a:rPr sz="2400">
+                <a:solidFill>
+                  <a:srgbClr val="1F2A37"/>
+                </a:solidFill>
+              </a:rPr>
+              <a:t>• B. a list of items in order</a:t>
+            </a:r>
+          </a:p>
+          <a:p>
+            <a:pPr>
+              <a:spcAft>
+                <a:spcPts val="1400"/>
+              </a:spcAft>
+            </a:pPr>
+            <a:r>
+              <a:rPr sz="2400">
+                <a:solidFill>
+                  <a:srgbClr val="1F2A37"/>
+                </a:solidFill>
+              </a:rPr>
+              <a:t>• C. a string</a:t>
+            </a:r>
+          </a:p>
+          <a:p>
+            <a:pPr>
+              <a:spcAft>
+                <a:spcPts val="1400"/>
+              </a:spcAft>
+            </a:pPr>
+            <a:r>
+              <a:rPr sz="2400">
+                <a:solidFill>
+                  <a:srgbClr val="1F2A37"/>
+                </a:solidFill>
+              </a:rPr>
+              <a:t>• D. a comment</a:t>
+            </a:r>
+          </a:p>
+          <a:p>
+            <a:pPr>
+              <a:spcAft>
+                <a:spcPts val="1400"/>
+              </a:spcAft>
+            </a:pPr>
+            <a:r>
+              <a:rPr sz="2400">
+                <a:solidFill>
+                  <a:srgbClr val="1F2A37"/>
+                </a:solidFill>
+              </a:rPr>
+              <a:t>• Pick one - the answer is on the next slide.</a:t>
             </a:r>
           </a:p>
         </p:txBody>
@@ -11173,6 +11287,1135 @@
 </file>
 
 <file path=ppt/slides/slide31.xml><?xml version="1.0" encoding="utf-8"?>
+<p:sld xmlns:a="http://schemas.openxmlformats.org/drawingml/2006/main" xmlns:p="http://schemas.openxmlformats.org/presentationml/2006/main" xmlns:r="http://schemas.openxmlformats.org/officeDocument/2006/relationships">
+  <p:cSld>
+    <p:spTree>
+      <p:nvGrpSpPr>
+        <p:cNvPr id="1" name=""/>
+        <p:cNvGrpSpPr/>
+        <p:nvPr/>
+      </p:nvGrpSpPr>
+      <p:grpSpPr/>
+      <p:sp>
+        <p:nvSpPr>
+          <p:cNvPr id="2" name="Title 1"/>
+          <p:cNvSpPr>
+            <a:spLocks noGrp="1"/>
+          </p:cNvSpPr>
+          <p:nvPr>
+            <p:ph type="title"/>
+          </p:nvPr>
+        </p:nvSpPr>
+        <p:spPr/>
+        <p:txBody>
+          <a:bodyPr/>
+          <a:lstStyle/>
+          <a:p>
+            <a:r>
+              <a:rPr sz="3800" b="1">
+                <a:solidFill>
+                  <a:srgbClr val="1F2A37"/>
+                </a:solidFill>
+              </a:rPr>
+              <a:t>[ ]  in JavaScript is...?</a:t>
+            </a:r>
+          </a:p>
+        </p:txBody>
+      </p:sp>
+      <p:sp>
+        <p:nvSpPr>
+          <p:cNvPr id="3" name="TextBox 2"/>
+          <p:cNvSpPr txBox="1"/>
+          <p:nvPr/>
+        </p:nvSpPr>
+        <p:spPr>
+          <a:xfrm>
+            <a:off x="868680" y="502920"/>
+            <a:ext cx="5486400" cy="457200"/>
+          </a:xfrm>
+          <a:prstGeom prst="rect">
+            <a:avLst/>
+          </a:prstGeom>
+          <a:noFill/>
+        </p:spPr>
+        <p:txBody>
+          <a:bodyPr wrap="none">
+            <a:spAutoFit/>
+          </a:bodyPr>
+          <a:lstStyle/>
+          <a:p>
+            <a:r>
+              <a:rPr sz="1500" b="1">
+                <a:solidFill>
+                  <a:srgbClr val="01AEFD"/>
+                </a:solidFill>
+              </a:rPr>
+              <a:t>ANSWER</a:t>
+            </a:r>
+          </a:p>
+        </p:txBody>
+      </p:sp>
+      <p:sp>
+        <p:nvSpPr>
+          <p:cNvPr id="4" name="TextBox 3"/>
+          <p:cNvSpPr txBox="1"/>
+          <p:nvPr/>
+        </p:nvSpPr>
+        <p:spPr>
+          <a:xfrm>
+            <a:off x="822960" y="1828800"/>
+            <a:ext cx="10515600" cy="4206240"/>
+          </a:xfrm>
+          <a:prstGeom prst="rect">
+            <a:avLst/>
+          </a:prstGeom>
+          <a:noFill/>
+        </p:spPr>
+        <p:txBody>
+          <a:bodyPr wrap="square">
+            <a:spAutoFit/>
+          </a:bodyPr>
+          <a:lstStyle/>
+          <a:p>
+            <a:pPr>
+              <a:spcAft>
+                <a:spcPts val="1400"/>
+              </a:spcAft>
+            </a:pPr>
+            <a:r>
+              <a:rPr sz="2400">
+                <a:solidFill>
+                  <a:srgbClr val="1F2A37"/>
+                </a:solidFill>
+              </a:rPr>
+              <a:t>• A. an object</a:t>
+            </a:r>
+          </a:p>
+          <a:p>
+            <a:pPr>
+              <a:spcAft>
+                <a:spcPts val="1400"/>
+              </a:spcAft>
+            </a:pPr>
+            <a:r>
+              <a:rPr sz="2400">
+                <a:solidFill>
+                  <a:srgbClr val="1F2A37"/>
+                </a:solidFill>
+              </a:rPr>
+              <a:t>• B. a list of items in order (correct)</a:t>
+            </a:r>
+          </a:p>
+          <a:p>
+            <a:pPr>
+              <a:spcAft>
+                <a:spcPts val="1400"/>
+              </a:spcAft>
+            </a:pPr>
+            <a:r>
+              <a:rPr sz="2400">
+                <a:solidFill>
+                  <a:srgbClr val="1F2A37"/>
+                </a:solidFill>
+              </a:rPr>
+              <a:t>• C. a string</a:t>
+            </a:r>
+          </a:p>
+          <a:p>
+            <a:pPr>
+              <a:spcAft>
+                <a:spcPts val="1400"/>
+              </a:spcAft>
+            </a:pPr>
+            <a:r>
+              <a:rPr sz="2400">
+                <a:solidFill>
+                  <a:srgbClr val="1F2A37"/>
+                </a:solidFill>
+              </a:rPr>
+              <a:t>• D. a comment</a:t>
+            </a:r>
+          </a:p>
+          <a:p>
+            <a:pPr>
+              <a:spcAft>
+                <a:spcPts val="1400"/>
+              </a:spcAft>
+            </a:pPr>
+            <a:r>
+              <a:rPr sz="2400">
+                <a:solidFill>
+                  <a:srgbClr val="1F2A37"/>
+                </a:solidFill>
+              </a:rPr>
+              <a:t>• Square brackets make an array - a list.</a:t>
+            </a:r>
+          </a:p>
+        </p:txBody>
+      </p:sp>
+    </p:spTree>
+  </p:cSld>
+  <p:clrMapOvr>
+    <a:masterClrMapping/>
+  </p:clrMapOvr>
+</p:sld>
+</file>
+
+<file path=ppt/slides/slide32.xml><?xml version="1.0" encoding="utf-8"?>
+<p:sld xmlns:a="http://schemas.openxmlformats.org/drawingml/2006/main" xmlns:p="http://schemas.openxmlformats.org/presentationml/2006/main" xmlns:r="http://schemas.openxmlformats.org/officeDocument/2006/relationships">
+  <p:cSld>
+    <p:spTree>
+      <p:nvGrpSpPr>
+        <p:cNvPr id="1" name=""/>
+        <p:cNvGrpSpPr/>
+        <p:nvPr/>
+      </p:nvGrpSpPr>
+      <p:grpSpPr/>
+      <p:sp>
+        <p:nvSpPr>
+          <p:cNvPr id="2" name="Title 1"/>
+          <p:cNvSpPr>
+            <a:spLocks noGrp="1"/>
+          </p:cNvSpPr>
+          <p:nvPr>
+            <p:ph type="title"/>
+          </p:nvPr>
+        </p:nvSpPr>
+        <p:spPr/>
+        <p:txBody>
+          <a:bodyPr/>
+          <a:lstStyle/>
+          <a:p>
+            <a:r>
+              <a:rPr sz="3800" b="1">
+                <a:solidFill>
+                  <a:srgbClr val="1F2A37"/>
+                </a:solidFill>
+              </a:rPr>
+              <a:t>For  msgs[0]  which item do you get?</a:t>
+            </a:r>
+          </a:p>
+        </p:txBody>
+      </p:sp>
+      <p:sp>
+        <p:nvSpPr>
+          <p:cNvPr id="3" name="TextBox 2"/>
+          <p:cNvSpPr txBox="1"/>
+          <p:nvPr/>
+        </p:nvSpPr>
+        <p:spPr>
+          <a:xfrm>
+            <a:off x="868680" y="502920"/>
+            <a:ext cx="5486400" cy="457200"/>
+          </a:xfrm>
+          <a:prstGeom prst="rect">
+            <a:avLst/>
+          </a:prstGeom>
+          <a:noFill/>
+        </p:spPr>
+        <p:txBody>
+          <a:bodyPr wrap="none">
+            <a:spAutoFit/>
+          </a:bodyPr>
+          <a:lstStyle/>
+          <a:p>
+            <a:r>
+              <a:rPr sz="1500" b="1">
+                <a:solidFill>
+                  <a:srgbClr val="01AEFD"/>
+                </a:solidFill>
+              </a:rPr>
+              <a:t>QUICK CHECK</a:t>
+            </a:r>
+          </a:p>
+        </p:txBody>
+      </p:sp>
+      <p:sp>
+        <p:nvSpPr>
+          <p:cNvPr id="4" name="TextBox 3"/>
+          <p:cNvSpPr txBox="1"/>
+          <p:nvPr/>
+        </p:nvSpPr>
+        <p:spPr>
+          <a:xfrm>
+            <a:off x="822960" y="1828800"/>
+            <a:ext cx="10515600" cy="4206240"/>
+          </a:xfrm>
+          <a:prstGeom prst="rect">
+            <a:avLst/>
+          </a:prstGeom>
+          <a:noFill/>
+        </p:spPr>
+        <p:txBody>
+          <a:bodyPr wrap="square">
+            <a:spAutoFit/>
+          </a:bodyPr>
+          <a:lstStyle/>
+          <a:p>
+            <a:pPr>
+              <a:spcAft>
+                <a:spcPts val="1400"/>
+              </a:spcAft>
+            </a:pPr>
+            <a:r>
+              <a:rPr sz="2400">
+                <a:solidFill>
+                  <a:srgbClr val="1F2A37"/>
+                </a:solidFill>
+              </a:rPr>
+              <a:t>• A. the last one</a:t>
+            </a:r>
+          </a:p>
+          <a:p>
+            <a:pPr>
+              <a:spcAft>
+                <a:spcPts val="1400"/>
+              </a:spcAft>
+            </a:pPr>
+            <a:r>
+              <a:rPr sz="2400">
+                <a:solidFill>
+                  <a:srgbClr val="1F2A37"/>
+                </a:solidFill>
+              </a:rPr>
+              <a:t>• B. a random one</a:t>
+            </a:r>
+          </a:p>
+          <a:p>
+            <a:pPr>
+              <a:spcAft>
+                <a:spcPts val="1400"/>
+              </a:spcAft>
+            </a:pPr>
+            <a:r>
+              <a:rPr sz="2400">
+                <a:solidFill>
+                  <a:srgbClr val="1F2A37"/>
+                </a:solidFill>
+              </a:rPr>
+              <a:t>• C. the first one</a:t>
+            </a:r>
+          </a:p>
+          <a:p>
+            <a:pPr>
+              <a:spcAft>
+                <a:spcPts val="1400"/>
+              </a:spcAft>
+            </a:pPr>
+            <a:r>
+              <a:rPr sz="2400">
+                <a:solidFill>
+                  <a:srgbClr val="1F2A37"/>
+                </a:solidFill>
+              </a:rPr>
+              <a:t>• D. all of them</a:t>
+            </a:r>
+          </a:p>
+          <a:p>
+            <a:pPr>
+              <a:spcAft>
+                <a:spcPts val="1400"/>
+              </a:spcAft>
+            </a:pPr>
+            <a:r>
+              <a:rPr sz="2400">
+                <a:solidFill>
+                  <a:srgbClr val="1F2A37"/>
+                </a:solidFill>
+              </a:rPr>
+              <a:t>• Pick one - the answer is on the next slide.</a:t>
+            </a:r>
+          </a:p>
+        </p:txBody>
+      </p:sp>
+    </p:spTree>
+  </p:cSld>
+  <p:clrMapOvr>
+    <a:masterClrMapping/>
+  </p:clrMapOvr>
+</p:sld>
+</file>
+
+<file path=ppt/slides/slide33.xml><?xml version="1.0" encoding="utf-8"?>
+<p:sld xmlns:a="http://schemas.openxmlformats.org/drawingml/2006/main" xmlns:p="http://schemas.openxmlformats.org/presentationml/2006/main" xmlns:r="http://schemas.openxmlformats.org/officeDocument/2006/relationships">
+  <p:cSld>
+    <p:spTree>
+      <p:nvGrpSpPr>
+        <p:cNvPr id="1" name=""/>
+        <p:cNvGrpSpPr/>
+        <p:nvPr/>
+      </p:nvGrpSpPr>
+      <p:grpSpPr/>
+      <p:sp>
+        <p:nvSpPr>
+          <p:cNvPr id="2" name="Title 1"/>
+          <p:cNvSpPr>
+            <a:spLocks noGrp="1"/>
+          </p:cNvSpPr>
+          <p:nvPr>
+            <p:ph type="title"/>
+          </p:nvPr>
+        </p:nvSpPr>
+        <p:spPr/>
+        <p:txBody>
+          <a:bodyPr/>
+          <a:lstStyle/>
+          <a:p>
+            <a:r>
+              <a:rPr sz="3800" b="1">
+                <a:solidFill>
+                  <a:srgbClr val="1F2A37"/>
+                </a:solidFill>
+              </a:rPr>
+              <a:t>For  msgs[0]  which item do you get?</a:t>
+            </a:r>
+          </a:p>
+        </p:txBody>
+      </p:sp>
+      <p:sp>
+        <p:nvSpPr>
+          <p:cNvPr id="3" name="TextBox 2"/>
+          <p:cNvSpPr txBox="1"/>
+          <p:nvPr/>
+        </p:nvSpPr>
+        <p:spPr>
+          <a:xfrm>
+            <a:off x="868680" y="502920"/>
+            <a:ext cx="5486400" cy="457200"/>
+          </a:xfrm>
+          <a:prstGeom prst="rect">
+            <a:avLst/>
+          </a:prstGeom>
+          <a:noFill/>
+        </p:spPr>
+        <p:txBody>
+          <a:bodyPr wrap="none">
+            <a:spAutoFit/>
+          </a:bodyPr>
+          <a:lstStyle/>
+          <a:p>
+            <a:r>
+              <a:rPr sz="1500" b="1">
+                <a:solidFill>
+                  <a:srgbClr val="01AEFD"/>
+                </a:solidFill>
+              </a:rPr>
+              <a:t>ANSWER</a:t>
+            </a:r>
+          </a:p>
+        </p:txBody>
+      </p:sp>
+      <p:sp>
+        <p:nvSpPr>
+          <p:cNvPr id="4" name="TextBox 3"/>
+          <p:cNvSpPr txBox="1"/>
+          <p:nvPr/>
+        </p:nvSpPr>
+        <p:spPr>
+          <a:xfrm>
+            <a:off x="822960" y="1828800"/>
+            <a:ext cx="10515600" cy="4206240"/>
+          </a:xfrm>
+          <a:prstGeom prst="rect">
+            <a:avLst/>
+          </a:prstGeom>
+          <a:noFill/>
+        </p:spPr>
+        <p:txBody>
+          <a:bodyPr wrap="square">
+            <a:spAutoFit/>
+          </a:bodyPr>
+          <a:lstStyle/>
+          <a:p>
+            <a:pPr>
+              <a:spcAft>
+                <a:spcPts val="1400"/>
+              </a:spcAft>
+            </a:pPr>
+            <a:r>
+              <a:rPr sz="2400">
+                <a:solidFill>
+                  <a:srgbClr val="1F2A37"/>
+                </a:solidFill>
+              </a:rPr>
+              <a:t>• A. the last one</a:t>
+            </a:r>
+          </a:p>
+          <a:p>
+            <a:pPr>
+              <a:spcAft>
+                <a:spcPts val="1400"/>
+              </a:spcAft>
+            </a:pPr>
+            <a:r>
+              <a:rPr sz="2400">
+                <a:solidFill>
+                  <a:srgbClr val="1F2A37"/>
+                </a:solidFill>
+              </a:rPr>
+              <a:t>• B. a random one</a:t>
+            </a:r>
+          </a:p>
+          <a:p>
+            <a:pPr>
+              <a:spcAft>
+                <a:spcPts val="1400"/>
+              </a:spcAft>
+            </a:pPr>
+            <a:r>
+              <a:rPr sz="2400">
+                <a:solidFill>
+                  <a:srgbClr val="1F2A37"/>
+                </a:solidFill>
+              </a:rPr>
+              <a:t>• C. the first one (correct)</a:t>
+            </a:r>
+          </a:p>
+          <a:p>
+            <a:pPr>
+              <a:spcAft>
+                <a:spcPts val="1400"/>
+              </a:spcAft>
+            </a:pPr>
+            <a:r>
+              <a:rPr sz="2400">
+                <a:solidFill>
+                  <a:srgbClr val="1F2A37"/>
+                </a:solidFill>
+              </a:rPr>
+              <a:t>• D. all of them</a:t>
+            </a:r>
+          </a:p>
+          <a:p>
+            <a:pPr>
+              <a:spcAft>
+                <a:spcPts val="1400"/>
+              </a:spcAft>
+            </a:pPr>
+            <a:r>
+              <a:rPr sz="2400">
+                <a:solidFill>
+                  <a:srgbClr val="1F2A37"/>
+                </a:solidFill>
+              </a:rPr>
+              <a:t>• Indexing starts at 0, so [0] is the first item.</a:t>
+            </a:r>
+          </a:p>
+        </p:txBody>
+      </p:sp>
+    </p:spTree>
+  </p:cSld>
+  <p:clrMapOvr>
+    <a:masterClrMapping/>
+  </p:clrMapOvr>
+</p:sld>
+</file>
+
+<file path=ppt/slides/slide34.xml><?xml version="1.0" encoding="utf-8"?>
+<p:sld xmlns:a="http://schemas.openxmlformats.org/drawingml/2006/main" xmlns:p="http://schemas.openxmlformats.org/presentationml/2006/main" xmlns:r="http://schemas.openxmlformats.org/officeDocument/2006/relationships">
+  <p:cSld>
+    <p:spTree>
+      <p:nvGrpSpPr>
+        <p:cNvPr id="1" name=""/>
+        <p:cNvGrpSpPr/>
+        <p:nvPr/>
+      </p:nvGrpSpPr>
+      <p:grpSpPr/>
+      <p:sp>
+        <p:nvSpPr>
+          <p:cNvPr id="2" name="Title 1"/>
+          <p:cNvSpPr>
+            <a:spLocks noGrp="1"/>
+          </p:cNvSpPr>
+          <p:nvPr>
+            <p:ph type="title"/>
+          </p:nvPr>
+        </p:nvSpPr>
+        <p:spPr/>
+        <p:txBody>
+          <a:bodyPr/>
+          <a:lstStyle/>
+          <a:p>
+            <a:r>
+              <a:rPr sz="3800" b="1">
+                <a:solidFill>
+                  <a:srgbClr val="1F2A37"/>
+                </a:solidFill>
+              </a:rPr>
+              <a:t>What does  fetch  return that you must await? (from week 3)</a:t>
+            </a:r>
+          </a:p>
+        </p:txBody>
+      </p:sp>
+      <p:sp>
+        <p:nvSpPr>
+          <p:cNvPr id="3" name="TextBox 2"/>
+          <p:cNvSpPr txBox="1"/>
+          <p:nvPr/>
+        </p:nvSpPr>
+        <p:spPr>
+          <a:xfrm>
+            <a:off x="868680" y="502920"/>
+            <a:ext cx="5486400" cy="457200"/>
+          </a:xfrm>
+          <a:prstGeom prst="rect">
+            <a:avLst/>
+          </a:prstGeom>
+          <a:noFill/>
+        </p:spPr>
+        <p:txBody>
+          <a:bodyPr wrap="none">
+            <a:spAutoFit/>
+          </a:bodyPr>
+          <a:lstStyle/>
+          <a:p>
+            <a:r>
+              <a:rPr sz="1500" b="1">
+                <a:solidFill>
+                  <a:srgbClr val="01AEFD"/>
+                </a:solidFill>
+              </a:rPr>
+              <a:t>QUICK CHECK</a:t>
+            </a:r>
+          </a:p>
+        </p:txBody>
+      </p:sp>
+      <p:sp>
+        <p:nvSpPr>
+          <p:cNvPr id="4" name="TextBox 3"/>
+          <p:cNvSpPr txBox="1"/>
+          <p:nvPr/>
+        </p:nvSpPr>
+        <p:spPr>
+          <a:xfrm>
+            <a:off x="822960" y="1828800"/>
+            <a:ext cx="10515600" cy="4206240"/>
+          </a:xfrm>
+          <a:prstGeom prst="rect">
+            <a:avLst/>
+          </a:prstGeom>
+          <a:noFill/>
+        </p:spPr>
+        <p:txBody>
+          <a:bodyPr wrap="square">
+            <a:spAutoFit/>
+          </a:bodyPr>
+          <a:lstStyle/>
+          <a:p>
+            <a:pPr>
+              <a:spcAft>
+                <a:spcPts val="1400"/>
+              </a:spcAft>
+            </a:pPr>
+            <a:r>
+              <a:rPr sz="2400">
+                <a:solidFill>
+                  <a:srgbClr val="1F2A37"/>
+                </a:solidFill>
+              </a:rPr>
+              <a:t>• A. a colour</a:t>
+            </a:r>
+          </a:p>
+          <a:p>
+            <a:pPr>
+              <a:spcAft>
+                <a:spcPts val="1400"/>
+              </a:spcAft>
+            </a:pPr>
+            <a:r>
+              <a:rPr sz="2400">
+                <a:solidFill>
+                  <a:srgbClr val="1F2A37"/>
+                </a:solidFill>
+              </a:rPr>
+              <a:t>• B. the first item of a list</a:t>
+            </a:r>
+          </a:p>
+          <a:p>
+            <a:pPr>
+              <a:spcAft>
+                <a:spcPts val="1400"/>
+              </a:spcAft>
+            </a:pPr>
+            <a:r>
+              <a:rPr sz="2400">
+                <a:solidFill>
+                  <a:srgbClr val="1F2A37"/>
+                </a:solidFill>
+              </a:rPr>
+              <a:t>• C. an HTML tag</a:t>
+            </a:r>
+          </a:p>
+          <a:p>
+            <a:pPr>
+              <a:spcAft>
+                <a:spcPts val="1400"/>
+              </a:spcAft>
+            </a:pPr>
+            <a:r>
+              <a:rPr sz="2400">
+                <a:solidFill>
+                  <a:srgbClr val="1F2A37"/>
+                </a:solidFill>
+              </a:rPr>
+              <a:t>• D. a reply that takes time to arrive</a:t>
+            </a:r>
+          </a:p>
+          <a:p>
+            <a:pPr>
+              <a:spcAft>
+                <a:spcPts val="1400"/>
+              </a:spcAft>
+            </a:pPr>
+            <a:r>
+              <a:rPr sz="2400">
+                <a:solidFill>
+                  <a:srgbClr val="1F2A37"/>
+                </a:solidFill>
+              </a:rPr>
+              <a:t>• Pick one - the answer is on the next slide.</a:t>
+            </a:r>
+          </a:p>
+        </p:txBody>
+      </p:sp>
+    </p:spTree>
+  </p:cSld>
+  <p:clrMapOvr>
+    <a:masterClrMapping/>
+  </p:clrMapOvr>
+</p:sld>
+</file>
+
+<file path=ppt/slides/slide35.xml><?xml version="1.0" encoding="utf-8"?>
+<p:sld xmlns:a="http://schemas.openxmlformats.org/drawingml/2006/main" xmlns:p="http://schemas.openxmlformats.org/presentationml/2006/main" xmlns:r="http://schemas.openxmlformats.org/officeDocument/2006/relationships">
+  <p:cSld>
+    <p:spTree>
+      <p:nvGrpSpPr>
+        <p:cNvPr id="1" name=""/>
+        <p:cNvGrpSpPr/>
+        <p:nvPr/>
+      </p:nvGrpSpPr>
+      <p:grpSpPr/>
+      <p:sp>
+        <p:nvSpPr>
+          <p:cNvPr id="2" name="Title 1"/>
+          <p:cNvSpPr>
+            <a:spLocks noGrp="1"/>
+          </p:cNvSpPr>
+          <p:nvPr>
+            <p:ph type="title"/>
+          </p:nvPr>
+        </p:nvSpPr>
+        <p:spPr/>
+        <p:txBody>
+          <a:bodyPr/>
+          <a:lstStyle/>
+          <a:p>
+            <a:r>
+              <a:rPr sz="3800" b="1">
+                <a:solidFill>
+                  <a:srgbClr val="1F2A37"/>
+                </a:solidFill>
+              </a:rPr>
+              <a:t>What does  fetch  return that you must await? (from week 3)</a:t>
+            </a:r>
+          </a:p>
+        </p:txBody>
+      </p:sp>
+      <p:sp>
+        <p:nvSpPr>
+          <p:cNvPr id="3" name="TextBox 2"/>
+          <p:cNvSpPr txBox="1"/>
+          <p:nvPr/>
+        </p:nvSpPr>
+        <p:spPr>
+          <a:xfrm>
+            <a:off x="868680" y="502920"/>
+            <a:ext cx="5486400" cy="457200"/>
+          </a:xfrm>
+          <a:prstGeom prst="rect">
+            <a:avLst/>
+          </a:prstGeom>
+          <a:noFill/>
+        </p:spPr>
+        <p:txBody>
+          <a:bodyPr wrap="none">
+            <a:spAutoFit/>
+          </a:bodyPr>
+          <a:lstStyle/>
+          <a:p>
+            <a:r>
+              <a:rPr sz="1500" b="1">
+                <a:solidFill>
+                  <a:srgbClr val="01AEFD"/>
+                </a:solidFill>
+              </a:rPr>
+              <a:t>ANSWER</a:t>
+            </a:r>
+          </a:p>
+        </p:txBody>
+      </p:sp>
+      <p:sp>
+        <p:nvSpPr>
+          <p:cNvPr id="4" name="TextBox 3"/>
+          <p:cNvSpPr txBox="1"/>
+          <p:nvPr/>
+        </p:nvSpPr>
+        <p:spPr>
+          <a:xfrm>
+            <a:off x="822960" y="1828800"/>
+            <a:ext cx="10515600" cy="4206240"/>
+          </a:xfrm>
+          <a:prstGeom prst="rect">
+            <a:avLst/>
+          </a:prstGeom>
+          <a:noFill/>
+        </p:spPr>
+        <p:txBody>
+          <a:bodyPr wrap="square">
+            <a:spAutoFit/>
+          </a:bodyPr>
+          <a:lstStyle/>
+          <a:p>
+            <a:pPr>
+              <a:spcAft>
+                <a:spcPts val="1400"/>
+              </a:spcAft>
+            </a:pPr>
+            <a:r>
+              <a:rPr sz="2400">
+                <a:solidFill>
+                  <a:srgbClr val="1F2A37"/>
+                </a:solidFill>
+              </a:rPr>
+              <a:t>• A. a colour</a:t>
+            </a:r>
+          </a:p>
+          <a:p>
+            <a:pPr>
+              <a:spcAft>
+                <a:spcPts val="1400"/>
+              </a:spcAft>
+            </a:pPr>
+            <a:r>
+              <a:rPr sz="2400">
+                <a:solidFill>
+                  <a:srgbClr val="1F2A37"/>
+                </a:solidFill>
+              </a:rPr>
+              <a:t>• B. the first item of a list</a:t>
+            </a:r>
+          </a:p>
+          <a:p>
+            <a:pPr>
+              <a:spcAft>
+                <a:spcPts val="1400"/>
+              </a:spcAft>
+            </a:pPr>
+            <a:r>
+              <a:rPr sz="2400">
+                <a:solidFill>
+                  <a:srgbClr val="1F2A37"/>
+                </a:solidFill>
+              </a:rPr>
+              <a:t>• C. an HTML tag</a:t>
+            </a:r>
+          </a:p>
+          <a:p>
+            <a:pPr>
+              <a:spcAft>
+                <a:spcPts val="1400"/>
+              </a:spcAft>
+            </a:pPr>
+            <a:r>
+              <a:rPr sz="2400">
+                <a:solidFill>
+                  <a:srgbClr val="1F2A37"/>
+                </a:solidFill>
+              </a:rPr>
+              <a:t>• D. a reply that takes time to arrive (correct)</a:t>
+            </a:r>
+          </a:p>
+          <a:p>
+            <a:pPr>
+              <a:spcAft>
+                <a:spcPts val="1400"/>
+              </a:spcAft>
+            </a:pPr>
+            <a:r>
+              <a:rPr sz="2400">
+                <a:solidFill>
+                  <a:srgbClr val="1F2A37"/>
+                </a:solidFill>
+              </a:rPr>
+              <a:t>• fetch talks to a server, which takes time - so you await the reply.</a:t>
+            </a:r>
+          </a:p>
+        </p:txBody>
+      </p:sp>
+    </p:spTree>
+  </p:cSld>
+  <p:clrMapOvr>
+    <a:masterClrMapping/>
+  </p:clrMapOvr>
+</p:sld>
+</file>
+
+<file path=ppt/slides/slide36.xml><?xml version="1.0" encoding="utf-8"?>
+<p:sld xmlns:a="http://schemas.openxmlformats.org/drawingml/2006/main" xmlns:p="http://schemas.openxmlformats.org/presentationml/2006/main" xmlns:r="http://schemas.openxmlformats.org/officeDocument/2006/relationships">
+  <p:cSld>
+    <p:spTree>
+      <p:nvGrpSpPr>
+        <p:cNvPr id="1" name=""/>
+        <p:cNvGrpSpPr/>
+        <p:nvPr/>
+      </p:nvGrpSpPr>
+      <p:grpSpPr/>
+      <p:sp>
+        <p:nvSpPr>
+          <p:cNvPr id="2" name="Title 1"/>
+          <p:cNvSpPr>
+            <a:spLocks noGrp="1"/>
+          </p:cNvSpPr>
+          <p:nvPr>
+            <p:ph type="title"/>
+          </p:nvPr>
+        </p:nvSpPr>
+        <p:spPr/>
+        <p:txBody>
+          <a:bodyPr/>
+          <a:lstStyle/>
+          <a:p>
+            <a:r>
+              <a:rPr sz="3800" b="1">
+                <a:solidFill>
+                  <a:srgbClr val="1F2A37"/>
+                </a:solidFill>
+              </a:rPr>
+              <a:t>Where the answer hides</a:t>
+            </a:r>
+          </a:p>
+        </p:txBody>
+      </p:sp>
+      <p:sp>
+        <p:nvSpPr>
+          <p:cNvPr id="3" name="TextBox 2"/>
+          <p:cNvSpPr txBox="1"/>
+          <p:nvPr/>
+        </p:nvSpPr>
+        <p:spPr>
+          <a:xfrm>
+            <a:off x="822960" y="1828800"/>
+            <a:ext cx="10515600" cy="4206240"/>
+          </a:xfrm>
+          <a:prstGeom prst="rect">
+            <a:avLst/>
+          </a:prstGeom>
+          <a:noFill/>
+        </p:spPr>
+        <p:txBody>
+          <a:bodyPr wrap="square">
+            <a:spAutoFit/>
+          </a:bodyPr>
+          <a:lstStyle/>
+          <a:p>
+            <a:pPr>
+              <a:spcAft>
+                <a:spcPts val="1400"/>
+              </a:spcAft>
+            </a:pPr>
+            <a:r>
+              <a:rPr sz="2800">
+                <a:solidFill>
+                  <a:srgbClr val="01AEFD"/>
+                </a:solidFill>
+              </a:rPr>
+              <a:t>data.choices[0].message.content</a:t>
+            </a:r>
+          </a:p>
+          <a:p>
+            <a:pPr>
+              <a:spcAft>
+                <a:spcPts val="1400"/>
+              </a:spcAft>
+            </a:pPr>
+            <a:r>
+              <a:rPr sz="2400">
+                <a:solidFill>
+                  <a:srgbClr val="1F2A37"/>
+                </a:solidFill>
+              </a:rPr>
+              <a:t>• choices - a list of answers (you get one)</a:t>
+            </a:r>
+          </a:p>
+          <a:p>
+            <a:pPr>
+              <a:spcAft>
+                <a:spcPts val="1400"/>
+              </a:spcAft>
+            </a:pPr>
+            <a:r>
+              <a:rPr sz="2400">
+                <a:solidFill>
+                  <a:srgbClr val="1F2A37"/>
+                </a:solidFill>
+              </a:rPr>
+              <a:t>• [0] - the first one</a:t>
+            </a:r>
+          </a:p>
+          <a:p>
+            <a:pPr>
+              <a:spcAft>
+                <a:spcPts val="1400"/>
+              </a:spcAft>
+            </a:pPr>
+            <a:r>
+              <a:rPr sz="2400">
+                <a:solidFill>
+                  <a:srgbClr val="1F2A37"/>
+                </a:solidFill>
+              </a:rPr>
+              <a:t>• message.content - the actual words</a:t>
+            </a:r>
+          </a:p>
+        </p:txBody>
+      </p:sp>
+    </p:spTree>
+  </p:cSld>
+  <p:clrMapOvr>
+    <a:masterClrMapping/>
+  </p:clrMapOvr>
+</p:sld>
+</file>
+
+<file path=ppt/slides/slide37.xml><?xml version="1.0" encoding="utf-8"?>
+<p:sld xmlns:a="http://schemas.openxmlformats.org/drawingml/2006/main" xmlns:p="http://schemas.openxmlformats.org/presentationml/2006/main" xmlns:r="http://schemas.openxmlformats.org/officeDocument/2006/relationships">
+  <p:cSld>
+    <p:spTree>
+      <p:nvGrpSpPr>
+        <p:cNvPr id="1" name=""/>
+        <p:cNvGrpSpPr/>
+        <p:nvPr/>
+      </p:nvGrpSpPr>
+      <p:grpSpPr/>
+      <p:sp>
+        <p:nvSpPr>
+          <p:cNvPr id="2" name="Title 1"/>
+          <p:cNvSpPr>
+            <a:spLocks noGrp="1"/>
+          </p:cNvSpPr>
+          <p:nvPr>
+            <p:ph type="title"/>
+          </p:nvPr>
+        </p:nvSpPr>
+        <p:spPr/>
+        <p:txBody>
+          <a:bodyPr/>
+          <a:lstStyle/>
+          <a:p>
+            <a:r>
+              <a:rPr sz="3800" b="1">
+                <a:solidFill>
+                  <a:srgbClr val="1F2A37"/>
+                </a:solidFill>
+              </a:rPr>
+              <a:t>Slow things need await</a:t>
+            </a:r>
+          </a:p>
+        </p:txBody>
+      </p:sp>
+      <p:sp>
+        <p:nvSpPr>
+          <p:cNvPr id="3" name="TextBox 2"/>
+          <p:cNvSpPr txBox="1"/>
+          <p:nvPr/>
+        </p:nvSpPr>
+        <p:spPr>
+          <a:xfrm>
+            <a:off x="822960" y="1828800"/>
+            <a:ext cx="10515600" cy="4206240"/>
+          </a:xfrm>
+          <a:prstGeom prst="rect">
+            <a:avLst/>
+          </a:prstGeom>
+          <a:noFill/>
+        </p:spPr>
+        <p:txBody>
+          <a:bodyPr wrap="square">
+            <a:spAutoFit/>
+          </a:bodyPr>
+          <a:lstStyle/>
+          <a:p>
+            <a:pPr>
+              <a:spcAft>
+                <a:spcPts val="1400"/>
+              </a:spcAft>
+            </a:pPr>
+            <a:r>
+              <a:rPr sz="2400">
+                <a:solidFill>
+                  <a:srgbClr val="1F2A37"/>
+                </a:solidFill>
+              </a:rPr>
+              <a:t>• const reply = await askAI(text)</a:t>
+            </a:r>
+          </a:p>
+          <a:p>
+            <a:pPr>
+              <a:spcAft>
+                <a:spcPts val="1400"/>
+              </a:spcAft>
+            </a:pPr>
+            <a:r>
+              <a:rPr sz="2400">
+                <a:solidFill>
+                  <a:srgbClr val="1F2A37"/>
+                </a:solidFill>
+              </a:rPr>
+              <a:t>• The listener has to be async too</a:t>
+            </a:r>
+          </a:p>
+          <a:p>
+            <a:pPr>
+              <a:spcAft>
+                <a:spcPts val="1400"/>
+              </a:spcAft>
+            </a:pPr>
+            <a:r>
+              <a:rPr sz="2400">
+                <a:solidFill>
+                  <a:srgbClr val="1F2A37"/>
+                </a:solidFill>
+              </a:rPr>
+              <a:t>• Forget it and you get [object Promise]</a:t>
+            </a:r>
+          </a:p>
+          <a:p>
+            <a:pPr>
+              <a:spcAft>
+                <a:spcPts val="1400"/>
+              </a:spcAft>
+            </a:pPr>
+            <a:r>
+              <a:rPr sz="2400">
+                <a:solidFill>
+                  <a:srgbClr val="1F2A37"/>
+                </a:solidFill>
+              </a:rPr>
+              <a:t>• Delete the listModels() call - it has done its job</a:t>
+            </a:r>
+          </a:p>
+        </p:txBody>
+      </p:sp>
+    </p:spTree>
+  </p:cSld>
+  <p:clrMapOvr>
+    <a:masterClrMapping/>
+  </p:clrMapOvr>
+</p:sld>
+</file>
+
+<file path=ppt/slides/slide38.xml><?xml version="1.0" encoding="utf-8"?>
 <p:sld xmlns:a="http://schemas.openxmlformats.org/drawingml/2006/main" xmlns:p="http://schemas.openxmlformats.org/presentationml/2006/main" xmlns:r="http://schemas.openxmlformats.org/officeDocument/2006/relationships">
   <p:cSld>
     <p:bg>
@@ -11291,7 +12534,7 @@
                 </a:solidFill>
                 <a:latin typeface="Consolas"/>
               </a:rPr>
-              <a:t>// leave a note: when this form is submitted, run this. The browser waits.</a:t>
+              <a:t>// In PixelPad your loop() checked 'was a key pressed?' every frame. Here you</a:t>
             </a:r>
           </a:p>
         </p:txBody>
@@ -11337,7 +12580,7 @@
 </p:sld>
 </file>
 
-<file path=ppt/slides/slide32.xml><?xml version="1.0" encoding="utf-8"?>
+<file path=ppt/slides/slide39.xml><?xml version="1.0" encoding="utf-8"?>
 <p:sld xmlns:a="http://schemas.openxmlformats.org/drawingml/2006/main" xmlns:p="http://schemas.openxmlformats.org/presentationml/2006/main" xmlns:r="http://schemas.openxmlformats.org/officeDocument/2006/relationships">
   <p:cSld>
     <p:bg>
@@ -11456,7 +12699,7 @@
                 </a:solidFill>
                 <a:latin typeface="Consolas"/>
               </a:rPr>
-              <a:t>composer.addEventListener('submit', function (event) {</a:t>
+              <a:t>// leave a note: when this form is submitted, run this. The browser waits.</a:t>
             </a:r>
           </a:p>
         </p:txBody>
@@ -11490,1666 +12733,6 @@
                 </a:solidFill>
               </a:rPr>
               <a:t>This line changes - take the old one out; the new version is next.</a:t>
-            </a:r>
-          </a:p>
-        </p:txBody>
-      </p:sp>
-    </p:spTree>
-  </p:cSld>
-  <p:clrMapOvr>
-    <a:masterClrMapping/>
-  </p:clrMapOvr>
-</p:sld>
-</file>
-
-<file path=ppt/slides/slide33.xml><?xml version="1.0" encoding="utf-8"?>
-<p:sld xmlns:a="http://schemas.openxmlformats.org/drawingml/2006/main" xmlns:p="http://schemas.openxmlformats.org/presentationml/2006/main" xmlns:r="http://schemas.openxmlformats.org/officeDocument/2006/relationships">
-  <p:cSld>
-    <p:bg>
-      <p:bgPr>
-        <a:solidFill>
-          <a:srgbClr val="102127"/>
-        </a:solidFill>
-        <a:effectLst/>
-      </p:bgPr>
-    </p:bg>
-    <p:spTree>
-      <p:nvGrpSpPr>
-        <p:cNvPr id="1" name=""/>
-        <p:cNvGrpSpPr/>
-        <p:nvPr/>
-      </p:nvGrpSpPr>
-      <p:grpSpPr/>
-      <p:sp>
-        <p:nvSpPr>
-          <p:cNvPr id="2" name="TextBox 1"/>
-          <p:cNvSpPr txBox="1"/>
-          <p:nvPr/>
-        </p:nvSpPr>
-        <p:spPr>
-          <a:xfrm>
-            <a:off x="502920" y="274320"/>
-            <a:ext cx="11155680" cy="548640"/>
-          </a:xfrm>
-          <a:prstGeom prst="rect">
-            <a:avLst/>
-          </a:prstGeom>
-          <a:noFill/>
-        </p:spPr>
-        <p:txBody>
-          <a:bodyPr wrap="none">
-            <a:spAutoFit/>
-          </a:bodyPr>
-          <a:lstStyle/>
-          <a:p>
-            <a:r>
-              <a:rPr sz="2200" b="1">
-                <a:solidFill>
-                  <a:srgbClr val="01AEFD"/>
-                </a:solidFill>
-              </a:rPr>
-              <a:t>Type this into script.js   -   line 60</a:t>
-            </a:r>
-          </a:p>
-        </p:txBody>
-      </p:sp>
-      <p:sp>
-        <p:nvSpPr>
-          <p:cNvPr id="3" name="TextBox 2"/>
-          <p:cNvSpPr txBox="1"/>
-          <p:nvPr/>
-        </p:nvSpPr>
-        <p:spPr>
-          <a:xfrm>
-            <a:off x="502920" y="960120"/>
-            <a:ext cx="11155680" cy="4297680"/>
-          </a:xfrm>
-          <a:prstGeom prst="rect">
-            <a:avLst/>
-          </a:prstGeom>
-          <a:noFill/>
-        </p:spPr>
-        <p:txBody>
-          <a:bodyPr wrap="none">
-            <a:spAutoFit/>
-          </a:bodyPr>
-          <a:lstStyle/>
-          <a:p>
-            <a:pPr>
-              <a:spcAft>
-                <a:spcPts val="0"/>
-              </a:spcAft>
-            </a:pPr>
-            <a:r>
-              <a:rPr sz="1800">
-                <a:solidFill>
-                  <a:srgbClr val="6D8C97"/>
-                </a:solidFill>
-                <a:latin typeface="Consolas"/>
-              </a:rPr>
-              <a:t>  59  </a:t>
-            </a:r>
-            <a:r>
-              <a:rPr sz="1800">
-                <a:solidFill>
-                  <a:srgbClr val="6D8C97"/>
-                </a:solidFill>
-                <a:latin typeface="Consolas"/>
-              </a:rPr>
-              <a:t> </a:t>
-            </a:r>
-          </a:p>
-          <a:p>
-            <a:pPr>
-              <a:spcAft>
-                <a:spcPts val="0"/>
-              </a:spcAft>
-            </a:pPr>
-            <a:r>
-              <a:rPr sz="1800">
-                <a:solidFill>
-                  <a:srgbClr val="6D8C97"/>
-                </a:solidFill>
-                <a:latin typeface="Consolas"/>
-              </a:rPr>
-              <a:t>  60  </a:t>
-            </a:r>
-            <a:r>
-              <a:rPr sz="1800">
-                <a:solidFill>
-                  <a:srgbClr val="7FE0A0"/>
-                </a:solidFill>
-                <a:latin typeface="Consolas"/>
-              </a:rPr>
-              <a:t>// The browser calls this when the form is submitted.</a:t>
-            </a:r>
-          </a:p>
-        </p:txBody>
-      </p:sp>
-      <p:sp>
-        <p:nvSpPr>
-          <p:cNvPr id="4" name="TextBox 3"/>
-          <p:cNvSpPr txBox="1"/>
-          <p:nvPr/>
-        </p:nvSpPr>
-        <p:spPr>
-          <a:xfrm>
-            <a:off x="548640" y="5623560"/>
-            <a:ext cx="11064240" cy="1051560"/>
-          </a:xfrm>
-          <a:prstGeom prst="rect">
-            <a:avLst/>
-          </a:prstGeom>
-          <a:noFill/>
-        </p:spPr>
-        <p:txBody>
-          <a:bodyPr wrap="square">
-            <a:spAutoFit/>
-          </a:bodyPr>
-          <a:lstStyle/>
-          <a:p>
-            <a:r>
-              <a:rPr sz="2000">
-                <a:solidFill>
-                  <a:srgbClr val="DCECEF"/>
-                </a:solidFill>
-              </a:rPr>
-              <a:t>A comment: the browser calls this when the form is submitted.</a:t>
-            </a:r>
-          </a:p>
-        </p:txBody>
-      </p:sp>
-    </p:spTree>
-  </p:cSld>
-  <p:clrMapOvr>
-    <a:masterClrMapping/>
-  </p:clrMapOvr>
-</p:sld>
-</file>
-
-<file path=ppt/slides/slide34.xml><?xml version="1.0" encoding="utf-8"?>
-<p:sld xmlns:a="http://schemas.openxmlformats.org/drawingml/2006/main" xmlns:p="http://schemas.openxmlformats.org/presentationml/2006/main" xmlns:r="http://schemas.openxmlformats.org/officeDocument/2006/relationships">
-  <p:cSld>
-    <p:bg>
-      <p:bgPr>
-        <a:solidFill>
-          <a:srgbClr val="102127"/>
-        </a:solidFill>
-        <a:effectLst/>
-      </p:bgPr>
-    </p:bg>
-    <p:spTree>
-      <p:nvGrpSpPr>
-        <p:cNvPr id="1" name=""/>
-        <p:cNvGrpSpPr/>
-        <p:nvPr/>
-      </p:nvGrpSpPr>
-      <p:grpSpPr/>
-      <p:sp>
-        <p:nvSpPr>
-          <p:cNvPr id="2" name="TextBox 1"/>
-          <p:cNvSpPr txBox="1"/>
-          <p:nvPr/>
-        </p:nvSpPr>
-        <p:spPr>
-          <a:xfrm>
-            <a:off x="502920" y="274320"/>
-            <a:ext cx="11155680" cy="548640"/>
-          </a:xfrm>
-          <a:prstGeom prst="rect">
-            <a:avLst/>
-          </a:prstGeom>
-          <a:noFill/>
-        </p:spPr>
-        <p:txBody>
-          <a:bodyPr wrap="none">
-            <a:spAutoFit/>
-          </a:bodyPr>
-          <a:lstStyle/>
-          <a:p>
-            <a:r>
-              <a:rPr sz="2200" b="1">
-                <a:solidFill>
-                  <a:srgbClr val="01AEFD"/>
-                </a:solidFill>
-              </a:rPr>
-              <a:t>Type this into script.js   -   line 61</a:t>
-            </a:r>
-          </a:p>
-        </p:txBody>
-      </p:sp>
-      <p:sp>
-        <p:nvSpPr>
-          <p:cNvPr id="3" name="TextBox 2"/>
-          <p:cNvSpPr txBox="1"/>
-          <p:nvPr/>
-        </p:nvSpPr>
-        <p:spPr>
-          <a:xfrm>
-            <a:off x="502920" y="960120"/>
-            <a:ext cx="11155680" cy="4297680"/>
-          </a:xfrm>
-          <a:prstGeom prst="rect">
-            <a:avLst/>
-          </a:prstGeom>
-          <a:noFill/>
-        </p:spPr>
-        <p:txBody>
-          <a:bodyPr wrap="none">
-            <a:spAutoFit/>
-          </a:bodyPr>
-          <a:lstStyle/>
-          <a:p>
-            <a:pPr>
-              <a:spcAft>
-                <a:spcPts val="0"/>
-              </a:spcAft>
-            </a:pPr>
-            <a:r>
-              <a:rPr sz="1800">
-                <a:solidFill>
-                  <a:srgbClr val="6D8C97"/>
-                </a:solidFill>
-                <a:latin typeface="Consolas"/>
-              </a:rPr>
-              <a:t>  59  </a:t>
-            </a:r>
-            <a:r>
-              <a:rPr sz="1800">
-                <a:solidFill>
-                  <a:srgbClr val="6D8C97"/>
-                </a:solidFill>
-                <a:latin typeface="Consolas"/>
-              </a:rPr>
-              <a:t> </a:t>
-            </a:r>
-          </a:p>
-          <a:p>
-            <a:pPr>
-              <a:spcAft>
-                <a:spcPts val="0"/>
-              </a:spcAft>
-            </a:pPr>
-            <a:r>
-              <a:rPr sz="1800">
-                <a:solidFill>
-                  <a:srgbClr val="6D8C97"/>
-                </a:solidFill>
-                <a:latin typeface="Consolas"/>
-              </a:rPr>
-              <a:t>  60  </a:t>
-            </a:r>
-            <a:r>
-              <a:rPr sz="1800">
-                <a:solidFill>
-                  <a:srgbClr val="6D8C97"/>
-                </a:solidFill>
-                <a:latin typeface="Consolas"/>
-              </a:rPr>
-              <a:t>// The browser calls this when the form is submitted.</a:t>
-            </a:r>
-          </a:p>
-          <a:p>
-            <a:pPr>
-              <a:spcAft>
-                <a:spcPts val="0"/>
-              </a:spcAft>
-            </a:pPr>
-            <a:r>
-              <a:rPr sz="1800">
-                <a:solidFill>
-                  <a:srgbClr val="6D8C97"/>
-                </a:solidFill>
-                <a:latin typeface="Consolas"/>
-              </a:rPr>
-              <a:t>  61  </a:t>
-            </a:r>
-            <a:r>
-              <a:rPr sz="1800">
-                <a:solidFill>
-                  <a:srgbClr val="7FE0A0"/>
-                </a:solidFill>
-                <a:latin typeface="Consolas"/>
-              </a:rPr>
-              <a:t>composer.addEventListener('submit', async function (event) {</a:t>
-            </a:r>
-          </a:p>
-        </p:txBody>
-      </p:sp>
-      <p:sp>
-        <p:nvSpPr>
-          <p:cNvPr id="4" name="TextBox 3"/>
-          <p:cNvSpPr txBox="1"/>
-          <p:nvPr/>
-        </p:nvSpPr>
-        <p:spPr>
-          <a:xfrm>
-            <a:off x="548640" y="5623560"/>
-            <a:ext cx="11064240" cy="1051560"/>
-          </a:xfrm>
-          <a:prstGeom prst="rect">
-            <a:avLst/>
-          </a:prstGeom>
-          <a:noFill/>
-        </p:spPr>
-        <p:txBody>
-          <a:bodyPr wrap="square">
-            <a:spAutoFit/>
-          </a:bodyPr>
-          <a:lstStyle/>
-          <a:p>
-            <a:r>
-              <a:rPr sz="2000">
-                <a:solidFill>
-                  <a:srgbClr val="DCECEF"/>
-                </a:solidFill>
-              </a:rPr>
-              <a:t>Add async so we are allowed to await the slow AI call inside.</a:t>
-            </a:r>
-          </a:p>
-        </p:txBody>
-      </p:sp>
-    </p:spTree>
-  </p:cSld>
-  <p:clrMapOvr>
-    <a:masterClrMapping/>
-  </p:clrMapOvr>
-</p:sld>
-</file>
-
-<file path=ppt/slides/slide35.xml><?xml version="1.0" encoding="utf-8"?>
-<p:sld xmlns:a="http://schemas.openxmlformats.org/drawingml/2006/main" xmlns:p="http://schemas.openxmlformats.org/presentationml/2006/main" xmlns:r="http://schemas.openxmlformats.org/officeDocument/2006/relationships">
-  <p:cSld>
-    <p:bg>
-      <p:bgPr>
-        <a:solidFill>
-          <a:srgbClr val="102127"/>
-        </a:solidFill>
-        <a:effectLst/>
-      </p:bgPr>
-    </p:bg>
-    <p:spTree>
-      <p:nvGrpSpPr>
-        <p:cNvPr id="1" name=""/>
-        <p:cNvGrpSpPr/>
-        <p:nvPr/>
-      </p:nvGrpSpPr>
-      <p:grpSpPr/>
-      <p:sp>
-        <p:nvSpPr>
-          <p:cNvPr id="2" name="TextBox 1"/>
-          <p:cNvSpPr txBox="1"/>
-          <p:nvPr/>
-        </p:nvSpPr>
-        <p:spPr>
-          <a:xfrm>
-            <a:off x="502920" y="274320"/>
-            <a:ext cx="11155680" cy="548640"/>
-          </a:xfrm>
-          <a:prstGeom prst="rect">
-            <a:avLst/>
-          </a:prstGeom>
-          <a:noFill/>
-        </p:spPr>
-        <p:txBody>
-          <a:bodyPr wrap="none">
-            <a:spAutoFit/>
-          </a:bodyPr>
-          <a:lstStyle/>
-          <a:p>
-            <a:r>
-              <a:rPr sz="2200" b="1">
-                <a:solidFill>
-                  <a:srgbClr val="01AEFD"/>
-                </a:solidFill>
-              </a:rPr>
-              <a:t>In script.js   -   replace a line</a:t>
-            </a:r>
-          </a:p>
-        </p:txBody>
-      </p:sp>
-      <p:sp>
-        <p:nvSpPr>
-          <p:cNvPr id="3" name="TextBox 2"/>
-          <p:cNvSpPr txBox="1"/>
-          <p:nvPr/>
-        </p:nvSpPr>
-        <p:spPr>
-          <a:xfrm>
-            <a:off x="502920" y="960120"/>
-            <a:ext cx="11155680" cy="4297680"/>
-          </a:xfrm>
-          <a:prstGeom prst="rect">
-            <a:avLst/>
-          </a:prstGeom>
-          <a:noFill/>
-        </p:spPr>
-        <p:txBody>
-          <a:bodyPr wrap="none">
-            <a:spAutoFit/>
-          </a:bodyPr>
-          <a:lstStyle/>
-          <a:p>
-            <a:pPr>
-              <a:spcAft>
-                <a:spcPts val="0"/>
-              </a:spcAft>
-            </a:pPr>
-            <a:r>
-              <a:rPr sz="1800">
-                <a:solidFill>
-                  <a:srgbClr val="6D8C97"/>
-                </a:solidFill>
-                <a:latin typeface="Consolas"/>
-              </a:rPr>
-              <a:t>  59  </a:t>
-            </a:r>
-            <a:r>
-              <a:rPr sz="1800">
-                <a:solidFill>
-                  <a:srgbClr val="6D8C97"/>
-                </a:solidFill>
-                <a:latin typeface="Consolas"/>
-              </a:rPr>
-              <a:t> </a:t>
-            </a:r>
-          </a:p>
-          <a:p>
-            <a:pPr>
-              <a:spcAft>
-                <a:spcPts val="0"/>
-              </a:spcAft>
-            </a:pPr>
-            <a:r>
-              <a:rPr sz="1800">
-                <a:solidFill>
-                  <a:srgbClr val="6D8C97"/>
-                </a:solidFill>
-                <a:latin typeface="Consolas"/>
-              </a:rPr>
-              <a:t>  60  </a:t>
-            </a:r>
-            <a:r>
-              <a:rPr sz="1800">
-                <a:solidFill>
-                  <a:srgbClr val="6D8C97"/>
-                </a:solidFill>
-                <a:latin typeface="Consolas"/>
-              </a:rPr>
-              <a:t>// The browser calls this when the form is submitted.</a:t>
-            </a:r>
-          </a:p>
-          <a:p>
-            <a:pPr>
-              <a:spcAft>
-                <a:spcPts val="0"/>
-              </a:spcAft>
-            </a:pPr>
-            <a:r>
-              <a:rPr sz="1800">
-                <a:solidFill>
-                  <a:srgbClr val="6D8C97"/>
-                </a:solidFill>
-                <a:latin typeface="Consolas"/>
-              </a:rPr>
-              <a:t>  61  </a:t>
-            </a:r>
-            <a:r>
-              <a:rPr sz="1800">
-                <a:solidFill>
-                  <a:srgbClr val="6D8C97"/>
-                </a:solidFill>
-                <a:latin typeface="Consolas"/>
-              </a:rPr>
-              <a:t>composer.addEventListener('submit', async function (event) {</a:t>
-            </a:r>
-          </a:p>
-          <a:p>
-            <a:pPr>
-              <a:spcAft>
-                <a:spcPts val="0"/>
-              </a:spcAft>
-            </a:pPr>
-            <a:r>
-              <a:rPr sz="1800">
-                <a:solidFill>
-                  <a:srgbClr val="6D8C97"/>
-                </a:solidFill>
-                <a:latin typeface="Consolas"/>
-              </a:rPr>
-              <a:t>  62  </a:t>
-            </a:r>
-            <a:r>
-              <a:rPr sz="1800">
-                <a:solidFill>
-                  <a:srgbClr val="6D8C97"/>
-                </a:solidFill>
-                <a:latin typeface="Consolas"/>
-              </a:rPr>
-              <a:t>  event.preventDefault();</a:t>
-            </a:r>
-          </a:p>
-          <a:p>
-            <a:pPr>
-              <a:spcAft>
-                <a:spcPts val="0"/>
-              </a:spcAft>
-            </a:pPr>
-            <a:r>
-              <a:rPr sz="1800">
-                <a:solidFill>
-                  <a:srgbClr val="6D8C97"/>
-                </a:solidFill>
-                <a:latin typeface="Consolas"/>
-              </a:rPr>
-              <a:t>  63  </a:t>
-            </a:r>
-            <a:r>
-              <a:rPr sz="1800">
-                <a:solidFill>
-                  <a:srgbClr val="6D8C97"/>
-                </a:solidFill>
-                <a:latin typeface="Consolas"/>
-              </a:rPr>
-              <a:t>  const text = promptBox.value.trim();</a:t>
-            </a:r>
-          </a:p>
-          <a:p>
-            <a:pPr>
-              <a:spcAft>
-                <a:spcPts val="0"/>
-              </a:spcAft>
-            </a:pPr>
-            <a:r>
-              <a:rPr sz="1800">
-                <a:solidFill>
-                  <a:srgbClr val="6D8C97"/>
-                </a:solidFill>
-                <a:latin typeface="Consolas"/>
-              </a:rPr>
-              <a:t>  64  </a:t>
-            </a:r>
-            <a:r>
-              <a:rPr sz="1800">
-                <a:solidFill>
-                  <a:srgbClr val="6D8C97"/>
-                </a:solidFill>
-                <a:latin typeface="Consolas"/>
-              </a:rPr>
-              <a:t>  if (text === '') { return; }</a:t>
-            </a:r>
-          </a:p>
-          <a:p>
-            <a:pPr>
-              <a:spcAft>
-                <a:spcPts val="0"/>
-              </a:spcAft>
-            </a:pPr>
-            <a:r>
-              <a:rPr sz="1800">
-                <a:solidFill>
-                  <a:srgbClr val="6D8C97"/>
-                </a:solidFill>
-                <a:latin typeface="Consolas"/>
-              </a:rPr>
-              <a:t>  65  </a:t>
-            </a:r>
-            <a:r>
-              <a:rPr sz="1800">
-                <a:solidFill>
-                  <a:srgbClr val="6D8C97"/>
-                </a:solidFill>
-                <a:latin typeface="Consolas"/>
-              </a:rPr>
-              <a:t>  promptBox.value = '';</a:t>
-            </a:r>
-          </a:p>
-          <a:p>
-            <a:pPr>
-              <a:spcAft>
-                <a:spcPts val="0"/>
-              </a:spcAft>
-            </a:pPr>
-            <a:r>
-              <a:rPr sz="1800">
-                <a:solidFill>
-                  <a:srgbClr val="6D8C97"/>
-                </a:solidFill>
-                <a:latin typeface="Consolas"/>
-              </a:rPr>
-              <a:t>  66  </a:t>
-            </a:r>
-            <a:r>
-              <a:rPr sz="1800">
-                <a:solidFill>
-                  <a:srgbClr val="6D8C97"/>
-                </a:solidFill>
-                <a:latin typeface="Consolas"/>
-              </a:rPr>
-              <a:t>  addLine('You', text);</a:t>
-            </a:r>
-          </a:p>
-          <a:p>
-            <a:pPr>
-              <a:spcAft>
-                <a:spcPts val="0"/>
-              </a:spcAft>
-            </a:pPr>
-            <a:r>
-              <a:rPr sz="1800">
-                <a:solidFill>
-                  <a:srgbClr val="6D8C97"/>
-                </a:solidFill>
-                <a:latin typeface="Consolas"/>
-              </a:rPr>
-              <a:t>  67  </a:t>
-            </a:r>
-            <a:r>
-              <a:rPr sz="1800" strike="sngStrike">
-                <a:solidFill>
-                  <a:srgbClr val="F3928B"/>
-                </a:solidFill>
-                <a:latin typeface="Consolas"/>
-              </a:rPr>
-              <a:t>  addLine('Companion', 'You said: ' + text);   // a pretend answer, for now</a:t>
-            </a:r>
-          </a:p>
-        </p:txBody>
-      </p:sp>
-      <p:sp>
-        <p:nvSpPr>
-          <p:cNvPr id="4" name="TextBox 3"/>
-          <p:cNvSpPr txBox="1"/>
-          <p:nvPr/>
-        </p:nvSpPr>
-        <p:spPr>
-          <a:xfrm>
-            <a:off x="548640" y="5623560"/>
-            <a:ext cx="11064240" cy="1051560"/>
-          </a:xfrm>
-          <a:prstGeom prst="rect">
-            <a:avLst/>
-          </a:prstGeom>
-          <a:noFill/>
-        </p:spPr>
-        <p:txBody>
-          <a:bodyPr wrap="square">
-            <a:spAutoFit/>
-          </a:bodyPr>
-          <a:lstStyle/>
-          <a:p>
-            <a:r>
-              <a:rPr sz="2000">
-                <a:solidFill>
-                  <a:srgbClr val="DCECEF"/>
-                </a:solidFill>
-              </a:rPr>
-              <a:t>This line changes - take the old one out; the new version is next.</a:t>
-            </a:r>
-          </a:p>
-        </p:txBody>
-      </p:sp>
-    </p:spTree>
-  </p:cSld>
-  <p:clrMapOvr>
-    <a:masterClrMapping/>
-  </p:clrMapOvr>
-</p:sld>
-</file>
-
-<file path=ppt/slides/slide36.xml><?xml version="1.0" encoding="utf-8"?>
-<p:sld xmlns:a="http://schemas.openxmlformats.org/drawingml/2006/main" xmlns:p="http://schemas.openxmlformats.org/presentationml/2006/main" xmlns:r="http://schemas.openxmlformats.org/officeDocument/2006/relationships">
-  <p:cSld>
-    <p:bg>
-      <p:bgPr>
-        <a:solidFill>
-          <a:srgbClr val="102127"/>
-        </a:solidFill>
-        <a:effectLst/>
-      </p:bgPr>
-    </p:bg>
-    <p:spTree>
-      <p:nvGrpSpPr>
-        <p:cNvPr id="1" name=""/>
-        <p:cNvGrpSpPr/>
-        <p:nvPr/>
-      </p:nvGrpSpPr>
-      <p:grpSpPr/>
-      <p:sp>
-        <p:nvSpPr>
-          <p:cNvPr id="2" name="TextBox 1"/>
-          <p:cNvSpPr txBox="1"/>
-          <p:nvPr/>
-        </p:nvSpPr>
-        <p:spPr>
-          <a:xfrm>
-            <a:off x="502920" y="274320"/>
-            <a:ext cx="11155680" cy="548640"/>
-          </a:xfrm>
-          <a:prstGeom prst="rect">
-            <a:avLst/>
-          </a:prstGeom>
-          <a:noFill/>
-        </p:spPr>
-        <p:txBody>
-          <a:bodyPr wrap="none">
-            <a:spAutoFit/>
-          </a:bodyPr>
-          <a:lstStyle/>
-          <a:p>
-            <a:r>
-              <a:rPr sz="2200" b="1">
-                <a:solidFill>
-                  <a:srgbClr val="01AEFD"/>
-                </a:solidFill>
-              </a:rPr>
-              <a:t>Type this into script.js   -   line 67</a:t>
-            </a:r>
-          </a:p>
-        </p:txBody>
-      </p:sp>
-      <p:sp>
-        <p:nvSpPr>
-          <p:cNvPr id="3" name="TextBox 2"/>
-          <p:cNvSpPr txBox="1"/>
-          <p:nvPr/>
-        </p:nvSpPr>
-        <p:spPr>
-          <a:xfrm>
-            <a:off x="502920" y="960120"/>
-            <a:ext cx="11155680" cy="4297680"/>
-          </a:xfrm>
-          <a:prstGeom prst="rect">
-            <a:avLst/>
-          </a:prstGeom>
-          <a:noFill/>
-        </p:spPr>
-        <p:txBody>
-          <a:bodyPr wrap="none">
-            <a:spAutoFit/>
-          </a:bodyPr>
-          <a:lstStyle/>
-          <a:p>
-            <a:pPr>
-              <a:spcAft>
-                <a:spcPts val="0"/>
-              </a:spcAft>
-            </a:pPr>
-            <a:r>
-              <a:rPr sz="1800">
-                <a:solidFill>
-                  <a:srgbClr val="6D8C97"/>
-                </a:solidFill>
-                <a:latin typeface="Consolas"/>
-              </a:rPr>
-              <a:t>  59  </a:t>
-            </a:r>
-            <a:r>
-              <a:rPr sz="1800">
-                <a:solidFill>
-                  <a:srgbClr val="6D8C97"/>
-                </a:solidFill>
-                <a:latin typeface="Consolas"/>
-              </a:rPr>
-              <a:t> </a:t>
-            </a:r>
-          </a:p>
-          <a:p>
-            <a:pPr>
-              <a:spcAft>
-                <a:spcPts val="0"/>
-              </a:spcAft>
-            </a:pPr>
-            <a:r>
-              <a:rPr sz="1800">
-                <a:solidFill>
-                  <a:srgbClr val="6D8C97"/>
-                </a:solidFill>
-                <a:latin typeface="Consolas"/>
-              </a:rPr>
-              <a:t>  60  </a:t>
-            </a:r>
-            <a:r>
-              <a:rPr sz="1800">
-                <a:solidFill>
-                  <a:srgbClr val="6D8C97"/>
-                </a:solidFill>
-                <a:latin typeface="Consolas"/>
-              </a:rPr>
-              <a:t>// The browser calls this when the form is submitted.</a:t>
-            </a:r>
-          </a:p>
-          <a:p>
-            <a:pPr>
-              <a:spcAft>
-                <a:spcPts val="0"/>
-              </a:spcAft>
-            </a:pPr>
-            <a:r>
-              <a:rPr sz="1800">
-                <a:solidFill>
-                  <a:srgbClr val="6D8C97"/>
-                </a:solidFill>
-                <a:latin typeface="Consolas"/>
-              </a:rPr>
-              <a:t>  61  </a:t>
-            </a:r>
-            <a:r>
-              <a:rPr sz="1800">
-                <a:solidFill>
-                  <a:srgbClr val="6D8C97"/>
-                </a:solidFill>
-                <a:latin typeface="Consolas"/>
-              </a:rPr>
-              <a:t>composer.addEventListener('submit', async function (event) {</a:t>
-            </a:r>
-          </a:p>
-          <a:p>
-            <a:pPr>
-              <a:spcAft>
-                <a:spcPts val="0"/>
-              </a:spcAft>
-            </a:pPr>
-            <a:r>
-              <a:rPr sz="1800">
-                <a:solidFill>
-                  <a:srgbClr val="6D8C97"/>
-                </a:solidFill>
-                <a:latin typeface="Consolas"/>
-              </a:rPr>
-              <a:t>  62  </a:t>
-            </a:r>
-            <a:r>
-              <a:rPr sz="1800">
-                <a:solidFill>
-                  <a:srgbClr val="6D8C97"/>
-                </a:solidFill>
-                <a:latin typeface="Consolas"/>
-              </a:rPr>
-              <a:t>  event.preventDefault();</a:t>
-            </a:r>
-          </a:p>
-          <a:p>
-            <a:pPr>
-              <a:spcAft>
-                <a:spcPts val="0"/>
-              </a:spcAft>
-            </a:pPr>
-            <a:r>
-              <a:rPr sz="1800">
-                <a:solidFill>
-                  <a:srgbClr val="6D8C97"/>
-                </a:solidFill>
-                <a:latin typeface="Consolas"/>
-              </a:rPr>
-              <a:t>  63  </a:t>
-            </a:r>
-            <a:r>
-              <a:rPr sz="1800">
-                <a:solidFill>
-                  <a:srgbClr val="6D8C97"/>
-                </a:solidFill>
-                <a:latin typeface="Consolas"/>
-              </a:rPr>
-              <a:t>  const text = promptBox.value.trim();</a:t>
-            </a:r>
-          </a:p>
-          <a:p>
-            <a:pPr>
-              <a:spcAft>
-                <a:spcPts val="0"/>
-              </a:spcAft>
-            </a:pPr>
-            <a:r>
-              <a:rPr sz="1800">
-                <a:solidFill>
-                  <a:srgbClr val="6D8C97"/>
-                </a:solidFill>
-                <a:latin typeface="Consolas"/>
-              </a:rPr>
-              <a:t>  64  </a:t>
-            </a:r>
-            <a:r>
-              <a:rPr sz="1800">
-                <a:solidFill>
-                  <a:srgbClr val="6D8C97"/>
-                </a:solidFill>
-                <a:latin typeface="Consolas"/>
-              </a:rPr>
-              <a:t>  if (text === '') { return; }</a:t>
-            </a:r>
-          </a:p>
-          <a:p>
-            <a:pPr>
-              <a:spcAft>
-                <a:spcPts val="0"/>
-              </a:spcAft>
-            </a:pPr>
-            <a:r>
-              <a:rPr sz="1800">
-                <a:solidFill>
-                  <a:srgbClr val="6D8C97"/>
-                </a:solidFill>
-                <a:latin typeface="Consolas"/>
-              </a:rPr>
-              <a:t>  65  </a:t>
-            </a:r>
-            <a:r>
-              <a:rPr sz="1800">
-                <a:solidFill>
-                  <a:srgbClr val="6D8C97"/>
-                </a:solidFill>
-                <a:latin typeface="Consolas"/>
-              </a:rPr>
-              <a:t>  promptBox.value = '';</a:t>
-            </a:r>
-          </a:p>
-          <a:p>
-            <a:pPr>
-              <a:spcAft>
-                <a:spcPts val="0"/>
-              </a:spcAft>
-            </a:pPr>
-            <a:r>
-              <a:rPr sz="1800">
-                <a:solidFill>
-                  <a:srgbClr val="6D8C97"/>
-                </a:solidFill>
-                <a:latin typeface="Consolas"/>
-              </a:rPr>
-              <a:t>  66  </a:t>
-            </a:r>
-            <a:r>
-              <a:rPr sz="1800">
-                <a:solidFill>
-                  <a:srgbClr val="6D8C97"/>
-                </a:solidFill>
-                <a:latin typeface="Consolas"/>
-              </a:rPr>
-              <a:t>  addLine('You', text);</a:t>
-            </a:r>
-          </a:p>
-          <a:p>
-            <a:pPr>
-              <a:spcAft>
-                <a:spcPts val="0"/>
-              </a:spcAft>
-            </a:pPr>
-            <a:r>
-              <a:rPr sz="1800">
-                <a:solidFill>
-                  <a:srgbClr val="6D8C97"/>
-                </a:solidFill>
-                <a:latin typeface="Consolas"/>
-              </a:rPr>
-              <a:t>  67  </a:t>
-            </a:r>
-            <a:r>
-              <a:rPr sz="1800">
-                <a:solidFill>
-                  <a:srgbClr val="7FE0A0"/>
-                </a:solidFill>
-                <a:latin typeface="Consolas"/>
-              </a:rPr>
-              <a:t>  addLine('Companion', 'thinking...');</a:t>
-            </a:r>
-          </a:p>
-        </p:txBody>
-      </p:sp>
-      <p:sp>
-        <p:nvSpPr>
-          <p:cNvPr id="4" name="TextBox 3"/>
-          <p:cNvSpPr txBox="1"/>
-          <p:nvPr/>
-        </p:nvSpPr>
-        <p:spPr>
-          <a:xfrm>
-            <a:off x="548640" y="5623560"/>
-            <a:ext cx="11064240" cy="1051560"/>
-          </a:xfrm>
-          <a:prstGeom prst="rect">
-            <a:avLst/>
-          </a:prstGeom>
-          <a:noFill/>
-        </p:spPr>
-        <p:txBody>
-          <a:bodyPr wrap="square">
-            <a:spAutoFit/>
-          </a:bodyPr>
-          <a:lstStyle/>
-          <a:p>
-            <a:r>
-              <a:rPr sz="2000">
-                <a:solidFill>
-                  <a:srgbClr val="DCECEF"/>
-                </a:solidFill>
-              </a:rPr>
-              <a:t>Change the pretend reply to a 'thinking...' line while we wait.</a:t>
-            </a:r>
-          </a:p>
-        </p:txBody>
-      </p:sp>
-    </p:spTree>
-  </p:cSld>
-  <p:clrMapOvr>
-    <a:masterClrMapping/>
-  </p:clrMapOvr>
-</p:sld>
-</file>
-
-<file path=ppt/slides/slide37.xml><?xml version="1.0" encoding="utf-8"?>
-<p:sld xmlns:a="http://schemas.openxmlformats.org/drawingml/2006/main" xmlns:p="http://schemas.openxmlformats.org/presentationml/2006/main" xmlns:r="http://schemas.openxmlformats.org/officeDocument/2006/relationships">
-  <p:cSld>
-    <p:bg>
-      <p:bgPr>
-        <a:solidFill>
-          <a:srgbClr val="102127"/>
-        </a:solidFill>
-        <a:effectLst/>
-      </p:bgPr>
-    </p:bg>
-    <p:spTree>
-      <p:nvGrpSpPr>
-        <p:cNvPr id="1" name=""/>
-        <p:cNvGrpSpPr/>
-        <p:nvPr/>
-      </p:nvGrpSpPr>
-      <p:grpSpPr/>
-      <p:sp>
-        <p:nvSpPr>
-          <p:cNvPr id="2" name="TextBox 1"/>
-          <p:cNvSpPr txBox="1"/>
-          <p:nvPr/>
-        </p:nvSpPr>
-        <p:spPr>
-          <a:xfrm>
-            <a:off x="502920" y="274320"/>
-            <a:ext cx="11155680" cy="548640"/>
-          </a:xfrm>
-          <a:prstGeom prst="rect">
-            <a:avLst/>
-          </a:prstGeom>
-          <a:noFill/>
-        </p:spPr>
-        <p:txBody>
-          <a:bodyPr wrap="none">
-            <a:spAutoFit/>
-          </a:bodyPr>
-          <a:lstStyle/>
-          <a:p>
-            <a:r>
-              <a:rPr sz="2200" b="1">
-                <a:solidFill>
-                  <a:srgbClr val="01AEFD"/>
-                </a:solidFill>
-              </a:rPr>
-              <a:t>Type this into script.js   -   line 68</a:t>
-            </a:r>
-          </a:p>
-        </p:txBody>
-      </p:sp>
-      <p:sp>
-        <p:nvSpPr>
-          <p:cNvPr id="3" name="TextBox 2"/>
-          <p:cNvSpPr txBox="1"/>
-          <p:nvPr/>
-        </p:nvSpPr>
-        <p:spPr>
-          <a:xfrm>
-            <a:off x="502920" y="960120"/>
-            <a:ext cx="11155680" cy="4297680"/>
-          </a:xfrm>
-          <a:prstGeom prst="rect">
-            <a:avLst/>
-          </a:prstGeom>
-          <a:noFill/>
-        </p:spPr>
-        <p:txBody>
-          <a:bodyPr wrap="none">
-            <a:spAutoFit/>
-          </a:bodyPr>
-          <a:lstStyle/>
-          <a:p>
-            <a:pPr>
-              <a:spcAft>
-                <a:spcPts val="0"/>
-              </a:spcAft>
-            </a:pPr>
-            <a:r>
-              <a:rPr sz="1800">
-                <a:solidFill>
-                  <a:srgbClr val="6D8C97"/>
-                </a:solidFill>
-                <a:latin typeface="Consolas"/>
-              </a:rPr>
-              <a:t>  59  </a:t>
-            </a:r>
-            <a:r>
-              <a:rPr sz="1800">
-                <a:solidFill>
-                  <a:srgbClr val="6D8C97"/>
-                </a:solidFill>
-                <a:latin typeface="Consolas"/>
-              </a:rPr>
-              <a:t> </a:t>
-            </a:r>
-          </a:p>
-          <a:p>
-            <a:pPr>
-              <a:spcAft>
-                <a:spcPts val="0"/>
-              </a:spcAft>
-            </a:pPr>
-            <a:r>
-              <a:rPr sz="1800">
-                <a:solidFill>
-                  <a:srgbClr val="6D8C97"/>
-                </a:solidFill>
-                <a:latin typeface="Consolas"/>
-              </a:rPr>
-              <a:t>  60  </a:t>
-            </a:r>
-            <a:r>
-              <a:rPr sz="1800">
-                <a:solidFill>
-                  <a:srgbClr val="6D8C97"/>
-                </a:solidFill>
-                <a:latin typeface="Consolas"/>
-              </a:rPr>
-              <a:t>// The browser calls this when the form is submitted.</a:t>
-            </a:r>
-          </a:p>
-          <a:p>
-            <a:pPr>
-              <a:spcAft>
-                <a:spcPts val="0"/>
-              </a:spcAft>
-            </a:pPr>
-            <a:r>
-              <a:rPr sz="1800">
-                <a:solidFill>
-                  <a:srgbClr val="6D8C97"/>
-                </a:solidFill>
-                <a:latin typeface="Consolas"/>
-              </a:rPr>
-              <a:t>  61  </a:t>
-            </a:r>
-            <a:r>
-              <a:rPr sz="1800">
-                <a:solidFill>
-                  <a:srgbClr val="6D8C97"/>
-                </a:solidFill>
-                <a:latin typeface="Consolas"/>
-              </a:rPr>
-              <a:t>composer.addEventListener('submit', async function (event) {</a:t>
-            </a:r>
-          </a:p>
-          <a:p>
-            <a:pPr>
-              <a:spcAft>
-                <a:spcPts val="0"/>
-              </a:spcAft>
-            </a:pPr>
-            <a:r>
-              <a:rPr sz="1800">
-                <a:solidFill>
-                  <a:srgbClr val="6D8C97"/>
-                </a:solidFill>
-                <a:latin typeface="Consolas"/>
-              </a:rPr>
-              <a:t>  62  </a:t>
-            </a:r>
-            <a:r>
-              <a:rPr sz="1800">
-                <a:solidFill>
-                  <a:srgbClr val="6D8C97"/>
-                </a:solidFill>
-                <a:latin typeface="Consolas"/>
-              </a:rPr>
-              <a:t>  event.preventDefault();</a:t>
-            </a:r>
-          </a:p>
-          <a:p>
-            <a:pPr>
-              <a:spcAft>
-                <a:spcPts val="0"/>
-              </a:spcAft>
-            </a:pPr>
-            <a:r>
-              <a:rPr sz="1800">
-                <a:solidFill>
-                  <a:srgbClr val="6D8C97"/>
-                </a:solidFill>
-                <a:latin typeface="Consolas"/>
-              </a:rPr>
-              <a:t>  63  </a:t>
-            </a:r>
-            <a:r>
-              <a:rPr sz="1800">
-                <a:solidFill>
-                  <a:srgbClr val="6D8C97"/>
-                </a:solidFill>
-                <a:latin typeface="Consolas"/>
-              </a:rPr>
-              <a:t>  const text = promptBox.value.trim();</a:t>
-            </a:r>
-          </a:p>
-          <a:p>
-            <a:pPr>
-              <a:spcAft>
-                <a:spcPts val="0"/>
-              </a:spcAft>
-            </a:pPr>
-            <a:r>
-              <a:rPr sz="1800">
-                <a:solidFill>
-                  <a:srgbClr val="6D8C97"/>
-                </a:solidFill>
-                <a:latin typeface="Consolas"/>
-              </a:rPr>
-              <a:t>  64  </a:t>
-            </a:r>
-            <a:r>
-              <a:rPr sz="1800">
-                <a:solidFill>
-                  <a:srgbClr val="6D8C97"/>
-                </a:solidFill>
-                <a:latin typeface="Consolas"/>
-              </a:rPr>
-              <a:t>  if (text === '') { return; }</a:t>
-            </a:r>
-          </a:p>
-          <a:p>
-            <a:pPr>
-              <a:spcAft>
-                <a:spcPts val="0"/>
-              </a:spcAft>
-            </a:pPr>
-            <a:r>
-              <a:rPr sz="1800">
-                <a:solidFill>
-                  <a:srgbClr val="6D8C97"/>
-                </a:solidFill>
-                <a:latin typeface="Consolas"/>
-              </a:rPr>
-              <a:t>  65  </a:t>
-            </a:r>
-            <a:r>
-              <a:rPr sz="1800">
-                <a:solidFill>
-                  <a:srgbClr val="6D8C97"/>
-                </a:solidFill>
-                <a:latin typeface="Consolas"/>
-              </a:rPr>
-              <a:t>  promptBox.value = '';</a:t>
-            </a:r>
-          </a:p>
-          <a:p>
-            <a:pPr>
-              <a:spcAft>
-                <a:spcPts val="0"/>
-              </a:spcAft>
-            </a:pPr>
-            <a:r>
-              <a:rPr sz="1800">
-                <a:solidFill>
-                  <a:srgbClr val="6D8C97"/>
-                </a:solidFill>
-                <a:latin typeface="Consolas"/>
-              </a:rPr>
-              <a:t>  66  </a:t>
-            </a:r>
-            <a:r>
-              <a:rPr sz="1800">
-                <a:solidFill>
-                  <a:srgbClr val="6D8C97"/>
-                </a:solidFill>
-                <a:latin typeface="Consolas"/>
-              </a:rPr>
-              <a:t>  addLine('You', text);</a:t>
-            </a:r>
-          </a:p>
-          <a:p>
-            <a:pPr>
-              <a:spcAft>
-                <a:spcPts val="0"/>
-              </a:spcAft>
-            </a:pPr>
-            <a:r>
-              <a:rPr sz="1800">
-                <a:solidFill>
-                  <a:srgbClr val="6D8C97"/>
-                </a:solidFill>
-                <a:latin typeface="Consolas"/>
-              </a:rPr>
-              <a:t>  67  </a:t>
-            </a:r>
-            <a:r>
-              <a:rPr sz="1800">
-                <a:solidFill>
-                  <a:srgbClr val="6D8C97"/>
-                </a:solidFill>
-                <a:latin typeface="Consolas"/>
-              </a:rPr>
-              <a:t>  addLine('Companion', 'thinking...');</a:t>
-            </a:r>
-          </a:p>
-          <a:p>
-            <a:pPr>
-              <a:spcAft>
-                <a:spcPts val="0"/>
-              </a:spcAft>
-            </a:pPr>
-            <a:r>
-              <a:rPr sz="1800">
-                <a:solidFill>
-                  <a:srgbClr val="6D8C97"/>
-                </a:solidFill>
-                <a:latin typeface="Consolas"/>
-              </a:rPr>
-              <a:t>  68  </a:t>
-            </a:r>
-            <a:r>
-              <a:rPr sz="1800">
-                <a:solidFill>
-                  <a:srgbClr val="7FE0A0"/>
-                </a:solidFill>
-                <a:latin typeface="Consolas"/>
-              </a:rPr>
-              <a:t>  const reply = await askAI(text);       // this is the slow bit</a:t>
-            </a:r>
-          </a:p>
-        </p:txBody>
-      </p:sp>
-      <p:sp>
-        <p:nvSpPr>
-          <p:cNvPr id="4" name="TextBox 3"/>
-          <p:cNvSpPr txBox="1"/>
-          <p:nvPr/>
-        </p:nvSpPr>
-        <p:spPr>
-          <a:xfrm>
-            <a:off x="548640" y="5623560"/>
-            <a:ext cx="11064240" cy="1051560"/>
-          </a:xfrm>
-          <a:prstGeom prst="rect">
-            <a:avLst/>
-          </a:prstGeom>
-          <a:noFill/>
-        </p:spPr>
-        <p:txBody>
-          <a:bodyPr wrap="square">
-            <a:spAutoFit/>
-          </a:bodyPr>
-          <a:lstStyle/>
-          <a:p>
-            <a:r>
-              <a:rPr sz="2000">
-                <a:solidFill>
-                  <a:srgbClr val="DCECEF"/>
-                </a:solidFill>
-              </a:rPr>
-              <a:t>await askAI(text): the slow bit - ask the AI and wait for the answer.</a:t>
-            </a:r>
-          </a:p>
-        </p:txBody>
-      </p:sp>
-    </p:spTree>
-  </p:cSld>
-  <p:clrMapOvr>
-    <a:masterClrMapping/>
-  </p:clrMapOvr>
-</p:sld>
-</file>
-
-<file path=ppt/slides/slide38.xml><?xml version="1.0" encoding="utf-8"?>
-<p:sld xmlns:a="http://schemas.openxmlformats.org/drawingml/2006/main" xmlns:p="http://schemas.openxmlformats.org/presentationml/2006/main" xmlns:r="http://schemas.openxmlformats.org/officeDocument/2006/relationships">
-  <p:cSld>
-    <p:spTree>
-      <p:nvGrpSpPr>
-        <p:cNvPr id="1" name=""/>
-        <p:cNvGrpSpPr/>
-        <p:nvPr/>
-      </p:nvGrpSpPr>
-      <p:grpSpPr/>
-      <p:sp>
-        <p:nvSpPr>
-          <p:cNvPr id="2" name="Title 1"/>
-          <p:cNvSpPr>
-            <a:spLocks noGrp="1"/>
-          </p:cNvSpPr>
-          <p:nvPr>
-            <p:ph type="title"/>
-          </p:nvPr>
-        </p:nvSpPr>
-        <p:spPr/>
-        <p:txBody>
-          <a:bodyPr/>
-          <a:lstStyle/>
-          <a:p>
-            <a:r>
-              <a:rPr sz="3800" b="1">
-                <a:solidFill>
-                  <a:srgbClr val="1F2A37"/>
-                </a:solidFill>
-              </a:rPr>
-              <a:t>.lastChild</a:t>
-            </a:r>
-          </a:p>
-        </p:txBody>
-      </p:sp>
-      <p:sp>
-        <p:nvSpPr>
-          <p:cNvPr id="3" name="TextBox 2"/>
-          <p:cNvSpPr txBox="1"/>
-          <p:nvPr/>
-        </p:nvSpPr>
-        <p:spPr>
-          <a:xfrm>
-            <a:off x="868680" y="502920"/>
-            <a:ext cx="5486400" cy="457200"/>
-          </a:xfrm>
-          <a:prstGeom prst="rect">
-            <a:avLst/>
-          </a:prstGeom>
-          <a:noFill/>
-        </p:spPr>
-        <p:txBody>
-          <a:bodyPr wrap="none">
-            <a:spAutoFit/>
-          </a:bodyPr>
-          <a:lstStyle/>
-          <a:p>
-            <a:r>
-              <a:rPr sz="1500" b="1">
-                <a:solidFill>
-                  <a:srgbClr val="01AEFD"/>
-                </a:solidFill>
-              </a:rPr>
-              <a:t>JAVASCRIPT</a:t>
-            </a:r>
-          </a:p>
-        </p:txBody>
-      </p:sp>
-      <p:sp>
-        <p:nvSpPr>
-          <p:cNvPr id="4" name="TextBox 3"/>
-          <p:cNvSpPr txBox="1"/>
-          <p:nvPr/>
-        </p:nvSpPr>
-        <p:spPr>
-          <a:xfrm>
-            <a:off x="822960" y="1828800"/>
-            <a:ext cx="10515600" cy="4206240"/>
-          </a:xfrm>
-          <a:prstGeom prst="rect">
-            <a:avLst/>
-          </a:prstGeom>
-          <a:noFill/>
-        </p:spPr>
-        <p:txBody>
-          <a:bodyPr wrap="square">
-            <a:spAutoFit/>
-          </a:bodyPr>
-          <a:lstStyle/>
-          <a:p>
-            <a:pPr>
-              <a:spcAft>
-                <a:spcPts val="1400"/>
-              </a:spcAft>
-            </a:pPr>
-            <a:r>
-              <a:rPr sz="2400">
-                <a:solidFill>
-                  <a:srgbClr val="1F2A37"/>
-                </a:solidFill>
-              </a:rPr>
-              <a:t>• A box's LAST child - the newest thing added inside it.</a:t>
-            </a:r>
-          </a:p>
-          <a:p>
-            <a:pPr>
-              <a:spcAft>
-                <a:spcPts val="1400"/>
-              </a:spcAft>
-            </a:pPr>
-            <a:r>
-              <a:rPr sz="2400">
-                <a:solidFill>
-                  <a:srgbClr val="1F2A37"/>
-                </a:solidFill>
-              </a:rPr>
-              <a:t>• chat.lastChild is the message you just put in.</a:t>
-            </a:r>
-          </a:p>
-        </p:txBody>
-      </p:sp>
-    </p:spTree>
-  </p:cSld>
-  <p:clrMapOvr>
-    <a:masterClrMapping/>
-  </p:clrMapOvr>
-</p:sld>
-</file>
-
-<file path=ppt/slides/slide39.xml><?xml version="1.0" encoding="utf-8"?>
-<p:sld xmlns:a="http://schemas.openxmlformats.org/drawingml/2006/main" xmlns:p="http://schemas.openxmlformats.org/presentationml/2006/main" xmlns:r="http://schemas.openxmlformats.org/officeDocument/2006/relationships">
-  <p:cSld>
-    <p:spTree>
-      <p:nvGrpSpPr>
-        <p:cNvPr id="1" name=""/>
-        <p:cNvGrpSpPr/>
-        <p:nvPr/>
-      </p:nvGrpSpPr>
-      <p:grpSpPr/>
-      <p:sp>
-        <p:nvSpPr>
-          <p:cNvPr id="2" name="Title 1"/>
-          <p:cNvSpPr>
-            <a:spLocks noGrp="1"/>
-          </p:cNvSpPr>
-          <p:nvPr>
-            <p:ph type="title"/>
-          </p:nvPr>
-        </p:nvSpPr>
-        <p:spPr/>
-        <p:txBody>
-          <a:bodyPr/>
-          <a:lstStyle/>
-          <a:p>
-            <a:r>
-              <a:rPr sz="3800" b="1">
-                <a:solidFill>
-                  <a:srgbClr val="1F2A37"/>
-                </a:solidFill>
-              </a:rPr>
-              <a:t>.remove()</a:t>
-            </a:r>
-          </a:p>
-        </p:txBody>
-      </p:sp>
-      <p:sp>
-        <p:nvSpPr>
-          <p:cNvPr id="3" name="TextBox 2"/>
-          <p:cNvSpPr txBox="1"/>
-          <p:nvPr/>
-        </p:nvSpPr>
-        <p:spPr>
-          <a:xfrm>
-            <a:off x="868680" y="502920"/>
-            <a:ext cx="5486400" cy="457200"/>
-          </a:xfrm>
-          <a:prstGeom prst="rect">
-            <a:avLst/>
-          </a:prstGeom>
-          <a:noFill/>
-        </p:spPr>
-        <p:txBody>
-          <a:bodyPr wrap="none">
-            <a:spAutoFit/>
-          </a:bodyPr>
-          <a:lstStyle/>
-          <a:p>
-            <a:r>
-              <a:rPr sz="1500" b="1">
-                <a:solidFill>
-                  <a:srgbClr val="01AEFD"/>
-                </a:solidFill>
-              </a:rPr>
-              <a:t>JAVASCRIPT</a:t>
-            </a:r>
-          </a:p>
-        </p:txBody>
-      </p:sp>
-      <p:sp>
-        <p:nvSpPr>
-          <p:cNvPr id="4" name="TextBox 3"/>
-          <p:cNvSpPr txBox="1"/>
-          <p:nvPr/>
-        </p:nvSpPr>
-        <p:spPr>
-          <a:xfrm>
-            <a:off x="822960" y="1828800"/>
-            <a:ext cx="10515600" cy="4206240"/>
-          </a:xfrm>
-          <a:prstGeom prst="rect">
-            <a:avLst/>
-          </a:prstGeom>
-          <a:noFill/>
-        </p:spPr>
-        <p:txBody>
-          <a:bodyPr wrap="square">
-            <a:spAutoFit/>
-          </a:bodyPr>
-          <a:lstStyle/>
-          <a:p>
-            <a:pPr>
-              <a:spcAft>
-                <a:spcPts val="1400"/>
-              </a:spcAft>
-            </a:pPr>
-            <a:r>
-              <a:rPr sz="2400">
-                <a:solidFill>
-                  <a:srgbClr val="1F2A37"/>
-                </a:solidFill>
-              </a:rPr>
-              <a:t>• Deletes an element from the page.</a:t>
-            </a:r>
-          </a:p>
-          <a:p>
-            <a:pPr>
-              <a:spcAft>
-                <a:spcPts val="1400"/>
-              </a:spcAft>
-            </a:pPr>
-            <a:r>
-              <a:rPr sz="2400">
-                <a:solidFill>
-                  <a:srgbClr val="1F2A37"/>
-                </a:solidFill>
-              </a:rPr>
-              <a:t>• chat.lastChild.remove() takes the last message back off.</a:t>
             </a:r>
           </a:p>
         </p:txBody>
@@ -13335,7 +12918,7 @@
                   <a:srgbClr val="01AEFD"/>
                 </a:solidFill>
               </a:rPr>
-              <a:t>Type this into script.js   -   line 69</a:t>
+              <a:t>In script.js   -   replace a line</a:t>
             </a:r>
           </a:p>
         </p:txBody>
@@ -13368,7 +12951,7 @@
               </a:spcAft>
             </a:pPr>
             <a:r>
-              <a:rPr sz="1300">
+              <a:rPr sz="1800">
                 <a:solidFill>
                   <a:srgbClr val="6D8C97"/>
                 </a:solidFill>
@@ -13377,7 +12960,7 @@
               <a:t>  59  </a:t>
             </a:r>
             <a:r>
-              <a:rPr sz="1300">
+              <a:rPr sz="1800">
                 <a:solidFill>
                   <a:srgbClr val="6D8C97"/>
                 </a:solidFill>
@@ -13393,7 +12976,7 @@
               </a:spcAft>
             </a:pPr>
             <a:r>
-              <a:rPr sz="1300">
+              <a:rPr sz="1800">
                 <a:solidFill>
                   <a:srgbClr val="6D8C97"/>
                 </a:solidFill>
@@ -13402,238 +12985,13 @@
               <a:t>  60  </a:t>
             </a:r>
             <a:r>
-              <a:rPr sz="1300">
-                <a:solidFill>
-                  <a:srgbClr val="6D8C97"/>
-                </a:solidFill>
-                <a:latin typeface="Consolas"/>
-              </a:rPr>
-              <a:t>// The browser calls this when the form is submitted.</a:t>
-            </a:r>
-          </a:p>
-          <a:p>
-            <a:pPr>
-              <a:spcAft>
-                <a:spcPts val="0"/>
-              </a:spcAft>
-            </a:pPr>
-            <a:r>
-              <a:rPr sz="1300">
-                <a:solidFill>
-                  <a:srgbClr val="6D8C97"/>
-                </a:solidFill>
-                <a:latin typeface="Consolas"/>
-              </a:rPr>
-              <a:t>  61  </a:t>
-            </a:r>
-            <a:r>
-              <a:rPr sz="1300">
-                <a:solidFill>
-                  <a:srgbClr val="6D8C97"/>
-                </a:solidFill>
-                <a:latin typeface="Consolas"/>
-              </a:rPr>
-              <a:t>composer.addEventListener('submit', async function (event) {</a:t>
-            </a:r>
-          </a:p>
-          <a:p>
-            <a:pPr>
-              <a:spcAft>
-                <a:spcPts val="0"/>
-              </a:spcAft>
-            </a:pPr>
-            <a:r>
-              <a:rPr sz="1300">
-                <a:solidFill>
-                  <a:srgbClr val="6D8C97"/>
-                </a:solidFill>
-                <a:latin typeface="Consolas"/>
-              </a:rPr>
-              <a:t>  62  </a:t>
-            </a:r>
-            <a:r>
-              <a:rPr sz="1300">
-                <a:solidFill>
-                  <a:srgbClr val="6D8C97"/>
-                </a:solidFill>
-                <a:latin typeface="Consolas"/>
-              </a:rPr>
-              <a:t>  event.preventDefault();</a:t>
-            </a:r>
-          </a:p>
-          <a:p>
-            <a:pPr>
-              <a:spcAft>
-                <a:spcPts val="0"/>
-              </a:spcAft>
-            </a:pPr>
-            <a:r>
-              <a:rPr sz="1300">
-                <a:solidFill>
-                  <a:srgbClr val="6D8C97"/>
-                </a:solidFill>
-                <a:latin typeface="Consolas"/>
-              </a:rPr>
-              <a:t>  63  </a:t>
-            </a:r>
-            <a:r>
-              <a:rPr sz="1300">
-                <a:solidFill>
-                  <a:srgbClr val="6D8C97"/>
-                </a:solidFill>
-                <a:latin typeface="Consolas"/>
-              </a:rPr>
-              <a:t>  const text = promptBox.value.trim();</a:t>
-            </a:r>
-          </a:p>
-          <a:p>
-            <a:pPr>
-              <a:spcAft>
-                <a:spcPts val="0"/>
-              </a:spcAft>
-            </a:pPr>
-            <a:r>
-              <a:rPr sz="1300">
-                <a:solidFill>
-                  <a:srgbClr val="6D8C97"/>
-                </a:solidFill>
-                <a:latin typeface="Consolas"/>
-              </a:rPr>
-              <a:t>  64  </a:t>
-            </a:r>
-            <a:r>
-              <a:rPr sz="1300">
-                <a:solidFill>
-                  <a:srgbClr val="6D8C97"/>
-                </a:solidFill>
-                <a:latin typeface="Consolas"/>
-              </a:rPr>
-              <a:t>  if (text === '') { return; }</a:t>
-            </a:r>
-          </a:p>
-          <a:p>
-            <a:pPr>
-              <a:spcAft>
-                <a:spcPts val="0"/>
-              </a:spcAft>
-            </a:pPr>
-            <a:r>
-              <a:rPr sz="1300">
-                <a:solidFill>
-                  <a:srgbClr val="6D8C97"/>
-                </a:solidFill>
-                <a:latin typeface="Consolas"/>
-              </a:rPr>
-              <a:t>  65  </a:t>
-            </a:r>
-            <a:r>
-              <a:rPr sz="1300">
-                <a:solidFill>
-                  <a:srgbClr val="6D8C97"/>
-                </a:solidFill>
-                <a:latin typeface="Consolas"/>
-              </a:rPr>
-              <a:t>  promptBox.value = '';</a:t>
-            </a:r>
-          </a:p>
-          <a:p>
-            <a:pPr>
-              <a:spcAft>
-                <a:spcPts val="0"/>
-              </a:spcAft>
-            </a:pPr>
-            <a:r>
-              <a:rPr sz="1300">
-                <a:solidFill>
-                  <a:srgbClr val="6D8C97"/>
-                </a:solidFill>
-                <a:latin typeface="Consolas"/>
-              </a:rPr>
-              <a:t>  66  </a:t>
-            </a:r>
-            <a:r>
-              <a:rPr sz="1300">
-                <a:solidFill>
-                  <a:srgbClr val="6D8C97"/>
-                </a:solidFill>
-                <a:latin typeface="Consolas"/>
-              </a:rPr>
-              <a:t>  addLine('You', text);</a:t>
-            </a:r>
-          </a:p>
-          <a:p>
-            <a:pPr>
-              <a:spcAft>
-                <a:spcPts val="0"/>
-              </a:spcAft>
-            </a:pPr>
-            <a:r>
-              <a:rPr sz="1300">
-                <a:solidFill>
-                  <a:srgbClr val="6D8C97"/>
-                </a:solidFill>
-                <a:latin typeface="Consolas"/>
-              </a:rPr>
-              <a:t>  67  </a:t>
-            </a:r>
-            <a:r>
-              <a:rPr sz="1300">
-                <a:solidFill>
-                  <a:srgbClr val="6D8C97"/>
-                </a:solidFill>
-                <a:latin typeface="Consolas"/>
-              </a:rPr>
-              <a:t>  addLine('Companion', 'thinking...');</a:t>
-            </a:r>
-          </a:p>
-          <a:p>
-            <a:pPr>
-              <a:spcAft>
-                <a:spcPts val="0"/>
-              </a:spcAft>
-            </a:pPr>
-            <a:r>
-              <a:rPr sz="1300">
-                <a:solidFill>
-                  <a:srgbClr val="6D8C97"/>
-                </a:solidFill>
-                <a:latin typeface="Consolas"/>
-              </a:rPr>
-              <a:t>  68  </a:t>
-            </a:r>
-            <a:r>
-              <a:rPr sz="1300">
-                <a:solidFill>
-                  <a:srgbClr val="6D8C97"/>
-                </a:solidFill>
-                <a:latin typeface="Consolas"/>
-              </a:rPr>
-              <a:t>  const reply = await askAI(text);       // this is the slow bit</a:t>
-            </a:r>
-          </a:p>
-          <a:p>
-            <a:pPr>
-              <a:spcAft>
-                <a:spcPts val="0"/>
-              </a:spcAft>
-            </a:pPr>
-            <a:r>
-              <a:rPr sz="1300">
-                <a:solidFill>
-                  <a:srgbClr val="6D8C97"/>
-                </a:solidFill>
-                <a:latin typeface="Consolas"/>
-              </a:rPr>
-              <a:t>  69  </a:t>
-            </a:r>
-            <a:r>
-              <a:rPr sz="1300">
-                <a:solidFill>
-                  <a:srgbClr val="7FE0A0"/>
-                </a:solidFill>
-                <a:latin typeface="Consolas"/>
-              </a:rPr>
-              <a:t>  chat.lastChild.remove();               // take the 'thinking' line away</a:t>
+              <a:rPr sz="1800" strike="sngStrike">
+                <a:solidFill>
+                  <a:srgbClr val="F3928B"/>
+                </a:solidFill>
+                <a:latin typeface="Consolas"/>
+              </a:rPr>
+              <a:t>composer.addEventListener('submit', function (event) {</a:t>
             </a:r>
           </a:p>
         </p:txBody>
@@ -13666,7 +13024,7 @@
                   <a:srgbClr val="DCECEF"/>
                 </a:solidFill>
               </a:rPr>
-              <a:t>Remove the 'thinking...' line now the real answer is here.</a:t>
+              <a:t>This line changes - take the old one out; the new version is next.</a:t>
             </a:r>
           </a:p>
         </p:txBody>
@@ -13725,7 +13083,7 @@
                   <a:srgbClr val="01AEFD"/>
                 </a:solidFill>
               </a:rPr>
-              <a:t>Type this into script.js   -   line 70</a:t>
+              <a:t>Type this into script.js   -   line 60</a:t>
             </a:r>
           </a:p>
         </p:txBody>
@@ -13758,7 +13116,7 @@
               </a:spcAft>
             </a:pPr>
             <a:r>
-              <a:rPr sz="1300">
+              <a:rPr sz="1800">
                 <a:solidFill>
                   <a:srgbClr val="6D8C97"/>
                 </a:solidFill>
@@ -13767,7 +13125,7 @@
               <a:t>  59  </a:t>
             </a:r>
             <a:r>
-              <a:rPr sz="1300">
+              <a:rPr sz="1800">
                 <a:solidFill>
                   <a:srgbClr val="6D8C97"/>
                 </a:solidFill>
@@ -13783,7 +13141,7 @@
               </a:spcAft>
             </a:pPr>
             <a:r>
-              <a:rPr sz="1300">
+              <a:rPr sz="1800">
                 <a:solidFill>
                   <a:srgbClr val="6D8C97"/>
                 </a:solidFill>
@@ -13792,263 +13150,13 @@
               <a:t>  60  </a:t>
             </a:r>
             <a:r>
-              <a:rPr sz="1300">
-                <a:solidFill>
-                  <a:srgbClr val="6D8C97"/>
+              <a:rPr sz="1800">
+                <a:solidFill>
+                  <a:srgbClr val="7FE0A0"/>
                 </a:solidFill>
                 <a:latin typeface="Consolas"/>
               </a:rPr>
               <a:t>// The browser calls this when the form is submitted.</a:t>
-            </a:r>
-          </a:p>
-          <a:p>
-            <a:pPr>
-              <a:spcAft>
-                <a:spcPts val="0"/>
-              </a:spcAft>
-            </a:pPr>
-            <a:r>
-              <a:rPr sz="1300">
-                <a:solidFill>
-                  <a:srgbClr val="6D8C97"/>
-                </a:solidFill>
-                <a:latin typeface="Consolas"/>
-              </a:rPr>
-              <a:t>  61  </a:t>
-            </a:r>
-            <a:r>
-              <a:rPr sz="1300">
-                <a:solidFill>
-                  <a:srgbClr val="6D8C97"/>
-                </a:solidFill>
-                <a:latin typeface="Consolas"/>
-              </a:rPr>
-              <a:t>composer.addEventListener('submit', async function (event) {</a:t>
-            </a:r>
-          </a:p>
-          <a:p>
-            <a:pPr>
-              <a:spcAft>
-                <a:spcPts val="0"/>
-              </a:spcAft>
-            </a:pPr>
-            <a:r>
-              <a:rPr sz="1300">
-                <a:solidFill>
-                  <a:srgbClr val="6D8C97"/>
-                </a:solidFill>
-                <a:latin typeface="Consolas"/>
-              </a:rPr>
-              <a:t>  62  </a:t>
-            </a:r>
-            <a:r>
-              <a:rPr sz="1300">
-                <a:solidFill>
-                  <a:srgbClr val="6D8C97"/>
-                </a:solidFill>
-                <a:latin typeface="Consolas"/>
-              </a:rPr>
-              <a:t>  event.preventDefault();</a:t>
-            </a:r>
-          </a:p>
-          <a:p>
-            <a:pPr>
-              <a:spcAft>
-                <a:spcPts val="0"/>
-              </a:spcAft>
-            </a:pPr>
-            <a:r>
-              <a:rPr sz="1300">
-                <a:solidFill>
-                  <a:srgbClr val="6D8C97"/>
-                </a:solidFill>
-                <a:latin typeface="Consolas"/>
-              </a:rPr>
-              <a:t>  63  </a:t>
-            </a:r>
-            <a:r>
-              <a:rPr sz="1300">
-                <a:solidFill>
-                  <a:srgbClr val="6D8C97"/>
-                </a:solidFill>
-                <a:latin typeface="Consolas"/>
-              </a:rPr>
-              <a:t>  const text = promptBox.value.trim();</a:t>
-            </a:r>
-          </a:p>
-          <a:p>
-            <a:pPr>
-              <a:spcAft>
-                <a:spcPts val="0"/>
-              </a:spcAft>
-            </a:pPr>
-            <a:r>
-              <a:rPr sz="1300">
-                <a:solidFill>
-                  <a:srgbClr val="6D8C97"/>
-                </a:solidFill>
-                <a:latin typeface="Consolas"/>
-              </a:rPr>
-              <a:t>  64  </a:t>
-            </a:r>
-            <a:r>
-              <a:rPr sz="1300">
-                <a:solidFill>
-                  <a:srgbClr val="6D8C97"/>
-                </a:solidFill>
-                <a:latin typeface="Consolas"/>
-              </a:rPr>
-              <a:t>  if (text === '') { return; }</a:t>
-            </a:r>
-          </a:p>
-          <a:p>
-            <a:pPr>
-              <a:spcAft>
-                <a:spcPts val="0"/>
-              </a:spcAft>
-            </a:pPr>
-            <a:r>
-              <a:rPr sz="1300">
-                <a:solidFill>
-                  <a:srgbClr val="6D8C97"/>
-                </a:solidFill>
-                <a:latin typeface="Consolas"/>
-              </a:rPr>
-              <a:t>  65  </a:t>
-            </a:r>
-            <a:r>
-              <a:rPr sz="1300">
-                <a:solidFill>
-                  <a:srgbClr val="6D8C97"/>
-                </a:solidFill>
-                <a:latin typeface="Consolas"/>
-              </a:rPr>
-              <a:t>  promptBox.value = '';</a:t>
-            </a:r>
-          </a:p>
-          <a:p>
-            <a:pPr>
-              <a:spcAft>
-                <a:spcPts val="0"/>
-              </a:spcAft>
-            </a:pPr>
-            <a:r>
-              <a:rPr sz="1300">
-                <a:solidFill>
-                  <a:srgbClr val="6D8C97"/>
-                </a:solidFill>
-                <a:latin typeface="Consolas"/>
-              </a:rPr>
-              <a:t>  66  </a:t>
-            </a:r>
-            <a:r>
-              <a:rPr sz="1300">
-                <a:solidFill>
-                  <a:srgbClr val="6D8C97"/>
-                </a:solidFill>
-                <a:latin typeface="Consolas"/>
-              </a:rPr>
-              <a:t>  addLine('You', text);</a:t>
-            </a:r>
-          </a:p>
-          <a:p>
-            <a:pPr>
-              <a:spcAft>
-                <a:spcPts val="0"/>
-              </a:spcAft>
-            </a:pPr>
-            <a:r>
-              <a:rPr sz="1300">
-                <a:solidFill>
-                  <a:srgbClr val="6D8C97"/>
-                </a:solidFill>
-                <a:latin typeface="Consolas"/>
-              </a:rPr>
-              <a:t>  67  </a:t>
-            </a:r>
-            <a:r>
-              <a:rPr sz="1300">
-                <a:solidFill>
-                  <a:srgbClr val="6D8C97"/>
-                </a:solidFill>
-                <a:latin typeface="Consolas"/>
-              </a:rPr>
-              <a:t>  addLine('Companion', 'thinking...');</a:t>
-            </a:r>
-          </a:p>
-          <a:p>
-            <a:pPr>
-              <a:spcAft>
-                <a:spcPts val="0"/>
-              </a:spcAft>
-            </a:pPr>
-            <a:r>
-              <a:rPr sz="1300">
-                <a:solidFill>
-                  <a:srgbClr val="6D8C97"/>
-                </a:solidFill>
-                <a:latin typeface="Consolas"/>
-              </a:rPr>
-              <a:t>  68  </a:t>
-            </a:r>
-            <a:r>
-              <a:rPr sz="1300">
-                <a:solidFill>
-                  <a:srgbClr val="6D8C97"/>
-                </a:solidFill>
-                <a:latin typeface="Consolas"/>
-              </a:rPr>
-              <a:t>  const reply = await askAI(text);       // this is the slow bit</a:t>
-            </a:r>
-          </a:p>
-          <a:p>
-            <a:pPr>
-              <a:spcAft>
-                <a:spcPts val="0"/>
-              </a:spcAft>
-            </a:pPr>
-            <a:r>
-              <a:rPr sz="1300">
-                <a:solidFill>
-                  <a:srgbClr val="6D8C97"/>
-                </a:solidFill>
-                <a:latin typeface="Consolas"/>
-              </a:rPr>
-              <a:t>  69  </a:t>
-            </a:r>
-            <a:r>
-              <a:rPr sz="1300">
-                <a:solidFill>
-                  <a:srgbClr val="6D8C97"/>
-                </a:solidFill>
-                <a:latin typeface="Consolas"/>
-              </a:rPr>
-              <a:t>  chat.lastChild.remove();               // take the 'thinking' line away</a:t>
-            </a:r>
-          </a:p>
-          <a:p>
-            <a:pPr>
-              <a:spcAft>
-                <a:spcPts val="0"/>
-              </a:spcAft>
-            </a:pPr>
-            <a:r>
-              <a:rPr sz="1300">
-                <a:solidFill>
-                  <a:srgbClr val="6D8C97"/>
-                </a:solidFill>
-                <a:latin typeface="Consolas"/>
-              </a:rPr>
-              <a:t>  70  </a:t>
-            </a:r>
-            <a:r>
-              <a:rPr sz="1300">
-                <a:solidFill>
-                  <a:srgbClr val="7FE0A0"/>
-                </a:solidFill>
-                <a:latin typeface="Consolas"/>
-              </a:rPr>
-              <a:t>  addLine('Companion', reply);</a:t>
             </a:r>
           </a:p>
         </p:txBody>
@@ -14081,7 +13189,7 @@
                   <a:srgbClr val="DCECEF"/>
                 </a:solidFill>
               </a:rPr>
-              <a:t>Show the real reply in the chat.</a:t>
+              <a:t>A comment: the browser calls this when the form is submitted.</a:t>
             </a:r>
           </a:p>
         </p:txBody>
@@ -14140,7 +13248,7 @@
                   <a:srgbClr val="01AEFD"/>
                 </a:solidFill>
               </a:rPr>
-              <a:t>All together in script.js</a:t>
+              <a:t>Type this into script.js   -   line 61</a:t>
             </a:r>
           </a:p>
         </p:txBody>
@@ -14173,7 +13281,7 @@
               </a:spcAft>
             </a:pPr>
             <a:r>
-              <a:rPr sz="1300">
+              <a:rPr sz="1800">
                 <a:solidFill>
                   <a:srgbClr val="6D8C97"/>
                 </a:solidFill>
@@ -14182,313 +13290,63 @@
               <a:t>  59  </a:t>
             </a:r>
             <a:r>
-              <a:rPr sz="1300">
+              <a:rPr sz="1800">
+                <a:solidFill>
+                  <a:srgbClr val="6D8C97"/>
+                </a:solidFill>
+                <a:latin typeface="Consolas"/>
+              </a:rPr>
+              <a:t> </a:t>
+            </a:r>
+          </a:p>
+          <a:p>
+            <a:pPr>
+              <a:spcAft>
+                <a:spcPts val="0"/>
+              </a:spcAft>
+            </a:pPr>
+            <a:r>
+              <a:rPr sz="1800">
+                <a:solidFill>
+                  <a:srgbClr val="6D8C97"/>
+                </a:solidFill>
+                <a:latin typeface="Consolas"/>
+              </a:rPr>
+              <a:t>  60  </a:t>
+            </a:r>
+            <a:r>
+              <a:rPr sz="1800">
+                <a:solidFill>
+                  <a:srgbClr val="6D8C97"/>
+                </a:solidFill>
+                <a:latin typeface="Consolas"/>
+              </a:rPr>
+              <a:t>// The browser calls this when the form is submitted.</a:t>
+            </a:r>
+          </a:p>
+          <a:p>
+            <a:pPr>
+              <a:spcAft>
+                <a:spcPts val="0"/>
+              </a:spcAft>
+            </a:pPr>
+            <a:r>
+              <a:rPr sz="1800">
+                <a:solidFill>
+                  <a:srgbClr val="6D8C97"/>
+                </a:solidFill>
+                <a:latin typeface="Consolas"/>
+              </a:rPr>
+              <a:t>  61  </a:t>
+            </a:r>
+            <a:r>
+              <a:rPr sz="1800">
                 <a:solidFill>
                   <a:srgbClr val="7FE0A0"/>
                 </a:solidFill>
                 <a:latin typeface="Consolas"/>
               </a:rPr>
-              <a:t> </a:t>
-            </a:r>
-          </a:p>
-          <a:p>
-            <a:pPr>
-              <a:spcAft>
-                <a:spcPts val="0"/>
-              </a:spcAft>
-            </a:pPr>
-            <a:r>
-              <a:rPr sz="1300">
-                <a:solidFill>
-                  <a:srgbClr val="6D8C97"/>
-                </a:solidFill>
-                <a:latin typeface="Consolas"/>
-              </a:rPr>
-              <a:t>  60  </a:t>
-            </a:r>
-            <a:r>
-              <a:rPr sz="1300">
-                <a:solidFill>
-                  <a:srgbClr val="7FE0A0"/>
-                </a:solidFill>
-                <a:latin typeface="Consolas"/>
-              </a:rPr>
-              <a:t>// The browser calls this when the form is submitted.</a:t>
-            </a:r>
-          </a:p>
-          <a:p>
-            <a:pPr>
-              <a:spcAft>
-                <a:spcPts val="0"/>
-              </a:spcAft>
-            </a:pPr>
-            <a:r>
-              <a:rPr sz="1300">
-                <a:solidFill>
-                  <a:srgbClr val="6D8C97"/>
-                </a:solidFill>
-                <a:latin typeface="Consolas"/>
-              </a:rPr>
-              <a:t>  61  </a:t>
-            </a:r>
-            <a:r>
-              <a:rPr sz="1300">
-                <a:solidFill>
-                  <a:srgbClr val="7FE0A0"/>
-                </a:solidFill>
-                <a:latin typeface="Consolas"/>
-              </a:rPr>
               <a:t>composer.addEventListener('submit', async function (event) {</a:t>
-            </a:r>
-          </a:p>
-          <a:p>
-            <a:pPr>
-              <a:spcAft>
-                <a:spcPts val="0"/>
-              </a:spcAft>
-            </a:pPr>
-            <a:r>
-              <a:rPr sz="1300">
-                <a:solidFill>
-                  <a:srgbClr val="6D8C97"/>
-                </a:solidFill>
-                <a:latin typeface="Consolas"/>
-              </a:rPr>
-              <a:t>  62  </a:t>
-            </a:r>
-            <a:r>
-              <a:rPr sz="1300">
-                <a:solidFill>
-                  <a:srgbClr val="7FE0A0"/>
-                </a:solidFill>
-                <a:latin typeface="Consolas"/>
-              </a:rPr>
-              <a:t>  event.preventDefault();</a:t>
-            </a:r>
-          </a:p>
-          <a:p>
-            <a:pPr>
-              <a:spcAft>
-                <a:spcPts val="0"/>
-              </a:spcAft>
-            </a:pPr>
-            <a:r>
-              <a:rPr sz="1300">
-                <a:solidFill>
-                  <a:srgbClr val="6D8C97"/>
-                </a:solidFill>
-                <a:latin typeface="Consolas"/>
-              </a:rPr>
-              <a:t>  63  </a:t>
-            </a:r>
-            <a:r>
-              <a:rPr sz="1300">
-                <a:solidFill>
-                  <a:srgbClr val="7FE0A0"/>
-                </a:solidFill>
-                <a:latin typeface="Consolas"/>
-              </a:rPr>
-              <a:t>  const text = promptBox.value.trim();</a:t>
-            </a:r>
-          </a:p>
-          <a:p>
-            <a:pPr>
-              <a:spcAft>
-                <a:spcPts val="0"/>
-              </a:spcAft>
-            </a:pPr>
-            <a:r>
-              <a:rPr sz="1300">
-                <a:solidFill>
-                  <a:srgbClr val="6D8C97"/>
-                </a:solidFill>
-                <a:latin typeface="Consolas"/>
-              </a:rPr>
-              <a:t>  64  </a:t>
-            </a:r>
-            <a:r>
-              <a:rPr sz="1300">
-                <a:solidFill>
-                  <a:srgbClr val="7FE0A0"/>
-                </a:solidFill>
-                <a:latin typeface="Consolas"/>
-              </a:rPr>
-              <a:t>  if (text === '') { return; }</a:t>
-            </a:r>
-          </a:p>
-          <a:p>
-            <a:pPr>
-              <a:spcAft>
-                <a:spcPts val="0"/>
-              </a:spcAft>
-            </a:pPr>
-            <a:r>
-              <a:rPr sz="1300">
-                <a:solidFill>
-                  <a:srgbClr val="6D8C97"/>
-                </a:solidFill>
-                <a:latin typeface="Consolas"/>
-              </a:rPr>
-              <a:t>  65  </a:t>
-            </a:r>
-            <a:r>
-              <a:rPr sz="1300">
-                <a:solidFill>
-                  <a:srgbClr val="7FE0A0"/>
-                </a:solidFill>
-                <a:latin typeface="Consolas"/>
-              </a:rPr>
-              <a:t>  promptBox.value = '';</a:t>
-            </a:r>
-          </a:p>
-          <a:p>
-            <a:pPr>
-              <a:spcAft>
-                <a:spcPts val="0"/>
-              </a:spcAft>
-            </a:pPr>
-            <a:r>
-              <a:rPr sz="1300">
-                <a:solidFill>
-                  <a:srgbClr val="6D8C97"/>
-                </a:solidFill>
-                <a:latin typeface="Consolas"/>
-              </a:rPr>
-              <a:t>  66  </a:t>
-            </a:r>
-            <a:r>
-              <a:rPr sz="1300">
-                <a:solidFill>
-                  <a:srgbClr val="7FE0A0"/>
-                </a:solidFill>
-                <a:latin typeface="Consolas"/>
-              </a:rPr>
-              <a:t>  addLine('You', text);</a:t>
-            </a:r>
-          </a:p>
-          <a:p>
-            <a:pPr>
-              <a:spcAft>
-                <a:spcPts val="0"/>
-              </a:spcAft>
-            </a:pPr>
-            <a:r>
-              <a:rPr sz="1300">
-                <a:solidFill>
-                  <a:srgbClr val="6D8C97"/>
-                </a:solidFill>
-                <a:latin typeface="Consolas"/>
-              </a:rPr>
-              <a:t>  67  </a:t>
-            </a:r>
-            <a:r>
-              <a:rPr sz="1300">
-                <a:solidFill>
-                  <a:srgbClr val="7FE0A0"/>
-                </a:solidFill>
-                <a:latin typeface="Consolas"/>
-              </a:rPr>
-              <a:t>  addLine('Companion', 'thinking...');</a:t>
-            </a:r>
-          </a:p>
-          <a:p>
-            <a:pPr>
-              <a:spcAft>
-                <a:spcPts val="0"/>
-              </a:spcAft>
-            </a:pPr>
-            <a:r>
-              <a:rPr sz="1300">
-                <a:solidFill>
-                  <a:srgbClr val="6D8C97"/>
-                </a:solidFill>
-                <a:latin typeface="Consolas"/>
-              </a:rPr>
-              <a:t>  68  </a:t>
-            </a:r>
-            <a:r>
-              <a:rPr sz="1300">
-                <a:solidFill>
-                  <a:srgbClr val="7FE0A0"/>
-                </a:solidFill>
-                <a:latin typeface="Consolas"/>
-              </a:rPr>
-              <a:t>  const reply = await askAI(text);       // this is the slow bit</a:t>
-            </a:r>
-          </a:p>
-          <a:p>
-            <a:pPr>
-              <a:spcAft>
-                <a:spcPts val="0"/>
-              </a:spcAft>
-            </a:pPr>
-            <a:r>
-              <a:rPr sz="1300">
-                <a:solidFill>
-                  <a:srgbClr val="6D8C97"/>
-                </a:solidFill>
-                <a:latin typeface="Consolas"/>
-              </a:rPr>
-              <a:t>  69  </a:t>
-            </a:r>
-            <a:r>
-              <a:rPr sz="1300">
-                <a:solidFill>
-                  <a:srgbClr val="7FE0A0"/>
-                </a:solidFill>
-                <a:latin typeface="Consolas"/>
-              </a:rPr>
-              <a:t>  chat.lastChild.remove();               // take the 'thinking' line away</a:t>
-            </a:r>
-          </a:p>
-          <a:p>
-            <a:pPr>
-              <a:spcAft>
-                <a:spcPts val="0"/>
-              </a:spcAft>
-            </a:pPr>
-            <a:r>
-              <a:rPr sz="1300">
-                <a:solidFill>
-                  <a:srgbClr val="6D8C97"/>
-                </a:solidFill>
-                <a:latin typeface="Consolas"/>
-              </a:rPr>
-              <a:t>  70  </a:t>
-            </a:r>
-            <a:r>
-              <a:rPr sz="1300">
-                <a:solidFill>
-                  <a:srgbClr val="7FE0A0"/>
-                </a:solidFill>
-                <a:latin typeface="Consolas"/>
-              </a:rPr>
-              <a:t>  addLine('Companion', reply);</a:t>
-            </a:r>
-          </a:p>
-          <a:p>
-            <a:pPr>
-              <a:spcAft>
-                <a:spcPts val="0"/>
-              </a:spcAft>
-            </a:pPr>
-            <a:r>
-              <a:rPr sz="1300">
-                <a:solidFill>
-                  <a:srgbClr val="6D8C97"/>
-                </a:solidFill>
-                <a:latin typeface="Consolas"/>
-              </a:rPr>
-              <a:t>  71  </a:t>
-            </a:r>
-            <a:r>
-              <a:rPr sz="1300">
-                <a:solidFill>
-                  <a:srgbClr val="7FE0A0"/>
-                </a:solidFill>
-                <a:latin typeface="Consolas"/>
-              </a:rPr>
-              <a:t>});</a:t>
             </a:r>
           </a:p>
         </p:txBody>
@@ -14521,7 +13379,7 @@
                   <a:srgbClr val="DCECEF"/>
                 </a:solidFill>
               </a:rPr>
-              <a:t>That is the whole piece. Check yours looks the same before moving on.</a:t>
+              <a:t>Add async so we are allowed to await the slow AI call inside.</a:t>
             </a:r>
           </a:p>
         </p:txBody>
@@ -14580,7 +13438,7 @@
                   <a:srgbClr val="01AEFD"/>
                 </a:solidFill>
               </a:rPr>
-              <a:t>In script.js   -   delete a line</a:t>
+              <a:t>In script.js   -   replace a line</a:t>
             </a:r>
           </a:p>
         </p:txBody>
@@ -14613,16 +13471,16 @@
               </a:spcAft>
             </a:pPr>
             <a:r>
-              <a:rPr sz="1300">
-                <a:solidFill>
-                  <a:srgbClr val="6D8C97"/>
-                </a:solidFill>
-                <a:latin typeface="Consolas"/>
-              </a:rPr>
-              <a:t>  29  </a:t>
-            </a:r>
-            <a:r>
-              <a:rPr sz="1300">
+              <a:rPr sz="1800">
+                <a:solidFill>
+                  <a:srgbClr val="6D8C97"/>
+                </a:solidFill>
+                <a:latin typeface="Consolas"/>
+              </a:rPr>
+              <a:t>  59  </a:t>
+            </a:r>
+            <a:r>
+              <a:rPr sz="1800">
                 <a:solidFill>
                   <a:srgbClr val="6D8C97"/>
                 </a:solidFill>
@@ -14638,247 +13496,197 @@
               </a:spcAft>
             </a:pPr>
             <a:r>
-              <a:rPr sz="1300">
-                <a:solidFill>
-                  <a:srgbClr val="6D8C97"/>
-                </a:solidFill>
-                <a:latin typeface="Consolas"/>
-              </a:rPr>
-              <a:t>  30  </a:t>
-            </a:r>
-            <a:r>
-              <a:rPr sz="1300">
-                <a:solidFill>
-                  <a:srgbClr val="6D8C97"/>
-                </a:solidFill>
-                <a:latin typeface="Consolas"/>
-              </a:rPr>
-              <a:t>// The smallest useful request: what models does this server have?</a:t>
-            </a:r>
-          </a:p>
-          <a:p>
-            <a:pPr>
-              <a:spcAft>
-                <a:spcPts val="0"/>
-              </a:spcAft>
-            </a:pPr>
-            <a:r>
-              <a:rPr sz="1300">
-                <a:solidFill>
-                  <a:srgbClr val="6D8C97"/>
-                </a:solidFill>
-                <a:latin typeface="Consolas"/>
-              </a:rPr>
-              <a:t>  31  </a:t>
-            </a:r>
-            <a:r>
-              <a:rPr sz="1300">
-                <a:solidFill>
-                  <a:srgbClr val="6D8C97"/>
-                </a:solidFill>
-                <a:latin typeface="Consolas"/>
-              </a:rPr>
-              <a:t>// 'async' means this function does something slow and can be waited for.</a:t>
-            </a:r>
-          </a:p>
-          <a:p>
-            <a:pPr>
-              <a:spcAft>
-                <a:spcPts val="0"/>
-              </a:spcAft>
-            </a:pPr>
-            <a:r>
-              <a:rPr sz="1300">
-                <a:solidFill>
-                  <a:srgbClr val="6D8C97"/>
-                </a:solidFill>
-                <a:latin typeface="Consolas"/>
-              </a:rPr>
-              <a:t>  32  </a:t>
-            </a:r>
-            <a:r>
-              <a:rPr sz="1300">
-                <a:solidFill>
-                  <a:srgbClr val="6D8C97"/>
-                </a:solidFill>
-                <a:latin typeface="Consolas"/>
-              </a:rPr>
-              <a:t>async function listModels() {</a:t>
-            </a:r>
-          </a:p>
-          <a:p>
-            <a:pPr>
-              <a:spcAft>
-                <a:spcPts val="0"/>
-              </a:spcAft>
-            </a:pPr>
-            <a:r>
-              <a:rPr sz="1300">
-                <a:solidFill>
-                  <a:srgbClr val="6D8C97"/>
-                </a:solidFill>
-                <a:latin typeface="Consolas"/>
-              </a:rPr>
-              <a:t>  33  </a:t>
-            </a:r>
-            <a:r>
-              <a:rPr sz="1300">
-                <a:solidFill>
-                  <a:srgbClr val="6D8C97"/>
-                </a:solidFill>
-                <a:latin typeface="Consolas"/>
-              </a:rPr>
-              <a:t>  const res = await fetch(AI_BASE + '/v1/models', {</a:t>
-            </a:r>
-          </a:p>
-          <a:p>
-            <a:pPr>
-              <a:spcAft>
-                <a:spcPts val="0"/>
-              </a:spcAft>
-            </a:pPr>
-            <a:r>
-              <a:rPr sz="1300">
-                <a:solidFill>
-                  <a:srgbClr val="6D8C97"/>
-                </a:solidFill>
-                <a:latin typeface="Consolas"/>
-              </a:rPr>
-              <a:t>  34  </a:t>
-            </a:r>
-            <a:r>
-              <a:rPr sz="1300">
-                <a:solidFill>
-                  <a:srgbClr val="6D8C97"/>
-                </a:solidFill>
-                <a:latin typeface="Consolas"/>
-              </a:rPr>
-              <a:t>    headers: { 'Authorization': 'Bearer ' + API_KEY }</a:t>
-            </a:r>
-          </a:p>
-          <a:p>
-            <a:pPr>
-              <a:spcAft>
-                <a:spcPts val="0"/>
-              </a:spcAft>
-            </a:pPr>
-            <a:r>
-              <a:rPr sz="1300">
-                <a:solidFill>
-                  <a:srgbClr val="6D8C97"/>
-                </a:solidFill>
-                <a:latin typeface="Consolas"/>
-              </a:rPr>
-              <a:t>  35  </a:t>
-            </a:r>
-            <a:r>
-              <a:rPr sz="1300">
-                <a:solidFill>
-                  <a:srgbClr val="6D8C97"/>
-                </a:solidFill>
-                <a:latin typeface="Consolas"/>
-              </a:rPr>
-              <a:t>  });</a:t>
-            </a:r>
-          </a:p>
-          <a:p>
-            <a:pPr>
-              <a:spcAft>
-                <a:spcPts val="0"/>
-              </a:spcAft>
-            </a:pPr>
-            <a:r>
-              <a:rPr sz="1300">
-                <a:solidFill>
-                  <a:srgbClr val="6D8C97"/>
-                </a:solidFill>
-                <a:latin typeface="Consolas"/>
-              </a:rPr>
-              <a:t>  36  </a:t>
-            </a:r>
-            <a:r>
-              <a:rPr sz="1300">
-                <a:solidFill>
-                  <a:srgbClr val="6D8C97"/>
-                </a:solidFill>
-                <a:latin typeface="Consolas"/>
-              </a:rPr>
-              <a:t>  const data = await res.json();   // the answer arrives as text; this reads it</a:t>
-            </a:r>
-          </a:p>
-          <a:p>
-            <a:pPr>
-              <a:spcAft>
-                <a:spcPts val="0"/>
-              </a:spcAft>
-            </a:pPr>
-            <a:r>
-              <a:rPr sz="1300">
-                <a:solidFill>
-                  <a:srgbClr val="6D8C97"/>
-                </a:solidFill>
-                <a:latin typeface="Consolas"/>
-              </a:rPr>
-              <a:t>  37  </a:t>
-            </a:r>
-            <a:r>
-              <a:rPr sz="1300">
-                <a:solidFill>
-                  <a:srgbClr val="6D8C97"/>
-                </a:solidFill>
-                <a:latin typeface="Consolas"/>
-              </a:rPr>
-              <a:t>  console.log('The server offers:', data.data);</a:t>
-            </a:r>
-          </a:p>
-          <a:p>
-            <a:pPr>
-              <a:spcAft>
-                <a:spcPts val="0"/>
-              </a:spcAft>
-            </a:pPr>
-            <a:r>
-              <a:rPr sz="1300">
-                <a:solidFill>
-                  <a:srgbClr val="6D8C97"/>
-                </a:solidFill>
-                <a:latin typeface="Consolas"/>
-              </a:rPr>
-              <a:t>  38  </a:t>
-            </a:r>
-            <a:r>
-              <a:rPr sz="1300">
-                <a:solidFill>
-                  <a:srgbClr val="6D8C97"/>
-                </a:solidFill>
-                <a:latin typeface="Consolas"/>
-              </a:rPr>
-              <a:t>}</a:t>
-            </a:r>
-          </a:p>
-          <a:p>
-            <a:pPr>
-              <a:spcAft>
-                <a:spcPts val="0"/>
-              </a:spcAft>
-            </a:pPr>
-            <a:r>
-              <a:rPr sz="1300">
-                <a:solidFill>
-                  <a:srgbClr val="6D8C97"/>
-                </a:solidFill>
-                <a:latin typeface="Consolas"/>
-              </a:rPr>
-              <a:t>  39  </a:t>
-            </a:r>
-            <a:r>
-              <a:rPr sz="1300" strike="sngStrike">
+              <a:rPr sz="1800">
+                <a:solidFill>
+                  <a:srgbClr val="6D8C97"/>
+                </a:solidFill>
+                <a:latin typeface="Consolas"/>
+              </a:rPr>
+              <a:t>  60  </a:t>
+            </a:r>
+            <a:r>
+              <a:rPr sz="1800">
+                <a:solidFill>
+                  <a:srgbClr val="6D8C97"/>
+                </a:solidFill>
+                <a:latin typeface="Consolas"/>
+              </a:rPr>
+              <a:t>// The browser calls this when the form is submitted.</a:t>
+            </a:r>
+          </a:p>
+          <a:p>
+            <a:pPr>
+              <a:spcAft>
+                <a:spcPts val="0"/>
+              </a:spcAft>
+            </a:pPr>
+            <a:r>
+              <a:rPr sz="1800">
+                <a:solidFill>
+                  <a:srgbClr val="6D8C97"/>
+                </a:solidFill>
+                <a:latin typeface="Consolas"/>
+              </a:rPr>
+              <a:t>  61  </a:t>
+            </a:r>
+            <a:r>
+              <a:rPr sz="1800">
+                <a:solidFill>
+                  <a:srgbClr val="6D8C97"/>
+                </a:solidFill>
+                <a:latin typeface="Consolas"/>
+              </a:rPr>
+              <a:t>composer.addEventListener('submit', async function (event) {</a:t>
+            </a:r>
+          </a:p>
+          <a:p>
+            <a:pPr>
+              <a:spcAft>
+                <a:spcPts val="0"/>
+              </a:spcAft>
+            </a:pPr>
+            <a:r>
+              <a:rPr sz="1800">
+                <a:solidFill>
+                  <a:srgbClr val="6D8C97"/>
+                </a:solidFill>
+                <a:latin typeface="Consolas"/>
+              </a:rPr>
+              <a:t>  62  </a:t>
+            </a:r>
+            <a:r>
+              <a:rPr sz="1800">
+                <a:solidFill>
+                  <a:srgbClr val="6D8C97"/>
+                </a:solidFill>
+                <a:latin typeface="Consolas"/>
+              </a:rPr>
+              <a:t>  event.preventDefault();</a:t>
+            </a:r>
+          </a:p>
+          <a:p>
+            <a:pPr>
+              <a:spcAft>
+                <a:spcPts val="0"/>
+              </a:spcAft>
+            </a:pPr>
+            <a:r>
+              <a:rPr sz="1800">
+                <a:solidFill>
+                  <a:srgbClr val="6D8C97"/>
+                </a:solidFill>
+                <a:latin typeface="Consolas"/>
+              </a:rPr>
+              <a:t>  63  </a:t>
+            </a:r>
+            <a:r>
+              <a:rPr sz="1800">
+                <a:solidFill>
+                  <a:srgbClr val="6D8C97"/>
+                </a:solidFill>
+                <a:latin typeface="Consolas"/>
+              </a:rPr>
+              <a:t>  const text = promptBox.value.trim();</a:t>
+            </a:r>
+          </a:p>
+          <a:p>
+            <a:pPr>
+              <a:spcAft>
+                <a:spcPts val="0"/>
+              </a:spcAft>
+            </a:pPr>
+            <a:r>
+              <a:rPr sz="1800">
+                <a:solidFill>
+                  <a:srgbClr val="6D8C97"/>
+                </a:solidFill>
+                <a:latin typeface="Consolas"/>
+              </a:rPr>
+              <a:t>  64  </a:t>
+            </a:r>
+            <a:r>
+              <a:rPr sz="1800">
+                <a:solidFill>
+                  <a:srgbClr val="6D8C97"/>
+                </a:solidFill>
+                <a:latin typeface="Consolas"/>
+              </a:rPr>
+              <a:t>  if (text === '') { return; }</a:t>
+            </a:r>
+          </a:p>
+          <a:p>
+            <a:pPr>
+              <a:spcAft>
+                <a:spcPts val="0"/>
+              </a:spcAft>
+            </a:pPr>
+            <a:r>
+              <a:rPr sz="1800">
+                <a:solidFill>
+                  <a:srgbClr val="6D8C97"/>
+                </a:solidFill>
+                <a:latin typeface="Consolas"/>
+              </a:rPr>
+              <a:t>  65  </a:t>
+            </a:r>
+            <a:r>
+              <a:rPr sz="1800">
+                <a:solidFill>
+                  <a:srgbClr val="6D8C97"/>
+                </a:solidFill>
+                <a:latin typeface="Consolas"/>
+              </a:rPr>
+              <a:t>  promptBox.value = '';</a:t>
+            </a:r>
+          </a:p>
+          <a:p>
+            <a:pPr>
+              <a:spcAft>
+                <a:spcPts val="0"/>
+              </a:spcAft>
+            </a:pPr>
+            <a:r>
+              <a:rPr sz="1800">
+                <a:solidFill>
+                  <a:srgbClr val="6D8C97"/>
+                </a:solidFill>
+                <a:latin typeface="Consolas"/>
+              </a:rPr>
+              <a:t>  66  </a:t>
+            </a:r>
+            <a:r>
+              <a:rPr sz="1800">
+                <a:solidFill>
+                  <a:srgbClr val="6D8C97"/>
+                </a:solidFill>
+                <a:latin typeface="Consolas"/>
+              </a:rPr>
+              <a:t>  addLine('You', text);</a:t>
+            </a:r>
+          </a:p>
+          <a:p>
+            <a:pPr>
+              <a:spcAft>
+                <a:spcPts val="0"/>
+              </a:spcAft>
+            </a:pPr>
+            <a:r>
+              <a:rPr sz="1800">
+                <a:solidFill>
+                  <a:srgbClr val="6D8C97"/>
+                </a:solidFill>
+                <a:latin typeface="Consolas"/>
+              </a:rPr>
+              <a:t>  67  </a:t>
+            </a:r>
+            <a:r>
+              <a:rPr sz="1800" strike="sngStrike">
                 <a:solidFill>
                   <a:srgbClr val="F3928B"/>
                 </a:solidFill>
                 <a:latin typeface="Consolas"/>
               </a:rPr>
-              <a:t>listModels();</a:t>
+              <a:t>  addLine('Companion', 'You said: ' + text);   // a pretend answer, for now</a:t>
             </a:r>
           </a:p>
         </p:txBody>
@@ -14911,7 +13719,7 @@
                   <a:srgbClr val="DCECEF"/>
                 </a:solidFill>
               </a:rPr>
-              <a:t>Delete this line. askAI does the asking now, so the old test call is no longer needed - your file should have no listModels() call left.</a:t>
+              <a:t>This line changes - take the old one out; the new version is next.</a:t>
             </a:r>
           </a:p>
         </p:txBody>
@@ -14927,6 +13735,14 @@
 <file path=ppt/slides/slide44.xml><?xml version="1.0" encoding="utf-8"?>
 <p:sld xmlns:a="http://schemas.openxmlformats.org/drawingml/2006/main" xmlns:p="http://schemas.openxmlformats.org/presentationml/2006/main" xmlns:r="http://schemas.openxmlformats.org/officeDocument/2006/relationships">
   <p:cSld>
+    <p:bg>
+      <p:bgPr>
+        <a:solidFill>
+          <a:srgbClr val="102127"/>
+        </a:solidFill>
+        <a:effectLst/>
+      </p:bgPr>
+    </p:bg>
     <p:spTree>
       <p:nvGrpSpPr>
         <p:cNvPr id="1" name=""/>
@@ -14936,40 +13752,14 @@
       <p:grpSpPr/>
       <p:sp>
         <p:nvSpPr>
-          <p:cNvPr id="2" name="Title 1"/>
-          <p:cNvSpPr>
-            <a:spLocks noGrp="1"/>
-          </p:cNvSpPr>
-          <p:nvPr>
-            <p:ph type="title"/>
-          </p:nvPr>
-        </p:nvSpPr>
-        <p:spPr/>
-        <p:txBody>
-          <a:bodyPr/>
-          <a:lstStyle/>
-          <a:p>
-            <a:r>
-              <a:rPr sz="3800" b="1">
-                <a:solidFill>
-                  <a:srgbClr val="1F2A37"/>
-                </a:solidFill>
-              </a:rPr>
-              <a:t>Checkpoint: a real answer</a:t>
-            </a:r>
-          </a:p>
-        </p:txBody>
-      </p:sp>
-      <p:sp>
-        <p:nvSpPr>
-          <p:cNvPr id="3" name="TextBox 2"/>
+          <p:cNvPr id="2" name="TextBox 1"/>
           <p:cNvSpPr txBox="1"/>
           <p:nvPr/>
         </p:nvSpPr>
         <p:spPr>
           <a:xfrm>
-            <a:off x="868680" y="502920"/>
-            <a:ext cx="5486400" cy="457200"/>
+            <a:off x="502920" y="274320"/>
+            <a:ext cx="11155680" cy="548640"/>
           </a:xfrm>
           <a:prstGeom prst="rect">
             <a:avLst/>
@@ -14983,26 +13773,26 @@
           <a:lstStyle/>
           <a:p>
             <a:r>
-              <a:rPr sz="1500" b="1">
+              <a:rPr sz="2200" b="1">
                 <a:solidFill>
                   <a:srgbClr val="01AEFD"/>
                 </a:solidFill>
               </a:rPr>
-              <a:t>CHECKPOINT - RUN IT</a:t>
-            </a:r>
-          </a:p>
-        </p:txBody>
-      </p:sp>
-      <p:sp>
-        <p:nvSpPr>
-          <p:cNvPr id="4" name="TextBox 3"/>
+              <a:t>Type this into script.js   -   line 67</a:t>
+            </a:r>
+          </a:p>
+        </p:txBody>
+      </p:sp>
+      <p:sp>
+        <p:nvSpPr>
+          <p:cNvPr id="3" name="TextBox 2"/>
           <p:cNvSpPr txBox="1"/>
           <p:nvPr/>
         </p:nvSpPr>
         <p:spPr>
           <a:xfrm>
-            <a:off x="822960" y="1828800"/>
-            <a:ext cx="10515600" cy="4206240"/>
+            <a:off x="502920" y="960120"/>
+            <a:ext cx="11155680" cy="4297680"/>
           </a:xfrm>
           <a:prstGeom prst="rect">
             <a:avLst/>
@@ -15010,53 +13800,266 @@
           <a:noFill/>
         </p:spPr>
         <p:txBody>
+          <a:bodyPr wrap="none">
+            <a:spAutoFit/>
+          </a:bodyPr>
+          <a:lstStyle/>
+          <a:p>
+            <a:pPr>
+              <a:spcAft>
+                <a:spcPts val="0"/>
+              </a:spcAft>
+            </a:pPr>
+            <a:r>
+              <a:rPr sz="1800">
+                <a:solidFill>
+                  <a:srgbClr val="6D8C97"/>
+                </a:solidFill>
+                <a:latin typeface="Consolas"/>
+              </a:rPr>
+              <a:t>  59  </a:t>
+            </a:r>
+            <a:r>
+              <a:rPr sz="1800">
+                <a:solidFill>
+                  <a:srgbClr val="6D8C97"/>
+                </a:solidFill>
+                <a:latin typeface="Consolas"/>
+              </a:rPr>
+              <a:t> </a:t>
+            </a:r>
+          </a:p>
+          <a:p>
+            <a:pPr>
+              <a:spcAft>
+                <a:spcPts val="0"/>
+              </a:spcAft>
+            </a:pPr>
+            <a:r>
+              <a:rPr sz="1800">
+                <a:solidFill>
+                  <a:srgbClr val="6D8C97"/>
+                </a:solidFill>
+                <a:latin typeface="Consolas"/>
+              </a:rPr>
+              <a:t>  60  </a:t>
+            </a:r>
+            <a:r>
+              <a:rPr sz="1800">
+                <a:solidFill>
+                  <a:srgbClr val="6D8C97"/>
+                </a:solidFill>
+                <a:latin typeface="Consolas"/>
+              </a:rPr>
+              <a:t>// The browser calls this when the form is submitted.</a:t>
+            </a:r>
+          </a:p>
+          <a:p>
+            <a:pPr>
+              <a:spcAft>
+                <a:spcPts val="0"/>
+              </a:spcAft>
+            </a:pPr>
+            <a:r>
+              <a:rPr sz="1800">
+                <a:solidFill>
+                  <a:srgbClr val="6D8C97"/>
+                </a:solidFill>
+                <a:latin typeface="Consolas"/>
+              </a:rPr>
+              <a:t>  61  </a:t>
+            </a:r>
+            <a:r>
+              <a:rPr sz="1800">
+                <a:solidFill>
+                  <a:srgbClr val="6D8C97"/>
+                </a:solidFill>
+                <a:latin typeface="Consolas"/>
+              </a:rPr>
+              <a:t>composer.addEventListener('submit', async function (event) {</a:t>
+            </a:r>
+          </a:p>
+          <a:p>
+            <a:pPr>
+              <a:spcAft>
+                <a:spcPts val="0"/>
+              </a:spcAft>
+            </a:pPr>
+            <a:r>
+              <a:rPr sz="1800">
+                <a:solidFill>
+                  <a:srgbClr val="6D8C97"/>
+                </a:solidFill>
+                <a:latin typeface="Consolas"/>
+              </a:rPr>
+              <a:t>  62  </a:t>
+            </a:r>
+            <a:r>
+              <a:rPr sz="1800">
+                <a:solidFill>
+                  <a:srgbClr val="6D8C97"/>
+                </a:solidFill>
+                <a:latin typeface="Consolas"/>
+              </a:rPr>
+              <a:t>  event.preventDefault();</a:t>
+            </a:r>
+          </a:p>
+          <a:p>
+            <a:pPr>
+              <a:spcAft>
+                <a:spcPts val="0"/>
+              </a:spcAft>
+            </a:pPr>
+            <a:r>
+              <a:rPr sz="1800">
+                <a:solidFill>
+                  <a:srgbClr val="6D8C97"/>
+                </a:solidFill>
+                <a:latin typeface="Consolas"/>
+              </a:rPr>
+              <a:t>  63  </a:t>
+            </a:r>
+            <a:r>
+              <a:rPr sz="1800">
+                <a:solidFill>
+                  <a:srgbClr val="6D8C97"/>
+                </a:solidFill>
+                <a:latin typeface="Consolas"/>
+              </a:rPr>
+              <a:t>  const text = promptBox.value.trim();</a:t>
+            </a:r>
+          </a:p>
+          <a:p>
+            <a:pPr>
+              <a:spcAft>
+                <a:spcPts val="0"/>
+              </a:spcAft>
+            </a:pPr>
+            <a:r>
+              <a:rPr sz="1800">
+                <a:solidFill>
+                  <a:srgbClr val="6D8C97"/>
+                </a:solidFill>
+                <a:latin typeface="Consolas"/>
+              </a:rPr>
+              <a:t>  64  </a:t>
+            </a:r>
+            <a:r>
+              <a:rPr sz="1800">
+                <a:solidFill>
+                  <a:srgbClr val="6D8C97"/>
+                </a:solidFill>
+                <a:latin typeface="Consolas"/>
+              </a:rPr>
+              <a:t>  if (text === '') { return; }</a:t>
+            </a:r>
+          </a:p>
+          <a:p>
+            <a:pPr>
+              <a:spcAft>
+                <a:spcPts val="0"/>
+              </a:spcAft>
+            </a:pPr>
+            <a:r>
+              <a:rPr sz="1800">
+                <a:solidFill>
+                  <a:srgbClr val="6D8C97"/>
+                </a:solidFill>
+                <a:latin typeface="Consolas"/>
+              </a:rPr>
+              <a:t>  65  </a:t>
+            </a:r>
+            <a:r>
+              <a:rPr sz="1800">
+                <a:solidFill>
+                  <a:srgbClr val="6D8C97"/>
+                </a:solidFill>
+                <a:latin typeface="Consolas"/>
+              </a:rPr>
+              <a:t>  promptBox.value = '';</a:t>
+            </a:r>
+          </a:p>
+          <a:p>
+            <a:pPr>
+              <a:spcAft>
+                <a:spcPts val="0"/>
+              </a:spcAft>
+            </a:pPr>
+            <a:r>
+              <a:rPr sz="1800">
+                <a:solidFill>
+                  <a:srgbClr val="6D8C97"/>
+                </a:solidFill>
+                <a:latin typeface="Consolas"/>
+              </a:rPr>
+              <a:t>  66  </a:t>
+            </a:r>
+            <a:r>
+              <a:rPr sz="1800">
+                <a:solidFill>
+                  <a:srgbClr val="6D8C97"/>
+                </a:solidFill>
+                <a:latin typeface="Consolas"/>
+              </a:rPr>
+              <a:t>  addLine('You', text);</a:t>
+            </a:r>
+          </a:p>
+          <a:p>
+            <a:pPr>
+              <a:spcAft>
+                <a:spcPts val="0"/>
+              </a:spcAft>
+            </a:pPr>
+            <a:r>
+              <a:rPr sz="1800">
+                <a:solidFill>
+                  <a:srgbClr val="6D8C97"/>
+                </a:solidFill>
+                <a:latin typeface="Consolas"/>
+              </a:rPr>
+              <a:t>  67  </a:t>
+            </a:r>
+            <a:r>
+              <a:rPr sz="1800">
+                <a:solidFill>
+                  <a:srgbClr val="7FE0A0"/>
+                </a:solidFill>
+                <a:latin typeface="Consolas"/>
+              </a:rPr>
+              <a:t>  addLine('Companion', 'thinking...');</a:t>
+            </a:r>
+          </a:p>
+        </p:txBody>
+      </p:sp>
+      <p:sp>
+        <p:nvSpPr>
+          <p:cNvPr id="4" name="TextBox 3"/>
+          <p:cNvSpPr txBox="1"/>
+          <p:nvPr/>
+        </p:nvSpPr>
+        <p:spPr>
+          <a:xfrm>
+            <a:off x="548640" y="5623560"/>
+            <a:ext cx="11064240" cy="1051560"/>
+          </a:xfrm>
+          <a:prstGeom prst="rect">
+            <a:avLst/>
+          </a:prstGeom>
+          <a:noFill/>
+        </p:spPr>
+        <p:txBody>
           <a:bodyPr wrap="square">
             <a:spAutoFit/>
           </a:bodyPr>
           <a:lstStyle/>
           <a:p>
-            <a:pPr>
-              <a:spcAft>
-                <a:spcPts val="1400"/>
-              </a:spcAft>
-            </a:pPr>
-            <a:r>
-              <a:rPr sz="2800">
-                <a:solidFill>
-                  <a:srgbClr val="01AEFD"/>
-                </a:solidFill>
-              </a:rPr>
-              <a:t>Press Run, ask a question and press Send. After a moment the companion replies for real. This needs your own key and the school network; the preview here shows the interface.</a:t>
-            </a:r>
-          </a:p>
-          <a:p>
-            <a:pPr>
-              <a:spcAft>
-                <a:spcPts val="1400"/>
-              </a:spcAft>
-            </a:pPr>
-            <a:r>
-              <a:rPr sz="2400">
-                <a:solidFill>
-                  <a:srgbClr val="1F2A37"/>
-                </a:solidFill>
-              </a:rPr>
-              <a:t>• Run it in the classroom, or press Show the output in the web deck.</a:t>
-            </a:r>
-          </a:p>
-          <a:p>
-            <a:pPr>
-              <a:spcAft>
-                <a:spcPts val="1400"/>
-              </a:spcAft>
-            </a:pPr>
-            <a:r>
-              <a:rPr sz="2400">
-                <a:solidFill>
-                  <a:srgbClr val="1F2A37"/>
-                </a:solidFill>
-              </a:rPr>
-              <a:t>• Everyone's screen should match this.</a:t>
+            <a:r>
+              <a:rPr sz="2000">
+                <a:solidFill>
+                  <a:srgbClr val="DCECEF"/>
+                </a:solidFill>
+              </a:rPr>
+              <a:t>Change the pretend reply to a 'thinking...' line while we wait.</a:t>
             </a:r>
           </a:p>
         </p:txBody>
@@ -15072,6 +14075,14 @@
 <file path=ppt/slides/slide45.xml><?xml version="1.0" encoding="utf-8"?>
 <p:sld xmlns:a="http://schemas.openxmlformats.org/drawingml/2006/main" xmlns:p="http://schemas.openxmlformats.org/presentationml/2006/main" xmlns:r="http://schemas.openxmlformats.org/officeDocument/2006/relationships">
   <p:cSld>
+    <p:bg>
+      <p:bgPr>
+        <a:solidFill>
+          <a:srgbClr val="102127"/>
+        </a:solidFill>
+        <a:effectLst/>
+      </p:bgPr>
+    </p:bg>
     <p:spTree>
       <p:nvGrpSpPr>
         <p:cNvPr id="1" name=""/>
@@ -15081,6 +14092,363 @@
       <p:grpSpPr/>
       <p:sp>
         <p:nvSpPr>
+          <p:cNvPr id="2" name="TextBox 1"/>
+          <p:cNvSpPr txBox="1"/>
+          <p:nvPr/>
+        </p:nvSpPr>
+        <p:spPr>
+          <a:xfrm>
+            <a:off x="502920" y="274320"/>
+            <a:ext cx="11155680" cy="548640"/>
+          </a:xfrm>
+          <a:prstGeom prst="rect">
+            <a:avLst/>
+          </a:prstGeom>
+          <a:noFill/>
+        </p:spPr>
+        <p:txBody>
+          <a:bodyPr wrap="none">
+            <a:spAutoFit/>
+          </a:bodyPr>
+          <a:lstStyle/>
+          <a:p>
+            <a:r>
+              <a:rPr sz="2200" b="1">
+                <a:solidFill>
+                  <a:srgbClr val="01AEFD"/>
+                </a:solidFill>
+              </a:rPr>
+              <a:t>Type this into script.js   -   line 68</a:t>
+            </a:r>
+          </a:p>
+        </p:txBody>
+      </p:sp>
+      <p:sp>
+        <p:nvSpPr>
+          <p:cNvPr id="3" name="TextBox 2"/>
+          <p:cNvSpPr txBox="1"/>
+          <p:nvPr/>
+        </p:nvSpPr>
+        <p:spPr>
+          <a:xfrm>
+            <a:off x="502920" y="960120"/>
+            <a:ext cx="11155680" cy="4297680"/>
+          </a:xfrm>
+          <a:prstGeom prst="rect">
+            <a:avLst/>
+          </a:prstGeom>
+          <a:noFill/>
+        </p:spPr>
+        <p:txBody>
+          <a:bodyPr wrap="none">
+            <a:spAutoFit/>
+          </a:bodyPr>
+          <a:lstStyle/>
+          <a:p>
+            <a:pPr>
+              <a:spcAft>
+                <a:spcPts val="0"/>
+              </a:spcAft>
+            </a:pPr>
+            <a:r>
+              <a:rPr sz="1800">
+                <a:solidFill>
+                  <a:srgbClr val="6D8C97"/>
+                </a:solidFill>
+                <a:latin typeface="Consolas"/>
+              </a:rPr>
+              <a:t>  59  </a:t>
+            </a:r>
+            <a:r>
+              <a:rPr sz="1800">
+                <a:solidFill>
+                  <a:srgbClr val="6D8C97"/>
+                </a:solidFill>
+                <a:latin typeface="Consolas"/>
+              </a:rPr>
+              <a:t> </a:t>
+            </a:r>
+          </a:p>
+          <a:p>
+            <a:pPr>
+              <a:spcAft>
+                <a:spcPts val="0"/>
+              </a:spcAft>
+            </a:pPr>
+            <a:r>
+              <a:rPr sz="1800">
+                <a:solidFill>
+                  <a:srgbClr val="6D8C97"/>
+                </a:solidFill>
+                <a:latin typeface="Consolas"/>
+              </a:rPr>
+              <a:t>  60  </a:t>
+            </a:r>
+            <a:r>
+              <a:rPr sz="1800">
+                <a:solidFill>
+                  <a:srgbClr val="6D8C97"/>
+                </a:solidFill>
+                <a:latin typeface="Consolas"/>
+              </a:rPr>
+              <a:t>// The browser calls this when the form is submitted.</a:t>
+            </a:r>
+          </a:p>
+          <a:p>
+            <a:pPr>
+              <a:spcAft>
+                <a:spcPts val="0"/>
+              </a:spcAft>
+            </a:pPr>
+            <a:r>
+              <a:rPr sz="1800">
+                <a:solidFill>
+                  <a:srgbClr val="6D8C97"/>
+                </a:solidFill>
+                <a:latin typeface="Consolas"/>
+              </a:rPr>
+              <a:t>  61  </a:t>
+            </a:r>
+            <a:r>
+              <a:rPr sz="1800">
+                <a:solidFill>
+                  <a:srgbClr val="6D8C97"/>
+                </a:solidFill>
+                <a:latin typeface="Consolas"/>
+              </a:rPr>
+              <a:t>composer.addEventListener('submit', async function (event) {</a:t>
+            </a:r>
+          </a:p>
+          <a:p>
+            <a:pPr>
+              <a:spcAft>
+                <a:spcPts val="0"/>
+              </a:spcAft>
+            </a:pPr>
+            <a:r>
+              <a:rPr sz="1800">
+                <a:solidFill>
+                  <a:srgbClr val="6D8C97"/>
+                </a:solidFill>
+                <a:latin typeface="Consolas"/>
+              </a:rPr>
+              <a:t>  62  </a:t>
+            </a:r>
+            <a:r>
+              <a:rPr sz="1800">
+                <a:solidFill>
+                  <a:srgbClr val="6D8C97"/>
+                </a:solidFill>
+                <a:latin typeface="Consolas"/>
+              </a:rPr>
+              <a:t>  event.preventDefault();</a:t>
+            </a:r>
+          </a:p>
+          <a:p>
+            <a:pPr>
+              <a:spcAft>
+                <a:spcPts val="0"/>
+              </a:spcAft>
+            </a:pPr>
+            <a:r>
+              <a:rPr sz="1800">
+                <a:solidFill>
+                  <a:srgbClr val="6D8C97"/>
+                </a:solidFill>
+                <a:latin typeface="Consolas"/>
+              </a:rPr>
+              <a:t>  63  </a:t>
+            </a:r>
+            <a:r>
+              <a:rPr sz="1800">
+                <a:solidFill>
+                  <a:srgbClr val="6D8C97"/>
+                </a:solidFill>
+                <a:latin typeface="Consolas"/>
+              </a:rPr>
+              <a:t>  const text = promptBox.value.trim();</a:t>
+            </a:r>
+          </a:p>
+          <a:p>
+            <a:pPr>
+              <a:spcAft>
+                <a:spcPts val="0"/>
+              </a:spcAft>
+            </a:pPr>
+            <a:r>
+              <a:rPr sz="1800">
+                <a:solidFill>
+                  <a:srgbClr val="6D8C97"/>
+                </a:solidFill>
+                <a:latin typeface="Consolas"/>
+              </a:rPr>
+              <a:t>  64  </a:t>
+            </a:r>
+            <a:r>
+              <a:rPr sz="1800">
+                <a:solidFill>
+                  <a:srgbClr val="6D8C97"/>
+                </a:solidFill>
+                <a:latin typeface="Consolas"/>
+              </a:rPr>
+              <a:t>  if (text === '') { return; }</a:t>
+            </a:r>
+          </a:p>
+          <a:p>
+            <a:pPr>
+              <a:spcAft>
+                <a:spcPts val="0"/>
+              </a:spcAft>
+            </a:pPr>
+            <a:r>
+              <a:rPr sz="1800">
+                <a:solidFill>
+                  <a:srgbClr val="6D8C97"/>
+                </a:solidFill>
+                <a:latin typeface="Consolas"/>
+              </a:rPr>
+              <a:t>  65  </a:t>
+            </a:r>
+            <a:r>
+              <a:rPr sz="1800">
+                <a:solidFill>
+                  <a:srgbClr val="6D8C97"/>
+                </a:solidFill>
+                <a:latin typeface="Consolas"/>
+              </a:rPr>
+              <a:t>  promptBox.value = '';</a:t>
+            </a:r>
+          </a:p>
+          <a:p>
+            <a:pPr>
+              <a:spcAft>
+                <a:spcPts val="0"/>
+              </a:spcAft>
+            </a:pPr>
+            <a:r>
+              <a:rPr sz="1800">
+                <a:solidFill>
+                  <a:srgbClr val="6D8C97"/>
+                </a:solidFill>
+                <a:latin typeface="Consolas"/>
+              </a:rPr>
+              <a:t>  66  </a:t>
+            </a:r>
+            <a:r>
+              <a:rPr sz="1800">
+                <a:solidFill>
+                  <a:srgbClr val="6D8C97"/>
+                </a:solidFill>
+                <a:latin typeface="Consolas"/>
+              </a:rPr>
+              <a:t>  addLine('You', text);</a:t>
+            </a:r>
+          </a:p>
+          <a:p>
+            <a:pPr>
+              <a:spcAft>
+                <a:spcPts val="0"/>
+              </a:spcAft>
+            </a:pPr>
+            <a:r>
+              <a:rPr sz="1800">
+                <a:solidFill>
+                  <a:srgbClr val="6D8C97"/>
+                </a:solidFill>
+                <a:latin typeface="Consolas"/>
+              </a:rPr>
+              <a:t>  67  </a:t>
+            </a:r>
+            <a:r>
+              <a:rPr sz="1800">
+                <a:solidFill>
+                  <a:srgbClr val="6D8C97"/>
+                </a:solidFill>
+                <a:latin typeface="Consolas"/>
+              </a:rPr>
+              <a:t>  addLine('Companion', 'thinking...');</a:t>
+            </a:r>
+          </a:p>
+          <a:p>
+            <a:pPr>
+              <a:spcAft>
+                <a:spcPts val="0"/>
+              </a:spcAft>
+            </a:pPr>
+            <a:r>
+              <a:rPr sz="1800">
+                <a:solidFill>
+                  <a:srgbClr val="6D8C97"/>
+                </a:solidFill>
+                <a:latin typeface="Consolas"/>
+              </a:rPr>
+              <a:t>  68  </a:t>
+            </a:r>
+            <a:r>
+              <a:rPr sz="1800">
+                <a:solidFill>
+                  <a:srgbClr val="7FE0A0"/>
+                </a:solidFill>
+                <a:latin typeface="Consolas"/>
+              </a:rPr>
+              <a:t>  const reply = await askAI(text);       // this is the slow bit</a:t>
+            </a:r>
+          </a:p>
+        </p:txBody>
+      </p:sp>
+      <p:sp>
+        <p:nvSpPr>
+          <p:cNvPr id="4" name="TextBox 3"/>
+          <p:cNvSpPr txBox="1"/>
+          <p:nvPr/>
+        </p:nvSpPr>
+        <p:spPr>
+          <a:xfrm>
+            <a:off x="548640" y="5623560"/>
+            <a:ext cx="11064240" cy="1051560"/>
+          </a:xfrm>
+          <a:prstGeom prst="rect">
+            <a:avLst/>
+          </a:prstGeom>
+          <a:noFill/>
+        </p:spPr>
+        <p:txBody>
+          <a:bodyPr wrap="square">
+            <a:spAutoFit/>
+          </a:bodyPr>
+          <a:lstStyle/>
+          <a:p>
+            <a:r>
+              <a:rPr sz="2000">
+                <a:solidFill>
+                  <a:srgbClr val="DCECEF"/>
+                </a:solidFill>
+              </a:rPr>
+              <a:t>await askAI(text): the slow bit - ask the AI and wait for the answer.</a:t>
+            </a:r>
+          </a:p>
+        </p:txBody>
+      </p:sp>
+    </p:spTree>
+  </p:cSld>
+  <p:clrMapOvr>
+    <a:masterClrMapping/>
+  </p:clrMapOvr>
+</p:sld>
+</file>
+
+<file path=ppt/slides/slide46.xml><?xml version="1.0" encoding="utf-8"?>
+<p:sld xmlns:a="http://schemas.openxmlformats.org/drawingml/2006/main" xmlns:p="http://schemas.openxmlformats.org/presentationml/2006/main" xmlns:r="http://schemas.openxmlformats.org/officeDocument/2006/relationships">
+  <p:cSld>
+    <p:spTree>
+      <p:nvGrpSpPr>
+        <p:cNvPr id="1" name=""/>
+        <p:cNvGrpSpPr/>
+        <p:nvPr/>
+      </p:nvGrpSpPr>
+      <p:grpSpPr/>
+      <p:sp>
+        <p:nvSpPr>
           <p:cNvPr id="2" name="Title 1"/>
           <p:cNvSpPr>
             <a:spLocks noGrp="1"/>
@@ -15100,7 +14468,7 @@
                   <a:srgbClr val="1F2A37"/>
                 </a:solidFill>
               </a:rPr>
-              <a:t>Your turn</a:t>
+              <a:t>.lastChild</a:t>
             </a:r>
           </a:p>
         </p:txBody>
@@ -15108,6 +14476,39 @@
       <p:sp>
         <p:nvSpPr>
           <p:cNvPr id="3" name="TextBox 2"/>
+          <p:cNvSpPr txBox="1"/>
+          <p:nvPr/>
+        </p:nvSpPr>
+        <p:spPr>
+          <a:xfrm>
+            <a:off x="868680" y="502920"/>
+            <a:ext cx="5486400" cy="457200"/>
+          </a:xfrm>
+          <a:prstGeom prst="rect">
+            <a:avLst/>
+          </a:prstGeom>
+          <a:noFill/>
+        </p:spPr>
+        <p:txBody>
+          <a:bodyPr wrap="none">
+            <a:spAutoFit/>
+          </a:bodyPr>
+          <a:lstStyle/>
+          <a:p>
+            <a:r>
+              <a:rPr sz="1500" b="1">
+                <a:solidFill>
+                  <a:srgbClr val="01AEFD"/>
+                </a:solidFill>
+              </a:rPr>
+              <a:t>JAVASCRIPT</a:t>
+            </a:r>
+          </a:p>
+        </p:txBody>
+      </p:sp>
+      <p:sp>
+        <p:nvSpPr>
+          <p:cNvPr id="4" name="TextBox 3"/>
           <p:cNvSpPr txBox="1"/>
           <p:nvPr/>
         </p:nvSpPr>
@@ -15133,14 +14534,129 @@
               </a:spcAft>
             </a:pPr>
             <a:r>
-              <a:rPr sz="2800">
+              <a:rPr sz="2400">
+                <a:solidFill>
+                  <a:srgbClr val="1F2A37"/>
+                </a:solidFill>
+              </a:rPr>
+              <a:t>• A box's LAST child - the newest thing added inside it.</a:t>
+            </a:r>
+          </a:p>
+          <a:p>
+            <a:pPr>
+              <a:spcAft>
+                <a:spcPts val="1400"/>
+              </a:spcAft>
+            </a:pPr>
+            <a:r>
+              <a:rPr sz="2400">
+                <a:solidFill>
+                  <a:srgbClr val="1F2A37"/>
+                </a:solidFill>
+              </a:rPr>
+              <a:t>• chat.lastChild is the message you just put in.</a:t>
+            </a:r>
+          </a:p>
+        </p:txBody>
+      </p:sp>
+    </p:spTree>
+  </p:cSld>
+  <p:clrMapOvr>
+    <a:masterClrMapping/>
+  </p:clrMapOvr>
+</p:sld>
+</file>
+
+<file path=ppt/slides/slide47.xml><?xml version="1.0" encoding="utf-8"?>
+<p:sld xmlns:a="http://schemas.openxmlformats.org/drawingml/2006/main" xmlns:p="http://schemas.openxmlformats.org/presentationml/2006/main" xmlns:r="http://schemas.openxmlformats.org/officeDocument/2006/relationships">
+  <p:cSld>
+    <p:spTree>
+      <p:nvGrpSpPr>
+        <p:cNvPr id="1" name=""/>
+        <p:cNvGrpSpPr/>
+        <p:nvPr/>
+      </p:nvGrpSpPr>
+      <p:grpSpPr/>
+      <p:sp>
+        <p:nvSpPr>
+          <p:cNvPr id="2" name="Title 1"/>
+          <p:cNvSpPr>
+            <a:spLocks noGrp="1"/>
+          </p:cNvSpPr>
+          <p:nvPr>
+            <p:ph type="title"/>
+          </p:nvPr>
+        </p:nvSpPr>
+        <p:spPr/>
+        <p:txBody>
+          <a:bodyPr/>
+          <a:lstStyle/>
+          <a:p>
+            <a:r>
+              <a:rPr sz="3800" b="1">
+                <a:solidFill>
+                  <a:srgbClr val="1F2A37"/>
+                </a:solidFill>
+              </a:rPr>
+              <a:t>.remove()</a:t>
+            </a:r>
+          </a:p>
+        </p:txBody>
+      </p:sp>
+      <p:sp>
+        <p:nvSpPr>
+          <p:cNvPr id="3" name="TextBox 2"/>
+          <p:cNvSpPr txBox="1"/>
+          <p:nvPr/>
+        </p:nvSpPr>
+        <p:spPr>
+          <a:xfrm>
+            <a:off x="868680" y="502920"/>
+            <a:ext cx="5486400" cy="457200"/>
+          </a:xfrm>
+          <a:prstGeom prst="rect">
+            <a:avLst/>
+          </a:prstGeom>
+          <a:noFill/>
+        </p:spPr>
+        <p:txBody>
+          <a:bodyPr wrap="none">
+            <a:spAutoFit/>
+          </a:bodyPr>
+          <a:lstStyle/>
+          <a:p>
+            <a:r>
+              <a:rPr sz="1500" b="1">
                 <a:solidFill>
                   <a:srgbClr val="01AEFD"/>
                 </a:solidFill>
               </a:rPr>
-              <a:t>Make it answer you</a:t>
-            </a:r>
-          </a:p>
+              <a:t>JAVASCRIPT</a:t>
+            </a:r>
+          </a:p>
+        </p:txBody>
+      </p:sp>
+      <p:sp>
+        <p:nvSpPr>
+          <p:cNvPr id="4" name="TextBox 3"/>
+          <p:cNvSpPr txBox="1"/>
+          <p:nvPr/>
+        </p:nvSpPr>
+        <p:spPr>
+          <a:xfrm>
+            <a:off x="822960" y="1828800"/>
+            <a:ext cx="10515600" cy="4206240"/>
+          </a:xfrm>
+          <a:prstGeom prst="rect">
+            <a:avLst/>
+          </a:prstGeom>
+          <a:noFill/>
+        </p:spPr>
+        <p:txBody>
+          <a:bodyPr wrap="square">
+            <a:spAutoFit/>
+          </a:bodyPr>
+          <a:lstStyle/>
           <a:p>
             <a:pPr>
               <a:spcAft>
@@ -15153,7 +14669,7 @@
                   <a:srgbClr val="1F2A37"/>
                 </a:solidFill>
               </a:rPr>
-              <a:t>• Ask it something only you would ask</a:t>
+              <a:t>• Deletes an element from the page.</a:t>
             </a:r>
           </a:p>
           <a:p>
@@ -15168,7 +14684,812 @@
                   <a:srgbClr val="1F2A37"/>
                 </a:solidFill>
               </a:rPr>
-              <a:t>• Check whether the answer is actually true</a:t>
+              <a:t>• chat.lastChild.remove() takes the last message back off.</a:t>
+            </a:r>
+          </a:p>
+        </p:txBody>
+      </p:sp>
+    </p:spTree>
+  </p:cSld>
+  <p:clrMapOvr>
+    <a:masterClrMapping/>
+  </p:clrMapOvr>
+</p:sld>
+</file>
+
+<file path=ppt/slides/slide48.xml><?xml version="1.0" encoding="utf-8"?>
+<p:sld xmlns:a="http://schemas.openxmlformats.org/drawingml/2006/main" xmlns:p="http://schemas.openxmlformats.org/presentationml/2006/main" xmlns:r="http://schemas.openxmlformats.org/officeDocument/2006/relationships">
+  <p:cSld>
+    <p:bg>
+      <p:bgPr>
+        <a:solidFill>
+          <a:srgbClr val="102127"/>
+        </a:solidFill>
+        <a:effectLst/>
+      </p:bgPr>
+    </p:bg>
+    <p:spTree>
+      <p:nvGrpSpPr>
+        <p:cNvPr id="1" name=""/>
+        <p:cNvGrpSpPr/>
+        <p:nvPr/>
+      </p:nvGrpSpPr>
+      <p:grpSpPr/>
+      <p:sp>
+        <p:nvSpPr>
+          <p:cNvPr id="2" name="TextBox 1"/>
+          <p:cNvSpPr txBox="1"/>
+          <p:nvPr/>
+        </p:nvSpPr>
+        <p:spPr>
+          <a:xfrm>
+            <a:off x="502920" y="274320"/>
+            <a:ext cx="11155680" cy="548640"/>
+          </a:xfrm>
+          <a:prstGeom prst="rect">
+            <a:avLst/>
+          </a:prstGeom>
+          <a:noFill/>
+        </p:spPr>
+        <p:txBody>
+          <a:bodyPr wrap="none">
+            <a:spAutoFit/>
+          </a:bodyPr>
+          <a:lstStyle/>
+          <a:p>
+            <a:r>
+              <a:rPr sz="2200" b="1">
+                <a:solidFill>
+                  <a:srgbClr val="01AEFD"/>
+                </a:solidFill>
+              </a:rPr>
+              <a:t>Type this into script.js   -   line 69</a:t>
+            </a:r>
+          </a:p>
+        </p:txBody>
+      </p:sp>
+      <p:sp>
+        <p:nvSpPr>
+          <p:cNvPr id="3" name="TextBox 2"/>
+          <p:cNvSpPr txBox="1"/>
+          <p:nvPr/>
+        </p:nvSpPr>
+        <p:spPr>
+          <a:xfrm>
+            <a:off x="502920" y="960120"/>
+            <a:ext cx="11155680" cy="4297680"/>
+          </a:xfrm>
+          <a:prstGeom prst="rect">
+            <a:avLst/>
+          </a:prstGeom>
+          <a:noFill/>
+        </p:spPr>
+        <p:txBody>
+          <a:bodyPr wrap="none">
+            <a:spAutoFit/>
+          </a:bodyPr>
+          <a:lstStyle/>
+          <a:p>
+            <a:pPr>
+              <a:spcAft>
+                <a:spcPts val="0"/>
+              </a:spcAft>
+            </a:pPr>
+            <a:r>
+              <a:rPr sz="1300">
+                <a:solidFill>
+                  <a:srgbClr val="6D8C97"/>
+                </a:solidFill>
+                <a:latin typeface="Consolas"/>
+              </a:rPr>
+              <a:t>  59  </a:t>
+            </a:r>
+            <a:r>
+              <a:rPr sz="1300">
+                <a:solidFill>
+                  <a:srgbClr val="6D8C97"/>
+                </a:solidFill>
+                <a:latin typeface="Consolas"/>
+              </a:rPr>
+              <a:t> </a:t>
+            </a:r>
+          </a:p>
+          <a:p>
+            <a:pPr>
+              <a:spcAft>
+                <a:spcPts val="0"/>
+              </a:spcAft>
+            </a:pPr>
+            <a:r>
+              <a:rPr sz="1300">
+                <a:solidFill>
+                  <a:srgbClr val="6D8C97"/>
+                </a:solidFill>
+                <a:latin typeface="Consolas"/>
+              </a:rPr>
+              <a:t>  60  </a:t>
+            </a:r>
+            <a:r>
+              <a:rPr sz="1300">
+                <a:solidFill>
+                  <a:srgbClr val="6D8C97"/>
+                </a:solidFill>
+                <a:latin typeface="Consolas"/>
+              </a:rPr>
+              <a:t>// The browser calls this when the form is submitted.</a:t>
+            </a:r>
+          </a:p>
+          <a:p>
+            <a:pPr>
+              <a:spcAft>
+                <a:spcPts val="0"/>
+              </a:spcAft>
+            </a:pPr>
+            <a:r>
+              <a:rPr sz="1300">
+                <a:solidFill>
+                  <a:srgbClr val="6D8C97"/>
+                </a:solidFill>
+                <a:latin typeface="Consolas"/>
+              </a:rPr>
+              <a:t>  61  </a:t>
+            </a:r>
+            <a:r>
+              <a:rPr sz="1300">
+                <a:solidFill>
+                  <a:srgbClr val="6D8C97"/>
+                </a:solidFill>
+                <a:latin typeface="Consolas"/>
+              </a:rPr>
+              <a:t>composer.addEventListener('submit', async function (event) {</a:t>
+            </a:r>
+          </a:p>
+          <a:p>
+            <a:pPr>
+              <a:spcAft>
+                <a:spcPts val="0"/>
+              </a:spcAft>
+            </a:pPr>
+            <a:r>
+              <a:rPr sz="1300">
+                <a:solidFill>
+                  <a:srgbClr val="6D8C97"/>
+                </a:solidFill>
+                <a:latin typeface="Consolas"/>
+              </a:rPr>
+              <a:t>  62  </a:t>
+            </a:r>
+            <a:r>
+              <a:rPr sz="1300">
+                <a:solidFill>
+                  <a:srgbClr val="6D8C97"/>
+                </a:solidFill>
+                <a:latin typeface="Consolas"/>
+              </a:rPr>
+              <a:t>  event.preventDefault();</a:t>
+            </a:r>
+          </a:p>
+          <a:p>
+            <a:pPr>
+              <a:spcAft>
+                <a:spcPts val="0"/>
+              </a:spcAft>
+            </a:pPr>
+            <a:r>
+              <a:rPr sz="1300">
+                <a:solidFill>
+                  <a:srgbClr val="6D8C97"/>
+                </a:solidFill>
+                <a:latin typeface="Consolas"/>
+              </a:rPr>
+              <a:t>  63  </a:t>
+            </a:r>
+            <a:r>
+              <a:rPr sz="1300">
+                <a:solidFill>
+                  <a:srgbClr val="6D8C97"/>
+                </a:solidFill>
+                <a:latin typeface="Consolas"/>
+              </a:rPr>
+              <a:t>  const text = promptBox.value.trim();</a:t>
+            </a:r>
+          </a:p>
+          <a:p>
+            <a:pPr>
+              <a:spcAft>
+                <a:spcPts val="0"/>
+              </a:spcAft>
+            </a:pPr>
+            <a:r>
+              <a:rPr sz="1300">
+                <a:solidFill>
+                  <a:srgbClr val="6D8C97"/>
+                </a:solidFill>
+                <a:latin typeface="Consolas"/>
+              </a:rPr>
+              <a:t>  64  </a:t>
+            </a:r>
+            <a:r>
+              <a:rPr sz="1300">
+                <a:solidFill>
+                  <a:srgbClr val="6D8C97"/>
+                </a:solidFill>
+                <a:latin typeface="Consolas"/>
+              </a:rPr>
+              <a:t>  if (text === '') { return; }</a:t>
+            </a:r>
+          </a:p>
+          <a:p>
+            <a:pPr>
+              <a:spcAft>
+                <a:spcPts val="0"/>
+              </a:spcAft>
+            </a:pPr>
+            <a:r>
+              <a:rPr sz="1300">
+                <a:solidFill>
+                  <a:srgbClr val="6D8C97"/>
+                </a:solidFill>
+                <a:latin typeface="Consolas"/>
+              </a:rPr>
+              <a:t>  65  </a:t>
+            </a:r>
+            <a:r>
+              <a:rPr sz="1300">
+                <a:solidFill>
+                  <a:srgbClr val="6D8C97"/>
+                </a:solidFill>
+                <a:latin typeface="Consolas"/>
+              </a:rPr>
+              <a:t>  promptBox.value = '';</a:t>
+            </a:r>
+          </a:p>
+          <a:p>
+            <a:pPr>
+              <a:spcAft>
+                <a:spcPts val="0"/>
+              </a:spcAft>
+            </a:pPr>
+            <a:r>
+              <a:rPr sz="1300">
+                <a:solidFill>
+                  <a:srgbClr val="6D8C97"/>
+                </a:solidFill>
+                <a:latin typeface="Consolas"/>
+              </a:rPr>
+              <a:t>  66  </a:t>
+            </a:r>
+            <a:r>
+              <a:rPr sz="1300">
+                <a:solidFill>
+                  <a:srgbClr val="6D8C97"/>
+                </a:solidFill>
+                <a:latin typeface="Consolas"/>
+              </a:rPr>
+              <a:t>  addLine('You', text);</a:t>
+            </a:r>
+          </a:p>
+          <a:p>
+            <a:pPr>
+              <a:spcAft>
+                <a:spcPts val="0"/>
+              </a:spcAft>
+            </a:pPr>
+            <a:r>
+              <a:rPr sz="1300">
+                <a:solidFill>
+                  <a:srgbClr val="6D8C97"/>
+                </a:solidFill>
+                <a:latin typeface="Consolas"/>
+              </a:rPr>
+              <a:t>  67  </a:t>
+            </a:r>
+            <a:r>
+              <a:rPr sz="1300">
+                <a:solidFill>
+                  <a:srgbClr val="6D8C97"/>
+                </a:solidFill>
+                <a:latin typeface="Consolas"/>
+              </a:rPr>
+              <a:t>  addLine('Companion', 'thinking...');</a:t>
+            </a:r>
+          </a:p>
+          <a:p>
+            <a:pPr>
+              <a:spcAft>
+                <a:spcPts val="0"/>
+              </a:spcAft>
+            </a:pPr>
+            <a:r>
+              <a:rPr sz="1300">
+                <a:solidFill>
+                  <a:srgbClr val="6D8C97"/>
+                </a:solidFill>
+                <a:latin typeface="Consolas"/>
+              </a:rPr>
+              <a:t>  68  </a:t>
+            </a:r>
+            <a:r>
+              <a:rPr sz="1300">
+                <a:solidFill>
+                  <a:srgbClr val="6D8C97"/>
+                </a:solidFill>
+                <a:latin typeface="Consolas"/>
+              </a:rPr>
+              <a:t>  const reply = await askAI(text);       // this is the slow bit</a:t>
+            </a:r>
+          </a:p>
+          <a:p>
+            <a:pPr>
+              <a:spcAft>
+                <a:spcPts val="0"/>
+              </a:spcAft>
+            </a:pPr>
+            <a:r>
+              <a:rPr sz="1300">
+                <a:solidFill>
+                  <a:srgbClr val="6D8C97"/>
+                </a:solidFill>
+                <a:latin typeface="Consolas"/>
+              </a:rPr>
+              <a:t>  69  </a:t>
+            </a:r>
+            <a:r>
+              <a:rPr sz="1300">
+                <a:solidFill>
+                  <a:srgbClr val="7FE0A0"/>
+                </a:solidFill>
+                <a:latin typeface="Consolas"/>
+              </a:rPr>
+              <a:t>  chat.lastChild.remove();               // take the 'thinking' line away</a:t>
+            </a:r>
+          </a:p>
+        </p:txBody>
+      </p:sp>
+      <p:sp>
+        <p:nvSpPr>
+          <p:cNvPr id="4" name="TextBox 3"/>
+          <p:cNvSpPr txBox="1"/>
+          <p:nvPr/>
+        </p:nvSpPr>
+        <p:spPr>
+          <a:xfrm>
+            <a:off x="548640" y="5623560"/>
+            <a:ext cx="11064240" cy="1051560"/>
+          </a:xfrm>
+          <a:prstGeom prst="rect">
+            <a:avLst/>
+          </a:prstGeom>
+          <a:noFill/>
+        </p:spPr>
+        <p:txBody>
+          <a:bodyPr wrap="square">
+            <a:spAutoFit/>
+          </a:bodyPr>
+          <a:lstStyle/>
+          <a:p>
+            <a:r>
+              <a:rPr sz="2000">
+                <a:solidFill>
+                  <a:srgbClr val="DCECEF"/>
+                </a:solidFill>
+              </a:rPr>
+              <a:t>Remove the 'thinking...' line now the real answer is here.</a:t>
+            </a:r>
+          </a:p>
+        </p:txBody>
+      </p:sp>
+    </p:spTree>
+  </p:cSld>
+  <p:clrMapOvr>
+    <a:masterClrMapping/>
+  </p:clrMapOvr>
+</p:sld>
+</file>
+
+<file path=ppt/slides/slide49.xml><?xml version="1.0" encoding="utf-8"?>
+<p:sld xmlns:a="http://schemas.openxmlformats.org/drawingml/2006/main" xmlns:p="http://schemas.openxmlformats.org/presentationml/2006/main" xmlns:r="http://schemas.openxmlformats.org/officeDocument/2006/relationships">
+  <p:cSld>
+    <p:bg>
+      <p:bgPr>
+        <a:solidFill>
+          <a:srgbClr val="102127"/>
+        </a:solidFill>
+        <a:effectLst/>
+      </p:bgPr>
+    </p:bg>
+    <p:spTree>
+      <p:nvGrpSpPr>
+        <p:cNvPr id="1" name=""/>
+        <p:cNvGrpSpPr/>
+        <p:nvPr/>
+      </p:nvGrpSpPr>
+      <p:grpSpPr/>
+      <p:sp>
+        <p:nvSpPr>
+          <p:cNvPr id="2" name="TextBox 1"/>
+          <p:cNvSpPr txBox="1"/>
+          <p:nvPr/>
+        </p:nvSpPr>
+        <p:spPr>
+          <a:xfrm>
+            <a:off x="502920" y="274320"/>
+            <a:ext cx="11155680" cy="548640"/>
+          </a:xfrm>
+          <a:prstGeom prst="rect">
+            <a:avLst/>
+          </a:prstGeom>
+          <a:noFill/>
+        </p:spPr>
+        <p:txBody>
+          <a:bodyPr wrap="none">
+            <a:spAutoFit/>
+          </a:bodyPr>
+          <a:lstStyle/>
+          <a:p>
+            <a:r>
+              <a:rPr sz="2200" b="1">
+                <a:solidFill>
+                  <a:srgbClr val="01AEFD"/>
+                </a:solidFill>
+              </a:rPr>
+              <a:t>Type this into script.js   -   line 70</a:t>
+            </a:r>
+          </a:p>
+        </p:txBody>
+      </p:sp>
+      <p:sp>
+        <p:nvSpPr>
+          <p:cNvPr id="3" name="TextBox 2"/>
+          <p:cNvSpPr txBox="1"/>
+          <p:nvPr/>
+        </p:nvSpPr>
+        <p:spPr>
+          <a:xfrm>
+            <a:off x="502920" y="960120"/>
+            <a:ext cx="11155680" cy="4297680"/>
+          </a:xfrm>
+          <a:prstGeom prst="rect">
+            <a:avLst/>
+          </a:prstGeom>
+          <a:noFill/>
+        </p:spPr>
+        <p:txBody>
+          <a:bodyPr wrap="none">
+            <a:spAutoFit/>
+          </a:bodyPr>
+          <a:lstStyle/>
+          <a:p>
+            <a:pPr>
+              <a:spcAft>
+                <a:spcPts val="0"/>
+              </a:spcAft>
+            </a:pPr>
+            <a:r>
+              <a:rPr sz="1300">
+                <a:solidFill>
+                  <a:srgbClr val="6D8C97"/>
+                </a:solidFill>
+                <a:latin typeface="Consolas"/>
+              </a:rPr>
+              <a:t>  59  </a:t>
+            </a:r>
+            <a:r>
+              <a:rPr sz="1300">
+                <a:solidFill>
+                  <a:srgbClr val="6D8C97"/>
+                </a:solidFill>
+                <a:latin typeface="Consolas"/>
+              </a:rPr>
+              <a:t> </a:t>
+            </a:r>
+          </a:p>
+          <a:p>
+            <a:pPr>
+              <a:spcAft>
+                <a:spcPts val="0"/>
+              </a:spcAft>
+            </a:pPr>
+            <a:r>
+              <a:rPr sz="1300">
+                <a:solidFill>
+                  <a:srgbClr val="6D8C97"/>
+                </a:solidFill>
+                <a:latin typeface="Consolas"/>
+              </a:rPr>
+              <a:t>  60  </a:t>
+            </a:r>
+            <a:r>
+              <a:rPr sz="1300">
+                <a:solidFill>
+                  <a:srgbClr val="6D8C97"/>
+                </a:solidFill>
+                <a:latin typeface="Consolas"/>
+              </a:rPr>
+              <a:t>// The browser calls this when the form is submitted.</a:t>
+            </a:r>
+          </a:p>
+          <a:p>
+            <a:pPr>
+              <a:spcAft>
+                <a:spcPts val="0"/>
+              </a:spcAft>
+            </a:pPr>
+            <a:r>
+              <a:rPr sz="1300">
+                <a:solidFill>
+                  <a:srgbClr val="6D8C97"/>
+                </a:solidFill>
+                <a:latin typeface="Consolas"/>
+              </a:rPr>
+              <a:t>  61  </a:t>
+            </a:r>
+            <a:r>
+              <a:rPr sz="1300">
+                <a:solidFill>
+                  <a:srgbClr val="6D8C97"/>
+                </a:solidFill>
+                <a:latin typeface="Consolas"/>
+              </a:rPr>
+              <a:t>composer.addEventListener('submit', async function (event) {</a:t>
+            </a:r>
+          </a:p>
+          <a:p>
+            <a:pPr>
+              <a:spcAft>
+                <a:spcPts val="0"/>
+              </a:spcAft>
+            </a:pPr>
+            <a:r>
+              <a:rPr sz="1300">
+                <a:solidFill>
+                  <a:srgbClr val="6D8C97"/>
+                </a:solidFill>
+                <a:latin typeface="Consolas"/>
+              </a:rPr>
+              <a:t>  62  </a:t>
+            </a:r>
+            <a:r>
+              <a:rPr sz="1300">
+                <a:solidFill>
+                  <a:srgbClr val="6D8C97"/>
+                </a:solidFill>
+                <a:latin typeface="Consolas"/>
+              </a:rPr>
+              <a:t>  event.preventDefault();</a:t>
+            </a:r>
+          </a:p>
+          <a:p>
+            <a:pPr>
+              <a:spcAft>
+                <a:spcPts val="0"/>
+              </a:spcAft>
+            </a:pPr>
+            <a:r>
+              <a:rPr sz="1300">
+                <a:solidFill>
+                  <a:srgbClr val="6D8C97"/>
+                </a:solidFill>
+                <a:latin typeface="Consolas"/>
+              </a:rPr>
+              <a:t>  63  </a:t>
+            </a:r>
+            <a:r>
+              <a:rPr sz="1300">
+                <a:solidFill>
+                  <a:srgbClr val="6D8C97"/>
+                </a:solidFill>
+                <a:latin typeface="Consolas"/>
+              </a:rPr>
+              <a:t>  const text = promptBox.value.trim();</a:t>
+            </a:r>
+          </a:p>
+          <a:p>
+            <a:pPr>
+              <a:spcAft>
+                <a:spcPts val="0"/>
+              </a:spcAft>
+            </a:pPr>
+            <a:r>
+              <a:rPr sz="1300">
+                <a:solidFill>
+                  <a:srgbClr val="6D8C97"/>
+                </a:solidFill>
+                <a:latin typeface="Consolas"/>
+              </a:rPr>
+              <a:t>  64  </a:t>
+            </a:r>
+            <a:r>
+              <a:rPr sz="1300">
+                <a:solidFill>
+                  <a:srgbClr val="6D8C97"/>
+                </a:solidFill>
+                <a:latin typeface="Consolas"/>
+              </a:rPr>
+              <a:t>  if (text === '') { return; }</a:t>
+            </a:r>
+          </a:p>
+          <a:p>
+            <a:pPr>
+              <a:spcAft>
+                <a:spcPts val="0"/>
+              </a:spcAft>
+            </a:pPr>
+            <a:r>
+              <a:rPr sz="1300">
+                <a:solidFill>
+                  <a:srgbClr val="6D8C97"/>
+                </a:solidFill>
+                <a:latin typeface="Consolas"/>
+              </a:rPr>
+              <a:t>  65  </a:t>
+            </a:r>
+            <a:r>
+              <a:rPr sz="1300">
+                <a:solidFill>
+                  <a:srgbClr val="6D8C97"/>
+                </a:solidFill>
+                <a:latin typeface="Consolas"/>
+              </a:rPr>
+              <a:t>  promptBox.value = '';</a:t>
+            </a:r>
+          </a:p>
+          <a:p>
+            <a:pPr>
+              <a:spcAft>
+                <a:spcPts val="0"/>
+              </a:spcAft>
+            </a:pPr>
+            <a:r>
+              <a:rPr sz="1300">
+                <a:solidFill>
+                  <a:srgbClr val="6D8C97"/>
+                </a:solidFill>
+                <a:latin typeface="Consolas"/>
+              </a:rPr>
+              <a:t>  66  </a:t>
+            </a:r>
+            <a:r>
+              <a:rPr sz="1300">
+                <a:solidFill>
+                  <a:srgbClr val="6D8C97"/>
+                </a:solidFill>
+                <a:latin typeface="Consolas"/>
+              </a:rPr>
+              <a:t>  addLine('You', text);</a:t>
+            </a:r>
+          </a:p>
+          <a:p>
+            <a:pPr>
+              <a:spcAft>
+                <a:spcPts val="0"/>
+              </a:spcAft>
+            </a:pPr>
+            <a:r>
+              <a:rPr sz="1300">
+                <a:solidFill>
+                  <a:srgbClr val="6D8C97"/>
+                </a:solidFill>
+                <a:latin typeface="Consolas"/>
+              </a:rPr>
+              <a:t>  67  </a:t>
+            </a:r>
+            <a:r>
+              <a:rPr sz="1300">
+                <a:solidFill>
+                  <a:srgbClr val="6D8C97"/>
+                </a:solidFill>
+                <a:latin typeface="Consolas"/>
+              </a:rPr>
+              <a:t>  addLine('Companion', 'thinking...');</a:t>
+            </a:r>
+          </a:p>
+          <a:p>
+            <a:pPr>
+              <a:spcAft>
+                <a:spcPts val="0"/>
+              </a:spcAft>
+            </a:pPr>
+            <a:r>
+              <a:rPr sz="1300">
+                <a:solidFill>
+                  <a:srgbClr val="6D8C97"/>
+                </a:solidFill>
+                <a:latin typeface="Consolas"/>
+              </a:rPr>
+              <a:t>  68  </a:t>
+            </a:r>
+            <a:r>
+              <a:rPr sz="1300">
+                <a:solidFill>
+                  <a:srgbClr val="6D8C97"/>
+                </a:solidFill>
+                <a:latin typeface="Consolas"/>
+              </a:rPr>
+              <a:t>  const reply = await askAI(text);       // this is the slow bit</a:t>
+            </a:r>
+          </a:p>
+          <a:p>
+            <a:pPr>
+              <a:spcAft>
+                <a:spcPts val="0"/>
+              </a:spcAft>
+            </a:pPr>
+            <a:r>
+              <a:rPr sz="1300">
+                <a:solidFill>
+                  <a:srgbClr val="6D8C97"/>
+                </a:solidFill>
+                <a:latin typeface="Consolas"/>
+              </a:rPr>
+              <a:t>  69  </a:t>
+            </a:r>
+            <a:r>
+              <a:rPr sz="1300">
+                <a:solidFill>
+                  <a:srgbClr val="6D8C97"/>
+                </a:solidFill>
+                <a:latin typeface="Consolas"/>
+              </a:rPr>
+              <a:t>  chat.lastChild.remove();               // take the 'thinking' line away</a:t>
+            </a:r>
+          </a:p>
+          <a:p>
+            <a:pPr>
+              <a:spcAft>
+                <a:spcPts val="0"/>
+              </a:spcAft>
+            </a:pPr>
+            <a:r>
+              <a:rPr sz="1300">
+                <a:solidFill>
+                  <a:srgbClr val="6D8C97"/>
+                </a:solidFill>
+                <a:latin typeface="Consolas"/>
+              </a:rPr>
+              <a:t>  70  </a:t>
+            </a:r>
+            <a:r>
+              <a:rPr sz="1300">
+                <a:solidFill>
+                  <a:srgbClr val="7FE0A0"/>
+                </a:solidFill>
+                <a:latin typeface="Consolas"/>
+              </a:rPr>
+              <a:t>  addLine('Companion', reply);</a:t>
+            </a:r>
+          </a:p>
+        </p:txBody>
+      </p:sp>
+      <p:sp>
+        <p:nvSpPr>
+          <p:cNvPr id="4" name="TextBox 3"/>
+          <p:cNvSpPr txBox="1"/>
+          <p:nvPr/>
+        </p:nvSpPr>
+        <p:spPr>
+          <a:xfrm>
+            <a:off x="548640" y="5623560"/>
+            <a:ext cx="11064240" cy="1051560"/>
+          </a:xfrm>
+          <a:prstGeom prst="rect">
+            <a:avLst/>
+          </a:prstGeom>
+          <a:noFill/>
+        </p:spPr>
+        <p:txBody>
+          <a:bodyPr wrap="square">
+            <a:spAutoFit/>
+          </a:bodyPr>
+          <a:lstStyle/>
+          <a:p>
+            <a:r>
+              <a:rPr sz="2000">
+                <a:solidFill>
+                  <a:srgbClr val="DCECEF"/>
+                </a:solidFill>
+              </a:rPr>
+              <a:t>Show the real reply in the chat.</a:t>
             </a:r>
           </a:p>
         </p:txBody>
@@ -15334,6 +15655,1093 @@
                 </a:solidFill>
               </a:rPr>
               <a:t>A comment: this week we ask the AI a real question.</a:t>
+            </a:r>
+          </a:p>
+        </p:txBody>
+      </p:sp>
+    </p:spTree>
+  </p:cSld>
+  <p:clrMapOvr>
+    <a:masterClrMapping/>
+  </p:clrMapOvr>
+</p:sld>
+</file>
+
+<file path=ppt/slides/slide50.xml><?xml version="1.0" encoding="utf-8"?>
+<p:sld xmlns:a="http://schemas.openxmlformats.org/drawingml/2006/main" xmlns:p="http://schemas.openxmlformats.org/presentationml/2006/main" xmlns:r="http://schemas.openxmlformats.org/officeDocument/2006/relationships">
+  <p:cSld>
+    <p:bg>
+      <p:bgPr>
+        <a:solidFill>
+          <a:srgbClr val="102127"/>
+        </a:solidFill>
+        <a:effectLst/>
+      </p:bgPr>
+    </p:bg>
+    <p:spTree>
+      <p:nvGrpSpPr>
+        <p:cNvPr id="1" name=""/>
+        <p:cNvGrpSpPr/>
+        <p:nvPr/>
+      </p:nvGrpSpPr>
+      <p:grpSpPr/>
+      <p:sp>
+        <p:nvSpPr>
+          <p:cNvPr id="2" name="TextBox 1"/>
+          <p:cNvSpPr txBox="1"/>
+          <p:nvPr/>
+        </p:nvSpPr>
+        <p:spPr>
+          <a:xfrm>
+            <a:off x="502920" y="274320"/>
+            <a:ext cx="11155680" cy="548640"/>
+          </a:xfrm>
+          <a:prstGeom prst="rect">
+            <a:avLst/>
+          </a:prstGeom>
+          <a:noFill/>
+        </p:spPr>
+        <p:txBody>
+          <a:bodyPr wrap="none">
+            <a:spAutoFit/>
+          </a:bodyPr>
+          <a:lstStyle/>
+          <a:p>
+            <a:r>
+              <a:rPr sz="2200" b="1">
+                <a:solidFill>
+                  <a:srgbClr val="01AEFD"/>
+                </a:solidFill>
+              </a:rPr>
+              <a:t>All together in script.js</a:t>
+            </a:r>
+          </a:p>
+        </p:txBody>
+      </p:sp>
+      <p:sp>
+        <p:nvSpPr>
+          <p:cNvPr id="3" name="TextBox 2"/>
+          <p:cNvSpPr txBox="1"/>
+          <p:nvPr/>
+        </p:nvSpPr>
+        <p:spPr>
+          <a:xfrm>
+            <a:off x="502920" y="960120"/>
+            <a:ext cx="11155680" cy="4297680"/>
+          </a:xfrm>
+          <a:prstGeom prst="rect">
+            <a:avLst/>
+          </a:prstGeom>
+          <a:noFill/>
+        </p:spPr>
+        <p:txBody>
+          <a:bodyPr wrap="none">
+            <a:spAutoFit/>
+          </a:bodyPr>
+          <a:lstStyle/>
+          <a:p>
+            <a:pPr>
+              <a:spcAft>
+                <a:spcPts val="0"/>
+              </a:spcAft>
+            </a:pPr>
+            <a:r>
+              <a:rPr sz="1300">
+                <a:solidFill>
+                  <a:srgbClr val="6D8C97"/>
+                </a:solidFill>
+                <a:latin typeface="Consolas"/>
+              </a:rPr>
+              <a:t>  59  </a:t>
+            </a:r>
+            <a:r>
+              <a:rPr sz="1300">
+                <a:solidFill>
+                  <a:srgbClr val="7FE0A0"/>
+                </a:solidFill>
+                <a:latin typeface="Consolas"/>
+              </a:rPr>
+              <a:t> </a:t>
+            </a:r>
+          </a:p>
+          <a:p>
+            <a:pPr>
+              <a:spcAft>
+                <a:spcPts val="0"/>
+              </a:spcAft>
+            </a:pPr>
+            <a:r>
+              <a:rPr sz="1300">
+                <a:solidFill>
+                  <a:srgbClr val="6D8C97"/>
+                </a:solidFill>
+                <a:latin typeface="Consolas"/>
+              </a:rPr>
+              <a:t>  60  </a:t>
+            </a:r>
+            <a:r>
+              <a:rPr sz="1300">
+                <a:solidFill>
+                  <a:srgbClr val="7FE0A0"/>
+                </a:solidFill>
+                <a:latin typeface="Consolas"/>
+              </a:rPr>
+              <a:t>// The browser calls this when the form is submitted.</a:t>
+            </a:r>
+          </a:p>
+          <a:p>
+            <a:pPr>
+              <a:spcAft>
+                <a:spcPts val="0"/>
+              </a:spcAft>
+            </a:pPr>
+            <a:r>
+              <a:rPr sz="1300">
+                <a:solidFill>
+                  <a:srgbClr val="6D8C97"/>
+                </a:solidFill>
+                <a:latin typeface="Consolas"/>
+              </a:rPr>
+              <a:t>  61  </a:t>
+            </a:r>
+            <a:r>
+              <a:rPr sz="1300">
+                <a:solidFill>
+                  <a:srgbClr val="7FE0A0"/>
+                </a:solidFill>
+                <a:latin typeface="Consolas"/>
+              </a:rPr>
+              <a:t>composer.addEventListener('submit', async function (event) {</a:t>
+            </a:r>
+          </a:p>
+          <a:p>
+            <a:pPr>
+              <a:spcAft>
+                <a:spcPts val="0"/>
+              </a:spcAft>
+            </a:pPr>
+            <a:r>
+              <a:rPr sz="1300">
+                <a:solidFill>
+                  <a:srgbClr val="6D8C97"/>
+                </a:solidFill>
+                <a:latin typeface="Consolas"/>
+              </a:rPr>
+              <a:t>  62  </a:t>
+            </a:r>
+            <a:r>
+              <a:rPr sz="1300">
+                <a:solidFill>
+                  <a:srgbClr val="7FE0A0"/>
+                </a:solidFill>
+                <a:latin typeface="Consolas"/>
+              </a:rPr>
+              <a:t>  event.preventDefault();</a:t>
+            </a:r>
+          </a:p>
+          <a:p>
+            <a:pPr>
+              <a:spcAft>
+                <a:spcPts val="0"/>
+              </a:spcAft>
+            </a:pPr>
+            <a:r>
+              <a:rPr sz="1300">
+                <a:solidFill>
+                  <a:srgbClr val="6D8C97"/>
+                </a:solidFill>
+                <a:latin typeface="Consolas"/>
+              </a:rPr>
+              <a:t>  63  </a:t>
+            </a:r>
+            <a:r>
+              <a:rPr sz="1300">
+                <a:solidFill>
+                  <a:srgbClr val="7FE0A0"/>
+                </a:solidFill>
+                <a:latin typeface="Consolas"/>
+              </a:rPr>
+              <a:t>  const text = promptBox.value.trim();</a:t>
+            </a:r>
+          </a:p>
+          <a:p>
+            <a:pPr>
+              <a:spcAft>
+                <a:spcPts val="0"/>
+              </a:spcAft>
+            </a:pPr>
+            <a:r>
+              <a:rPr sz="1300">
+                <a:solidFill>
+                  <a:srgbClr val="6D8C97"/>
+                </a:solidFill>
+                <a:latin typeface="Consolas"/>
+              </a:rPr>
+              <a:t>  64  </a:t>
+            </a:r>
+            <a:r>
+              <a:rPr sz="1300">
+                <a:solidFill>
+                  <a:srgbClr val="7FE0A0"/>
+                </a:solidFill>
+                <a:latin typeface="Consolas"/>
+              </a:rPr>
+              <a:t>  if (text === '') { return; }</a:t>
+            </a:r>
+          </a:p>
+          <a:p>
+            <a:pPr>
+              <a:spcAft>
+                <a:spcPts val="0"/>
+              </a:spcAft>
+            </a:pPr>
+            <a:r>
+              <a:rPr sz="1300">
+                <a:solidFill>
+                  <a:srgbClr val="6D8C97"/>
+                </a:solidFill>
+                <a:latin typeface="Consolas"/>
+              </a:rPr>
+              <a:t>  65  </a:t>
+            </a:r>
+            <a:r>
+              <a:rPr sz="1300">
+                <a:solidFill>
+                  <a:srgbClr val="7FE0A0"/>
+                </a:solidFill>
+                <a:latin typeface="Consolas"/>
+              </a:rPr>
+              <a:t>  promptBox.value = '';</a:t>
+            </a:r>
+          </a:p>
+          <a:p>
+            <a:pPr>
+              <a:spcAft>
+                <a:spcPts val="0"/>
+              </a:spcAft>
+            </a:pPr>
+            <a:r>
+              <a:rPr sz="1300">
+                <a:solidFill>
+                  <a:srgbClr val="6D8C97"/>
+                </a:solidFill>
+                <a:latin typeface="Consolas"/>
+              </a:rPr>
+              <a:t>  66  </a:t>
+            </a:r>
+            <a:r>
+              <a:rPr sz="1300">
+                <a:solidFill>
+                  <a:srgbClr val="7FE0A0"/>
+                </a:solidFill>
+                <a:latin typeface="Consolas"/>
+              </a:rPr>
+              <a:t>  addLine('You', text);</a:t>
+            </a:r>
+          </a:p>
+          <a:p>
+            <a:pPr>
+              <a:spcAft>
+                <a:spcPts val="0"/>
+              </a:spcAft>
+            </a:pPr>
+            <a:r>
+              <a:rPr sz="1300">
+                <a:solidFill>
+                  <a:srgbClr val="6D8C97"/>
+                </a:solidFill>
+                <a:latin typeface="Consolas"/>
+              </a:rPr>
+              <a:t>  67  </a:t>
+            </a:r>
+            <a:r>
+              <a:rPr sz="1300">
+                <a:solidFill>
+                  <a:srgbClr val="7FE0A0"/>
+                </a:solidFill>
+                <a:latin typeface="Consolas"/>
+              </a:rPr>
+              <a:t>  addLine('Companion', 'thinking...');</a:t>
+            </a:r>
+          </a:p>
+          <a:p>
+            <a:pPr>
+              <a:spcAft>
+                <a:spcPts val="0"/>
+              </a:spcAft>
+            </a:pPr>
+            <a:r>
+              <a:rPr sz="1300">
+                <a:solidFill>
+                  <a:srgbClr val="6D8C97"/>
+                </a:solidFill>
+                <a:latin typeface="Consolas"/>
+              </a:rPr>
+              <a:t>  68  </a:t>
+            </a:r>
+            <a:r>
+              <a:rPr sz="1300">
+                <a:solidFill>
+                  <a:srgbClr val="7FE0A0"/>
+                </a:solidFill>
+                <a:latin typeface="Consolas"/>
+              </a:rPr>
+              <a:t>  const reply = await askAI(text);       // this is the slow bit</a:t>
+            </a:r>
+          </a:p>
+          <a:p>
+            <a:pPr>
+              <a:spcAft>
+                <a:spcPts val="0"/>
+              </a:spcAft>
+            </a:pPr>
+            <a:r>
+              <a:rPr sz="1300">
+                <a:solidFill>
+                  <a:srgbClr val="6D8C97"/>
+                </a:solidFill>
+                <a:latin typeface="Consolas"/>
+              </a:rPr>
+              <a:t>  69  </a:t>
+            </a:r>
+            <a:r>
+              <a:rPr sz="1300">
+                <a:solidFill>
+                  <a:srgbClr val="7FE0A0"/>
+                </a:solidFill>
+                <a:latin typeface="Consolas"/>
+              </a:rPr>
+              <a:t>  chat.lastChild.remove();               // take the 'thinking' line away</a:t>
+            </a:r>
+          </a:p>
+          <a:p>
+            <a:pPr>
+              <a:spcAft>
+                <a:spcPts val="0"/>
+              </a:spcAft>
+            </a:pPr>
+            <a:r>
+              <a:rPr sz="1300">
+                <a:solidFill>
+                  <a:srgbClr val="6D8C97"/>
+                </a:solidFill>
+                <a:latin typeface="Consolas"/>
+              </a:rPr>
+              <a:t>  70  </a:t>
+            </a:r>
+            <a:r>
+              <a:rPr sz="1300">
+                <a:solidFill>
+                  <a:srgbClr val="7FE0A0"/>
+                </a:solidFill>
+                <a:latin typeface="Consolas"/>
+              </a:rPr>
+              <a:t>  addLine('Companion', reply);</a:t>
+            </a:r>
+          </a:p>
+          <a:p>
+            <a:pPr>
+              <a:spcAft>
+                <a:spcPts val="0"/>
+              </a:spcAft>
+            </a:pPr>
+            <a:r>
+              <a:rPr sz="1300">
+                <a:solidFill>
+                  <a:srgbClr val="6D8C97"/>
+                </a:solidFill>
+                <a:latin typeface="Consolas"/>
+              </a:rPr>
+              <a:t>  71  </a:t>
+            </a:r>
+            <a:r>
+              <a:rPr sz="1300">
+                <a:solidFill>
+                  <a:srgbClr val="7FE0A0"/>
+                </a:solidFill>
+                <a:latin typeface="Consolas"/>
+              </a:rPr>
+              <a:t>});</a:t>
+            </a:r>
+          </a:p>
+        </p:txBody>
+      </p:sp>
+      <p:sp>
+        <p:nvSpPr>
+          <p:cNvPr id="4" name="TextBox 3"/>
+          <p:cNvSpPr txBox="1"/>
+          <p:nvPr/>
+        </p:nvSpPr>
+        <p:spPr>
+          <a:xfrm>
+            <a:off x="548640" y="5623560"/>
+            <a:ext cx="11064240" cy="1051560"/>
+          </a:xfrm>
+          <a:prstGeom prst="rect">
+            <a:avLst/>
+          </a:prstGeom>
+          <a:noFill/>
+        </p:spPr>
+        <p:txBody>
+          <a:bodyPr wrap="square">
+            <a:spAutoFit/>
+          </a:bodyPr>
+          <a:lstStyle/>
+          <a:p>
+            <a:r>
+              <a:rPr sz="2000">
+                <a:solidFill>
+                  <a:srgbClr val="DCECEF"/>
+                </a:solidFill>
+              </a:rPr>
+              <a:t>That is the whole piece. Check yours looks the same before moving on.</a:t>
+            </a:r>
+          </a:p>
+        </p:txBody>
+      </p:sp>
+    </p:spTree>
+  </p:cSld>
+  <p:clrMapOvr>
+    <a:masterClrMapping/>
+  </p:clrMapOvr>
+</p:sld>
+</file>
+
+<file path=ppt/slides/slide51.xml><?xml version="1.0" encoding="utf-8"?>
+<p:sld xmlns:a="http://schemas.openxmlformats.org/drawingml/2006/main" xmlns:p="http://schemas.openxmlformats.org/presentationml/2006/main" xmlns:r="http://schemas.openxmlformats.org/officeDocument/2006/relationships">
+  <p:cSld>
+    <p:bg>
+      <p:bgPr>
+        <a:solidFill>
+          <a:srgbClr val="102127"/>
+        </a:solidFill>
+        <a:effectLst/>
+      </p:bgPr>
+    </p:bg>
+    <p:spTree>
+      <p:nvGrpSpPr>
+        <p:cNvPr id="1" name=""/>
+        <p:cNvGrpSpPr/>
+        <p:nvPr/>
+      </p:nvGrpSpPr>
+      <p:grpSpPr/>
+      <p:sp>
+        <p:nvSpPr>
+          <p:cNvPr id="2" name="TextBox 1"/>
+          <p:cNvSpPr txBox="1"/>
+          <p:nvPr/>
+        </p:nvSpPr>
+        <p:spPr>
+          <a:xfrm>
+            <a:off x="502920" y="274320"/>
+            <a:ext cx="11155680" cy="548640"/>
+          </a:xfrm>
+          <a:prstGeom prst="rect">
+            <a:avLst/>
+          </a:prstGeom>
+          <a:noFill/>
+        </p:spPr>
+        <p:txBody>
+          <a:bodyPr wrap="none">
+            <a:spAutoFit/>
+          </a:bodyPr>
+          <a:lstStyle/>
+          <a:p>
+            <a:r>
+              <a:rPr sz="2200" b="1">
+                <a:solidFill>
+                  <a:srgbClr val="01AEFD"/>
+                </a:solidFill>
+              </a:rPr>
+              <a:t>In script.js   -   delete a line</a:t>
+            </a:r>
+          </a:p>
+        </p:txBody>
+      </p:sp>
+      <p:sp>
+        <p:nvSpPr>
+          <p:cNvPr id="3" name="TextBox 2"/>
+          <p:cNvSpPr txBox="1"/>
+          <p:nvPr/>
+        </p:nvSpPr>
+        <p:spPr>
+          <a:xfrm>
+            <a:off x="502920" y="960120"/>
+            <a:ext cx="11155680" cy="4297680"/>
+          </a:xfrm>
+          <a:prstGeom prst="rect">
+            <a:avLst/>
+          </a:prstGeom>
+          <a:noFill/>
+        </p:spPr>
+        <p:txBody>
+          <a:bodyPr wrap="none">
+            <a:spAutoFit/>
+          </a:bodyPr>
+          <a:lstStyle/>
+          <a:p>
+            <a:pPr>
+              <a:spcAft>
+                <a:spcPts val="0"/>
+              </a:spcAft>
+            </a:pPr>
+            <a:r>
+              <a:rPr sz="1300">
+                <a:solidFill>
+                  <a:srgbClr val="6D8C97"/>
+                </a:solidFill>
+                <a:latin typeface="Consolas"/>
+              </a:rPr>
+              <a:t>  29  </a:t>
+            </a:r>
+            <a:r>
+              <a:rPr sz="1300">
+                <a:solidFill>
+                  <a:srgbClr val="6D8C97"/>
+                </a:solidFill>
+                <a:latin typeface="Consolas"/>
+              </a:rPr>
+              <a:t> </a:t>
+            </a:r>
+          </a:p>
+          <a:p>
+            <a:pPr>
+              <a:spcAft>
+                <a:spcPts val="0"/>
+              </a:spcAft>
+            </a:pPr>
+            <a:r>
+              <a:rPr sz="1300">
+                <a:solidFill>
+                  <a:srgbClr val="6D8C97"/>
+                </a:solidFill>
+                <a:latin typeface="Consolas"/>
+              </a:rPr>
+              <a:t>  30  </a:t>
+            </a:r>
+            <a:r>
+              <a:rPr sz="1300">
+                <a:solidFill>
+                  <a:srgbClr val="6D8C97"/>
+                </a:solidFill>
+                <a:latin typeface="Consolas"/>
+              </a:rPr>
+              <a:t>// The smallest useful request: what models does this server have?</a:t>
+            </a:r>
+          </a:p>
+          <a:p>
+            <a:pPr>
+              <a:spcAft>
+                <a:spcPts val="0"/>
+              </a:spcAft>
+            </a:pPr>
+            <a:r>
+              <a:rPr sz="1300">
+                <a:solidFill>
+                  <a:srgbClr val="6D8C97"/>
+                </a:solidFill>
+                <a:latin typeface="Consolas"/>
+              </a:rPr>
+              <a:t>  31  </a:t>
+            </a:r>
+            <a:r>
+              <a:rPr sz="1300">
+                <a:solidFill>
+                  <a:srgbClr val="6D8C97"/>
+                </a:solidFill>
+                <a:latin typeface="Consolas"/>
+              </a:rPr>
+              <a:t>// 'async' means this function does something slow and can be waited for.</a:t>
+            </a:r>
+          </a:p>
+          <a:p>
+            <a:pPr>
+              <a:spcAft>
+                <a:spcPts val="0"/>
+              </a:spcAft>
+            </a:pPr>
+            <a:r>
+              <a:rPr sz="1300">
+                <a:solidFill>
+                  <a:srgbClr val="6D8C97"/>
+                </a:solidFill>
+                <a:latin typeface="Consolas"/>
+              </a:rPr>
+              <a:t>  32  </a:t>
+            </a:r>
+            <a:r>
+              <a:rPr sz="1300">
+                <a:solidFill>
+                  <a:srgbClr val="6D8C97"/>
+                </a:solidFill>
+                <a:latin typeface="Consolas"/>
+              </a:rPr>
+              <a:t>async function listModels() {</a:t>
+            </a:r>
+          </a:p>
+          <a:p>
+            <a:pPr>
+              <a:spcAft>
+                <a:spcPts val="0"/>
+              </a:spcAft>
+            </a:pPr>
+            <a:r>
+              <a:rPr sz="1300">
+                <a:solidFill>
+                  <a:srgbClr val="6D8C97"/>
+                </a:solidFill>
+                <a:latin typeface="Consolas"/>
+              </a:rPr>
+              <a:t>  33  </a:t>
+            </a:r>
+            <a:r>
+              <a:rPr sz="1300">
+                <a:solidFill>
+                  <a:srgbClr val="6D8C97"/>
+                </a:solidFill>
+                <a:latin typeface="Consolas"/>
+              </a:rPr>
+              <a:t>  const res = await fetch(AI_BASE + '/v1/models', {</a:t>
+            </a:r>
+          </a:p>
+          <a:p>
+            <a:pPr>
+              <a:spcAft>
+                <a:spcPts val="0"/>
+              </a:spcAft>
+            </a:pPr>
+            <a:r>
+              <a:rPr sz="1300">
+                <a:solidFill>
+                  <a:srgbClr val="6D8C97"/>
+                </a:solidFill>
+                <a:latin typeface="Consolas"/>
+              </a:rPr>
+              <a:t>  34  </a:t>
+            </a:r>
+            <a:r>
+              <a:rPr sz="1300">
+                <a:solidFill>
+                  <a:srgbClr val="6D8C97"/>
+                </a:solidFill>
+                <a:latin typeface="Consolas"/>
+              </a:rPr>
+              <a:t>    headers: { 'Authorization': 'Bearer ' + API_KEY }</a:t>
+            </a:r>
+          </a:p>
+          <a:p>
+            <a:pPr>
+              <a:spcAft>
+                <a:spcPts val="0"/>
+              </a:spcAft>
+            </a:pPr>
+            <a:r>
+              <a:rPr sz="1300">
+                <a:solidFill>
+                  <a:srgbClr val="6D8C97"/>
+                </a:solidFill>
+                <a:latin typeface="Consolas"/>
+              </a:rPr>
+              <a:t>  35  </a:t>
+            </a:r>
+            <a:r>
+              <a:rPr sz="1300">
+                <a:solidFill>
+                  <a:srgbClr val="6D8C97"/>
+                </a:solidFill>
+                <a:latin typeface="Consolas"/>
+              </a:rPr>
+              <a:t>  });</a:t>
+            </a:r>
+          </a:p>
+          <a:p>
+            <a:pPr>
+              <a:spcAft>
+                <a:spcPts val="0"/>
+              </a:spcAft>
+            </a:pPr>
+            <a:r>
+              <a:rPr sz="1300">
+                <a:solidFill>
+                  <a:srgbClr val="6D8C97"/>
+                </a:solidFill>
+                <a:latin typeface="Consolas"/>
+              </a:rPr>
+              <a:t>  36  </a:t>
+            </a:r>
+            <a:r>
+              <a:rPr sz="1300">
+                <a:solidFill>
+                  <a:srgbClr val="6D8C97"/>
+                </a:solidFill>
+                <a:latin typeface="Consolas"/>
+              </a:rPr>
+              <a:t>  const data = await res.json();   // the answer arrives as text; this reads it</a:t>
+            </a:r>
+          </a:p>
+          <a:p>
+            <a:pPr>
+              <a:spcAft>
+                <a:spcPts val="0"/>
+              </a:spcAft>
+            </a:pPr>
+            <a:r>
+              <a:rPr sz="1300">
+                <a:solidFill>
+                  <a:srgbClr val="6D8C97"/>
+                </a:solidFill>
+                <a:latin typeface="Consolas"/>
+              </a:rPr>
+              <a:t>  37  </a:t>
+            </a:r>
+            <a:r>
+              <a:rPr sz="1300">
+                <a:solidFill>
+                  <a:srgbClr val="6D8C97"/>
+                </a:solidFill>
+                <a:latin typeface="Consolas"/>
+              </a:rPr>
+              <a:t>  console.log('The server offers:', data.data);</a:t>
+            </a:r>
+          </a:p>
+          <a:p>
+            <a:pPr>
+              <a:spcAft>
+                <a:spcPts val="0"/>
+              </a:spcAft>
+            </a:pPr>
+            <a:r>
+              <a:rPr sz="1300">
+                <a:solidFill>
+                  <a:srgbClr val="6D8C97"/>
+                </a:solidFill>
+                <a:latin typeface="Consolas"/>
+              </a:rPr>
+              <a:t>  38  </a:t>
+            </a:r>
+            <a:r>
+              <a:rPr sz="1300">
+                <a:solidFill>
+                  <a:srgbClr val="6D8C97"/>
+                </a:solidFill>
+                <a:latin typeface="Consolas"/>
+              </a:rPr>
+              <a:t>}</a:t>
+            </a:r>
+          </a:p>
+          <a:p>
+            <a:pPr>
+              <a:spcAft>
+                <a:spcPts val="0"/>
+              </a:spcAft>
+            </a:pPr>
+            <a:r>
+              <a:rPr sz="1300">
+                <a:solidFill>
+                  <a:srgbClr val="6D8C97"/>
+                </a:solidFill>
+                <a:latin typeface="Consolas"/>
+              </a:rPr>
+              <a:t>  39  </a:t>
+            </a:r>
+            <a:r>
+              <a:rPr sz="1300" strike="sngStrike">
+                <a:solidFill>
+                  <a:srgbClr val="F3928B"/>
+                </a:solidFill>
+                <a:latin typeface="Consolas"/>
+              </a:rPr>
+              <a:t>listModels();</a:t>
+            </a:r>
+          </a:p>
+        </p:txBody>
+      </p:sp>
+      <p:sp>
+        <p:nvSpPr>
+          <p:cNvPr id="4" name="TextBox 3"/>
+          <p:cNvSpPr txBox="1"/>
+          <p:nvPr/>
+        </p:nvSpPr>
+        <p:spPr>
+          <a:xfrm>
+            <a:off x="548640" y="5623560"/>
+            <a:ext cx="11064240" cy="1051560"/>
+          </a:xfrm>
+          <a:prstGeom prst="rect">
+            <a:avLst/>
+          </a:prstGeom>
+          <a:noFill/>
+        </p:spPr>
+        <p:txBody>
+          <a:bodyPr wrap="square">
+            <a:spAutoFit/>
+          </a:bodyPr>
+          <a:lstStyle/>
+          <a:p>
+            <a:r>
+              <a:rPr sz="2000">
+                <a:solidFill>
+                  <a:srgbClr val="DCECEF"/>
+                </a:solidFill>
+              </a:rPr>
+              <a:t>Delete this line. askAI does the asking now, so the old test call is no longer needed - your file should have no listModels() call left.</a:t>
+            </a:r>
+          </a:p>
+        </p:txBody>
+      </p:sp>
+    </p:spTree>
+  </p:cSld>
+  <p:clrMapOvr>
+    <a:masterClrMapping/>
+  </p:clrMapOvr>
+</p:sld>
+</file>
+
+<file path=ppt/slides/slide52.xml><?xml version="1.0" encoding="utf-8"?>
+<p:sld xmlns:a="http://schemas.openxmlformats.org/drawingml/2006/main" xmlns:p="http://schemas.openxmlformats.org/presentationml/2006/main" xmlns:r="http://schemas.openxmlformats.org/officeDocument/2006/relationships">
+  <p:cSld>
+    <p:spTree>
+      <p:nvGrpSpPr>
+        <p:cNvPr id="1" name=""/>
+        <p:cNvGrpSpPr/>
+        <p:nvPr/>
+      </p:nvGrpSpPr>
+      <p:grpSpPr/>
+      <p:sp>
+        <p:nvSpPr>
+          <p:cNvPr id="2" name="Title 1"/>
+          <p:cNvSpPr>
+            <a:spLocks noGrp="1"/>
+          </p:cNvSpPr>
+          <p:nvPr>
+            <p:ph type="title"/>
+          </p:nvPr>
+        </p:nvSpPr>
+        <p:spPr/>
+        <p:txBody>
+          <a:bodyPr/>
+          <a:lstStyle/>
+          <a:p>
+            <a:r>
+              <a:rPr sz="3800" b="1">
+                <a:solidFill>
+                  <a:srgbClr val="1F2A37"/>
+                </a:solidFill>
+              </a:rPr>
+              <a:t>Checkpoint: a real answer</a:t>
+            </a:r>
+          </a:p>
+        </p:txBody>
+      </p:sp>
+      <p:sp>
+        <p:nvSpPr>
+          <p:cNvPr id="3" name="TextBox 2"/>
+          <p:cNvSpPr txBox="1"/>
+          <p:nvPr/>
+        </p:nvSpPr>
+        <p:spPr>
+          <a:xfrm>
+            <a:off x="868680" y="502920"/>
+            <a:ext cx="5486400" cy="457200"/>
+          </a:xfrm>
+          <a:prstGeom prst="rect">
+            <a:avLst/>
+          </a:prstGeom>
+          <a:noFill/>
+        </p:spPr>
+        <p:txBody>
+          <a:bodyPr wrap="none">
+            <a:spAutoFit/>
+          </a:bodyPr>
+          <a:lstStyle/>
+          <a:p>
+            <a:r>
+              <a:rPr sz="1500" b="1">
+                <a:solidFill>
+                  <a:srgbClr val="01AEFD"/>
+                </a:solidFill>
+              </a:rPr>
+              <a:t>CHECKPOINT - RUN IT</a:t>
+            </a:r>
+          </a:p>
+        </p:txBody>
+      </p:sp>
+      <p:sp>
+        <p:nvSpPr>
+          <p:cNvPr id="4" name="TextBox 3"/>
+          <p:cNvSpPr txBox="1"/>
+          <p:nvPr/>
+        </p:nvSpPr>
+        <p:spPr>
+          <a:xfrm>
+            <a:off x="822960" y="1828800"/>
+            <a:ext cx="10515600" cy="4206240"/>
+          </a:xfrm>
+          <a:prstGeom prst="rect">
+            <a:avLst/>
+          </a:prstGeom>
+          <a:noFill/>
+        </p:spPr>
+        <p:txBody>
+          <a:bodyPr wrap="square">
+            <a:spAutoFit/>
+          </a:bodyPr>
+          <a:lstStyle/>
+          <a:p>
+            <a:pPr>
+              <a:spcAft>
+                <a:spcPts val="1400"/>
+              </a:spcAft>
+            </a:pPr>
+            <a:r>
+              <a:rPr sz="2800">
+                <a:solidFill>
+                  <a:srgbClr val="01AEFD"/>
+                </a:solidFill>
+              </a:rPr>
+              <a:t>Press Run, ask a question and press Send. After a moment the companion replies for real. This needs your own key and the school network; the preview here shows the interface.</a:t>
+            </a:r>
+          </a:p>
+          <a:p>
+            <a:pPr>
+              <a:spcAft>
+                <a:spcPts val="1400"/>
+              </a:spcAft>
+            </a:pPr>
+            <a:r>
+              <a:rPr sz="2400">
+                <a:solidFill>
+                  <a:srgbClr val="1F2A37"/>
+                </a:solidFill>
+              </a:rPr>
+              <a:t>• Run it in the classroom, or press Show the output in the web deck.</a:t>
+            </a:r>
+          </a:p>
+          <a:p>
+            <a:pPr>
+              <a:spcAft>
+                <a:spcPts val="1400"/>
+              </a:spcAft>
+            </a:pPr>
+            <a:r>
+              <a:rPr sz="2400">
+                <a:solidFill>
+                  <a:srgbClr val="1F2A37"/>
+                </a:solidFill>
+              </a:rPr>
+              <a:t>• Everyone's screen should match this.</a:t>
+            </a:r>
+          </a:p>
+        </p:txBody>
+      </p:sp>
+    </p:spTree>
+  </p:cSld>
+  <p:clrMapOvr>
+    <a:masterClrMapping/>
+  </p:clrMapOvr>
+</p:sld>
+</file>
+
+<file path=ppt/slides/slide53.xml><?xml version="1.0" encoding="utf-8"?>
+<p:sld xmlns:a="http://schemas.openxmlformats.org/drawingml/2006/main" xmlns:p="http://schemas.openxmlformats.org/presentationml/2006/main" xmlns:r="http://schemas.openxmlformats.org/officeDocument/2006/relationships">
+  <p:cSld>
+    <p:spTree>
+      <p:nvGrpSpPr>
+        <p:cNvPr id="1" name=""/>
+        <p:cNvGrpSpPr/>
+        <p:nvPr/>
+      </p:nvGrpSpPr>
+      <p:grpSpPr/>
+      <p:sp>
+        <p:nvSpPr>
+          <p:cNvPr id="2" name="Title 1"/>
+          <p:cNvSpPr>
+            <a:spLocks noGrp="1"/>
+          </p:cNvSpPr>
+          <p:nvPr>
+            <p:ph type="title"/>
+          </p:nvPr>
+        </p:nvSpPr>
+        <p:spPr/>
+        <p:txBody>
+          <a:bodyPr/>
+          <a:lstStyle/>
+          <a:p>
+            <a:r>
+              <a:rPr sz="3800" b="1">
+                <a:solidFill>
+                  <a:srgbClr val="1F2A37"/>
+                </a:solidFill>
+              </a:rPr>
+              <a:t>Your turn</a:t>
+            </a:r>
+          </a:p>
+        </p:txBody>
+      </p:sp>
+      <p:sp>
+        <p:nvSpPr>
+          <p:cNvPr id="3" name="TextBox 2"/>
+          <p:cNvSpPr txBox="1"/>
+          <p:nvPr/>
+        </p:nvSpPr>
+        <p:spPr>
+          <a:xfrm>
+            <a:off x="822960" y="1828800"/>
+            <a:ext cx="10515600" cy="4206240"/>
+          </a:xfrm>
+          <a:prstGeom prst="rect">
+            <a:avLst/>
+          </a:prstGeom>
+          <a:noFill/>
+        </p:spPr>
+        <p:txBody>
+          <a:bodyPr wrap="square">
+            <a:spAutoFit/>
+          </a:bodyPr>
+          <a:lstStyle/>
+          <a:p>
+            <a:pPr>
+              <a:spcAft>
+                <a:spcPts val="1400"/>
+              </a:spcAft>
+            </a:pPr>
+            <a:r>
+              <a:rPr sz="2800">
+                <a:solidFill>
+                  <a:srgbClr val="01AEFD"/>
+                </a:solidFill>
+              </a:rPr>
+              <a:t>Make it answer you</a:t>
+            </a:r>
+          </a:p>
+          <a:p>
+            <a:pPr>
+              <a:spcAft>
+                <a:spcPts val="1400"/>
+              </a:spcAft>
+            </a:pPr>
+            <a:r>
+              <a:rPr sz="2400">
+                <a:solidFill>
+                  <a:srgbClr val="1F2A37"/>
+                </a:solidFill>
+              </a:rPr>
+              <a:t>• Ask it something only you would ask</a:t>
+            </a:r>
+          </a:p>
+          <a:p>
+            <a:pPr>
+              <a:spcAft>
+                <a:spcPts val="1400"/>
+              </a:spcAft>
+            </a:pPr>
+            <a:r>
+              <a:rPr sz="2400">
+                <a:solidFill>
+                  <a:srgbClr val="1F2A37"/>
+                </a:solidFill>
+              </a:rPr>
+              <a:t>• Check whether the answer is actually true</a:t>
             </a:r>
           </a:p>
         </p:txBody>

--- a/ai101/slides/week-04.pptx
+++ b/ai101/slides/week-04.pptx
@@ -56,8 +56,6 @@
     <p:sldId id="304" r:id="rId55"/>
     <p:sldId id="305" r:id="rId56"/>
     <p:sldId id="306" r:id="rId57"/>
-    <p:sldId id="307" r:id="rId58"/>
-    <p:sldId id="308" r:id="rId59"/>
   </p:sldIdLst>
   <p:sldSz cx="12191695" cy="6858000" type="screen4x3"/>
   <p:notesSz cx="6858000" cy="9144000"/>
@@ -12461,7 +12459,7 @@
                   <a:srgbClr val="01AEFD"/>
                 </a:solidFill>
               </a:rPr>
-              <a:t>In script.js   -   replace a line</a:t>
+              <a:t>In script.js   -   replace 3 lines</a:t>
             </a:r>
           </a:p>
         </p:txBody>
@@ -12537,6 +12535,56 @@
               <a:t>// In PixelPad your loop() checked 'was a key pressed?' every frame. Here you</a:t>
             </a:r>
           </a:p>
+          <a:p>
+            <a:pPr>
+              <a:spcAft>
+                <a:spcPts val="0"/>
+              </a:spcAft>
+            </a:pPr>
+            <a:r>
+              <a:rPr sz="1800">
+                <a:solidFill>
+                  <a:srgbClr val="6D8C97"/>
+                </a:solidFill>
+                <a:latin typeface="Consolas"/>
+              </a:rPr>
+              <a:t>  61  </a:t>
+            </a:r>
+            <a:r>
+              <a:rPr sz="1800" strike="sngStrike">
+                <a:solidFill>
+                  <a:srgbClr val="F3928B"/>
+                </a:solidFill>
+                <a:latin typeface="Consolas"/>
+              </a:rPr>
+              <a:t>// leave a note: when this form is submitted, run this. The browser waits.</a:t>
+            </a:r>
+          </a:p>
+          <a:p>
+            <a:pPr>
+              <a:spcAft>
+                <a:spcPts val="0"/>
+              </a:spcAft>
+            </a:pPr>
+            <a:r>
+              <a:rPr sz="1800">
+                <a:solidFill>
+                  <a:srgbClr val="6D8C97"/>
+                </a:solidFill>
+                <a:latin typeface="Consolas"/>
+              </a:rPr>
+              <a:t>  62  </a:t>
+            </a:r>
+            <a:r>
+              <a:rPr sz="1800" strike="sngStrike">
+                <a:solidFill>
+                  <a:srgbClr val="F3928B"/>
+                </a:solidFill>
+                <a:latin typeface="Consolas"/>
+              </a:rPr>
+              <a:t>composer.addEventListener('submit', function (event) {</a:t>
+            </a:r>
+          </a:p>
         </p:txBody>
       </p:sp>
       <p:sp>
@@ -12567,7 +12615,7 @@
                   <a:srgbClr val="DCECEF"/>
                 </a:solidFill>
               </a:rPr>
-              <a:t>This line changes - take the old one out; the new version is next.</a:t>
+              <a:t>These lines change - take the old ones out; the new version is next.</a:t>
             </a:r>
           </a:p>
         </p:txBody>
@@ -12626,7 +12674,7 @@
                   <a:srgbClr val="01AEFD"/>
                 </a:solidFill>
               </a:rPr>
-              <a:t>In script.js   -   replace a line</a:t>
+              <a:t>Type this into script.js   -   line 60</a:t>
             </a:r>
           </a:p>
         </p:txBody>
@@ -12693,13 +12741,13 @@
               <a:t>  60  </a:t>
             </a:r>
             <a:r>
-              <a:rPr sz="1800" strike="sngStrike">
-                <a:solidFill>
-                  <a:srgbClr val="F3928B"/>
-                </a:solidFill>
-                <a:latin typeface="Consolas"/>
-              </a:rPr>
-              <a:t>// leave a note: when this form is submitted, run this. The browser waits.</a:t>
+              <a:rPr sz="1800">
+                <a:solidFill>
+                  <a:srgbClr val="7FE0A0"/>
+                </a:solidFill>
+                <a:latin typeface="Consolas"/>
+              </a:rPr>
+              <a:t>// The browser calls this when the form is submitted.</a:t>
             </a:r>
           </a:p>
         </p:txBody>
@@ -12732,7 +12780,7 @@
                   <a:srgbClr val="DCECEF"/>
                 </a:solidFill>
               </a:rPr>
-              <a:t>This line changes - take the old one out; the new version is next.</a:t>
+              <a:t>A comment: the browser calls this when the form is submitted.</a:t>
             </a:r>
           </a:p>
         </p:txBody>
@@ -12918,7 +12966,7 @@
                   <a:srgbClr val="01AEFD"/>
                 </a:solidFill>
               </a:rPr>
-              <a:t>In script.js   -   replace a line</a:t>
+              <a:t>Type this into script.js   -   line 61</a:t>
             </a:r>
           </a:p>
         </p:txBody>
@@ -12985,13 +13033,38 @@
               <a:t>  60  </a:t>
             </a:r>
             <a:r>
-              <a:rPr sz="1800" strike="sngStrike">
-                <a:solidFill>
-                  <a:srgbClr val="F3928B"/>
-                </a:solidFill>
-                <a:latin typeface="Consolas"/>
-              </a:rPr>
-              <a:t>composer.addEventListener('submit', function (event) {</a:t>
+              <a:rPr sz="1800">
+                <a:solidFill>
+                  <a:srgbClr val="6D8C97"/>
+                </a:solidFill>
+                <a:latin typeface="Consolas"/>
+              </a:rPr>
+              <a:t>// The browser calls this when the form is submitted.</a:t>
+            </a:r>
+          </a:p>
+          <a:p>
+            <a:pPr>
+              <a:spcAft>
+                <a:spcPts val="0"/>
+              </a:spcAft>
+            </a:pPr>
+            <a:r>
+              <a:rPr sz="1800">
+                <a:solidFill>
+                  <a:srgbClr val="6D8C97"/>
+                </a:solidFill>
+                <a:latin typeface="Consolas"/>
+              </a:rPr>
+              <a:t>  61  </a:t>
+            </a:r>
+            <a:r>
+              <a:rPr sz="1800">
+                <a:solidFill>
+                  <a:srgbClr val="7FE0A0"/>
+                </a:solidFill>
+                <a:latin typeface="Consolas"/>
+              </a:rPr>
+              <a:t>composer.addEventListener('submit', async function (event) {</a:t>
             </a:r>
           </a:p>
         </p:txBody>
@@ -13024,7 +13097,7 @@
                   <a:srgbClr val="DCECEF"/>
                 </a:solidFill>
               </a:rPr>
-              <a:t>This line changes - take the old one out; the new version is next.</a:t>
+              <a:t>Add async so we are allowed to await the slow AI call inside.</a:t>
             </a:r>
           </a:p>
         </p:txBody>
@@ -13083,7 +13156,7 @@
                   <a:srgbClr val="01AEFD"/>
                 </a:solidFill>
               </a:rPr>
-              <a:t>Type this into script.js   -   line 60</a:t>
+              <a:t>In script.js   -   replace a line</a:t>
             </a:r>
           </a:p>
         </p:txBody>
@@ -13152,11 +13225,186 @@
             <a:r>
               <a:rPr sz="1800">
                 <a:solidFill>
-                  <a:srgbClr val="7FE0A0"/>
+                  <a:srgbClr val="6D8C97"/>
                 </a:solidFill>
                 <a:latin typeface="Consolas"/>
               </a:rPr>
               <a:t>// The browser calls this when the form is submitted.</a:t>
+            </a:r>
+          </a:p>
+          <a:p>
+            <a:pPr>
+              <a:spcAft>
+                <a:spcPts val="0"/>
+              </a:spcAft>
+            </a:pPr>
+            <a:r>
+              <a:rPr sz="1800">
+                <a:solidFill>
+                  <a:srgbClr val="6D8C97"/>
+                </a:solidFill>
+                <a:latin typeface="Consolas"/>
+              </a:rPr>
+              <a:t>  61  </a:t>
+            </a:r>
+            <a:r>
+              <a:rPr sz="1800">
+                <a:solidFill>
+                  <a:srgbClr val="6D8C97"/>
+                </a:solidFill>
+                <a:latin typeface="Consolas"/>
+              </a:rPr>
+              <a:t>composer.addEventListener('submit', async function (event) {</a:t>
+            </a:r>
+          </a:p>
+          <a:p>
+            <a:pPr>
+              <a:spcAft>
+                <a:spcPts val="0"/>
+              </a:spcAft>
+            </a:pPr>
+            <a:r>
+              <a:rPr sz="1800">
+                <a:solidFill>
+                  <a:srgbClr val="6D8C97"/>
+                </a:solidFill>
+                <a:latin typeface="Consolas"/>
+              </a:rPr>
+              <a:t>  62  </a:t>
+            </a:r>
+            <a:r>
+              <a:rPr sz="1800">
+                <a:solidFill>
+                  <a:srgbClr val="6D8C97"/>
+                </a:solidFill>
+                <a:latin typeface="Consolas"/>
+              </a:rPr>
+              <a:t>  event.preventDefault();</a:t>
+            </a:r>
+          </a:p>
+          <a:p>
+            <a:pPr>
+              <a:spcAft>
+                <a:spcPts val="0"/>
+              </a:spcAft>
+            </a:pPr>
+            <a:r>
+              <a:rPr sz="1800">
+                <a:solidFill>
+                  <a:srgbClr val="6D8C97"/>
+                </a:solidFill>
+                <a:latin typeface="Consolas"/>
+              </a:rPr>
+              <a:t>  63  </a:t>
+            </a:r>
+            <a:r>
+              <a:rPr sz="1800">
+                <a:solidFill>
+                  <a:srgbClr val="6D8C97"/>
+                </a:solidFill>
+                <a:latin typeface="Consolas"/>
+              </a:rPr>
+              <a:t>  const text = promptBox.value.trim();</a:t>
+            </a:r>
+          </a:p>
+          <a:p>
+            <a:pPr>
+              <a:spcAft>
+                <a:spcPts val="0"/>
+              </a:spcAft>
+            </a:pPr>
+            <a:r>
+              <a:rPr sz="1800">
+                <a:solidFill>
+                  <a:srgbClr val="6D8C97"/>
+                </a:solidFill>
+                <a:latin typeface="Consolas"/>
+              </a:rPr>
+              <a:t>  64  </a:t>
+            </a:r>
+            <a:r>
+              <a:rPr sz="1800">
+                <a:solidFill>
+                  <a:srgbClr val="6D8C97"/>
+                </a:solidFill>
+                <a:latin typeface="Consolas"/>
+              </a:rPr>
+              <a:t>  if (text === '') { return; }</a:t>
+            </a:r>
+          </a:p>
+          <a:p>
+            <a:pPr>
+              <a:spcAft>
+                <a:spcPts val="0"/>
+              </a:spcAft>
+            </a:pPr>
+            <a:r>
+              <a:rPr sz="1800">
+                <a:solidFill>
+                  <a:srgbClr val="6D8C97"/>
+                </a:solidFill>
+                <a:latin typeface="Consolas"/>
+              </a:rPr>
+              <a:t>  65  </a:t>
+            </a:r>
+            <a:r>
+              <a:rPr sz="1800">
+                <a:solidFill>
+                  <a:srgbClr val="6D8C97"/>
+                </a:solidFill>
+                <a:latin typeface="Consolas"/>
+              </a:rPr>
+              <a:t>  promptBox.value = '';</a:t>
+            </a:r>
+          </a:p>
+          <a:p>
+            <a:pPr>
+              <a:spcAft>
+                <a:spcPts val="0"/>
+              </a:spcAft>
+            </a:pPr>
+            <a:r>
+              <a:rPr sz="1800">
+                <a:solidFill>
+                  <a:srgbClr val="6D8C97"/>
+                </a:solidFill>
+                <a:latin typeface="Consolas"/>
+              </a:rPr>
+              <a:t>  66  </a:t>
+            </a:r>
+            <a:r>
+              <a:rPr sz="1800">
+                <a:solidFill>
+                  <a:srgbClr val="6D8C97"/>
+                </a:solidFill>
+                <a:latin typeface="Consolas"/>
+              </a:rPr>
+              <a:t>  addLine('You', text);</a:t>
+            </a:r>
+          </a:p>
+          <a:p>
+            <a:pPr>
+              <a:spcAft>
+                <a:spcPts val="0"/>
+              </a:spcAft>
+            </a:pPr>
+            <a:r>
+              <a:rPr sz="1800">
+                <a:solidFill>
+                  <a:srgbClr val="6D8C97"/>
+                </a:solidFill>
+                <a:latin typeface="Consolas"/>
+              </a:rPr>
+              <a:t>  67  </a:t>
+            </a:r>
+            <a:r>
+              <a:rPr sz="1800" strike="sngStrike">
+                <a:solidFill>
+                  <a:srgbClr val="F3928B"/>
+                </a:solidFill>
+                <a:latin typeface="Consolas"/>
+              </a:rPr>
+              <a:t>  addLine('Companion', 'You said: ' + text);   // a pretend answer, for now</a:t>
             </a:r>
           </a:p>
         </p:txBody>
@@ -13189,7 +13437,7 @@
                   <a:srgbClr val="DCECEF"/>
                 </a:solidFill>
               </a:rPr>
-              <a:t>A comment: the browser calls this when the form is submitted.</a:t>
+              <a:t>This line changes - take the old one out; the new version is next.</a:t>
             </a:r>
           </a:p>
         </p:txBody>
@@ -13248,7 +13496,7 @@
                   <a:srgbClr val="01AEFD"/>
                 </a:solidFill>
               </a:rPr>
-              <a:t>Type this into script.js   -   line 61</a:t>
+              <a:t>Type this into script.js   -   line 67</a:t>
             </a:r>
           </a:p>
         </p:txBody>
@@ -13342,11 +13590,161 @@
             <a:r>
               <a:rPr sz="1800">
                 <a:solidFill>
+                  <a:srgbClr val="6D8C97"/>
+                </a:solidFill>
+                <a:latin typeface="Consolas"/>
+              </a:rPr>
+              <a:t>composer.addEventListener('submit', async function (event) {</a:t>
+            </a:r>
+          </a:p>
+          <a:p>
+            <a:pPr>
+              <a:spcAft>
+                <a:spcPts val="0"/>
+              </a:spcAft>
+            </a:pPr>
+            <a:r>
+              <a:rPr sz="1800">
+                <a:solidFill>
+                  <a:srgbClr val="6D8C97"/>
+                </a:solidFill>
+                <a:latin typeface="Consolas"/>
+              </a:rPr>
+              <a:t>  62  </a:t>
+            </a:r>
+            <a:r>
+              <a:rPr sz="1800">
+                <a:solidFill>
+                  <a:srgbClr val="6D8C97"/>
+                </a:solidFill>
+                <a:latin typeface="Consolas"/>
+              </a:rPr>
+              <a:t>  event.preventDefault();</a:t>
+            </a:r>
+          </a:p>
+          <a:p>
+            <a:pPr>
+              <a:spcAft>
+                <a:spcPts val="0"/>
+              </a:spcAft>
+            </a:pPr>
+            <a:r>
+              <a:rPr sz="1800">
+                <a:solidFill>
+                  <a:srgbClr val="6D8C97"/>
+                </a:solidFill>
+                <a:latin typeface="Consolas"/>
+              </a:rPr>
+              <a:t>  63  </a:t>
+            </a:r>
+            <a:r>
+              <a:rPr sz="1800">
+                <a:solidFill>
+                  <a:srgbClr val="6D8C97"/>
+                </a:solidFill>
+                <a:latin typeface="Consolas"/>
+              </a:rPr>
+              <a:t>  const text = promptBox.value.trim();</a:t>
+            </a:r>
+          </a:p>
+          <a:p>
+            <a:pPr>
+              <a:spcAft>
+                <a:spcPts val="0"/>
+              </a:spcAft>
+            </a:pPr>
+            <a:r>
+              <a:rPr sz="1800">
+                <a:solidFill>
+                  <a:srgbClr val="6D8C97"/>
+                </a:solidFill>
+                <a:latin typeface="Consolas"/>
+              </a:rPr>
+              <a:t>  64  </a:t>
+            </a:r>
+            <a:r>
+              <a:rPr sz="1800">
+                <a:solidFill>
+                  <a:srgbClr val="6D8C97"/>
+                </a:solidFill>
+                <a:latin typeface="Consolas"/>
+              </a:rPr>
+              <a:t>  if (text === '') { return; }</a:t>
+            </a:r>
+          </a:p>
+          <a:p>
+            <a:pPr>
+              <a:spcAft>
+                <a:spcPts val="0"/>
+              </a:spcAft>
+            </a:pPr>
+            <a:r>
+              <a:rPr sz="1800">
+                <a:solidFill>
+                  <a:srgbClr val="6D8C97"/>
+                </a:solidFill>
+                <a:latin typeface="Consolas"/>
+              </a:rPr>
+              <a:t>  65  </a:t>
+            </a:r>
+            <a:r>
+              <a:rPr sz="1800">
+                <a:solidFill>
+                  <a:srgbClr val="6D8C97"/>
+                </a:solidFill>
+                <a:latin typeface="Consolas"/>
+              </a:rPr>
+              <a:t>  promptBox.value = '';</a:t>
+            </a:r>
+          </a:p>
+          <a:p>
+            <a:pPr>
+              <a:spcAft>
+                <a:spcPts val="0"/>
+              </a:spcAft>
+            </a:pPr>
+            <a:r>
+              <a:rPr sz="1800">
+                <a:solidFill>
+                  <a:srgbClr val="6D8C97"/>
+                </a:solidFill>
+                <a:latin typeface="Consolas"/>
+              </a:rPr>
+              <a:t>  66  </a:t>
+            </a:r>
+            <a:r>
+              <a:rPr sz="1800">
+                <a:solidFill>
+                  <a:srgbClr val="6D8C97"/>
+                </a:solidFill>
+                <a:latin typeface="Consolas"/>
+              </a:rPr>
+              <a:t>  addLine('You', text);</a:t>
+            </a:r>
+          </a:p>
+          <a:p>
+            <a:pPr>
+              <a:spcAft>
+                <a:spcPts val="0"/>
+              </a:spcAft>
+            </a:pPr>
+            <a:r>
+              <a:rPr sz="1800">
+                <a:solidFill>
+                  <a:srgbClr val="6D8C97"/>
+                </a:solidFill>
+                <a:latin typeface="Consolas"/>
+              </a:rPr>
+              <a:t>  67  </a:t>
+            </a:r>
+            <a:r>
+              <a:rPr sz="1800">
+                <a:solidFill>
                   <a:srgbClr val="7FE0A0"/>
                 </a:solidFill>
                 <a:latin typeface="Consolas"/>
               </a:rPr>
-              <a:t>composer.addEventListener('submit', async function (event) {</a:t>
+              <a:t>  addLine('Companion', 'thinking...');</a:t>
             </a:r>
           </a:p>
         </p:txBody>
@@ -13379,7 +13777,7 @@
                   <a:srgbClr val="DCECEF"/>
                 </a:solidFill>
               </a:rPr>
-              <a:t>Add async so we are allowed to await the slow AI call inside.</a:t>
+              <a:t>Change the pretend reply to a 'thinking...' line while we wait.</a:t>
             </a:r>
           </a:p>
         </p:txBody>
@@ -13438,7 +13836,7 @@
                   <a:srgbClr val="01AEFD"/>
                 </a:solidFill>
               </a:rPr>
-              <a:t>In script.js   -   replace a line</a:t>
+              <a:t>Type this into script.js   -   line 68</a:t>
             </a:r>
           </a:p>
         </p:txBody>
@@ -13680,13 +14078,38 @@
               <a:t>  67  </a:t>
             </a:r>
             <a:r>
-              <a:rPr sz="1800" strike="sngStrike">
-                <a:solidFill>
-                  <a:srgbClr val="F3928B"/>
-                </a:solidFill>
-                <a:latin typeface="Consolas"/>
-              </a:rPr>
-              <a:t>  addLine('Companion', 'You said: ' + text);   // a pretend answer, for now</a:t>
+              <a:rPr sz="1800">
+                <a:solidFill>
+                  <a:srgbClr val="6D8C97"/>
+                </a:solidFill>
+                <a:latin typeface="Consolas"/>
+              </a:rPr>
+              <a:t>  addLine('Companion', 'thinking...');</a:t>
+            </a:r>
+          </a:p>
+          <a:p>
+            <a:pPr>
+              <a:spcAft>
+                <a:spcPts val="0"/>
+              </a:spcAft>
+            </a:pPr>
+            <a:r>
+              <a:rPr sz="1800">
+                <a:solidFill>
+                  <a:srgbClr val="6D8C97"/>
+                </a:solidFill>
+                <a:latin typeface="Consolas"/>
+              </a:rPr>
+              <a:t>  68  </a:t>
+            </a:r>
+            <a:r>
+              <a:rPr sz="1800">
+                <a:solidFill>
+                  <a:srgbClr val="7FE0A0"/>
+                </a:solidFill>
+                <a:latin typeface="Consolas"/>
+              </a:rPr>
+              <a:t>  const reply = await askAI(text);       // this is the slow bit</a:t>
             </a:r>
           </a:p>
         </p:txBody>
@@ -13719,7 +14142,7 @@
                   <a:srgbClr val="DCECEF"/>
                 </a:solidFill>
               </a:rPr>
-              <a:t>This line changes - take the old one out; the new version is next.</a:t>
+              <a:t>await askAI(text): the slow bit - ask the AI and wait for the answer.</a:t>
             </a:r>
           </a:p>
         </p:txBody>
@@ -13733,6 +14156,266 @@
 </file>
 
 <file path=ppt/slides/slide44.xml><?xml version="1.0" encoding="utf-8"?>
+<p:sld xmlns:a="http://schemas.openxmlformats.org/drawingml/2006/main" xmlns:p="http://schemas.openxmlformats.org/presentationml/2006/main" xmlns:r="http://schemas.openxmlformats.org/officeDocument/2006/relationships">
+  <p:cSld>
+    <p:spTree>
+      <p:nvGrpSpPr>
+        <p:cNvPr id="1" name=""/>
+        <p:cNvGrpSpPr/>
+        <p:nvPr/>
+      </p:nvGrpSpPr>
+      <p:grpSpPr/>
+      <p:sp>
+        <p:nvSpPr>
+          <p:cNvPr id="2" name="Title 1"/>
+          <p:cNvSpPr>
+            <a:spLocks noGrp="1"/>
+          </p:cNvSpPr>
+          <p:nvPr>
+            <p:ph type="title"/>
+          </p:nvPr>
+        </p:nvSpPr>
+        <p:spPr/>
+        <p:txBody>
+          <a:bodyPr/>
+          <a:lstStyle/>
+          <a:p>
+            <a:r>
+              <a:rPr sz="3800" b="1">
+                <a:solidFill>
+                  <a:srgbClr val="1F2A37"/>
+                </a:solidFill>
+              </a:rPr>
+              <a:t>.lastChild</a:t>
+            </a:r>
+          </a:p>
+        </p:txBody>
+      </p:sp>
+      <p:sp>
+        <p:nvSpPr>
+          <p:cNvPr id="3" name="TextBox 2"/>
+          <p:cNvSpPr txBox="1"/>
+          <p:nvPr/>
+        </p:nvSpPr>
+        <p:spPr>
+          <a:xfrm>
+            <a:off x="868680" y="502920"/>
+            <a:ext cx="5486400" cy="457200"/>
+          </a:xfrm>
+          <a:prstGeom prst="rect">
+            <a:avLst/>
+          </a:prstGeom>
+          <a:noFill/>
+        </p:spPr>
+        <p:txBody>
+          <a:bodyPr wrap="none">
+            <a:spAutoFit/>
+          </a:bodyPr>
+          <a:lstStyle/>
+          <a:p>
+            <a:r>
+              <a:rPr sz="1500" b="1">
+                <a:solidFill>
+                  <a:srgbClr val="01AEFD"/>
+                </a:solidFill>
+              </a:rPr>
+              <a:t>JAVASCRIPT</a:t>
+            </a:r>
+          </a:p>
+        </p:txBody>
+      </p:sp>
+      <p:sp>
+        <p:nvSpPr>
+          <p:cNvPr id="4" name="TextBox 3"/>
+          <p:cNvSpPr txBox="1"/>
+          <p:nvPr/>
+        </p:nvSpPr>
+        <p:spPr>
+          <a:xfrm>
+            <a:off x="822960" y="1828800"/>
+            <a:ext cx="10515600" cy="4206240"/>
+          </a:xfrm>
+          <a:prstGeom prst="rect">
+            <a:avLst/>
+          </a:prstGeom>
+          <a:noFill/>
+        </p:spPr>
+        <p:txBody>
+          <a:bodyPr wrap="square">
+            <a:spAutoFit/>
+          </a:bodyPr>
+          <a:lstStyle/>
+          <a:p>
+            <a:pPr>
+              <a:spcAft>
+                <a:spcPts val="1400"/>
+              </a:spcAft>
+            </a:pPr>
+            <a:r>
+              <a:rPr sz="2400">
+                <a:solidFill>
+                  <a:srgbClr val="1F2A37"/>
+                </a:solidFill>
+              </a:rPr>
+              <a:t>• A box's LAST child - the newest thing added inside it.</a:t>
+            </a:r>
+          </a:p>
+          <a:p>
+            <a:pPr>
+              <a:spcAft>
+                <a:spcPts val="1400"/>
+              </a:spcAft>
+            </a:pPr>
+            <a:r>
+              <a:rPr sz="2400">
+                <a:solidFill>
+                  <a:srgbClr val="1F2A37"/>
+                </a:solidFill>
+              </a:rPr>
+              <a:t>• chat.lastChild is the message you just put in.</a:t>
+            </a:r>
+          </a:p>
+        </p:txBody>
+      </p:sp>
+    </p:spTree>
+  </p:cSld>
+  <p:clrMapOvr>
+    <a:masterClrMapping/>
+  </p:clrMapOvr>
+</p:sld>
+</file>
+
+<file path=ppt/slides/slide45.xml><?xml version="1.0" encoding="utf-8"?>
+<p:sld xmlns:a="http://schemas.openxmlformats.org/drawingml/2006/main" xmlns:p="http://schemas.openxmlformats.org/presentationml/2006/main" xmlns:r="http://schemas.openxmlformats.org/officeDocument/2006/relationships">
+  <p:cSld>
+    <p:spTree>
+      <p:nvGrpSpPr>
+        <p:cNvPr id="1" name=""/>
+        <p:cNvGrpSpPr/>
+        <p:nvPr/>
+      </p:nvGrpSpPr>
+      <p:grpSpPr/>
+      <p:sp>
+        <p:nvSpPr>
+          <p:cNvPr id="2" name="Title 1"/>
+          <p:cNvSpPr>
+            <a:spLocks noGrp="1"/>
+          </p:cNvSpPr>
+          <p:nvPr>
+            <p:ph type="title"/>
+          </p:nvPr>
+        </p:nvSpPr>
+        <p:spPr/>
+        <p:txBody>
+          <a:bodyPr/>
+          <a:lstStyle/>
+          <a:p>
+            <a:r>
+              <a:rPr sz="3800" b="1">
+                <a:solidFill>
+                  <a:srgbClr val="1F2A37"/>
+                </a:solidFill>
+              </a:rPr>
+              <a:t>.remove()</a:t>
+            </a:r>
+          </a:p>
+        </p:txBody>
+      </p:sp>
+      <p:sp>
+        <p:nvSpPr>
+          <p:cNvPr id="3" name="TextBox 2"/>
+          <p:cNvSpPr txBox="1"/>
+          <p:nvPr/>
+        </p:nvSpPr>
+        <p:spPr>
+          <a:xfrm>
+            <a:off x="868680" y="502920"/>
+            <a:ext cx="5486400" cy="457200"/>
+          </a:xfrm>
+          <a:prstGeom prst="rect">
+            <a:avLst/>
+          </a:prstGeom>
+          <a:noFill/>
+        </p:spPr>
+        <p:txBody>
+          <a:bodyPr wrap="none">
+            <a:spAutoFit/>
+          </a:bodyPr>
+          <a:lstStyle/>
+          <a:p>
+            <a:r>
+              <a:rPr sz="1500" b="1">
+                <a:solidFill>
+                  <a:srgbClr val="01AEFD"/>
+                </a:solidFill>
+              </a:rPr>
+              <a:t>JAVASCRIPT</a:t>
+            </a:r>
+          </a:p>
+        </p:txBody>
+      </p:sp>
+      <p:sp>
+        <p:nvSpPr>
+          <p:cNvPr id="4" name="TextBox 3"/>
+          <p:cNvSpPr txBox="1"/>
+          <p:nvPr/>
+        </p:nvSpPr>
+        <p:spPr>
+          <a:xfrm>
+            <a:off x="822960" y="1828800"/>
+            <a:ext cx="10515600" cy="4206240"/>
+          </a:xfrm>
+          <a:prstGeom prst="rect">
+            <a:avLst/>
+          </a:prstGeom>
+          <a:noFill/>
+        </p:spPr>
+        <p:txBody>
+          <a:bodyPr wrap="square">
+            <a:spAutoFit/>
+          </a:bodyPr>
+          <a:lstStyle/>
+          <a:p>
+            <a:pPr>
+              <a:spcAft>
+                <a:spcPts val="1400"/>
+              </a:spcAft>
+            </a:pPr>
+            <a:r>
+              <a:rPr sz="2400">
+                <a:solidFill>
+                  <a:srgbClr val="1F2A37"/>
+                </a:solidFill>
+              </a:rPr>
+              <a:t>• Deletes an element from the page.</a:t>
+            </a:r>
+          </a:p>
+          <a:p>
+            <a:pPr>
+              <a:spcAft>
+                <a:spcPts val="1400"/>
+              </a:spcAft>
+            </a:pPr>
+            <a:r>
+              <a:rPr sz="2400">
+                <a:solidFill>
+                  <a:srgbClr val="1F2A37"/>
+                </a:solidFill>
+              </a:rPr>
+              <a:t>• chat.lastChild.remove() takes the last message back off.</a:t>
+            </a:r>
+          </a:p>
+        </p:txBody>
+      </p:sp>
+    </p:spTree>
+  </p:cSld>
+  <p:clrMapOvr>
+    <a:masterClrMapping/>
+  </p:clrMapOvr>
+</p:sld>
+</file>
+
+<file path=ppt/slides/slide46.xml><?xml version="1.0" encoding="utf-8"?>
 <p:sld xmlns:a="http://schemas.openxmlformats.org/drawingml/2006/main" xmlns:p="http://schemas.openxmlformats.org/presentationml/2006/main" xmlns:r="http://schemas.openxmlformats.org/officeDocument/2006/relationships">
   <p:cSld>
     <p:bg>
@@ -13778,7 +14461,7 @@
                   <a:srgbClr val="01AEFD"/>
                 </a:solidFill>
               </a:rPr>
-              <a:t>Type this into script.js   -   line 67</a:t>
+              <a:t>Type this into script.js   -   line 69</a:t>
             </a:r>
           </a:p>
         </p:txBody>
@@ -13811,7 +14494,7 @@
               </a:spcAft>
             </a:pPr>
             <a:r>
-              <a:rPr sz="1800">
+              <a:rPr sz="1300">
                 <a:solidFill>
                   <a:srgbClr val="6D8C97"/>
                 </a:solidFill>
@@ -13820,7 +14503,7 @@
               <a:t>  59  </a:t>
             </a:r>
             <a:r>
-              <a:rPr sz="1800">
+              <a:rPr sz="1300">
                 <a:solidFill>
                   <a:srgbClr val="6D8C97"/>
                 </a:solidFill>
@@ -13836,7 +14519,7 @@
               </a:spcAft>
             </a:pPr>
             <a:r>
-              <a:rPr sz="1800">
+              <a:rPr sz="1300">
                 <a:solidFill>
                   <a:srgbClr val="6D8C97"/>
                 </a:solidFill>
@@ -13845,7 +14528,7 @@
               <a:t>  60  </a:t>
             </a:r>
             <a:r>
-              <a:rPr sz="1800">
+              <a:rPr sz="1300">
                 <a:solidFill>
                   <a:srgbClr val="6D8C97"/>
                 </a:solidFill>
@@ -13861,7 +14544,7 @@
               </a:spcAft>
             </a:pPr>
             <a:r>
-              <a:rPr sz="1800">
+              <a:rPr sz="1300">
                 <a:solidFill>
                   <a:srgbClr val="6D8C97"/>
                 </a:solidFill>
@@ -13870,7 +14553,7 @@
               <a:t>  61  </a:t>
             </a:r>
             <a:r>
-              <a:rPr sz="1800">
+              <a:rPr sz="1300">
                 <a:solidFill>
                   <a:srgbClr val="6D8C97"/>
                 </a:solidFill>
@@ -13886,7 +14569,7 @@
               </a:spcAft>
             </a:pPr>
             <a:r>
-              <a:rPr sz="1800">
+              <a:rPr sz="1300">
                 <a:solidFill>
                   <a:srgbClr val="6D8C97"/>
                 </a:solidFill>
@@ -13895,7 +14578,7 @@
               <a:t>  62  </a:t>
             </a:r>
             <a:r>
-              <a:rPr sz="1800">
+              <a:rPr sz="1300">
                 <a:solidFill>
                   <a:srgbClr val="6D8C97"/>
                 </a:solidFill>
@@ -13911,7 +14594,7 @@
               </a:spcAft>
             </a:pPr>
             <a:r>
-              <a:rPr sz="1800">
+              <a:rPr sz="1300">
                 <a:solidFill>
                   <a:srgbClr val="6D8C97"/>
                 </a:solidFill>
@@ -13920,7 +14603,7 @@
               <a:t>  63  </a:t>
             </a:r>
             <a:r>
-              <a:rPr sz="1800">
+              <a:rPr sz="1300">
                 <a:solidFill>
                   <a:srgbClr val="6D8C97"/>
                 </a:solidFill>
@@ -13936,7 +14619,7 @@
               </a:spcAft>
             </a:pPr>
             <a:r>
-              <a:rPr sz="1800">
+              <a:rPr sz="1300">
                 <a:solidFill>
                   <a:srgbClr val="6D8C97"/>
                 </a:solidFill>
@@ -13945,7 +14628,7 @@
               <a:t>  64  </a:t>
             </a:r>
             <a:r>
-              <a:rPr sz="1800">
+              <a:rPr sz="1300">
                 <a:solidFill>
                   <a:srgbClr val="6D8C97"/>
                 </a:solidFill>
@@ -13961,7 +14644,7 @@
               </a:spcAft>
             </a:pPr>
             <a:r>
-              <a:rPr sz="1800">
+              <a:rPr sz="1300">
                 <a:solidFill>
                   <a:srgbClr val="6D8C97"/>
                 </a:solidFill>
@@ -13970,7 +14653,7 @@
               <a:t>  65  </a:t>
             </a:r>
             <a:r>
-              <a:rPr sz="1800">
+              <a:rPr sz="1300">
                 <a:solidFill>
                   <a:srgbClr val="6D8C97"/>
                 </a:solidFill>
@@ -13986,7 +14669,7 @@
               </a:spcAft>
             </a:pPr>
             <a:r>
-              <a:rPr sz="1800">
+              <a:rPr sz="1300">
                 <a:solidFill>
                   <a:srgbClr val="6D8C97"/>
                 </a:solidFill>
@@ -13995,7 +14678,7 @@
               <a:t>  66  </a:t>
             </a:r>
             <a:r>
-              <a:rPr sz="1800">
+              <a:rPr sz="1300">
                 <a:solidFill>
                   <a:srgbClr val="6D8C97"/>
                 </a:solidFill>
@@ -14011,7 +14694,7 @@
               </a:spcAft>
             </a:pPr>
             <a:r>
-              <a:rPr sz="1800">
+              <a:rPr sz="1300">
                 <a:solidFill>
                   <a:srgbClr val="6D8C97"/>
                 </a:solidFill>
@@ -14020,13 +14703,63 @@
               <a:t>  67  </a:t>
             </a:r>
             <a:r>
-              <a:rPr sz="1800">
+              <a:rPr sz="1300">
+                <a:solidFill>
+                  <a:srgbClr val="6D8C97"/>
+                </a:solidFill>
+                <a:latin typeface="Consolas"/>
+              </a:rPr>
+              <a:t>  addLine('Companion', 'thinking...');</a:t>
+            </a:r>
+          </a:p>
+          <a:p>
+            <a:pPr>
+              <a:spcAft>
+                <a:spcPts val="0"/>
+              </a:spcAft>
+            </a:pPr>
+            <a:r>
+              <a:rPr sz="1300">
+                <a:solidFill>
+                  <a:srgbClr val="6D8C97"/>
+                </a:solidFill>
+                <a:latin typeface="Consolas"/>
+              </a:rPr>
+              <a:t>  68  </a:t>
+            </a:r>
+            <a:r>
+              <a:rPr sz="1300">
+                <a:solidFill>
+                  <a:srgbClr val="6D8C97"/>
+                </a:solidFill>
+                <a:latin typeface="Consolas"/>
+              </a:rPr>
+              <a:t>  const reply = await askAI(text);       // this is the slow bit</a:t>
+            </a:r>
+          </a:p>
+          <a:p>
+            <a:pPr>
+              <a:spcAft>
+                <a:spcPts val="0"/>
+              </a:spcAft>
+            </a:pPr>
+            <a:r>
+              <a:rPr sz="1300">
+                <a:solidFill>
+                  <a:srgbClr val="6D8C97"/>
+                </a:solidFill>
+                <a:latin typeface="Consolas"/>
+              </a:rPr>
+              <a:t>  69  </a:t>
+            </a:r>
+            <a:r>
+              <a:rPr sz="1300">
                 <a:solidFill>
                   <a:srgbClr val="7FE0A0"/>
                 </a:solidFill>
                 <a:latin typeface="Consolas"/>
               </a:rPr>
-              <a:t>  addLine('Companion', 'thinking...');</a:t>
+              <a:t>  chat.lastChild.remove();               // take the 'thinking' line away</a:t>
             </a:r>
           </a:p>
         </p:txBody>
@@ -14059,7 +14792,7 @@
                   <a:srgbClr val="DCECEF"/>
                 </a:solidFill>
               </a:rPr>
-              <a:t>Change the pretend reply to a 'thinking...' line while we wait.</a:t>
+              <a:t>Remove the 'thinking...' line now the real answer is here.</a:t>
             </a:r>
           </a:p>
         </p:txBody>
@@ -14072,7 +14805,7 @@
 </p:sld>
 </file>
 
-<file path=ppt/slides/slide45.xml><?xml version="1.0" encoding="utf-8"?>
+<file path=ppt/slides/slide47.xml><?xml version="1.0" encoding="utf-8"?>
 <p:sld xmlns:a="http://schemas.openxmlformats.org/drawingml/2006/main" xmlns:p="http://schemas.openxmlformats.org/presentationml/2006/main" xmlns:r="http://schemas.openxmlformats.org/officeDocument/2006/relationships">
   <p:cSld>
     <p:bg>
@@ -14118,7 +14851,7 @@
                   <a:srgbClr val="01AEFD"/>
                 </a:solidFill>
               </a:rPr>
-              <a:t>Type this into script.js   -   line 68</a:t>
+              <a:t>Type this into script.js   -   line 70</a:t>
             </a:r>
           </a:p>
         </p:txBody>
@@ -14151,7 +14884,7 @@
               </a:spcAft>
             </a:pPr>
             <a:r>
-              <a:rPr sz="1800">
+              <a:rPr sz="1300">
                 <a:solidFill>
                   <a:srgbClr val="6D8C97"/>
                 </a:solidFill>
@@ -14160,7 +14893,7 @@
               <a:t>  59  </a:t>
             </a:r>
             <a:r>
-              <a:rPr sz="1800">
+              <a:rPr sz="1300">
                 <a:solidFill>
                   <a:srgbClr val="6D8C97"/>
                 </a:solidFill>
@@ -14176,7 +14909,7 @@
               </a:spcAft>
             </a:pPr>
             <a:r>
-              <a:rPr sz="1800">
+              <a:rPr sz="1300">
                 <a:solidFill>
                   <a:srgbClr val="6D8C97"/>
                 </a:solidFill>
@@ -14185,7 +14918,7 @@
               <a:t>  60  </a:t>
             </a:r>
             <a:r>
-              <a:rPr sz="1800">
+              <a:rPr sz="1300">
                 <a:solidFill>
                   <a:srgbClr val="6D8C97"/>
                 </a:solidFill>
@@ -14201,7 +14934,7 @@
               </a:spcAft>
             </a:pPr>
             <a:r>
-              <a:rPr sz="1800">
+              <a:rPr sz="1300">
                 <a:solidFill>
                   <a:srgbClr val="6D8C97"/>
                 </a:solidFill>
@@ -14210,7 +14943,7 @@
               <a:t>  61  </a:t>
             </a:r>
             <a:r>
-              <a:rPr sz="1800">
+              <a:rPr sz="1300">
                 <a:solidFill>
                   <a:srgbClr val="6D8C97"/>
                 </a:solidFill>
@@ -14226,7 +14959,7 @@
               </a:spcAft>
             </a:pPr>
             <a:r>
-              <a:rPr sz="1800">
+              <a:rPr sz="1300">
                 <a:solidFill>
                   <a:srgbClr val="6D8C97"/>
                 </a:solidFill>
@@ -14235,7 +14968,7 @@
               <a:t>  62  </a:t>
             </a:r>
             <a:r>
-              <a:rPr sz="1800">
+              <a:rPr sz="1300">
                 <a:solidFill>
                   <a:srgbClr val="6D8C97"/>
                 </a:solidFill>
@@ -14251,7 +14984,7 @@
               </a:spcAft>
             </a:pPr>
             <a:r>
-              <a:rPr sz="1800">
+              <a:rPr sz="1300">
                 <a:solidFill>
                   <a:srgbClr val="6D8C97"/>
                 </a:solidFill>
@@ -14260,7 +14993,7 @@
               <a:t>  63  </a:t>
             </a:r>
             <a:r>
-              <a:rPr sz="1800">
+              <a:rPr sz="1300">
                 <a:solidFill>
                   <a:srgbClr val="6D8C97"/>
                 </a:solidFill>
@@ -14276,7 +15009,7 @@
               </a:spcAft>
             </a:pPr>
             <a:r>
-              <a:rPr sz="1800">
+              <a:rPr sz="1300">
                 <a:solidFill>
                   <a:srgbClr val="6D8C97"/>
                 </a:solidFill>
@@ -14285,7 +15018,7 @@
               <a:t>  64  </a:t>
             </a:r>
             <a:r>
-              <a:rPr sz="1800">
+              <a:rPr sz="1300">
                 <a:solidFill>
                   <a:srgbClr val="6D8C97"/>
                 </a:solidFill>
@@ -14301,7 +15034,7 @@
               </a:spcAft>
             </a:pPr>
             <a:r>
-              <a:rPr sz="1800">
+              <a:rPr sz="1300">
                 <a:solidFill>
                   <a:srgbClr val="6D8C97"/>
                 </a:solidFill>
@@ -14310,7 +15043,7 @@
               <a:t>  65  </a:t>
             </a:r>
             <a:r>
-              <a:rPr sz="1800">
+              <a:rPr sz="1300">
                 <a:solidFill>
                   <a:srgbClr val="6D8C97"/>
                 </a:solidFill>
@@ -14326,7 +15059,7 @@
               </a:spcAft>
             </a:pPr>
             <a:r>
-              <a:rPr sz="1800">
+              <a:rPr sz="1300">
                 <a:solidFill>
                   <a:srgbClr val="6D8C97"/>
                 </a:solidFill>
@@ -14335,7 +15068,7 @@
               <a:t>  66  </a:t>
             </a:r>
             <a:r>
-              <a:rPr sz="1800">
+              <a:rPr sz="1300">
                 <a:solidFill>
                   <a:srgbClr val="6D8C97"/>
                 </a:solidFill>
@@ -14351,7 +15084,7 @@
               </a:spcAft>
             </a:pPr>
             <a:r>
-              <a:rPr sz="1800">
+              <a:rPr sz="1300">
                 <a:solidFill>
                   <a:srgbClr val="6D8C97"/>
                 </a:solidFill>
@@ -14360,7 +15093,7 @@
               <a:t>  67  </a:t>
             </a:r>
             <a:r>
-              <a:rPr sz="1800">
+              <a:rPr sz="1300">
                 <a:solidFill>
                   <a:srgbClr val="6D8C97"/>
                 </a:solidFill>
@@ -14376,7 +15109,7 @@
               </a:spcAft>
             </a:pPr>
             <a:r>
-              <a:rPr sz="1800">
+              <a:rPr sz="1300">
                 <a:solidFill>
                   <a:srgbClr val="6D8C97"/>
                 </a:solidFill>
@@ -14385,13 +15118,63 @@
               <a:t>  68  </a:t>
             </a:r>
             <a:r>
-              <a:rPr sz="1800">
+              <a:rPr sz="1300">
+                <a:solidFill>
+                  <a:srgbClr val="6D8C97"/>
+                </a:solidFill>
+                <a:latin typeface="Consolas"/>
+              </a:rPr>
+              <a:t>  const reply = await askAI(text);       // this is the slow bit</a:t>
+            </a:r>
+          </a:p>
+          <a:p>
+            <a:pPr>
+              <a:spcAft>
+                <a:spcPts val="0"/>
+              </a:spcAft>
+            </a:pPr>
+            <a:r>
+              <a:rPr sz="1300">
+                <a:solidFill>
+                  <a:srgbClr val="6D8C97"/>
+                </a:solidFill>
+                <a:latin typeface="Consolas"/>
+              </a:rPr>
+              <a:t>  69  </a:t>
+            </a:r>
+            <a:r>
+              <a:rPr sz="1300">
+                <a:solidFill>
+                  <a:srgbClr val="6D8C97"/>
+                </a:solidFill>
+                <a:latin typeface="Consolas"/>
+              </a:rPr>
+              <a:t>  chat.lastChild.remove();               // take the 'thinking' line away</a:t>
+            </a:r>
+          </a:p>
+          <a:p>
+            <a:pPr>
+              <a:spcAft>
+                <a:spcPts val="0"/>
+              </a:spcAft>
+            </a:pPr>
+            <a:r>
+              <a:rPr sz="1300">
+                <a:solidFill>
+                  <a:srgbClr val="6D8C97"/>
+                </a:solidFill>
+                <a:latin typeface="Consolas"/>
+              </a:rPr>
+              <a:t>  70  </a:t>
+            </a:r>
+            <a:r>
+              <a:rPr sz="1300">
                 <a:solidFill>
                   <a:srgbClr val="7FE0A0"/>
                 </a:solidFill>
                 <a:latin typeface="Consolas"/>
               </a:rPr>
-              <a:t>  const reply = await askAI(text);       // this is the slow bit</a:t>
+              <a:t>  addLine('Companion', reply);</a:t>
             </a:r>
           </a:p>
         </p:txBody>
@@ -14424,267 +15207,7 @@
                   <a:srgbClr val="DCECEF"/>
                 </a:solidFill>
               </a:rPr>
-              <a:t>await askAI(text): the slow bit - ask the AI and wait for the answer.</a:t>
-            </a:r>
-          </a:p>
-        </p:txBody>
-      </p:sp>
-    </p:spTree>
-  </p:cSld>
-  <p:clrMapOvr>
-    <a:masterClrMapping/>
-  </p:clrMapOvr>
-</p:sld>
-</file>
-
-<file path=ppt/slides/slide46.xml><?xml version="1.0" encoding="utf-8"?>
-<p:sld xmlns:a="http://schemas.openxmlformats.org/drawingml/2006/main" xmlns:p="http://schemas.openxmlformats.org/presentationml/2006/main" xmlns:r="http://schemas.openxmlformats.org/officeDocument/2006/relationships">
-  <p:cSld>
-    <p:spTree>
-      <p:nvGrpSpPr>
-        <p:cNvPr id="1" name=""/>
-        <p:cNvGrpSpPr/>
-        <p:nvPr/>
-      </p:nvGrpSpPr>
-      <p:grpSpPr/>
-      <p:sp>
-        <p:nvSpPr>
-          <p:cNvPr id="2" name="Title 1"/>
-          <p:cNvSpPr>
-            <a:spLocks noGrp="1"/>
-          </p:cNvSpPr>
-          <p:nvPr>
-            <p:ph type="title"/>
-          </p:nvPr>
-        </p:nvSpPr>
-        <p:spPr/>
-        <p:txBody>
-          <a:bodyPr/>
-          <a:lstStyle/>
-          <a:p>
-            <a:r>
-              <a:rPr sz="3800" b="1">
-                <a:solidFill>
-                  <a:srgbClr val="1F2A37"/>
-                </a:solidFill>
-              </a:rPr>
-              <a:t>.lastChild</a:t>
-            </a:r>
-          </a:p>
-        </p:txBody>
-      </p:sp>
-      <p:sp>
-        <p:nvSpPr>
-          <p:cNvPr id="3" name="TextBox 2"/>
-          <p:cNvSpPr txBox="1"/>
-          <p:nvPr/>
-        </p:nvSpPr>
-        <p:spPr>
-          <a:xfrm>
-            <a:off x="868680" y="502920"/>
-            <a:ext cx="5486400" cy="457200"/>
-          </a:xfrm>
-          <a:prstGeom prst="rect">
-            <a:avLst/>
-          </a:prstGeom>
-          <a:noFill/>
-        </p:spPr>
-        <p:txBody>
-          <a:bodyPr wrap="none">
-            <a:spAutoFit/>
-          </a:bodyPr>
-          <a:lstStyle/>
-          <a:p>
-            <a:r>
-              <a:rPr sz="1500" b="1">
-                <a:solidFill>
-                  <a:srgbClr val="01AEFD"/>
-                </a:solidFill>
-              </a:rPr>
-              <a:t>JAVASCRIPT</a:t>
-            </a:r>
-          </a:p>
-        </p:txBody>
-      </p:sp>
-      <p:sp>
-        <p:nvSpPr>
-          <p:cNvPr id="4" name="TextBox 3"/>
-          <p:cNvSpPr txBox="1"/>
-          <p:nvPr/>
-        </p:nvSpPr>
-        <p:spPr>
-          <a:xfrm>
-            <a:off x="822960" y="1828800"/>
-            <a:ext cx="10515600" cy="4206240"/>
-          </a:xfrm>
-          <a:prstGeom prst="rect">
-            <a:avLst/>
-          </a:prstGeom>
-          <a:noFill/>
-        </p:spPr>
-        <p:txBody>
-          <a:bodyPr wrap="square">
-            <a:spAutoFit/>
-          </a:bodyPr>
-          <a:lstStyle/>
-          <a:p>
-            <a:pPr>
-              <a:spcAft>
-                <a:spcPts val="1400"/>
-              </a:spcAft>
-            </a:pPr>
-            <a:r>
-              <a:rPr sz="2400">
-                <a:solidFill>
-                  <a:srgbClr val="1F2A37"/>
-                </a:solidFill>
-              </a:rPr>
-              <a:t>• A box's LAST child - the newest thing added inside it.</a:t>
-            </a:r>
-          </a:p>
-          <a:p>
-            <a:pPr>
-              <a:spcAft>
-                <a:spcPts val="1400"/>
-              </a:spcAft>
-            </a:pPr>
-            <a:r>
-              <a:rPr sz="2400">
-                <a:solidFill>
-                  <a:srgbClr val="1F2A37"/>
-                </a:solidFill>
-              </a:rPr>
-              <a:t>• chat.lastChild is the message you just put in.</a:t>
-            </a:r>
-          </a:p>
-        </p:txBody>
-      </p:sp>
-    </p:spTree>
-  </p:cSld>
-  <p:clrMapOvr>
-    <a:masterClrMapping/>
-  </p:clrMapOvr>
-</p:sld>
-</file>
-
-<file path=ppt/slides/slide47.xml><?xml version="1.0" encoding="utf-8"?>
-<p:sld xmlns:a="http://schemas.openxmlformats.org/drawingml/2006/main" xmlns:p="http://schemas.openxmlformats.org/presentationml/2006/main" xmlns:r="http://schemas.openxmlformats.org/officeDocument/2006/relationships">
-  <p:cSld>
-    <p:spTree>
-      <p:nvGrpSpPr>
-        <p:cNvPr id="1" name=""/>
-        <p:cNvGrpSpPr/>
-        <p:nvPr/>
-      </p:nvGrpSpPr>
-      <p:grpSpPr/>
-      <p:sp>
-        <p:nvSpPr>
-          <p:cNvPr id="2" name="Title 1"/>
-          <p:cNvSpPr>
-            <a:spLocks noGrp="1"/>
-          </p:cNvSpPr>
-          <p:nvPr>
-            <p:ph type="title"/>
-          </p:nvPr>
-        </p:nvSpPr>
-        <p:spPr/>
-        <p:txBody>
-          <a:bodyPr/>
-          <a:lstStyle/>
-          <a:p>
-            <a:r>
-              <a:rPr sz="3800" b="1">
-                <a:solidFill>
-                  <a:srgbClr val="1F2A37"/>
-                </a:solidFill>
-              </a:rPr>
-              <a:t>.remove()</a:t>
-            </a:r>
-          </a:p>
-        </p:txBody>
-      </p:sp>
-      <p:sp>
-        <p:nvSpPr>
-          <p:cNvPr id="3" name="TextBox 2"/>
-          <p:cNvSpPr txBox="1"/>
-          <p:nvPr/>
-        </p:nvSpPr>
-        <p:spPr>
-          <a:xfrm>
-            <a:off x="868680" y="502920"/>
-            <a:ext cx="5486400" cy="457200"/>
-          </a:xfrm>
-          <a:prstGeom prst="rect">
-            <a:avLst/>
-          </a:prstGeom>
-          <a:noFill/>
-        </p:spPr>
-        <p:txBody>
-          <a:bodyPr wrap="none">
-            <a:spAutoFit/>
-          </a:bodyPr>
-          <a:lstStyle/>
-          <a:p>
-            <a:r>
-              <a:rPr sz="1500" b="1">
-                <a:solidFill>
-                  <a:srgbClr val="01AEFD"/>
-                </a:solidFill>
-              </a:rPr>
-              <a:t>JAVASCRIPT</a:t>
-            </a:r>
-          </a:p>
-        </p:txBody>
-      </p:sp>
-      <p:sp>
-        <p:nvSpPr>
-          <p:cNvPr id="4" name="TextBox 3"/>
-          <p:cNvSpPr txBox="1"/>
-          <p:nvPr/>
-        </p:nvSpPr>
-        <p:spPr>
-          <a:xfrm>
-            <a:off x="822960" y="1828800"/>
-            <a:ext cx="10515600" cy="4206240"/>
-          </a:xfrm>
-          <a:prstGeom prst="rect">
-            <a:avLst/>
-          </a:prstGeom>
-          <a:noFill/>
-        </p:spPr>
-        <p:txBody>
-          <a:bodyPr wrap="square">
-            <a:spAutoFit/>
-          </a:bodyPr>
-          <a:lstStyle/>
-          <a:p>
-            <a:pPr>
-              <a:spcAft>
-                <a:spcPts val="1400"/>
-              </a:spcAft>
-            </a:pPr>
-            <a:r>
-              <a:rPr sz="2400">
-                <a:solidFill>
-                  <a:srgbClr val="1F2A37"/>
-                </a:solidFill>
-              </a:rPr>
-              <a:t>• Deletes an element from the page.</a:t>
-            </a:r>
-          </a:p>
-          <a:p>
-            <a:pPr>
-              <a:spcAft>
-                <a:spcPts val="1400"/>
-              </a:spcAft>
-            </a:pPr>
-            <a:r>
-              <a:rPr sz="2400">
-                <a:solidFill>
-                  <a:srgbClr val="1F2A37"/>
-                </a:solidFill>
-              </a:rPr>
-              <a:t>• chat.lastChild.remove() takes the last message back off.</a:t>
+              <a:t>Show the real reply in the chat.</a:t>
             </a:r>
           </a:p>
         </p:txBody>
@@ -14743,7 +15266,7 @@
                   <a:srgbClr val="01AEFD"/>
                 </a:solidFill>
               </a:rPr>
-              <a:t>Type this into script.js   -   line 69</a:t>
+              <a:t>All together in script.js</a:t>
             </a:r>
           </a:p>
         </p:txBody>
@@ -14787,7 +15310,7 @@
             <a:r>
               <a:rPr sz="1300">
                 <a:solidFill>
-                  <a:srgbClr val="6D8C97"/>
+                  <a:srgbClr val="7FE0A0"/>
                 </a:solidFill>
                 <a:latin typeface="Consolas"/>
               </a:rPr>
@@ -14812,7 +15335,7 @@
             <a:r>
               <a:rPr sz="1300">
                 <a:solidFill>
-                  <a:srgbClr val="6D8C97"/>
+                  <a:srgbClr val="7FE0A0"/>
                 </a:solidFill>
                 <a:latin typeface="Consolas"/>
               </a:rPr>
@@ -14837,7 +15360,7 @@
             <a:r>
               <a:rPr sz="1300">
                 <a:solidFill>
-                  <a:srgbClr val="6D8C97"/>
+                  <a:srgbClr val="7FE0A0"/>
                 </a:solidFill>
                 <a:latin typeface="Consolas"/>
               </a:rPr>
@@ -14862,7 +15385,7 @@
             <a:r>
               <a:rPr sz="1300">
                 <a:solidFill>
-                  <a:srgbClr val="6D8C97"/>
+                  <a:srgbClr val="7FE0A0"/>
                 </a:solidFill>
                 <a:latin typeface="Consolas"/>
               </a:rPr>
@@ -14887,7 +15410,7 @@
             <a:r>
               <a:rPr sz="1300">
                 <a:solidFill>
-                  <a:srgbClr val="6D8C97"/>
+                  <a:srgbClr val="7FE0A0"/>
                 </a:solidFill>
                 <a:latin typeface="Consolas"/>
               </a:rPr>
@@ -14912,7 +15435,7 @@
             <a:r>
               <a:rPr sz="1300">
                 <a:solidFill>
-                  <a:srgbClr val="6D8C97"/>
+                  <a:srgbClr val="7FE0A0"/>
                 </a:solidFill>
                 <a:latin typeface="Consolas"/>
               </a:rPr>
@@ -14937,7 +15460,7 @@
             <a:r>
               <a:rPr sz="1300">
                 <a:solidFill>
-                  <a:srgbClr val="6D8C97"/>
+                  <a:srgbClr val="7FE0A0"/>
                 </a:solidFill>
                 <a:latin typeface="Consolas"/>
               </a:rPr>
@@ -14962,7 +15485,7 @@
             <a:r>
               <a:rPr sz="1300">
                 <a:solidFill>
-                  <a:srgbClr val="6D8C97"/>
+                  <a:srgbClr val="7FE0A0"/>
                 </a:solidFill>
                 <a:latin typeface="Consolas"/>
               </a:rPr>
@@ -14987,7 +15510,7 @@
             <a:r>
               <a:rPr sz="1300">
                 <a:solidFill>
-                  <a:srgbClr val="6D8C97"/>
+                  <a:srgbClr val="7FE0A0"/>
                 </a:solidFill>
                 <a:latin typeface="Consolas"/>
               </a:rPr>
@@ -15012,7 +15535,7 @@
             <a:r>
               <a:rPr sz="1300">
                 <a:solidFill>
-                  <a:srgbClr val="6D8C97"/>
+                  <a:srgbClr val="7FE0A0"/>
                 </a:solidFill>
                 <a:latin typeface="Consolas"/>
               </a:rPr>
@@ -15042,6 +15565,56 @@
                 <a:latin typeface="Consolas"/>
               </a:rPr>
               <a:t>  chat.lastChild.remove();               // take the 'thinking' line away</a:t>
+            </a:r>
+          </a:p>
+          <a:p>
+            <a:pPr>
+              <a:spcAft>
+                <a:spcPts val="0"/>
+              </a:spcAft>
+            </a:pPr>
+            <a:r>
+              <a:rPr sz="1300">
+                <a:solidFill>
+                  <a:srgbClr val="6D8C97"/>
+                </a:solidFill>
+                <a:latin typeface="Consolas"/>
+              </a:rPr>
+              <a:t>  70  </a:t>
+            </a:r>
+            <a:r>
+              <a:rPr sz="1300">
+                <a:solidFill>
+                  <a:srgbClr val="7FE0A0"/>
+                </a:solidFill>
+                <a:latin typeface="Consolas"/>
+              </a:rPr>
+              <a:t>  addLine('Companion', reply);</a:t>
+            </a:r>
+          </a:p>
+          <a:p>
+            <a:pPr>
+              <a:spcAft>
+                <a:spcPts val="0"/>
+              </a:spcAft>
+            </a:pPr>
+            <a:r>
+              <a:rPr sz="1300">
+                <a:solidFill>
+                  <a:srgbClr val="6D8C97"/>
+                </a:solidFill>
+                <a:latin typeface="Consolas"/>
+              </a:rPr>
+              <a:t>  71  </a:t>
+            </a:r>
+            <a:r>
+              <a:rPr sz="1300">
+                <a:solidFill>
+                  <a:srgbClr val="7FE0A0"/>
+                </a:solidFill>
+                <a:latin typeface="Consolas"/>
+              </a:rPr>
+              <a:t>});</a:t>
             </a:r>
           </a:p>
         </p:txBody>
@@ -15074,7 +15647,7 @@
                   <a:srgbClr val="DCECEF"/>
                 </a:solidFill>
               </a:rPr>
-              <a:t>Remove the 'thinking...' line now the real answer is here.</a:t>
+              <a:t>That is the whole piece. Check yours looks the same before moving on.</a:t>
             </a:r>
           </a:p>
         </p:txBody>
@@ -15133,7 +15706,7 @@
                   <a:srgbClr val="01AEFD"/>
                 </a:solidFill>
               </a:rPr>
-              <a:t>Type this into script.js   -   line 70</a:t>
+              <a:t>In script.js   -   delete a line</a:t>
             </a:r>
           </a:p>
         </p:txBody>
@@ -15172,7 +15745,7 @@
                 </a:solidFill>
                 <a:latin typeface="Consolas"/>
               </a:rPr>
-              <a:t>  59  </a:t>
+              <a:t>  29  </a:t>
             </a:r>
             <a:r>
               <a:rPr sz="1300">
@@ -15197,266 +15770,241 @@
                 </a:solidFill>
                 <a:latin typeface="Consolas"/>
               </a:rPr>
-              <a:t>  60  </a:t>
-            </a:r>
-            <a:r>
-              <a:rPr sz="1300">
-                <a:solidFill>
-                  <a:srgbClr val="6D8C97"/>
-                </a:solidFill>
-                <a:latin typeface="Consolas"/>
-              </a:rPr>
-              <a:t>// The browser calls this when the form is submitted.</a:t>
-            </a:r>
-          </a:p>
-          <a:p>
-            <a:pPr>
-              <a:spcAft>
-                <a:spcPts val="0"/>
-              </a:spcAft>
-            </a:pPr>
-            <a:r>
-              <a:rPr sz="1300">
-                <a:solidFill>
-                  <a:srgbClr val="6D8C97"/>
-                </a:solidFill>
-                <a:latin typeface="Consolas"/>
-              </a:rPr>
-              <a:t>  61  </a:t>
-            </a:r>
-            <a:r>
-              <a:rPr sz="1300">
-                <a:solidFill>
-                  <a:srgbClr val="6D8C97"/>
-                </a:solidFill>
-                <a:latin typeface="Consolas"/>
-              </a:rPr>
-              <a:t>composer.addEventListener('submit', async function (event) {</a:t>
-            </a:r>
-          </a:p>
-          <a:p>
-            <a:pPr>
-              <a:spcAft>
-                <a:spcPts val="0"/>
-              </a:spcAft>
-            </a:pPr>
-            <a:r>
-              <a:rPr sz="1300">
-                <a:solidFill>
-                  <a:srgbClr val="6D8C97"/>
-                </a:solidFill>
-                <a:latin typeface="Consolas"/>
-              </a:rPr>
-              <a:t>  62  </a:t>
-            </a:r>
-            <a:r>
-              <a:rPr sz="1300">
-                <a:solidFill>
-                  <a:srgbClr val="6D8C97"/>
-                </a:solidFill>
-                <a:latin typeface="Consolas"/>
-              </a:rPr>
-              <a:t>  event.preventDefault();</a:t>
-            </a:r>
-          </a:p>
-          <a:p>
-            <a:pPr>
-              <a:spcAft>
-                <a:spcPts val="0"/>
-              </a:spcAft>
-            </a:pPr>
-            <a:r>
-              <a:rPr sz="1300">
-                <a:solidFill>
-                  <a:srgbClr val="6D8C97"/>
-                </a:solidFill>
-                <a:latin typeface="Consolas"/>
-              </a:rPr>
-              <a:t>  63  </a:t>
-            </a:r>
-            <a:r>
-              <a:rPr sz="1300">
-                <a:solidFill>
-                  <a:srgbClr val="6D8C97"/>
-                </a:solidFill>
-                <a:latin typeface="Consolas"/>
-              </a:rPr>
-              <a:t>  const text = promptBox.value.trim();</a:t>
-            </a:r>
-          </a:p>
-          <a:p>
-            <a:pPr>
-              <a:spcAft>
-                <a:spcPts val="0"/>
-              </a:spcAft>
-            </a:pPr>
-            <a:r>
-              <a:rPr sz="1300">
-                <a:solidFill>
-                  <a:srgbClr val="6D8C97"/>
-                </a:solidFill>
-                <a:latin typeface="Consolas"/>
-              </a:rPr>
-              <a:t>  64  </a:t>
-            </a:r>
-            <a:r>
-              <a:rPr sz="1300">
-                <a:solidFill>
-                  <a:srgbClr val="6D8C97"/>
-                </a:solidFill>
-                <a:latin typeface="Consolas"/>
-              </a:rPr>
-              <a:t>  if (text === '') { return; }</a:t>
-            </a:r>
-          </a:p>
-          <a:p>
-            <a:pPr>
-              <a:spcAft>
-                <a:spcPts val="0"/>
-              </a:spcAft>
-            </a:pPr>
-            <a:r>
-              <a:rPr sz="1300">
-                <a:solidFill>
-                  <a:srgbClr val="6D8C97"/>
-                </a:solidFill>
-                <a:latin typeface="Consolas"/>
-              </a:rPr>
-              <a:t>  65  </a:t>
-            </a:r>
-            <a:r>
-              <a:rPr sz="1300">
-                <a:solidFill>
-                  <a:srgbClr val="6D8C97"/>
-                </a:solidFill>
-                <a:latin typeface="Consolas"/>
-              </a:rPr>
-              <a:t>  promptBox.value = '';</a:t>
-            </a:r>
-          </a:p>
-          <a:p>
-            <a:pPr>
-              <a:spcAft>
-                <a:spcPts val="0"/>
-              </a:spcAft>
-            </a:pPr>
-            <a:r>
-              <a:rPr sz="1300">
-                <a:solidFill>
-                  <a:srgbClr val="6D8C97"/>
-                </a:solidFill>
-                <a:latin typeface="Consolas"/>
-              </a:rPr>
-              <a:t>  66  </a:t>
-            </a:r>
-            <a:r>
-              <a:rPr sz="1300">
-                <a:solidFill>
-                  <a:srgbClr val="6D8C97"/>
-                </a:solidFill>
-                <a:latin typeface="Consolas"/>
-              </a:rPr>
-              <a:t>  addLine('You', text);</a:t>
-            </a:r>
-          </a:p>
-          <a:p>
-            <a:pPr>
-              <a:spcAft>
-                <a:spcPts val="0"/>
-              </a:spcAft>
-            </a:pPr>
-            <a:r>
-              <a:rPr sz="1300">
-                <a:solidFill>
-                  <a:srgbClr val="6D8C97"/>
-                </a:solidFill>
-                <a:latin typeface="Consolas"/>
-              </a:rPr>
-              <a:t>  67  </a:t>
-            </a:r>
-            <a:r>
-              <a:rPr sz="1300">
-                <a:solidFill>
-                  <a:srgbClr val="6D8C97"/>
-                </a:solidFill>
-                <a:latin typeface="Consolas"/>
-              </a:rPr>
-              <a:t>  addLine('Companion', 'thinking...');</a:t>
-            </a:r>
-          </a:p>
-          <a:p>
-            <a:pPr>
-              <a:spcAft>
-                <a:spcPts val="0"/>
-              </a:spcAft>
-            </a:pPr>
-            <a:r>
-              <a:rPr sz="1300">
-                <a:solidFill>
-                  <a:srgbClr val="6D8C97"/>
-                </a:solidFill>
-                <a:latin typeface="Consolas"/>
-              </a:rPr>
-              <a:t>  68  </a:t>
-            </a:r>
-            <a:r>
-              <a:rPr sz="1300">
-                <a:solidFill>
-                  <a:srgbClr val="6D8C97"/>
-                </a:solidFill>
-                <a:latin typeface="Consolas"/>
-              </a:rPr>
-              <a:t>  const reply = await askAI(text);       // this is the slow bit</a:t>
-            </a:r>
-          </a:p>
-          <a:p>
-            <a:pPr>
-              <a:spcAft>
-                <a:spcPts val="0"/>
-              </a:spcAft>
-            </a:pPr>
-            <a:r>
-              <a:rPr sz="1300">
-                <a:solidFill>
-                  <a:srgbClr val="6D8C97"/>
-                </a:solidFill>
-                <a:latin typeface="Consolas"/>
-              </a:rPr>
-              <a:t>  69  </a:t>
-            </a:r>
-            <a:r>
-              <a:rPr sz="1300">
-                <a:solidFill>
-                  <a:srgbClr val="6D8C97"/>
-                </a:solidFill>
-                <a:latin typeface="Consolas"/>
-              </a:rPr>
-              <a:t>  chat.lastChild.remove();               // take the 'thinking' line away</a:t>
-            </a:r>
-          </a:p>
-          <a:p>
-            <a:pPr>
-              <a:spcAft>
-                <a:spcPts val="0"/>
-              </a:spcAft>
-            </a:pPr>
-            <a:r>
-              <a:rPr sz="1300">
-                <a:solidFill>
-                  <a:srgbClr val="6D8C97"/>
-                </a:solidFill>
-                <a:latin typeface="Consolas"/>
-              </a:rPr>
-              <a:t>  70  </a:t>
-            </a:r>
-            <a:r>
-              <a:rPr sz="1300">
-                <a:solidFill>
-                  <a:srgbClr val="7FE0A0"/>
-                </a:solidFill>
-                <a:latin typeface="Consolas"/>
-              </a:rPr>
-              <a:t>  addLine('Companion', reply);</a:t>
+              <a:t>  30  </a:t>
+            </a:r>
+            <a:r>
+              <a:rPr sz="1300">
+                <a:solidFill>
+                  <a:srgbClr val="6D8C97"/>
+                </a:solidFill>
+                <a:latin typeface="Consolas"/>
+              </a:rPr>
+              <a:t>// The smallest useful request: what models does this server have?</a:t>
+            </a:r>
+          </a:p>
+          <a:p>
+            <a:pPr>
+              <a:spcAft>
+                <a:spcPts val="0"/>
+              </a:spcAft>
+            </a:pPr>
+            <a:r>
+              <a:rPr sz="1300">
+                <a:solidFill>
+                  <a:srgbClr val="6D8C97"/>
+                </a:solidFill>
+                <a:latin typeface="Consolas"/>
+              </a:rPr>
+              <a:t>  31  </a:t>
+            </a:r>
+            <a:r>
+              <a:rPr sz="1300">
+                <a:solidFill>
+                  <a:srgbClr val="6D8C97"/>
+                </a:solidFill>
+                <a:latin typeface="Consolas"/>
+              </a:rPr>
+              <a:t>// 'async' means this function does something slow and can be waited for.</a:t>
+            </a:r>
+          </a:p>
+          <a:p>
+            <a:pPr>
+              <a:spcAft>
+                <a:spcPts val="0"/>
+              </a:spcAft>
+            </a:pPr>
+            <a:r>
+              <a:rPr sz="1300">
+                <a:solidFill>
+                  <a:srgbClr val="6D8C97"/>
+                </a:solidFill>
+                <a:latin typeface="Consolas"/>
+              </a:rPr>
+              <a:t>  32  </a:t>
+            </a:r>
+            <a:r>
+              <a:rPr sz="1300">
+                <a:solidFill>
+                  <a:srgbClr val="6D8C97"/>
+                </a:solidFill>
+                <a:latin typeface="Consolas"/>
+              </a:rPr>
+              <a:t>async function listModels() {</a:t>
+            </a:r>
+          </a:p>
+          <a:p>
+            <a:pPr>
+              <a:spcAft>
+                <a:spcPts val="0"/>
+              </a:spcAft>
+            </a:pPr>
+            <a:r>
+              <a:rPr sz="1300">
+                <a:solidFill>
+                  <a:srgbClr val="6D8C97"/>
+                </a:solidFill>
+                <a:latin typeface="Consolas"/>
+              </a:rPr>
+              <a:t>  33  </a:t>
+            </a:r>
+            <a:r>
+              <a:rPr sz="1300">
+                <a:solidFill>
+                  <a:srgbClr val="6D8C97"/>
+                </a:solidFill>
+                <a:latin typeface="Consolas"/>
+              </a:rPr>
+              <a:t>  const res = await fetch(AI_BASE + '/v1/models', {</a:t>
+            </a:r>
+          </a:p>
+          <a:p>
+            <a:pPr>
+              <a:spcAft>
+                <a:spcPts val="0"/>
+              </a:spcAft>
+            </a:pPr>
+            <a:r>
+              <a:rPr sz="1300">
+                <a:solidFill>
+                  <a:srgbClr val="6D8C97"/>
+                </a:solidFill>
+                <a:latin typeface="Consolas"/>
+              </a:rPr>
+              <a:t>  34  </a:t>
+            </a:r>
+            <a:r>
+              <a:rPr sz="1300">
+                <a:solidFill>
+                  <a:srgbClr val="6D8C97"/>
+                </a:solidFill>
+                <a:latin typeface="Consolas"/>
+              </a:rPr>
+              <a:t>    headers: { 'Authorization': 'Bearer ' + API_KEY }</a:t>
+            </a:r>
+          </a:p>
+          <a:p>
+            <a:pPr>
+              <a:spcAft>
+                <a:spcPts val="0"/>
+              </a:spcAft>
+            </a:pPr>
+            <a:r>
+              <a:rPr sz="1300">
+                <a:solidFill>
+                  <a:srgbClr val="6D8C97"/>
+                </a:solidFill>
+                <a:latin typeface="Consolas"/>
+              </a:rPr>
+              <a:t>  35  </a:t>
+            </a:r>
+            <a:r>
+              <a:rPr sz="1300">
+                <a:solidFill>
+                  <a:srgbClr val="6D8C97"/>
+                </a:solidFill>
+                <a:latin typeface="Consolas"/>
+              </a:rPr>
+              <a:t>  });</a:t>
+            </a:r>
+          </a:p>
+          <a:p>
+            <a:pPr>
+              <a:spcAft>
+                <a:spcPts val="0"/>
+              </a:spcAft>
+            </a:pPr>
+            <a:r>
+              <a:rPr sz="1300">
+                <a:solidFill>
+                  <a:srgbClr val="6D8C97"/>
+                </a:solidFill>
+                <a:latin typeface="Consolas"/>
+              </a:rPr>
+              <a:t>  36  </a:t>
+            </a:r>
+            <a:r>
+              <a:rPr sz="1300">
+                <a:solidFill>
+                  <a:srgbClr val="6D8C97"/>
+                </a:solidFill>
+                <a:latin typeface="Consolas"/>
+              </a:rPr>
+              <a:t>  const data = await res.json();   // the answer arrives as text; this reads it</a:t>
+            </a:r>
+          </a:p>
+          <a:p>
+            <a:pPr>
+              <a:spcAft>
+                <a:spcPts val="0"/>
+              </a:spcAft>
+            </a:pPr>
+            <a:r>
+              <a:rPr sz="1300">
+                <a:solidFill>
+                  <a:srgbClr val="6D8C97"/>
+                </a:solidFill>
+                <a:latin typeface="Consolas"/>
+              </a:rPr>
+              <a:t>  37  </a:t>
+            </a:r>
+            <a:r>
+              <a:rPr sz="1300">
+                <a:solidFill>
+                  <a:srgbClr val="6D8C97"/>
+                </a:solidFill>
+                <a:latin typeface="Consolas"/>
+              </a:rPr>
+              <a:t>  console.log('The server offers:', data.data);</a:t>
+            </a:r>
+          </a:p>
+          <a:p>
+            <a:pPr>
+              <a:spcAft>
+                <a:spcPts val="0"/>
+              </a:spcAft>
+            </a:pPr>
+            <a:r>
+              <a:rPr sz="1300">
+                <a:solidFill>
+                  <a:srgbClr val="6D8C97"/>
+                </a:solidFill>
+                <a:latin typeface="Consolas"/>
+              </a:rPr>
+              <a:t>  38  </a:t>
+            </a:r>
+            <a:r>
+              <a:rPr sz="1300">
+                <a:solidFill>
+                  <a:srgbClr val="6D8C97"/>
+                </a:solidFill>
+                <a:latin typeface="Consolas"/>
+              </a:rPr>
+              <a:t>}</a:t>
+            </a:r>
+          </a:p>
+          <a:p>
+            <a:pPr>
+              <a:spcAft>
+                <a:spcPts val="0"/>
+              </a:spcAft>
+            </a:pPr>
+            <a:r>
+              <a:rPr sz="1300">
+                <a:solidFill>
+                  <a:srgbClr val="6D8C97"/>
+                </a:solidFill>
+                <a:latin typeface="Consolas"/>
+              </a:rPr>
+              <a:t>  39  </a:t>
+            </a:r>
+            <a:r>
+              <a:rPr sz="1300" strike="sngStrike">
+                <a:solidFill>
+                  <a:srgbClr val="F3928B"/>
+                </a:solidFill>
+                <a:latin typeface="Consolas"/>
+              </a:rPr>
+              <a:t>listModels();</a:t>
             </a:r>
           </a:p>
         </p:txBody>
@@ -15489,7 +16037,7 @@
                   <a:srgbClr val="DCECEF"/>
                 </a:solidFill>
               </a:rPr>
-              <a:t>Show the real reply in the chat.</a:t>
+              <a:t>Delete this line. askAI does the asking now, so the old test call is no longer needed - your file should have no listModels() call left.</a:t>
             </a:r>
           </a:p>
         </p:txBody>
@@ -15670,836 +16218,6 @@
 <file path=ppt/slides/slide50.xml><?xml version="1.0" encoding="utf-8"?>
 <p:sld xmlns:a="http://schemas.openxmlformats.org/drawingml/2006/main" xmlns:p="http://schemas.openxmlformats.org/presentationml/2006/main" xmlns:r="http://schemas.openxmlformats.org/officeDocument/2006/relationships">
   <p:cSld>
-    <p:bg>
-      <p:bgPr>
-        <a:solidFill>
-          <a:srgbClr val="102127"/>
-        </a:solidFill>
-        <a:effectLst/>
-      </p:bgPr>
-    </p:bg>
-    <p:spTree>
-      <p:nvGrpSpPr>
-        <p:cNvPr id="1" name=""/>
-        <p:cNvGrpSpPr/>
-        <p:nvPr/>
-      </p:nvGrpSpPr>
-      <p:grpSpPr/>
-      <p:sp>
-        <p:nvSpPr>
-          <p:cNvPr id="2" name="TextBox 1"/>
-          <p:cNvSpPr txBox="1"/>
-          <p:nvPr/>
-        </p:nvSpPr>
-        <p:spPr>
-          <a:xfrm>
-            <a:off x="502920" y="274320"/>
-            <a:ext cx="11155680" cy="548640"/>
-          </a:xfrm>
-          <a:prstGeom prst="rect">
-            <a:avLst/>
-          </a:prstGeom>
-          <a:noFill/>
-        </p:spPr>
-        <p:txBody>
-          <a:bodyPr wrap="none">
-            <a:spAutoFit/>
-          </a:bodyPr>
-          <a:lstStyle/>
-          <a:p>
-            <a:r>
-              <a:rPr sz="2200" b="1">
-                <a:solidFill>
-                  <a:srgbClr val="01AEFD"/>
-                </a:solidFill>
-              </a:rPr>
-              <a:t>All together in script.js</a:t>
-            </a:r>
-          </a:p>
-        </p:txBody>
-      </p:sp>
-      <p:sp>
-        <p:nvSpPr>
-          <p:cNvPr id="3" name="TextBox 2"/>
-          <p:cNvSpPr txBox="1"/>
-          <p:nvPr/>
-        </p:nvSpPr>
-        <p:spPr>
-          <a:xfrm>
-            <a:off x="502920" y="960120"/>
-            <a:ext cx="11155680" cy="4297680"/>
-          </a:xfrm>
-          <a:prstGeom prst="rect">
-            <a:avLst/>
-          </a:prstGeom>
-          <a:noFill/>
-        </p:spPr>
-        <p:txBody>
-          <a:bodyPr wrap="none">
-            <a:spAutoFit/>
-          </a:bodyPr>
-          <a:lstStyle/>
-          <a:p>
-            <a:pPr>
-              <a:spcAft>
-                <a:spcPts val="0"/>
-              </a:spcAft>
-            </a:pPr>
-            <a:r>
-              <a:rPr sz="1300">
-                <a:solidFill>
-                  <a:srgbClr val="6D8C97"/>
-                </a:solidFill>
-                <a:latin typeface="Consolas"/>
-              </a:rPr>
-              <a:t>  59  </a:t>
-            </a:r>
-            <a:r>
-              <a:rPr sz="1300">
-                <a:solidFill>
-                  <a:srgbClr val="7FE0A0"/>
-                </a:solidFill>
-                <a:latin typeface="Consolas"/>
-              </a:rPr>
-              <a:t> </a:t>
-            </a:r>
-          </a:p>
-          <a:p>
-            <a:pPr>
-              <a:spcAft>
-                <a:spcPts val="0"/>
-              </a:spcAft>
-            </a:pPr>
-            <a:r>
-              <a:rPr sz="1300">
-                <a:solidFill>
-                  <a:srgbClr val="6D8C97"/>
-                </a:solidFill>
-                <a:latin typeface="Consolas"/>
-              </a:rPr>
-              <a:t>  60  </a:t>
-            </a:r>
-            <a:r>
-              <a:rPr sz="1300">
-                <a:solidFill>
-                  <a:srgbClr val="7FE0A0"/>
-                </a:solidFill>
-                <a:latin typeface="Consolas"/>
-              </a:rPr>
-              <a:t>// The browser calls this when the form is submitted.</a:t>
-            </a:r>
-          </a:p>
-          <a:p>
-            <a:pPr>
-              <a:spcAft>
-                <a:spcPts val="0"/>
-              </a:spcAft>
-            </a:pPr>
-            <a:r>
-              <a:rPr sz="1300">
-                <a:solidFill>
-                  <a:srgbClr val="6D8C97"/>
-                </a:solidFill>
-                <a:latin typeface="Consolas"/>
-              </a:rPr>
-              <a:t>  61  </a:t>
-            </a:r>
-            <a:r>
-              <a:rPr sz="1300">
-                <a:solidFill>
-                  <a:srgbClr val="7FE0A0"/>
-                </a:solidFill>
-                <a:latin typeface="Consolas"/>
-              </a:rPr>
-              <a:t>composer.addEventListener('submit', async function (event) {</a:t>
-            </a:r>
-          </a:p>
-          <a:p>
-            <a:pPr>
-              <a:spcAft>
-                <a:spcPts val="0"/>
-              </a:spcAft>
-            </a:pPr>
-            <a:r>
-              <a:rPr sz="1300">
-                <a:solidFill>
-                  <a:srgbClr val="6D8C97"/>
-                </a:solidFill>
-                <a:latin typeface="Consolas"/>
-              </a:rPr>
-              <a:t>  62  </a:t>
-            </a:r>
-            <a:r>
-              <a:rPr sz="1300">
-                <a:solidFill>
-                  <a:srgbClr val="7FE0A0"/>
-                </a:solidFill>
-                <a:latin typeface="Consolas"/>
-              </a:rPr>
-              <a:t>  event.preventDefault();</a:t>
-            </a:r>
-          </a:p>
-          <a:p>
-            <a:pPr>
-              <a:spcAft>
-                <a:spcPts val="0"/>
-              </a:spcAft>
-            </a:pPr>
-            <a:r>
-              <a:rPr sz="1300">
-                <a:solidFill>
-                  <a:srgbClr val="6D8C97"/>
-                </a:solidFill>
-                <a:latin typeface="Consolas"/>
-              </a:rPr>
-              <a:t>  63  </a:t>
-            </a:r>
-            <a:r>
-              <a:rPr sz="1300">
-                <a:solidFill>
-                  <a:srgbClr val="7FE0A0"/>
-                </a:solidFill>
-                <a:latin typeface="Consolas"/>
-              </a:rPr>
-              <a:t>  const text = promptBox.value.trim();</a:t>
-            </a:r>
-          </a:p>
-          <a:p>
-            <a:pPr>
-              <a:spcAft>
-                <a:spcPts val="0"/>
-              </a:spcAft>
-            </a:pPr>
-            <a:r>
-              <a:rPr sz="1300">
-                <a:solidFill>
-                  <a:srgbClr val="6D8C97"/>
-                </a:solidFill>
-                <a:latin typeface="Consolas"/>
-              </a:rPr>
-              <a:t>  64  </a:t>
-            </a:r>
-            <a:r>
-              <a:rPr sz="1300">
-                <a:solidFill>
-                  <a:srgbClr val="7FE0A0"/>
-                </a:solidFill>
-                <a:latin typeface="Consolas"/>
-              </a:rPr>
-              <a:t>  if (text === '') { return; }</a:t>
-            </a:r>
-          </a:p>
-          <a:p>
-            <a:pPr>
-              <a:spcAft>
-                <a:spcPts val="0"/>
-              </a:spcAft>
-            </a:pPr>
-            <a:r>
-              <a:rPr sz="1300">
-                <a:solidFill>
-                  <a:srgbClr val="6D8C97"/>
-                </a:solidFill>
-                <a:latin typeface="Consolas"/>
-              </a:rPr>
-              <a:t>  65  </a:t>
-            </a:r>
-            <a:r>
-              <a:rPr sz="1300">
-                <a:solidFill>
-                  <a:srgbClr val="7FE0A0"/>
-                </a:solidFill>
-                <a:latin typeface="Consolas"/>
-              </a:rPr>
-              <a:t>  promptBox.value = '';</a:t>
-            </a:r>
-          </a:p>
-          <a:p>
-            <a:pPr>
-              <a:spcAft>
-                <a:spcPts val="0"/>
-              </a:spcAft>
-            </a:pPr>
-            <a:r>
-              <a:rPr sz="1300">
-                <a:solidFill>
-                  <a:srgbClr val="6D8C97"/>
-                </a:solidFill>
-                <a:latin typeface="Consolas"/>
-              </a:rPr>
-              <a:t>  66  </a:t>
-            </a:r>
-            <a:r>
-              <a:rPr sz="1300">
-                <a:solidFill>
-                  <a:srgbClr val="7FE0A0"/>
-                </a:solidFill>
-                <a:latin typeface="Consolas"/>
-              </a:rPr>
-              <a:t>  addLine('You', text);</a:t>
-            </a:r>
-          </a:p>
-          <a:p>
-            <a:pPr>
-              <a:spcAft>
-                <a:spcPts val="0"/>
-              </a:spcAft>
-            </a:pPr>
-            <a:r>
-              <a:rPr sz="1300">
-                <a:solidFill>
-                  <a:srgbClr val="6D8C97"/>
-                </a:solidFill>
-                <a:latin typeface="Consolas"/>
-              </a:rPr>
-              <a:t>  67  </a:t>
-            </a:r>
-            <a:r>
-              <a:rPr sz="1300">
-                <a:solidFill>
-                  <a:srgbClr val="7FE0A0"/>
-                </a:solidFill>
-                <a:latin typeface="Consolas"/>
-              </a:rPr>
-              <a:t>  addLine('Companion', 'thinking...');</a:t>
-            </a:r>
-          </a:p>
-          <a:p>
-            <a:pPr>
-              <a:spcAft>
-                <a:spcPts val="0"/>
-              </a:spcAft>
-            </a:pPr>
-            <a:r>
-              <a:rPr sz="1300">
-                <a:solidFill>
-                  <a:srgbClr val="6D8C97"/>
-                </a:solidFill>
-                <a:latin typeface="Consolas"/>
-              </a:rPr>
-              <a:t>  68  </a:t>
-            </a:r>
-            <a:r>
-              <a:rPr sz="1300">
-                <a:solidFill>
-                  <a:srgbClr val="7FE0A0"/>
-                </a:solidFill>
-                <a:latin typeface="Consolas"/>
-              </a:rPr>
-              <a:t>  const reply = await askAI(text);       // this is the slow bit</a:t>
-            </a:r>
-          </a:p>
-          <a:p>
-            <a:pPr>
-              <a:spcAft>
-                <a:spcPts val="0"/>
-              </a:spcAft>
-            </a:pPr>
-            <a:r>
-              <a:rPr sz="1300">
-                <a:solidFill>
-                  <a:srgbClr val="6D8C97"/>
-                </a:solidFill>
-                <a:latin typeface="Consolas"/>
-              </a:rPr>
-              <a:t>  69  </a:t>
-            </a:r>
-            <a:r>
-              <a:rPr sz="1300">
-                <a:solidFill>
-                  <a:srgbClr val="7FE0A0"/>
-                </a:solidFill>
-                <a:latin typeface="Consolas"/>
-              </a:rPr>
-              <a:t>  chat.lastChild.remove();               // take the 'thinking' line away</a:t>
-            </a:r>
-          </a:p>
-          <a:p>
-            <a:pPr>
-              <a:spcAft>
-                <a:spcPts val="0"/>
-              </a:spcAft>
-            </a:pPr>
-            <a:r>
-              <a:rPr sz="1300">
-                <a:solidFill>
-                  <a:srgbClr val="6D8C97"/>
-                </a:solidFill>
-                <a:latin typeface="Consolas"/>
-              </a:rPr>
-              <a:t>  70  </a:t>
-            </a:r>
-            <a:r>
-              <a:rPr sz="1300">
-                <a:solidFill>
-                  <a:srgbClr val="7FE0A0"/>
-                </a:solidFill>
-                <a:latin typeface="Consolas"/>
-              </a:rPr>
-              <a:t>  addLine('Companion', reply);</a:t>
-            </a:r>
-          </a:p>
-          <a:p>
-            <a:pPr>
-              <a:spcAft>
-                <a:spcPts val="0"/>
-              </a:spcAft>
-            </a:pPr>
-            <a:r>
-              <a:rPr sz="1300">
-                <a:solidFill>
-                  <a:srgbClr val="6D8C97"/>
-                </a:solidFill>
-                <a:latin typeface="Consolas"/>
-              </a:rPr>
-              <a:t>  71  </a:t>
-            </a:r>
-            <a:r>
-              <a:rPr sz="1300">
-                <a:solidFill>
-                  <a:srgbClr val="7FE0A0"/>
-                </a:solidFill>
-                <a:latin typeface="Consolas"/>
-              </a:rPr>
-              <a:t>});</a:t>
-            </a:r>
-          </a:p>
-        </p:txBody>
-      </p:sp>
-      <p:sp>
-        <p:nvSpPr>
-          <p:cNvPr id="4" name="TextBox 3"/>
-          <p:cNvSpPr txBox="1"/>
-          <p:nvPr/>
-        </p:nvSpPr>
-        <p:spPr>
-          <a:xfrm>
-            <a:off x="548640" y="5623560"/>
-            <a:ext cx="11064240" cy="1051560"/>
-          </a:xfrm>
-          <a:prstGeom prst="rect">
-            <a:avLst/>
-          </a:prstGeom>
-          <a:noFill/>
-        </p:spPr>
-        <p:txBody>
-          <a:bodyPr wrap="square">
-            <a:spAutoFit/>
-          </a:bodyPr>
-          <a:lstStyle/>
-          <a:p>
-            <a:r>
-              <a:rPr sz="2000">
-                <a:solidFill>
-                  <a:srgbClr val="DCECEF"/>
-                </a:solidFill>
-              </a:rPr>
-              <a:t>That is the whole piece. Check yours looks the same before moving on.</a:t>
-            </a:r>
-          </a:p>
-        </p:txBody>
-      </p:sp>
-    </p:spTree>
-  </p:cSld>
-  <p:clrMapOvr>
-    <a:masterClrMapping/>
-  </p:clrMapOvr>
-</p:sld>
-</file>
-
-<file path=ppt/slides/slide51.xml><?xml version="1.0" encoding="utf-8"?>
-<p:sld xmlns:a="http://schemas.openxmlformats.org/drawingml/2006/main" xmlns:p="http://schemas.openxmlformats.org/presentationml/2006/main" xmlns:r="http://schemas.openxmlformats.org/officeDocument/2006/relationships">
-  <p:cSld>
-    <p:bg>
-      <p:bgPr>
-        <a:solidFill>
-          <a:srgbClr val="102127"/>
-        </a:solidFill>
-        <a:effectLst/>
-      </p:bgPr>
-    </p:bg>
-    <p:spTree>
-      <p:nvGrpSpPr>
-        <p:cNvPr id="1" name=""/>
-        <p:cNvGrpSpPr/>
-        <p:nvPr/>
-      </p:nvGrpSpPr>
-      <p:grpSpPr/>
-      <p:sp>
-        <p:nvSpPr>
-          <p:cNvPr id="2" name="TextBox 1"/>
-          <p:cNvSpPr txBox="1"/>
-          <p:nvPr/>
-        </p:nvSpPr>
-        <p:spPr>
-          <a:xfrm>
-            <a:off x="502920" y="274320"/>
-            <a:ext cx="11155680" cy="548640"/>
-          </a:xfrm>
-          <a:prstGeom prst="rect">
-            <a:avLst/>
-          </a:prstGeom>
-          <a:noFill/>
-        </p:spPr>
-        <p:txBody>
-          <a:bodyPr wrap="none">
-            <a:spAutoFit/>
-          </a:bodyPr>
-          <a:lstStyle/>
-          <a:p>
-            <a:r>
-              <a:rPr sz="2200" b="1">
-                <a:solidFill>
-                  <a:srgbClr val="01AEFD"/>
-                </a:solidFill>
-              </a:rPr>
-              <a:t>In script.js   -   delete a line</a:t>
-            </a:r>
-          </a:p>
-        </p:txBody>
-      </p:sp>
-      <p:sp>
-        <p:nvSpPr>
-          <p:cNvPr id="3" name="TextBox 2"/>
-          <p:cNvSpPr txBox="1"/>
-          <p:nvPr/>
-        </p:nvSpPr>
-        <p:spPr>
-          <a:xfrm>
-            <a:off x="502920" y="960120"/>
-            <a:ext cx="11155680" cy="4297680"/>
-          </a:xfrm>
-          <a:prstGeom prst="rect">
-            <a:avLst/>
-          </a:prstGeom>
-          <a:noFill/>
-        </p:spPr>
-        <p:txBody>
-          <a:bodyPr wrap="none">
-            <a:spAutoFit/>
-          </a:bodyPr>
-          <a:lstStyle/>
-          <a:p>
-            <a:pPr>
-              <a:spcAft>
-                <a:spcPts val="0"/>
-              </a:spcAft>
-            </a:pPr>
-            <a:r>
-              <a:rPr sz="1300">
-                <a:solidFill>
-                  <a:srgbClr val="6D8C97"/>
-                </a:solidFill>
-                <a:latin typeface="Consolas"/>
-              </a:rPr>
-              <a:t>  29  </a:t>
-            </a:r>
-            <a:r>
-              <a:rPr sz="1300">
-                <a:solidFill>
-                  <a:srgbClr val="6D8C97"/>
-                </a:solidFill>
-                <a:latin typeface="Consolas"/>
-              </a:rPr>
-              <a:t> </a:t>
-            </a:r>
-          </a:p>
-          <a:p>
-            <a:pPr>
-              <a:spcAft>
-                <a:spcPts val="0"/>
-              </a:spcAft>
-            </a:pPr>
-            <a:r>
-              <a:rPr sz="1300">
-                <a:solidFill>
-                  <a:srgbClr val="6D8C97"/>
-                </a:solidFill>
-                <a:latin typeface="Consolas"/>
-              </a:rPr>
-              <a:t>  30  </a:t>
-            </a:r>
-            <a:r>
-              <a:rPr sz="1300">
-                <a:solidFill>
-                  <a:srgbClr val="6D8C97"/>
-                </a:solidFill>
-                <a:latin typeface="Consolas"/>
-              </a:rPr>
-              <a:t>// The smallest useful request: what models does this server have?</a:t>
-            </a:r>
-          </a:p>
-          <a:p>
-            <a:pPr>
-              <a:spcAft>
-                <a:spcPts val="0"/>
-              </a:spcAft>
-            </a:pPr>
-            <a:r>
-              <a:rPr sz="1300">
-                <a:solidFill>
-                  <a:srgbClr val="6D8C97"/>
-                </a:solidFill>
-                <a:latin typeface="Consolas"/>
-              </a:rPr>
-              <a:t>  31  </a:t>
-            </a:r>
-            <a:r>
-              <a:rPr sz="1300">
-                <a:solidFill>
-                  <a:srgbClr val="6D8C97"/>
-                </a:solidFill>
-                <a:latin typeface="Consolas"/>
-              </a:rPr>
-              <a:t>// 'async' means this function does something slow and can be waited for.</a:t>
-            </a:r>
-          </a:p>
-          <a:p>
-            <a:pPr>
-              <a:spcAft>
-                <a:spcPts val="0"/>
-              </a:spcAft>
-            </a:pPr>
-            <a:r>
-              <a:rPr sz="1300">
-                <a:solidFill>
-                  <a:srgbClr val="6D8C97"/>
-                </a:solidFill>
-                <a:latin typeface="Consolas"/>
-              </a:rPr>
-              <a:t>  32  </a:t>
-            </a:r>
-            <a:r>
-              <a:rPr sz="1300">
-                <a:solidFill>
-                  <a:srgbClr val="6D8C97"/>
-                </a:solidFill>
-                <a:latin typeface="Consolas"/>
-              </a:rPr>
-              <a:t>async function listModels() {</a:t>
-            </a:r>
-          </a:p>
-          <a:p>
-            <a:pPr>
-              <a:spcAft>
-                <a:spcPts val="0"/>
-              </a:spcAft>
-            </a:pPr>
-            <a:r>
-              <a:rPr sz="1300">
-                <a:solidFill>
-                  <a:srgbClr val="6D8C97"/>
-                </a:solidFill>
-                <a:latin typeface="Consolas"/>
-              </a:rPr>
-              <a:t>  33  </a:t>
-            </a:r>
-            <a:r>
-              <a:rPr sz="1300">
-                <a:solidFill>
-                  <a:srgbClr val="6D8C97"/>
-                </a:solidFill>
-                <a:latin typeface="Consolas"/>
-              </a:rPr>
-              <a:t>  const res = await fetch(AI_BASE + '/v1/models', {</a:t>
-            </a:r>
-          </a:p>
-          <a:p>
-            <a:pPr>
-              <a:spcAft>
-                <a:spcPts val="0"/>
-              </a:spcAft>
-            </a:pPr>
-            <a:r>
-              <a:rPr sz="1300">
-                <a:solidFill>
-                  <a:srgbClr val="6D8C97"/>
-                </a:solidFill>
-                <a:latin typeface="Consolas"/>
-              </a:rPr>
-              <a:t>  34  </a:t>
-            </a:r>
-            <a:r>
-              <a:rPr sz="1300">
-                <a:solidFill>
-                  <a:srgbClr val="6D8C97"/>
-                </a:solidFill>
-                <a:latin typeface="Consolas"/>
-              </a:rPr>
-              <a:t>    headers: { 'Authorization': 'Bearer ' + API_KEY }</a:t>
-            </a:r>
-          </a:p>
-          <a:p>
-            <a:pPr>
-              <a:spcAft>
-                <a:spcPts val="0"/>
-              </a:spcAft>
-            </a:pPr>
-            <a:r>
-              <a:rPr sz="1300">
-                <a:solidFill>
-                  <a:srgbClr val="6D8C97"/>
-                </a:solidFill>
-                <a:latin typeface="Consolas"/>
-              </a:rPr>
-              <a:t>  35  </a:t>
-            </a:r>
-            <a:r>
-              <a:rPr sz="1300">
-                <a:solidFill>
-                  <a:srgbClr val="6D8C97"/>
-                </a:solidFill>
-                <a:latin typeface="Consolas"/>
-              </a:rPr>
-              <a:t>  });</a:t>
-            </a:r>
-          </a:p>
-          <a:p>
-            <a:pPr>
-              <a:spcAft>
-                <a:spcPts val="0"/>
-              </a:spcAft>
-            </a:pPr>
-            <a:r>
-              <a:rPr sz="1300">
-                <a:solidFill>
-                  <a:srgbClr val="6D8C97"/>
-                </a:solidFill>
-                <a:latin typeface="Consolas"/>
-              </a:rPr>
-              <a:t>  36  </a:t>
-            </a:r>
-            <a:r>
-              <a:rPr sz="1300">
-                <a:solidFill>
-                  <a:srgbClr val="6D8C97"/>
-                </a:solidFill>
-                <a:latin typeface="Consolas"/>
-              </a:rPr>
-              <a:t>  const data = await res.json();   // the answer arrives as text; this reads it</a:t>
-            </a:r>
-          </a:p>
-          <a:p>
-            <a:pPr>
-              <a:spcAft>
-                <a:spcPts val="0"/>
-              </a:spcAft>
-            </a:pPr>
-            <a:r>
-              <a:rPr sz="1300">
-                <a:solidFill>
-                  <a:srgbClr val="6D8C97"/>
-                </a:solidFill>
-                <a:latin typeface="Consolas"/>
-              </a:rPr>
-              <a:t>  37  </a:t>
-            </a:r>
-            <a:r>
-              <a:rPr sz="1300">
-                <a:solidFill>
-                  <a:srgbClr val="6D8C97"/>
-                </a:solidFill>
-                <a:latin typeface="Consolas"/>
-              </a:rPr>
-              <a:t>  console.log('The server offers:', data.data);</a:t>
-            </a:r>
-          </a:p>
-          <a:p>
-            <a:pPr>
-              <a:spcAft>
-                <a:spcPts val="0"/>
-              </a:spcAft>
-            </a:pPr>
-            <a:r>
-              <a:rPr sz="1300">
-                <a:solidFill>
-                  <a:srgbClr val="6D8C97"/>
-                </a:solidFill>
-                <a:latin typeface="Consolas"/>
-              </a:rPr>
-              <a:t>  38  </a:t>
-            </a:r>
-            <a:r>
-              <a:rPr sz="1300">
-                <a:solidFill>
-                  <a:srgbClr val="6D8C97"/>
-                </a:solidFill>
-                <a:latin typeface="Consolas"/>
-              </a:rPr>
-              <a:t>}</a:t>
-            </a:r>
-          </a:p>
-          <a:p>
-            <a:pPr>
-              <a:spcAft>
-                <a:spcPts val="0"/>
-              </a:spcAft>
-            </a:pPr>
-            <a:r>
-              <a:rPr sz="1300">
-                <a:solidFill>
-                  <a:srgbClr val="6D8C97"/>
-                </a:solidFill>
-                <a:latin typeface="Consolas"/>
-              </a:rPr>
-              <a:t>  39  </a:t>
-            </a:r>
-            <a:r>
-              <a:rPr sz="1300" strike="sngStrike">
-                <a:solidFill>
-                  <a:srgbClr val="F3928B"/>
-                </a:solidFill>
-                <a:latin typeface="Consolas"/>
-              </a:rPr>
-              <a:t>listModels();</a:t>
-            </a:r>
-          </a:p>
-        </p:txBody>
-      </p:sp>
-      <p:sp>
-        <p:nvSpPr>
-          <p:cNvPr id="4" name="TextBox 3"/>
-          <p:cNvSpPr txBox="1"/>
-          <p:nvPr/>
-        </p:nvSpPr>
-        <p:spPr>
-          <a:xfrm>
-            <a:off x="548640" y="5623560"/>
-            <a:ext cx="11064240" cy="1051560"/>
-          </a:xfrm>
-          <a:prstGeom prst="rect">
-            <a:avLst/>
-          </a:prstGeom>
-          <a:noFill/>
-        </p:spPr>
-        <p:txBody>
-          <a:bodyPr wrap="square">
-            <a:spAutoFit/>
-          </a:bodyPr>
-          <a:lstStyle/>
-          <a:p>
-            <a:r>
-              <a:rPr sz="2000">
-                <a:solidFill>
-                  <a:srgbClr val="DCECEF"/>
-                </a:solidFill>
-              </a:rPr>
-              <a:t>Delete this line. askAI does the asking now, so the old test call is no longer needed - your file should have no listModels() call left.</a:t>
-            </a:r>
-          </a:p>
-        </p:txBody>
-      </p:sp>
-    </p:spTree>
-  </p:cSld>
-  <p:clrMapOvr>
-    <a:masterClrMapping/>
-  </p:clrMapOvr>
-</p:sld>
-</file>
-
-<file path=ppt/slides/slide52.xml><?xml version="1.0" encoding="utf-8"?>
-<p:sld xmlns:a="http://schemas.openxmlformats.org/drawingml/2006/main" xmlns:p="http://schemas.openxmlformats.org/presentationml/2006/main" xmlns:r="http://schemas.openxmlformats.org/officeDocument/2006/relationships">
-  <p:cSld>
     <p:spTree>
       <p:nvGrpSpPr>
         <p:cNvPr id="1" name=""/>
@@ -16642,7 +16360,7 @@
 </p:sld>
 </file>
 
-<file path=ppt/slides/slide53.xml><?xml version="1.0" encoding="utf-8"?>
+<file path=ppt/slides/slide51.xml><?xml version="1.0" encoding="utf-8"?>
 <p:sld xmlns:a="http://schemas.openxmlformats.org/drawingml/2006/main" xmlns:p="http://schemas.openxmlformats.org/presentationml/2006/main" xmlns:r="http://schemas.openxmlformats.org/officeDocument/2006/relationships">
   <p:cSld>
     <p:spTree>

--- a/ai101/slides/week-04.pptx
+++ b/ai101/slides/week-04.pptx
@@ -13379,7 +13379,7 @@
                 </a:solidFill>
                 <a:latin typeface="Consolas"/>
               </a:rPr>
-              <a:t>  addLine('You', text);</a:t>
+              <a:t>  addLine('you', text);</a:t>
             </a:r>
           </a:p>
           <a:p>
@@ -13404,7 +13404,7 @@
                 </a:solidFill>
                 <a:latin typeface="Consolas"/>
               </a:rPr>
-              <a:t>  addLine('Companion', 'You said: ' + text);   // a pretend answer, for now</a:t>
+              <a:t>  addLine('bot', 'You said: ' + text);   // a pretend answer, for now</a:t>
             </a:r>
           </a:p>
         </p:txBody>
@@ -13719,7 +13719,7 @@
                 </a:solidFill>
                 <a:latin typeface="Consolas"/>
               </a:rPr>
-              <a:t>  addLine('You', text);</a:t>
+              <a:t>  addLine('you', text);</a:t>
             </a:r>
           </a:p>
           <a:p>
@@ -13744,7 +13744,7 @@
                 </a:solidFill>
                 <a:latin typeface="Consolas"/>
               </a:rPr>
-              <a:t>  addLine('Companion', 'thinking...');</a:t>
+              <a:t>  addLine('bot', 'thinking...');</a:t>
             </a:r>
           </a:p>
         </p:txBody>
@@ -14059,7 +14059,7 @@
                 </a:solidFill>
                 <a:latin typeface="Consolas"/>
               </a:rPr>
-              <a:t>  addLine('You', text);</a:t>
+              <a:t>  addLine('you', text);</a:t>
             </a:r>
           </a:p>
           <a:p>
@@ -14084,7 +14084,7 @@
                 </a:solidFill>
                 <a:latin typeface="Consolas"/>
               </a:rPr>
-              <a:t>  addLine('Companion', 'thinking...');</a:t>
+              <a:t>  addLine('bot', 'thinking...');</a:t>
             </a:r>
           </a:p>
           <a:p>
@@ -14684,7 +14684,7 @@
                 </a:solidFill>
                 <a:latin typeface="Consolas"/>
               </a:rPr>
-              <a:t>  addLine('You', text);</a:t>
+              <a:t>  addLine('you', text);</a:t>
             </a:r>
           </a:p>
           <a:p>
@@ -14709,7 +14709,7 @@
                 </a:solidFill>
                 <a:latin typeface="Consolas"/>
               </a:rPr>
-              <a:t>  addLine('Companion', 'thinking...');</a:t>
+              <a:t>  addLine('bot', 'thinking...');</a:t>
             </a:r>
           </a:p>
           <a:p>
@@ -15074,7 +15074,7 @@
                 </a:solidFill>
                 <a:latin typeface="Consolas"/>
               </a:rPr>
-              <a:t>  addLine('You', text);</a:t>
+              <a:t>  addLine('you', text);</a:t>
             </a:r>
           </a:p>
           <a:p>
@@ -15099,7 +15099,7 @@
                 </a:solidFill>
                 <a:latin typeface="Consolas"/>
               </a:rPr>
-              <a:t>  addLine('Companion', 'thinking...');</a:t>
+              <a:t>  addLine('bot', 'thinking...');</a:t>
             </a:r>
           </a:p>
           <a:p>
@@ -15174,7 +15174,7 @@
                 </a:solidFill>
                 <a:latin typeface="Consolas"/>
               </a:rPr>
-              <a:t>  addLine('Companion', reply);</a:t>
+              <a:t>  addLine('bot', reply);</a:t>
             </a:r>
           </a:p>
         </p:txBody>
@@ -15489,7 +15489,7 @@
                 </a:solidFill>
                 <a:latin typeface="Consolas"/>
               </a:rPr>
-              <a:t>  addLine('You', text);</a:t>
+              <a:t>  addLine('you', text);</a:t>
             </a:r>
           </a:p>
           <a:p>
@@ -15514,7 +15514,7 @@
                 </a:solidFill>
                 <a:latin typeface="Consolas"/>
               </a:rPr>
-              <a:t>  addLine('Companion', 'thinking...');</a:t>
+              <a:t>  addLine('bot', 'thinking...');</a:t>
             </a:r>
           </a:p>
           <a:p>
@@ -15589,7 +15589,7 @@
                 </a:solidFill>
                 <a:latin typeface="Consolas"/>
               </a:rPr>
-              <a:t>  addLine('Companion', reply);</a:t>
+              <a:t>  addLine('bot', reply);</a:t>
             </a:r>
           </a:p>
           <a:p>
